--- a/downloads/presentations/modules/gov-100.pptx
+++ b/downloads/presentations/modules/gov-100.pptx
@@ -4353,13 +4353,11 @@
             </a:avLst>
           </a:prstGeom>
           <a:solidFill>
-            <a:srgbClr val="FFFFFF">
-              <a:alpha val="88000"/>
-            </a:srgbClr>
+            <a:srgbClr val="FFFFFF"/>
           </a:solidFill>
           <a:ln w="12700">
             <a:solidFill>
-              <a:srgbClr val="D6E8F2"/>
+              <a:srgbClr val="B9D7E6"/>
             </a:solidFill>
             <a:prstDash val="solid"/>
           </a:ln>
@@ -4367,190 +4365,112 @@
       </p:sp>
       <p:sp>
         <p:nvSpPr>
-          <p:cNvPr id="14" name="Shape 12"/>
-          <p:cNvSpPr/>
-          <p:nvPr/>
-        </p:nvSpPr>
-        <p:spPr>
-          <a:xfrm>
-            <a:off x="7891272" y="3108960"/>
-            <a:ext cx="566928" cy="566928"/>
-          </a:xfrm>
-          <a:prstGeom prst="ellipse">
-            <a:avLst/>
-          </a:prstGeom>
-          <a:solidFill>
-            <a:srgbClr val="0068B7"/>
-          </a:solidFill>
-          <a:ln w="12700">
-            <a:solidFill>
-              <a:srgbClr val="0068B7"/>
-            </a:solidFill>
-            <a:prstDash val="solid"/>
-          </a:ln>
-        </p:spPr>
-      </p:sp>
-      <p:sp>
-        <p:nvSpPr>
-          <p:cNvPr id="15" name="Shape 13"/>
-          <p:cNvSpPr/>
-          <p:nvPr/>
-        </p:nvSpPr>
-        <p:spPr>
-          <a:xfrm>
-            <a:off x="10287000" y="3108960"/>
-            <a:ext cx="566928" cy="566928"/>
-          </a:xfrm>
-          <a:prstGeom prst="ellipse">
-            <a:avLst/>
-          </a:prstGeom>
-          <a:solidFill>
-            <a:srgbClr val="2F8A28"/>
-          </a:solidFill>
-          <a:ln w="12700">
-            <a:solidFill>
-              <a:srgbClr val="2F8A28"/>
-            </a:solidFill>
-            <a:prstDash val="solid"/>
-          </a:ln>
-        </p:spPr>
+          <p:cNvPr id="14" name="Text 12"/>
+          <p:cNvSpPr/>
+          <p:nvPr/>
+        </p:nvSpPr>
+        <p:spPr>
+          <a:xfrm>
+            <a:off x="7799832" y="2935224"/>
+            <a:ext cx="3145536" cy="256032"/>
+          </a:xfrm>
+          <a:prstGeom prst="rect">
+            <a:avLst/>
+          </a:prstGeom>
+          <a:noFill/>
+          <a:ln/>
+        </p:spPr>
+        <p:txBody>
+          <a:bodyPr wrap="square" lIns="0" tIns="0" rIns="0" bIns="0" rtlCol="0" anchor="ctr"/>
+          <a:lstStyle/>
+          <a:p>
+            <a:pPr indent="0" marL="0">
+              <a:buNone/>
+            </a:pPr>
+            <a:r>
+              <a:rPr lang="en-US" sz="1300" b="1" dirty="0">
+                <a:solidFill>
+                  <a:srgbClr val="0068B7"/>
+                </a:solidFill>
+                <a:latin typeface="Aptos" pitchFamily="34" charset="0"/>
+                <a:ea typeface="Aptos" pitchFamily="34" charset="-122"/>
+                <a:cs typeface="Aptos" pitchFamily="34" charset="-120"/>
+              </a:rPr>
+              <a:t>Concept checkpoints</a:t>
+            </a:r>
+            <a:endParaRPr lang="en-US" sz="1300" dirty="0"/>
+          </a:p>
+        </p:txBody>
+      </p:sp>
+      <p:sp>
+        <p:nvSpPr>
+          <p:cNvPr id="15" name="Text 13"/>
+          <p:cNvSpPr/>
+          <p:nvPr/>
+        </p:nvSpPr>
+        <p:spPr>
+          <a:xfrm>
+            <a:off x="7818120" y="3300984"/>
+            <a:ext cx="3090672" cy="877824"/>
+          </a:xfrm>
+          <a:prstGeom prst="rect">
+            <a:avLst/>
+          </a:prstGeom>
+          <a:noFill/>
+          <a:ln/>
+        </p:spPr>
+        <p:txBody>
+          <a:bodyPr wrap="square" lIns="254" tIns="254" rIns="254" bIns="254" rtlCol="0" anchor="t">
+            <a:normAutofit/>
+          </a:bodyPr>
+          <a:lstStyle/>
+          <a:p>
+            <a:r>
+              <a:rPr lang="en-US" sz="1380" dirty="0">
+                <a:solidFill>
+                  <a:srgbClr val="17364A"/>
+                </a:solidFill>
+                <a:latin typeface="Aptos" pitchFamily="34" charset="0"/>
+                <a:ea typeface="Aptos" pitchFamily="34" charset="-122"/>
+                <a:cs typeface="Aptos" pitchFamily="34" charset="-120"/>
+              </a:rPr>
+              <a:t>It is not legal advice and does not replace review by agency legal counsel, privacy.</a:t>
+            </a:r>
+            <a:endParaRPr lang="en-US" sz="1380" dirty="0"/>
+          </a:p>
+          <a:p>
+            <a:r>
+              <a:rPr lang="en-US" sz="1380" dirty="0">
+                <a:solidFill>
+                  <a:srgbClr val="17364A"/>
+                </a:solidFill>
+                <a:latin typeface="Aptos" pitchFamily="34" charset="0"/>
+                <a:ea typeface="Aptos" pitchFamily="34" charset="-122"/>
+                <a:cs typeface="Aptos" pitchFamily="34" charset="-120"/>
+              </a:rPr>
+              <a:t>Requirements may vary by state, locality, territory, Tribe, agency, funding source,.</a:t>
+            </a:r>
+            <a:endParaRPr lang="en-US" sz="1380" dirty="0"/>
+          </a:p>
+          <a:p>
+            <a:r>
+              <a:rPr lang="en-US" sz="1380" dirty="0">
+                <a:solidFill>
+                  <a:srgbClr val="17364A"/>
+                </a:solidFill>
+                <a:latin typeface="Aptos" pitchFamily="34" charset="0"/>
+                <a:ea typeface="Aptos" pitchFamily="34" charset="-122"/>
+                <a:cs typeface="Aptos" pitchFamily="34" charset="-120"/>
+              </a:rPr>
+              <a:t>Learners should use this module to identify the issues that require review and should.</a:t>
+            </a:r>
+            <a:endParaRPr lang="en-US" sz="1380" dirty="0"/>
+          </a:p>
+        </p:txBody>
       </p:sp>
       <p:sp>
         <p:nvSpPr>
           <p:cNvPr id="16" name="Shape 14"/>
-          <p:cNvSpPr/>
-          <p:nvPr/>
-        </p:nvSpPr>
-        <p:spPr>
-          <a:xfrm>
-            <a:off x="9089136" y="3456432"/>
-            <a:ext cx="566928" cy="566928"/>
-          </a:xfrm>
-          <a:prstGeom prst="ellipse">
-            <a:avLst/>
-          </a:prstGeom>
-          <a:solidFill>
-            <a:srgbClr val="6A4CA3"/>
-          </a:solidFill>
-          <a:ln w="12700">
-            <a:solidFill>
-              <a:srgbClr val="6A4CA3"/>
-            </a:solidFill>
-            <a:prstDash val="solid"/>
-          </a:ln>
-        </p:spPr>
-      </p:sp>
-      <p:sp>
-        <p:nvSpPr>
-          <p:cNvPr id="17" name="Shape 15"/>
-          <p:cNvSpPr/>
-          <p:nvPr/>
-        </p:nvSpPr>
-        <p:spPr>
-          <a:xfrm>
-            <a:off x="8385048" y="3419856"/>
-            <a:ext cx="1975104" cy="0"/>
-          </a:xfrm>
-          <a:prstGeom prst="line">
-            <a:avLst/>
-          </a:prstGeom>
-          <a:noFill/>
-          <a:ln w="25400">
-            <a:solidFill>
-              <a:srgbClr val="8ABBD8"/>
-            </a:solidFill>
-            <a:prstDash val="solid"/>
-          </a:ln>
-        </p:spPr>
-      </p:sp>
-      <p:sp>
-        <p:nvSpPr>
-          <p:cNvPr id="18" name="Shape 16"/>
-          <p:cNvSpPr/>
-          <p:nvPr/>
-        </p:nvSpPr>
-        <p:spPr>
-          <a:xfrm>
-            <a:off x="8202168" y="3630168"/>
-            <a:ext cx="1170432" cy="118872"/>
-          </a:xfrm>
-          <a:prstGeom prst="line">
-            <a:avLst/>
-          </a:prstGeom>
-          <a:noFill/>
-          <a:ln w="25400">
-            <a:solidFill>
-              <a:srgbClr val="8ABBD8"/>
-            </a:solidFill>
-            <a:prstDash val="solid"/>
-          </a:ln>
-        </p:spPr>
-      </p:sp>
-      <p:sp>
-        <p:nvSpPr>
-          <p:cNvPr id="19" name="Shape 17"/>
-          <p:cNvSpPr/>
-          <p:nvPr/>
-        </p:nvSpPr>
-        <p:spPr>
-          <a:xfrm>
-            <a:off x="10543032" y="3630168"/>
-            <a:ext cx="-1170432" cy="118872"/>
-          </a:xfrm>
-          <a:prstGeom prst="line">
-            <a:avLst/>
-          </a:prstGeom>
-          <a:noFill/>
-          <a:ln w="25400">
-            <a:solidFill>
-              <a:srgbClr val="8ABBD8"/>
-            </a:solidFill>
-            <a:prstDash val="solid"/>
-          </a:ln>
-        </p:spPr>
-      </p:sp>
-      <p:sp>
-        <p:nvSpPr>
-          <p:cNvPr id="20" name="Text 18"/>
-          <p:cNvSpPr/>
-          <p:nvPr/>
-        </p:nvSpPr>
-        <p:spPr>
-          <a:xfrm>
-            <a:off x="7863840" y="4069080"/>
-            <a:ext cx="3017520" cy="164592"/>
-          </a:xfrm>
-          <a:prstGeom prst="rect">
-            <a:avLst/>
-          </a:prstGeom>
-          <a:noFill/>
-          <a:ln/>
-        </p:spPr>
-        <p:txBody>
-          <a:bodyPr wrap="square" lIns="0" tIns="0" rIns="0" bIns="0" rtlCol="0" anchor="ctr"/>
-          <a:lstStyle/>
-          <a:p>
-            <a:pPr algn="ctr" indent="0" marL="0">
-              <a:buNone/>
-            </a:pPr>
-            <a:r>
-              <a:rPr lang="en-US" sz="900" b="1" dirty="0">
-                <a:solidFill>
-                  <a:srgbClr val="003A63"/>
-                </a:solidFill>
-                <a:latin typeface="Aptos" pitchFamily="34" charset="0"/>
-                <a:ea typeface="Aptos" pitchFamily="34" charset="-122"/>
-                <a:cs typeface="Aptos" pitchFamily="34" charset="-120"/>
-              </a:rPr>
-              <a:t>Decision rights</a:t>
-            </a:r>
-            <a:endParaRPr lang="en-US" sz="900" dirty="0"/>
-          </a:p>
-        </p:txBody>
-      </p:sp>
-      <p:sp>
-        <p:nvSpPr>
-          <p:cNvPr id="21" name="Shape 19"/>
           <p:cNvSpPr/>
           <p:nvPr/>
         </p:nvSpPr>
@@ -4577,7 +4497,7 @@
       </p:sp>
       <p:sp>
         <p:nvSpPr>
-          <p:cNvPr id="22" name="Text 20"/>
+          <p:cNvPr id="17" name="Text 15"/>
           <p:cNvSpPr/>
           <p:nvPr/>
         </p:nvSpPr>
@@ -4616,7 +4536,7 @@
       </p:sp>
       <p:sp>
         <p:nvSpPr>
-          <p:cNvPr id="23" name="Text 21"/>
+          <p:cNvPr id="18" name="Text 16"/>
           <p:cNvSpPr/>
           <p:nvPr/>
         </p:nvSpPr>
@@ -5124,13 +5044,11 @@
             </a:avLst>
           </a:prstGeom>
           <a:solidFill>
-            <a:srgbClr val="FFFFFF">
-              <a:alpha val="88000"/>
-            </a:srgbClr>
+            <a:srgbClr val="FFFFFF"/>
           </a:solidFill>
           <a:ln w="12700">
             <a:solidFill>
-              <a:srgbClr val="D6E8F2"/>
+              <a:srgbClr val="B9D7E6"/>
             </a:solidFill>
             <a:prstDash val="solid"/>
           </a:ln>
@@ -5138,190 +5056,112 @@
       </p:sp>
       <p:sp>
         <p:nvSpPr>
-          <p:cNvPr id="14" name="Shape 12"/>
-          <p:cNvSpPr/>
-          <p:nvPr/>
-        </p:nvSpPr>
-        <p:spPr>
-          <a:xfrm>
-            <a:off x="7891272" y="3108960"/>
-            <a:ext cx="566928" cy="566928"/>
-          </a:xfrm>
-          <a:prstGeom prst="ellipse">
-            <a:avLst/>
-          </a:prstGeom>
-          <a:solidFill>
-            <a:srgbClr val="0068B7"/>
-          </a:solidFill>
-          <a:ln w="12700">
-            <a:solidFill>
-              <a:srgbClr val="0068B7"/>
-            </a:solidFill>
-            <a:prstDash val="solid"/>
-          </a:ln>
-        </p:spPr>
-      </p:sp>
-      <p:sp>
-        <p:nvSpPr>
-          <p:cNvPr id="15" name="Shape 13"/>
-          <p:cNvSpPr/>
-          <p:nvPr/>
-        </p:nvSpPr>
-        <p:spPr>
-          <a:xfrm>
-            <a:off x="10287000" y="3108960"/>
-            <a:ext cx="566928" cy="566928"/>
-          </a:xfrm>
-          <a:prstGeom prst="ellipse">
-            <a:avLst/>
-          </a:prstGeom>
-          <a:solidFill>
-            <a:srgbClr val="2F8A28"/>
-          </a:solidFill>
-          <a:ln w="12700">
-            <a:solidFill>
-              <a:srgbClr val="2F8A28"/>
-            </a:solidFill>
-            <a:prstDash val="solid"/>
-          </a:ln>
-        </p:spPr>
+          <p:cNvPr id="14" name="Text 12"/>
+          <p:cNvSpPr/>
+          <p:nvPr/>
+        </p:nvSpPr>
+        <p:spPr>
+          <a:xfrm>
+            <a:off x="7799832" y="2935224"/>
+            <a:ext cx="3145536" cy="256032"/>
+          </a:xfrm>
+          <a:prstGeom prst="rect">
+            <a:avLst/>
+          </a:prstGeom>
+          <a:noFill/>
+          <a:ln/>
+        </p:spPr>
+        <p:txBody>
+          <a:bodyPr wrap="square" lIns="0" tIns="0" rIns="0" bIns="0" rtlCol="0" anchor="ctr"/>
+          <a:lstStyle/>
+          <a:p>
+            <a:pPr indent="0" marL="0">
+              <a:buNone/>
+            </a:pPr>
+            <a:r>
+              <a:rPr lang="en-US" sz="1300" b="1" dirty="0">
+                <a:solidFill>
+                  <a:srgbClr val="0068B7"/>
+                </a:solidFill>
+                <a:latin typeface="Aptos" pitchFamily="34" charset="0"/>
+                <a:ea typeface="Aptos" pitchFamily="34" charset="-122"/>
+                <a:cs typeface="Aptos" pitchFamily="34" charset="-120"/>
+              </a:rPr>
+              <a:t>Concept checkpoints</a:t>
+            </a:r>
+            <a:endParaRPr lang="en-US" sz="1300" dirty="0"/>
+          </a:p>
+        </p:txBody>
+      </p:sp>
+      <p:sp>
+        <p:nvSpPr>
+          <p:cNvPr id="15" name="Text 13"/>
+          <p:cNvSpPr/>
+          <p:nvPr/>
+        </p:nvSpPr>
+        <p:spPr>
+          <a:xfrm>
+            <a:off x="7818120" y="3300984"/>
+            <a:ext cx="3090672" cy="877824"/>
+          </a:xfrm>
+          <a:prstGeom prst="rect">
+            <a:avLst/>
+          </a:prstGeom>
+          <a:noFill/>
+          <a:ln/>
+        </p:spPr>
+        <p:txBody>
+          <a:bodyPr wrap="square" lIns="254" tIns="254" rIns="254" bIns="254" rtlCol="0" anchor="t">
+            <a:normAutofit/>
+          </a:bodyPr>
+          <a:lstStyle/>
+          <a:p>
+            <a:r>
+              <a:rPr lang="en-US" sz="1380" dirty="0">
+                <a:solidFill>
+                  <a:srgbClr val="17364A"/>
+                </a:solidFill>
+                <a:latin typeface="Aptos" pitchFamily="34" charset="0"/>
+                <a:ea typeface="Aptos" pitchFamily="34" charset="-122"/>
+                <a:cs typeface="Aptos" pitchFamily="34" charset="-120"/>
+              </a:rPr>
+              <a:t>Public health agencies make decisions that affect people, communities, partners, regulated.</a:t>
+            </a:r>
+            <a:endParaRPr lang="en-US" sz="1380" dirty="0"/>
+          </a:p>
+          <a:p>
+            <a:r>
+              <a:rPr lang="en-US" sz="1380" dirty="0">
+                <a:solidFill>
+                  <a:srgbClr val="17364A"/>
+                </a:solidFill>
+                <a:latin typeface="Aptos" pitchFamily="34" charset="0"/>
+                <a:ea typeface="Aptos" pitchFamily="34" charset="-122"/>
+                <a:cs typeface="Aptos" pitchFamily="34" charset="-120"/>
+              </a:rPr>
+              <a:t>An AI tool may produce a convincing but incorrect summary, expose protected or sensitive.</a:t>
+            </a:r>
+            <a:endParaRPr lang="en-US" sz="1380" dirty="0"/>
+          </a:p>
+          <a:p>
+            <a:r>
+              <a:rPr lang="en-US" sz="1380" dirty="0">
+                <a:solidFill>
+                  <a:srgbClr val="17364A"/>
+                </a:solidFill>
+                <a:latin typeface="Aptos" pitchFamily="34" charset="0"/>
+                <a:ea typeface="Aptos" pitchFamily="34" charset="-122"/>
+                <a:cs typeface="Aptos" pitchFamily="34" charset="-120"/>
+              </a:rPr>
+              <a:t>Governance creates a way to identify these risks before they become routine practice.</a:t>
+            </a:r>
+            <a:endParaRPr lang="en-US" sz="1380" dirty="0"/>
+          </a:p>
+        </p:txBody>
       </p:sp>
       <p:sp>
         <p:nvSpPr>
           <p:cNvPr id="16" name="Shape 14"/>
-          <p:cNvSpPr/>
-          <p:nvPr/>
-        </p:nvSpPr>
-        <p:spPr>
-          <a:xfrm>
-            <a:off x="9089136" y="3456432"/>
-            <a:ext cx="566928" cy="566928"/>
-          </a:xfrm>
-          <a:prstGeom prst="ellipse">
-            <a:avLst/>
-          </a:prstGeom>
-          <a:solidFill>
-            <a:srgbClr val="6A4CA3"/>
-          </a:solidFill>
-          <a:ln w="12700">
-            <a:solidFill>
-              <a:srgbClr val="6A4CA3"/>
-            </a:solidFill>
-            <a:prstDash val="solid"/>
-          </a:ln>
-        </p:spPr>
-      </p:sp>
-      <p:sp>
-        <p:nvSpPr>
-          <p:cNvPr id="17" name="Shape 15"/>
-          <p:cNvSpPr/>
-          <p:nvPr/>
-        </p:nvSpPr>
-        <p:spPr>
-          <a:xfrm>
-            <a:off x="8385048" y="3419856"/>
-            <a:ext cx="1975104" cy="0"/>
-          </a:xfrm>
-          <a:prstGeom prst="line">
-            <a:avLst/>
-          </a:prstGeom>
-          <a:noFill/>
-          <a:ln w="25400">
-            <a:solidFill>
-              <a:srgbClr val="8ABBD8"/>
-            </a:solidFill>
-            <a:prstDash val="solid"/>
-          </a:ln>
-        </p:spPr>
-      </p:sp>
-      <p:sp>
-        <p:nvSpPr>
-          <p:cNvPr id="18" name="Shape 16"/>
-          <p:cNvSpPr/>
-          <p:nvPr/>
-        </p:nvSpPr>
-        <p:spPr>
-          <a:xfrm>
-            <a:off x="8202168" y="3630168"/>
-            <a:ext cx="1170432" cy="118872"/>
-          </a:xfrm>
-          <a:prstGeom prst="line">
-            <a:avLst/>
-          </a:prstGeom>
-          <a:noFill/>
-          <a:ln w="25400">
-            <a:solidFill>
-              <a:srgbClr val="8ABBD8"/>
-            </a:solidFill>
-            <a:prstDash val="solid"/>
-          </a:ln>
-        </p:spPr>
-      </p:sp>
-      <p:sp>
-        <p:nvSpPr>
-          <p:cNvPr id="19" name="Shape 17"/>
-          <p:cNvSpPr/>
-          <p:nvPr/>
-        </p:nvSpPr>
-        <p:spPr>
-          <a:xfrm>
-            <a:off x="10543032" y="3630168"/>
-            <a:ext cx="-1170432" cy="118872"/>
-          </a:xfrm>
-          <a:prstGeom prst="line">
-            <a:avLst/>
-          </a:prstGeom>
-          <a:noFill/>
-          <a:ln w="25400">
-            <a:solidFill>
-              <a:srgbClr val="8ABBD8"/>
-            </a:solidFill>
-            <a:prstDash val="solid"/>
-          </a:ln>
-        </p:spPr>
-      </p:sp>
-      <p:sp>
-        <p:nvSpPr>
-          <p:cNvPr id="20" name="Text 18"/>
-          <p:cNvSpPr/>
-          <p:nvPr/>
-        </p:nvSpPr>
-        <p:spPr>
-          <a:xfrm>
-            <a:off x="7863840" y="4069080"/>
-            <a:ext cx="3017520" cy="164592"/>
-          </a:xfrm>
-          <a:prstGeom prst="rect">
-            <a:avLst/>
-          </a:prstGeom>
-          <a:noFill/>
-          <a:ln/>
-        </p:spPr>
-        <p:txBody>
-          <a:bodyPr wrap="square" lIns="0" tIns="0" rIns="0" bIns="0" rtlCol="0" anchor="ctr"/>
-          <a:lstStyle/>
-          <a:p>
-            <a:pPr algn="ctr" indent="0" marL="0">
-              <a:buNone/>
-            </a:pPr>
-            <a:r>
-              <a:rPr lang="en-US" sz="900" b="1" dirty="0">
-                <a:solidFill>
-                  <a:srgbClr val="003A63"/>
-                </a:solidFill>
-                <a:latin typeface="Aptos" pitchFamily="34" charset="0"/>
-                <a:ea typeface="Aptos" pitchFamily="34" charset="-122"/>
-                <a:cs typeface="Aptos" pitchFamily="34" charset="-120"/>
-              </a:rPr>
-              <a:t>Decision rights</a:t>
-            </a:r>
-            <a:endParaRPr lang="en-US" sz="900" dirty="0"/>
-          </a:p>
-        </p:txBody>
-      </p:sp>
-      <p:sp>
-        <p:nvSpPr>
-          <p:cNvPr id="21" name="Shape 19"/>
           <p:cNvSpPr/>
           <p:nvPr/>
         </p:nvSpPr>
@@ -5348,7 +5188,7 @@
       </p:sp>
       <p:sp>
         <p:nvSpPr>
-          <p:cNvPr id="22" name="Text 20"/>
+          <p:cNvPr id="17" name="Text 15"/>
           <p:cNvSpPr/>
           <p:nvPr/>
         </p:nvSpPr>
@@ -5387,7 +5227,7 @@
       </p:sp>
       <p:sp>
         <p:nvSpPr>
-          <p:cNvPr id="23" name="Text 21"/>
+          <p:cNvPr id="18" name="Text 16"/>
           <p:cNvSpPr/>
           <p:nvPr/>
         </p:nvSpPr>
@@ -5895,13 +5735,11 @@
             </a:avLst>
           </a:prstGeom>
           <a:solidFill>
-            <a:srgbClr val="FFFFFF">
-              <a:alpha val="88000"/>
-            </a:srgbClr>
+            <a:srgbClr val="FFFFFF"/>
           </a:solidFill>
           <a:ln w="12700">
             <a:solidFill>
-              <a:srgbClr val="D6E8F2"/>
+              <a:srgbClr val="B9D7E6"/>
             </a:solidFill>
             <a:prstDash val="solid"/>
           </a:ln>
@@ -5909,190 +5747,112 @@
       </p:sp>
       <p:sp>
         <p:nvSpPr>
-          <p:cNvPr id="14" name="Shape 12"/>
-          <p:cNvSpPr/>
-          <p:nvPr/>
-        </p:nvSpPr>
-        <p:spPr>
-          <a:xfrm>
-            <a:off x="7891272" y="3108960"/>
-            <a:ext cx="566928" cy="566928"/>
-          </a:xfrm>
-          <a:prstGeom prst="ellipse">
-            <a:avLst/>
-          </a:prstGeom>
-          <a:solidFill>
-            <a:srgbClr val="0068B7"/>
-          </a:solidFill>
-          <a:ln w="12700">
-            <a:solidFill>
-              <a:srgbClr val="0068B7"/>
-            </a:solidFill>
-            <a:prstDash val="solid"/>
-          </a:ln>
-        </p:spPr>
-      </p:sp>
-      <p:sp>
-        <p:nvSpPr>
-          <p:cNvPr id="15" name="Shape 13"/>
-          <p:cNvSpPr/>
-          <p:nvPr/>
-        </p:nvSpPr>
-        <p:spPr>
-          <a:xfrm>
-            <a:off x="10287000" y="3108960"/>
-            <a:ext cx="566928" cy="566928"/>
-          </a:xfrm>
-          <a:prstGeom prst="ellipse">
-            <a:avLst/>
-          </a:prstGeom>
-          <a:solidFill>
-            <a:srgbClr val="2F8A28"/>
-          </a:solidFill>
-          <a:ln w="12700">
-            <a:solidFill>
-              <a:srgbClr val="2F8A28"/>
-            </a:solidFill>
-            <a:prstDash val="solid"/>
-          </a:ln>
-        </p:spPr>
+          <p:cNvPr id="14" name="Text 12"/>
+          <p:cNvSpPr/>
+          <p:nvPr/>
+        </p:nvSpPr>
+        <p:spPr>
+          <a:xfrm>
+            <a:off x="7799832" y="2935224"/>
+            <a:ext cx="3145536" cy="256032"/>
+          </a:xfrm>
+          <a:prstGeom prst="rect">
+            <a:avLst/>
+          </a:prstGeom>
+          <a:noFill/>
+          <a:ln/>
+        </p:spPr>
+        <p:txBody>
+          <a:bodyPr wrap="square" lIns="0" tIns="0" rIns="0" bIns="0" rtlCol="0" anchor="ctr"/>
+          <a:lstStyle/>
+          <a:p>
+            <a:pPr indent="0" marL="0">
+              <a:buNone/>
+            </a:pPr>
+            <a:r>
+              <a:rPr lang="en-US" sz="1300" b="1" dirty="0">
+                <a:solidFill>
+                  <a:srgbClr val="0068B7"/>
+                </a:solidFill>
+                <a:latin typeface="Aptos" pitchFamily="34" charset="0"/>
+                <a:ea typeface="Aptos" pitchFamily="34" charset="-122"/>
+                <a:cs typeface="Aptos" pitchFamily="34" charset="-120"/>
+              </a:rPr>
+              <a:t>Concept checkpoints</a:t>
+            </a:r>
+            <a:endParaRPr lang="en-US" sz="1300" dirty="0"/>
+          </a:p>
+        </p:txBody>
+      </p:sp>
+      <p:sp>
+        <p:nvSpPr>
+          <p:cNvPr id="15" name="Text 13"/>
+          <p:cNvSpPr/>
+          <p:nvPr/>
+        </p:nvSpPr>
+        <p:spPr>
+          <a:xfrm>
+            <a:off x="7818120" y="3300984"/>
+            <a:ext cx="3090672" cy="877824"/>
+          </a:xfrm>
+          <a:prstGeom prst="rect">
+            <a:avLst/>
+          </a:prstGeom>
+          <a:noFill/>
+          <a:ln/>
+        </p:spPr>
+        <p:txBody>
+          <a:bodyPr wrap="square" lIns="254" tIns="254" rIns="254" bIns="254" rtlCol="0" anchor="t">
+            <a:normAutofit/>
+          </a:bodyPr>
+          <a:lstStyle/>
+          <a:p>
+            <a:r>
+              <a:rPr lang="en-US" sz="1380" dirty="0">
+                <a:solidFill>
+                  <a:srgbClr val="17364A"/>
+                </a:solidFill>
+                <a:latin typeface="Aptos" pitchFamily="34" charset="0"/>
+                <a:ea typeface="Aptos" pitchFamily="34" charset="-122"/>
+                <a:cs typeface="Aptos" pitchFamily="34" charset="-120"/>
+              </a:rPr>
+              <a:t>For public health, governance must connect technology decisions to mission and authority.</a:t>
+            </a:r>
+            <a:endParaRPr lang="en-US" sz="1380" dirty="0"/>
+          </a:p>
+          <a:p>
+            <a:r>
+              <a:rPr lang="en-US" sz="1380" dirty="0">
+                <a:solidFill>
+                  <a:srgbClr val="17364A"/>
+                </a:solidFill>
+                <a:latin typeface="Aptos" pitchFamily="34" charset="0"/>
+                <a:ea typeface="Aptos" pitchFamily="34" charset="-122"/>
+                <a:cs typeface="Aptos" pitchFamily="34" charset="-120"/>
+              </a:rPr>
+              <a:t>A technically impressive tool is not enough.</a:t>
+            </a:r>
+            <a:endParaRPr lang="en-US" sz="1380" dirty="0"/>
+          </a:p>
+          <a:p>
+            <a:r>
+              <a:rPr lang="en-US" sz="1380" dirty="0">
+                <a:solidFill>
+                  <a:srgbClr val="17364A"/>
+                </a:solidFill>
+                <a:latin typeface="Aptos" pitchFamily="34" charset="0"/>
+                <a:ea typeface="Aptos" pitchFamily="34" charset="-122"/>
+                <a:cs typeface="Aptos" pitchFamily="34" charset="-120"/>
+              </a:rPr>
+              <a:t>The agency must ask whether the tool serves a legitimate public health purpose, uses.</a:t>
+            </a:r>
+            <a:endParaRPr lang="en-US" sz="1380" dirty="0"/>
+          </a:p>
+        </p:txBody>
       </p:sp>
       <p:sp>
         <p:nvSpPr>
           <p:cNvPr id="16" name="Shape 14"/>
-          <p:cNvSpPr/>
-          <p:nvPr/>
-        </p:nvSpPr>
-        <p:spPr>
-          <a:xfrm>
-            <a:off x="9089136" y="3456432"/>
-            <a:ext cx="566928" cy="566928"/>
-          </a:xfrm>
-          <a:prstGeom prst="ellipse">
-            <a:avLst/>
-          </a:prstGeom>
-          <a:solidFill>
-            <a:srgbClr val="6A4CA3"/>
-          </a:solidFill>
-          <a:ln w="12700">
-            <a:solidFill>
-              <a:srgbClr val="6A4CA3"/>
-            </a:solidFill>
-            <a:prstDash val="solid"/>
-          </a:ln>
-        </p:spPr>
-      </p:sp>
-      <p:sp>
-        <p:nvSpPr>
-          <p:cNvPr id="17" name="Shape 15"/>
-          <p:cNvSpPr/>
-          <p:nvPr/>
-        </p:nvSpPr>
-        <p:spPr>
-          <a:xfrm>
-            <a:off x="8385048" y="3419856"/>
-            <a:ext cx="1975104" cy="0"/>
-          </a:xfrm>
-          <a:prstGeom prst="line">
-            <a:avLst/>
-          </a:prstGeom>
-          <a:noFill/>
-          <a:ln w="25400">
-            <a:solidFill>
-              <a:srgbClr val="8ABBD8"/>
-            </a:solidFill>
-            <a:prstDash val="solid"/>
-          </a:ln>
-        </p:spPr>
-      </p:sp>
-      <p:sp>
-        <p:nvSpPr>
-          <p:cNvPr id="18" name="Shape 16"/>
-          <p:cNvSpPr/>
-          <p:nvPr/>
-        </p:nvSpPr>
-        <p:spPr>
-          <a:xfrm>
-            <a:off x="8202168" y="3630168"/>
-            <a:ext cx="1170432" cy="118872"/>
-          </a:xfrm>
-          <a:prstGeom prst="line">
-            <a:avLst/>
-          </a:prstGeom>
-          <a:noFill/>
-          <a:ln w="25400">
-            <a:solidFill>
-              <a:srgbClr val="8ABBD8"/>
-            </a:solidFill>
-            <a:prstDash val="solid"/>
-          </a:ln>
-        </p:spPr>
-      </p:sp>
-      <p:sp>
-        <p:nvSpPr>
-          <p:cNvPr id="19" name="Shape 17"/>
-          <p:cNvSpPr/>
-          <p:nvPr/>
-        </p:nvSpPr>
-        <p:spPr>
-          <a:xfrm>
-            <a:off x="10543032" y="3630168"/>
-            <a:ext cx="-1170432" cy="118872"/>
-          </a:xfrm>
-          <a:prstGeom prst="line">
-            <a:avLst/>
-          </a:prstGeom>
-          <a:noFill/>
-          <a:ln w="25400">
-            <a:solidFill>
-              <a:srgbClr val="8ABBD8"/>
-            </a:solidFill>
-            <a:prstDash val="solid"/>
-          </a:ln>
-        </p:spPr>
-      </p:sp>
-      <p:sp>
-        <p:nvSpPr>
-          <p:cNvPr id="20" name="Text 18"/>
-          <p:cNvSpPr/>
-          <p:nvPr/>
-        </p:nvSpPr>
-        <p:spPr>
-          <a:xfrm>
-            <a:off x="7863840" y="4069080"/>
-            <a:ext cx="3017520" cy="164592"/>
-          </a:xfrm>
-          <a:prstGeom prst="rect">
-            <a:avLst/>
-          </a:prstGeom>
-          <a:noFill/>
-          <a:ln/>
-        </p:spPr>
-        <p:txBody>
-          <a:bodyPr wrap="square" lIns="0" tIns="0" rIns="0" bIns="0" rtlCol="0" anchor="ctr"/>
-          <a:lstStyle/>
-          <a:p>
-            <a:pPr algn="ctr" indent="0" marL="0">
-              <a:buNone/>
-            </a:pPr>
-            <a:r>
-              <a:rPr lang="en-US" sz="900" b="1" dirty="0">
-                <a:solidFill>
-                  <a:srgbClr val="003A63"/>
-                </a:solidFill>
-                <a:latin typeface="Aptos" pitchFamily="34" charset="0"/>
-                <a:ea typeface="Aptos" pitchFamily="34" charset="-122"/>
-                <a:cs typeface="Aptos" pitchFamily="34" charset="-120"/>
-              </a:rPr>
-              <a:t>Decision rights</a:t>
-            </a:r>
-            <a:endParaRPr lang="en-US" sz="900" dirty="0"/>
-          </a:p>
-        </p:txBody>
-      </p:sp>
-      <p:sp>
-        <p:nvSpPr>
-          <p:cNvPr id="21" name="Shape 19"/>
           <p:cNvSpPr/>
           <p:nvPr/>
         </p:nvSpPr>
@@ -6119,7 +5879,7 @@
       </p:sp>
       <p:sp>
         <p:nvSpPr>
-          <p:cNvPr id="22" name="Text 20"/>
+          <p:cNvPr id="17" name="Text 15"/>
           <p:cNvSpPr/>
           <p:nvPr/>
         </p:nvSpPr>
@@ -6158,7 +5918,7 @@
       </p:sp>
       <p:sp>
         <p:nvSpPr>
-          <p:cNvPr id="23" name="Text 21"/>
+          <p:cNvPr id="18" name="Text 16"/>
           <p:cNvSpPr/>
           <p:nvPr/>
         </p:nvSpPr>
@@ -6666,13 +6426,11 @@
             </a:avLst>
           </a:prstGeom>
           <a:solidFill>
-            <a:srgbClr val="FFFFFF">
-              <a:alpha val="88000"/>
-            </a:srgbClr>
+            <a:srgbClr val="FFFFFF"/>
           </a:solidFill>
           <a:ln w="12700">
             <a:solidFill>
-              <a:srgbClr val="D6E8F2"/>
+              <a:srgbClr val="B9D7E6"/>
             </a:solidFill>
             <a:prstDash val="solid"/>
           </a:ln>
@@ -6680,190 +6438,112 @@
       </p:sp>
       <p:sp>
         <p:nvSpPr>
-          <p:cNvPr id="14" name="Shape 12"/>
-          <p:cNvSpPr/>
-          <p:nvPr/>
-        </p:nvSpPr>
-        <p:spPr>
-          <a:xfrm>
-            <a:off x="7891272" y="3108960"/>
-            <a:ext cx="566928" cy="566928"/>
-          </a:xfrm>
-          <a:prstGeom prst="ellipse">
-            <a:avLst/>
-          </a:prstGeom>
-          <a:solidFill>
-            <a:srgbClr val="0068B7"/>
-          </a:solidFill>
-          <a:ln w="12700">
-            <a:solidFill>
-              <a:srgbClr val="0068B7"/>
-            </a:solidFill>
-            <a:prstDash val="solid"/>
-          </a:ln>
-        </p:spPr>
-      </p:sp>
-      <p:sp>
-        <p:nvSpPr>
-          <p:cNvPr id="15" name="Shape 13"/>
-          <p:cNvSpPr/>
-          <p:nvPr/>
-        </p:nvSpPr>
-        <p:spPr>
-          <a:xfrm>
-            <a:off x="10287000" y="3108960"/>
-            <a:ext cx="566928" cy="566928"/>
-          </a:xfrm>
-          <a:prstGeom prst="ellipse">
-            <a:avLst/>
-          </a:prstGeom>
-          <a:solidFill>
-            <a:srgbClr val="2F8A28"/>
-          </a:solidFill>
-          <a:ln w="12700">
-            <a:solidFill>
-              <a:srgbClr val="2F8A28"/>
-            </a:solidFill>
-            <a:prstDash val="solid"/>
-          </a:ln>
-        </p:spPr>
+          <p:cNvPr id="14" name="Text 12"/>
+          <p:cNvSpPr/>
+          <p:nvPr/>
+        </p:nvSpPr>
+        <p:spPr>
+          <a:xfrm>
+            <a:off x="7799832" y="2935224"/>
+            <a:ext cx="3145536" cy="256032"/>
+          </a:xfrm>
+          <a:prstGeom prst="rect">
+            <a:avLst/>
+          </a:prstGeom>
+          <a:noFill/>
+          <a:ln/>
+        </p:spPr>
+        <p:txBody>
+          <a:bodyPr wrap="square" lIns="0" tIns="0" rIns="0" bIns="0" rtlCol="0" anchor="ctr"/>
+          <a:lstStyle/>
+          <a:p>
+            <a:pPr indent="0" marL="0">
+              <a:buNone/>
+            </a:pPr>
+            <a:r>
+              <a:rPr lang="en-US" sz="1300" b="1" dirty="0">
+                <a:solidFill>
+                  <a:srgbClr val="0068B7"/>
+                </a:solidFill>
+                <a:latin typeface="Aptos" pitchFamily="34" charset="0"/>
+                <a:ea typeface="Aptos" pitchFamily="34" charset="-122"/>
+                <a:cs typeface="Aptos" pitchFamily="34" charset="-120"/>
+              </a:rPr>
+              <a:t>Concept checkpoints</a:t>
+            </a:r>
+            <a:endParaRPr lang="en-US" sz="1300" dirty="0"/>
+          </a:p>
+        </p:txBody>
+      </p:sp>
+      <p:sp>
+        <p:nvSpPr>
+          <p:cNvPr id="15" name="Text 13"/>
+          <p:cNvSpPr/>
+          <p:nvPr/>
+        </p:nvSpPr>
+        <p:spPr>
+          <a:xfrm>
+            <a:off x="7818120" y="3300984"/>
+            <a:ext cx="3090672" cy="877824"/>
+          </a:xfrm>
+          <a:prstGeom prst="rect">
+            <a:avLst/>
+          </a:prstGeom>
+          <a:noFill/>
+          <a:ln/>
+        </p:spPr>
+        <p:txBody>
+          <a:bodyPr wrap="square" lIns="254" tIns="254" rIns="254" bIns="254" rtlCol="0" anchor="t">
+            <a:normAutofit/>
+          </a:bodyPr>
+          <a:lstStyle/>
+          <a:p>
+            <a:r>
+              <a:rPr lang="en-US" sz="1380" dirty="0">
+                <a:solidFill>
+                  <a:srgbClr val="17364A"/>
+                </a:solidFill>
+                <a:latin typeface="Aptos" pitchFamily="34" charset="0"/>
+                <a:ea typeface="Aptos" pitchFamily="34" charset="-122"/>
+                <a:cs typeface="Aptos" pitchFamily="34" charset="-120"/>
+              </a:rPr>
+              <a:t>A local health department wants to use a generative AI tool to help staff summarize long.</a:t>
+            </a:r>
+            <a:endParaRPr lang="en-US" sz="1380" dirty="0"/>
+          </a:p>
+          <a:p>
+            <a:r>
+              <a:rPr lang="en-US" sz="1380" dirty="0">
+                <a:solidFill>
+                  <a:srgbClr val="17364A"/>
+                </a:solidFill>
+                <a:latin typeface="Aptos" pitchFamily="34" charset="0"/>
+                <a:ea typeface="Aptos" pitchFamily="34" charset="-122"/>
+                <a:cs typeface="Aptos" pitchFamily="34" charset="-120"/>
+              </a:rPr>
+              <a:t>The goal is to identify common themes related to access to mobile vaccination clinics,.</a:t>
+            </a:r>
+            <a:endParaRPr lang="en-US" sz="1380" dirty="0"/>
+          </a:p>
+          <a:p>
+            <a:r>
+              <a:rPr lang="en-US" sz="1380" dirty="0">
+                <a:solidFill>
+                  <a:srgbClr val="17364A"/>
+                </a:solidFill>
+                <a:latin typeface="Aptos" pitchFamily="34" charset="0"/>
+                <a:ea typeface="Aptos" pitchFamily="34" charset="-122"/>
+                <a:cs typeface="Aptos" pitchFamily="34" charset="-120"/>
+              </a:rPr>
+              <a:t>Communications staff want to use the themes in a public report.</a:t>
+            </a:r>
+            <a:endParaRPr lang="en-US" sz="1380" dirty="0"/>
+          </a:p>
+        </p:txBody>
       </p:sp>
       <p:sp>
         <p:nvSpPr>
           <p:cNvPr id="16" name="Shape 14"/>
-          <p:cNvSpPr/>
-          <p:nvPr/>
-        </p:nvSpPr>
-        <p:spPr>
-          <a:xfrm>
-            <a:off x="9089136" y="3456432"/>
-            <a:ext cx="566928" cy="566928"/>
-          </a:xfrm>
-          <a:prstGeom prst="ellipse">
-            <a:avLst/>
-          </a:prstGeom>
-          <a:solidFill>
-            <a:srgbClr val="6A4CA3"/>
-          </a:solidFill>
-          <a:ln w="12700">
-            <a:solidFill>
-              <a:srgbClr val="6A4CA3"/>
-            </a:solidFill>
-            <a:prstDash val="solid"/>
-          </a:ln>
-        </p:spPr>
-      </p:sp>
-      <p:sp>
-        <p:nvSpPr>
-          <p:cNvPr id="17" name="Shape 15"/>
-          <p:cNvSpPr/>
-          <p:nvPr/>
-        </p:nvSpPr>
-        <p:spPr>
-          <a:xfrm>
-            <a:off x="8385048" y="3419856"/>
-            <a:ext cx="1975104" cy="0"/>
-          </a:xfrm>
-          <a:prstGeom prst="line">
-            <a:avLst/>
-          </a:prstGeom>
-          <a:noFill/>
-          <a:ln w="25400">
-            <a:solidFill>
-              <a:srgbClr val="8ABBD8"/>
-            </a:solidFill>
-            <a:prstDash val="solid"/>
-          </a:ln>
-        </p:spPr>
-      </p:sp>
-      <p:sp>
-        <p:nvSpPr>
-          <p:cNvPr id="18" name="Shape 16"/>
-          <p:cNvSpPr/>
-          <p:nvPr/>
-        </p:nvSpPr>
-        <p:spPr>
-          <a:xfrm>
-            <a:off x="8202168" y="3630168"/>
-            <a:ext cx="1170432" cy="118872"/>
-          </a:xfrm>
-          <a:prstGeom prst="line">
-            <a:avLst/>
-          </a:prstGeom>
-          <a:noFill/>
-          <a:ln w="25400">
-            <a:solidFill>
-              <a:srgbClr val="8ABBD8"/>
-            </a:solidFill>
-            <a:prstDash val="solid"/>
-          </a:ln>
-        </p:spPr>
-      </p:sp>
-      <p:sp>
-        <p:nvSpPr>
-          <p:cNvPr id="19" name="Shape 17"/>
-          <p:cNvSpPr/>
-          <p:nvPr/>
-        </p:nvSpPr>
-        <p:spPr>
-          <a:xfrm>
-            <a:off x="10543032" y="3630168"/>
-            <a:ext cx="-1170432" cy="118872"/>
-          </a:xfrm>
-          <a:prstGeom prst="line">
-            <a:avLst/>
-          </a:prstGeom>
-          <a:noFill/>
-          <a:ln w="25400">
-            <a:solidFill>
-              <a:srgbClr val="8ABBD8"/>
-            </a:solidFill>
-            <a:prstDash val="solid"/>
-          </a:ln>
-        </p:spPr>
-      </p:sp>
-      <p:sp>
-        <p:nvSpPr>
-          <p:cNvPr id="20" name="Text 18"/>
-          <p:cNvSpPr/>
-          <p:nvPr/>
-        </p:nvSpPr>
-        <p:spPr>
-          <a:xfrm>
-            <a:off x="7863840" y="4069080"/>
-            <a:ext cx="3017520" cy="164592"/>
-          </a:xfrm>
-          <a:prstGeom prst="rect">
-            <a:avLst/>
-          </a:prstGeom>
-          <a:noFill/>
-          <a:ln/>
-        </p:spPr>
-        <p:txBody>
-          <a:bodyPr wrap="square" lIns="0" tIns="0" rIns="0" bIns="0" rtlCol="0" anchor="ctr"/>
-          <a:lstStyle/>
-          <a:p>
-            <a:pPr algn="ctr" indent="0" marL="0">
-              <a:buNone/>
-            </a:pPr>
-            <a:r>
-              <a:rPr lang="en-US" sz="900" b="1" dirty="0">
-                <a:solidFill>
-                  <a:srgbClr val="003A63"/>
-                </a:solidFill>
-                <a:latin typeface="Aptos" pitchFamily="34" charset="0"/>
-                <a:ea typeface="Aptos" pitchFamily="34" charset="-122"/>
-                <a:cs typeface="Aptos" pitchFamily="34" charset="-120"/>
-              </a:rPr>
-              <a:t>Decision rights</a:t>
-            </a:r>
-            <a:endParaRPr lang="en-US" sz="900" dirty="0"/>
-          </a:p>
-        </p:txBody>
-      </p:sp>
-      <p:sp>
-        <p:nvSpPr>
-          <p:cNvPr id="21" name="Shape 19"/>
           <p:cNvSpPr/>
           <p:nvPr/>
         </p:nvSpPr>
@@ -6890,7 +6570,7 @@
       </p:sp>
       <p:sp>
         <p:nvSpPr>
-          <p:cNvPr id="22" name="Text 20"/>
+          <p:cNvPr id="17" name="Text 15"/>
           <p:cNvSpPr/>
           <p:nvPr/>
         </p:nvSpPr>
@@ -6929,7 +6609,7 @@
       </p:sp>
       <p:sp>
         <p:nvSpPr>
-          <p:cNvPr id="23" name="Text 21"/>
+          <p:cNvPr id="18" name="Text 16"/>
           <p:cNvSpPr/>
           <p:nvPr/>
         </p:nvSpPr>
@@ -7437,13 +7117,11 @@
             </a:avLst>
           </a:prstGeom>
           <a:solidFill>
-            <a:srgbClr val="FFFFFF">
-              <a:alpha val="88000"/>
-            </a:srgbClr>
+            <a:srgbClr val="FFFFFF"/>
           </a:solidFill>
           <a:ln w="12700">
             <a:solidFill>
-              <a:srgbClr val="D6E8F2"/>
+              <a:srgbClr val="B9D7E6"/>
             </a:solidFill>
             <a:prstDash val="solid"/>
           </a:ln>
@@ -7451,190 +7129,112 @@
       </p:sp>
       <p:sp>
         <p:nvSpPr>
-          <p:cNvPr id="14" name="Shape 12"/>
-          <p:cNvSpPr/>
-          <p:nvPr/>
-        </p:nvSpPr>
-        <p:spPr>
-          <a:xfrm>
-            <a:off x="7891272" y="3108960"/>
-            <a:ext cx="566928" cy="566928"/>
-          </a:xfrm>
-          <a:prstGeom prst="ellipse">
-            <a:avLst/>
-          </a:prstGeom>
-          <a:solidFill>
-            <a:srgbClr val="0068B7"/>
-          </a:solidFill>
-          <a:ln w="12700">
-            <a:solidFill>
-              <a:srgbClr val="0068B7"/>
-            </a:solidFill>
-            <a:prstDash val="solid"/>
-          </a:ln>
-        </p:spPr>
-      </p:sp>
-      <p:sp>
-        <p:nvSpPr>
-          <p:cNvPr id="15" name="Shape 13"/>
-          <p:cNvSpPr/>
-          <p:nvPr/>
-        </p:nvSpPr>
-        <p:spPr>
-          <a:xfrm>
-            <a:off x="10287000" y="3108960"/>
-            <a:ext cx="566928" cy="566928"/>
-          </a:xfrm>
-          <a:prstGeom prst="ellipse">
-            <a:avLst/>
-          </a:prstGeom>
-          <a:solidFill>
-            <a:srgbClr val="2F8A28"/>
-          </a:solidFill>
-          <a:ln w="12700">
-            <a:solidFill>
-              <a:srgbClr val="2F8A28"/>
-            </a:solidFill>
-            <a:prstDash val="solid"/>
-          </a:ln>
-        </p:spPr>
+          <p:cNvPr id="14" name="Text 12"/>
+          <p:cNvSpPr/>
+          <p:nvPr/>
+        </p:nvSpPr>
+        <p:spPr>
+          <a:xfrm>
+            <a:off x="7799832" y="2935224"/>
+            <a:ext cx="3145536" cy="256032"/>
+          </a:xfrm>
+          <a:prstGeom prst="rect">
+            <a:avLst/>
+          </a:prstGeom>
+          <a:noFill/>
+          <a:ln/>
+        </p:spPr>
+        <p:txBody>
+          <a:bodyPr wrap="square" lIns="0" tIns="0" rIns="0" bIns="0" rtlCol="0" anchor="ctr"/>
+          <a:lstStyle/>
+          <a:p>
+            <a:pPr indent="0" marL="0">
+              <a:buNone/>
+            </a:pPr>
+            <a:r>
+              <a:rPr lang="en-US" sz="1300" b="1" dirty="0">
+                <a:solidFill>
+                  <a:srgbClr val="0068B7"/>
+                </a:solidFill>
+                <a:latin typeface="Aptos" pitchFamily="34" charset="0"/>
+                <a:ea typeface="Aptos" pitchFamily="34" charset="-122"/>
+                <a:cs typeface="Aptos" pitchFamily="34" charset="-120"/>
+              </a:rPr>
+              <a:t>Concept checkpoints</a:t>
+            </a:r>
+            <a:endParaRPr lang="en-US" sz="1300" dirty="0"/>
+          </a:p>
+        </p:txBody>
+      </p:sp>
+      <p:sp>
+        <p:nvSpPr>
+          <p:cNvPr id="15" name="Text 13"/>
+          <p:cNvSpPr/>
+          <p:nvPr/>
+        </p:nvSpPr>
+        <p:spPr>
+          <a:xfrm>
+            <a:off x="7818120" y="3300984"/>
+            <a:ext cx="3090672" cy="877824"/>
+          </a:xfrm>
+          <a:prstGeom prst="rect">
+            <a:avLst/>
+          </a:prstGeom>
+          <a:noFill/>
+          <a:ln/>
+        </p:spPr>
+        <p:txBody>
+          <a:bodyPr wrap="square" lIns="254" tIns="254" rIns="254" bIns="254" rtlCol="0" anchor="t">
+            <a:normAutofit/>
+          </a:bodyPr>
+          <a:lstStyle/>
+          <a:p>
+            <a:r>
+              <a:rPr lang="en-US" sz="1380" dirty="0">
+                <a:solidFill>
+                  <a:srgbClr val="17364A"/>
+                </a:solidFill>
+                <a:latin typeface="Aptos" pitchFamily="34" charset="0"/>
+                <a:ea typeface="Aptos" pitchFamily="34" charset="-122"/>
+                <a:cs typeface="Aptos" pitchFamily="34" charset="-120"/>
+              </a:rPr>
+              <a:t>Equity and community engagement staff consider whether the process preserves community.</a:t>
+            </a:r>
+            <a:endParaRPr lang="en-US" sz="1380" dirty="0"/>
+          </a:p>
+          <a:p>
+            <a:r>
+              <a:rPr lang="en-US" sz="1380" dirty="0">
+                <a:solidFill>
+                  <a:srgbClr val="17364A"/>
+                </a:solidFill>
+                <a:latin typeface="Aptos" pitchFamily="34" charset="0"/>
+                <a:ea typeface="Aptos" pitchFamily="34" charset="-122"/>
+                <a:cs typeface="Aptos" pitchFamily="34" charset="-120"/>
+              </a:rPr>
+              <a:t>Communications staff ensure public statements are clear and not overstated.</a:t>
+            </a:r>
+            <a:endParaRPr lang="en-US" sz="1380" dirty="0"/>
+          </a:p>
+          <a:p>
+            <a:r>
+              <a:rPr lang="en-US" sz="1380" dirty="0">
+                <a:solidFill>
+                  <a:srgbClr val="17364A"/>
+                </a:solidFill>
+                <a:latin typeface="Aptos" pitchFamily="34" charset="0"/>
+                <a:ea typeface="Aptos" pitchFamily="34" charset="-122"/>
+                <a:cs typeface="Aptos" pitchFamily="34" charset="-120"/>
+              </a:rPr>
+              <a:t>Leadership decides whether the use is appropriate and whether the agency can explain it to.</a:t>
+            </a:r>
+            <a:endParaRPr lang="en-US" sz="1380" dirty="0"/>
+          </a:p>
+        </p:txBody>
       </p:sp>
       <p:sp>
         <p:nvSpPr>
           <p:cNvPr id="16" name="Shape 14"/>
-          <p:cNvSpPr/>
-          <p:nvPr/>
-        </p:nvSpPr>
-        <p:spPr>
-          <a:xfrm>
-            <a:off x="9089136" y="3456432"/>
-            <a:ext cx="566928" cy="566928"/>
-          </a:xfrm>
-          <a:prstGeom prst="ellipse">
-            <a:avLst/>
-          </a:prstGeom>
-          <a:solidFill>
-            <a:srgbClr val="6A4CA3"/>
-          </a:solidFill>
-          <a:ln w="12700">
-            <a:solidFill>
-              <a:srgbClr val="6A4CA3"/>
-            </a:solidFill>
-            <a:prstDash val="solid"/>
-          </a:ln>
-        </p:spPr>
-      </p:sp>
-      <p:sp>
-        <p:nvSpPr>
-          <p:cNvPr id="17" name="Shape 15"/>
-          <p:cNvSpPr/>
-          <p:nvPr/>
-        </p:nvSpPr>
-        <p:spPr>
-          <a:xfrm>
-            <a:off x="8385048" y="3419856"/>
-            <a:ext cx="1975104" cy="0"/>
-          </a:xfrm>
-          <a:prstGeom prst="line">
-            <a:avLst/>
-          </a:prstGeom>
-          <a:noFill/>
-          <a:ln w="25400">
-            <a:solidFill>
-              <a:srgbClr val="8ABBD8"/>
-            </a:solidFill>
-            <a:prstDash val="solid"/>
-          </a:ln>
-        </p:spPr>
-      </p:sp>
-      <p:sp>
-        <p:nvSpPr>
-          <p:cNvPr id="18" name="Shape 16"/>
-          <p:cNvSpPr/>
-          <p:nvPr/>
-        </p:nvSpPr>
-        <p:spPr>
-          <a:xfrm>
-            <a:off x="8202168" y="3630168"/>
-            <a:ext cx="1170432" cy="118872"/>
-          </a:xfrm>
-          <a:prstGeom prst="line">
-            <a:avLst/>
-          </a:prstGeom>
-          <a:noFill/>
-          <a:ln w="25400">
-            <a:solidFill>
-              <a:srgbClr val="8ABBD8"/>
-            </a:solidFill>
-            <a:prstDash val="solid"/>
-          </a:ln>
-        </p:spPr>
-      </p:sp>
-      <p:sp>
-        <p:nvSpPr>
-          <p:cNvPr id="19" name="Shape 17"/>
-          <p:cNvSpPr/>
-          <p:nvPr/>
-        </p:nvSpPr>
-        <p:spPr>
-          <a:xfrm>
-            <a:off x="10543032" y="3630168"/>
-            <a:ext cx="-1170432" cy="118872"/>
-          </a:xfrm>
-          <a:prstGeom prst="line">
-            <a:avLst/>
-          </a:prstGeom>
-          <a:noFill/>
-          <a:ln w="25400">
-            <a:solidFill>
-              <a:srgbClr val="8ABBD8"/>
-            </a:solidFill>
-            <a:prstDash val="solid"/>
-          </a:ln>
-        </p:spPr>
-      </p:sp>
-      <p:sp>
-        <p:nvSpPr>
-          <p:cNvPr id="20" name="Text 18"/>
-          <p:cNvSpPr/>
-          <p:nvPr/>
-        </p:nvSpPr>
-        <p:spPr>
-          <a:xfrm>
-            <a:off x="7863840" y="4069080"/>
-            <a:ext cx="3017520" cy="164592"/>
-          </a:xfrm>
-          <a:prstGeom prst="rect">
-            <a:avLst/>
-          </a:prstGeom>
-          <a:noFill/>
-          <a:ln/>
-        </p:spPr>
-        <p:txBody>
-          <a:bodyPr wrap="square" lIns="0" tIns="0" rIns="0" bIns="0" rtlCol="0" anchor="ctr"/>
-          <a:lstStyle/>
-          <a:p>
-            <a:pPr algn="ctr" indent="0" marL="0">
-              <a:buNone/>
-            </a:pPr>
-            <a:r>
-              <a:rPr lang="en-US" sz="900" b="1" dirty="0">
-                <a:solidFill>
-                  <a:srgbClr val="003A63"/>
-                </a:solidFill>
-                <a:latin typeface="Aptos" pitchFamily="34" charset="0"/>
-                <a:ea typeface="Aptos" pitchFamily="34" charset="-122"/>
-                <a:cs typeface="Aptos" pitchFamily="34" charset="-120"/>
-              </a:rPr>
-              <a:t>Decision rights</a:t>
-            </a:r>
-            <a:endParaRPr lang="en-US" sz="900" dirty="0"/>
-          </a:p>
-        </p:txBody>
-      </p:sp>
-      <p:sp>
-        <p:nvSpPr>
-          <p:cNvPr id="21" name="Shape 19"/>
           <p:cNvSpPr/>
           <p:nvPr/>
         </p:nvSpPr>
@@ -7661,7 +7261,7 @@
       </p:sp>
       <p:sp>
         <p:nvSpPr>
-          <p:cNvPr id="22" name="Text 20"/>
+          <p:cNvPr id="17" name="Text 15"/>
           <p:cNvSpPr/>
           <p:nvPr/>
         </p:nvSpPr>
@@ -7700,7 +7300,7 @@
       </p:sp>
       <p:sp>
         <p:nvSpPr>
-          <p:cNvPr id="23" name="Text 21"/>
+          <p:cNvPr id="18" name="Text 16"/>
           <p:cNvSpPr/>
           <p:nvPr/>
         </p:nvSpPr>
@@ -8208,13 +7808,11 @@
             </a:avLst>
           </a:prstGeom>
           <a:solidFill>
-            <a:srgbClr val="FFFFFF">
-              <a:alpha val="88000"/>
-            </a:srgbClr>
+            <a:srgbClr val="FFFFFF"/>
           </a:solidFill>
           <a:ln w="12700">
             <a:solidFill>
-              <a:srgbClr val="D6E8F2"/>
+              <a:srgbClr val="B9D7E6"/>
             </a:solidFill>
             <a:prstDash val="solid"/>
           </a:ln>
@@ -8222,190 +7820,112 @@
       </p:sp>
       <p:sp>
         <p:nvSpPr>
-          <p:cNvPr id="14" name="Shape 12"/>
-          <p:cNvSpPr/>
-          <p:nvPr/>
-        </p:nvSpPr>
-        <p:spPr>
-          <a:xfrm>
-            <a:off x="7891272" y="3108960"/>
-            <a:ext cx="566928" cy="566928"/>
-          </a:xfrm>
-          <a:prstGeom prst="ellipse">
-            <a:avLst/>
-          </a:prstGeom>
-          <a:solidFill>
-            <a:srgbClr val="0068B7"/>
-          </a:solidFill>
-          <a:ln w="12700">
-            <a:solidFill>
-              <a:srgbClr val="0068B7"/>
-            </a:solidFill>
-            <a:prstDash val="solid"/>
-          </a:ln>
-        </p:spPr>
-      </p:sp>
-      <p:sp>
-        <p:nvSpPr>
-          <p:cNvPr id="15" name="Shape 13"/>
-          <p:cNvSpPr/>
-          <p:nvPr/>
-        </p:nvSpPr>
-        <p:spPr>
-          <a:xfrm>
-            <a:off x="10287000" y="3108960"/>
-            <a:ext cx="566928" cy="566928"/>
-          </a:xfrm>
-          <a:prstGeom prst="ellipse">
-            <a:avLst/>
-          </a:prstGeom>
-          <a:solidFill>
-            <a:srgbClr val="2F8A28"/>
-          </a:solidFill>
-          <a:ln w="12700">
-            <a:solidFill>
-              <a:srgbClr val="2F8A28"/>
-            </a:solidFill>
-            <a:prstDash val="solid"/>
-          </a:ln>
-        </p:spPr>
+          <p:cNvPr id="14" name="Text 12"/>
+          <p:cNvSpPr/>
+          <p:nvPr/>
+        </p:nvSpPr>
+        <p:spPr>
+          <a:xfrm>
+            <a:off x="7799832" y="2935224"/>
+            <a:ext cx="3145536" cy="256032"/>
+          </a:xfrm>
+          <a:prstGeom prst="rect">
+            <a:avLst/>
+          </a:prstGeom>
+          <a:noFill/>
+          <a:ln/>
+        </p:spPr>
+        <p:txBody>
+          <a:bodyPr wrap="square" lIns="0" tIns="0" rIns="0" bIns="0" rtlCol="0" anchor="ctr"/>
+          <a:lstStyle/>
+          <a:p>
+            <a:pPr indent="0" marL="0">
+              <a:buNone/>
+            </a:pPr>
+            <a:r>
+              <a:rPr lang="en-US" sz="1300" b="1" dirty="0">
+                <a:solidFill>
+                  <a:srgbClr val="0068B7"/>
+                </a:solidFill>
+                <a:latin typeface="Aptos" pitchFamily="34" charset="0"/>
+                <a:ea typeface="Aptos" pitchFamily="34" charset="-122"/>
+                <a:cs typeface="Aptos" pitchFamily="34" charset="-120"/>
+              </a:rPr>
+              <a:t>Concept checkpoints</a:t>
+            </a:r>
+            <a:endParaRPr lang="en-US" sz="1300" dirty="0"/>
+          </a:p>
+        </p:txBody>
+      </p:sp>
+      <p:sp>
+        <p:nvSpPr>
+          <p:cNvPr id="15" name="Text 13"/>
+          <p:cNvSpPr/>
+          <p:nvPr/>
+        </p:nvSpPr>
+        <p:spPr>
+          <a:xfrm>
+            <a:off x="7818120" y="3300984"/>
+            <a:ext cx="3090672" cy="877824"/>
+          </a:xfrm>
+          <a:prstGeom prst="rect">
+            <a:avLst/>
+          </a:prstGeom>
+          <a:noFill/>
+          <a:ln/>
+        </p:spPr>
+        <p:txBody>
+          <a:bodyPr wrap="square" lIns="254" tIns="254" rIns="254" bIns="254" rtlCol="0" anchor="t">
+            <a:normAutofit/>
+          </a:bodyPr>
+          <a:lstStyle/>
+          <a:p>
+            <a:r>
+              <a:rPr lang="en-US" sz="1380" dirty="0">
+                <a:solidFill>
+                  <a:srgbClr val="17364A"/>
+                </a:solidFill>
+                <a:latin typeface="Aptos" pitchFamily="34" charset="0"/>
+                <a:ea typeface="Aptos" pitchFamily="34" charset="-122"/>
+                <a:cs typeface="Aptos" pitchFamily="34" charset="-120"/>
+              </a:rPr>
+              <a:t>AI governance should be understandable to all staff because the earliest governance.</a:t>
+            </a:r>
+            <a:endParaRPr lang="en-US" sz="1380" dirty="0"/>
+          </a:p>
+          <a:p>
+            <a:r>
+              <a:rPr lang="en-US" sz="1380" dirty="0">
+                <a:solidFill>
+                  <a:srgbClr val="17364A"/>
+                </a:solidFill>
+                <a:latin typeface="Aptos" pitchFamily="34" charset="0"/>
+                <a:ea typeface="Aptos" pitchFamily="34" charset="-122"/>
+                <a:cs typeface="Aptos" pitchFamily="34" charset="-120"/>
+              </a:rPr>
+              <a:t>Staff should treat AI use as more than “using a tool.” If a tool classifies, summarizes,.</a:t>
+            </a:r>
+            <a:endParaRPr lang="en-US" sz="1380" dirty="0"/>
+          </a:p>
+          <a:p>
+            <a:r>
+              <a:rPr lang="en-US" sz="1380" dirty="0">
+                <a:solidFill>
+                  <a:srgbClr val="17364A"/>
+                </a:solidFill>
+                <a:latin typeface="Aptos" pitchFamily="34" charset="0"/>
+                <a:ea typeface="Aptos" pitchFamily="34" charset="-122"/>
+                <a:cs typeface="Aptos" pitchFamily="34" charset="-120"/>
+              </a:rPr>
+              <a:t>The second decision is identifying the purpose.</a:t>
+            </a:r>
+            <a:endParaRPr lang="en-US" sz="1380" dirty="0"/>
+          </a:p>
+        </p:txBody>
       </p:sp>
       <p:sp>
         <p:nvSpPr>
           <p:cNvPr id="16" name="Shape 14"/>
-          <p:cNvSpPr/>
-          <p:nvPr/>
-        </p:nvSpPr>
-        <p:spPr>
-          <a:xfrm>
-            <a:off x="9089136" y="3456432"/>
-            <a:ext cx="566928" cy="566928"/>
-          </a:xfrm>
-          <a:prstGeom prst="ellipse">
-            <a:avLst/>
-          </a:prstGeom>
-          <a:solidFill>
-            <a:srgbClr val="6A4CA3"/>
-          </a:solidFill>
-          <a:ln w="12700">
-            <a:solidFill>
-              <a:srgbClr val="6A4CA3"/>
-            </a:solidFill>
-            <a:prstDash val="solid"/>
-          </a:ln>
-        </p:spPr>
-      </p:sp>
-      <p:sp>
-        <p:nvSpPr>
-          <p:cNvPr id="17" name="Shape 15"/>
-          <p:cNvSpPr/>
-          <p:nvPr/>
-        </p:nvSpPr>
-        <p:spPr>
-          <a:xfrm>
-            <a:off x="8385048" y="3419856"/>
-            <a:ext cx="1975104" cy="0"/>
-          </a:xfrm>
-          <a:prstGeom prst="line">
-            <a:avLst/>
-          </a:prstGeom>
-          <a:noFill/>
-          <a:ln w="25400">
-            <a:solidFill>
-              <a:srgbClr val="8ABBD8"/>
-            </a:solidFill>
-            <a:prstDash val="solid"/>
-          </a:ln>
-        </p:spPr>
-      </p:sp>
-      <p:sp>
-        <p:nvSpPr>
-          <p:cNvPr id="18" name="Shape 16"/>
-          <p:cNvSpPr/>
-          <p:nvPr/>
-        </p:nvSpPr>
-        <p:spPr>
-          <a:xfrm>
-            <a:off x="8202168" y="3630168"/>
-            <a:ext cx="1170432" cy="118872"/>
-          </a:xfrm>
-          <a:prstGeom prst="line">
-            <a:avLst/>
-          </a:prstGeom>
-          <a:noFill/>
-          <a:ln w="25400">
-            <a:solidFill>
-              <a:srgbClr val="8ABBD8"/>
-            </a:solidFill>
-            <a:prstDash val="solid"/>
-          </a:ln>
-        </p:spPr>
-      </p:sp>
-      <p:sp>
-        <p:nvSpPr>
-          <p:cNvPr id="19" name="Shape 17"/>
-          <p:cNvSpPr/>
-          <p:nvPr/>
-        </p:nvSpPr>
-        <p:spPr>
-          <a:xfrm>
-            <a:off x="10543032" y="3630168"/>
-            <a:ext cx="-1170432" cy="118872"/>
-          </a:xfrm>
-          <a:prstGeom prst="line">
-            <a:avLst/>
-          </a:prstGeom>
-          <a:noFill/>
-          <a:ln w="25400">
-            <a:solidFill>
-              <a:srgbClr val="8ABBD8"/>
-            </a:solidFill>
-            <a:prstDash val="solid"/>
-          </a:ln>
-        </p:spPr>
-      </p:sp>
-      <p:sp>
-        <p:nvSpPr>
-          <p:cNvPr id="20" name="Text 18"/>
-          <p:cNvSpPr/>
-          <p:nvPr/>
-        </p:nvSpPr>
-        <p:spPr>
-          <a:xfrm>
-            <a:off x="7863840" y="4069080"/>
-            <a:ext cx="3017520" cy="164592"/>
-          </a:xfrm>
-          <a:prstGeom prst="rect">
-            <a:avLst/>
-          </a:prstGeom>
-          <a:noFill/>
-          <a:ln/>
-        </p:spPr>
-        <p:txBody>
-          <a:bodyPr wrap="square" lIns="0" tIns="0" rIns="0" bIns="0" rtlCol="0" anchor="ctr"/>
-          <a:lstStyle/>
-          <a:p>
-            <a:pPr algn="ctr" indent="0" marL="0">
-              <a:buNone/>
-            </a:pPr>
-            <a:r>
-              <a:rPr lang="en-US" sz="900" b="1" dirty="0">
-                <a:solidFill>
-                  <a:srgbClr val="003A63"/>
-                </a:solidFill>
-                <a:latin typeface="Aptos" pitchFamily="34" charset="0"/>
-                <a:ea typeface="Aptos" pitchFamily="34" charset="-122"/>
-                <a:cs typeface="Aptos" pitchFamily="34" charset="-120"/>
-              </a:rPr>
-              <a:t>Decision rights</a:t>
-            </a:r>
-            <a:endParaRPr lang="en-US" sz="900" dirty="0"/>
-          </a:p>
-        </p:txBody>
-      </p:sp>
-      <p:sp>
-        <p:nvSpPr>
-          <p:cNvPr id="21" name="Shape 19"/>
           <p:cNvSpPr/>
           <p:nvPr/>
         </p:nvSpPr>
@@ -8432,7 +7952,7 @@
       </p:sp>
       <p:sp>
         <p:nvSpPr>
-          <p:cNvPr id="22" name="Text 20"/>
+          <p:cNvPr id="17" name="Text 15"/>
           <p:cNvSpPr/>
           <p:nvPr/>
         </p:nvSpPr>
@@ -8471,7 +7991,7 @@
       </p:sp>
       <p:sp>
         <p:nvSpPr>
-          <p:cNvPr id="23" name="Text 21"/>
+          <p:cNvPr id="18" name="Text 16"/>
           <p:cNvSpPr/>
           <p:nvPr/>
         </p:nvSpPr>
@@ -8979,13 +8499,11 @@
             </a:avLst>
           </a:prstGeom>
           <a:solidFill>
-            <a:srgbClr val="FFFFFF">
-              <a:alpha val="88000"/>
-            </a:srgbClr>
+            <a:srgbClr val="FFFFFF"/>
           </a:solidFill>
           <a:ln w="12700">
             <a:solidFill>
-              <a:srgbClr val="D6E8F2"/>
+              <a:srgbClr val="B9D7E6"/>
             </a:solidFill>
             <a:prstDash val="solid"/>
           </a:ln>
@@ -8993,190 +8511,112 @@
       </p:sp>
       <p:sp>
         <p:nvSpPr>
-          <p:cNvPr id="14" name="Shape 12"/>
-          <p:cNvSpPr/>
-          <p:nvPr/>
-        </p:nvSpPr>
-        <p:spPr>
-          <a:xfrm>
-            <a:off x="7891272" y="3108960"/>
-            <a:ext cx="566928" cy="566928"/>
-          </a:xfrm>
-          <a:prstGeom prst="ellipse">
-            <a:avLst/>
-          </a:prstGeom>
-          <a:solidFill>
-            <a:srgbClr val="0068B7"/>
-          </a:solidFill>
-          <a:ln w="12700">
-            <a:solidFill>
-              <a:srgbClr val="0068B7"/>
-            </a:solidFill>
-            <a:prstDash val="solid"/>
-          </a:ln>
-        </p:spPr>
-      </p:sp>
-      <p:sp>
-        <p:nvSpPr>
-          <p:cNvPr id="15" name="Shape 13"/>
-          <p:cNvSpPr/>
-          <p:nvPr/>
-        </p:nvSpPr>
-        <p:spPr>
-          <a:xfrm>
-            <a:off x="10287000" y="3108960"/>
-            <a:ext cx="566928" cy="566928"/>
-          </a:xfrm>
-          <a:prstGeom prst="ellipse">
-            <a:avLst/>
-          </a:prstGeom>
-          <a:solidFill>
-            <a:srgbClr val="2F8A28"/>
-          </a:solidFill>
-          <a:ln w="12700">
-            <a:solidFill>
-              <a:srgbClr val="2F8A28"/>
-            </a:solidFill>
-            <a:prstDash val="solid"/>
-          </a:ln>
-        </p:spPr>
+          <p:cNvPr id="14" name="Text 12"/>
+          <p:cNvSpPr/>
+          <p:nvPr/>
+        </p:nvSpPr>
+        <p:spPr>
+          <a:xfrm>
+            <a:off x="7799832" y="2935224"/>
+            <a:ext cx="3145536" cy="256032"/>
+          </a:xfrm>
+          <a:prstGeom prst="rect">
+            <a:avLst/>
+          </a:prstGeom>
+          <a:noFill/>
+          <a:ln/>
+        </p:spPr>
+        <p:txBody>
+          <a:bodyPr wrap="square" lIns="0" tIns="0" rIns="0" bIns="0" rtlCol="0" anchor="ctr"/>
+          <a:lstStyle/>
+          <a:p>
+            <a:pPr indent="0" marL="0">
+              <a:buNone/>
+            </a:pPr>
+            <a:r>
+              <a:rPr lang="en-US" sz="1300" b="1" dirty="0">
+                <a:solidFill>
+                  <a:srgbClr val="0068B7"/>
+                </a:solidFill>
+                <a:latin typeface="Aptos" pitchFamily="34" charset="0"/>
+                <a:ea typeface="Aptos" pitchFamily="34" charset="-122"/>
+                <a:cs typeface="Aptos" pitchFamily="34" charset="-120"/>
+              </a:rPr>
+              <a:t>Concept checkpoints</a:t>
+            </a:r>
+            <a:endParaRPr lang="en-US" sz="1300" dirty="0"/>
+          </a:p>
+        </p:txBody>
+      </p:sp>
+      <p:sp>
+        <p:nvSpPr>
+          <p:cNvPr id="15" name="Text 13"/>
+          <p:cNvSpPr/>
+          <p:nvPr/>
+        </p:nvSpPr>
+        <p:spPr>
+          <a:xfrm>
+            <a:off x="7818120" y="3300984"/>
+            <a:ext cx="3090672" cy="877824"/>
+          </a:xfrm>
+          <a:prstGeom prst="rect">
+            <a:avLst/>
+          </a:prstGeom>
+          <a:noFill/>
+          <a:ln/>
+        </p:spPr>
+        <p:txBody>
+          <a:bodyPr wrap="square" lIns="254" tIns="254" rIns="254" bIns="254" rtlCol="0" anchor="t">
+            <a:normAutofit/>
+          </a:bodyPr>
+          <a:lstStyle/>
+          <a:p>
+            <a:r>
+              <a:rPr lang="en-US" sz="1380" dirty="0">
+                <a:solidFill>
+                  <a:srgbClr val="17364A"/>
+                </a:solidFill>
+                <a:latin typeface="Aptos" pitchFamily="34" charset="0"/>
+                <a:ea typeface="Aptos" pitchFamily="34" charset="-122"/>
+                <a:cs typeface="Aptos" pitchFamily="34" charset="-120"/>
+              </a:rPr>
+              <a:t>An AI output may be a draft, a suggestion, a risk score, a classification, a summary, a.</a:t>
+            </a:r>
+            <a:endParaRPr lang="en-US" sz="1380" dirty="0"/>
+          </a:p>
+          <a:p>
+            <a:r>
+              <a:rPr lang="en-US" sz="1380" dirty="0">
+                <a:solidFill>
+                  <a:srgbClr val="17364A"/>
+                </a:solidFill>
+                <a:latin typeface="Aptos" pitchFamily="34" charset="0"/>
+                <a:ea typeface="Aptos" pitchFamily="34" charset="-122"/>
+                <a:cs typeface="Aptos" pitchFamily="34" charset="-120"/>
+              </a:rPr>
+              <a:t>A draft that a trained staff member reviews may be low risk.</a:t>
+            </a:r>
+            <a:endParaRPr lang="en-US" sz="1380" dirty="0"/>
+          </a:p>
+          <a:p>
+            <a:r>
+              <a:rPr lang="en-US" sz="1380" dirty="0">
+                <a:solidFill>
+                  <a:srgbClr val="17364A"/>
+                </a:solidFill>
+                <a:latin typeface="Aptos" pitchFamily="34" charset="0"/>
+                <a:ea typeface="Aptos" pitchFamily="34" charset="-122"/>
+                <a:cs typeface="Aptos" pitchFamily="34" charset="-120"/>
+              </a:rPr>
+              <a:t>A score that determines who receives outreach first, which complaint receives inspection,.</a:t>
+            </a:r>
+            <a:endParaRPr lang="en-US" sz="1380" dirty="0"/>
+          </a:p>
+        </p:txBody>
       </p:sp>
       <p:sp>
         <p:nvSpPr>
           <p:cNvPr id="16" name="Shape 14"/>
-          <p:cNvSpPr/>
-          <p:nvPr/>
-        </p:nvSpPr>
-        <p:spPr>
-          <a:xfrm>
-            <a:off x="9089136" y="3456432"/>
-            <a:ext cx="566928" cy="566928"/>
-          </a:xfrm>
-          <a:prstGeom prst="ellipse">
-            <a:avLst/>
-          </a:prstGeom>
-          <a:solidFill>
-            <a:srgbClr val="6A4CA3"/>
-          </a:solidFill>
-          <a:ln w="12700">
-            <a:solidFill>
-              <a:srgbClr val="6A4CA3"/>
-            </a:solidFill>
-            <a:prstDash val="solid"/>
-          </a:ln>
-        </p:spPr>
-      </p:sp>
-      <p:sp>
-        <p:nvSpPr>
-          <p:cNvPr id="17" name="Shape 15"/>
-          <p:cNvSpPr/>
-          <p:nvPr/>
-        </p:nvSpPr>
-        <p:spPr>
-          <a:xfrm>
-            <a:off x="8385048" y="3419856"/>
-            <a:ext cx="1975104" cy="0"/>
-          </a:xfrm>
-          <a:prstGeom prst="line">
-            <a:avLst/>
-          </a:prstGeom>
-          <a:noFill/>
-          <a:ln w="25400">
-            <a:solidFill>
-              <a:srgbClr val="8ABBD8"/>
-            </a:solidFill>
-            <a:prstDash val="solid"/>
-          </a:ln>
-        </p:spPr>
-      </p:sp>
-      <p:sp>
-        <p:nvSpPr>
-          <p:cNvPr id="18" name="Shape 16"/>
-          <p:cNvSpPr/>
-          <p:nvPr/>
-        </p:nvSpPr>
-        <p:spPr>
-          <a:xfrm>
-            <a:off x="8202168" y="3630168"/>
-            <a:ext cx="1170432" cy="118872"/>
-          </a:xfrm>
-          <a:prstGeom prst="line">
-            <a:avLst/>
-          </a:prstGeom>
-          <a:noFill/>
-          <a:ln w="25400">
-            <a:solidFill>
-              <a:srgbClr val="8ABBD8"/>
-            </a:solidFill>
-            <a:prstDash val="solid"/>
-          </a:ln>
-        </p:spPr>
-      </p:sp>
-      <p:sp>
-        <p:nvSpPr>
-          <p:cNvPr id="19" name="Shape 17"/>
-          <p:cNvSpPr/>
-          <p:nvPr/>
-        </p:nvSpPr>
-        <p:spPr>
-          <a:xfrm>
-            <a:off x="10543032" y="3630168"/>
-            <a:ext cx="-1170432" cy="118872"/>
-          </a:xfrm>
-          <a:prstGeom prst="line">
-            <a:avLst/>
-          </a:prstGeom>
-          <a:noFill/>
-          <a:ln w="25400">
-            <a:solidFill>
-              <a:srgbClr val="8ABBD8"/>
-            </a:solidFill>
-            <a:prstDash val="solid"/>
-          </a:ln>
-        </p:spPr>
-      </p:sp>
-      <p:sp>
-        <p:nvSpPr>
-          <p:cNvPr id="20" name="Text 18"/>
-          <p:cNvSpPr/>
-          <p:nvPr/>
-        </p:nvSpPr>
-        <p:spPr>
-          <a:xfrm>
-            <a:off x="7863840" y="4069080"/>
-            <a:ext cx="3017520" cy="164592"/>
-          </a:xfrm>
-          <a:prstGeom prst="rect">
-            <a:avLst/>
-          </a:prstGeom>
-          <a:noFill/>
-          <a:ln/>
-        </p:spPr>
-        <p:txBody>
-          <a:bodyPr wrap="square" lIns="0" tIns="0" rIns="0" bIns="0" rtlCol="0" anchor="ctr"/>
-          <a:lstStyle/>
-          <a:p>
-            <a:pPr algn="ctr" indent="0" marL="0">
-              <a:buNone/>
-            </a:pPr>
-            <a:r>
-              <a:rPr lang="en-US" sz="900" b="1" dirty="0">
-                <a:solidFill>
-                  <a:srgbClr val="003A63"/>
-                </a:solidFill>
-                <a:latin typeface="Aptos" pitchFamily="34" charset="0"/>
-                <a:ea typeface="Aptos" pitchFamily="34" charset="-122"/>
-                <a:cs typeface="Aptos" pitchFamily="34" charset="-120"/>
-              </a:rPr>
-              <a:t>Decision rights</a:t>
-            </a:r>
-            <a:endParaRPr lang="en-US" sz="900" dirty="0"/>
-          </a:p>
-        </p:txBody>
-      </p:sp>
-      <p:sp>
-        <p:nvSpPr>
-          <p:cNvPr id="21" name="Shape 19"/>
           <p:cNvSpPr/>
           <p:nvPr/>
         </p:nvSpPr>
@@ -9203,7 +8643,7 @@
       </p:sp>
       <p:sp>
         <p:nvSpPr>
-          <p:cNvPr id="22" name="Text 20"/>
+          <p:cNvPr id="17" name="Text 15"/>
           <p:cNvSpPr/>
           <p:nvPr/>
         </p:nvSpPr>
@@ -9242,7 +8682,7 @@
       </p:sp>
       <p:sp>
         <p:nvSpPr>
-          <p:cNvPr id="23" name="Text 21"/>
+          <p:cNvPr id="18" name="Text 16"/>
           <p:cNvSpPr/>
           <p:nvPr/>
         </p:nvSpPr>
@@ -9750,13 +9190,11 @@
             </a:avLst>
           </a:prstGeom>
           <a:solidFill>
-            <a:srgbClr val="FFFFFF">
-              <a:alpha val="88000"/>
-            </a:srgbClr>
+            <a:srgbClr val="FFFFFF"/>
           </a:solidFill>
           <a:ln w="12700">
             <a:solidFill>
-              <a:srgbClr val="D6E8F2"/>
+              <a:srgbClr val="B9D7E6"/>
             </a:solidFill>
             <a:prstDash val="solid"/>
           </a:ln>
@@ -9764,190 +9202,112 @@
       </p:sp>
       <p:sp>
         <p:nvSpPr>
-          <p:cNvPr id="14" name="Shape 12"/>
-          <p:cNvSpPr/>
-          <p:nvPr/>
-        </p:nvSpPr>
-        <p:spPr>
-          <a:xfrm>
-            <a:off x="7891272" y="3108960"/>
-            <a:ext cx="566928" cy="566928"/>
-          </a:xfrm>
-          <a:prstGeom prst="ellipse">
-            <a:avLst/>
-          </a:prstGeom>
-          <a:solidFill>
-            <a:srgbClr val="0068B7"/>
-          </a:solidFill>
-          <a:ln w="12700">
-            <a:solidFill>
-              <a:srgbClr val="0068B7"/>
-            </a:solidFill>
-            <a:prstDash val="solid"/>
-          </a:ln>
-        </p:spPr>
-      </p:sp>
-      <p:sp>
-        <p:nvSpPr>
-          <p:cNvPr id="15" name="Shape 13"/>
-          <p:cNvSpPr/>
-          <p:nvPr/>
-        </p:nvSpPr>
-        <p:spPr>
-          <a:xfrm>
-            <a:off x="10287000" y="3108960"/>
-            <a:ext cx="566928" cy="566928"/>
-          </a:xfrm>
-          <a:prstGeom prst="ellipse">
-            <a:avLst/>
-          </a:prstGeom>
-          <a:solidFill>
-            <a:srgbClr val="2F8A28"/>
-          </a:solidFill>
-          <a:ln w="12700">
-            <a:solidFill>
-              <a:srgbClr val="2F8A28"/>
-            </a:solidFill>
-            <a:prstDash val="solid"/>
-          </a:ln>
-        </p:spPr>
+          <p:cNvPr id="14" name="Text 12"/>
+          <p:cNvSpPr/>
+          <p:nvPr/>
+        </p:nvSpPr>
+        <p:spPr>
+          <a:xfrm>
+            <a:off x="7799832" y="2935224"/>
+            <a:ext cx="3145536" cy="256032"/>
+          </a:xfrm>
+          <a:prstGeom prst="rect">
+            <a:avLst/>
+          </a:prstGeom>
+          <a:noFill/>
+          <a:ln/>
+        </p:spPr>
+        <p:txBody>
+          <a:bodyPr wrap="square" lIns="0" tIns="0" rIns="0" bIns="0" rtlCol="0" anchor="ctr"/>
+          <a:lstStyle/>
+          <a:p>
+            <a:pPr indent="0" marL="0">
+              <a:buNone/>
+            </a:pPr>
+            <a:r>
+              <a:rPr lang="en-US" sz="1300" b="1" dirty="0">
+                <a:solidFill>
+                  <a:srgbClr val="0068B7"/>
+                </a:solidFill>
+                <a:latin typeface="Aptos" pitchFamily="34" charset="0"/>
+                <a:ea typeface="Aptos" pitchFamily="34" charset="-122"/>
+                <a:cs typeface="Aptos" pitchFamily="34" charset="-120"/>
+              </a:rPr>
+              <a:t>Concept checkpoints</a:t>
+            </a:r>
+            <a:endParaRPr lang="en-US" sz="1300" dirty="0"/>
+          </a:p>
+        </p:txBody>
+      </p:sp>
+      <p:sp>
+        <p:nvSpPr>
+          <p:cNvPr id="15" name="Text 13"/>
+          <p:cNvSpPr/>
+          <p:nvPr/>
+        </p:nvSpPr>
+        <p:spPr>
+          <a:xfrm>
+            <a:off x="7818120" y="3300984"/>
+            <a:ext cx="3090672" cy="877824"/>
+          </a:xfrm>
+          <a:prstGeom prst="rect">
+            <a:avLst/>
+          </a:prstGeom>
+          <a:noFill/>
+          <a:ln/>
+        </p:spPr>
+        <p:txBody>
+          <a:bodyPr wrap="square" lIns="254" tIns="254" rIns="254" bIns="254" rtlCol="0" anchor="t">
+            <a:normAutofit/>
+          </a:bodyPr>
+          <a:lstStyle/>
+          <a:p>
+            <a:r>
+              <a:rPr lang="en-US" sz="1380" dirty="0">
+                <a:solidFill>
+                  <a:srgbClr val="17364A"/>
+                </a:solidFill>
+                <a:latin typeface="Aptos" pitchFamily="34" charset="0"/>
+                <a:ea typeface="Aptos" pitchFamily="34" charset="-122"/>
+                <a:cs typeface="Aptos" pitchFamily="34" charset="-120"/>
+              </a:rPr>
+              <a:t>The seventh decision is planning oversight after approval.</a:t>
+            </a:r>
+            <a:endParaRPr lang="en-US" sz="1380" dirty="0"/>
+          </a:p>
+          <a:p>
+            <a:r>
+              <a:rPr lang="en-US" sz="1380" dirty="0">
+                <a:solidFill>
+                  <a:srgbClr val="17364A"/>
+                </a:solidFill>
+                <a:latin typeface="Aptos" pitchFamily="34" charset="0"/>
+                <a:ea typeface="Aptos" pitchFamily="34" charset="-122"/>
+                <a:cs typeface="Aptos" pitchFamily="34" charset="-120"/>
+              </a:rPr>
+              <a:t>AI use should not be approved once and forgotten.</a:t>
+            </a:r>
+            <a:endParaRPr lang="en-US" sz="1380" dirty="0"/>
+          </a:p>
+          <a:p>
+            <a:r>
+              <a:rPr lang="en-US" sz="1380" dirty="0">
+                <a:solidFill>
+                  <a:srgbClr val="17364A"/>
+                </a:solidFill>
+                <a:latin typeface="Aptos" pitchFamily="34" charset="0"/>
+                <a:ea typeface="Aptos" pitchFamily="34" charset="-122"/>
+                <a:cs typeface="Aptos" pitchFamily="34" charset="-120"/>
+              </a:rPr>
+              <a:t>The agency should know what evidence will be reviewed over time, such as error reports,.</a:t>
+            </a:r>
+            <a:endParaRPr lang="en-US" sz="1380" dirty="0"/>
+          </a:p>
+        </p:txBody>
       </p:sp>
       <p:sp>
         <p:nvSpPr>
           <p:cNvPr id="16" name="Shape 14"/>
-          <p:cNvSpPr/>
-          <p:nvPr/>
-        </p:nvSpPr>
-        <p:spPr>
-          <a:xfrm>
-            <a:off x="9089136" y="3456432"/>
-            <a:ext cx="566928" cy="566928"/>
-          </a:xfrm>
-          <a:prstGeom prst="ellipse">
-            <a:avLst/>
-          </a:prstGeom>
-          <a:solidFill>
-            <a:srgbClr val="6A4CA3"/>
-          </a:solidFill>
-          <a:ln w="12700">
-            <a:solidFill>
-              <a:srgbClr val="6A4CA3"/>
-            </a:solidFill>
-            <a:prstDash val="solid"/>
-          </a:ln>
-        </p:spPr>
-      </p:sp>
-      <p:sp>
-        <p:nvSpPr>
-          <p:cNvPr id="17" name="Shape 15"/>
-          <p:cNvSpPr/>
-          <p:nvPr/>
-        </p:nvSpPr>
-        <p:spPr>
-          <a:xfrm>
-            <a:off x="8385048" y="3419856"/>
-            <a:ext cx="1975104" cy="0"/>
-          </a:xfrm>
-          <a:prstGeom prst="line">
-            <a:avLst/>
-          </a:prstGeom>
-          <a:noFill/>
-          <a:ln w="25400">
-            <a:solidFill>
-              <a:srgbClr val="8ABBD8"/>
-            </a:solidFill>
-            <a:prstDash val="solid"/>
-          </a:ln>
-        </p:spPr>
-      </p:sp>
-      <p:sp>
-        <p:nvSpPr>
-          <p:cNvPr id="18" name="Shape 16"/>
-          <p:cNvSpPr/>
-          <p:nvPr/>
-        </p:nvSpPr>
-        <p:spPr>
-          <a:xfrm>
-            <a:off x="8202168" y="3630168"/>
-            <a:ext cx="1170432" cy="118872"/>
-          </a:xfrm>
-          <a:prstGeom prst="line">
-            <a:avLst/>
-          </a:prstGeom>
-          <a:noFill/>
-          <a:ln w="25400">
-            <a:solidFill>
-              <a:srgbClr val="8ABBD8"/>
-            </a:solidFill>
-            <a:prstDash val="solid"/>
-          </a:ln>
-        </p:spPr>
-      </p:sp>
-      <p:sp>
-        <p:nvSpPr>
-          <p:cNvPr id="19" name="Shape 17"/>
-          <p:cNvSpPr/>
-          <p:nvPr/>
-        </p:nvSpPr>
-        <p:spPr>
-          <a:xfrm>
-            <a:off x="10543032" y="3630168"/>
-            <a:ext cx="-1170432" cy="118872"/>
-          </a:xfrm>
-          <a:prstGeom prst="line">
-            <a:avLst/>
-          </a:prstGeom>
-          <a:noFill/>
-          <a:ln w="25400">
-            <a:solidFill>
-              <a:srgbClr val="8ABBD8"/>
-            </a:solidFill>
-            <a:prstDash val="solid"/>
-          </a:ln>
-        </p:spPr>
-      </p:sp>
-      <p:sp>
-        <p:nvSpPr>
-          <p:cNvPr id="20" name="Text 18"/>
-          <p:cNvSpPr/>
-          <p:nvPr/>
-        </p:nvSpPr>
-        <p:spPr>
-          <a:xfrm>
-            <a:off x="7863840" y="4069080"/>
-            <a:ext cx="3017520" cy="164592"/>
-          </a:xfrm>
-          <a:prstGeom prst="rect">
-            <a:avLst/>
-          </a:prstGeom>
-          <a:noFill/>
-          <a:ln/>
-        </p:spPr>
-        <p:txBody>
-          <a:bodyPr wrap="square" lIns="0" tIns="0" rIns="0" bIns="0" rtlCol="0" anchor="ctr"/>
-          <a:lstStyle/>
-          <a:p>
-            <a:pPr algn="ctr" indent="0" marL="0">
-              <a:buNone/>
-            </a:pPr>
-            <a:r>
-              <a:rPr lang="en-US" sz="900" b="1" dirty="0">
-                <a:solidFill>
-                  <a:srgbClr val="003A63"/>
-                </a:solidFill>
-                <a:latin typeface="Aptos" pitchFamily="34" charset="0"/>
-                <a:ea typeface="Aptos" pitchFamily="34" charset="-122"/>
-                <a:cs typeface="Aptos" pitchFamily="34" charset="-120"/>
-              </a:rPr>
-              <a:t>Decision rights</a:t>
-            </a:r>
-            <a:endParaRPr lang="en-US" sz="900" dirty="0"/>
-          </a:p>
-        </p:txBody>
-      </p:sp>
-      <p:sp>
-        <p:nvSpPr>
-          <p:cNvPr id="21" name="Shape 19"/>
           <p:cNvSpPr/>
           <p:nvPr/>
         </p:nvSpPr>
@@ -9974,7 +9334,7 @@
       </p:sp>
       <p:sp>
         <p:nvSpPr>
-          <p:cNvPr id="22" name="Text 20"/>
+          <p:cNvPr id="17" name="Text 15"/>
           <p:cNvSpPr/>
           <p:nvPr/>
         </p:nvSpPr>
@@ -10013,7 +9373,7 @@
       </p:sp>
       <p:sp>
         <p:nvSpPr>
-          <p:cNvPr id="23" name="Text 21"/>
+          <p:cNvPr id="18" name="Text 16"/>
           <p:cNvSpPr/>
           <p:nvPr/>
         </p:nvSpPr>
@@ -10521,13 +9881,11 @@
             </a:avLst>
           </a:prstGeom>
           <a:solidFill>
-            <a:srgbClr val="FFFFFF">
-              <a:alpha val="88000"/>
-            </a:srgbClr>
+            <a:srgbClr val="FFFFFF"/>
           </a:solidFill>
           <a:ln w="12700">
             <a:solidFill>
-              <a:srgbClr val="D6E8F2"/>
+              <a:srgbClr val="B9D7E6"/>
             </a:solidFill>
             <a:prstDash val="solid"/>
           </a:ln>
@@ -10535,190 +9893,112 @@
       </p:sp>
       <p:sp>
         <p:nvSpPr>
-          <p:cNvPr id="14" name="Shape 12"/>
-          <p:cNvSpPr/>
-          <p:nvPr/>
-        </p:nvSpPr>
-        <p:spPr>
-          <a:xfrm>
-            <a:off x="7891272" y="3108960"/>
-            <a:ext cx="566928" cy="566928"/>
-          </a:xfrm>
-          <a:prstGeom prst="ellipse">
-            <a:avLst/>
-          </a:prstGeom>
-          <a:solidFill>
-            <a:srgbClr val="0068B7"/>
-          </a:solidFill>
-          <a:ln w="12700">
-            <a:solidFill>
-              <a:srgbClr val="0068B7"/>
-            </a:solidFill>
-            <a:prstDash val="solid"/>
-          </a:ln>
-        </p:spPr>
-      </p:sp>
-      <p:sp>
-        <p:nvSpPr>
-          <p:cNvPr id="15" name="Shape 13"/>
-          <p:cNvSpPr/>
-          <p:nvPr/>
-        </p:nvSpPr>
-        <p:spPr>
-          <a:xfrm>
-            <a:off x="10287000" y="3108960"/>
-            <a:ext cx="566928" cy="566928"/>
-          </a:xfrm>
-          <a:prstGeom prst="ellipse">
-            <a:avLst/>
-          </a:prstGeom>
-          <a:solidFill>
-            <a:srgbClr val="2F8A28"/>
-          </a:solidFill>
-          <a:ln w="12700">
-            <a:solidFill>
-              <a:srgbClr val="2F8A28"/>
-            </a:solidFill>
-            <a:prstDash val="solid"/>
-          </a:ln>
-        </p:spPr>
+          <p:cNvPr id="14" name="Text 12"/>
+          <p:cNvSpPr/>
+          <p:nvPr/>
+        </p:nvSpPr>
+        <p:spPr>
+          <a:xfrm>
+            <a:off x="7799832" y="2935224"/>
+            <a:ext cx="3145536" cy="256032"/>
+          </a:xfrm>
+          <a:prstGeom prst="rect">
+            <a:avLst/>
+          </a:prstGeom>
+          <a:noFill/>
+          <a:ln/>
+        </p:spPr>
+        <p:txBody>
+          <a:bodyPr wrap="square" lIns="0" tIns="0" rIns="0" bIns="0" rtlCol="0" anchor="ctr"/>
+          <a:lstStyle/>
+          <a:p>
+            <a:pPr indent="0" marL="0">
+              <a:buNone/>
+            </a:pPr>
+            <a:r>
+              <a:rPr lang="en-US" sz="1300" b="1" dirty="0">
+                <a:solidFill>
+                  <a:srgbClr val="0068B7"/>
+                </a:solidFill>
+                <a:latin typeface="Aptos" pitchFamily="34" charset="0"/>
+                <a:ea typeface="Aptos" pitchFamily="34" charset="-122"/>
+                <a:cs typeface="Aptos" pitchFamily="34" charset="-120"/>
+              </a:rPr>
+              <a:t>Concept checkpoints</a:t>
+            </a:r>
+            <a:endParaRPr lang="en-US" sz="1300" dirty="0"/>
+          </a:p>
+        </p:txBody>
+      </p:sp>
+      <p:sp>
+        <p:nvSpPr>
+          <p:cNvPr id="15" name="Text 13"/>
+          <p:cNvSpPr/>
+          <p:nvPr/>
+        </p:nvSpPr>
+        <p:spPr>
+          <a:xfrm>
+            <a:off x="7818120" y="3300984"/>
+            <a:ext cx="3090672" cy="877824"/>
+          </a:xfrm>
+          <a:prstGeom prst="rect">
+            <a:avLst/>
+          </a:prstGeom>
+          <a:noFill/>
+          <a:ln/>
+        </p:spPr>
+        <p:txBody>
+          <a:bodyPr wrap="square" lIns="254" tIns="254" rIns="254" bIns="254" rtlCol="0" anchor="t">
+            <a:normAutofit/>
+          </a:bodyPr>
+          <a:lstStyle/>
+          <a:p>
+            <a:r>
+              <a:rPr lang="en-US" sz="1380" dirty="0">
+                <a:solidFill>
+                  <a:srgbClr val="17364A"/>
+                </a:solidFill>
+                <a:latin typeface="Aptos" pitchFamily="34" charset="0"/>
+                <a:ea typeface="Aptos" pitchFamily="34" charset="-122"/>
+                <a:cs typeface="Aptos" pitchFamily="34" charset="-120"/>
+              </a:rPr>
+              <a:t>Staff may use public or personal AI tools before the agency has reviewed privacy,.</a:t>
+            </a:r>
+            <a:endParaRPr lang="en-US" sz="1380" dirty="0"/>
+          </a:p>
+          <a:p>
+            <a:r>
+              <a:rPr lang="en-US" sz="1380" dirty="0">
+                <a:solidFill>
+                  <a:srgbClr val="17364A"/>
+                </a:solidFill>
+                <a:latin typeface="Aptos" pitchFamily="34" charset="0"/>
+                <a:ea typeface="Aptos" pitchFamily="34" charset="-122"/>
+                <a:cs typeface="Aptos" pitchFamily="34" charset="-120"/>
+              </a:rPr>
+              <a:t>Guardrail: publish a plain-language list of approved, restricted, and prohibited uses,.</a:t>
+            </a:r>
+            <a:endParaRPr lang="en-US" sz="1380" dirty="0"/>
+          </a:p>
+          <a:p>
+            <a:r>
+              <a:rPr lang="en-US" sz="1380" dirty="0">
+                <a:solidFill>
+                  <a:srgbClr val="17364A"/>
+                </a:solidFill>
+                <a:latin typeface="Aptos" pitchFamily="34" charset="0"/>
+                <a:ea typeface="Aptos" pitchFamily="34" charset="-122"/>
+                <a:cs typeface="Aptos" pitchFamily="34" charset="-120"/>
+              </a:rPr>
+              <a:t>Hidden automation.</a:t>
+            </a:r>
+            <a:endParaRPr lang="en-US" sz="1380" dirty="0"/>
+          </a:p>
+        </p:txBody>
       </p:sp>
       <p:sp>
         <p:nvSpPr>
           <p:cNvPr id="16" name="Shape 14"/>
-          <p:cNvSpPr/>
-          <p:nvPr/>
-        </p:nvSpPr>
-        <p:spPr>
-          <a:xfrm>
-            <a:off x="9089136" y="3456432"/>
-            <a:ext cx="566928" cy="566928"/>
-          </a:xfrm>
-          <a:prstGeom prst="ellipse">
-            <a:avLst/>
-          </a:prstGeom>
-          <a:solidFill>
-            <a:srgbClr val="6A4CA3"/>
-          </a:solidFill>
-          <a:ln w="12700">
-            <a:solidFill>
-              <a:srgbClr val="6A4CA3"/>
-            </a:solidFill>
-            <a:prstDash val="solid"/>
-          </a:ln>
-        </p:spPr>
-      </p:sp>
-      <p:sp>
-        <p:nvSpPr>
-          <p:cNvPr id="17" name="Shape 15"/>
-          <p:cNvSpPr/>
-          <p:nvPr/>
-        </p:nvSpPr>
-        <p:spPr>
-          <a:xfrm>
-            <a:off x="8385048" y="3419856"/>
-            <a:ext cx="1975104" cy="0"/>
-          </a:xfrm>
-          <a:prstGeom prst="line">
-            <a:avLst/>
-          </a:prstGeom>
-          <a:noFill/>
-          <a:ln w="25400">
-            <a:solidFill>
-              <a:srgbClr val="8ABBD8"/>
-            </a:solidFill>
-            <a:prstDash val="solid"/>
-          </a:ln>
-        </p:spPr>
-      </p:sp>
-      <p:sp>
-        <p:nvSpPr>
-          <p:cNvPr id="18" name="Shape 16"/>
-          <p:cNvSpPr/>
-          <p:nvPr/>
-        </p:nvSpPr>
-        <p:spPr>
-          <a:xfrm>
-            <a:off x="8202168" y="3630168"/>
-            <a:ext cx="1170432" cy="118872"/>
-          </a:xfrm>
-          <a:prstGeom prst="line">
-            <a:avLst/>
-          </a:prstGeom>
-          <a:noFill/>
-          <a:ln w="25400">
-            <a:solidFill>
-              <a:srgbClr val="8ABBD8"/>
-            </a:solidFill>
-            <a:prstDash val="solid"/>
-          </a:ln>
-        </p:spPr>
-      </p:sp>
-      <p:sp>
-        <p:nvSpPr>
-          <p:cNvPr id="19" name="Shape 17"/>
-          <p:cNvSpPr/>
-          <p:nvPr/>
-        </p:nvSpPr>
-        <p:spPr>
-          <a:xfrm>
-            <a:off x="10543032" y="3630168"/>
-            <a:ext cx="-1170432" cy="118872"/>
-          </a:xfrm>
-          <a:prstGeom prst="line">
-            <a:avLst/>
-          </a:prstGeom>
-          <a:noFill/>
-          <a:ln w="25400">
-            <a:solidFill>
-              <a:srgbClr val="8ABBD8"/>
-            </a:solidFill>
-            <a:prstDash val="solid"/>
-          </a:ln>
-        </p:spPr>
-      </p:sp>
-      <p:sp>
-        <p:nvSpPr>
-          <p:cNvPr id="20" name="Text 18"/>
-          <p:cNvSpPr/>
-          <p:nvPr/>
-        </p:nvSpPr>
-        <p:spPr>
-          <a:xfrm>
-            <a:off x="7863840" y="4069080"/>
-            <a:ext cx="3017520" cy="164592"/>
-          </a:xfrm>
-          <a:prstGeom prst="rect">
-            <a:avLst/>
-          </a:prstGeom>
-          <a:noFill/>
-          <a:ln/>
-        </p:spPr>
-        <p:txBody>
-          <a:bodyPr wrap="square" lIns="0" tIns="0" rIns="0" bIns="0" rtlCol="0" anchor="ctr"/>
-          <a:lstStyle/>
-          <a:p>
-            <a:pPr algn="ctr" indent="0" marL="0">
-              <a:buNone/>
-            </a:pPr>
-            <a:r>
-              <a:rPr lang="en-US" sz="900" b="1" dirty="0">
-                <a:solidFill>
-                  <a:srgbClr val="003A63"/>
-                </a:solidFill>
-                <a:latin typeface="Aptos" pitchFamily="34" charset="0"/>
-                <a:ea typeface="Aptos" pitchFamily="34" charset="-122"/>
-                <a:cs typeface="Aptos" pitchFamily="34" charset="-120"/>
-              </a:rPr>
-              <a:t>Decision rights</a:t>
-            </a:r>
-            <a:endParaRPr lang="en-US" sz="900" dirty="0"/>
-          </a:p>
-        </p:txBody>
-      </p:sp>
-      <p:sp>
-        <p:nvSpPr>
-          <p:cNvPr id="21" name="Shape 19"/>
           <p:cNvSpPr/>
           <p:nvPr/>
         </p:nvSpPr>
@@ -10745,7 +10025,7 @@
       </p:sp>
       <p:sp>
         <p:nvSpPr>
-          <p:cNvPr id="22" name="Text 20"/>
+          <p:cNvPr id="17" name="Text 15"/>
           <p:cNvSpPr/>
           <p:nvPr/>
         </p:nvSpPr>
@@ -10784,7 +10064,7 @@
       </p:sp>
       <p:sp>
         <p:nvSpPr>
-          <p:cNvPr id="23" name="Text 21"/>
+          <p:cNvPr id="18" name="Text 16"/>
           <p:cNvSpPr/>
           <p:nvPr/>
         </p:nvSpPr>
@@ -11292,13 +10572,11 @@
             </a:avLst>
           </a:prstGeom>
           <a:solidFill>
-            <a:srgbClr val="FFFFFF">
-              <a:alpha val="88000"/>
-            </a:srgbClr>
+            <a:srgbClr val="FFFFFF"/>
           </a:solidFill>
           <a:ln w="12700">
             <a:solidFill>
-              <a:srgbClr val="D6E8F2"/>
+              <a:srgbClr val="B9D7E6"/>
             </a:solidFill>
             <a:prstDash val="solid"/>
           </a:ln>
@@ -11306,190 +10584,112 @@
       </p:sp>
       <p:sp>
         <p:nvSpPr>
-          <p:cNvPr id="14" name="Shape 12"/>
-          <p:cNvSpPr/>
-          <p:nvPr/>
-        </p:nvSpPr>
-        <p:spPr>
-          <a:xfrm>
-            <a:off x="7891272" y="3108960"/>
-            <a:ext cx="566928" cy="566928"/>
-          </a:xfrm>
-          <a:prstGeom prst="ellipse">
-            <a:avLst/>
-          </a:prstGeom>
-          <a:solidFill>
-            <a:srgbClr val="0068B7"/>
-          </a:solidFill>
-          <a:ln w="12700">
-            <a:solidFill>
-              <a:srgbClr val="0068B7"/>
-            </a:solidFill>
-            <a:prstDash val="solid"/>
-          </a:ln>
-        </p:spPr>
-      </p:sp>
-      <p:sp>
-        <p:nvSpPr>
-          <p:cNvPr id="15" name="Shape 13"/>
-          <p:cNvSpPr/>
-          <p:nvPr/>
-        </p:nvSpPr>
-        <p:spPr>
-          <a:xfrm>
-            <a:off x="10287000" y="3108960"/>
-            <a:ext cx="566928" cy="566928"/>
-          </a:xfrm>
-          <a:prstGeom prst="ellipse">
-            <a:avLst/>
-          </a:prstGeom>
-          <a:solidFill>
-            <a:srgbClr val="2F8A28"/>
-          </a:solidFill>
-          <a:ln w="12700">
-            <a:solidFill>
-              <a:srgbClr val="2F8A28"/>
-            </a:solidFill>
-            <a:prstDash val="solid"/>
-          </a:ln>
-        </p:spPr>
+          <p:cNvPr id="14" name="Text 12"/>
+          <p:cNvSpPr/>
+          <p:nvPr/>
+        </p:nvSpPr>
+        <p:spPr>
+          <a:xfrm>
+            <a:off x="7799832" y="2935224"/>
+            <a:ext cx="3145536" cy="256032"/>
+          </a:xfrm>
+          <a:prstGeom prst="rect">
+            <a:avLst/>
+          </a:prstGeom>
+          <a:noFill/>
+          <a:ln/>
+        </p:spPr>
+        <p:txBody>
+          <a:bodyPr wrap="square" lIns="0" tIns="0" rIns="0" bIns="0" rtlCol="0" anchor="ctr"/>
+          <a:lstStyle/>
+          <a:p>
+            <a:pPr indent="0" marL="0">
+              <a:buNone/>
+            </a:pPr>
+            <a:r>
+              <a:rPr lang="en-US" sz="1300" b="1" dirty="0">
+                <a:solidFill>
+                  <a:srgbClr val="0068B7"/>
+                </a:solidFill>
+                <a:latin typeface="Aptos" pitchFamily="34" charset="0"/>
+                <a:ea typeface="Aptos" pitchFamily="34" charset="-122"/>
+                <a:cs typeface="Aptos" pitchFamily="34" charset="-120"/>
+              </a:rPr>
+              <a:t>Concept checkpoints</a:t>
+            </a:r>
+            <a:endParaRPr lang="en-US" sz="1300" dirty="0"/>
+          </a:p>
+        </p:txBody>
+      </p:sp>
+      <p:sp>
+        <p:nvSpPr>
+          <p:cNvPr id="15" name="Text 13"/>
+          <p:cNvSpPr/>
+          <p:nvPr/>
+        </p:nvSpPr>
+        <p:spPr>
+          <a:xfrm>
+            <a:off x="7818120" y="3300984"/>
+            <a:ext cx="3090672" cy="877824"/>
+          </a:xfrm>
+          <a:prstGeom prst="rect">
+            <a:avLst/>
+          </a:prstGeom>
+          <a:noFill/>
+          <a:ln/>
+        </p:spPr>
+        <p:txBody>
+          <a:bodyPr wrap="square" lIns="254" tIns="254" rIns="254" bIns="254" rtlCol="0" anchor="t">
+            <a:normAutofit/>
+          </a:bodyPr>
+          <a:lstStyle/>
+          <a:p>
+            <a:r>
+              <a:rPr lang="en-US" sz="1380" dirty="0">
+                <a:solidFill>
+                  <a:srgbClr val="17364A"/>
+                </a:solidFill>
+                <a:latin typeface="Aptos" pitchFamily="34" charset="0"/>
+                <a:ea typeface="Aptos" pitchFamily="34" charset="-122"/>
+                <a:cs typeface="Aptos" pitchFamily="34" charset="-120"/>
+              </a:rPr>
+              <a:t>Sensitive public health information can be exposed through inappropriate prompts, file.</a:t>
+            </a:r>
+            <a:endParaRPr lang="en-US" sz="1380" dirty="0"/>
+          </a:p>
+          <a:p>
+            <a:r>
+              <a:rPr lang="en-US" sz="1380" dirty="0">
+                <a:solidFill>
+                  <a:srgbClr val="17364A"/>
+                </a:solidFill>
+                <a:latin typeface="Aptos" pitchFamily="34" charset="0"/>
+                <a:ea typeface="Aptos" pitchFamily="34" charset="-122"/>
+                <a:cs typeface="Aptos" pitchFamily="34" charset="-120"/>
+              </a:rPr>
+              <a:t>Guardrail: require data classification, minimum necessary use, approved environments,.</a:t>
+            </a:r>
+            <a:endParaRPr lang="en-US" sz="1380" dirty="0"/>
+          </a:p>
+          <a:p>
+            <a:r>
+              <a:rPr lang="en-US" sz="1380" dirty="0">
+                <a:solidFill>
+                  <a:srgbClr val="17364A"/>
+                </a:solidFill>
+                <a:latin typeface="Aptos" pitchFamily="34" charset="0"/>
+                <a:ea typeface="Aptos" pitchFamily="34" charset="-122"/>
+                <a:cs typeface="Aptos" pitchFamily="34" charset="-120"/>
+              </a:rPr>
+              <a:t>Equity and representation harms.</a:t>
+            </a:r>
+            <a:endParaRPr lang="en-US" sz="1380" dirty="0"/>
+          </a:p>
+        </p:txBody>
       </p:sp>
       <p:sp>
         <p:nvSpPr>
           <p:cNvPr id="16" name="Shape 14"/>
-          <p:cNvSpPr/>
-          <p:nvPr/>
-        </p:nvSpPr>
-        <p:spPr>
-          <a:xfrm>
-            <a:off x="9089136" y="3456432"/>
-            <a:ext cx="566928" cy="566928"/>
-          </a:xfrm>
-          <a:prstGeom prst="ellipse">
-            <a:avLst/>
-          </a:prstGeom>
-          <a:solidFill>
-            <a:srgbClr val="6A4CA3"/>
-          </a:solidFill>
-          <a:ln w="12700">
-            <a:solidFill>
-              <a:srgbClr val="6A4CA3"/>
-            </a:solidFill>
-            <a:prstDash val="solid"/>
-          </a:ln>
-        </p:spPr>
-      </p:sp>
-      <p:sp>
-        <p:nvSpPr>
-          <p:cNvPr id="17" name="Shape 15"/>
-          <p:cNvSpPr/>
-          <p:nvPr/>
-        </p:nvSpPr>
-        <p:spPr>
-          <a:xfrm>
-            <a:off x="8385048" y="3419856"/>
-            <a:ext cx="1975104" cy="0"/>
-          </a:xfrm>
-          <a:prstGeom prst="line">
-            <a:avLst/>
-          </a:prstGeom>
-          <a:noFill/>
-          <a:ln w="25400">
-            <a:solidFill>
-              <a:srgbClr val="8ABBD8"/>
-            </a:solidFill>
-            <a:prstDash val="solid"/>
-          </a:ln>
-        </p:spPr>
-      </p:sp>
-      <p:sp>
-        <p:nvSpPr>
-          <p:cNvPr id="18" name="Shape 16"/>
-          <p:cNvSpPr/>
-          <p:nvPr/>
-        </p:nvSpPr>
-        <p:spPr>
-          <a:xfrm>
-            <a:off x="8202168" y="3630168"/>
-            <a:ext cx="1170432" cy="118872"/>
-          </a:xfrm>
-          <a:prstGeom prst="line">
-            <a:avLst/>
-          </a:prstGeom>
-          <a:noFill/>
-          <a:ln w="25400">
-            <a:solidFill>
-              <a:srgbClr val="8ABBD8"/>
-            </a:solidFill>
-            <a:prstDash val="solid"/>
-          </a:ln>
-        </p:spPr>
-      </p:sp>
-      <p:sp>
-        <p:nvSpPr>
-          <p:cNvPr id="19" name="Shape 17"/>
-          <p:cNvSpPr/>
-          <p:nvPr/>
-        </p:nvSpPr>
-        <p:spPr>
-          <a:xfrm>
-            <a:off x="10543032" y="3630168"/>
-            <a:ext cx="-1170432" cy="118872"/>
-          </a:xfrm>
-          <a:prstGeom prst="line">
-            <a:avLst/>
-          </a:prstGeom>
-          <a:noFill/>
-          <a:ln w="25400">
-            <a:solidFill>
-              <a:srgbClr val="8ABBD8"/>
-            </a:solidFill>
-            <a:prstDash val="solid"/>
-          </a:ln>
-        </p:spPr>
-      </p:sp>
-      <p:sp>
-        <p:nvSpPr>
-          <p:cNvPr id="20" name="Text 18"/>
-          <p:cNvSpPr/>
-          <p:nvPr/>
-        </p:nvSpPr>
-        <p:spPr>
-          <a:xfrm>
-            <a:off x="7863840" y="4069080"/>
-            <a:ext cx="3017520" cy="164592"/>
-          </a:xfrm>
-          <a:prstGeom prst="rect">
-            <a:avLst/>
-          </a:prstGeom>
-          <a:noFill/>
-          <a:ln/>
-        </p:spPr>
-        <p:txBody>
-          <a:bodyPr wrap="square" lIns="0" tIns="0" rIns="0" bIns="0" rtlCol="0" anchor="ctr"/>
-          <a:lstStyle/>
-          <a:p>
-            <a:pPr algn="ctr" indent="0" marL="0">
-              <a:buNone/>
-            </a:pPr>
-            <a:r>
-              <a:rPr lang="en-US" sz="900" b="1" dirty="0">
-                <a:solidFill>
-                  <a:srgbClr val="003A63"/>
-                </a:solidFill>
-                <a:latin typeface="Aptos" pitchFamily="34" charset="0"/>
-                <a:ea typeface="Aptos" pitchFamily="34" charset="-122"/>
-                <a:cs typeface="Aptos" pitchFamily="34" charset="-120"/>
-              </a:rPr>
-              <a:t>Decision rights</a:t>
-            </a:r>
-            <a:endParaRPr lang="en-US" sz="900" dirty="0"/>
-          </a:p>
-        </p:txBody>
-      </p:sp>
-      <p:sp>
-        <p:nvSpPr>
-          <p:cNvPr id="21" name="Shape 19"/>
           <p:cNvSpPr/>
           <p:nvPr/>
         </p:nvSpPr>
@@ -11516,7 +10716,7 @@
       </p:sp>
       <p:sp>
         <p:nvSpPr>
-          <p:cNvPr id="22" name="Text 20"/>
+          <p:cNvPr id="17" name="Text 15"/>
           <p:cNvSpPr/>
           <p:nvPr/>
         </p:nvSpPr>
@@ -11555,7 +10755,7 @@
       </p:sp>
       <p:sp>
         <p:nvSpPr>
-          <p:cNvPr id="23" name="Text 21"/>
+          <p:cNvPr id="18" name="Text 16"/>
           <p:cNvSpPr/>
           <p:nvPr/>
         </p:nvSpPr>
@@ -12088,20 +11288,20 @@
         </p:nvSpPr>
         <p:spPr>
           <a:xfrm>
-            <a:off x="7635240" y="3730752"/>
-            <a:ext cx="1033272" cy="749808"/>
+            <a:off x="7909560" y="3675888"/>
+            <a:ext cx="3154680" cy="1691640"/>
           </a:xfrm>
           <a:prstGeom prst="roundRect">
             <a:avLst>
-              <a:gd name="adj" fmla="val 14634"/>
+              <a:gd name="adj" fmla="val 6486"/>
             </a:avLst>
           </a:prstGeom>
           <a:solidFill>
-            <a:srgbClr val="0068B7"/>
+            <a:srgbClr val="FFFFFF"/>
           </a:solidFill>
           <a:ln w="12700">
             <a:solidFill>
-              <a:srgbClr val="0068B7"/>
+              <a:srgbClr val="B9D7E6"/>
             </a:solidFill>
             <a:prstDash val="solid"/>
           </a:ln>
@@ -12115,172 +11315,100 @@
         </p:nvSpPr>
         <p:spPr>
           <a:xfrm>
-            <a:off x="7708392" y="3922776"/>
-            <a:ext cx="886968" cy="310896"/>
-          </a:xfrm>
-          <a:prstGeom prst="rect">
-            <a:avLst/>
-          </a:prstGeom>
-          <a:noFill/>
-          <a:ln/>
-        </p:spPr>
-        <p:txBody>
-          <a:bodyPr wrap="square" lIns="0" tIns="0" rIns="0" bIns="0" rtlCol="0" anchor="ctr">
+            <a:off x="8074152" y="3822192"/>
+            <a:ext cx="2825496" cy="256032"/>
+          </a:xfrm>
+          <a:prstGeom prst="rect">
+            <a:avLst/>
+          </a:prstGeom>
+          <a:noFill/>
+          <a:ln/>
+        </p:spPr>
+        <p:txBody>
+          <a:bodyPr wrap="square" lIns="0" tIns="0" rIns="0" bIns="0" rtlCol="0" anchor="ctr"/>
+          <a:lstStyle/>
+          <a:p>
+            <a:pPr indent="0" marL="0">
+              <a:buNone/>
+            </a:pPr>
+            <a:r>
+              <a:rPr lang="en-US" sz="1300" b="1" dirty="0">
+                <a:solidFill>
+                  <a:srgbClr val="0068B7"/>
+                </a:solidFill>
+                <a:latin typeface="Aptos" pitchFamily="34" charset="0"/>
+                <a:ea typeface="Aptos" pitchFamily="34" charset="-122"/>
+                <a:cs typeface="Aptos" pitchFamily="34" charset="-120"/>
+              </a:rPr>
+              <a:t>Learning sequence</a:t>
+            </a:r>
+            <a:endParaRPr lang="en-US" sz="1300" dirty="0"/>
+          </a:p>
+        </p:txBody>
+      </p:sp>
+      <p:sp>
+        <p:nvSpPr>
+          <p:cNvPr id="15" name="Text 13"/>
+          <p:cNvSpPr/>
+          <p:nvPr/>
+        </p:nvSpPr>
+        <p:spPr>
+          <a:xfrm>
+            <a:off x="8092440" y="4187952"/>
+            <a:ext cx="2770632" cy="1033272"/>
+          </a:xfrm>
+          <a:prstGeom prst="rect">
+            <a:avLst/>
+          </a:prstGeom>
+          <a:noFill/>
+          <a:ln/>
+        </p:spPr>
+        <p:txBody>
+          <a:bodyPr wrap="square" lIns="254" tIns="254" rIns="254" bIns="254" rtlCol="0" anchor="t">
             <a:normAutofit/>
           </a:bodyPr>
           <a:lstStyle/>
           <a:p>
-            <a:pPr algn="ctr" indent="0" marL="0">
-              <a:buNone/>
-            </a:pPr>
-            <a:r>
-              <a:rPr lang="en-US" sz="1500" b="1" dirty="0">
-                <a:solidFill>
-                  <a:srgbClr val="FFFFFF"/>
-                </a:solidFill>
-                <a:latin typeface="Aptos" pitchFamily="34" charset="0"/>
-                <a:ea typeface="Aptos" pitchFamily="34" charset="-122"/>
-                <a:cs typeface="Aptos" pitchFamily="34" charset="-120"/>
-              </a:rPr>
-              <a:t>Learn</a:t>
-            </a:r>
-            <a:endParaRPr lang="en-US" sz="1500" dirty="0"/>
-          </a:p>
-        </p:txBody>
-      </p:sp>
-      <p:sp>
-        <p:nvSpPr>
-          <p:cNvPr id="15" name="Shape 13"/>
-          <p:cNvSpPr/>
-          <p:nvPr/>
-        </p:nvSpPr>
-        <p:spPr>
-          <a:xfrm>
-            <a:off x="8924544" y="3730752"/>
-            <a:ext cx="1033272" cy="749808"/>
-          </a:xfrm>
-          <a:prstGeom prst="roundRect">
-            <a:avLst>
-              <a:gd name="adj" fmla="val 14634"/>
-            </a:avLst>
-          </a:prstGeom>
-          <a:solidFill>
-            <a:srgbClr val="2F8A28"/>
-          </a:solidFill>
-          <a:ln w="12700">
-            <a:solidFill>
-              <a:srgbClr val="2F8A28"/>
-            </a:solidFill>
-            <a:prstDash val="solid"/>
-          </a:ln>
-        </p:spPr>
-      </p:sp>
-      <p:sp>
-        <p:nvSpPr>
-          <p:cNvPr id="16" name="Text 14"/>
-          <p:cNvSpPr/>
-          <p:nvPr/>
-        </p:nvSpPr>
-        <p:spPr>
-          <a:xfrm>
-            <a:off x="8997696" y="3922776"/>
-            <a:ext cx="886968" cy="310896"/>
-          </a:xfrm>
-          <a:prstGeom prst="rect">
-            <a:avLst/>
-          </a:prstGeom>
-          <a:noFill/>
-          <a:ln/>
-        </p:spPr>
-        <p:txBody>
-          <a:bodyPr wrap="square" lIns="0" tIns="0" rIns="0" bIns="0" rtlCol="0" anchor="ctr">
-            <a:normAutofit/>
-          </a:bodyPr>
-          <a:lstStyle/>
-          <a:p>
-            <a:pPr algn="ctr" indent="0" marL="0">
-              <a:buNone/>
-            </a:pPr>
-            <a:r>
-              <a:rPr lang="en-US" sz="1500" b="1" dirty="0">
-                <a:solidFill>
-                  <a:srgbClr val="FFFFFF"/>
-                </a:solidFill>
-                <a:latin typeface="Aptos" pitchFamily="34" charset="0"/>
-                <a:ea typeface="Aptos" pitchFamily="34" charset="-122"/>
-                <a:cs typeface="Aptos" pitchFamily="34" charset="-120"/>
-              </a:rPr>
-              <a:t>Apply</a:t>
-            </a:r>
-            <a:endParaRPr lang="en-US" sz="1500" dirty="0"/>
-          </a:p>
-        </p:txBody>
-      </p:sp>
-      <p:sp>
-        <p:nvSpPr>
-          <p:cNvPr id="17" name="Shape 15"/>
-          <p:cNvSpPr/>
-          <p:nvPr/>
-        </p:nvSpPr>
-        <p:spPr>
-          <a:xfrm>
-            <a:off x="10213848" y="3730752"/>
-            <a:ext cx="1033272" cy="749808"/>
-          </a:xfrm>
-          <a:prstGeom prst="roundRect">
-            <a:avLst>
-              <a:gd name="adj" fmla="val 14634"/>
-            </a:avLst>
-          </a:prstGeom>
-          <a:solidFill>
-            <a:srgbClr val="6A4CA3"/>
-          </a:solidFill>
-          <a:ln w="12700">
-            <a:solidFill>
-              <a:srgbClr val="6A4CA3"/>
-            </a:solidFill>
-            <a:prstDash val="solid"/>
-          </a:ln>
-        </p:spPr>
-      </p:sp>
-      <p:sp>
-        <p:nvSpPr>
-          <p:cNvPr id="18" name="Text 16"/>
-          <p:cNvSpPr/>
-          <p:nvPr/>
-        </p:nvSpPr>
-        <p:spPr>
-          <a:xfrm>
-            <a:off x="10287000" y="3922776"/>
-            <a:ext cx="886968" cy="310896"/>
-          </a:xfrm>
-          <a:prstGeom prst="rect">
-            <a:avLst/>
-          </a:prstGeom>
-          <a:noFill/>
-          <a:ln/>
-        </p:spPr>
-        <p:txBody>
-          <a:bodyPr wrap="square" lIns="0" tIns="0" rIns="0" bIns="0" rtlCol="0" anchor="ctr">
-            <a:normAutofit/>
-          </a:bodyPr>
-          <a:lstStyle/>
-          <a:p>
-            <a:pPr algn="ctr" indent="0" marL="0">
-              <a:buNone/>
-            </a:pPr>
-            <a:r>
-              <a:rPr lang="en-US" sz="1500" b="1" dirty="0">
-                <a:solidFill>
-                  <a:srgbClr val="FFFFFF"/>
-                </a:solidFill>
-                <a:latin typeface="Aptos" pitchFamily="34" charset="0"/>
-                <a:ea typeface="Aptos" pitchFamily="34" charset="-122"/>
-                <a:cs typeface="Aptos" pitchFamily="34" charset="-120"/>
-              </a:rPr>
-              <a:t>Document</a:t>
-            </a:r>
-            <a:endParaRPr lang="en-US" sz="1500" dirty="0"/>
+            <a:r>
+              <a:rPr lang="en-US" sz="1380" dirty="0">
+                <a:solidFill>
+                  <a:srgbClr val="17364A"/>
+                </a:solidFill>
+                <a:latin typeface="Aptos" pitchFamily="34" charset="0"/>
+                <a:ea typeface="Aptos" pitchFamily="34" charset="-122"/>
+                <a:cs typeface="Aptos" pitchFamily="34" charset="-120"/>
+              </a:rPr>
+              <a:t>Read the module for shared vocabulary and context.</a:t>
+            </a:r>
+            <a:endParaRPr lang="en-US" sz="1380" dirty="0"/>
+          </a:p>
+          <a:p>
+            <a:r>
+              <a:rPr lang="en-US" sz="1380" dirty="0">
+                <a:solidFill>
+                  <a:srgbClr val="17364A"/>
+                </a:solidFill>
+                <a:latin typeface="Aptos" pitchFamily="34" charset="0"/>
+                <a:ea typeface="Aptos" pitchFamily="34" charset="-122"/>
+                <a:cs typeface="Aptos" pitchFamily="34" charset="-120"/>
+              </a:rPr>
+              <a:t>Complete the practical exercise to apply the concept.</a:t>
+            </a:r>
+            <a:endParaRPr lang="en-US" sz="1380" dirty="0"/>
+          </a:p>
+          <a:p>
+            <a:r>
+              <a:rPr lang="en-US" sz="1380" dirty="0">
+                <a:solidFill>
+                  <a:srgbClr val="17364A"/>
+                </a:solidFill>
+                <a:latin typeface="Aptos" pitchFamily="34" charset="0"/>
+                <a:ea typeface="Aptos" pitchFamily="34" charset="-122"/>
+                <a:cs typeface="Aptos" pitchFamily="34" charset="-120"/>
+              </a:rPr>
+              <a:t>Use the notes and references for deeper review.</a:t>
+            </a:r>
+            <a:endParaRPr lang="en-US" sz="1380" dirty="0"/>
           </a:p>
         </p:txBody>
       </p:sp>
@@ -12753,13 +11881,11 @@
             </a:avLst>
           </a:prstGeom>
           <a:solidFill>
-            <a:srgbClr val="FFFFFF">
-              <a:alpha val="88000"/>
-            </a:srgbClr>
+            <a:srgbClr val="FFFFFF"/>
           </a:solidFill>
           <a:ln w="12700">
             <a:solidFill>
-              <a:srgbClr val="D6E8F2"/>
+              <a:srgbClr val="B9D7E6"/>
             </a:solidFill>
             <a:prstDash val="solid"/>
           </a:ln>
@@ -12767,190 +11893,112 @@
       </p:sp>
       <p:sp>
         <p:nvSpPr>
-          <p:cNvPr id="14" name="Shape 12"/>
-          <p:cNvSpPr/>
-          <p:nvPr/>
-        </p:nvSpPr>
-        <p:spPr>
-          <a:xfrm>
-            <a:off x="7891272" y="3108960"/>
-            <a:ext cx="566928" cy="566928"/>
-          </a:xfrm>
-          <a:prstGeom prst="ellipse">
-            <a:avLst/>
-          </a:prstGeom>
-          <a:solidFill>
-            <a:srgbClr val="0068B7"/>
-          </a:solidFill>
-          <a:ln w="12700">
-            <a:solidFill>
-              <a:srgbClr val="0068B7"/>
-            </a:solidFill>
-            <a:prstDash val="solid"/>
-          </a:ln>
-        </p:spPr>
-      </p:sp>
-      <p:sp>
-        <p:nvSpPr>
-          <p:cNvPr id="15" name="Shape 13"/>
-          <p:cNvSpPr/>
-          <p:nvPr/>
-        </p:nvSpPr>
-        <p:spPr>
-          <a:xfrm>
-            <a:off x="10287000" y="3108960"/>
-            <a:ext cx="566928" cy="566928"/>
-          </a:xfrm>
-          <a:prstGeom prst="ellipse">
-            <a:avLst/>
-          </a:prstGeom>
-          <a:solidFill>
-            <a:srgbClr val="2F8A28"/>
-          </a:solidFill>
-          <a:ln w="12700">
-            <a:solidFill>
-              <a:srgbClr val="2F8A28"/>
-            </a:solidFill>
-            <a:prstDash val="solid"/>
-          </a:ln>
-        </p:spPr>
+          <p:cNvPr id="14" name="Text 12"/>
+          <p:cNvSpPr/>
+          <p:nvPr/>
+        </p:nvSpPr>
+        <p:spPr>
+          <a:xfrm>
+            <a:off x="7799832" y="2935224"/>
+            <a:ext cx="3145536" cy="256032"/>
+          </a:xfrm>
+          <a:prstGeom prst="rect">
+            <a:avLst/>
+          </a:prstGeom>
+          <a:noFill/>
+          <a:ln/>
+        </p:spPr>
+        <p:txBody>
+          <a:bodyPr wrap="square" lIns="0" tIns="0" rIns="0" bIns="0" rtlCol="0" anchor="ctr"/>
+          <a:lstStyle/>
+          <a:p>
+            <a:pPr indent="0" marL="0">
+              <a:buNone/>
+            </a:pPr>
+            <a:r>
+              <a:rPr lang="en-US" sz="1300" b="1" dirty="0">
+                <a:solidFill>
+                  <a:srgbClr val="0068B7"/>
+                </a:solidFill>
+                <a:latin typeface="Aptos" pitchFamily="34" charset="0"/>
+                <a:ea typeface="Aptos" pitchFamily="34" charset="-122"/>
+                <a:cs typeface="Aptos" pitchFamily="34" charset="-120"/>
+              </a:rPr>
+              <a:t>Concept checkpoints</a:t>
+            </a:r>
+            <a:endParaRPr lang="en-US" sz="1300" dirty="0"/>
+          </a:p>
+        </p:txBody>
+      </p:sp>
+      <p:sp>
+        <p:nvSpPr>
+          <p:cNvPr id="15" name="Text 13"/>
+          <p:cNvSpPr/>
+          <p:nvPr/>
+        </p:nvSpPr>
+        <p:spPr>
+          <a:xfrm>
+            <a:off x="7818120" y="3300984"/>
+            <a:ext cx="3090672" cy="877824"/>
+          </a:xfrm>
+          <a:prstGeom prst="rect">
+            <a:avLst/>
+          </a:prstGeom>
+          <a:noFill/>
+          <a:ln/>
+        </p:spPr>
+        <p:txBody>
+          <a:bodyPr wrap="square" lIns="254" tIns="254" rIns="254" bIns="254" rtlCol="0" anchor="t">
+            <a:normAutofit/>
+          </a:bodyPr>
+          <a:lstStyle/>
+          <a:p>
+            <a:r>
+              <a:rPr lang="en-US" sz="1380" dirty="0">
+                <a:solidFill>
+                  <a:srgbClr val="17364A"/>
+                </a:solidFill>
+                <a:latin typeface="Aptos" pitchFamily="34" charset="0"/>
+                <a:ea typeface="Aptos" pitchFamily="34" charset="-122"/>
+                <a:cs typeface="Aptos" pitchFamily="34" charset="-120"/>
+              </a:rPr>
+              <a:t>Governance overload.</a:t>
+            </a:r>
+            <a:endParaRPr lang="en-US" sz="1380" dirty="0"/>
+          </a:p>
+          <a:p>
+            <a:r>
+              <a:rPr lang="en-US" sz="1380" dirty="0">
+                <a:solidFill>
+                  <a:srgbClr val="17364A"/>
+                </a:solidFill>
+                <a:latin typeface="Aptos" pitchFamily="34" charset="0"/>
+                <a:ea typeface="Aptos" pitchFamily="34" charset="-122"/>
+                <a:cs typeface="Aptos" pitchFamily="34" charset="-120"/>
+              </a:rPr>
+              <a:t>Agencies can create review processes so burdensome that staff avoid them or innovation.</a:t>
+            </a:r>
+            <a:endParaRPr lang="en-US" sz="1380" dirty="0"/>
+          </a:p>
+          <a:p>
+            <a:r>
+              <a:rPr lang="en-US" sz="1380" dirty="0">
+                <a:solidFill>
+                  <a:srgbClr val="17364A"/>
+                </a:solidFill>
+                <a:latin typeface="Aptos" pitchFamily="34" charset="0"/>
+                <a:ea typeface="Aptos" pitchFamily="34" charset="-122"/>
+                <a:cs typeface="Aptos" pitchFamily="34" charset="-120"/>
+              </a:rPr>
+              <a:t>Guardrail: use risk tiers, standard intake forms, clear timelines, and lightweight.</a:t>
+            </a:r>
+            <a:endParaRPr lang="en-US" sz="1380" dirty="0"/>
+          </a:p>
+        </p:txBody>
       </p:sp>
       <p:sp>
         <p:nvSpPr>
           <p:cNvPr id="16" name="Shape 14"/>
-          <p:cNvSpPr/>
-          <p:nvPr/>
-        </p:nvSpPr>
-        <p:spPr>
-          <a:xfrm>
-            <a:off x="9089136" y="3456432"/>
-            <a:ext cx="566928" cy="566928"/>
-          </a:xfrm>
-          <a:prstGeom prst="ellipse">
-            <a:avLst/>
-          </a:prstGeom>
-          <a:solidFill>
-            <a:srgbClr val="6A4CA3"/>
-          </a:solidFill>
-          <a:ln w="12700">
-            <a:solidFill>
-              <a:srgbClr val="6A4CA3"/>
-            </a:solidFill>
-            <a:prstDash val="solid"/>
-          </a:ln>
-        </p:spPr>
-      </p:sp>
-      <p:sp>
-        <p:nvSpPr>
-          <p:cNvPr id="17" name="Shape 15"/>
-          <p:cNvSpPr/>
-          <p:nvPr/>
-        </p:nvSpPr>
-        <p:spPr>
-          <a:xfrm>
-            <a:off x="8385048" y="3419856"/>
-            <a:ext cx="1975104" cy="0"/>
-          </a:xfrm>
-          <a:prstGeom prst="line">
-            <a:avLst/>
-          </a:prstGeom>
-          <a:noFill/>
-          <a:ln w="25400">
-            <a:solidFill>
-              <a:srgbClr val="8ABBD8"/>
-            </a:solidFill>
-            <a:prstDash val="solid"/>
-          </a:ln>
-        </p:spPr>
-      </p:sp>
-      <p:sp>
-        <p:nvSpPr>
-          <p:cNvPr id="18" name="Shape 16"/>
-          <p:cNvSpPr/>
-          <p:nvPr/>
-        </p:nvSpPr>
-        <p:spPr>
-          <a:xfrm>
-            <a:off x="8202168" y="3630168"/>
-            <a:ext cx="1170432" cy="118872"/>
-          </a:xfrm>
-          <a:prstGeom prst="line">
-            <a:avLst/>
-          </a:prstGeom>
-          <a:noFill/>
-          <a:ln w="25400">
-            <a:solidFill>
-              <a:srgbClr val="8ABBD8"/>
-            </a:solidFill>
-            <a:prstDash val="solid"/>
-          </a:ln>
-        </p:spPr>
-      </p:sp>
-      <p:sp>
-        <p:nvSpPr>
-          <p:cNvPr id="19" name="Shape 17"/>
-          <p:cNvSpPr/>
-          <p:nvPr/>
-        </p:nvSpPr>
-        <p:spPr>
-          <a:xfrm>
-            <a:off x="10543032" y="3630168"/>
-            <a:ext cx="-1170432" cy="118872"/>
-          </a:xfrm>
-          <a:prstGeom prst="line">
-            <a:avLst/>
-          </a:prstGeom>
-          <a:noFill/>
-          <a:ln w="25400">
-            <a:solidFill>
-              <a:srgbClr val="8ABBD8"/>
-            </a:solidFill>
-            <a:prstDash val="solid"/>
-          </a:ln>
-        </p:spPr>
-      </p:sp>
-      <p:sp>
-        <p:nvSpPr>
-          <p:cNvPr id="20" name="Text 18"/>
-          <p:cNvSpPr/>
-          <p:nvPr/>
-        </p:nvSpPr>
-        <p:spPr>
-          <a:xfrm>
-            <a:off x="7863840" y="4069080"/>
-            <a:ext cx="3017520" cy="164592"/>
-          </a:xfrm>
-          <a:prstGeom prst="rect">
-            <a:avLst/>
-          </a:prstGeom>
-          <a:noFill/>
-          <a:ln/>
-        </p:spPr>
-        <p:txBody>
-          <a:bodyPr wrap="square" lIns="0" tIns="0" rIns="0" bIns="0" rtlCol="0" anchor="ctr"/>
-          <a:lstStyle/>
-          <a:p>
-            <a:pPr algn="ctr" indent="0" marL="0">
-              <a:buNone/>
-            </a:pPr>
-            <a:r>
-              <a:rPr lang="en-US" sz="900" b="1" dirty="0">
-                <a:solidFill>
-                  <a:srgbClr val="003A63"/>
-                </a:solidFill>
-                <a:latin typeface="Aptos" pitchFamily="34" charset="0"/>
-                <a:ea typeface="Aptos" pitchFamily="34" charset="-122"/>
-                <a:cs typeface="Aptos" pitchFamily="34" charset="-120"/>
-              </a:rPr>
-              <a:t>Decision rights</a:t>
-            </a:r>
-            <a:endParaRPr lang="en-US" sz="900" dirty="0"/>
-          </a:p>
-        </p:txBody>
-      </p:sp>
-      <p:sp>
-        <p:nvSpPr>
-          <p:cNvPr id="21" name="Shape 19"/>
           <p:cNvSpPr/>
           <p:nvPr/>
         </p:nvSpPr>
@@ -12977,7 +12025,7 @@
       </p:sp>
       <p:sp>
         <p:nvSpPr>
-          <p:cNvPr id="22" name="Text 20"/>
+          <p:cNvPr id="17" name="Text 15"/>
           <p:cNvSpPr/>
           <p:nvPr/>
         </p:nvSpPr>
@@ -13016,7 +12064,7 @@
       </p:sp>
       <p:sp>
         <p:nvSpPr>
-          <p:cNvPr id="23" name="Text 21"/>
+          <p:cNvPr id="18" name="Text 16"/>
           <p:cNvSpPr/>
           <p:nvPr/>
         </p:nvSpPr>
@@ -13524,13 +12572,11 @@
             </a:avLst>
           </a:prstGeom>
           <a:solidFill>
-            <a:srgbClr val="FFFFFF">
-              <a:alpha val="88000"/>
-            </a:srgbClr>
+            <a:srgbClr val="FFFFFF"/>
           </a:solidFill>
           <a:ln w="12700">
             <a:solidFill>
-              <a:srgbClr val="D6E8F2"/>
+              <a:srgbClr val="B9D7E6"/>
             </a:solidFill>
             <a:prstDash val="solid"/>
           </a:ln>
@@ -13538,190 +12584,112 @@
       </p:sp>
       <p:sp>
         <p:nvSpPr>
-          <p:cNvPr id="14" name="Shape 12"/>
-          <p:cNvSpPr/>
-          <p:nvPr/>
-        </p:nvSpPr>
-        <p:spPr>
-          <a:xfrm>
-            <a:off x="7891272" y="3108960"/>
-            <a:ext cx="566928" cy="566928"/>
-          </a:xfrm>
-          <a:prstGeom prst="ellipse">
-            <a:avLst/>
-          </a:prstGeom>
-          <a:solidFill>
-            <a:srgbClr val="0068B7"/>
-          </a:solidFill>
-          <a:ln w="12700">
-            <a:solidFill>
-              <a:srgbClr val="0068B7"/>
-            </a:solidFill>
-            <a:prstDash val="solid"/>
-          </a:ln>
-        </p:spPr>
-      </p:sp>
-      <p:sp>
-        <p:nvSpPr>
-          <p:cNvPr id="15" name="Shape 13"/>
-          <p:cNvSpPr/>
-          <p:nvPr/>
-        </p:nvSpPr>
-        <p:spPr>
-          <a:xfrm>
-            <a:off x="10287000" y="3108960"/>
-            <a:ext cx="566928" cy="566928"/>
-          </a:xfrm>
-          <a:prstGeom prst="ellipse">
-            <a:avLst/>
-          </a:prstGeom>
-          <a:solidFill>
-            <a:srgbClr val="2F8A28"/>
-          </a:solidFill>
-          <a:ln w="12700">
-            <a:solidFill>
-              <a:srgbClr val="2F8A28"/>
-            </a:solidFill>
-            <a:prstDash val="solid"/>
-          </a:ln>
-        </p:spPr>
+          <p:cNvPr id="14" name="Text 12"/>
+          <p:cNvSpPr/>
+          <p:nvPr/>
+        </p:nvSpPr>
+        <p:spPr>
+          <a:xfrm>
+            <a:off x="7799832" y="2935224"/>
+            <a:ext cx="3145536" cy="256032"/>
+          </a:xfrm>
+          <a:prstGeom prst="rect">
+            <a:avLst/>
+          </a:prstGeom>
+          <a:noFill/>
+          <a:ln/>
+        </p:spPr>
+        <p:txBody>
+          <a:bodyPr wrap="square" lIns="0" tIns="0" rIns="0" bIns="0" rtlCol="0" anchor="ctr"/>
+          <a:lstStyle/>
+          <a:p>
+            <a:pPr indent="0" marL="0">
+              <a:buNone/>
+            </a:pPr>
+            <a:r>
+              <a:rPr lang="en-US" sz="1300" b="1" dirty="0">
+                <a:solidFill>
+                  <a:srgbClr val="0068B7"/>
+                </a:solidFill>
+                <a:latin typeface="Aptos" pitchFamily="34" charset="0"/>
+                <a:ea typeface="Aptos" pitchFamily="34" charset="-122"/>
+                <a:cs typeface="Aptos" pitchFamily="34" charset="-120"/>
+              </a:rPr>
+              <a:t>Concept checkpoints</a:t>
+            </a:r>
+            <a:endParaRPr lang="en-US" sz="1300" dirty="0"/>
+          </a:p>
+        </p:txBody>
+      </p:sp>
+      <p:sp>
+        <p:nvSpPr>
+          <p:cNvPr id="15" name="Text 13"/>
+          <p:cNvSpPr/>
+          <p:nvPr/>
+        </p:nvSpPr>
+        <p:spPr>
+          <a:xfrm>
+            <a:off x="7818120" y="3300984"/>
+            <a:ext cx="3090672" cy="877824"/>
+          </a:xfrm>
+          <a:prstGeom prst="rect">
+            <a:avLst/>
+          </a:prstGeom>
+          <a:noFill/>
+          <a:ln/>
+        </p:spPr>
+        <p:txBody>
+          <a:bodyPr wrap="square" lIns="254" tIns="254" rIns="254" bIns="254" rtlCol="0" anchor="t">
+            <a:normAutofit/>
+          </a:bodyPr>
+          <a:lstStyle/>
+          <a:p>
+            <a:r>
+              <a:rPr lang="en-US" sz="1380" dirty="0">
+                <a:solidFill>
+                  <a:srgbClr val="17364A"/>
+                </a:solidFill>
+                <a:latin typeface="Aptos" pitchFamily="34" charset="0"/>
+                <a:ea typeface="Aptos" pitchFamily="34" charset="-122"/>
+                <a:cs typeface="Aptos" pitchFamily="34" charset="-120"/>
+              </a:rPr>
+              <a:t>Before use, staff should know whether the tool is approved, what data may be used, what.</a:t>
+            </a:r>
+            <a:endParaRPr lang="en-US" sz="1380" dirty="0"/>
+          </a:p>
+          <a:p>
+            <a:r>
+              <a:rPr lang="en-US" sz="1380" dirty="0">
+                <a:solidFill>
+                  <a:srgbClr val="17364A"/>
+                </a:solidFill>
+                <a:latin typeface="Aptos" pitchFamily="34" charset="0"/>
+                <a:ea typeface="Aptos" pitchFamily="34" charset="-122"/>
+                <a:cs typeface="Aptos" pitchFamily="34" charset="-120"/>
+              </a:rPr>
+              <a:t>During use, staff should know how to review outputs, document decisions, protect sensitive.</a:t>
+            </a:r>
+            <a:endParaRPr lang="en-US" sz="1380" dirty="0"/>
+          </a:p>
+          <a:p>
+            <a:r>
+              <a:rPr lang="en-US" sz="1380" dirty="0">
+                <a:solidFill>
+                  <a:srgbClr val="17364A"/>
+                </a:solidFill>
+                <a:latin typeface="Aptos" pitchFamily="34" charset="0"/>
+                <a:ea typeface="Aptos" pitchFamily="34" charset="-122"/>
+                <a:cs typeface="Aptos" pitchFamily="34" charset="-120"/>
+              </a:rPr>
+              <a:t>After use, the agency should be able to audit what was approved, what evidence supported.</a:t>
+            </a:r>
+            <a:endParaRPr lang="en-US" sz="1380" dirty="0"/>
+          </a:p>
+        </p:txBody>
       </p:sp>
       <p:sp>
         <p:nvSpPr>
           <p:cNvPr id="16" name="Shape 14"/>
-          <p:cNvSpPr/>
-          <p:nvPr/>
-        </p:nvSpPr>
-        <p:spPr>
-          <a:xfrm>
-            <a:off x="9089136" y="3456432"/>
-            <a:ext cx="566928" cy="566928"/>
-          </a:xfrm>
-          <a:prstGeom prst="ellipse">
-            <a:avLst/>
-          </a:prstGeom>
-          <a:solidFill>
-            <a:srgbClr val="6A4CA3"/>
-          </a:solidFill>
-          <a:ln w="12700">
-            <a:solidFill>
-              <a:srgbClr val="6A4CA3"/>
-            </a:solidFill>
-            <a:prstDash val="solid"/>
-          </a:ln>
-        </p:spPr>
-      </p:sp>
-      <p:sp>
-        <p:nvSpPr>
-          <p:cNvPr id="17" name="Shape 15"/>
-          <p:cNvSpPr/>
-          <p:nvPr/>
-        </p:nvSpPr>
-        <p:spPr>
-          <a:xfrm>
-            <a:off x="8385048" y="3419856"/>
-            <a:ext cx="1975104" cy="0"/>
-          </a:xfrm>
-          <a:prstGeom prst="line">
-            <a:avLst/>
-          </a:prstGeom>
-          <a:noFill/>
-          <a:ln w="25400">
-            <a:solidFill>
-              <a:srgbClr val="8ABBD8"/>
-            </a:solidFill>
-            <a:prstDash val="solid"/>
-          </a:ln>
-        </p:spPr>
-      </p:sp>
-      <p:sp>
-        <p:nvSpPr>
-          <p:cNvPr id="18" name="Shape 16"/>
-          <p:cNvSpPr/>
-          <p:nvPr/>
-        </p:nvSpPr>
-        <p:spPr>
-          <a:xfrm>
-            <a:off x="8202168" y="3630168"/>
-            <a:ext cx="1170432" cy="118872"/>
-          </a:xfrm>
-          <a:prstGeom prst="line">
-            <a:avLst/>
-          </a:prstGeom>
-          <a:noFill/>
-          <a:ln w="25400">
-            <a:solidFill>
-              <a:srgbClr val="8ABBD8"/>
-            </a:solidFill>
-            <a:prstDash val="solid"/>
-          </a:ln>
-        </p:spPr>
-      </p:sp>
-      <p:sp>
-        <p:nvSpPr>
-          <p:cNvPr id="19" name="Shape 17"/>
-          <p:cNvSpPr/>
-          <p:nvPr/>
-        </p:nvSpPr>
-        <p:spPr>
-          <a:xfrm>
-            <a:off x="10543032" y="3630168"/>
-            <a:ext cx="-1170432" cy="118872"/>
-          </a:xfrm>
-          <a:prstGeom prst="line">
-            <a:avLst/>
-          </a:prstGeom>
-          <a:noFill/>
-          <a:ln w="25400">
-            <a:solidFill>
-              <a:srgbClr val="8ABBD8"/>
-            </a:solidFill>
-            <a:prstDash val="solid"/>
-          </a:ln>
-        </p:spPr>
-      </p:sp>
-      <p:sp>
-        <p:nvSpPr>
-          <p:cNvPr id="20" name="Text 18"/>
-          <p:cNvSpPr/>
-          <p:nvPr/>
-        </p:nvSpPr>
-        <p:spPr>
-          <a:xfrm>
-            <a:off x="7863840" y="4069080"/>
-            <a:ext cx="3017520" cy="164592"/>
-          </a:xfrm>
-          <a:prstGeom prst="rect">
-            <a:avLst/>
-          </a:prstGeom>
-          <a:noFill/>
-          <a:ln/>
-        </p:spPr>
-        <p:txBody>
-          <a:bodyPr wrap="square" lIns="0" tIns="0" rIns="0" bIns="0" rtlCol="0" anchor="ctr"/>
-          <a:lstStyle/>
-          <a:p>
-            <a:pPr algn="ctr" indent="0" marL="0">
-              <a:buNone/>
-            </a:pPr>
-            <a:r>
-              <a:rPr lang="en-US" sz="900" b="1" dirty="0">
-                <a:solidFill>
-                  <a:srgbClr val="003A63"/>
-                </a:solidFill>
-                <a:latin typeface="Aptos" pitchFamily="34" charset="0"/>
-                <a:ea typeface="Aptos" pitchFamily="34" charset="-122"/>
-                <a:cs typeface="Aptos" pitchFamily="34" charset="-120"/>
-              </a:rPr>
-              <a:t>Decision rights</a:t>
-            </a:r>
-            <a:endParaRPr lang="en-US" sz="900" dirty="0"/>
-          </a:p>
-        </p:txBody>
-      </p:sp>
-      <p:sp>
-        <p:nvSpPr>
-          <p:cNvPr id="21" name="Shape 19"/>
           <p:cNvSpPr/>
           <p:nvPr/>
         </p:nvSpPr>
@@ -13748,7 +12716,7 @@
       </p:sp>
       <p:sp>
         <p:nvSpPr>
-          <p:cNvPr id="22" name="Text 20"/>
+          <p:cNvPr id="17" name="Text 15"/>
           <p:cNvSpPr/>
           <p:nvPr/>
         </p:nvSpPr>
@@ -13787,7 +12755,7 @@
       </p:sp>
       <p:sp>
         <p:nvSpPr>
-          <p:cNvPr id="23" name="Text 21"/>
+          <p:cNvPr id="18" name="Text 16"/>
           <p:cNvSpPr/>
           <p:nvPr/>
         </p:nvSpPr>
@@ -14295,13 +13263,11 @@
             </a:avLst>
           </a:prstGeom>
           <a:solidFill>
-            <a:srgbClr val="FFFFFF">
-              <a:alpha val="88000"/>
-            </a:srgbClr>
+            <a:srgbClr val="FFFFFF"/>
           </a:solidFill>
           <a:ln w="12700">
             <a:solidFill>
-              <a:srgbClr val="D6E8F2"/>
+              <a:srgbClr val="B9D7E6"/>
             </a:solidFill>
             <a:prstDash val="solid"/>
           </a:ln>
@@ -14309,190 +13275,112 @@
       </p:sp>
       <p:sp>
         <p:nvSpPr>
-          <p:cNvPr id="14" name="Shape 12"/>
-          <p:cNvSpPr/>
-          <p:nvPr/>
-        </p:nvSpPr>
-        <p:spPr>
-          <a:xfrm>
-            <a:off x="7891272" y="3108960"/>
-            <a:ext cx="566928" cy="566928"/>
-          </a:xfrm>
-          <a:prstGeom prst="ellipse">
-            <a:avLst/>
-          </a:prstGeom>
-          <a:solidFill>
-            <a:srgbClr val="0068B7"/>
-          </a:solidFill>
-          <a:ln w="12700">
-            <a:solidFill>
-              <a:srgbClr val="0068B7"/>
-            </a:solidFill>
-            <a:prstDash val="solid"/>
-          </a:ln>
-        </p:spPr>
-      </p:sp>
-      <p:sp>
-        <p:nvSpPr>
-          <p:cNvPr id="15" name="Shape 13"/>
-          <p:cNvSpPr/>
-          <p:nvPr/>
-        </p:nvSpPr>
-        <p:spPr>
-          <a:xfrm>
-            <a:off x="10287000" y="3108960"/>
-            <a:ext cx="566928" cy="566928"/>
-          </a:xfrm>
-          <a:prstGeom prst="ellipse">
-            <a:avLst/>
-          </a:prstGeom>
-          <a:solidFill>
-            <a:srgbClr val="2F8A28"/>
-          </a:solidFill>
-          <a:ln w="12700">
-            <a:solidFill>
-              <a:srgbClr val="2F8A28"/>
-            </a:solidFill>
-            <a:prstDash val="solid"/>
-          </a:ln>
-        </p:spPr>
+          <p:cNvPr id="14" name="Text 12"/>
+          <p:cNvSpPr/>
+          <p:nvPr/>
+        </p:nvSpPr>
+        <p:spPr>
+          <a:xfrm>
+            <a:off x="7799832" y="2935224"/>
+            <a:ext cx="3145536" cy="256032"/>
+          </a:xfrm>
+          <a:prstGeom prst="rect">
+            <a:avLst/>
+          </a:prstGeom>
+          <a:noFill/>
+          <a:ln/>
+        </p:spPr>
+        <p:txBody>
+          <a:bodyPr wrap="square" lIns="0" tIns="0" rIns="0" bIns="0" rtlCol="0" anchor="ctr"/>
+          <a:lstStyle/>
+          <a:p>
+            <a:pPr indent="0" marL="0">
+              <a:buNone/>
+            </a:pPr>
+            <a:r>
+              <a:rPr lang="en-US" sz="1300" b="1" dirty="0">
+                <a:solidFill>
+                  <a:srgbClr val="0068B7"/>
+                </a:solidFill>
+                <a:latin typeface="Aptos" pitchFamily="34" charset="0"/>
+                <a:ea typeface="Aptos" pitchFamily="34" charset="-122"/>
+                <a:cs typeface="Aptos" pitchFamily="34" charset="-120"/>
+              </a:rPr>
+              <a:t>Concept checkpoints</a:t>
+            </a:r>
+            <a:endParaRPr lang="en-US" sz="1300" dirty="0"/>
+          </a:p>
+        </p:txBody>
+      </p:sp>
+      <p:sp>
+        <p:nvSpPr>
+          <p:cNvPr id="15" name="Text 13"/>
+          <p:cNvSpPr/>
+          <p:nvPr/>
+        </p:nvSpPr>
+        <p:spPr>
+          <a:xfrm>
+            <a:off x="7818120" y="3300984"/>
+            <a:ext cx="3090672" cy="877824"/>
+          </a:xfrm>
+          <a:prstGeom prst="rect">
+            <a:avLst/>
+          </a:prstGeom>
+          <a:noFill/>
+          <a:ln/>
+        </p:spPr>
+        <p:txBody>
+          <a:bodyPr wrap="square" lIns="254" tIns="254" rIns="254" bIns="254" rtlCol="0" anchor="t">
+            <a:normAutofit/>
+          </a:bodyPr>
+          <a:lstStyle/>
+          <a:p>
+            <a:r>
+              <a:rPr lang="en-US" sz="1380" dirty="0">
+                <a:solidFill>
+                  <a:srgbClr val="17364A"/>
+                </a:solidFill>
+                <a:latin typeface="Aptos" pitchFamily="34" charset="0"/>
+                <a:ea typeface="Aptos" pitchFamily="34" charset="-122"/>
+                <a:cs typeface="Aptos" pitchFamily="34" charset="-120"/>
+              </a:rPr>
+              <a:t>For supervisors and leaders, governance means ensuring that staff have clear rules, enough.</a:t>
+            </a:r>
+            <a:endParaRPr lang="en-US" sz="1380" dirty="0"/>
+          </a:p>
+          <a:p>
+            <a:r>
+              <a:rPr lang="en-US" sz="1380" dirty="0">
+                <a:solidFill>
+                  <a:srgbClr val="17364A"/>
+                </a:solidFill>
+                <a:latin typeface="Aptos" pitchFamily="34" charset="0"/>
+                <a:ea typeface="Aptos" pitchFamily="34" charset="-122"/>
+                <a:cs typeface="Aptos" pitchFamily="34" charset="-120"/>
+              </a:rPr>
+              <a:t>Leaders should avoid approving AI tools without resources for training, monitoring,.</a:t>
+            </a:r>
+            <a:endParaRPr lang="en-US" sz="1380" dirty="0"/>
+          </a:p>
+          <a:p>
+            <a:r>
+              <a:rPr lang="en-US" sz="1380" dirty="0">
+                <a:solidFill>
+                  <a:srgbClr val="17364A"/>
+                </a:solidFill>
+                <a:latin typeface="Aptos" pitchFamily="34" charset="0"/>
+                <a:ea typeface="Aptos" pitchFamily="34" charset="-122"/>
+                <a:cs typeface="Aptos" pitchFamily="34" charset="-120"/>
+              </a:rPr>
+              <a:t>For all staff, governance means pausing when an AI use involves sensitive data,.</a:t>
+            </a:r>
+            <a:endParaRPr lang="en-US" sz="1380" dirty="0"/>
+          </a:p>
+        </p:txBody>
       </p:sp>
       <p:sp>
         <p:nvSpPr>
           <p:cNvPr id="16" name="Shape 14"/>
-          <p:cNvSpPr/>
-          <p:nvPr/>
-        </p:nvSpPr>
-        <p:spPr>
-          <a:xfrm>
-            <a:off x="9089136" y="3456432"/>
-            <a:ext cx="566928" cy="566928"/>
-          </a:xfrm>
-          <a:prstGeom prst="ellipse">
-            <a:avLst/>
-          </a:prstGeom>
-          <a:solidFill>
-            <a:srgbClr val="6A4CA3"/>
-          </a:solidFill>
-          <a:ln w="12700">
-            <a:solidFill>
-              <a:srgbClr val="6A4CA3"/>
-            </a:solidFill>
-            <a:prstDash val="solid"/>
-          </a:ln>
-        </p:spPr>
-      </p:sp>
-      <p:sp>
-        <p:nvSpPr>
-          <p:cNvPr id="17" name="Shape 15"/>
-          <p:cNvSpPr/>
-          <p:nvPr/>
-        </p:nvSpPr>
-        <p:spPr>
-          <a:xfrm>
-            <a:off x="8385048" y="3419856"/>
-            <a:ext cx="1975104" cy="0"/>
-          </a:xfrm>
-          <a:prstGeom prst="line">
-            <a:avLst/>
-          </a:prstGeom>
-          <a:noFill/>
-          <a:ln w="25400">
-            <a:solidFill>
-              <a:srgbClr val="8ABBD8"/>
-            </a:solidFill>
-            <a:prstDash val="solid"/>
-          </a:ln>
-        </p:spPr>
-      </p:sp>
-      <p:sp>
-        <p:nvSpPr>
-          <p:cNvPr id="18" name="Shape 16"/>
-          <p:cNvSpPr/>
-          <p:nvPr/>
-        </p:nvSpPr>
-        <p:spPr>
-          <a:xfrm>
-            <a:off x="8202168" y="3630168"/>
-            <a:ext cx="1170432" cy="118872"/>
-          </a:xfrm>
-          <a:prstGeom prst="line">
-            <a:avLst/>
-          </a:prstGeom>
-          <a:noFill/>
-          <a:ln w="25400">
-            <a:solidFill>
-              <a:srgbClr val="8ABBD8"/>
-            </a:solidFill>
-            <a:prstDash val="solid"/>
-          </a:ln>
-        </p:spPr>
-      </p:sp>
-      <p:sp>
-        <p:nvSpPr>
-          <p:cNvPr id="19" name="Shape 17"/>
-          <p:cNvSpPr/>
-          <p:nvPr/>
-        </p:nvSpPr>
-        <p:spPr>
-          <a:xfrm>
-            <a:off x="10543032" y="3630168"/>
-            <a:ext cx="-1170432" cy="118872"/>
-          </a:xfrm>
-          <a:prstGeom prst="line">
-            <a:avLst/>
-          </a:prstGeom>
-          <a:noFill/>
-          <a:ln w="25400">
-            <a:solidFill>
-              <a:srgbClr val="8ABBD8"/>
-            </a:solidFill>
-            <a:prstDash val="solid"/>
-          </a:ln>
-        </p:spPr>
-      </p:sp>
-      <p:sp>
-        <p:nvSpPr>
-          <p:cNvPr id="20" name="Text 18"/>
-          <p:cNvSpPr/>
-          <p:nvPr/>
-        </p:nvSpPr>
-        <p:spPr>
-          <a:xfrm>
-            <a:off x="7863840" y="4069080"/>
-            <a:ext cx="3017520" cy="164592"/>
-          </a:xfrm>
-          <a:prstGeom prst="rect">
-            <a:avLst/>
-          </a:prstGeom>
-          <a:noFill/>
-          <a:ln/>
-        </p:spPr>
-        <p:txBody>
-          <a:bodyPr wrap="square" lIns="0" tIns="0" rIns="0" bIns="0" rtlCol="0" anchor="ctr"/>
-          <a:lstStyle/>
-          <a:p>
-            <a:pPr algn="ctr" indent="0" marL="0">
-              <a:buNone/>
-            </a:pPr>
-            <a:r>
-              <a:rPr lang="en-US" sz="900" b="1" dirty="0">
-                <a:solidFill>
-                  <a:srgbClr val="003A63"/>
-                </a:solidFill>
-                <a:latin typeface="Aptos" pitchFamily="34" charset="0"/>
-                <a:ea typeface="Aptos" pitchFamily="34" charset="-122"/>
-                <a:cs typeface="Aptos" pitchFamily="34" charset="-120"/>
-              </a:rPr>
-              <a:t>Decision rights</a:t>
-            </a:r>
-            <a:endParaRPr lang="en-US" sz="900" dirty="0"/>
-          </a:p>
-        </p:txBody>
-      </p:sp>
-      <p:sp>
-        <p:nvSpPr>
-          <p:cNvPr id="21" name="Shape 19"/>
           <p:cNvSpPr/>
           <p:nvPr/>
         </p:nvSpPr>
@@ -14519,7 +13407,7 @@
       </p:sp>
       <p:sp>
         <p:nvSpPr>
-          <p:cNvPr id="22" name="Text 20"/>
+          <p:cNvPr id="17" name="Text 15"/>
           <p:cNvSpPr/>
           <p:nvPr/>
         </p:nvSpPr>
@@ -14558,7 +13446,7 @@
       </p:sp>
       <p:sp>
         <p:nvSpPr>
-          <p:cNvPr id="23" name="Text 21"/>
+          <p:cNvPr id="18" name="Text 16"/>
           <p:cNvSpPr/>
           <p:nvPr/>
         </p:nvSpPr>
@@ -15066,13 +13954,11 @@
             </a:avLst>
           </a:prstGeom>
           <a:solidFill>
-            <a:srgbClr val="FFFFFF">
-              <a:alpha val="88000"/>
-            </a:srgbClr>
+            <a:srgbClr val="FFFFFF"/>
           </a:solidFill>
           <a:ln w="12700">
             <a:solidFill>
-              <a:srgbClr val="D6E8F2"/>
+              <a:srgbClr val="B9D7E6"/>
             </a:solidFill>
             <a:prstDash val="solid"/>
           </a:ln>
@@ -15080,190 +13966,112 @@
       </p:sp>
       <p:sp>
         <p:nvSpPr>
-          <p:cNvPr id="14" name="Shape 12"/>
-          <p:cNvSpPr/>
-          <p:nvPr/>
-        </p:nvSpPr>
-        <p:spPr>
-          <a:xfrm>
-            <a:off x="7891272" y="3108960"/>
-            <a:ext cx="566928" cy="566928"/>
-          </a:xfrm>
-          <a:prstGeom prst="ellipse">
-            <a:avLst/>
-          </a:prstGeom>
-          <a:solidFill>
-            <a:srgbClr val="0068B7"/>
-          </a:solidFill>
-          <a:ln w="12700">
-            <a:solidFill>
-              <a:srgbClr val="0068B7"/>
-            </a:solidFill>
-            <a:prstDash val="solid"/>
-          </a:ln>
-        </p:spPr>
-      </p:sp>
-      <p:sp>
-        <p:nvSpPr>
-          <p:cNvPr id="15" name="Shape 13"/>
-          <p:cNvSpPr/>
-          <p:nvPr/>
-        </p:nvSpPr>
-        <p:spPr>
-          <a:xfrm>
-            <a:off x="10287000" y="3108960"/>
-            <a:ext cx="566928" cy="566928"/>
-          </a:xfrm>
-          <a:prstGeom prst="ellipse">
-            <a:avLst/>
-          </a:prstGeom>
-          <a:solidFill>
-            <a:srgbClr val="2F8A28"/>
-          </a:solidFill>
-          <a:ln w="12700">
-            <a:solidFill>
-              <a:srgbClr val="2F8A28"/>
-            </a:solidFill>
-            <a:prstDash val="solid"/>
-          </a:ln>
-        </p:spPr>
+          <p:cNvPr id="14" name="Text 12"/>
+          <p:cNvSpPr/>
+          <p:nvPr/>
+        </p:nvSpPr>
+        <p:spPr>
+          <a:xfrm>
+            <a:off x="7799832" y="2935224"/>
+            <a:ext cx="3145536" cy="256032"/>
+          </a:xfrm>
+          <a:prstGeom prst="rect">
+            <a:avLst/>
+          </a:prstGeom>
+          <a:noFill/>
+          <a:ln/>
+        </p:spPr>
+        <p:txBody>
+          <a:bodyPr wrap="square" lIns="0" tIns="0" rIns="0" bIns="0" rtlCol="0" anchor="ctr"/>
+          <a:lstStyle/>
+          <a:p>
+            <a:pPr indent="0" marL="0">
+              <a:buNone/>
+            </a:pPr>
+            <a:r>
+              <a:rPr lang="en-US" sz="1300" b="1" dirty="0">
+                <a:solidFill>
+                  <a:srgbClr val="0068B7"/>
+                </a:solidFill>
+                <a:latin typeface="Aptos" pitchFamily="34" charset="0"/>
+                <a:ea typeface="Aptos" pitchFamily="34" charset="-122"/>
+                <a:cs typeface="Aptos" pitchFamily="34" charset="-120"/>
+              </a:rPr>
+              <a:t>Concept checkpoints</a:t>
+            </a:r>
+            <a:endParaRPr lang="en-US" sz="1300" dirty="0"/>
+          </a:p>
+        </p:txBody>
+      </p:sp>
+      <p:sp>
+        <p:nvSpPr>
+          <p:cNvPr id="15" name="Text 13"/>
+          <p:cNvSpPr/>
+          <p:nvPr/>
+        </p:nvSpPr>
+        <p:spPr>
+          <a:xfrm>
+            <a:off x="7818120" y="3300984"/>
+            <a:ext cx="3090672" cy="877824"/>
+          </a:xfrm>
+          <a:prstGeom prst="rect">
+            <a:avLst/>
+          </a:prstGeom>
+          <a:noFill/>
+          <a:ln/>
+        </p:spPr>
+        <p:txBody>
+          <a:bodyPr wrap="square" lIns="254" tIns="254" rIns="254" bIns="254" rtlCol="0" anchor="t">
+            <a:normAutofit/>
+          </a:bodyPr>
+          <a:lstStyle/>
+          <a:p>
+            <a:r>
+              <a:rPr lang="en-US" sz="1380" dirty="0">
+                <a:solidFill>
+                  <a:srgbClr val="17364A"/>
+                </a:solidFill>
+                <a:latin typeface="Aptos" pitchFamily="34" charset="0"/>
+                <a:ea typeface="Aptos" pitchFamily="34" charset="-122"/>
+                <a:cs typeface="Aptos" pitchFamily="34" charset="-120"/>
+              </a:rPr>
+              <a:t>Where might AI already be entering your work through drafting tools, analytics tools,.</a:t>
+            </a:r>
+            <a:endParaRPr lang="en-US" sz="1380" dirty="0"/>
+          </a:p>
+          <a:p>
+            <a:r>
+              <a:rPr lang="en-US" sz="1380" dirty="0">
+                <a:solidFill>
+                  <a:srgbClr val="17364A"/>
+                </a:solidFill>
+                <a:latin typeface="Aptos" pitchFamily="34" charset="0"/>
+                <a:ea typeface="Aptos" pitchFamily="34" charset="-122"/>
+                <a:cs typeface="Aptos" pitchFamily="34" charset="-120"/>
+              </a:rPr>
+              <a:t>What AI uses in your program area would be low risk, and what uses would require formal.</a:t>
+            </a:r>
+            <a:endParaRPr lang="en-US" sz="1380" dirty="0"/>
+          </a:p>
+          <a:p>
+            <a:r>
+              <a:rPr lang="en-US" sz="1380" dirty="0">
+                <a:solidFill>
+                  <a:srgbClr val="17364A"/>
+                </a:solidFill>
+                <a:latin typeface="Aptos" pitchFamily="34" charset="0"/>
+                <a:ea typeface="Aptos" pitchFamily="34" charset="-122"/>
+                <a:cs typeface="Aptos" pitchFamily="34" charset="-120"/>
+              </a:rPr>
+              <a:t>Who in your agency would need to review an AI use that involves sensitive data,.</a:t>
+            </a:r>
+            <a:endParaRPr lang="en-US" sz="1380" dirty="0"/>
+          </a:p>
+        </p:txBody>
       </p:sp>
       <p:sp>
         <p:nvSpPr>
           <p:cNvPr id="16" name="Shape 14"/>
-          <p:cNvSpPr/>
-          <p:nvPr/>
-        </p:nvSpPr>
-        <p:spPr>
-          <a:xfrm>
-            <a:off x="9089136" y="3456432"/>
-            <a:ext cx="566928" cy="566928"/>
-          </a:xfrm>
-          <a:prstGeom prst="ellipse">
-            <a:avLst/>
-          </a:prstGeom>
-          <a:solidFill>
-            <a:srgbClr val="6A4CA3"/>
-          </a:solidFill>
-          <a:ln w="12700">
-            <a:solidFill>
-              <a:srgbClr val="6A4CA3"/>
-            </a:solidFill>
-            <a:prstDash val="solid"/>
-          </a:ln>
-        </p:spPr>
-      </p:sp>
-      <p:sp>
-        <p:nvSpPr>
-          <p:cNvPr id="17" name="Shape 15"/>
-          <p:cNvSpPr/>
-          <p:nvPr/>
-        </p:nvSpPr>
-        <p:spPr>
-          <a:xfrm>
-            <a:off x="8385048" y="3419856"/>
-            <a:ext cx="1975104" cy="0"/>
-          </a:xfrm>
-          <a:prstGeom prst="line">
-            <a:avLst/>
-          </a:prstGeom>
-          <a:noFill/>
-          <a:ln w="25400">
-            <a:solidFill>
-              <a:srgbClr val="8ABBD8"/>
-            </a:solidFill>
-            <a:prstDash val="solid"/>
-          </a:ln>
-        </p:spPr>
-      </p:sp>
-      <p:sp>
-        <p:nvSpPr>
-          <p:cNvPr id="18" name="Shape 16"/>
-          <p:cNvSpPr/>
-          <p:nvPr/>
-        </p:nvSpPr>
-        <p:spPr>
-          <a:xfrm>
-            <a:off x="8202168" y="3630168"/>
-            <a:ext cx="1170432" cy="118872"/>
-          </a:xfrm>
-          <a:prstGeom prst="line">
-            <a:avLst/>
-          </a:prstGeom>
-          <a:noFill/>
-          <a:ln w="25400">
-            <a:solidFill>
-              <a:srgbClr val="8ABBD8"/>
-            </a:solidFill>
-            <a:prstDash val="solid"/>
-          </a:ln>
-        </p:spPr>
-      </p:sp>
-      <p:sp>
-        <p:nvSpPr>
-          <p:cNvPr id="19" name="Shape 17"/>
-          <p:cNvSpPr/>
-          <p:nvPr/>
-        </p:nvSpPr>
-        <p:spPr>
-          <a:xfrm>
-            <a:off x="10543032" y="3630168"/>
-            <a:ext cx="-1170432" cy="118872"/>
-          </a:xfrm>
-          <a:prstGeom prst="line">
-            <a:avLst/>
-          </a:prstGeom>
-          <a:noFill/>
-          <a:ln w="25400">
-            <a:solidFill>
-              <a:srgbClr val="8ABBD8"/>
-            </a:solidFill>
-            <a:prstDash val="solid"/>
-          </a:ln>
-        </p:spPr>
-      </p:sp>
-      <p:sp>
-        <p:nvSpPr>
-          <p:cNvPr id="20" name="Text 18"/>
-          <p:cNvSpPr/>
-          <p:nvPr/>
-        </p:nvSpPr>
-        <p:spPr>
-          <a:xfrm>
-            <a:off x="7863840" y="4069080"/>
-            <a:ext cx="3017520" cy="164592"/>
-          </a:xfrm>
-          <a:prstGeom prst="rect">
-            <a:avLst/>
-          </a:prstGeom>
-          <a:noFill/>
-          <a:ln/>
-        </p:spPr>
-        <p:txBody>
-          <a:bodyPr wrap="square" lIns="0" tIns="0" rIns="0" bIns="0" rtlCol="0" anchor="ctr"/>
-          <a:lstStyle/>
-          <a:p>
-            <a:pPr algn="ctr" indent="0" marL="0">
-              <a:buNone/>
-            </a:pPr>
-            <a:r>
-              <a:rPr lang="en-US" sz="900" b="1" dirty="0">
-                <a:solidFill>
-                  <a:srgbClr val="003A63"/>
-                </a:solidFill>
-                <a:latin typeface="Aptos" pitchFamily="34" charset="0"/>
-                <a:ea typeface="Aptos" pitchFamily="34" charset="-122"/>
-                <a:cs typeface="Aptos" pitchFamily="34" charset="-120"/>
-              </a:rPr>
-              <a:t>Decision rights</a:t>
-            </a:r>
-            <a:endParaRPr lang="en-US" sz="900" dirty="0"/>
-          </a:p>
-        </p:txBody>
-      </p:sp>
-      <p:sp>
-        <p:nvSpPr>
-          <p:cNvPr id="21" name="Shape 19"/>
           <p:cNvSpPr/>
           <p:nvPr/>
         </p:nvSpPr>
@@ -15290,7 +14098,7 @@
       </p:sp>
       <p:sp>
         <p:nvSpPr>
-          <p:cNvPr id="22" name="Text 20"/>
+          <p:cNvPr id="17" name="Text 15"/>
           <p:cNvSpPr/>
           <p:nvPr/>
         </p:nvSpPr>
@@ -15329,7 +14137,7 @@
       </p:sp>
       <p:sp>
         <p:nvSpPr>
-          <p:cNvPr id="23" name="Text 21"/>
+          <p:cNvPr id="18" name="Text 16"/>
           <p:cNvSpPr/>
           <p:nvPr/>
         </p:nvSpPr>
@@ -15823,13 +14631,11 @@
             </a:avLst>
           </a:prstGeom>
           <a:solidFill>
-            <a:srgbClr val="FFFFFF">
-              <a:alpha val="88000"/>
-            </a:srgbClr>
+            <a:srgbClr val="FFFFFF"/>
           </a:solidFill>
           <a:ln w="12700">
             <a:solidFill>
-              <a:srgbClr val="D6E8F2"/>
+              <a:srgbClr val="B9D7E6"/>
             </a:solidFill>
             <a:prstDash val="solid"/>
           </a:ln>
@@ -15837,190 +14643,98 @@
       </p:sp>
       <p:sp>
         <p:nvSpPr>
-          <p:cNvPr id="14" name="Shape 12"/>
-          <p:cNvSpPr/>
-          <p:nvPr/>
-        </p:nvSpPr>
-        <p:spPr>
-          <a:xfrm>
-            <a:off x="7891272" y="3108960"/>
-            <a:ext cx="566928" cy="566928"/>
-          </a:xfrm>
-          <a:prstGeom prst="ellipse">
-            <a:avLst/>
-          </a:prstGeom>
-          <a:solidFill>
-            <a:srgbClr val="0068B7"/>
-          </a:solidFill>
-          <a:ln w="12700">
-            <a:solidFill>
-              <a:srgbClr val="0068B7"/>
-            </a:solidFill>
-            <a:prstDash val="solid"/>
-          </a:ln>
-        </p:spPr>
-      </p:sp>
-      <p:sp>
-        <p:nvSpPr>
-          <p:cNvPr id="15" name="Shape 13"/>
-          <p:cNvSpPr/>
-          <p:nvPr/>
-        </p:nvSpPr>
-        <p:spPr>
-          <a:xfrm>
-            <a:off x="10287000" y="3108960"/>
-            <a:ext cx="566928" cy="566928"/>
-          </a:xfrm>
-          <a:prstGeom prst="ellipse">
-            <a:avLst/>
-          </a:prstGeom>
-          <a:solidFill>
-            <a:srgbClr val="2F8A28"/>
-          </a:solidFill>
-          <a:ln w="12700">
-            <a:solidFill>
-              <a:srgbClr val="2F8A28"/>
-            </a:solidFill>
-            <a:prstDash val="solid"/>
-          </a:ln>
-        </p:spPr>
+          <p:cNvPr id="14" name="Text 12"/>
+          <p:cNvSpPr/>
+          <p:nvPr/>
+        </p:nvSpPr>
+        <p:spPr>
+          <a:xfrm>
+            <a:off x="7799832" y="2935224"/>
+            <a:ext cx="3145536" cy="256032"/>
+          </a:xfrm>
+          <a:prstGeom prst="rect">
+            <a:avLst/>
+          </a:prstGeom>
+          <a:noFill/>
+          <a:ln/>
+        </p:spPr>
+        <p:txBody>
+          <a:bodyPr wrap="square" lIns="0" tIns="0" rIns="0" bIns="0" rtlCol="0" anchor="ctr"/>
+          <a:lstStyle/>
+          <a:p>
+            <a:pPr indent="0" marL="0">
+              <a:buNone/>
+            </a:pPr>
+            <a:r>
+              <a:rPr lang="en-US" sz="1300" b="1" dirty="0">
+                <a:solidFill>
+                  <a:srgbClr val="0068B7"/>
+                </a:solidFill>
+                <a:latin typeface="Aptos" pitchFamily="34" charset="0"/>
+                <a:ea typeface="Aptos" pitchFamily="34" charset="-122"/>
+                <a:cs typeface="Aptos" pitchFamily="34" charset="-120"/>
+              </a:rPr>
+              <a:t>Concept checkpoints</a:t>
+            </a:r>
+            <a:endParaRPr lang="en-US" sz="1300" dirty="0"/>
+          </a:p>
+        </p:txBody>
+      </p:sp>
+      <p:sp>
+        <p:nvSpPr>
+          <p:cNvPr id="15" name="Text 13"/>
+          <p:cNvSpPr/>
+          <p:nvPr/>
+        </p:nvSpPr>
+        <p:spPr>
+          <a:xfrm>
+            <a:off x="7818120" y="3300984"/>
+            <a:ext cx="3090672" cy="877824"/>
+          </a:xfrm>
+          <a:prstGeom prst="rect">
+            <a:avLst/>
+          </a:prstGeom>
+          <a:noFill/>
+          <a:ln/>
+        </p:spPr>
+        <p:txBody>
+          <a:bodyPr wrap="square" lIns="254" tIns="254" rIns="254" bIns="254" rtlCol="0" anchor="t">
+            <a:normAutofit/>
+          </a:bodyPr>
+          <a:lstStyle/>
+          <a:p>
+            <a:r>
+              <a:rPr lang="en-US" sz="1380" dirty="0">
+                <a:solidFill>
+                  <a:srgbClr val="17364A"/>
+                </a:solidFill>
+                <a:latin typeface="Aptos" pitchFamily="34" charset="0"/>
+                <a:ea typeface="Aptos" pitchFamily="34" charset="-122"/>
+                <a:cs typeface="Aptos" pitchFamily="34" charset="-120"/>
+              </a:rPr>
+              <a:t>What information would you need before you could explain an AI-supported workflow to a.</a:t>
+            </a:r>
+            <a:endParaRPr lang="en-US" sz="1380" dirty="0"/>
+          </a:p>
+          <a:p>
+            <a:r>
+              <a:rPr lang="en-US" sz="1380" dirty="0">
+                <a:solidFill>
+                  <a:srgbClr val="17364A"/>
+                </a:solidFill>
+                <a:latin typeface="Aptos" pitchFamily="34" charset="0"/>
+                <a:ea typeface="Aptos" pitchFamily="34" charset="-122"/>
+                <a:cs typeface="Aptos" pitchFamily="34" charset="-120"/>
+              </a:rPr>
+              <a:t>What would make staff comfortable raising concerns about AI outputs or unapproved use.</a:t>
+            </a:r>
+            <a:endParaRPr lang="en-US" sz="1380" dirty="0"/>
+          </a:p>
+        </p:txBody>
       </p:sp>
       <p:sp>
         <p:nvSpPr>
           <p:cNvPr id="16" name="Shape 14"/>
-          <p:cNvSpPr/>
-          <p:nvPr/>
-        </p:nvSpPr>
-        <p:spPr>
-          <a:xfrm>
-            <a:off x="9089136" y="3456432"/>
-            <a:ext cx="566928" cy="566928"/>
-          </a:xfrm>
-          <a:prstGeom prst="ellipse">
-            <a:avLst/>
-          </a:prstGeom>
-          <a:solidFill>
-            <a:srgbClr val="6A4CA3"/>
-          </a:solidFill>
-          <a:ln w="12700">
-            <a:solidFill>
-              <a:srgbClr val="6A4CA3"/>
-            </a:solidFill>
-            <a:prstDash val="solid"/>
-          </a:ln>
-        </p:spPr>
-      </p:sp>
-      <p:sp>
-        <p:nvSpPr>
-          <p:cNvPr id="17" name="Shape 15"/>
-          <p:cNvSpPr/>
-          <p:nvPr/>
-        </p:nvSpPr>
-        <p:spPr>
-          <a:xfrm>
-            <a:off x="8385048" y="3419856"/>
-            <a:ext cx="1975104" cy="0"/>
-          </a:xfrm>
-          <a:prstGeom prst="line">
-            <a:avLst/>
-          </a:prstGeom>
-          <a:noFill/>
-          <a:ln w="25400">
-            <a:solidFill>
-              <a:srgbClr val="8ABBD8"/>
-            </a:solidFill>
-            <a:prstDash val="solid"/>
-          </a:ln>
-        </p:spPr>
-      </p:sp>
-      <p:sp>
-        <p:nvSpPr>
-          <p:cNvPr id="18" name="Shape 16"/>
-          <p:cNvSpPr/>
-          <p:nvPr/>
-        </p:nvSpPr>
-        <p:spPr>
-          <a:xfrm>
-            <a:off x="8202168" y="3630168"/>
-            <a:ext cx="1170432" cy="118872"/>
-          </a:xfrm>
-          <a:prstGeom prst="line">
-            <a:avLst/>
-          </a:prstGeom>
-          <a:noFill/>
-          <a:ln w="25400">
-            <a:solidFill>
-              <a:srgbClr val="8ABBD8"/>
-            </a:solidFill>
-            <a:prstDash val="solid"/>
-          </a:ln>
-        </p:spPr>
-      </p:sp>
-      <p:sp>
-        <p:nvSpPr>
-          <p:cNvPr id="19" name="Shape 17"/>
-          <p:cNvSpPr/>
-          <p:nvPr/>
-        </p:nvSpPr>
-        <p:spPr>
-          <a:xfrm>
-            <a:off x="10543032" y="3630168"/>
-            <a:ext cx="-1170432" cy="118872"/>
-          </a:xfrm>
-          <a:prstGeom prst="line">
-            <a:avLst/>
-          </a:prstGeom>
-          <a:noFill/>
-          <a:ln w="25400">
-            <a:solidFill>
-              <a:srgbClr val="8ABBD8"/>
-            </a:solidFill>
-            <a:prstDash val="solid"/>
-          </a:ln>
-        </p:spPr>
-      </p:sp>
-      <p:sp>
-        <p:nvSpPr>
-          <p:cNvPr id="20" name="Text 18"/>
-          <p:cNvSpPr/>
-          <p:nvPr/>
-        </p:nvSpPr>
-        <p:spPr>
-          <a:xfrm>
-            <a:off x="7863840" y="4069080"/>
-            <a:ext cx="3017520" cy="164592"/>
-          </a:xfrm>
-          <a:prstGeom prst="rect">
-            <a:avLst/>
-          </a:prstGeom>
-          <a:noFill/>
-          <a:ln/>
-        </p:spPr>
-        <p:txBody>
-          <a:bodyPr wrap="square" lIns="0" tIns="0" rIns="0" bIns="0" rtlCol="0" anchor="ctr"/>
-          <a:lstStyle/>
-          <a:p>
-            <a:pPr algn="ctr" indent="0" marL="0">
-              <a:buNone/>
-            </a:pPr>
-            <a:r>
-              <a:rPr lang="en-US" sz="900" b="1" dirty="0">
-                <a:solidFill>
-                  <a:srgbClr val="003A63"/>
-                </a:solidFill>
-                <a:latin typeface="Aptos" pitchFamily="34" charset="0"/>
-                <a:ea typeface="Aptos" pitchFamily="34" charset="-122"/>
-                <a:cs typeface="Aptos" pitchFamily="34" charset="-120"/>
-              </a:rPr>
-              <a:t>Decision rights</a:t>
-            </a:r>
-            <a:endParaRPr lang="en-US" sz="900" dirty="0"/>
-          </a:p>
-        </p:txBody>
-      </p:sp>
-      <p:sp>
-        <p:nvSpPr>
-          <p:cNvPr id="21" name="Shape 19"/>
           <p:cNvSpPr/>
           <p:nvPr/>
         </p:nvSpPr>
@@ -16047,7 +14761,7 @@
       </p:sp>
       <p:sp>
         <p:nvSpPr>
-          <p:cNvPr id="22" name="Text 20"/>
+          <p:cNvPr id="17" name="Text 15"/>
           <p:cNvSpPr/>
           <p:nvPr/>
         </p:nvSpPr>
@@ -16086,7 +14800,7 @@
       </p:sp>
       <p:sp>
         <p:nvSpPr>
-          <p:cNvPr id="23" name="Text 21"/>
+          <p:cNvPr id="18" name="Text 16"/>
           <p:cNvSpPr/>
           <p:nvPr/>
         </p:nvSpPr>
@@ -16594,13 +15308,11 @@
             </a:avLst>
           </a:prstGeom>
           <a:solidFill>
-            <a:srgbClr val="FFFFFF">
-              <a:alpha val="88000"/>
-            </a:srgbClr>
+            <a:srgbClr val="FFFFFF"/>
           </a:solidFill>
           <a:ln w="12700">
             <a:solidFill>
-              <a:srgbClr val="D6E8F2"/>
+              <a:srgbClr val="B9D7E6"/>
             </a:solidFill>
             <a:prstDash val="solid"/>
           </a:ln>
@@ -16608,190 +15320,112 @@
       </p:sp>
       <p:sp>
         <p:nvSpPr>
-          <p:cNvPr id="14" name="Shape 12"/>
-          <p:cNvSpPr/>
-          <p:nvPr/>
-        </p:nvSpPr>
-        <p:spPr>
-          <a:xfrm>
-            <a:off x="7891272" y="3108960"/>
-            <a:ext cx="566928" cy="566928"/>
-          </a:xfrm>
-          <a:prstGeom prst="ellipse">
-            <a:avLst/>
-          </a:prstGeom>
-          <a:solidFill>
-            <a:srgbClr val="0068B7"/>
-          </a:solidFill>
-          <a:ln w="12700">
-            <a:solidFill>
-              <a:srgbClr val="0068B7"/>
-            </a:solidFill>
-            <a:prstDash val="solid"/>
-          </a:ln>
-        </p:spPr>
-      </p:sp>
-      <p:sp>
-        <p:nvSpPr>
-          <p:cNvPr id="15" name="Shape 13"/>
-          <p:cNvSpPr/>
-          <p:nvPr/>
-        </p:nvSpPr>
-        <p:spPr>
-          <a:xfrm>
-            <a:off x="10287000" y="3108960"/>
-            <a:ext cx="566928" cy="566928"/>
-          </a:xfrm>
-          <a:prstGeom prst="ellipse">
-            <a:avLst/>
-          </a:prstGeom>
-          <a:solidFill>
-            <a:srgbClr val="2F8A28"/>
-          </a:solidFill>
-          <a:ln w="12700">
-            <a:solidFill>
-              <a:srgbClr val="2F8A28"/>
-            </a:solidFill>
-            <a:prstDash val="solid"/>
-          </a:ln>
-        </p:spPr>
+          <p:cNvPr id="14" name="Text 12"/>
+          <p:cNvSpPr/>
+          <p:nvPr/>
+        </p:nvSpPr>
+        <p:spPr>
+          <a:xfrm>
+            <a:off x="7799832" y="2935224"/>
+            <a:ext cx="3145536" cy="256032"/>
+          </a:xfrm>
+          <a:prstGeom prst="rect">
+            <a:avLst/>
+          </a:prstGeom>
+          <a:noFill/>
+          <a:ln/>
+        </p:spPr>
+        <p:txBody>
+          <a:bodyPr wrap="square" lIns="0" tIns="0" rIns="0" bIns="0" rtlCol="0" anchor="ctr"/>
+          <a:lstStyle/>
+          <a:p>
+            <a:pPr indent="0" marL="0">
+              <a:buNone/>
+            </a:pPr>
+            <a:r>
+              <a:rPr lang="en-US" sz="1300" b="1" dirty="0">
+                <a:solidFill>
+                  <a:srgbClr val="0068B7"/>
+                </a:solidFill>
+                <a:latin typeface="Aptos" pitchFamily="34" charset="0"/>
+                <a:ea typeface="Aptos" pitchFamily="34" charset="-122"/>
+                <a:cs typeface="Aptos" pitchFamily="34" charset="-120"/>
+              </a:rPr>
+              <a:t>Concept checkpoints</a:t>
+            </a:r>
+            <a:endParaRPr lang="en-US" sz="1300" dirty="0"/>
+          </a:p>
+        </p:txBody>
+      </p:sp>
+      <p:sp>
+        <p:nvSpPr>
+          <p:cNvPr id="15" name="Text 13"/>
+          <p:cNvSpPr/>
+          <p:nvPr/>
+        </p:nvSpPr>
+        <p:spPr>
+          <a:xfrm>
+            <a:off x="7818120" y="3300984"/>
+            <a:ext cx="3090672" cy="877824"/>
+          </a:xfrm>
+          <a:prstGeom prst="rect">
+            <a:avLst/>
+          </a:prstGeom>
+          <a:noFill/>
+          <a:ln/>
+        </p:spPr>
+        <p:txBody>
+          <a:bodyPr wrap="square" lIns="254" tIns="254" rIns="254" bIns="254" rtlCol="0" anchor="t">
+            <a:normAutofit/>
+          </a:bodyPr>
+          <a:lstStyle/>
+          <a:p>
+            <a:r>
+              <a:rPr lang="en-US" sz="1380" dirty="0">
+                <a:solidFill>
+                  <a:srgbClr val="17364A"/>
+                </a:solidFill>
+                <a:latin typeface="Aptos" pitchFamily="34" charset="0"/>
+                <a:ea typeface="Aptos" pitchFamily="34" charset="-122"/>
+                <a:cs typeface="Aptos" pitchFamily="34" charset="-120"/>
+              </a:rPr>
+              <a:t>Examples include summarizing meeting notes, drafting public health messages, classifying.</a:t>
+            </a:r>
+            <a:endParaRPr lang="en-US" sz="1380" dirty="0"/>
+          </a:p>
+          <a:p>
+            <a:r>
+              <a:rPr lang="en-US" sz="1380" dirty="0">
+                <a:solidFill>
+                  <a:srgbClr val="17364A"/>
+                </a:solidFill>
+                <a:latin typeface="Aptos" pitchFamily="34" charset="0"/>
+                <a:ea typeface="Aptos" pitchFamily="34" charset="-122"/>
+                <a:cs typeface="Aptos" pitchFamily="34" charset="-120"/>
+              </a:rPr>
+              <a:t>The note should include: the public health purpose; the staff or partners who would use.</a:t>
+            </a:r>
+            <a:endParaRPr lang="en-US" sz="1380" dirty="0"/>
+          </a:p>
+          <a:p>
+            <a:r>
+              <a:rPr lang="en-US" sz="1380" dirty="0">
+                <a:solidFill>
+                  <a:srgbClr val="17364A"/>
+                </a:solidFill>
+                <a:latin typeface="Aptos" pitchFamily="34" charset="0"/>
+                <a:ea typeface="Aptos" pitchFamily="34" charset="-122"/>
+                <a:cs typeface="Aptos" pitchFamily="34" charset="-120"/>
+              </a:rPr>
+              <a:t>Practical exercise example: A chronic disease program wants to use an AI tool to summarize.</a:t>
+            </a:r>
+            <a:endParaRPr lang="en-US" sz="1380" dirty="0"/>
+          </a:p>
+        </p:txBody>
       </p:sp>
       <p:sp>
         <p:nvSpPr>
           <p:cNvPr id="16" name="Shape 14"/>
-          <p:cNvSpPr/>
-          <p:nvPr/>
-        </p:nvSpPr>
-        <p:spPr>
-          <a:xfrm>
-            <a:off x="9089136" y="3456432"/>
-            <a:ext cx="566928" cy="566928"/>
-          </a:xfrm>
-          <a:prstGeom prst="ellipse">
-            <a:avLst/>
-          </a:prstGeom>
-          <a:solidFill>
-            <a:srgbClr val="6A4CA3"/>
-          </a:solidFill>
-          <a:ln w="12700">
-            <a:solidFill>
-              <a:srgbClr val="6A4CA3"/>
-            </a:solidFill>
-            <a:prstDash val="solid"/>
-          </a:ln>
-        </p:spPr>
-      </p:sp>
-      <p:sp>
-        <p:nvSpPr>
-          <p:cNvPr id="17" name="Shape 15"/>
-          <p:cNvSpPr/>
-          <p:nvPr/>
-        </p:nvSpPr>
-        <p:spPr>
-          <a:xfrm>
-            <a:off x="8385048" y="3419856"/>
-            <a:ext cx="1975104" cy="0"/>
-          </a:xfrm>
-          <a:prstGeom prst="line">
-            <a:avLst/>
-          </a:prstGeom>
-          <a:noFill/>
-          <a:ln w="25400">
-            <a:solidFill>
-              <a:srgbClr val="8ABBD8"/>
-            </a:solidFill>
-            <a:prstDash val="solid"/>
-          </a:ln>
-        </p:spPr>
-      </p:sp>
-      <p:sp>
-        <p:nvSpPr>
-          <p:cNvPr id="18" name="Shape 16"/>
-          <p:cNvSpPr/>
-          <p:nvPr/>
-        </p:nvSpPr>
-        <p:spPr>
-          <a:xfrm>
-            <a:off x="8202168" y="3630168"/>
-            <a:ext cx="1170432" cy="118872"/>
-          </a:xfrm>
-          <a:prstGeom prst="line">
-            <a:avLst/>
-          </a:prstGeom>
-          <a:noFill/>
-          <a:ln w="25400">
-            <a:solidFill>
-              <a:srgbClr val="8ABBD8"/>
-            </a:solidFill>
-            <a:prstDash val="solid"/>
-          </a:ln>
-        </p:spPr>
-      </p:sp>
-      <p:sp>
-        <p:nvSpPr>
-          <p:cNvPr id="19" name="Shape 17"/>
-          <p:cNvSpPr/>
-          <p:nvPr/>
-        </p:nvSpPr>
-        <p:spPr>
-          <a:xfrm>
-            <a:off x="10543032" y="3630168"/>
-            <a:ext cx="-1170432" cy="118872"/>
-          </a:xfrm>
-          <a:prstGeom prst="line">
-            <a:avLst/>
-          </a:prstGeom>
-          <a:noFill/>
-          <a:ln w="25400">
-            <a:solidFill>
-              <a:srgbClr val="8ABBD8"/>
-            </a:solidFill>
-            <a:prstDash val="solid"/>
-          </a:ln>
-        </p:spPr>
-      </p:sp>
-      <p:sp>
-        <p:nvSpPr>
-          <p:cNvPr id="20" name="Text 18"/>
-          <p:cNvSpPr/>
-          <p:nvPr/>
-        </p:nvSpPr>
-        <p:spPr>
-          <a:xfrm>
-            <a:off x="7863840" y="4069080"/>
-            <a:ext cx="3017520" cy="164592"/>
-          </a:xfrm>
-          <a:prstGeom prst="rect">
-            <a:avLst/>
-          </a:prstGeom>
-          <a:noFill/>
-          <a:ln/>
-        </p:spPr>
-        <p:txBody>
-          <a:bodyPr wrap="square" lIns="0" tIns="0" rIns="0" bIns="0" rtlCol="0" anchor="ctr"/>
-          <a:lstStyle/>
-          <a:p>
-            <a:pPr algn="ctr" indent="0" marL="0">
-              <a:buNone/>
-            </a:pPr>
-            <a:r>
-              <a:rPr lang="en-US" sz="900" b="1" dirty="0">
-                <a:solidFill>
-                  <a:srgbClr val="003A63"/>
-                </a:solidFill>
-                <a:latin typeface="Aptos" pitchFamily="34" charset="0"/>
-                <a:ea typeface="Aptos" pitchFamily="34" charset="-122"/>
-                <a:cs typeface="Aptos" pitchFamily="34" charset="-120"/>
-              </a:rPr>
-              <a:t>Decision rights</a:t>
-            </a:r>
-            <a:endParaRPr lang="en-US" sz="900" dirty="0"/>
-          </a:p>
-        </p:txBody>
-      </p:sp>
-      <p:sp>
-        <p:nvSpPr>
-          <p:cNvPr id="21" name="Shape 19"/>
           <p:cNvSpPr/>
           <p:nvPr/>
         </p:nvSpPr>
@@ -16818,7 +15452,7 @@
       </p:sp>
       <p:sp>
         <p:nvSpPr>
-          <p:cNvPr id="22" name="Text 20"/>
+          <p:cNvPr id="17" name="Text 15"/>
           <p:cNvSpPr/>
           <p:nvPr/>
         </p:nvSpPr>
@@ -16857,7 +15491,7 @@
       </p:sp>
       <p:sp>
         <p:nvSpPr>
-          <p:cNvPr id="23" name="Text 21"/>
+          <p:cNvPr id="18" name="Text 16"/>
           <p:cNvSpPr/>
           <p:nvPr/>
         </p:nvSpPr>
@@ -17365,13 +15999,11 @@
             </a:avLst>
           </a:prstGeom>
           <a:solidFill>
-            <a:srgbClr val="FFFFFF">
-              <a:alpha val="88000"/>
-            </a:srgbClr>
+            <a:srgbClr val="FFFFFF"/>
           </a:solidFill>
           <a:ln w="12700">
             <a:solidFill>
-              <a:srgbClr val="D6E8F2"/>
+              <a:srgbClr val="B9D7E6"/>
             </a:solidFill>
             <a:prstDash val="solid"/>
           </a:ln>
@@ -17379,190 +16011,98 @@
       </p:sp>
       <p:sp>
         <p:nvSpPr>
-          <p:cNvPr id="14" name="Shape 12"/>
-          <p:cNvSpPr/>
-          <p:nvPr/>
-        </p:nvSpPr>
-        <p:spPr>
-          <a:xfrm>
-            <a:off x="7891272" y="3108960"/>
-            <a:ext cx="566928" cy="566928"/>
-          </a:xfrm>
-          <a:prstGeom prst="ellipse">
-            <a:avLst/>
-          </a:prstGeom>
-          <a:solidFill>
-            <a:srgbClr val="0068B7"/>
-          </a:solidFill>
-          <a:ln w="12700">
-            <a:solidFill>
-              <a:srgbClr val="0068B7"/>
-            </a:solidFill>
-            <a:prstDash val="solid"/>
-          </a:ln>
-        </p:spPr>
-      </p:sp>
-      <p:sp>
-        <p:nvSpPr>
-          <p:cNvPr id="15" name="Shape 13"/>
-          <p:cNvSpPr/>
-          <p:nvPr/>
-        </p:nvSpPr>
-        <p:spPr>
-          <a:xfrm>
-            <a:off x="10287000" y="3108960"/>
-            <a:ext cx="566928" cy="566928"/>
-          </a:xfrm>
-          <a:prstGeom prst="ellipse">
-            <a:avLst/>
-          </a:prstGeom>
-          <a:solidFill>
-            <a:srgbClr val="2F8A28"/>
-          </a:solidFill>
-          <a:ln w="12700">
-            <a:solidFill>
-              <a:srgbClr val="2F8A28"/>
-            </a:solidFill>
-            <a:prstDash val="solid"/>
-          </a:ln>
-        </p:spPr>
+          <p:cNvPr id="14" name="Text 12"/>
+          <p:cNvSpPr/>
+          <p:nvPr/>
+        </p:nvSpPr>
+        <p:spPr>
+          <a:xfrm>
+            <a:off x="7799832" y="2935224"/>
+            <a:ext cx="3145536" cy="256032"/>
+          </a:xfrm>
+          <a:prstGeom prst="rect">
+            <a:avLst/>
+          </a:prstGeom>
+          <a:noFill/>
+          <a:ln/>
+        </p:spPr>
+        <p:txBody>
+          <a:bodyPr wrap="square" lIns="0" tIns="0" rIns="0" bIns="0" rtlCol="0" anchor="ctr"/>
+          <a:lstStyle/>
+          <a:p>
+            <a:pPr indent="0" marL="0">
+              <a:buNone/>
+            </a:pPr>
+            <a:r>
+              <a:rPr lang="en-US" sz="1300" b="1" dirty="0">
+                <a:solidFill>
+                  <a:srgbClr val="0068B7"/>
+                </a:solidFill>
+                <a:latin typeface="Aptos" pitchFamily="34" charset="0"/>
+                <a:ea typeface="Aptos" pitchFamily="34" charset="-122"/>
+                <a:cs typeface="Aptos" pitchFamily="34" charset="-120"/>
+              </a:rPr>
+              <a:t>Concept checkpoints</a:t>
+            </a:r>
+            <a:endParaRPr lang="en-US" sz="1300" dirty="0"/>
+          </a:p>
+        </p:txBody>
+      </p:sp>
+      <p:sp>
+        <p:nvSpPr>
+          <p:cNvPr id="15" name="Text 13"/>
+          <p:cNvSpPr/>
+          <p:nvPr/>
+        </p:nvSpPr>
+        <p:spPr>
+          <a:xfrm>
+            <a:off x="7818120" y="3300984"/>
+            <a:ext cx="3090672" cy="877824"/>
+          </a:xfrm>
+          <a:prstGeom prst="rect">
+            <a:avLst/>
+          </a:prstGeom>
+          <a:noFill/>
+          <a:ln/>
+        </p:spPr>
+        <p:txBody>
+          <a:bodyPr wrap="square" lIns="254" tIns="254" rIns="254" bIns="254" rtlCol="0" anchor="t">
+            <a:normAutofit/>
+          </a:bodyPr>
+          <a:lstStyle/>
+          <a:p>
+            <a:r>
+              <a:rPr lang="en-US" sz="1380" dirty="0">
+                <a:solidFill>
+                  <a:srgbClr val="17364A"/>
+                </a:solidFill>
+                <a:latin typeface="Aptos" pitchFamily="34" charset="0"/>
+                <a:ea typeface="Aptos" pitchFamily="34" charset="-122"/>
+                <a:cs typeface="Aptos" pitchFamily="34" charset="-120"/>
+              </a:rPr>
+              <a:t>What threshold would make the project high risk?</a:t>
+            </a:r>
+            <a:endParaRPr lang="en-US" sz="1380" dirty="0"/>
+          </a:p>
+          <a:p>
+            <a:r>
+              <a:rPr lang="en-US" sz="1380" dirty="0">
+                <a:solidFill>
+                  <a:srgbClr val="17364A"/>
+                </a:solidFill>
+                <a:latin typeface="Aptos" pitchFamily="34" charset="0"/>
+                <a:ea typeface="Aptos" pitchFamily="34" charset="-122"/>
+                <a:cs typeface="Aptos" pitchFamily="34" charset="-120"/>
+              </a:rPr>
+              <a:t>What evidence would show that the AI summary did not erase smaller community concerns?</a:t>
+            </a:r>
+            <a:endParaRPr lang="en-US" sz="1380" dirty="0"/>
+          </a:p>
+        </p:txBody>
       </p:sp>
       <p:sp>
         <p:nvSpPr>
           <p:cNvPr id="16" name="Shape 14"/>
-          <p:cNvSpPr/>
-          <p:nvPr/>
-        </p:nvSpPr>
-        <p:spPr>
-          <a:xfrm>
-            <a:off x="9089136" y="3456432"/>
-            <a:ext cx="566928" cy="566928"/>
-          </a:xfrm>
-          <a:prstGeom prst="ellipse">
-            <a:avLst/>
-          </a:prstGeom>
-          <a:solidFill>
-            <a:srgbClr val="6A4CA3"/>
-          </a:solidFill>
-          <a:ln w="12700">
-            <a:solidFill>
-              <a:srgbClr val="6A4CA3"/>
-            </a:solidFill>
-            <a:prstDash val="solid"/>
-          </a:ln>
-        </p:spPr>
-      </p:sp>
-      <p:sp>
-        <p:nvSpPr>
-          <p:cNvPr id="17" name="Shape 15"/>
-          <p:cNvSpPr/>
-          <p:nvPr/>
-        </p:nvSpPr>
-        <p:spPr>
-          <a:xfrm>
-            <a:off x="8385048" y="3419856"/>
-            <a:ext cx="1975104" cy="0"/>
-          </a:xfrm>
-          <a:prstGeom prst="line">
-            <a:avLst/>
-          </a:prstGeom>
-          <a:noFill/>
-          <a:ln w="25400">
-            <a:solidFill>
-              <a:srgbClr val="8ABBD8"/>
-            </a:solidFill>
-            <a:prstDash val="solid"/>
-          </a:ln>
-        </p:spPr>
-      </p:sp>
-      <p:sp>
-        <p:nvSpPr>
-          <p:cNvPr id="18" name="Shape 16"/>
-          <p:cNvSpPr/>
-          <p:nvPr/>
-        </p:nvSpPr>
-        <p:spPr>
-          <a:xfrm>
-            <a:off x="8202168" y="3630168"/>
-            <a:ext cx="1170432" cy="118872"/>
-          </a:xfrm>
-          <a:prstGeom prst="line">
-            <a:avLst/>
-          </a:prstGeom>
-          <a:noFill/>
-          <a:ln w="25400">
-            <a:solidFill>
-              <a:srgbClr val="8ABBD8"/>
-            </a:solidFill>
-            <a:prstDash val="solid"/>
-          </a:ln>
-        </p:spPr>
-      </p:sp>
-      <p:sp>
-        <p:nvSpPr>
-          <p:cNvPr id="19" name="Shape 17"/>
-          <p:cNvSpPr/>
-          <p:nvPr/>
-        </p:nvSpPr>
-        <p:spPr>
-          <a:xfrm>
-            <a:off x="10543032" y="3630168"/>
-            <a:ext cx="-1170432" cy="118872"/>
-          </a:xfrm>
-          <a:prstGeom prst="line">
-            <a:avLst/>
-          </a:prstGeom>
-          <a:noFill/>
-          <a:ln w="25400">
-            <a:solidFill>
-              <a:srgbClr val="8ABBD8"/>
-            </a:solidFill>
-            <a:prstDash val="solid"/>
-          </a:ln>
-        </p:spPr>
-      </p:sp>
-      <p:sp>
-        <p:nvSpPr>
-          <p:cNvPr id="20" name="Text 18"/>
-          <p:cNvSpPr/>
-          <p:nvPr/>
-        </p:nvSpPr>
-        <p:spPr>
-          <a:xfrm>
-            <a:off x="7863840" y="4069080"/>
-            <a:ext cx="3017520" cy="164592"/>
-          </a:xfrm>
-          <a:prstGeom prst="rect">
-            <a:avLst/>
-          </a:prstGeom>
-          <a:noFill/>
-          <a:ln/>
-        </p:spPr>
-        <p:txBody>
-          <a:bodyPr wrap="square" lIns="0" tIns="0" rIns="0" bIns="0" rtlCol="0" anchor="ctr"/>
-          <a:lstStyle/>
-          <a:p>
-            <a:pPr algn="ctr" indent="0" marL="0">
-              <a:buNone/>
-            </a:pPr>
-            <a:r>
-              <a:rPr lang="en-US" sz="900" b="1" dirty="0">
-                <a:solidFill>
-                  <a:srgbClr val="003A63"/>
-                </a:solidFill>
-                <a:latin typeface="Aptos" pitchFamily="34" charset="0"/>
-                <a:ea typeface="Aptos" pitchFamily="34" charset="-122"/>
-                <a:cs typeface="Aptos" pitchFamily="34" charset="-120"/>
-              </a:rPr>
-              <a:t>Decision rights</a:t>
-            </a:r>
-            <a:endParaRPr lang="en-US" sz="900" dirty="0"/>
-          </a:p>
-        </p:txBody>
-      </p:sp>
-      <p:sp>
-        <p:nvSpPr>
-          <p:cNvPr id="21" name="Shape 19"/>
           <p:cNvSpPr/>
           <p:nvPr/>
         </p:nvSpPr>
@@ -17589,7 +16129,7 @@
       </p:sp>
       <p:sp>
         <p:nvSpPr>
-          <p:cNvPr id="22" name="Text 20"/>
+          <p:cNvPr id="17" name="Text 15"/>
           <p:cNvSpPr/>
           <p:nvPr/>
         </p:nvSpPr>
@@ -17628,7 +16168,7 @@
       </p:sp>
       <p:sp>
         <p:nvSpPr>
-          <p:cNvPr id="23" name="Text 21"/>
+          <p:cNvPr id="18" name="Text 16"/>
           <p:cNvSpPr/>
           <p:nvPr/>
         </p:nvSpPr>
@@ -18136,13 +16676,11 @@
             </a:avLst>
           </a:prstGeom>
           <a:solidFill>
-            <a:srgbClr val="FFFFFF">
-              <a:alpha val="88000"/>
-            </a:srgbClr>
+            <a:srgbClr val="FFFFFF"/>
           </a:solidFill>
           <a:ln w="12700">
             <a:solidFill>
-              <a:srgbClr val="D6E8F2"/>
+              <a:srgbClr val="B9D7E6"/>
             </a:solidFill>
             <a:prstDash val="solid"/>
           </a:ln>
@@ -18150,190 +16688,112 @@
       </p:sp>
       <p:sp>
         <p:nvSpPr>
-          <p:cNvPr id="14" name="Shape 12"/>
-          <p:cNvSpPr/>
-          <p:nvPr/>
-        </p:nvSpPr>
-        <p:spPr>
-          <a:xfrm>
-            <a:off x="7891272" y="3108960"/>
-            <a:ext cx="566928" cy="566928"/>
-          </a:xfrm>
-          <a:prstGeom prst="ellipse">
-            <a:avLst/>
-          </a:prstGeom>
-          <a:solidFill>
-            <a:srgbClr val="0068B7"/>
-          </a:solidFill>
-          <a:ln w="12700">
-            <a:solidFill>
-              <a:srgbClr val="0068B7"/>
-            </a:solidFill>
-            <a:prstDash val="solid"/>
-          </a:ln>
-        </p:spPr>
-      </p:sp>
-      <p:sp>
-        <p:nvSpPr>
-          <p:cNvPr id="15" name="Shape 13"/>
-          <p:cNvSpPr/>
-          <p:nvPr/>
-        </p:nvSpPr>
-        <p:spPr>
-          <a:xfrm>
-            <a:off x="10287000" y="3108960"/>
-            <a:ext cx="566928" cy="566928"/>
-          </a:xfrm>
-          <a:prstGeom prst="ellipse">
-            <a:avLst/>
-          </a:prstGeom>
-          <a:solidFill>
-            <a:srgbClr val="2F8A28"/>
-          </a:solidFill>
-          <a:ln w="12700">
-            <a:solidFill>
-              <a:srgbClr val="2F8A28"/>
-            </a:solidFill>
-            <a:prstDash val="solid"/>
-          </a:ln>
-        </p:spPr>
+          <p:cNvPr id="14" name="Text 12"/>
+          <p:cNvSpPr/>
+          <p:nvPr/>
+        </p:nvSpPr>
+        <p:spPr>
+          <a:xfrm>
+            <a:off x="7799832" y="2935224"/>
+            <a:ext cx="3145536" cy="256032"/>
+          </a:xfrm>
+          <a:prstGeom prst="rect">
+            <a:avLst/>
+          </a:prstGeom>
+          <a:noFill/>
+          <a:ln/>
+        </p:spPr>
+        <p:txBody>
+          <a:bodyPr wrap="square" lIns="0" tIns="0" rIns="0" bIns="0" rtlCol="0" anchor="ctr"/>
+          <a:lstStyle/>
+          <a:p>
+            <a:pPr indent="0" marL="0">
+              <a:buNone/>
+            </a:pPr>
+            <a:r>
+              <a:rPr lang="en-US" sz="1300" b="1" dirty="0">
+                <a:solidFill>
+                  <a:srgbClr val="0068B7"/>
+                </a:solidFill>
+                <a:latin typeface="Aptos" pitchFamily="34" charset="0"/>
+                <a:ea typeface="Aptos" pitchFamily="34" charset="-122"/>
+                <a:cs typeface="Aptos" pitchFamily="34" charset="-120"/>
+              </a:rPr>
+              <a:t>Concept checkpoints</a:t>
+            </a:r>
+            <a:endParaRPr lang="en-US" sz="1300" dirty="0"/>
+          </a:p>
+        </p:txBody>
+      </p:sp>
+      <p:sp>
+        <p:nvSpPr>
+          <p:cNvPr id="15" name="Text 13"/>
+          <p:cNvSpPr/>
+          <p:nvPr/>
+        </p:nvSpPr>
+        <p:spPr>
+          <a:xfrm>
+            <a:off x="7818120" y="3300984"/>
+            <a:ext cx="3090672" cy="877824"/>
+          </a:xfrm>
+          <a:prstGeom prst="rect">
+            <a:avLst/>
+          </a:prstGeom>
+          <a:noFill/>
+          <a:ln/>
+        </p:spPr>
+        <p:txBody>
+          <a:bodyPr wrap="square" lIns="254" tIns="254" rIns="254" bIns="254" rtlCol="0" anchor="t">
+            <a:normAutofit/>
+          </a:bodyPr>
+          <a:lstStyle/>
+          <a:p>
+            <a:r>
+              <a:rPr lang="en-US" sz="1380" dirty="0">
+                <a:solidFill>
+                  <a:srgbClr val="17364A"/>
+                </a:solidFill>
+                <a:latin typeface="Aptos" pitchFamily="34" charset="0"/>
+                <a:ea typeface="Aptos" pitchFamily="34" charset="-122"/>
+                <a:cs typeface="Aptos" pitchFamily="34" charset="-120"/>
+              </a:rPr>
+              <a:t>Learners should produce an introductory AI governance intake and escalation note for one.</a:t>
+            </a:r>
+            <a:endParaRPr lang="en-US" sz="1380" dirty="0"/>
+          </a:p>
+          <a:p>
+            <a:r>
+              <a:rPr lang="en-US" sz="1380" dirty="0">
+                <a:solidFill>
+                  <a:srgbClr val="17364A"/>
+                </a:solidFill>
+                <a:latin typeface="Aptos" pitchFamily="34" charset="0"/>
+                <a:ea typeface="Aptos" pitchFamily="34" charset="-122"/>
+                <a:cs typeface="Aptos" pitchFamily="34" charset="-120"/>
+              </a:rPr>
+              <a:t>The artifact should include a purpose statement, data description, AI function, likely.</a:t>
+            </a:r>
+            <a:endParaRPr lang="en-US" sz="1380" dirty="0"/>
+          </a:p>
+          <a:p>
+            <a:r>
+              <a:rPr lang="en-US" sz="1380" dirty="0">
+                <a:solidFill>
+                  <a:srgbClr val="17364A"/>
+                </a:solidFill>
+                <a:latin typeface="Aptos" pitchFamily="34" charset="0"/>
+                <a:ea typeface="Aptos" pitchFamily="34" charset="-122"/>
+                <a:cs typeface="Aptos" pitchFamily="34" charset="-120"/>
+              </a:rPr>
+              <a:t>The artifact can be used as a training record, a draft intake form, or a starting point.</a:t>
+            </a:r>
+            <a:endParaRPr lang="en-US" sz="1380" dirty="0"/>
+          </a:p>
+        </p:txBody>
       </p:sp>
       <p:sp>
         <p:nvSpPr>
           <p:cNvPr id="16" name="Shape 14"/>
-          <p:cNvSpPr/>
-          <p:nvPr/>
-        </p:nvSpPr>
-        <p:spPr>
-          <a:xfrm>
-            <a:off x="9089136" y="3456432"/>
-            <a:ext cx="566928" cy="566928"/>
-          </a:xfrm>
-          <a:prstGeom prst="ellipse">
-            <a:avLst/>
-          </a:prstGeom>
-          <a:solidFill>
-            <a:srgbClr val="6A4CA3"/>
-          </a:solidFill>
-          <a:ln w="12700">
-            <a:solidFill>
-              <a:srgbClr val="6A4CA3"/>
-            </a:solidFill>
-            <a:prstDash val="solid"/>
-          </a:ln>
-        </p:spPr>
-      </p:sp>
-      <p:sp>
-        <p:nvSpPr>
-          <p:cNvPr id="17" name="Shape 15"/>
-          <p:cNvSpPr/>
-          <p:nvPr/>
-        </p:nvSpPr>
-        <p:spPr>
-          <a:xfrm>
-            <a:off x="8385048" y="3419856"/>
-            <a:ext cx="1975104" cy="0"/>
-          </a:xfrm>
-          <a:prstGeom prst="line">
-            <a:avLst/>
-          </a:prstGeom>
-          <a:noFill/>
-          <a:ln w="25400">
-            <a:solidFill>
-              <a:srgbClr val="8ABBD8"/>
-            </a:solidFill>
-            <a:prstDash val="solid"/>
-          </a:ln>
-        </p:spPr>
-      </p:sp>
-      <p:sp>
-        <p:nvSpPr>
-          <p:cNvPr id="18" name="Shape 16"/>
-          <p:cNvSpPr/>
-          <p:nvPr/>
-        </p:nvSpPr>
-        <p:spPr>
-          <a:xfrm>
-            <a:off x="8202168" y="3630168"/>
-            <a:ext cx="1170432" cy="118872"/>
-          </a:xfrm>
-          <a:prstGeom prst="line">
-            <a:avLst/>
-          </a:prstGeom>
-          <a:noFill/>
-          <a:ln w="25400">
-            <a:solidFill>
-              <a:srgbClr val="8ABBD8"/>
-            </a:solidFill>
-            <a:prstDash val="solid"/>
-          </a:ln>
-        </p:spPr>
-      </p:sp>
-      <p:sp>
-        <p:nvSpPr>
-          <p:cNvPr id="19" name="Shape 17"/>
-          <p:cNvSpPr/>
-          <p:nvPr/>
-        </p:nvSpPr>
-        <p:spPr>
-          <a:xfrm>
-            <a:off x="10543032" y="3630168"/>
-            <a:ext cx="-1170432" cy="118872"/>
-          </a:xfrm>
-          <a:prstGeom prst="line">
-            <a:avLst/>
-          </a:prstGeom>
-          <a:noFill/>
-          <a:ln w="25400">
-            <a:solidFill>
-              <a:srgbClr val="8ABBD8"/>
-            </a:solidFill>
-            <a:prstDash val="solid"/>
-          </a:ln>
-        </p:spPr>
-      </p:sp>
-      <p:sp>
-        <p:nvSpPr>
-          <p:cNvPr id="20" name="Text 18"/>
-          <p:cNvSpPr/>
-          <p:nvPr/>
-        </p:nvSpPr>
-        <p:spPr>
-          <a:xfrm>
-            <a:off x="7863840" y="4069080"/>
-            <a:ext cx="3017520" cy="164592"/>
-          </a:xfrm>
-          <a:prstGeom prst="rect">
-            <a:avLst/>
-          </a:prstGeom>
-          <a:noFill/>
-          <a:ln/>
-        </p:spPr>
-        <p:txBody>
-          <a:bodyPr wrap="square" lIns="0" tIns="0" rIns="0" bIns="0" rtlCol="0" anchor="ctr"/>
-          <a:lstStyle/>
-          <a:p>
-            <a:pPr algn="ctr" indent="0" marL="0">
-              <a:buNone/>
-            </a:pPr>
-            <a:r>
-              <a:rPr lang="en-US" sz="900" b="1" dirty="0">
-                <a:solidFill>
-                  <a:srgbClr val="003A63"/>
-                </a:solidFill>
-                <a:latin typeface="Aptos" pitchFamily="34" charset="0"/>
-                <a:ea typeface="Aptos" pitchFamily="34" charset="-122"/>
-                <a:cs typeface="Aptos" pitchFamily="34" charset="-120"/>
-              </a:rPr>
-              <a:t>Decision rights</a:t>
-            </a:r>
-            <a:endParaRPr lang="en-US" sz="900" dirty="0"/>
-          </a:p>
-        </p:txBody>
-      </p:sp>
-      <p:sp>
-        <p:nvSpPr>
-          <p:cNvPr id="21" name="Shape 19"/>
           <p:cNvSpPr/>
           <p:nvPr/>
         </p:nvSpPr>
@@ -18360,7 +16820,7 @@
       </p:sp>
       <p:sp>
         <p:nvSpPr>
-          <p:cNvPr id="22" name="Text 20"/>
+          <p:cNvPr id="17" name="Text 15"/>
           <p:cNvSpPr/>
           <p:nvPr/>
         </p:nvSpPr>
@@ -18399,7 +16859,7 @@
       </p:sp>
       <p:sp>
         <p:nvSpPr>
-          <p:cNvPr id="23" name="Text 21"/>
+          <p:cNvPr id="18" name="Text 16"/>
           <p:cNvSpPr/>
           <p:nvPr/>
         </p:nvSpPr>
@@ -18879,13 +17339,11 @@
             </a:avLst>
           </a:prstGeom>
           <a:solidFill>
-            <a:srgbClr val="FFFFFF">
-              <a:alpha val="88000"/>
-            </a:srgbClr>
+            <a:srgbClr val="FFFFFF"/>
           </a:solidFill>
           <a:ln w="12700">
             <a:solidFill>
-              <a:srgbClr val="D6E8F2"/>
+              <a:srgbClr val="B9D7E6"/>
             </a:solidFill>
             <a:prstDash val="solid"/>
           </a:ln>
@@ -18893,190 +17351,112 @@
       </p:sp>
       <p:sp>
         <p:nvSpPr>
-          <p:cNvPr id="14" name="Shape 12"/>
-          <p:cNvSpPr/>
-          <p:nvPr/>
-        </p:nvSpPr>
-        <p:spPr>
-          <a:xfrm>
-            <a:off x="7891272" y="3108960"/>
-            <a:ext cx="566928" cy="566928"/>
-          </a:xfrm>
-          <a:prstGeom prst="ellipse">
-            <a:avLst/>
-          </a:prstGeom>
-          <a:solidFill>
-            <a:srgbClr val="0068B7"/>
-          </a:solidFill>
-          <a:ln w="12700">
-            <a:solidFill>
-              <a:srgbClr val="0068B7"/>
-            </a:solidFill>
-            <a:prstDash val="solid"/>
-          </a:ln>
-        </p:spPr>
-      </p:sp>
-      <p:sp>
-        <p:nvSpPr>
-          <p:cNvPr id="15" name="Shape 13"/>
-          <p:cNvSpPr/>
-          <p:nvPr/>
-        </p:nvSpPr>
-        <p:spPr>
-          <a:xfrm>
-            <a:off x="10287000" y="3108960"/>
-            <a:ext cx="566928" cy="566928"/>
-          </a:xfrm>
-          <a:prstGeom prst="ellipse">
-            <a:avLst/>
-          </a:prstGeom>
-          <a:solidFill>
-            <a:srgbClr val="2F8A28"/>
-          </a:solidFill>
-          <a:ln w="12700">
-            <a:solidFill>
-              <a:srgbClr val="2F8A28"/>
-            </a:solidFill>
-            <a:prstDash val="solid"/>
-          </a:ln>
-        </p:spPr>
+          <p:cNvPr id="14" name="Text 12"/>
+          <p:cNvSpPr/>
+          <p:nvPr/>
+        </p:nvSpPr>
+        <p:spPr>
+          <a:xfrm>
+            <a:off x="7799832" y="2935224"/>
+            <a:ext cx="3145536" cy="256032"/>
+          </a:xfrm>
+          <a:prstGeom prst="rect">
+            <a:avLst/>
+          </a:prstGeom>
+          <a:noFill/>
+          <a:ln/>
+        </p:spPr>
+        <p:txBody>
+          <a:bodyPr wrap="square" lIns="0" tIns="0" rIns="0" bIns="0" rtlCol="0" anchor="ctr"/>
+          <a:lstStyle/>
+          <a:p>
+            <a:pPr indent="0" marL="0">
+              <a:buNone/>
+            </a:pPr>
+            <a:r>
+              <a:rPr lang="en-US" sz="1300" b="1" dirty="0">
+                <a:solidFill>
+                  <a:srgbClr val="0068B7"/>
+                </a:solidFill>
+                <a:latin typeface="Aptos" pitchFamily="34" charset="0"/>
+                <a:ea typeface="Aptos" pitchFamily="34" charset="-122"/>
+                <a:cs typeface="Aptos" pitchFamily="34" charset="-120"/>
+              </a:rPr>
+              <a:t>Concept checkpoints</a:t>
+            </a:r>
+            <a:endParaRPr lang="en-US" sz="1300" dirty="0"/>
+          </a:p>
+        </p:txBody>
+      </p:sp>
+      <p:sp>
+        <p:nvSpPr>
+          <p:cNvPr id="15" name="Text 13"/>
+          <p:cNvSpPr/>
+          <p:nvPr/>
+        </p:nvSpPr>
+        <p:spPr>
+          <a:xfrm>
+            <a:off x="7818120" y="3300984"/>
+            <a:ext cx="3090672" cy="877824"/>
+          </a:xfrm>
+          <a:prstGeom prst="rect">
+            <a:avLst/>
+          </a:prstGeom>
+          <a:noFill/>
+          <a:ln/>
+        </p:spPr>
+        <p:txBody>
+          <a:bodyPr wrap="square" lIns="254" tIns="254" rIns="254" bIns="254" rtlCol="0" anchor="t">
+            <a:normAutofit/>
+          </a:bodyPr>
+          <a:lstStyle/>
+          <a:p>
+            <a:r>
+              <a:rPr lang="en-US" sz="1380" dirty="0">
+                <a:solidFill>
+                  <a:srgbClr val="17364A"/>
+                </a:solidFill>
+                <a:latin typeface="Aptos" pitchFamily="34" charset="0"/>
+                <a:ea typeface="Aptos" pitchFamily="34" charset="-122"/>
+                <a:cs typeface="Aptos" pitchFamily="34" charset="-120"/>
+              </a:rPr>
+              <a:t>Learners should produce an introductory AI governance intake and escalation note for one.</a:t>
+            </a:r>
+            <a:endParaRPr lang="en-US" sz="1380" dirty="0"/>
+          </a:p>
+          <a:p>
+            <a:r>
+              <a:rPr lang="en-US" sz="1380" dirty="0">
+                <a:solidFill>
+                  <a:srgbClr val="17364A"/>
+                </a:solidFill>
+                <a:latin typeface="Aptos" pitchFamily="34" charset="0"/>
+                <a:ea typeface="Aptos" pitchFamily="34" charset="-122"/>
+                <a:cs typeface="Aptos" pitchFamily="34" charset="-120"/>
+              </a:rPr>
+              <a:t>The artifact should include a purpose statement, data description, AI function, likely.</a:t>
+            </a:r>
+            <a:endParaRPr lang="en-US" sz="1380" dirty="0"/>
+          </a:p>
+          <a:p>
+            <a:r>
+              <a:rPr lang="en-US" sz="1380" dirty="0">
+                <a:solidFill>
+                  <a:srgbClr val="17364A"/>
+                </a:solidFill>
+                <a:latin typeface="Aptos" pitchFamily="34" charset="0"/>
+                <a:ea typeface="Aptos" pitchFamily="34" charset="-122"/>
+                <a:cs typeface="Aptos" pitchFamily="34" charset="-120"/>
+              </a:rPr>
+              <a:t>The artifact can be used as a training record, a draft intake form, or a starting point.</a:t>
+            </a:r>
+            <a:endParaRPr lang="en-US" sz="1380" dirty="0"/>
+          </a:p>
+        </p:txBody>
       </p:sp>
       <p:sp>
         <p:nvSpPr>
           <p:cNvPr id="16" name="Shape 14"/>
-          <p:cNvSpPr/>
-          <p:nvPr/>
-        </p:nvSpPr>
-        <p:spPr>
-          <a:xfrm>
-            <a:off x="9089136" y="3456432"/>
-            <a:ext cx="566928" cy="566928"/>
-          </a:xfrm>
-          <a:prstGeom prst="ellipse">
-            <a:avLst/>
-          </a:prstGeom>
-          <a:solidFill>
-            <a:srgbClr val="6A4CA3"/>
-          </a:solidFill>
-          <a:ln w="12700">
-            <a:solidFill>
-              <a:srgbClr val="6A4CA3"/>
-            </a:solidFill>
-            <a:prstDash val="solid"/>
-          </a:ln>
-        </p:spPr>
-      </p:sp>
-      <p:sp>
-        <p:nvSpPr>
-          <p:cNvPr id="17" name="Shape 15"/>
-          <p:cNvSpPr/>
-          <p:nvPr/>
-        </p:nvSpPr>
-        <p:spPr>
-          <a:xfrm>
-            <a:off x="8385048" y="3419856"/>
-            <a:ext cx="1975104" cy="0"/>
-          </a:xfrm>
-          <a:prstGeom prst="line">
-            <a:avLst/>
-          </a:prstGeom>
-          <a:noFill/>
-          <a:ln w="25400">
-            <a:solidFill>
-              <a:srgbClr val="8ABBD8"/>
-            </a:solidFill>
-            <a:prstDash val="solid"/>
-          </a:ln>
-        </p:spPr>
-      </p:sp>
-      <p:sp>
-        <p:nvSpPr>
-          <p:cNvPr id="18" name="Shape 16"/>
-          <p:cNvSpPr/>
-          <p:nvPr/>
-        </p:nvSpPr>
-        <p:spPr>
-          <a:xfrm>
-            <a:off x="8202168" y="3630168"/>
-            <a:ext cx="1170432" cy="118872"/>
-          </a:xfrm>
-          <a:prstGeom prst="line">
-            <a:avLst/>
-          </a:prstGeom>
-          <a:noFill/>
-          <a:ln w="25400">
-            <a:solidFill>
-              <a:srgbClr val="8ABBD8"/>
-            </a:solidFill>
-            <a:prstDash val="solid"/>
-          </a:ln>
-        </p:spPr>
-      </p:sp>
-      <p:sp>
-        <p:nvSpPr>
-          <p:cNvPr id="19" name="Shape 17"/>
-          <p:cNvSpPr/>
-          <p:nvPr/>
-        </p:nvSpPr>
-        <p:spPr>
-          <a:xfrm>
-            <a:off x="10543032" y="3630168"/>
-            <a:ext cx="-1170432" cy="118872"/>
-          </a:xfrm>
-          <a:prstGeom prst="line">
-            <a:avLst/>
-          </a:prstGeom>
-          <a:noFill/>
-          <a:ln w="25400">
-            <a:solidFill>
-              <a:srgbClr val="8ABBD8"/>
-            </a:solidFill>
-            <a:prstDash val="solid"/>
-          </a:ln>
-        </p:spPr>
-      </p:sp>
-      <p:sp>
-        <p:nvSpPr>
-          <p:cNvPr id="20" name="Text 18"/>
-          <p:cNvSpPr/>
-          <p:nvPr/>
-        </p:nvSpPr>
-        <p:spPr>
-          <a:xfrm>
-            <a:off x="7863840" y="4069080"/>
-            <a:ext cx="3017520" cy="164592"/>
-          </a:xfrm>
-          <a:prstGeom prst="rect">
-            <a:avLst/>
-          </a:prstGeom>
-          <a:noFill/>
-          <a:ln/>
-        </p:spPr>
-        <p:txBody>
-          <a:bodyPr wrap="square" lIns="0" tIns="0" rIns="0" bIns="0" rtlCol="0" anchor="ctr"/>
-          <a:lstStyle/>
-          <a:p>
-            <a:pPr algn="ctr" indent="0" marL="0">
-              <a:buNone/>
-            </a:pPr>
-            <a:r>
-              <a:rPr lang="en-US" sz="900" b="1" dirty="0">
-                <a:solidFill>
-                  <a:srgbClr val="003A63"/>
-                </a:solidFill>
-                <a:latin typeface="Aptos" pitchFamily="34" charset="0"/>
-                <a:ea typeface="Aptos" pitchFamily="34" charset="-122"/>
-                <a:cs typeface="Aptos" pitchFamily="34" charset="-120"/>
-              </a:rPr>
-              <a:t>Decision rights</a:t>
-            </a:r>
-            <a:endParaRPr lang="en-US" sz="900" dirty="0"/>
-          </a:p>
-        </p:txBody>
-      </p:sp>
-      <p:sp>
-        <p:nvSpPr>
-          <p:cNvPr id="21" name="Shape 19"/>
           <p:cNvSpPr/>
           <p:nvPr/>
         </p:nvSpPr>
@@ -19103,7 +17483,7 @@
       </p:sp>
       <p:sp>
         <p:nvSpPr>
-          <p:cNvPr id="22" name="Text 20"/>
+          <p:cNvPr id="17" name="Text 15"/>
           <p:cNvSpPr/>
           <p:nvPr/>
         </p:nvSpPr>
@@ -19142,7 +17522,7 @@
       </p:sp>
       <p:sp>
         <p:nvSpPr>
-          <p:cNvPr id="23" name="Text 21"/>
+          <p:cNvPr id="18" name="Text 16"/>
           <p:cNvSpPr/>
           <p:nvPr/>
         </p:nvSpPr>
@@ -19650,13 +18030,11 @@
             </a:avLst>
           </a:prstGeom>
           <a:solidFill>
-            <a:srgbClr val="FFFFFF">
-              <a:alpha val="88000"/>
-            </a:srgbClr>
+            <a:srgbClr val="FFFFFF"/>
           </a:solidFill>
           <a:ln w="12700">
             <a:solidFill>
-              <a:srgbClr val="D6E8F2"/>
+              <a:srgbClr val="B9D7E6"/>
             </a:solidFill>
             <a:prstDash val="solid"/>
           </a:ln>
@@ -19664,190 +18042,112 @@
       </p:sp>
       <p:sp>
         <p:nvSpPr>
-          <p:cNvPr id="14" name="Shape 12"/>
-          <p:cNvSpPr/>
-          <p:nvPr/>
-        </p:nvSpPr>
-        <p:spPr>
-          <a:xfrm>
-            <a:off x="7891272" y="3108960"/>
-            <a:ext cx="566928" cy="566928"/>
-          </a:xfrm>
-          <a:prstGeom prst="ellipse">
-            <a:avLst/>
-          </a:prstGeom>
-          <a:solidFill>
-            <a:srgbClr val="0068B7"/>
-          </a:solidFill>
-          <a:ln w="12700">
-            <a:solidFill>
-              <a:srgbClr val="0068B7"/>
-            </a:solidFill>
-            <a:prstDash val="solid"/>
-          </a:ln>
-        </p:spPr>
-      </p:sp>
-      <p:sp>
-        <p:nvSpPr>
-          <p:cNvPr id="15" name="Shape 13"/>
-          <p:cNvSpPr/>
-          <p:nvPr/>
-        </p:nvSpPr>
-        <p:spPr>
-          <a:xfrm>
-            <a:off x="10287000" y="3108960"/>
-            <a:ext cx="566928" cy="566928"/>
-          </a:xfrm>
-          <a:prstGeom prst="ellipse">
-            <a:avLst/>
-          </a:prstGeom>
-          <a:solidFill>
-            <a:srgbClr val="2F8A28"/>
-          </a:solidFill>
-          <a:ln w="12700">
-            <a:solidFill>
-              <a:srgbClr val="2F8A28"/>
-            </a:solidFill>
-            <a:prstDash val="solid"/>
-          </a:ln>
-        </p:spPr>
+          <p:cNvPr id="14" name="Text 12"/>
+          <p:cNvSpPr/>
+          <p:nvPr/>
+        </p:nvSpPr>
+        <p:spPr>
+          <a:xfrm>
+            <a:off x="7799832" y="2935224"/>
+            <a:ext cx="3145536" cy="256032"/>
+          </a:xfrm>
+          <a:prstGeom prst="rect">
+            <a:avLst/>
+          </a:prstGeom>
+          <a:noFill/>
+          <a:ln/>
+        </p:spPr>
+        <p:txBody>
+          <a:bodyPr wrap="square" lIns="0" tIns="0" rIns="0" bIns="0" rtlCol="0" anchor="ctr"/>
+          <a:lstStyle/>
+          <a:p>
+            <a:pPr indent="0" marL="0">
+              <a:buNone/>
+            </a:pPr>
+            <a:r>
+              <a:rPr lang="en-US" sz="1300" b="1" dirty="0">
+                <a:solidFill>
+                  <a:srgbClr val="0068B7"/>
+                </a:solidFill>
+                <a:latin typeface="Aptos" pitchFamily="34" charset="0"/>
+                <a:ea typeface="Aptos" pitchFamily="34" charset="-122"/>
+                <a:cs typeface="Aptos" pitchFamily="34" charset="-120"/>
+              </a:rPr>
+              <a:t>Concept checkpoints</a:t>
+            </a:r>
+            <a:endParaRPr lang="en-US" sz="1300" dirty="0"/>
+          </a:p>
+        </p:txBody>
+      </p:sp>
+      <p:sp>
+        <p:nvSpPr>
+          <p:cNvPr id="15" name="Text 13"/>
+          <p:cNvSpPr/>
+          <p:nvPr/>
+        </p:nvSpPr>
+        <p:spPr>
+          <a:xfrm>
+            <a:off x="7818120" y="3300984"/>
+            <a:ext cx="3090672" cy="877824"/>
+          </a:xfrm>
+          <a:prstGeom prst="rect">
+            <a:avLst/>
+          </a:prstGeom>
+          <a:noFill/>
+          <a:ln/>
+        </p:spPr>
+        <p:txBody>
+          <a:bodyPr wrap="square" lIns="254" tIns="254" rIns="254" bIns="254" rtlCol="0" anchor="t">
+            <a:normAutofit/>
+          </a:bodyPr>
+          <a:lstStyle/>
+          <a:p>
+            <a:r>
+              <a:rPr lang="en-US" sz="1380" dirty="0">
+                <a:solidFill>
+                  <a:srgbClr val="17364A"/>
+                </a:solidFill>
+                <a:latin typeface="Aptos" pitchFamily="34" charset="0"/>
+                <a:ea typeface="Aptos" pitchFamily="34" charset="-122"/>
+                <a:cs typeface="Aptos" pitchFamily="34" charset="-120"/>
+              </a:rPr>
+              <a:t>1.</a:t>
+            </a:r>
+            <a:endParaRPr lang="en-US" sz="1380" dirty="0"/>
+          </a:p>
+          <a:p>
+            <a:r>
+              <a:rPr lang="en-US" sz="1380" dirty="0">
+                <a:solidFill>
+                  <a:srgbClr val="17364A"/>
+                </a:solidFill>
+                <a:latin typeface="Aptos" pitchFamily="34" charset="0"/>
+                <a:ea typeface="Aptos" pitchFamily="34" charset="-122"/>
+                <a:cs typeface="Aptos" pitchFamily="34" charset="-120"/>
+              </a:rPr>
+              <a:t>Which statement best describes AI governance in a public health agency?</a:t>
+            </a:r>
+            <a:endParaRPr lang="en-US" sz="1380" dirty="0"/>
+          </a:p>
+          <a:p>
+            <a:r>
+              <a:rPr lang="en-US" sz="1380" dirty="0">
+                <a:solidFill>
+                  <a:srgbClr val="17364A"/>
+                </a:solidFill>
+                <a:latin typeface="Aptos" pitchFamily="34" charset="0"/>
+                <a:ea typeface="Aptos" pitchFamily="34" charset="-122"/>
+                <a:cs typeface="Aptos" pitchFamily="34" charset="-120"/>
+              </a:rPr>
+              <a:t>2.</a:t>
+            </a:r>
+            <a:endParaRPr lang="en-US" sz="1380" dirty="0"/>
+          </a:p>
+        </p:txBody>
       </p:sp>
       <p:sp>
         <p:nvSpPr>
           <p:cNvPr id="16" name="Shape 14"/>
-          <p:cNvSpPr/>
-          <p:nvPr/>
-        </p:nvSpPr>
-        <p:spPr>
-          <a:xfrm>
-            <a:off x="9089136" y="3456432"/>
-            <a:ext cx="566928" cy="566928"/>
-          </a:xfrm>
-          <a:prstGeom prst="ellipse">
-            <a:avLst/>
-          </a:prstGeom>
-          <a:solidFill>
-            <a:srgbClr val="6A4CA3"/>
-          </a:solidFill>
-          <a:ln w="12700">
-            <a:solidFill>
-              <a:srgbClr val="6A4CA3"/>
-            </a:solidFill>
-            <a:prstDash val="solid"/>
-          </a:ln>
-        </p:spPr>
-      </p:sp>
-      <p:sp>
-        <p:nvSpPr>
-          <p:cNvPr id="17" name="Shape 15"/>
-          <p:cNvSpPr/>
-          <p:nvPr/>
-        </p:nvSpPr>
-        <p:spPr>
-          <a:xfrm>
-            <a:off x="8385048" y="3419856"/>
-            <a:ext cx="1975104" cy="0"/>
-          </a:xfrm>
-          <a:prstGeom prst="line">
-            <a:avLst/>
-          </a:prstGeom>
-          <a:noFill/>
-          <a:ln w="25400">
-            <a:solidFill>
-              <a:srgbClr val="8ABBD8"/>
-            </a:solidFill>
-            <a:prstDash val="solid"/>
-          </a:ln>
-        </p:spPr>
-      </p:sp>
-      <p:sp>
-        <p:nvSpPr>
-          <p:cNvPr id="18" name="Shape 16"/>
-          <p:cNvSpPr/>
-          <p:nvPr/>
-        </p:nvSpPr>
-        <p:spPr>
-          <a:xfrm>
-            <a:off x="8202168" y="3630168"/>
-            <a:ext cx="1170432" cy="118872"/>
-          </a:xfrm>
-          <a:prstGeom prst="line">
-            <a:avLst/>
-          </a:prstGeom>
-          <a:noFill/>
-          <a:ln w="25400">
-            <a:solidFill>
-              <a:srgbClr val="8ABBD8"/>
-            </a:solidFill>
-            <a:prstDash val="solid"/>
-          </a:ln>
-        </p:spPr>
-      </p:sp>
-      <p:sp>
-        <p:nvSpPr>
-          <p:cNvPr id="19" name="Shape 17"/>
-          <p:cNvSpPr/>
-          <p:nvPr/>
-        </p:nvSpPr>
-        <p:spPr>
-          <a:xfrm>
-            <a:off x="10543032" y="3630168"/>
-            <a:ext cx="-1170432" cy="118872"/>
-          </a:xfrm>
-          <a:prstGeom prst="line">
-            <a:avLst/>
-          </a:prstGeom>
-          <a:noFill/>
-          <a:ln w="25400">
-            <a:solidFill>
-              <a:srgbClr val="8ABBD8"/>
-            </a:solidFill>
-            <a:prstDash val="solid"/>
-          </a:ln>
-        </p:spPr>
-      </p:sp>
-      <p:sp>
-        <p:nvSpPr>
-          <p:cNvPr id="20" name="Text 18"/>
-          <p:cNvSpPr/>
-          <p:nvPr/>
-        </p:nvSpPr>
-        <p:spPr>
-          <a:xfrm>
-            <a:off x="7863840" y="4069080"/>
-            <a:ext cx="3017520" cy="164592"/>
-          </a:xfrm>
-          <a:prstGeom prst="rect">
-            <a:avLst/>
-          </a:prstGeom>
-          <a:noFill/>
-          <a:ln/>
-        </p:spPr>
-        <p:txBody>
-          <a:bodyPr wrap="square" lIns="0" tIns="0" rIns="0" bIns="0" rtlCol="0" anchor="ctr"/>
-          <a:lstStyle/>
-          <a:p>
-            <a:pPr algn="ctr" indent="0" marL="0">
-              <a:buNone/>
-            </a:pPr>
-            <a:r>
-              <a:rPr lang="en-US" sz="900" b="1" dirty="0">
-                <a:solidFill>
-                  <a:srgbClr val="003A63"/>
-                </a:solidFill>
-                <a:latin typeface="Aptos" pitchFamily="34" charset="0"/>
-                <a:ea typeface="Aptos" pitchFamily="34" charset="-122"/>
-                <a:cs typeface="Aptos" pitchFamily="34" charset="-120"/>
-              </a:rPr>
-              <a:t>Decision rights</a:t>
-            </a:r>
-            <a:endParaRPr lang="en-US" sz="900" dirty="0"/>
-          </a:p>
-        </p:txBody>
-      </p:sp>
-      <p:sp>
-        <p:nvSpPr>
-          <p:cNvPr id="21" name="Shape 19"/>
           <p:cNvSpPr/>
           <p:nvPr/>
         </p:nvSpPr>
@@ -19874,7 +18174,7 @@
       </p:sp>
       <p:sp>
         <p:nvSpPr>
-          <p:cNvPr id="22" name="Text 20"/>
+          <p:cNvPr id="17" name="Text 15"/>
           <p:cNvSpPr/>
           <p:nvPr/>
         </p:nvSpPr>
@@ -19913,7 +18213,7 @@
       </p:sp>
       <p:sp>
         <p:nvSpPr>
-          <p:cNvPr id="23" name="Text 21"/>
+          <p:cNvPr id="18" name="Text 16"/>
           <p:cNvSpPr/>
           <p:nvPr/>
         </p:nvSpPr>
@@ -20426,20 +18726,20 @@
         </p:nvSpPr>
         <p:spPr>
           <a:xfrm>
-            <a:off x="7818120" y="3977640"/>
-            <a:ext cx="972312" cy="749808"/>
+            <a:off x="8046720" y="3794760"/>
+            <a:ext cx="3063240" cy="1600200"/>
           </a:xfrm>
           <a:prstGeom prst="roundRect">
             <a:avLst>
-              <a:gd name="adj" fmla="val 14634"/>
+              <a:gd name="adj" fmla="val 6857"/>
             </a:avLst>
           </a:prstGeom>
           <a:solidFill>
-            <a:srgbClr val="0068B7"/>
+            <a:srgbClr val="FFFFFF"/>
           </a:solidFill>
           <a:ln w="12700">
             <a:solidFill>
-              <a:srgbClr val="0068B7"/>
+              <a:srgbClr val="B9D7E6"/>
             </a:solidFill>
             <a:prstDash val="solid"/>
           </a:ln>
@@ -20453,172 +18753,100 @@
         </p:nvSpPr>
         <p:spPr>
           <a:xfrm>
-            <a:off x="7891272" y="4169664"/>
-            <a:ext cx="826008" cy="310896"/>
-          </a:xfrm>
-          <a:prstGeom prst="rect">
-            <a:avLst/>
-          </a:prstGeom>
-          <a:noFill/>
-          <a:ln/>
-        </p:spPr>
-        <p:txBody>
-          <a:bodyPr wrap="square" lIns="0" tIns="0" rIns="0" bIns="0" rtlCol="0" anchor="ctr">
+            <a:off x="8211312" y="3941064"/>
+            <a:ext cx="2734056" cy="256032"/>
+          </a:xfrm>
+          <a:prstGeom prst="rect">
+            <a:avLst/>
+          </a:prstGeom>
+          <a:noFill/>
+          <a:ln/>
+        </p:spPr>
+        <p:txBody>
+          <a:bodyPr wrap="square" lIns="0" tIns="0" rIns="0" bIns="0" rtlCol="0" anchor="ctr"/>
+          <a:lstStyle/>
+          <a:p>
+            <a:pPr indent="0" marL="0">
+              <a:buNone/>
+            </a:pPr>
+            <a:r>
+              <a:rPr lang="en-US" sz="1300" b="1" dirty="0">
+                <a:solidFill>
+                  <a:srgbClr val="0068B7"/>
+                </a:solidFill>
+                <a:latin typeface="Aptos" pitchFamily="34" charset="0"/>
+                <a:ea typeface="Aptos" pitchFamily="34" charset="-122"/>
+                <a:cs typeface="Aptos" pitchFamily="34" charset="-120"/>
+              </a:rPr>
+              <a:t>Use the play links to</a:t>
+            </a:r>
+            <a:endParaRPr lang="en-US" sz="1300" dirty="0"/>
+          </a:p>
+        </p:txBody>
+      </p:sp>
+      <p:sp>
+        <p:nvSpPr>
+          <p:cNvPr id="15" name="Text 13"/>
+          <p:cNvSpPr/>
+          <p:nvPr/>
+        </p:nvSpPr>
+        <p:spPr>
+          <a:xfrm>
+            <a:off x="8229600" y="4306824"/>
+            <a:ext cx="2679192" cy="941832"/>
+          </a:xfrm>
+          <a:prstGeom prst="rect">
+            <a:avLst/>
+          </a:prstGeom>
+          <a:noFill/>
+          <a:ln/>
+        </p:spPr>
+        <p:txBody>
+          <a:bodyPr wrap="square" lIns="254" tIns="254" rIns="254" bIns="254" rtlCol="0" anchor="t">
             <a:normAutofit/>
           </a:bodyPr>
           <a:lstStyle/>
           <a:p>
-            <a:pPr algn="ctr" indent="0" marL="0">
-              <a:buNone/>
-            </a:pPr>
-            <a:r>
-              <a:rPr lang="en-US" sz="1500" b="1" dirty="0">
-                <a:solidFill>
-                  <a:srgbClr val="FFFFFF"/>
-                </a:solidFill>
-                <a:latin typeface="Aptos" pitchFamily="34" charset="0"/>
-                <a:ea typeface="Aptos" pitchFamily="34" charset="-122"/>
-                <a:cs typeface="Aptos" pitchFamily="34" charset="-120"/>
-              </a:rPr>
-              <a:t>Lesson</a:t>
-            </a:r>
-            <a:endParaRPr lang="en-US" sz="1500" dirty="0"/>
-          </a:p>
-        </p:txBody>
-      </p:sp>
-      <p:sp>
-        <p:nvSpPr>
-          <p:cNvPr id="15" name="Shape 13"/>
-          <p:cNvSpPr/>
-          <p:nvPr/>
-        </p:nvSpPr>
-        <p:spPr>
-          <a:xfrm>
-            <a:off x="9046464" y="3977640"/>
-            <a:ext cx="972312" cy="749808"/>
-          </a:xfrm>
-          <a:prstGeom prst="roundRect">
-            <a:avLst>
-              <a:gd name="adj" fmla="val 14634"/>
-            </a:avLst>
-          </a:prstGeom>
-          <a:solidFill>
-            <a:srgbClr val="2F8A28"/>
-          </a:solidFill>
-          <a:ln w="12700">
-            <a:solidFill>
-              <a:srgbClr val="2F8A28"/>
-            </a:solidFill>
-            <a:prstDash val="solid"/>
-          </a:ln>
-        </p:spPr>
-      </p:sp>
-      <p:sp>
-        <p:nvSpPr>
-          <p:cNvPr id="16" name="Text 14"/>
-          <p:cNvSpPr/>
-          <p:nvPr/>
-        </p:nvSpPr>
-        <p:spPr>
-          <a:xfrm>
-            <a:off x="9119616" y="4169664"/>
-            <a:ext cx="826008" cy="310896"/>
-          </a:xfrm>
-          <a:prstGeom prst="rect">
-            <a:avLst/>
-          </a:prstGeom>
-          <a:noFill/>
-          <a:ln/>
-        </p:spPr>
-        <p:txBody>
-          <a:bodyPr wrap="square" lIns="0" tIns="0" rIns="0" bIns="0" rtlCol="0" anchor="ctr">
-            <a:normAutofit/>
-          </a:bodyPr>
-          <a:lstStyle/>
-          <a:p>
-            <a:pPr algn="ctr" indent="0" marL="0">
-              <a:buNone/>
-            </a:pPr>
-            <a:r>
-              <a:rPr lang="en-US" sz="1500" b="1" dirty="0">
-                <a:solidFill>
-                  <a:srgbClr val="FFFFFF"/>
-                </a:solidFill>
-                <a:latin typeface="Aptos" pitchFamily="34" charset="0"/>
-                <a:ea typeface="Aptos" pitchFamily="34" charset="-122"/>
-                <a:cs typeface="Aptos" pitchFamily="34" charset="-120"/>
-              </a:rPr>
-              <a:t>Plays</a:t>
-            </a:r>
-            <a:endParaRPr lang="en-US" sz="1500" dirty="0"/>
-          </a:p>
-        </p:txBody>
-      </p:sp>
-      <p:sp>
-        <p:nvSpPr>
-          <p:cNvPr id="17" name="Shape 15"/>
-          <p:cNvSpPr/>
-          <p:nvPr/>
-        </p:nvSpPr>
-        <p:spPr>
-          <a:xfrm>
-            <a:off x="10274808" y="3977640"/>
-            <a:ext cx="972312" cy="749808"/>
-          </a:xfrm>
-          <a:prstGeom prst="roundRect">
-            <a:avLst>
-              <a:gd name="adj" fmla="val 14634"/>
-            </a:avLst>
-          </a:prstGeom>
-          <a:solidFill>
-            <a:srgbClr val="6A4CA3"/>
-          </a:solidFill>
-          <a:ln w="12700">
-            <a:solidFill>
-              <a:srgbClr val="6A4CA3"/>
-            </a:solidFill>
-            <a:prstDash val="solid"/>
-          </a:ln>
-        </p:spPr>
-      </p:sp>
-      <p:sp>
-        <p:nvSpPr>
-          <p:cNvPr id="18" name="Text 16"/>
-          <p:cNvSpPr/>
-          <p:nvPr/>
-        </p:nvSpPr>
-        <p:spPr>
-          <a:xfrm>
-            <a:off x="10347960" y="4169664"/>
-            <a:ext cx="826008" cy="310896"/>
-          </a:xfrm>
-          <a:prstGeom prst="rect">
-            <a:avLst/>
-          </a:prstGeom>
-          <a:noFill/>
-          <a:ln/>
-        </p:spPr>
-        <p:txBody>
-          <a:bodyPr wrap="square" lIns="0" tIns="0" rIns="0" bIns="0" rtlCol="0" anchor="ctr">
-            <a:normAutofit/>
-          </a:bodyPr>
-          <a:lstStyle/>
-          <a:p>
-            <a:pPr algn="ctr" indent="0" marL="0">
-              <a:buNone/>
-            </a:pPr>
-            <a:r>
-              <a:rPr lang="en-US" sz="1500" b="1" dirty="0">
-                <a:solidFill>
-                  <a:srgbClr val="FFFFFF"/>
-                </a:solidFill>
-                <a:latin typeface="Aptos" pitchFamily="34" charset="0"/>
-                <a:ea typeface="Aptos" pitchFamily="34" charset="-122"/>
-                <a:cs typeface="Aptos" pitchFamily="34" charset="-120"/>
-              </a:rPr>
-              <a:t>Action</a:t>
-            </a:r>
-            <a:endParaRPr lang="en-US" sz="1500" dirty="0"/>
+            <a:r>
+              <a:rPr lang="en-US" sz="1380" dirty="0">
+                <a:solidFill>
+                  <a:srgbClr val="17364A"/>
+                </a:solidFill>
+                <a:latin typeface="Aptos" pitchFamily="34" charset="0"/>
+                <a:ea typeface="Aptos" pitchFamily="34" charset="-122"/>
+                <a:cs typeface="Aptos" pitchFamily="34" charset="-120"/>
+              </a:rPr>
+              <a:t>Locate the decision point in the playbook sequence.</a:t>
+            </a:r>
+            <a:endParaRPr lang="en-US" sz="1380" dirty="0"/>
+          </a:p>
+          <a:p>
+            <a:r>
+              <a:rPr lang="en-US" sz="1380" dirty="0">
+                <a:solidFill>
+                  <a:srgbClr val="17364A"/>
+                </a:solidFill>
+                <a:latin typeface="Aptos" pitchFamily="34" charset="0"/>
+                <a:ea typeface="Aptos" pitchFamily="34" charset="-122"/>
+                <a:cs typeface="Aptos" pitchFamily="34" charset="-120"/>
+              </a:rPr>
+              <a:t>Identify who should participate in the work.</a:t>
+            </a:r>
+            <a:endParaRPr lang="en-US" sz="1380" dirty="0"/>
+          </a:p>
+          <a:p>
+            <a:r>
+              <a:rPr lang="en-US" sz="1380" dirty="0">
+                <a:solidFill>
+                  <a:srgbClr val="17364A"/>
+                </a:solidFill>
+                <a:latin typeface="Aptos" pitchFamily="34" charset="0"/>
+                <a:ea typeface="Aptos" pitchFamily="34" charset="-122"/>
+                <a:cs typeface="Aptos" pitchFamily="34" charset="-120"/>
+              </a:rPr>
+              <a:t>Document the review, approval, or implementation step.</a:t>
+            </a:r>
+            <a:endParaRPr lang="en-US" sz="1380" dirty="0"/>
           </a:p>
         </p:txBody>
       </p:sp>
@@ -21091,13 +19319,11 @@
             </a:avLst>
           </a:prstGeom>
           <a:solidFill>
-            <a:srgbClr val="FFFFFF">
-              <a:alpha val="88000"/>
-            </a:srgbClr>
+            <a:srgbClr val="FFFFFF"/>
           </a:solidFill>
           <a:ln w="12700">
             <a:solidFill>
-              <a:srgbClr val="D6E8F2"/>
+              <a:srgbClr val="B9D7E6"/>
             </a:solidFill>
             <a:prstDash val="solid"/>
           </a:ln>
@@ -21105,190 +19331,112 @@
       </p:sp>
       <p:sp>
         <p:nvSpPr>
-          <p:cNvPr id="14" name="Shape 12"/>
-          <p:cNvSpPr/>
-          <p:nvPr/>
-        </p:nvSpPr>
-        <p:spPr>
-          <a:xfrm>
-            <a:off x="7891272" y="3108960"/>
-            <a:ext cx="566928" cy="566928"/>
-          </a:xfrm>
-          <a:prstGeom prst="ellipse">
-            <a:avLst/>
-          </a:prstGeom>
-          <a:solidFill>
-            <a:srgbClr val="0068B7"/>
-          </a:solidFill>
-          <a:ln w="12700">
-            <a:solidFill>
-              <a:srgbClr val="0068B7"/>
-            </a:solidFill>
-            <a:prstDash val="solid"/>
-          </a:ln>
-        </p:spPr>
-      </p:sp>
-      <p:sp>
-        <p:nvSpPr>
-          <p:cNvPr id="15" name="Shape 13"/>
-          <p:cNvSpPr/>
-          <p:nvPr/>
-        </p:nvSpPr>
-        <p:spPr>
-          <a:xfrm>
-            <a:off x="10287000" y="3108960"/>
-            <a:ext cx="566928" cy="566928"/>
-          </a:xfrm>
-          <a:prstGeom prst="ellipse">
-            <a:avLst/>
-          </a:prstGeom>
-          <a:solidFill>
-            <a:srgbClr val="2F8A28"/>
-          </a:solidFill>
-          <a:ln w="12700">
-            <a:solidFill>
-              <a:srgbClr val="2F8A28"/>
-            </a:solidFill>
-            <a:prstDash val="solid"/>
-          </a:ln>
-        </p:spPr>
+          <p:cNvPr id="14" name="Text 12"/>
+          <p:cNvSpPr/>
+          <p:nvPr/>
+        </p:nvSpPr>
+        <p:spPr>
+          <a:xfrm>
+            <a:off x="7799832" y="2935224"/>
+            <a:ext cx="3145536" cy="256032"/>
+          </a:xfrm>
+          <a:prstGeom prst="rect">
+            <a:avLst/>
+          </a:prstGeom>
+          <a:noFill/>
+          <a:ln/>
+        </p:spPr>
+        <p:txBody>
+          <a:bodyPr wrap="square" lIns="0" tIns="0" rIns="0" bIns="0" rtlCol="0" anchor="ctr"/>
+          <a:lstStyle/>
+          <a:p>
+            <a:pPr indent="0" marL="0">
+              <a:buNone/>
+            </a:pPr>
+            <a:r>
+              <a:rPr lang="en-US" sz="1300" b="1" dirty="0">
+                <a:solidFill>
+                  <a:srgbClr val="0068B7"/>
+                </a:solidFill>
+                <a:latin typeface="Aptos" pitchFamily="34" charset="0"/>
+                <a:ea typeface="Aptos" pitchFamily="34" charset="-122"/>
+                <a:cs typeface="Aptos" pitchFamily="34" charset="-120"/>
+              </a:rPr>
+              <a:t>Concept checkpoints</a:t>
+            </a:r>
+            <a:endParaRPr lang="en-US" sz="1300" dirty="0"/>
+          </a:p>
+        </p:txBody>
+      </p:sp>
+      <p:sp>
+        <p:nvSpPr>
+          <p:cNvPr id="15" name="Text 13"/>
+          <p:cNvSpPr/>
+          <p:nvPr/>
+        </p:nvSpPr>
+        <p:spPr>
+          <a:xfrm>
+            <a:off x="7818120" y="3300984"/>
+            <a:ext cx="3090672" cy="877824"/>
+          </a:xfrm>
+          <a:prstGeom prst="rect">
+            <a:avLst/>
+          </a:prstGeom>
+          <a:noFill/>
+          <a:ln/>
+        </p:spPr>
+        <p:txBody>
+          <a:bodyPr wrap="square" lIns="254" tIns="254" rIns="254" bIns="254" rtlCol="0" anchor="t">
+            <a:normAutofit/>
+          </a:bodyPr>
+          <a:lstStyle/>
+          <a:p>
+            <a:r>
+              <a:rPr lang="en-US" sz="1380" dirty="0">
+                <a:solidFill>
+                  <a:srgbClr val="17364A"/>
+                </a:solidFill>
+                <a:latin typeface="Aptos" pitchFamily="34" charset="0"/>
+                <a:ea typeface="Aptos" pitchFamily="34" charset="-122"/>
+                <a:cs typeface="Aptos" pitchFamily="34" charset="-120"/>
+              </a:rPr>
+              <a:t>National Institute of Standards and Technology.</a:t>
+            </a:r>
+            <a:endParaRPr lang="en-US" sz="1380" dirty="0"/>
+          </a:p>
+          <a:p>
+            <a:r>
+              <a:rPr lang="en-US" sz="1380" dirty="0">
+                <a:solidFill>
+                  <a:srgbClr val="17364A"/>
+                </a:solidFill>
+                <a:latin typeface="Aptos" pitchFamily="34" charset="0"/>
+                <a:ea typeface="Aptos" pitchFamily="34" charset="-122"/>
+                <a:cs typeface="Aptos" pitchFamily="34" charset="-120"/>
+              </a:rPr>
+              <a:t>Artificial Intelligence Risk Management Framework (AI RMF 1.0).</a:t>
+            </a:r>
+            <a:endParaRPr lang="en-US" sz="1380" dirty="0"/>
+          </a:p>
+          <a:p>
+            <a:r>
+              <a:rPr lang="en-US" sz="1380" dirty="0">
+                <a:solidFill>
+                  <a:srgbClr val="17364A"/>
+                </a:solidFill>
+                <a:latin typeface="Aptos" pitchFamily="34" charset="0"/>
+                <a:ea typeface="Aptos" pitchFamily="34" charset="-122"/>
+                <a:cs typeface="Aptos" pitchFamily="34" charset="-120"/>
+              </a:rPr>
+              <a:t>2023.: https://www.nist.gov/itl/ai-risk-management-framework</a:t>
+            </a:r>
+            <a:endParaRPr lang="en-US" sz="1380" dirty="0"/>
+          </a:p>
+        </p:txBody>
       </p:sp>
       <p:sp>
         <p:nvSpPr>
           <p:cNvPr id="16" name="Shape 14"/>
-          <p:cNvSpPr/>
-          <p:nvPr/>
-        </p:nvSpPr>
-        <p:spPr>
-          <a:xfrm>
-            <a:off x="9089136" y="3456432"/>
-            <a:ext cx="566928" cy="566928"/>
-          </a:xfrm>
-          <a:prstGeom prst="ellipse">
-            <a:avLst/>
-          </a:prstGeom>
-          <a:solidFill>
-            <a:srgbClr val="6A4CA3"/>
-          </a:solidFill>
-          <a:ln w="12700">
-            <a:solidFill>
-              <a:srgbClr val="6A4CA3"/>
-            </a:solidFill>
-            <a:prstDash val="solid"/>
-          </a:ln>
-        </p:spPr>
-      </p:sp>
-      <p:sp>
-        <p:nvSpPr>
-          <p:cNvPr id="17" name="Shape 15"/>
-          <p:cNvSpPr/>
-          <p:nvPr/>
-        </p:nvSpPr>
-        <p:spPr>
-          <a:xfrm>
-            <a:off x="8385048" y="3419856"/>
-            <a:ext cx="1975104" cy="0"/>
-          </a:xfrm>
-          <a:prstGeom prst="line">
-            <a:avLst/>
-          </a:prstGeom>
-          <a:noFill/>
-          <a:ln w="25400">
-            <a:solidFill>
-              <a:srgbClr val="8ABBD8"/>
-            </a:solidFill>
-            <a:prstDash val="solid"/>
-          </a:ln>
-        </p:spPr>
-      </p:sp>
-      <p:sp>
-        <p:nvSpPr>
-          <p:cNvPr id="18" name="Shape 16"/>
-          <p:cNvSpPr/>
-          <p:nvPr/>
-        </p:nvSpPr>
-        <p:spPr>
-          <a:xfrm>
-            <a:off x="8202168" y="3630168"/>
-            <a:ext cx="1170432" cy="118872"/>
-          </a:xfrm>
-          <a:prstGeom prst="line">
-            <a:avLst/>
-          </a:prstGeom>
-          <a:noFill/>
-          <a:ln w="25400">
-            <a:solidFill>
-              <a:srgbClr val="8ABBD8"/>
-            </a:solidFill>
-            <a:prstDash val="solid"/>
-          </a:ln>
-        </p:spPr>
-      </p:sp>
-      <p:sp>
-        <p:nvSpPr>
-          <p:cNvPr id="19" name="Shape 17"/>
-          <p:cNvSpPr/>
-          <p:nvPr/>
-        </p:nvSpPr>
-        <p:spPr>
-          <a:xfrm>
-            <a:off x="10543032" y="3630168"/>
-            <a:ext cx="-1170432" cy="118872"/>
-          </a:xfrm>
-          <a:prstGeom prst="line">
-            <a:avLst/>
-          </a:prstGeom>
-          <a:noFill/>
-          <a:ln w="25400">
-            <a:solidFill>
-              <a:srgbClr val="8ABBD8"/>
-            </a:solidFill>
-            <a:prstDash val="solid"/>
-          </a:ln>
-        </p:spPr>
-      </p:sp>
-      <p:sp>
-        <p:nvSpPr>
-          <p:cNvPr id="20" name="Text 18"/>
-          <p:cNvSpPr/>
-          <p:nvPr/>
-        </p:nvSpPr>
-        <p:spPr>
-          <a:xfrm>
-            <a:off x="7863840" y="4069080"/>
-            <a:ext cx="3017520" cy="164592"/>
-          </a:xfrm>
-          <a:prstGeom prst="rect">
-            <a:avLst/>
-          </a:prstGeom>
-          <a:noFill/>
-          <a:ln/>
-        </p:spPr>
-        <p:txBody>
-          <a:bodyPr wrap="square" lIns="0" tIns="0" rIns="0" bIns="0" rtlCol="0" anchor="ctr"/>
-          <a:lstStyle/>
-          <a:p>
-            <a:pPr algn="ctr" indent="0" marL="0">
-              <a:buNone/>
-            </a:pPr>
-            <a:r>
-              <a:rPr lang="en-US" sz="900" b="1" dirty="0">
-                <a:solidFill>
-                  <a:srgbClr val="003A63"/>
-                </a:solidFill>
-                <a:latin typeface="Aptos" pitchFamily="34" charset="0"/>
-                <a:ea typeface="Aptos" pitchFamily="34" charset="-122"/>
-                <a:cs typeface="Aptos" pitchFamily="34" charset="-120"/>
-              </a:rPr>
-              <a:t>Decision rights</a:t>
-            </a:r>
-            <a:endParaRPr lang="en-US" sz="900" dirty="0"/>
-          </a:p>
-        </p:txBody>
-      </p:sp>
-      <p:sp>
-        <p:nvSpPr>
-          <p:cNvPr id="21" name="Shape 19"/>
           <p:cNvSpPr/>
           <p:nvPr/>
         </p:nvSpPr>
@@ -21315,7 +19463,7 @@
       </p:sp>
       <p:sp>
         <p:nvSpPr>
-          <p:cNvPr id="22" name="Text 20"/>
+          <p:cNvPr id="17" name="Text 15"/>
           <p:cNvSpPr/>
           <p:nvPr/>
         </p:nvSpPr>
@@ -21354,7 +19502,7 @@
       </p:sp>
       <p:sp>
         <p:nvSpPr>
-          <p:cNvPr id="23" name="Text 21"/>
+          <p:cNvPr id="18" name="Text 16"/>
           <p:cNvSpPr/>
           <p:nvPr/>
         </p:nvSpPr>
@@ -21834,13 +19982,11 @@
             </a:avLst>
           </a:prstGeom>
           <a:solidFill>
-            <a:srgbClr val="FFFFFF">
-              <a:alpha val="88000"/>
-            </a:srgbClr>
+            <a:srgbClr val="FFFFFF"/>
           </a:solidFill>
           <a:ln w="12700">
             <a:solidFill>
-              <a:srgbClr val="D6E8F2"/>
+              <a:srgbClr val="B9D7E6"/>
             </a:solidFill>
             <a:prstDash val="solid"/>
           </a:ln>
@@ -21848,190 +19994,112 @@
       </p:sp>
       <p:sp>
         <p:nvSpPr>
-          <p:cNvPr id="14" name="Shape 12"/>
-          <p:cNvSpPr/>
-          <p:nvPr/>
-        </p:nvSpPr>
-        <p:spPr>
-          <a:xfrm>
-            <a:off x="7891272" y="3108960"/>
-            <a:ext cx="566928" cy="566928"/>
-          </a:xfrm>
-          <a:prstGeom prst="ellipse">
-            <a:avLst/>
-          </a:prstGeom>
-          <a:solidFill>
-            <a:srgbClr val="0068B7"/>
-          </a:solidFill>
-          <a:ln w="12700">
-            <a:solidFill>
-              <a:srgbClr val="0068B7"/>
-            </a:solidFill>
-            <a:prstDash val="solid"/>
-          </a:ln>
-        </p:spPr>
-      </p:sp>
-      <p:sp>
-        <p:nvSpPr>
-          <p:cNvPr id="15" name="Shape 13"/>
-          <p:cNvSpPr/>
-          <p:nvPr/>
-        </p:nvSpPr>
-        <p:spPr>
-          <a:xfrm>
-            <a:off x="10287000" y="3108960"/>
-            <a:ext cx="566928" cy="566928"/>
-          </a:xfrm>
-          <a:prstGeom prst="ellipse">
-            <a:avLst/>
-          </a:prstGeom>
-          <a:solidFill>
-            <a:srgbClr val="2F8A28"/>
-          </a:solidFill>
-          <a:ln w="12700">
-            <a:solidFill>
-              <a:srgbClr val="2F8A28"/>
-            </a:solidFill>
-            <a:prstDash val="solid"/>
-          </a:ln>
-        </p:spPr>
+          <p:cNvPr id="14" name="Text 12"/>
+          <p:cNvSpPr/>
+          <p:nvPr/>
+        </p:nvSpPr>
+        <p:spPr>
+          <a:xfrm>
+            <a:off x="7799832" y="2935224"/>
+            <a:ext cx="3145536" cy="256032"/>
+          </a:xfrm>
+          <a:prstGeom prst="rect">
+            <a:avLst/>
+          </a:prstGeom>
+          <a:noFill/>
+          <a:ln/>
+        </p:spPr>
+        <p:txBody>
+          <a:bodyPr wrap="square" lIns="0" tIns="0" rIns="0" bIns="0" rtlCol="0" anchor="ctr"/>
+          <a:lstStyle/>
+          <a:p>
+            <a:pPr indent="0" marL="0">
+              <a:buNone/>
+            </a:pPr>
+            <a:r>
+              <a:rPr lang="en-US" sz="1300" b="1" dirty="0">
+                <a:solidFill>
+                  <a:srgbClr val="0068B7"/>
+                </a:solidFill>
+                <a:latin typeface="Aptos" pitchFamily="34" charset="0"/>
+                <a:ea typeface="Aptos" pitchFamily="34" charset="-122"/>
+                <a:cs typeface="Aptos" pitchFamily="34" charset="-120"/>
+              </a:rPr>
+              <a:t>Concept checkpoints</a:t>
+            </a:r>
+            <a:endParaRPr lang="en-US" sz="1300" dirty="0"/>
+          </a:p>
+        </p:txBody>
+      </p:sp>
+      <p:sp>
+        <p:nvSpPr>
+          <p:cNvPr id="15" name="Text 13"/>
+          <p:cNvSpPr/>
+          <p:nvPr/>
+        </p:nvSpPr>
+        <p:spPr>
+          <a:xfrm>
+            <a:off x="7818120" y="3300984"/>
+            <a:ext cx="3090672" cy="877824"/>
+          </a:xfrm>
+          <a:prstGeom prst="rect">
+            <a:avLst/>
+          </a:prstGeom>
+          <a:noFill/>
+          <a:ln/>
+        </p:spPr>
+        <p:txBody>
+          <a:bodyPr wrap="square" lIns="254" tIns="254" rIns="254" bIns="254" rtlCol="0" anchor="t">
+            <a:normAutofit/>
+          </a:bodyPr>
+          <a:lstStyle/>
+          <a:p>
+            <a:r>
+              <a:rPr lang="en-US" sz="1380" dirty="0">
+                <a:solidFill>
+                  <a:srgbClr val="17364A"/>
+                </a:solidFill>
+                <a:latin typeface="Aptos" pitchFamily="34" charset="0"/>
+                <a:ea typeface="Aptos" pitchFamily="34" charset="-122"/>
+                <a:cs typeface="Aptos" pitchFamily="34" charset="-120"/>
+              </a:rPr>
+              <a:t>World Health Organization.</a:t>
+            </a:r>
+            <a:endParaRPr lang="en-US" sz="1380" dirty="0"/>
+          </a:p>
+          <a:p>
+            <a:r>
+              <a:rPr lang="en-US" sz="1380" dirty="0">
+                <a:solidFill>
+                  <a:srgbClr val="17364A"/>
+                </a:solidFill>
+                <a:latin typeface="Aptos" pitchFamily="34" charset="0"/>
+                <a:ea typeface="Aptos" pitchFamily="34" charset="-122"/>
+                <a:cs typeface="Aptos" pitchFamily="34" charset="-120"/>
+              </a:rPr>
+              <a:t>Regulatory considerations on artificial intelligence for health.</a:t>
+            </a:r>
+            <a:endParaRPr lang="en-US" sz="1380" dirty="0"/>
+          </a:p>
+          <a:p>
+            <a:r>
+              <a:rPr lang="en-US" sz="1380" dirty="0">
+                <a:solidFill>
+                  <a:srgbClr val="17364A"/>
+                </a:solidFill>
+                <a:latin typeface="Aptos" pitchFamily="34" charset="0"/>
+                <a:ea typeface="Aptos" pitchFamily="34" charset="-122"/>
+                <a:cs typeface="Aptos" pitchFamily="34" charset="-120"/>
+              </a:rPr>
+              <a:t>2023.: https://www.who.int/publications/i/item/9789240078871</a:t>
+            </a:r>
+            <a:endParaRPr lang="en-US" sz="1380" dirty="0"/>
+          </a:p>
+        </p:txBody>
       </p:sp>
       <p:sp>
         <p:nvSpPr>
           <p:cNvPr id="16" name="Shape 14"/>
-          <p:cNvSpPr/>
-          <p:nvPr/>
-        </p:nvSpPr>
-        <p:spPr>
-          <a:xfrm>
-            <a:off x="9089136" y="3456432"/>
-            <a:ext cx="566928" cy="566928"/>
-          </a:xfrm>
-          <a:prstGeom prst="ellipse">
-            <a:avLst/>
-          </a:prstGeom>
-          <a:solidFill>
-            <a:srgbClr val="6A4CA3"/>
-          </a:solidFill>
-          <a:ln w="12700">
-            <a:solidFill>
-              <a:srgbClr val="6A4CA3"/>
-            </a:solidFill>
-            <a:prstDash val="solid"/>
-          </a:ln>
-        </p:spPr>
-      </p:sp>
-      <p:sp>
-        <p:nvSpPr>
-          <p:cNvPr id="17" name="Shape 15"/>
-          <p:cNvSpPr/>
-          <p:nvPr/>
-        </p:nvSpPr>
-        <p:spPr>
-          <a:xfrm>
-            <a:off x="8385048" y="3419856"/>
-            <a:ext cx="1975104" cy="0"/>
-          </a:xfrm>
-          <a:prstGeom prst="line">
-            <a:avLst/>
-          </a:prstGeom>
-          <a:noFill/>
-          <a:ln w="25400">
-            <a:solidFill>
-              <a:srgbClr val="8ABBD8"/>
-            </a:solidFill>
-            <a:prstDash val="solid"/>
-          </a:ln>
-        </p:spPr>
-      </p:sp>
-      <p:sp>
-        <p:nvSpPr>
-          <p:cNvPr id="18" name="Shape 16"/>
-          <p:cNvSpPr/>
-          <p:nvPr/>
-        </p:nvSpPr>
-        <p:spPr>
-          <a:xfrm>
-            <a:off x="8202168" y="3630168"/>
-            <a:ext cx="1170432" cy="118872"/>
-          </a:xfrm>
-          <a:prstGeom prst="line">
-            <a:avLst/>
-          </a:prstGeom>
-          <a:noFill/>
-          <a:ln w="25400">
-            <a:solidFill>
-              <a:srgbClr val="8ABBD8"/>
-            </a:solidFill>
-            <a:prstDash val="solid"/>
-          </a:ln>
-        </p:spPr>
-      </p:sp>
-      <p:sp>
-        <p:nvSpPr>
-          <p:cNvPr id="19" name="Shape 17"/>
-          <p:cNvSpPr/>
-          <p:nvPr/>
-        </p:nvSpPr>
-        <p:spPr>
-          <a:xfrm>
-            <a:off x="10543032" y="3630168"/>
-            <a:ext cx="-1170432" cy="118872"/>
-          </a:xfrm>
-          <a:prstGeom prst="line">
-            <a:avLst/>
-          </a:prstGeom>
-          <a:noFill/>
-          <a:ln w="25400">
-            <a:solidFill>
-              <a:srgbClr val="8ABBD8"/>
-            </a:solidFill>
-            <a:prstDash val="solid"/>
-          </a:ln>
-        </p:spPr>
-      </p:sp>
-      <p:sp>
-        <p:nvSpPr>
-          <p:cNvPr id="20" name="Text 18"/>
-          <p:cNvSpPr/>
-          <p:nvPr/>
-        </p:nvSpPr>
-        <p:spPr>
-          <a:xfrm>
-            <a:off x="7863840" y="4069080"/>
-            <a:ext cx="3017520" cy="164592"/>
-          </a:xfrm>
-          <a:prstGeom prst="rect">
-            <a:avLst/>
-          </a:prstGeom>
-          <a:noFill/>
-          <a:ln/>
-        </p:spPr>
-        <p:txBody>
-          <a:bodyPr wrap="square" lIns="0" tIns="0" rIns="0" bIns="0" rtlCol="0" anchor="ctr"/>
-          <a:lstStyle/>
-          <a:p>
-            <a:pPr algn="ctr" indent="0" marL="0">
-              <a:buNone/>
-            </a:pPr>
-            <a:r>
-              <a:rPr lang="en-US" sz="900" b="1" dirty="0">
-                <a:solidFill>
-                  <a:srgbClr val="003A63"/>
-                </a:solidFill>
-                <a:latin typeface="Aptos" pitchFamily="34" charset="0"/>
-                <a:ea typeface="Aptos" pitchFamily="34" charset="-122"/>
-                <a:cs typeface="Aptos" pitchFamily="34" charset="-120"/>
-              </a:rPr>
-              <a:t>Decision rights</a:t>
-            </a:r>
-            <a:endParaRPr lang="en-US" sz="900" dirty="0"/>
-          </a:p>
-        </p:txBody>
-      </p:sp>
-      <p:sp>
-        <p:nvSpPr>
-          <p:cNvPr id="21" name="Shape 19"/>
           <p:cNvSpPr/>
           <p:nvPr/>
         </p:nvSpPr>
@@ -22058,7 +20126,7 @@
       </p:sp>
       <p:sp>
         <p:nvSpPr>
-          <p:cNvPr id="22" name="Text 20"/>
+          <p:cNvPr id="17" name="Text 15"/>
           <p:cNvSpPr/>
           <p:nvPr/>
         </p:nvSpPr>
@@ -22097,7 +20165,7 @@
       </p:sp>
       <p:sp>
         <p:nvSpPr>
-          <p:cNvPr id="23" name="Text 21"/>
+          <p:cNvPr id="18" name="Text 16"/>
           <p:cNvSpPr/>
           <p:nvPr/>
         </p:nvSpPr>
@@ -22610,20 +20678,20 @@
         </p:nvSpPr>
         <p:spPr>
           <a:xfrm>
-            <a:off x="7818120" y="3977640"/>
-            <a:ext cx="972312" cy="749808"/>
+            <a:off x="8046720" y="3794760"/>
+            <a:ext cx="3063240" cy="1600200"/>
           </a:xfrm>
           <a:prstGeom prst="roundRect">
             <a:avLst>
-              <a:gd name="adj" fmla="val 14634"/>
+              <a:gd name="adj" fmla="val 6857"/>
             </a:avLst>
           </a:prstGeom>
           <a:solidFill>
-            <a:srgbClr val="0068B7"/>
+            <a:srgbClr val="FFFFFF"/>
           </a:solidFill>
           <a:ln w="12700">
             <a:solidFill>
-              <a:srgbClr val="0068B7"/>
+              <a:srgbClr val="B9D7E6"/>
             </a:solidFill>
             <a:prstDash val="solid"/>
           </a:ln>
@@ -22637,172 +20705,100 @@
         </p:nvSpPr>
         <p:spPr>
           <a:xfrm>
-            <a:off x="7891272" y="4169664"/>
-            <a:ext cx="826008" cy="310896"/>
-          </a:xfrm>
-          <a:prstGeom prst="rect">
-            <a:avLst/>
-          </a:prstGeom>
-          <a:noFill/>
-          <a:ln/>
-        </p:spPr>
-        <p:txBody>
-          <a:bodyPr wrap="square" lIns="0" tIns="0" rIns="0" bIns="0" rtlCol="0" anchor="ctr">
+            <a:off x="8211312" y="3941064"/>
+            <a:ext cx="2734056" cy="256032"/>
+          </a:xfrm>
+          <a:prstGeom prst="rect">
+            <a:avLst/>
+          </a:prstGeom>
+          <a:noFill/>
+          <a:ln/>
+        </p:spPr>
+        <p:txBody>
+          <a:bodyPr wrap="square" lIns="0" tIns="0" rIns="0" bIns="0" rtlCol="0" anchor="ctr"/>
+          <a:lstStyle/>
+          <a:p>
+            <a:pPr indent="0" marL="0">
+              <a:buNone/>
+            </a:pPr>
+            <a:r>
+              <a:rPr lang="en-US" sz="1300" b="1" dirty="0">
+                <a:solidFill>
+                  <a:srgbClr val="0068B7"/>
+                </a:solidFill>
+                <a:latin typeface="Aptos" pitchFamily="34" charset="0"/>
+                <a:ea typeface="Aptos" pitchFamily="34" charset="-122"/>
+                <a:cs typeface="Aptos" pitchFamily="34" charset="-120"/>
+              </a:rPr>
+              <a:t>Tool selection cues</a:t>
+            </a:r>
+            <a:endParaRPr lang="en-US" sz="1300" dirty="0"/>
+          </a:p>
+        </p:txBody>
+      </p:sp>
+      <p:sp>
+        <p:nvSpPr>
+          <p:cNvPr id="15" name="Text 13"/>
+          <p:cNvSpPr/>
+          <p:nvPr/>
+        </p:nvSpPr>
+        <p:spPr>
+          <a:xfrm>
+            <a:off x="8229600" y="4306824"/>
+            <a:ext cx="2679192" cy="941832"/>
+          </a:xfrm>
+          <a:prstGeom prst="rect">
+            <a:avLst/>
+          </a:prstGeom>
+          <a:noFill/>
+          <a:ln/>
+        </p:spPr>
+        <p:txBody>
+          <a:bodyPr wrap="square" lIns="254" tIns="254" rIns="254" bIns="254" rtlCol="0" anchor="t">
             <a:normAutofit/>
           </a:bodyPr>
           <a:lstStyle/>
           <a:p>
-            <a:pPr algn="ctr" indent="0" marL="0">
-              <a:buNone/>
-            </a:pPr>
-            <a:r>
-              <a:rPr lang="en-US" sz="1500" b="1" dirty="0">
-                <a:solidFill>
-                  <a:srgbClr val="FFFFFF"/>
-                </a:solidFill>
-                <a:latin typeface="Aptos" pitchFamily="34" charset="0"/>
-                <a:ea typeface="Aptos" pitchFamily="34" charset="-122"/>
-                <a:cs typeface="Aptos" pitchFamily="34" charset="-120"/>
-              </a:rPr>
-              <a:t>Concept</a:t>
-            </a:r>
-            <a:endParaRPr lang="en-US" sz="1500" dirty="0"/>
-          </a:p>
-        </p:txBody>
-      </p:sp>
-      <p:sp>
-        <p:nvSpPr>
-          <p:cNvPr id="15" name="Shape 13"/>
-          <p:cNvSpPr/>
-          <p:nvPr/>
-        </p:nvSpPr>
-        <p:spPr>
-          <a:xfrm>
-            <a:off x="9046464" y="3977640"/>
-            <a:ext cx="972312" cy="749808"/>
-          </a:xfrm>
-          <a:prstGeom prst="roundRect">
-            <a:avLst>
-              <a:gd name="adj" fmla="val 14634"/>
-            </a:avLst>
-          </a:prstGeom>
-          <a:solidFill>
-            <a:srgbClr val="2F8A28"/>
-          </a:solidFill>
-          <a:ln w="12700">
-            <a:solidFill>
-              <a:srgbClr val="2F8A28"/>
-            </a:solidFill>
-            <a:prstDash val="solid"/>
-          </a:ln>
-        </p:spPr>
-      </p:sp>
-      <p:sp>
-        <p:nvSpPr>
-          <p:cNvPr id="16" name="Text 14"/>
-          <p:cNvSpPr/>
-          <p:nvPr/>
-        </p:nvSpPr>
-        <p:spPr>
-          <a:xfrm>
-            <a:off x="9119616" y="4169664"/>
-            <a:ext cx="826008" cy="310896"/>
-          </a:xfrm>
-          <a:prstGeom prst="rect">
-            <a:avLst/>
-          </a:prstGeom>
-          <a:noFill/>
-          <a:ln/>
-        </p:spPr>
-        <p:txBody>
-          <a:bodyPr wrap="square" lIns="0" tIns="0" rIns="0" bIns="0" rtlCol="0" anchor="ctr">
-            <a:normAutofit/>
-          </a:bodyPr>
-          <a:lstStyle/>
-          <a:p>
-            <a:pPr algn="ctr" indent="0" marL="0">
-              <a:buNone/>
-            </a:pPr>
-            <a:r>
-              <a:rPr lang="en-US" sz="1500" b="1" dirty="0">
-                <a:solidFill>
-                  <a:srgbClr val="FFFFFF"/>
-                </a:solidFill>
-                <a:latin typeface="Aptos" pitchFamily="34" charset="0"/>
-                <a:ea typeface="Aptos" pitchFamily="34" charset="-122"/>
-                <a:cs typeface="Aptos" pitchFamily="34" charset="-120"/>
-              </a:rPr>
-              <a:t>Tool</a:t>
-            </a:r>
-            <a:endParaRPr lang="en-US" sz="1500" dirty="0"/>
-          </a:p>
-        </p:txBody>
-      </p:sp>
-      <p:sp>
-        <p:nvSpPr>
-          <p:cNvPr id="17" name="Shape 15"/>
-          <p:cNvSpPr/>
-          <p:nvPr/>
-        </p:nvSpPr>
-        <p:spPr>
-          <a:xfrm>
-            <a:off x="10274808" y="3977640"/>
-            <a:ext cx="972312" cy="749808"/>
-          </a:xfrm>
-          <a:prstGeom prst="roundRect">
-            <a:avLst>
-              <a:gd name="adj" fmla="val 14634"/>
-            </a:avLst>
-          </a:prstGeom>
-          <a:solidFill>
-            <a:srgbClr val="D69A2D"/>
-          </a:solidFill>
-          <a:ln w="12700">
-            <a:solidFill>
-              <a:srgbClr val="D69A2D"/>
-            </a:solidFill>
-            <a:prstDash val="solid"/>
-          </a:ln>
-        </p:spPr>
-      </p:sp>
-      <p:sp>
-        <p:nvSpPr>
-          <p:cNvPr id="18" name="Text 16"/>
-          <p:cNvSpPr/>
-          <p:nvPr/>
-        </p:nvSpPr>
-        <p:spPr>
-          <a:xfrm>
-            <a:off x="10347960" y="4169664"/>
-            <a:ext cx="826008" cy="310896"/>
-          </a:xfrm>
-          <a:prstGeom prst="rect">
-            <a:avLst/>
-          </a:prstGeom>
-          <a:noFill/>
-          <a:ln/>
-        </p:spPr>
-        <p:txBody>
-          <a:bodyPr wrap="square" lIns="0" tIns="0" rIns="0" bIns="0" rtlCol="0" anchor="ctr">
-            <a:normAutofit/>
-          </a:bodyPr>
-          <a:lstStyle/>
-          <a:p>
-            <a:pPr algn="ctr" indent="0" marL="0">
-              <a:buNone/>
-            </a:pPr>
-            <a:r>
-              <a:rPr lang="en-US" sz="1500" b="1" dirty="0">
-                <a:solidFill>
-                  <a:srgbClr val="FFFFFF"/>
-                </a:solidFill>
-                <a:latin typeface="Aptos" pitchFamily="34" charset="0"/>
-                <a:ea typeface="Aptos" pitchFamily="34" charset="-122"/>
-                <a:cs typeface="Aptos" pitchFamily="34" charset="-120"/>
-              </a:rPr>
-              <a:t>Artifact</a:t>
-            </a:r>
-            <a:endParaRPr lang="en-US" sz="1500" dirty="0"/>
+            <a:r>
+              <a:rPr lang="en-US" sz="1380" dirty="0">
+                <a:solidFill>
+                  <a:srgbClr val="17364A"/>
+                </a:solidFill>
+                <a:latin typeface="Aptos" pitchFamily="34" charset="0"/>
+                <a:ea typeface="Aptos" pitchFamily="34" charset="-122"/>
+                <a:cs typeface="Aptos" pitchFamily="34" charset="-120"/>
+              </a:rPr>
+              <a:t>Use a tool when no comparable local process exists.</a:t>
+            </a:r>
+            <a:endParaRPr lang="en-US" sz="1380" dirty="0"/>
+          </a:p>
+          <a:p>
+            <a:r>
+              <a:rPr lang="en-US" sz="1380" dirty="0">
+                <a:solidFill>
+                  <a:srgbClr val="17364A"/>
+                </a:solidFill>
+                <a:latin typeface="Aptos" pitchFamily="34" charset="0"/>
+                <a:ea typeface="Aptos" pitchFamily="34" charset="-122"/>
+                <a:cs typeface="Aptos" pitchFamily="34" charset="-120"/>
+              </a:rPr>
+              <a:t>Adapt existing department templates when they already fit the purpose.</a:t>
+            </a:r>
+            <a:endParaRPr lang="en-US" sz="1380" dirty="0"/>
+          </a:p>
+          <a:p>
+            <a:r>
+              <a:rPr lang="en-US" sz="1380" dirty="0">
+                <a:solidFill>
+                  <a:srgbClr val="17364A"/>
+                </a:solidFill>
+                <a:latin typeface="Aptos" pitchFamily="34" charset="0"/>
+                <a:ea typeface="Aptos" pitchFamily="34" charset="-122"/>
+                <a:cs typeface="Aptos" pitchFamily="34" charset="-120"/>
+              </a:rPr>
+              <a:t>Save the completed artifact as evidence of the decision.</a:t>
+            </a:r>
+            <a:endParaRPr lang="en-US" sz="1380" dirty="0"/>
           </a:p>
         </p:txBody>
       </p:sp>
@@ -23275,13 +21271,11 @@
             </a:avLst>
           </a:prstGeom>
           <a:solidFill>
-            <a:srgbClr val="FFFFFF">
-              <a:alpha val="88000"/>
-            </a:srgbClr>
+            <a:srgbClr val="FFFFFF"/>
           </a:solidFill>
           <a:ln w="12700">
             <a:solidFill>
-              <a:srgbClr val="D6E8F2"/>
+              <a:srgbClr val="B9D7E6"/>
             </a:solidFill>
             <a:prstDash val="solid"/>
           </a:ln>
@@ -23289,190 +21283,112 @@
       </p:sp>
       <p:sp>
         <p:nvSpPr>
-          <p:cNvPr id="14" name="Shape 12"/>
-          <p:cNvSpPr/>
-          <p:nvPr/>
-        </p:nvSpPr>
-        <p:spPr>
-          <a:xfrm>
-            <a:off x="7891272" y="3108960"/>
-            <a:ext cx="566928" cy="566928"/>
-          </a:xfrm>
-          <a:prstGeom prst="ellipse">
-            <a:avLst/>
-          </a:prstGeom>
-          <a:solidFill>
-            <a:srgbClr val="0068B7"/>
-          </a:solidFill>
-          <a:ln w="12700">
-            <a:solidFill>
-              <a:srgbClr val="0068B7"/>
-            </a:solidFill>
-            <a:prstDash val="solid"/>
-          </a:ln>
-        </p:spPr>
-      </p:sp>
-      <p:sp>
-        <p:nvSpPr>
-          <p:cNvPr id="15" name="Shape 13"/>
-          <p:cNvSpPr/>
-          <p:nvPr/>
-        </p:nvSpPr>
-        <p:spPr>
-          <a:xfrm>
-            <a:off x="10287000" y="3108960"/>
-            <a:ext cx="566928" cy="566928"/>
-          </a:xfrm>
-          <a:prstGeom prst="ellipse">
-            <a:avLst/>
-          </a:prstGeom>
-          <a:solidFill>
-            <a:srgbClr val="2F8A28"/>
-          </a:solidFill>
-          <a:ln w="12700">
-            <a:solidFill>
-              <a:srgbClr val="2F8A28"/>
-            </a:solidFill>
-            <a:prstDash val="solid"/>
-          </a:ln>
-        </p:spPr>
+          <p:cNvPr id="14" name="Text 12"/>
+          <p:cNvSpPr/>
+          <p:nvPr/>
+        </p:nvSpPr>
+        <p:spPr>
+          <a:xfrm>
+            <a:off x="7799832" y="2935224"/>
+            <a:ext cx="3145536" cy="256032"/>
+          </a:xfrm>
+          <a:prstGeom prst="rect">
+            <a:avLst/>
+          </a:prstGeom>
+          <a:noFill/>
+          <a:ln/>
+        </p:spPr>
+        <p:txBody>
+          <a:bodyPr wrap="square" lIns="0" tIns="0" rIns="0" bIns="0" rtlCol="0" anchor="ctr"/>
+          <a:lstStyle/>
+          <a:p>
+            <a:pPr indent="0" marL="0">
+              <a:buNone/>
+            </a:pPr>
+            <a:r>
+              <a:rPr lang="en-US" sz="1300" b="1" dirty="0">
+                <a:solidFill>
+                  <a:srgbClr val="0068B7"/>
+                </a:solidFill>
+                <a:latin typeface="Aptos" pitchFamily="34" charset="0"/>
+                <a:ea typeface="Aptos" pitchFamily="34" charset="-122"/>
+                <a:cs typeface="Aptos" pitchFamily="34" charset="-120"/>
+              </a:rPr>
+              <a:t>Concept checkpoints</a:t>
+            </a:r>
+            <a:endParaRPr lang="en-US" sz="1300" dirty="0"/>
+          </a:p>
+        </p:txBody>
+      </p:sp>
+      <p:sp>
+        <p:nvSpPr>
+          <p:cNvPr id="15" name="Text 13"/>
+          <p:cNvSpPr/>
+          <p:nvPr/>
+        </p:nvSpPr>
+        <p:spPr>
+          <a:xfrm>
+            <a:off x="7818120" y="3300984"/>
+            <a:ext cx="3090672" cy="877824"/>
+          </a:xfrm>
+          <a:prstGeom prst="rect">
+            <a:avLst/>
+          </a:prstGeom>
+          <a:noFill/>
+          <a:ln/>
+        </p:spPr>
+        <p:txBody>
+          <a:bodyPr wrap="square" lIns="254" tIns="254" rIns="254" bIns="254" rtlCol="0" anchor="t">
+            <a:normAutofit/>
+          </a:bodyPr>
+          <a:lstStyle/>
+          <a:p>
+            <a:r>
+              <a:rPr lang="en-US" sz="1380" dirty="0">
+                <a:solidFill>
+                  <a:srgbClr val="17364A"/>
+                </a:solidFill>
+                <a:latin typeface="Aptos" pitchFamily="34" charset="0"/>
+                <a:ea typeface="Aptos" pitchFamily="34" charset="-122"/>
+                <a:cs typeface="Aptos" pitchFamily="34" charset="-120"/>
+              </a:rPr>
+              <a:t>Distinguish AI governance from AI policy, IT security review, project management, and.</a:t>
+            </a:r>
+            <a:endParaRPr lang="en-US" sz="1380" dirty="0"/>
+          </a:p>
+          <a:p>
+            <a:r>
+              <a:rPr lang="en-US" sz="1380" dirty="0">
+                <a:solidFill>
+                  <a:srgbClr val="17364A"/>
+                </a:solidFill>
+                <a:latin typeface="Aptos" pitchFamily="34" charset="0"/>
+                <a:ea typeface="Aptos" pitchFamily="34" charset="-122"/>
+                <a:cs typeface="Aptos" pitchFamily="34" charset="-120"/>
+              </a:rPr>
+              <a:t>Identify common AI governance roles, including program owner, data steward, privacy lead,.</a:t>
+            </a:r>
+            <a:endParaRPr lang="en-US" sz="1380" dirty="0"/>
+          </a:p>
+          <a:p>
+            <a:r>
+              <a:rPr lang="en-US" sz="1380" dirty="0">
+                <a:solidFill>
+                  <a:srgbClr val="17364A"/>
+                </a:solidFill>
+                <a:latin typeface="Aptos" pitchFamily="34" charset="0"/>
+                <a:ea typeface="Aptos" pitchFamily="34" charset="-122"/>
+                <a:cs typeface="Aptos" pitchFamily="34" charset="-120"/>
+              </a:rPr>
+              <a:t>Recognize which AI uses should be escalated for formal review because they involve.</a:t>
+            </a:r>
+            <a:endParaRPr lang="en-US" sz="1380" dirty="0"/>
+          </a:p>
+        </p:txBody>
       </p:sp>
       <p:sp>
         <p:nvSpPr>
           <p:cNvPr id="16" name="Shape 14"/>
-          <p:cNvSpPr/>
-          <p:nvPr/>
-        </p:nvSpPr>
-        <p:spPr>
-          <a:xfrm>
-            <a:off x="9089136" y="3456432"/>
-            <a:ext cx="566928" cy="566928"/>
-          </a:xfrm>
-          <a:prstGeom prst="ellipse">
-            <a:avLst/>
-          </a:prstGeom>
-          <a:solidFill>
-            <a:srgbClr val="6A4CA3"/>
-          </a:solidFill>
-          <a:ln w="12700">
-            <a:solidFill>
-              <a:srgbClr val="6A4CA3"/>
-            </a:solidFill>
-            <a:prstDash val="solid"/>
-          </a:ln>
-        </p:spPr>
-      </p:sp>
-      <p:sp>
-        <p:nvSpPr>
-          <p:cNvPr id="17" name="Shape 15"/>
-          <p:cNvSpPr/>
-          <p:nvPr/>
-        </p:nvSpPr>
-        <p:spPr>
-          <a:xfrm>
-            <a:off x="8385048" y="3419856"/>
-            <a:ext cx="1975104" cy="0"/>
-          </a:xfrm>
-          <a:prstGeom prst="line">
-            <a:avLst/>
-          </a:prstGeom>
-          <a:noFill/>
-          <a:ln w="25400">
-            <a:solidFill>
-              <a:srgbClr val="8ABBD8"/>
-            </a:solidFill>
-            <a:prstDash val="solid"/>
-          </a:ln>
-        </p:spPr>
-      </p:sp>
-      <p:sp>
-        <p:nvSpPr>
-          <p:cNvPr id="18" name="Shape 16"/>
-          <p:cNvSpPr/>
-          <p:nvPr/>
-        </p:nvSpPr>
-        <p:spPr>
-          <a:xfrm>
-            <a:off x="8202168" y="3630168"/>
-            <a:ext cx="1170432" cy="118872"/>
-          </a:xfrm>
-          <a:prstGeom prst="line">
-            <a:avLst/>
-          </a:prstGeom>
-          <a:noFill/>
-          <a:ln w="25400">
-            <a:solidFill>
-              <a:srgbClr val="8ABBD8"/>
-            </a:solidFill>
-            <a:prstDash val="solid"/>
-          </a:ln>
-        </p:spPr>
-      </p:sp>
-      <p:sp>
-        <p:nvSpPr>
-          <p:cNvPr id="19" name="Shape 17"/>
-          <p:cNvSpPr/>
-          <p:nvPr/>
-        </p:nvSpPr>
-        <p:spPr>
-          <a:xfrm>
-            <a:off x="10543032" y="3630168"/>
-            <a:ext cx="-1170432" cy="118872"/>
-          </a:xfrm>
-          <a:prstGeom prst="line">
-            <a:avLst/>
-          </a:prstGeom>
-          <a:noFill/>
-          <a:ln w="25400">
-            <a:solidFill>
-              <a:srgbClr val="8ABBD8"/>
-            </a:solidFill>
-            <a:prstDash val="solid"/>
-          </a:ln>
-        </p:spPr>
-      </p:sp>
-      <p:sp>
-        <p:nvSpPr>
-          <p:cNvPr id="20" name="Text 18"/>
-          <p:cNvSpPr/>
-          <p:nvPr/>
-        </p:nvSpPr>
-        <p:spPr>
-          <a:xfrm>
-            <a:off x="7863840" y="4069080"/>
-            <a:ext cx="3017520" cy="164592"/>
-          </a:xfrm>
-          <a:prstGeom prst="rect">
-            <a:avLst/>
-          </a:prstGeom>
-          <a:noFill/>
-          <a:ln/>
-        </p:spPr>
-        <p:txBody>
-          <a:bodyPr wrap="square" lIns="0" tIns="0" rIns="0" bIns="0" rtlCol="0" anchor="ctr"/>
-          <a:lstStyle/>
-          <a:p>
-            <a:pPr algn="ctr" indent="0" marL="0">
-              <a:buNone/>
-            </a:pPr>
-            <a:r>
-              <a:rPr lang="en-US" sz="900" b="1" dirty="0">
-                <a:solidFill>
-                  <a:srgbClr val="003A63"/>
-                </a:solidFill>
-                <a:latin typeface="Aptos" pitchFamily="34" charset="0"/>
-                <a:ea typeface="Aptos" pitchFamily="34" charset="-122"/>
-                <a:cs typeface="Aptos" pitchFamily="34" charset="-120"/>
-              </a:rPr>
-              <a:t>Decision rights</a:t>
-            </a:r>
-            <a:endParaRPr lang="en-US" sz="900" dirty="0"/>
-          </a:p>
-        </p:txBody>
-      </p:sp>
-      <p:sp>
-        <p:nvSpPr>
-          <p:cNvPr id="21" name="Shape 19"/>
           <p:cNvSpPr/>
           <p:nvPr/>
         </p:nvSpPr>
@@ -23499,7 +21415,7 @@
       </p:sp>
       <p:sp>
         <p:nvSpPr>
-          <p:cNvPr id="22" name="Text 20"/>
+          <p:cNvPr id="17" name="Text 15"/>
           <p:cNvSpPr/>
           <p:nvPr/>
         </p:nvSpPr>
@@ -23538,7 +21454,7 @@
       </p:sp>
       <p:sp>
         <p:nvSpPr>
-          <p:cNvPr id="23" name="Text 21"/>
+          <p:cNvPr id="18" name="Text 16"/>
           <p:cNvSpPr/>
           <p:nvPr/>
         </p:nvSpPr>
@@ -24018,13 +21934,11 @@
             </a:avLst>
           </a:prstGeom>
           <a:solidFill>
-            <a:srgbClr val="FFFFFF">
-              <a:alpha val="88000"/>
-            </a:srgbClr>
+            <a:srgbClr val="FFFFFF"/>
           </a:solidFill>
           <a:ln w="12700">
             <a:solidFill>
-              <a:srgbClr val="D6E8F2"/>
+              <a:srgbClr val="B9D7E6"/>
             </a:solidFill>
             <a:prstDash val="solid"/>
           </a:ln>
@@ -24032,190 +21946,84 @@
       </p:sp>
       <p:sp>
         <p:nvSpPr>
-          <p:cNvPr id="14" name="Shape 12"/>
-          <p:cNvSpPr/>
-          <p:nvPr/>
-        </p:nvSpPr>
-        <p:spPr>
-          <a:xfrm>
-            <a:off x="7891272" y="3108960"/>
-            <a:ext cx="566928" cy="566928"/>
-          </a:xfrm>
-          <a:prstGeom prst="ellipse">
-            <a:avLst/>
-          </a:prstGeom>
-          <a:solidFill>
-            <a:srgbClr val="0068B7"/>
-          </a:solidFill>
-          <a:ln w="12700">
-            <a:solidFill>
-              <a:srgbClr val="0068B7"/>
-            </a:solidFill>
-            <a:prstDash val="solid"/>
-          </a:ln>
-        </p:spPr>
-      </p:sp>
-      <p:sp>
-        <p:nvSpPr>
-          <p:cNvPr id="15" name="Shape 13"/>
-          <p:cNvSpPr/>
-          <p:nvPr/>
-        </p:nvSpPr>
-        <p:spPr>
-          <a:xfrm>
-            <a:off x="10287000" y="3108960"/>
-            <a:ext cx="566928" cy="566928"/>
-          </a:xfrm>
-          <a:prstGeom prst="ellipse">
-            <a:avLst/>
-          </a:prstGeom>
-          <a:solidFill>
-            <a:srgbClr val="2F8A28"/>
-          </a:solidFill>
-          <a:ln w="12700">
-            <a:solidFill>
-              <a:srgbClr val="2F8A28"/>
-            </a:solidFill>
-            <a:prstDash val="solid"/>
-          </a:ln>
-        </p:spPr>
+          <p:cNvPr id="14" name="Text 12"/>
+          <p:cNvSpPr/>
+          <p:nvPr/>
+        </p:nvSpPr>
+        <p:spPr>
+          <a:xfrm>
+            <a:off x="7799832" y="2935224"/>
+            <a:ext cx="3145536" cy="256032"/>
+          </a:xfrm>
+          <a:prstGeom prst="rect">
+            <a:avLst/>
+          </a:prstGeom>
+          <a:noFill/>
+          <a:ln/>
+        </p:spPr>
+        <p:txBody>
+          <a:bodyPr wrap="square" lIns="0" tIns="0" rIns="0" bIns="0" rtlCol="0" anchor="ctr"/>
+          <a:lstStyle/>
+          <a:p>
+            <a:pPr indent="0" marL="0">
+              <a:buNone/>
+            </a:pPr>
+            <a:r>
+              <a:rPr lang="en-US" sz="1300" b="1" dirty="0">
+                <a:solidFill>
+                  <a:srgbClr val="0068B7"/>
+                </a:solidFill>
+                <a:latin typeface="Aptos" pitchFamily="34" charset="0"/>
+                <a:ea typeface="Aptos" pitchFamily="34" charset="-122"/>
+                <a:cs typeface="Aptos" pitchFamily="34" charset="-120"/>
+              </a:rPr>
+              <a:t>Concept checkpoints</a:t>
+            </a:r>
+            <a:endParaRPr lang="en-US" sz="1300" dirty="0"/>
+          </a:p>
+        </p:txBody>
+      </p:sp>
+      <p:sp>
+        <p:nvSpPr>
+          <p:cNvPr id="15" name="Text 13"/>
+          <p:cNvSpPr/>
+          <p:nvPr/>
+        </p:nvSpPr>
+        <p:spPr>
+          <a:xfrm>
+            <a:off x="7818120" y="3300984"/>
+            <a:ext cx="3090672" cy="877824"/>
+          </a:xfrm>
+          <a:prstGeom prst="rect">
+            <a:avLst/>
+          </a:prstGeom>
+          <a:noFill/>
+          <a:ln/>
+        </p:spPr>
+        <p:txBody>
+          <a:bodyPr wrap="square" lIns="254" tIns="254" rIns="254" bIns="254" rtlCol="0" anchor="t">
+            <a:normAutofit/>
+          </a:bodyPr>
+          <a:lstStyle/>
+          <a:p>
+            <a:r>
+              <a:rPr lang="en-US" sz="1380" dirty="0">
+                <a:solidFill>
+                  <a:srgbClr val="17364A"/>
+                </a:solidFill>
+                <a:latin typeface="Aptos" pitchFamily="34" charset="0"/>
+                <a:ea typeface="Aptos" pitchFamily="34" charset="-122"/>
+                <a:cs typeface="Aptos" pitchFamily="34" charset="-120"/>
+              </a:rPr>
+              <a:t>Produce an introductory AI governance intake and escalation note for one real or realistic.</a:t>
+            </a:r>
+            <a:endParaRPr lang="en-US" sz="1380" dirty="0"/>
+          </a:p>
+        </p:txBody>
       </p:sp>
       <p:sp>
         <p:nvSpPr>
           <p:cNvPr id="16" name="Shape 14"/>
-          <p:cNvSpPr/>
-          <p:nvPr/>
-        </p:nvSpPr>
-        <p:spPr>
-          <a:xfrm>
-            <a:off x="9089136" y="3456432"/>
-            <a:ext cx="566928" cy="566928"/>
-          </a:xfrm>
-          <a:prstGeom prst="ellipse">
-            <a:avLst/>
-          </a:prstGeom>
-          <a:solidFill>
-            <a:srgbClr val="6A4CA3"/>
-          </a:solidFill>
-          <a:ln w="12700">
-            <a:solidFill>
-              <a:srgbClr val="6A4CA3"/>
-            </a:solidFill>
-            <a:prstDash val="solid"/>
-          </a:ln>
-        </p:spPr>
-      </p:sp>
-      <p:sp>
-        <p:nvSpPr>
-          <p:cNvPr id="17" name="Shape 15"/>
-          <p:cNvSpPr/>
-          <p:nvPr/>
-        </p:nvSpPr>
-        <p:spPr>
-          <a:xfrm>
-            <a:off x="8385048" y="3419856"/>
-            <a:ext cx="1975104" cy="0"/>
-          </a:xfrm>
-          <a:prstGeom prst="line">
-            <a:avLst/>
-          </a:prstGeom>
-          <a:noFill/>
-          <a:ln w="25400">
-            <a:solidFill>
-              <a:srgbClr val="8ABBD8"/>
-            </a:solidFill>
-            <a:prstDash val="solid"/>
-          </a:ln>
-        </p:spPr>
-      </p:sp>
-      <p:sp>
-        <p:nvSpPr>
-          <p:cNvPr id="18" name="Shape 16"/>
-          <p:cNvSpPr/>
-          <p:nvPr/>
-        </p:nvSpPr>
-        <p:spPr>
-          <a:xfrm>
-            <a:off x="8202168" y="3630168"/>
-            <a:ext cx="1170432" cy="118872"/>
-          </a:xfrm>
-          <a:prstGeom prst="line">
-            <a:avLst/>
-          </a:prstGeom>
-          <a:noFill/>
-          <a:ln w="25400">
-            <a:solidFill>
-              <a:srgbClr val="8ABBD8"/>
-            </a:solidFill>
-            <a:prstDash val="solid"/>
-          </a:ln>
-        </p:spPr>
-      </p:sp>
-      <p:sp>
-        <p:nvSpPr>
-          <p:cNvPr id="19" name="Shape 17"/>
-          <p:cNvSpPr/>
-          <p:nvPr/>
-        </p:nvSpPr>
-        <p:spPr>
-          <a:xfrm>
-            <a:off x="10543032" y="3630168"/>
-            <a:ext cx="-1170432" cy="118872"/>
-          </a:xfrm>
-          <a:prstGeom prst="line">
-            <a:avLst/>
-          </a:prstGeom>
-          <a:noFill/>
-          <a:ln w="25400">
-            <a:solidFill>
-              <a:srgbClr val="8ABBD8"/>
-            </a:solidFill>
-            <a:prstDash val="solid"/>
-          </a:ln>
-        </p:spPr>
-      </p:sp>
-      <p:sp>
-        <p:nvSpPr>
-          <p:cNvPr id="20" name="Text 18"/>
-          <p:cNvSpPr/>
-          <p:nvPr/>
-        </p:nvSpPr>
-        <p:spPr>
-          <a:xfrm>
-            <a:off x="7863840" y="4069080"/>
-            <a:ext cx="3017520" cy="164592"/>
-          </a:xfrm>
-          <a:prstGeom prst="rect">
-            <a:avLst/>
-          </a:prstGeom>
-          <a:noFill/>
-          <a:ln/>
-        </p:spPr>
-        <p:txBody>
-          <a:bodyPr wrap="square" lIns="0" tIns="0" rIns="0" bIns="0" rtlCol="0" anchor="ctr"/>
-          <a:lstStyle/>
-          <a:p>
-            <a:pPr algn="ctr" indent="0" marL="0">
-              <a:buNone/>
-            </a:pPr>
-            <a:r>
-              <a:rPr lang="en-US" sz="900" b="1" dirty="0">
-                <a:solidFill>
-                  <a:srgbClr val="003A63"/>
-                </a:solidFill>
-                <a:latin typeface="Aptos" pitchFamily="34" charset="0"/>
-                <a:ea typeface="Aptos" pitchFamily="34" charset="-122"/>
-                <a:cs typeface="Aptos" pitchFamily="34" charset="-120"/>
-              </a:rPr>
-              <a:t>Decision rights</a:t>
-            </a:r>
-            <a:endParaRPr lang="en-US" sz="900" dirty="0"/>
-          </a:p>
-        </p:txBody>
-      </p:sp>
-      <p:sp>
-        <p:nvSpPr>
-          <p:cNvPr id="21" name="Shape 19"/>
           <p:cNvSpPr/>
           <p:nvPr/>
         </p:nvSpPr>
@@ -24242,7 +22050,7 @@
       </p:sp>
       <p:sp>
         <p:nvSpPr>
-          <p:cNvPr id="22" name="Text 20"/>
+          <p:cNvPr id="17" name="Text 15"/>
           <p:cNvSpPr/>
           <p:nvPr/>
         </p:nvSpPr>
@@ -24281,7 +22089,7 @@
       </p:sp>
       <p:sp>
         <p:nvSpPr>
-          <p:cNvPr id="23" name="Text 21"/>
+          <p:cNvPr id="18" name="Text 16"/>
           <p:cNvSpPr/>
           <p:nvPr/>
         </p:nvSpPr>
@@ -24789,13 +22597,11 @@
             </a:avLst>
           </a:prstGeom>
           <a:solidFill>
-            <a:srgbClr val="FFFFFF">
-              <a:alpha val="88000"/>
-            </a:srgbClr>
+            <a:srgbClr val="FFFFFF"/>
           </a:solidFill>
           <a:ln w="12700">
             <a:solidFill>
-              <a:srgbClr val="D6E8F2"/>
+              <a:srgbClr val="B9D7E6"/>
             </a:solidFill>
             <a:prstDash val="solid"/>
           </a:ln>
@@ -24803,190 +22609,112 @@
       </p:sp>
       <p:sp>
         <p:nvSpPr>
-          <p:cNvPr id="14" name="Shape 12"/>
-          <p:cNvSpPr/>
-          <p:nvPr/>
-        </p:nvSpPr>
-        <p:spPr>
-          <a:xfrm>
-            <a:off x="7891272" y="3108960"/>
-            <a:ext cx="566928" cy="566928"/>
-          </a:xfrm>
-          <a:prstGeom prst="ellipse">
-            <a:avLst/>
-          </a:prstGeom>
-          <a:solidFill>
-            <a:srgbClr val="0068B7"/>
-          </a:solidFill>
-          <a:ln w="12700">
-            <a:solidFill>
-              <a:srgbClr val="0068B7"/>
-            </a:solidFill>
-            <a:prstDash val="solid"/>
-          </a:ln>
-        </p:spPr>
-      </p:sp>
-      <p:sp>
-        <p:nvSpPr>
-          <p:cNvPr id="15" name="Shape 13"/>
-          <p:cNvSpPr/>
-          <p:nvPr/>
-        </p:nvSpPr>
-        <p:spPr>
-          <a:xfrm>
-            <a:off x="10287000" y="3108960"/>
-            <a:ext cx="566928" cy="566928"/>
-          </a:xfrm>
-          <a:prstGeom prst="ellipse">
-            <a:avLst/>
-          </a:prstGeom>
-          <a:solidFill>
-            <a:srgbClr val="2F8A28"/>
-          </a:solidFill>
-          <a:ln w="12700">
-            <a:solidFill>
-              <a:srgbClr val="2F8A28"/>
-            </a:solidFill>
-            <a:prstDash val="solid"/>
-          </a:ln>
-        </p:spPr>
+          <p:cNvPr id="14" name="Text 12"/>
+          <p:cNvSpPr/>
+          <p:nvPr/>
+        </p:nvSpPr>
+        <p:spPr>
+          <a:xfrm>
+            <a:off x="7799832" y="2935224"/>
+            <a:ext cx="3145536" cy="256032"/>
+          </a:xfrm>
+          <a:prstGeom prst="rect">
+            <a:avLst/>
+          </a:prstGeom>
+          <a:noFill/>
+          <a:ln/>
+        </p:spPr>
+        <p:txBody>
+          <a:bodyPr wrap="square" lIns="0" tIns="0" rIns="0" bIns="0" rtlCol="0" anchor="ctr"/>
+          <a:lstStyle/>
+          <a:p>
+            <a:pPr indent="0" marL="0">
+              <a:buNone/>
+            </a:pPr>
+            <a:r>
+              <a:rPr lang="en-US" sz="1300" b="1" dirty="0">
+                <a:solidFill>
+                  <a:srgbClr val="0068B7"/>
+                </a:solidFill>
+                <a:latin typeface="Aptos" pitchFamily="34" charset="0"/>
+                <a:ea typeface="Aptos" pitchFamily="34" charset="-122"/>
+                <a:cs typeface="Aptos" pitchFamily="34" charset="-120"/>
+              </a:rPr>
+              <a:t>Concept checkpoints</a:t>
+            </a:r>
+            <a:endParaRPr lang="en-US" sz="1300" dirty="0"/>
+          </a:p>
+        </p:txBody>
+      </p:sp>
+      <p:sp>
+        <p:nvSpPr>
+          <p:cNvPr id="15" name="Text 13"/>
+          <p:cNvSpPr/>
+          <p:nvPr/>
+        </p:nvSpPr>
+        <p:spPr>
+          <a:xfrm>
+            <a:off x="7818120" y="3300984"/>
+            <a:ext cx="3090672" cy="877824"/>
+          </a:xfrm>
+          <a:prstGeom prst="rect">
+            <a:avLst/>
+          </a:prstGeom>
+          <a:noFill/>
+          <a:ln/>
+        </p:spPr>
+        <p:txBody>
+          <a:bodyPr wrap="square" lIns="254" tIns="254" rIns="254" bIns="254" rtlCol="0" anchor="t">
+            <a:normAutofit/>
+          </a:bodyPr>
+          <a:lstStyle/>
+          <a:p>
+            <a:r>
+              <a:rPr lang="en-US" sz="1380" dirty="0">
+                <a:solidFill>
+                  <a:srgbClr val="17364A"/>
+                </a:solidFill>
+                <a:latin typeface="Aptos" pitchFamily="34" charset="0"/>
+                <a:ea typeface="Aptos" pitchFamily="34" charset="-122"/>
+                <a:cs typeface="Aptos" pitchFamily="34" charset="-120"/>
+              </a:rPr>
+              <a:t>AI governance is the set of people, policies, processes, decision rights, documentation.</a:t>
+            </a:r>
+            <a:endParaRPr lang="en-US" sz="1380" dirty="0"/>
+          </a:p>
+          <a:p>
+            <a:r>
+              <a:rPr lang="en-US" sz="1380" dirty="0">
+                <a:solidFill>
+                  <a:srgbClr val="17364A"/>
+                </a:solidFill>
+                <a:latin typeface="Aptos" pitchFamily="34" charset="0"/>
+                <a:ea typeface="Aptos" pitchFamily="34" charset="-122"/>
+                <a:cs typeface="Aptos" pitchFamily="34" charset="-120"/>
+              </a:rPr>
+              <a:t>Governance does not mean that every staff member must become an AI expert, and it does not.</a:t>
+            </a:r>
+            <a:endParaRPr lang="en-US" sz="1380" dirty="0"/>
+          </a:p>
+          <a:p>
+            <a:r>
+              <a:rPr lang="en-US" sz="1380" dirty="0">
+                <a:solidFill>
+                  <a:srgbClr val="17364A"/>
+                </a:solidFill>
+                <a:latin typeface="Aptos" pitchFamily="34" charset="0"/>
+                <a:ea typeface="Aptos" pitchFamily="34" charset="-122"/>
+                <a:cs typeface="Aptos" pitchFamily="34" charset="-120"/>
+              </a:rPr>
+              <a:t>Good governance helps an agency decide what AI uses are appropriate, what review is.</a:t>
+            </a:r>
+            <a:endParaRPr lang="en-US" sz="1380" dirty="0"/>
+          </a:p>
+        </p:txBody>
       </p:sp>
       <p:sp>
         <p:nvSpPr>
           <p:cNvPr id="16" name="Shape 14"/>
-          <p:cNvSpPr/>
-          <p:nvPr/>
-        </p:nvSpPr>
-        <p:spPr>
-          <a:xfrm>
-            <a:off x="9089136" y="3456432"/>
-            <a:ext cx="566928" cy="566928"/>
-          </a:xfrm>
-          <a:prstGeom prst="ellipse">
-            <a:avLst/>
-          </a:prstGeom>
-          <a:solidFill>
-            <a:srgbClr val="6A4CA3"/>
-          </a:solidFill>
-          <a:ln w="12700">
-            <a:solidFill>
-              <a:srgbClr val="6A4CA3"/>
-            </a:solidFill>
-            <a:prstDash val="solid"/>
-          </a:ln>
-        </p:spPr>
-      </p:sp>
-      <p:sp>
-        <p:nvSpPr>
-          <p:cNvPr id="17" name="Shape 15"/>
-          <p:cNvSpPr/>
-          <p:nvPr/>
-        </p:nvSpPr>
-        <p:spPr>
-          <a:xfrm>
-            <a:off x="8385048" y="3419856"/>
-            <a:ext cx="1975104" cy="0"/>
-          </a:xfrm>
-          <a:prstGeom prst="line">
-            <a:avLst/>
-          </a:prstGeom>
-          <a:noFill/>
-          <a:ln w="25400">
-            <a:solidFill>
-              <a:srgbClr val="8ABBD8"/>
-            </a:solidFill>
-            <a:prstDash val="solid"/>
-          </a:ln>
-        </p:spPr>
-      </p:sp>
-      <p:sp>
-        <p:nvSpPr>
-          <p:cNvPr id="18" name="Shape 16"/>
-          <p:cNvSpPr/>
-          <p:nvPr/>
-        </p:nvSpPr>
-        <p:spPr>
-          <a:xfrm>
-            <a:off x="8202168" y="3630168"/>
-            <a:ext cx="1170432" cy="118872"/>
-          </a:xfrm>
-          <a:prstGeom prst="line">
-            <a:avLst/>
-          </a:prstGeom>
-          <a:noFill/>
-          <a:ln w="25400">
-            <a:solidFill>
-              <a:srgbClr val="8ABBD8"/>
-            </a:solidFill>
-            <a:prstDash val="solid"/>
-          </a:ln>
-        </p:spPr>
-      </p:sp>
-      <p:sp>
-        <p:nvSpPr>
-          <p:cNvPr id="19" name="Shape 17"/>
-          <p:cNvSpPr/>
-          <p:nvPr/>
-        </p:nvSpPr>
-        <p:spPr>
-          <a:xfrm>
-            <a:off x="10543032" y="3630168"/>
-            <a:ext cx="-1170432" cy="118872"/>
-          </a:xfrm>
-          <a:prstGeom prst="line">
-            <a:avLst/>
-          </a:prstGeom>
-          <a:noFill/>
-          <a:ln w="25400">
-            <a:solidFill>
-              <a:srgbClr val="8ABBD8"/>
-            </a:solidFill>
-            <a:prstDash val="solid"/>
-          </a:ln>
-        </p:spPr>
-      </p:sp>
-      <p:sp>
-        <p:nvSpPr>
-          <p:cNvPr id="20" name="Text 18"/>
-          <p:cNvSpPr/>
-          <p:nvPr/>
-        </p:nvSpPr>
-        <p:spPr>
-          <a:xfrm>
-            <a:off x="7863840" y="4069080"/>
-            <a:ext cx="3017520" cy="164592"/>
-          </a:xfrm>
-          <a:prstGeom prst="rect">
-            <a:avLst/>
-          </a:prstGeom>
-          <a:noFill/>
-          <a:ln/>
-        </p:spPr>
-        <p:txBody>
-          <a:bodyPr wrap="square" lIns="0" tIns="0" rIns="0" bIns="0" rtlCol="0" anchor="ctr"/>
-          <a:lstStyle/>
-          <a:p>
-            <a:pPr algn="ctr" indent="0" marL="0">
-              <a:buNone/>
-            </a:pPr>
-            <a:r>
-              <a:rPr lang="en-US" sz="900" b="1" dirty="0">
-                <a:solidFill>
-                  <a:srgbClr val="003A63"/>
-                </a:solidFill>
-                <a:latin typeface="Aptos" pitchFamily="34" charset="0"/>
-                <a:ea typeface="Aptos" pitchFamily="34" charset="-122"/>
-                <a:cs typeface="Aptos" pitchFamily="34" charset="-120"/>
-              </a:rPr>
-              <a:t>Decision rights</a:t>
-            </a:r>
-            <a:endParaRPr lang="en-US" sz="900" dirty="0"/>
-          </a:p>
-        </p:txBody>
-      </p:sp>
-      <p:sp>
-        <p:nvSpPr>
-          <p:cNvPr id="21" name="Shape 19"/>
           <p:cNvSpPr/>
           <p:nvPr/>
         </p:nvSpPr>
@@ -25013,7 +22741,7 @@
       </p:sp>
       <p:sp>
         <p:nvSpPr>
-          <p:cNvPr id="22" name="Text 20"/>
+          <p:cNvPr id="17" name="Text 15"/>
           <p:cNvSpPr/>
           <p:nvPr/>
         </p:nvSpPr>
@@ -25052,7 +22780,7 @@
       </p:sp>
       <p:sp>
         <p:nvSpPr>
-          <p:cNvPr id="23" name="Text 21"/>
+          <p:cNvPr id="18" name="Text 16"/>
           <p:cNvSpPr/>
           <p:nvPr/>
         </p:nvSpPr>
@@ -25560,13 +23288,11 @@
             </a:avLst>
           </a:prstGeom>
           <a:solidFill>
-            <a:srgbClr val="FFFFFF">
-              <a:alpha val="88000"/>
-            </a:srgbClr>
+            <a:srgbClr val="FFFFFF"/>
           </a:solidFill>
           <a:ln w="12700">
             <a:solidFill>
-              <a:srgbClr val="D6E8F2"/>
+              <a:srgbClr val="B9D7E6"/>
             </a:solidFill>
             <a:prstDash val="solid"/>
           </a:ln>
@@ -25574,190 +23300,112 @@
       </p:sp>
       <p:sp>
         <p:nvSpPr>
-          <p:cNvPr id="14" name="Shape 12"/>
-          <p:cNvSpPr/>
-          <p:nvPr/>
-        </p:nvSpPr>
-        <p:spPr>
-          <a:xfrm>
-            <a:off x="7891272" y="3108960"/>
-            <a:ext cx="566928" cy="566928"/>
-          </a:xfrm>
-          <a:prstGeom prst="ellipse">
-            <a:avLst/>
-          </a:prstGeom>
-          <a:solidFill>
-            <a:srgbClr val="0068B7"/>
-          </a:solidFill>
-          <a:ln w="12700">
-            <a:solidFill>
-              <a:srgbClr val="0068B7"/>
-            </a:solidFill>
-            <a:prstDash val="solid"/>
-          </a:ln>
-        </p:spPr>
-      </p:sp>
-      <p:sp>
-        <p:nvSpPr>
-          <p:cNvPr id="15" name="Shape 13"/>
-          <p:cNvSpPr/>
-          <p:nvPr/>
-        </p:nvSpPr>
-        <p:spPr>
-          <a:xfrm>
-            <a:off x="10287000" y="3108960"/>
-            <a:ext cx="566928" cy="566928"/>
-          </a:xfrm>
-          <a:prstGeom prst="ellipse">
-            <a:avLst/>
-          </a:prstGeom>
-          <a:solidFill>
-            <a:srgbClr val="2F8A28"/>
-          </a:solidFill>
-          <a:ln w="12700">
-            <a:solidFill>
-              <a:srgbClr val="2F8A28"/>
-            </a:solidFill>
-            <a:prstDash val="solid"/>
-          </a:ln>
-        </p:spPr>
+          <p:cNvPr id="14" name="Text 12"/>
+          <p:cNvSpPr/>
+          <p:nvPr/>
+        </p:nvSpPr>
+        <p:spPr>
+          <a:xfrm>
+            <a:off x="7799832" y="2935224"/>
+            <a:ext cx="3145536" cy="256032"/>
+          </a:xfrm>
+          <a:prstGeom prst="rect">
+            <a:avLst/>
+          </a:prstGeom>
+          <a:noFill/>
+          <a:ln/>
+        </p:spPr>
+        <p:txBody>
+          <a:bodyPr wrap="square" lIns="0" tIns="0" rIns="0" bIns="0" rtlCol="0" anchor="ctr"/>
+          <a:lstStyle/>
+          <a:p>
+            <a:pPr indent="0" marL="0">
+              <a:buNone/>
+            </a:pPr>
+            <a:r>
+              <a:rPr lang="en-US" sz="1300" b="1" dirty="0">
+                <a:solidFill>
+                  <a:srgbClr val="0068B7"/>
+                </a:solidFill>
+                <a:latin typeface="Aptos" pitchFamily="34" charset="0"/>
+                <a:ea typeface="Aptos" pitchFamily="34" charset="-122"/>
+                <a:cs typeface="Aptos" pitchFamily="34" charset="-120"/>
+              </a:rPr>
+              <a:t>Concept checkpoints</a:t>
+            </a:r>
+            <a:endParaRPr lang="en-US" sz="1300" dirty="0"/>
+          </a:p>
+        </p:txBody>
+      </p:sp>
+      <p:sp>
+        <p:nvSpPr>
+          <p:cNvPr id="15" name="Text 13"/>
+          <p:cNvSpPr/>
+          <p:nvPr/>
+        </p:nvSpPr>
+        <p:spPr>
+          <a:xfrm>
+            <a:off x="7818120" y="3300984"/>
+            <a:ext cx="3090672" cy="877824"/>
+          </a:xfrm>
+          <a:prstGeom prst="rect">
+            <a:avLst/>
+          </a:prstGeom>
+          <a:noFill/>
+          <a:ln/>
+        </p:spPr>
+        <p:txBody>
+          <a:bodyPr wrap="square" lIns="254" tIns="254" rIns="254" bIns="254" rtlCol="0" anchor="t">
+            <a:normAutofit/>
+          </a:bodyPr>
+          <a:lstStyle/>
+          <a:p>
+            <a:r>
+              <a:rPr lang="en-US" sz="1380" dirty="0">
+                <a:solidFill>
+                  <a:srgbClr val="17364A"/>
+                </a:solidFill>
+                <a:latin typeface="Aptos" pitchFamily="34" charset="0"/>
+                <a:ea typeface="Aptos" pitchFamily="34" charset="-122"/>
+                <a:cs typeface="Aptos" pitchFamily="34" charset="-120"/>
+              </a:rPr>
+              <a:t>AI governance: AI governance is the organized approach an agency uses to direct, review,.</a:t>
+            </a:r>
+            <a:endParaRPr lang="en-US" sz="1380" dirty="0"/>
+          </a:p>
+          <a:p>
+            <a:r>
+              <a:rPr lang="en-US" sz="1380" dirty="0">
+                <a:solidFill>
+                  <a:srgbClr val="17364A"/>
+                </a:solidFill>
+                <a:latin typeface="Aptos" pitchFamily="34" charset="0"/>
+                <a:ea typeface="Aptos" pitchFamily="34" charset="-122"/>
+                <a:cs typeface="Aptos" pitchFamily="34" charset="-120"/>
+              </a:rPr>
+              <a:t>It includes policies, roles, review pathways, decision rights, evidence requirements,.</a:t>
+            </a:r>
+            <a:endParaRPr lang="en-US" sz="1380" dirty="0"/>
+          </a:p>
+          <a:p>
+            <a:r>
+              <a:rPr lang="en-US" sz="1380" dirty="0">
+                <a:solidFill>
+                  <a:srgbClr val="17364A"/>
+                </a:solidFill>
+                <a:latin typeface="Aptos" pitchFamily="34" charset="0"/>
+                <a:ea typeface="Aptos" pitchFamily="34" charset="-122"/>
+                <a:cs typeface="Aptos" pitchFamily="34" charset="-120"/>
+              </a:rPr>
+              <a:t>Governance body: A governance body is the group or structure responsible for reviewing AI.</a:t>
+            </a:r>
+            <a:endParaRPr lang="en-US" sz="1380" dirty="0"/>
+          </a:p>
+        </p:txBody>
       </p:sp>
       <p:sp>
         <p:nvSpPr>
           <p:cNvPr id="16" name="Shape 14"/>
-          <p:cNvSpPr/>
-          <p:nvPr/>
-        </p:nvSpPr>
-        <p:spPr>
-          <a:xfrm>
-            <a:off x="9089136" y="3456432"/>
-            <a:ext cx="566928" cy="566928"/>
-          </a:xfrm>
-          <a:prstGeom prst="ellipse">
-            <a:avLst/>
-          </a:prstGeom>
-          <a:solidFill>
-            <a:srgbClr val="6A4CA3"/>
-          </a:solidFill>
-          <a:ln w="12700">
-            <a:solidFill>
-              <a:srgbClr val="6A4CA3"/>
-            </a:solidFill>
-            <a:prstDash val="solid"/>
-          </a:ln>
-        </p:spPr>
-      </p:sp>
-      <p:sp>
-        <p:nvSpPr>
-          <p:cNvPr id="17" name="Shape 15"/>
-          <p:cNvSpPr/>
-          <p:nvPr/>
-        </p:nvSpPr>
-        <p:spPr>
-          <a:xfrm>
-            <a:off x="8385048" y="3419856"/>
-            <a:ext cx="1975104" cy="0"/>
-          </a:xfrm>
-          <a:prstGeom prst="line">
-            <a:avLst/>
-          </a:prstGeom>
-          <a:noFill/>
-          <a:ln w="25400">
-            <a:solidFill>
-              <a:srgbClr val="8ABBD8"/>
-            </a:solidFill>
-            <a:prstDash val="solid"/>
-          </a:ln>
-        </p:spPr>
-      </p:sp>
-      <p:sp>
-        <p:nvSpPr>
-          <p:cNvPr id="18" name="Shape 16"/>
-          <p:cNvSpPr/>
-          <p:nvPr/>
-        </p:nvSpPr>
-        <p:spPr>
-          <a:xfrm>
-            <a:off x="8202168" y="3630168"/>
-            <a:ext cx="1170432" cy="118872"/>
-          </a:xfrm>
-          <a:prstGeom prst="line">
-            <a:avLst/>
-          </a:prstGeom>
-          <a:noFill/>
-          <a:ln w="25400">
-            <a:solidFill>
-              <a:srgbClr val="8ABBD8"/>
-            </a:solidFill>
-            <a:prstDash val="solid"/>
-          </a:ln>
-        </p:spPr>
-      </p:sp>
-      <p:sp>
-        <p:nvSpPr>
-          <p:cNvPr id="19" name="Shape 17"/>
-          <p:cNvSpPr/>
-          <p:nvPr/>
-        </p:nvSpPr>
-        <p:spPr>
-          <a:xfrm>
-            <a:off x="10543032" y="3630168"/>
-            <a:ext cx="-1170432" cy="118872"/>
-          </a:xfrm>
-          <a:prstGeom prst="line">
-            <a:avLst/>
-          </a:prstGeom>
-          <a:noFill/>
-          <a:ln w="25400">
-            <a:solidFill>
-              <a:srgbClr val="8ABBD8"/>
-            </a:solidFill>
-            <a:prstDash val="solid"/>
-          </a:ln>
-        </p:spPr>
-      </p:sp>
-      <p:sp>
-        <p:nvSpPr>
-          <p:cNvPr id="20" name="Text 18"/>
-          <p:cNvSpPr/>
-          <p:nvPr/>
-        </p:nvSpPr>
-        <p:spPr>
-          <a:xfrm>
-            <a:off x="7863840" y="4069080"/>
-            <a:ext cx="3017520" cy="164592"/>
-          </a:xfrm>
-          <a:prstGeom prst="rect">
-            <a:avLst/>
-          </a:prstGeom>
-          <a:noFill/>
-          <a:ln/>
-        </p:spPr>
-        <p:txBody>
-          <a:bodyPr wrap="square" lIns="0" tIns="0" rIns="0" bIns="0" rtlCol="0" anchor="ctr"/>
-          <a:lstStyle/>
-          <a:p>
-            <a:pPr algn="ctr" indent="0" marL="0">
-              <a:buNone/>
-            </a:pPr>
-            <a:r>
-              <a:rPr lang="en-US" sz="900" b="1" dirty="0">
-                <a:solidFill>
-                  <a:srgbClr val="003A63"/>
-                </a:solidFill>
-                <a:latin typeface="Aptos" pitchFamily="34" charset="0"/>
-                <a:ea typeface="Aptos" pitchFamily="34" charset="-122"/>
-                <a:cs typeface="Aptos" pitchFamily="34" charset="-120"/>
-              </a:rPr>
-              <a:t>Decision rights</a:t>
-            </a:r>
-            <a:endParaRPr lang="en-US" sz="900" dirty="0"/>
-          </a:p>
-        </p:txBody>
-      </p:sp>
-      <p:sp>
-        <p:nvSpPr>
-          <p:cNvPr id="21" name="Shape 19"/>
           <p:cNvSpPr/>
           <p:nvPr/>
         </p:nvSpPr>
@@ -25784,7 +23432,7 @@
       </p:sp>
       <p:sp>
         <p:nvSpPr>
-          <p:cNvPr id="22" name="Text 20"/>
+          <p:cNvPr id="17" name="Text 15"/>
           <p:cNvSpPr/>
           <p:nvPr/>
         </p:nvSpPr>
@@ -25823,7 +23471,7 @@
       </p:sp>
       <p:sp>
         <p:nvSpPr>
-          <p:cNvPr id="23" name="Text 21"/>
+          <p:cNvPr id="18" name="Text 16"/>
           <p:cNvSpPr/>
           <p:nvPr/>
         </p:nvSpPr>
@@ -26331,13 +23979,11 @@
             </a:avLst>
           </a:prstGeom>
           <a:solidFill>
-            <a:srgbClr val="FFFFFF">
-              <a:alpha val="88000"/>
-            </a:srgbClr>
+            <a:srgbClr val="FFFFFF"/>
           </a:solidFill>
           <a:ln w="12700">
             <a:solidFill>
-              <a:srgbClr val="D6E8F2"/>
+              <a:srgbClr val="B9D7E6"/>
             </a:solidFill>
             <a:prstDash val="solid"/>
           </a:ln>
@@ -26345,190 +23991,112 @@
       </p:sp>
       <p:sp>
         <p:nvSpPr>
-          <p:cNvPr id="14" name="Shape 12"/>
-          <p:cNvSpPr/>
-          <p:nvPr/>
-        </p:nvSpPr>
-        <p:spPr>
-          <a:xfrm>
-            <a:off x="7891272" y="3108960"/>
-            <a:ext cx="566928" cy="566928"/>
-          </a:xfrm>
-          <a:prstGeom prst="ellipse">
-            <a:avLst/>
-          </a:prstGeom>
-          <a:solidFill>
-            <a:srgbClr val="0068B7"/>
-          </a:solidFill>
-          <a:ln w="12700">
-            <a:solidFill>
-              <a:srgbClr val="0068B7"/>
-            </a:solidFill>
-            <a:prstDash val="solid"/>
-          </a:ln>
-        </p:spPr>
-      </p:sp>
-      <p:sp>
-        <p:nvSpPr>
-          <p:cNvPr id="15" name="Shape 13"/>
-          <p:cNvSpPr/>
-          <p:nvPr/>
-        </p:nvSpPr>
-        <p:spPr>
-          <a:xfrm>
-            <a:off x="10287000" y="3108960"/>
-            <a:ext cx="566928" cy="566928"/>
-          </a:xfrm>
-          <a:prstGeom prst="ellipse">
-            <a:avLst/>
-          </a:prstGeom>
-          <a:solidFill>
-            <a:srgbClr val="2F8A28"/>
-          </a:solidFill>
-          <a:ln w="12700">
-            <a:solidFill>
-              <a:srgbClr val="2F8A28"/>
-            </a:solidFill>
-            <a:prstDash val="solid"/>
-          </a:ln>
-        </p:spPr>
+          <p:cNvPr id="14" name="Text 12"/>
+          <p:cNvSpPr/>
+          <p:nvPr/>
+        </p:nvSpPr>
+        <p:spPr>
+          <a:xfrm>
+            <a:off x="7799832" y="2935224"/>
+            <a:ext cx="3145536" cy="256032"/>
+          </a:xfrm>
+          <a:prstGeom prst="rect">
+            <a:avLst/>
+          </a:prstGeom>
+          <a:noFill/>
+          <a:ln/>
+        </p:spPr>
+        <p:txBody>
+          <a:bodyPr wrap="square" lIns="0" tIns="0" rIns="0" bIns="0" rtlCol="0" anchor="ctr"/>
+          <a:lstStyle/>
+          <a:p>
+            <a:pPr indent="0" marL="0">
+              <a:buNone/>
+            </a:pPr>
+            <a:r>
+              <a:rPr lang="en-US" sz="1300" b="1" dirty="0">
+                <a:solidFill>
+                  <a:srgbClr val="0068B7"/>
+                </a:solidFill>
+                <a:latin typeface="Aptos" pitchFamily="34" charset="0"/>
+                <a:ea typeface="Aptos" pitchFamily="34" charset="-122"/>
+                <a:cs typeface="Aptos" pitchFamily="34" charset="-120"/>
+              </a:rPr>
+              <a:t>Concept checkpoints</a:t>
+            </a:r>
+            <a:endParaRPr lang="en-US" sz="1300" dirty="0"/>
+          </a:p>
+        </p:txBody>
+      </p:sp>
+      <p:sp>
+        <p:nvSpPr>
+          <p:cNvPr id="15" name="Text 13"/>
+          <p:cNvSpPr/>
+          <p:nvPr/>
+        </p:nvSpPr>
+        <p:spPr>
+          <a:xfrm>
+            <a:off x="7818120" y="3300984"/>
+            <a:ext cx="3090672" cy="877824"/>
+          </a:xfrm>
+          <a:prstGeom prst="rect">
+            <a:avLst/>
+          </a:prstGeom>
+          <a:noFill/>
+          <a:ln/>
+        </p:spPr>
+        <p:txBody>
+          <a:bodyPr wrap="square" lIns="254" tIns="254" rIns="254" bIns="254" rtlCol="0" anchor="t">
+            <a:normAutofit/>
+          </a:bodyPr>
+          <a:lstStyle/>
+          <a:p>
+            <a:r>
+              <a:rPr lang="en-US" sz="1380" dirty="0">
+                <a:solidFill>
+                  <a:srgbClr val="17364A"/>
+                </a:solidFill>
+                <a:latin typeface="Aptos" pitchFamily="34" charset="0"/>
+                <a:ea typeface="Aptos" pitchFamily="34" charset="-122"/>
+                <a:cs typeface="Aptos" pitchFamily="34" charset="-120"/>
+              </a:rPr>
+              <a:t>Human accountability: Human accountability means that a person or accountable role remains.</a:t>
+            </a:r>
+            <a:endParaRPr lang="en-US" sz="1380" dirty="0"/>
+          </a:p>
+          <a:p>
+            <a:r>
+              <a:rPr lang="en-US" sz="1380" dirty="0">
+                <a:solidFill>
+                  <a:srgbClr val="17364A"/>
+                </a:solidFill>
+                <a:latin typeface="Aptos" pitchFamily="34" charset="0"/>
+                <a:ea typeface="Aptos" pitchFamily="34" charset="-122"/>
+                <a:cs typeface="Aptos" pitchFamily="34" charset="-120"/>
+              </a:rPr>
+              <a:t>AI should not become the invisible decision-maker in a public health workflow.</a:t>
+            </a:r>
+            <a:endParaRPr lang="en-US" sz="1380" dirty="0"/>
+          </a:p>
+          <a:p>
+            <a:r>
+              <a:rPr lang="en-US" sz="1380" dirty="0">
+                <a:solidFill>
+                  <a:srgbClr val="17364A"/>
+                </a:solidFill>
+                <a:latin typeface="Aptos" pitchFamily="34" charset="0"/>
+                <a:ea typeface="Aptos" pitchFamily="34" charset="-122"/>
+                <a:cs typeface="Aptos" pitchFamily="34" charset="-120"/>
+              </a:rPr>
+              <a:t>Oversight: Oversight is the ongoing review of AI use after approval.</a:t>
+            </a:r>
+            <a:endParaRPr lang="en-US" sz="1380" dirty="0"/>
+          </a:p>
+        </p:txBody>
       </p:sp>
       <p:sp>
         <p:nvSpPr>
           <p:cNvPr id="16" name="Shape 14"/>
-          <p:cNvSpPr/>
-          <p:nvPr/>
-        </p:nvSpPr>
-        <p:spPr>
-          <a:xfrm>
-            <a:off x="9089136" y="3456432"/>
-            <a:ext cx="566928" cy="566928"/>
-          </a:xfrm>
-          <a:prstGeom prst="ellipse">
-            <a:avLst/>
-          </a:prstGeom>
-          <a:solidFill>
-            <a:srgbClr val="6A4CA3"/>
-          </a:solidFill>
-          <a:ln w="12700">
-            <a:solidFill>
-              <a:srgbClr val="6A4CA3"/>
-            </a:solidFill>
-            <a:prstDash val="solid"/>
-          </a:ln>
-        </p:spPr>
-      </p:sp>
-      <p:sp>
-        <p:nvSpPr>
-          <p:cNvPr id="17" name="Shape 15"/>
-          <p:cNvSpPr/>
-          <p:nvPr/>
-        </p:nvSpPr>
-        <p:spPr>
-          <a:xfrm>
-            <a:off x="8385048" y="3419856"/>
-            <a:ext cx="1975104" cy="0"/>
-          </a:xfrm>
-          <a:prstGeom prst="line">
-            <a:avLst/>
-          </a:prstGeom>
-          <a:noFill/>
-          <a:ln w="25400">
-            <a:solidFill>
-              <a:srgbClr val="8ABBD8"/>
-            </a:solidFill>
-            <a:prstDash val="solid"/>
-          </a:ln>
-        </p:spPr>
-      </p:sp>
-      <p:sp>
-        <p:nvSpPr>
-          <p:cNvPr id="18" name="Shape 16"/>
-          <p:cNvSpPr/>
-          <p:nvPr/>
-        </p:nvSpPr>
-        <p:spPr>
-          <a:xfrm>
-            <a:off x="8202168" y="3630168"/>
-            <a:ext cx="1170432" cy="118872"/>
-          </a:xfrm>
-          <a:prstGeom prst="line">
-            <a:avLst/>
-          </a:prstGeom>
-          <a:noFill/>
-          <a:ln w="25400">
-            <a:solidFill>
-              <a:srgbClr val="8ABBD8"/>
-            </a:solidFill>
-            <a:prstDash val="solid"/>
-          </a:ln>
-        </p:spPr>
-      </p:sp>
-      <p:sp>
-        <p:nvSpPr>
-          <p:cNvPr id="19" name="Shape 17"/>
-          <p:cNvSpPr/>
-          <p:nvPr/>
-        </p:nvSpPr>
-        <p:spPr>
-          <a:xfrm>
-            <a:off x="10543032" y="3630168"/>
-            <a:ext cx="-1170432" cy="118872"/>
-          </a:xfrm>
-          <a:prstGeom prst="line">
-            <a:avLst/>
-          </a:prstGeom>
-          <a:noFill/>
-          <a:ln w="25400">
-            <a:solidFill>
-              <a:srgbClr val="8ABBD8"/>
-            </a:solidFill>
-            <a:prstDash val="solid"/>
-          </a:ln>
-        </p:spPr>
-      </p:sp>
-      <p:sp>
-        <p:nvSpPr>
-          <p:cNvPr id="20" name="Text 18"/>
-          <p:cNvSpPr/>
-          <p:nvPr/>
-        </p:nvSpPr>
-        <p:spPr>
-          <a:xfrm>
-            <a:off x="7863840" y="4069080"/>
-            <a:ext cx="3017520" cy="164592"/>
-          </a:xfrm>
-          <a:prstGeom prst="rect">
-            <a:avLst/>
-          </a:prstGeom>
-          <a:noFill/>
-          <a:ln/>
-        </p:spPr>
-        <p:txBody>
-          <a:bodyPr wrap="square" lIns="0" tIns="0" rIns="0" bIns="0" rtlCol="0" anchor="ctr"/>
-          <a:lstStyle/>
-          <a:p>
-            <a:pPr algn="ctr" indent="0" marL="0">
-              <a:buNone/>
-            </a:pPr>
-            <a:r>
-              <a:rPr lang="en-US" sz="900" b="1" dirty="0">
-                <a:solidFill>
-                  <a:srgbClr val="003A63"/>
-                </a:solidFill>
-                <a:latin typeface="Aptos" pitchFamily="34" charset="0"/>
-                <a:ea typeface="Aptos" pitchFamily="34" charset="-122"/>
-                <a:cs typeface="Aptos" pitchFamily="34" charset="-120"/>
-              </a:rPr>
-              <a:t>Decision rights</a:t>
-            </a:r>
-            <a:endParaRPr lang="en-US" sz="900" dirty="0"/>
-          </a:p>
-        </p:txBody>
-      </p:sp>
-      <p:sp>
-        <p:nvSpPr>
-          <p:cNvPr id="21" name="Shape 19"/>
           <p:cNvSpPr/>
           <p:nvPr/>
         </p:nvSpPr>
@@ -26555,7 +24123,7 @@
       </p:sp>
       <p:sp>
         <p:nvSpPr>
-          <p:cNvPr id="22" name="Text 20"/>
+          <p:cNvPr id="17" name="Text 15"/>
           <p:cNvSpPr/>
           <p:nvPr/>
         </p:nvSpPr>
@@ -26594,7 +24162,7 @@
       </p:sp>
       <p:sp>
         <p:nvSpPr>
-          <p:cNvPr id="23" name="Text 21"/>
+          <p:cNvPr id="18" name="Text 16"/>
           <p:cNvSpPr/>
           <p:nvPr/>
         </p:nvSpPr>

--- a/downloads/presentations/modules/gov-100.pptx
+++ b/downloads/presentations/modules/gov-100.pptx
@@ -4181,49 +4181,58 @@
           <a:ln/>
         </p:spPr>
         <p:txBody>
-          <a:bodyPr wrap="square" lIns="635" tIns="635" rIns="635" bIns="635" rtlCol="0" anchor="t">
+          <a:bodyPr wrap="square" lIns="1016" tIns="1016" rIns="1016" bIns="1016" rtlCol="0" anchor="t">
             <a:normAutofit/>
           </a:bodyPr>
           <a:lstStyle/>
           <a:p>
+            <a:pPr indent="0" marL="0">
+              <a:buNone/>
+            </a:pPr>
             <a:r>
               <a:rPr lang="en-US" sz="2100" dirty="0">
                 <a:solidFill>
-                  <a:srgbClr val="17364A"/>
-                </a:solidFill>
-                <a:latin typeface="Aptos" pitchFamily="34" charset="0"/>
-                <a:ea typeface="Aptos" pitchFamily="34" charset="-122"/>
-                <a:cs typeface="Aptos" pitchFamily="34" charset="-120"/>
-              </a:rPr>
-              <a:t>This module provides national-level training guidance for public health agencies and partners.</a:t>
+                  <a:srgbClr val="003A63"/>
+                </a:solidFill>
+                <a:latin typeface="Aptos" pitchFamily="34" charset="0"/>
+                <a:ea typeface="Aptos" pitchFamily="34" charset="-122"/>
+                <a:cs typeface="Aptos" pitchFamily="34" charset="-120"/>
+              </a:rPr>
+              <a:t>• This module provides national-level training guidance for public health agencies and partners.</a:t>
             </a:r>
             <a:endParaRPr lang="en-US" sz="2100" dirty="0"/>
           </a:p>
           <a:p>
+            <a:pPr indent="0" marL="0">
+              <a:buNone/>
+            </a:pPr>
             <a:r>
               <a:rPr lang="en-US" sz="2100" dirty="0">
                 <a:solidFill>
-                  <a:srgbClr val="17364A"/>
-                </a:solidFill>
-                <a:latin typeface="Aptos" pitchFamily="34" charset="0"/>
-                <a:ea typeface="Aptos" pitchFamily="34" charset="-122"/>
-                <a:cs typeface="Aptos" pitchFamily="34" charset="-120"/>
-              </a:rPr>
-              <a:t>It is not legal advice and does not replace review by agency legal counsel, privacy officers,.</a:t>
+                  <a:srgbClr val="003A63"/>
+                </a:solidFill>
+                <a:latin typeface="Aptos" pitchFamily="34" charset="0"/>
+                <a:ea typeface="Aptos" pitchFamily="34" charset="-122"/>
+                <a:cs typeface="Aptos" pitchFamily="34" charset="-120"/>
+              </a:rPr>
+              <a:t>• It is not legal advice and does not replace review by agency legal counsel, privacy officers,.</a:t>
             </a:r>
             <a:endParaRPr lang="en-US" sz="2100" dirty="0"/>
           </a:p>
           <a:p>
+            <a:pPr indent="0" marL="0">
+              <a:buNone/>
+            </a:pPr>
             <a:r>
               <a:rPr lang="en-US" sz="2100" dirty="0">
                 <a:solidFill>
-                  <a:srgbClr val="17364A"/>
-                </a:solidFill>
-                <a:latin typeface="Aptos" pitchFamily="34" charset="0"/>
-                <a:ea typeface="Aptos" pitchFamily="34" charset="-122"/>
-                <a:cs typeface="Aptos" pitchFamily="34" charset="-120"/>
-              </a:rPr>
-              <a:t>Requirements may vary by state, locality, territory, Tribe, agency, funding source, data-sharing.</a:t>
+                  <a:srgbClr val="003A63"/>
+                </a:solidFill>
+                <a:latin typeface="Aptos" pitchFamily="34" charset="0"/>
+                <a:ea typeface="Aptos" pitchFamily="34" charset="-122"/>
+                <a:cs typeface="Aptos" pitchFamily="34" charset="-120"/>
+              </a:rPr>
+              <a:t>• Requirements may vary by state, locality, territory, Tribe, agency, funding source,.</a:t>
             </a:r>
             <a:endParaRPr lang="en-US" sz="2100" dirty="0"/>
           </a:p>
@@ -4303,17 +4312,17 @@
         </p:nvSpPr>
         <p:spPr>
           <a:xfrm>
-            <a:off x="7799832" y="1828800"/>
-            <a:ext cx="3145536" cy="685800"/>
-          </a:xfrm>
-          <a:prstGeom prst="rect">
-            <a:avLst/>
-          </a:prstGeom>
-          <a:noFill/>
-          <a:ln/>
-        </p:spPr>
-        <p:txBody>
-          <a:bodyPr wrap="square" lIns="0" tIns="0" rIns="0" bIns="0" rtlCol="0" anchor="t">
+            <a:off x="7799832" y="1801368"/>
+            <a:ext cx="3145536" cy="758952"/>
+          </a:xfrm>
+          <a:prstGeom prst="rect">
+            <a:avLst/>
+          </a:prstGeom>
+          <a:noFill/>
+          <a:ln/>
+        </p:spPr>
+        <p:txBody>
+          <a:bodyPr wrap="square" lIns="254" tIns="254" rIns="254" bIns="254" rtlCol="0" anchor="t">
             <a:normAutofit/>
           </a:bodyPr>
           <a:lstStyle/>
@@ -4322,7 +4331,7 @@
               <a:buNone/>
             </a:pPr>
             <a:r>
-              <a:rPr lang="en-US" sz="1550" dirty="0">
+              <a:rPr lang="en-US" sz="1320" dirty="0">
                 <a:solidFill>
                   <a:srgbClr val="17364A"/>
                 </a:solidFill>
@@ -4332,7 +4341,7 @@
               </a:rPr>
               <a:t>This module provides national-level training guidance for public health agencies and partners.</a:t>
             </a:r>
-            <a:endParaRPr lang="en-US" sz="1550" dirty="0"/>
+            <a:endParaRPr lang="en-US" sz="1320" dirty="0"/>
           </a:p>
         </p:txBody>
       </p:sp>
@@ -4420,13 +4429,16 @@
           <a:ln/>
         </p:spPr>
         <p:txBody>
-          <a:bodyPr wrap="square" lIns="254" tIns="254" rIns="254" bIns="254" rtlCol="0" anchor="t">
+          <a:bodyPr wrap="square" lIns="508" tIns="508" rIns="508" bIns="508" rtlCol="0" anchor="t">
             <a:normAutofit/>
           </a:bodyPr>
           <a:lstStyle/>
           <a:p>
-            <a:r>
-              <a:rPr lang="en-US" sz="1380" dirty="0">
+            <a:pPr indent="0" marL="0">
+              <a:buNone/>
+            </a:pPr>
+            <a:r>
+              <a:rPr lang="en-US" sz="1220" dirty="0">
                 <a:solidFill>
                   <a:srgbClr val="17364A"/>
                 </a:solidFill>
@@ -4434,13 +4446,16 @@
                 <a:ea typeface="Aptos" pitchFamily="34" charset="-122"/>
                 <a:cs typeface="Aptos" pitchFamily="34" charset="-120"/>
               </a:rPr>
-              <a:t>It is not legal advice and does not replace review by agency legal counsel, privacy.</a:t>
-            </a:r>
-            <a:endParaRPr lang="en-US" sz="1380" dirty="0"/>
-          </a:p>
-          <a:p>
-            <a:r>
-              <a:rPr lang="en-US" sz="1380" dirty="0">
+              <a:t>It is not legal advice and does not replace review by agency legal.</a:t>
+            </a:r>
+            <a:endParaRPr lang="en-US" sz="1220" dirty="0"/>
+          </a:p>
+          <a:p>
+            <a:pPr indent="0" marL="0">
+              <a:buNone/>
+            </a:pPr>
+            <a:r>
+              <a:rPr lang="en-US" sz="1220" dirty="0">
                 <a:solidFill>
                   <a:srgbClr val="17364A"/>
                 </a:solidFill>
@@ -4448,13 +4463,16 @@
                 <a:ea typeface="Aptos" pitchFamily="34" charset="-122"/>
                 <a:cs typeface="Aptos" pitchFamily="34" charset="-120"/>
               </a:rPr>
-              <a:t>Requirements may vary by state, locality, territory, Tribe, agency, funding source,.</a:t>
-            </a:r>
-            <a:endParaRPr lang="en-US" sz="1380" dirty="0"/>
-          </a:p>
-          <a:p>
-            <a:r>
-              <a:rPr lang="en-US" sz="1380" dirty="0">
+              <a:t>Requirements may vary by state, locality, territory, Tribe,.</a:t>
+            </a:r>
+            <a:endParaRPr lang="en-US" sz="1220" dirty="0"/>
+          </a:p>
+          <a:p>
+            <a:pPr indent="0" marL="0">
+              <a:buNone/>
+            </a:pPr>
+            <a:r>
+              <a:rPr lang="en-US" sz="1220" dirty="0">
                 <a:solidFill>
                   <a:srgbClr val="17364A"/>
                 </a:solidFill>
@@ -4462,9 +4480,9 @@
                 <a:ea typeface="Aptos" pitchFamily="34" charset="-122"/>
                 <a:cs typeface="Aptos" pitchFamily="34" charset="-120"/>
               </a:rPr>
-              <a:t>Learners should use this module to identify the issues that require review and should.</a:t>
-            </a:r>
-            <a:endParaRPr lang="en-US" sz="1380" dirty="0"/>
+              <a:t>Learners should use this module to identify the issues that.</a:t>
+            </a:r>
+            <a:endParaRPr lang="en-US" sz="1220" dirty="0"/>
           </a:p>
         </p:txBody>
       </p:sp>
@@ -4542,17 +4560,17 @@
         </p:nvSpPr>
         <p:spPr>
           <a:xfrm>
-            <a:off x="7799832" y="5001768"/>
-            <a:ext cx="3145536" cy="502920"/>
-          </a:xfrm>
-          <a:prstGeom prst="rect">
-            <a:avLst/>
-          </a:prstGeom>
-          <a:noFill/>
-          <a:ln/>
-        </p:spPr>
-        <p:txBody>
-          <a:bodyPr wrap="square" lIns="0" tIns="0" rIns="0" bIns="0" rtlCol="0" anchor="t">
+            <a:off x="7799832" y="4974336"/>
+            <a:ext cx="3145536" cy="576072"/>
+          </a:xfrm>
+          <a:prstGeom prst="rect">
+            <a:avLst/>
+          </a:prstGeom>
+          <a:noFill/>
+          <a:ln/>
+        </p:spPr>
+        <p:txBody>
+          <a:bodyPr wrap="square" lIns="254" tIns="254" rIns="254" bIns="254" rtlCol="0" anchor="t">
             <a:normAutofit/>
           </a:bodyPr>
           <a:lstStyle/>
@@ -4561,7 +4579,7 @@
               <a:buNone/>
             </a:pPr>
             <a:r>
-              <a:rPr lang="en-US" sz="1550" dirty="0">
+              <a:rPr lang="en-US" sz="1320" dirty="0">
                 <a:solidFill>
                   <a:srgbClr val="17364A"/>
                 </a:solidFill>
@@ -4569,9 +4587,9 @@
                 <a:ea typeface="Aptos" pitchFamily="34" charset="-122"/>
                 <a:cs typeface="Aptos" pitchFamily="34" charset="-120"/>
               </a:rPr>
-              <a:t>Translate this concept into clear decision rights, review steps, documentation expectations, and escalation paths before an AI-supported workflow is approved.</a:t>
-            </a:r>
-            <a:endParaRPr lang="en-US" sz="1550" dirty="0"/>
+              <a:t>Translate this concept into clear decision rights, review steps, documentation expectations, and escalation paths before.</a:t>
+            </a:r>
+            <a:endParaRPr lang="en-US" sz="1320" dirty="0"/>
           </a:p>
         </p:txBody>
       </p:sp>
@@ -4872,49 +4890,58 @@
           <a:ln/>
         </p:spPr>
         <p:txBody>
-          <a:bodyPr wrap="square" lIns="635" tIns="635" rIns="635" bIns="635" rtlCol="0" anchor="t">
+          <a:bodyPr wrap="square" lIns="1016" tIns="1016" rIns="1016" bIns="1016" rtlCol="0" anchor="t">
             <a:normAutofit/>
           </a:bodyPr>
           <a:lstStyle/>
           <a:p>
+            <a:pPr indent="0" marL="0">
+              <a:buNone/>
+            </a:pPr>
             <a:r>
               <a:rPr lang="en-US" sz="2100" dirty="0">
                 <a:solidFill>
-                  <a:srgbClr val="17364A"/>
-                </a:solidFill>
-                <a:latin typeface="Aptos" pitchFamily="34" charset="0"/>
-                <a:ea typeface="Aptos" pitchFamily="34" charset="-122"/>
-                <a:cs typeface="Aptos" pitchFamily="34" charset="-120"/>
-              </a:rPr>
-              <a:t>Public health agencies make decisions that affect people, communities, partners, regulated entities,.</a:t>
+                  <a:srgbClr val="003A63"/>
+                </a:solidFill>
+                <a:latin typeface="Aptos" pitchFamily="34" charset="0"/>
+                <a:ea typeface="Aptos" pitchFamily="34" charset="-122"/>
+                <a:cs typeface="Aptos" pitchFamily="34" charset="-120"/>
+              </a:rPr>
+              <a:t>• Public health agencies make decisions that affect people, communities, partners, regulated.</a:t>
             </a:r>
             <a:endParaRPr lang="en-US" sz="2100" dirty="0"/>
           </a:p>
           <a:p>
+            <a:pPr indent="0" marL="0">
+              <a:buNone/>
+            </a:pPr>
             <a:r>
               <a:rPr lang="en-US" sz="2100" dirty="0">
                 <a:solidFill>
-                  <a:srgbClr val="17364A"/>
-                </a:solidFill>
-                <a:latin typeface="Aptos" pitchFamily="34" charset="0"/>
-                <a:ea typeface="Aptos" pitchFamily="34" charset="-122"/>
-                <a:cs typeface="Aptos" pitchFamily="34" charset="-120"/>
-              </a:rPr>
-              <a:t>AI can help staff work faster and identify patterns, but it can also introduce new risks.</a:t>
+                  <a:srgbClr val="003A63"/>
+                </a:solidFill>
+                <a:latin typeface="Aptos" pitchFamily="34" charset="0"/>
+                <a:ea typeface="Aptos" pitchFamily="34" charset="-122"/>
+                <a:cs typeface="Aptos" pitchFamily="34" charset="-120"/>
+              </a:rPr>
+              <a:t>• AI can help staff work faster and identify patterns, but it can also introduce new risks.</a:t>
             </a:r>
             <a:endParaRPr lang="en-US" sz="2100" dirty="0"/>
           </a:p>
           <a:p>
+            <a:pPr indent="0" marL="0">
+              <a:buNone/>
+            </a:pPr>
             <a:r>
               <a:rPr lang="en-US" sz="2100" dirty="0">
                 <a:solidFill>
-                  <a:srgbClr val="17364A"/>
-                </a:solidFill>
-                <a:latin typeface="Aptos" pitchFamily="34" charset="0"/>
-                <a:ea typeface="Aptos" pitchFamily="34" charset="-122"/>
-                <a:cs typeface="Aptos" pitchFamily="34" charset="-120"/>
-              </a:rPr>
-              <a:t>An AI tool may produce a convincing but incorrect summary, expose protected or sensitive information,.</a:t>
+                  <a:srgbClr val="003A63"/>
+                </a:solidFill>
+                <a:latin typeface="Aptos" pitchFamily="34" charset="0"/>
+                <a:ea typeface="Aptos" pitchFamily="34" charset="-122"/>
+                <a:cs typeface="Aptos" pitchFamily="34" charset="-120"/>
+              </a:rPr>
+              <a:t>• An AI tool may produce a convincing but incorrect summary, expose protected or sensitive.</a:t>
             </a:r>
             <a:endParaRPr lang="en-US" sz="2100" dirty="0"/>
           </a:p>
@@ -4994,17 +5021,17 @@
         </p:nvSpPr>
         <p:spPr>
           <a:xfrm>
-            <a:off x="7799832" y="1828800"/>
-            <a:ext cx="3145536" cy="685800"/>
-          </a:xfrm>
-          <a:prstGeom prst="rect">
-            <a:avLst/>
-          </a:prstGeom>
-          <a:noFill/>
-          <a:ln/>
-        </p:spPr>
-        <p:txBody>
-          <a:bodyPr wrap="square" lIns="0" tIns="0" rIns="0" bIns="0" rtlCol="0" anchor="t">
+            <a:off x="7799832" y="1801368"/>
+            <a:ext cx="3145536" cy="758952"/>
+          </a:xfrm>
+          <a:prstGeom prst="rect">
+            <a:avLst/>
+          </a:prstGeom>
+          <a:noFill/>
+          <a:ln/>
+        </p:spPr>
+        <p:txBody>
+          <a:bodyPr wrap="square" lIns="254" tIns="254" rIns="254" bIns="254" rtlCol="0" anchor="t">
             <a:normAutofit/>
           </a:bodyPr>
           <a:lstStyle/>
@@ -5013,7 +5040,7 @@
               <a:buNone/>
             </a:pPr>
             <a:r>
-              <a:rPr lang="en-US" sz="1550" dirty="0">
+              <a:rPr lang="en-US" sz="1320" dirty="0">
                 <a:solidFill>
                   <a:srgbClr val="17364A"/>
                 </a:solidFill>
@@ -5023,7 +5050,7 @@
               </a:rPr>
               <a:t>Public health agencies make decisions that affect people, communities, partners, regulated entities,.</a:t>
             </a:r>
-            <a:endParaRPr lang="en-US" sz="1550" dirty="0"/>
+            <a:endParaRPr lang="en-US" sz="1320" dirty="0"/>
           </a:p>
         </p:txBody>
       </p:sp>
@@ -5111,13 +5138,16 @@
           <a:ln/>
         </p:spPr>
         <p:txBody>
-          <a:bodyPr wrap="square" lIns="254" tIns="254" rIns="254" bIns="254" rtlCol="0" anchor="t">
+          <a:bodyPr wrap="square" lIns="508" tIns="508" rIns="508" bIns="508" rtlCol="0" anchor="t">
             <a:normAutofit/>
           </a:bodyPr>
           <a:lstStyle/>
           <a:p>
-            <a:r>
-              <a:rPr lang="en-US" sz="1380" dirty="0">
+            <a:pPr indent="0" marL="0">
+              <a:buNone/>
+            </a:pPr>
+            <a:r>
+              <a:rPr lang="en-US" sz="1220" dirty="0">
                 <a:solidFill>
                   <a:srgbClr val="17364A"/>
                 </a:solidFill>
@@ -5125,13 +5155,16 @@
                 <a:ea typeface="Aptos" pitchFamily="34" charset="-122"/>
                 <a:cs typeface="Aptos" pitchFamily="34" charset="-120"/>
               </a:rPr>
-              <a:t>Public health agencies make decisions that affect people, communities, partners, regulated.</a:t>
-            </a:r>
-            <a:endParaRPr lang="en-US" sz="1380" dirty="0"/>
-          </a:p>
-          <a:p>
-            <a:r>
-              <a:rPr lang="en-US" sz="1380" dirty="0">
+              <a:t>Public health agencies make decisions that affect people,.</a:t>
+            </a:r>
+            <a:endParaRPr lang="en-US" sz="1220" dirty="0"/>
+          </a:p>
+          <a:p>
+            <a:pPr indent="0" marL="0">
+              <a:buNone/>
+            </a:pPr>
+            <a:r>
+              <a:rPr lang="en-US" sz="1220" dirty="0">
                 <a:solidFill>
                   <a:srgbClr val="17364A"/>
                 </a:solidFill>
@@ -5139,13 +5172,16 @@
                 <a:ea typeface="Aptos" pitchFamily="34" charset="-122"/>
                 <a:cs typeface="Aptos" pitchFamily="34" charset="-120"/>
               </a:rPr>
-              <a:t>An AI tool may produce a convincing but incorrect summary, expose protected or sensitive.</a:t>
-            </a:r>
-            <a:endParaRPr lang="en-US" sz="1380" dirty="0"/>
-          </a:p>
-          <a:p>
-            <a:r>
-              <a:rPr lang="en-US" sz="1380" dirty="0">
+              <a:t>An AI tool may produce a convincing but incorrect summary, expose.</a:t>
+            </a:r>
+            <a:endParaRPr lang="en-US" sz="1220" dirty="0"/>
+          </a:p>
+          <a:p>
+            <a:pPr indent="0" marL="0">
+              <a:buNone/>
+            </a:pPr>
+            <a:r>
+              <a:rPr lang="en-US" sz="1220" dirty="0">
                 <a:solidFill>
                   <a:srgbClr val="17364A"/>
                 </a:solidFill>
@@ -5153,9 +5189,9 @@
                 <a:ea typeface="Aptos" pitchFamily="34" charset="-122"/>
                 <a:cs typeface="Aptos" pitchFamily="34" charset="-120"/>
               </a:rPr>
-              <a:t>Governance creates a way to identify these risks before they become routine practice.</a:t>
-            </a:r>
-            <a:endParaRPr lang="en-US" sz="1380" dirty="0"/>
+              <a:t>Governance creates a way to identify these risks before they.</a:t>
+            </a:r>
+            <a:endParaRPr lang="en-US" sz="1220" dirty="0"/>
           </a:p>
         </p:txBody>
       </p:sp>
@@ -5233,17 +5269,17 @@
         </p:nvSpPr>
         <p:spPr>
           <a:xfrm>
-            <a:off x="7799832" y="5001768"/>
-            <a:ext cx="3145536" cy="502920"/>
-          </a:xfrm>
-          <a:prstGeom prst="rect">
-            <a:avLst/>
-          </a:prstGeom>
-          <a:noFill/>
-          <a:ln/>
-        </p:spPr>
-        <p:txBody>
-          <a:bodyPr wrap="square" lIns="0" tIns="0" rIns="0" bIns="0" rtlCol="0" anchor="t">
+            <a:off x="7799832" y="4974336"/>
+            <a:ext cx="3145536" cy="576072"/>
+          </a:xfrm>
+          <a:prstGeom prst="rect">
+            <a:avLst/>
+          </a:prstGeom>
+          <a:noFill/>
+          <a:ln/>
+        </p:spPr>
+        <p:txBody>
+          <a:bodyPr wrap="square" lIns="254" tIns="254" rIns="254" bIns="254" rtlCol="0" anchor="t">
             <a:normAutofit/>
           </a:bodyPr>
           <a:lstStyle/>
@@ -5252,7 +5288,7 @@
               <a:buNone/>
             </a:pPr>
             <a:r>
-              <a:rPr lang="en-US" sz="1550" dirty="0">
+              <a:rPr lang="en-US" sz="1320" dirty="0">
                 <a:solidFill>
                   <a:srgbClr val="17364A"/>
                 </a:solidFill>
@@ -5260,9 +5296,9 @@
                 <a:ea typeface="Aptos" pitchFamily="34" charset="-122"/>
                 <a:cs typeface="Aptos" pitchFamily="34" charset="-120"/>
               </a:rPr>
-              <a:t>Translate this concept into clear decision rights, review steps, documentation expectations, and escalation paths before an AI-supported workflow is approved.</a:t>
-            </a:r>
-            <a:endParaRPr lang="en-US" sz="1550" dirty="0"/>
+              <a:t>Translate this concept into clear decision rights, review steps, documentation expectations, and escalation paths before.</a:t>
+            </a:r>
+            <a:endParaRPr lang="en-US" sz="1320" dirty="0"/>
           </a:p>
         </p:txBody>
       </p:sp>
@@ -5563,49 +5599,58 @@
           <a:ln/>
         </p:spPr>
         <p:txBody>
-          <a:bodyPr wrap="square" lIns="635" tIns="635" rIns="635" bIns="635" rtlCol="0" anchor="t">
+          <a:bodyPr wrap="square" lIns="1016" tIns="1016" rIns="1016" bIns="1016" rtlCol="0" anchor="t">
             <a:normAutofit/>
           </a:bodyPr>
           <a:lstStyle/>
           <a:p>
+            <a:pPr indent="0" marL="0">
+              <a:buNone/>
+            </a:pPr>
             <a:r>
               <a:rPr lang="en-US" sz="2100" dirty="0">
                 <a:solidFill>
-                  <a:srgbClr val="17364A"/>
-                </a:solidFill>
-                <a:latin typeface="Aptos" pitchFamily="34" charset="0"/>
-                <a:ea typeface="Aptos" pitchFamily="34" charset="-122"/>
-                <a:cs typeface="Aptos" pitchFamily="34" charset="-120"/>
-              </a:rPr>
-              <a:t>For public health, governance must connect technology decisions to mission and authority.</a:t>
+                  <a:srgbClr val="003A63"/>
+                </a:solidFill>
+                <a:latin typeface="Aptos" pitchFamily="34" charset="0"/>
+                <a:ea typeface="Aptos" pitchFamily="34" charset="-122"/>
+                <a:cs typeface="Aptos" pitchFamily="34" charset="-120"/>
+              </a:rPr>
+              <a:t>• For public health, governance must connect technology decisions to mission and authority.</a:t>
             </a:r>
             <a:endParaRPr lang="en-US" sz="2100" dirty="0"/>
           </a:p>
           <a:p>
+            <a:pPr indent="0" marL="0">
+              <a:buNone/>
+            </a:pPr>
             <a:r>
               <a:rPr lang="en-US" sz="2100" dirty="0">
                 <a:solidFill>
-                  <a:srgbClr val="17364A"/>
-                </a:solidFill>
-                <a:latin typeface="Aptos" pitchFamily="34" charset="0"/>
-                <a:ea typeface="Aptos" pitchFamily="34" charset="-122"/>
-                <a:cs typeface="Aptos" pitchFamily="34" charset="-120"/>
-              </a:rPr>
-              <a:t>A technically impressive tool is not enough.</a:t>
+                  <a:srgbClr val="003A63"/>
+                </a:solidFill>
+                <a:latin typeface="Aptos" pitchFamily="34" charset="0"/>
+                <a:ea typeface="Aptos" pitchFamily="34" charset="-122"/>
+                <a:cs typeface="Aptos" pitchFamily="34" charset="-120"/>
+              </a:rPr>
+              <a:t>• A technically impressive tool is not enough.</a:t>
             </a:r>
             <a:endParaRPr lang="en-US" sz="2100" dirty="0"/>
           </a:p>
           <a:p>
+            <a:pPr indent="0" marL="0">
+              <a:buNone/>
+            </a:pPr>
             <a:r>
               <a:rPr lang="en-US" sz="2100" dirty="0">
                 <a:solidFill>
-                  <a:srgbClr val="17364A"/>
-                </a:solidFill>
-                <a:latin typeface="Aptos" pitchFamily="34" charset="0"/>
-                <a:ea typeface="Aptos" pitchFamily="34" charset="-122"/>
-                <a:cs typeface="Aptos" pitchFamily="34" charset="-120"/>
-              </a:rPr>
-              <a:t>The agency must ask whether the tool serves a legitimate public health purpose, uses appropriate data,.</a:t>
+                  <a:srgbClr val="003A63"/>
+                </a:solidFill>
+                <a:latin typeface="Aptos" pitchFamily="34" charset="0"/>
+                <a:ea typeface="Aptos" pitchFamily="34" charset="-122"/>
+                <a:cs typeface="Aptos" pitchFamily="34" charset="-120"/>
+              </a:rPr>
+              <a:t>• The agency must ask whether the tool serves a legitimate public health purpose, uses.</a:t>
             </a:r>
             <a:endParaRPr lang="en-US" sz="2100" dirty="0"/>
           </a:p>
@@ -5685,17 +5730,17 @@
         </p:nvSpPr>
         <p:spPr>
           <a:xfrm>
-            <a:off x="7799832" y="1828800"/>
-            <a:ext cx="3145536" cy="685800"/>
-          </a:xfrm>
-          <a:prstGeom prst="rect">
-            <a:avLst/>
-          </a:prstGeom>
-          <a:noFill/>
-          <a:ln/>
-        </p:spPr>
-        <p:txBody>
-          <a:bodyPr wrap="square" lIns="0" tIns="0" rIns="0" bIns="0" rtlCol="0" anchor="t">
+            <a:off x="7799832" y="1801368"/>
+            <a:ext cx="3145536" cy="758952"/>
+          </a:xfrm>
+          <a:prstGeom prst="rect">
+            <a:avLst/>
+          </a:prstGeom>
+          <a:noFill/>
+          <a:ln/>
+        </p:spPr>
+        <p:txBody>
+          <a:bodyPr wrap="square" lIns="254" tIns="254" rIns="254" bIns="254" rtlCol="0" anchor="t">
             <a:normAutofit/>
           </a:bodyPr>
           <a:lstStyle/>
@@ -5704,7 +5749,7 @@
               <a:buNone/>
             </a:pPr>
             <a:r>
-              <a:rPr lang="en-US" sz="1550" dirty="0">
+              <a:rPr lang="en-US" sz="1320" dirty="0">
                 <a:solidFill>
                   <a:srgbClr val="17364A"/>
                 </a:solidFill>
@@ -5714,7 +5759,7 @@
               </a:rPr>
               <a:t>For public health, governance must connect technology decisions to mission and authority.</a:t>
             </a:r>
-            <a:endParaRPr lang="en-US" sz="1550" dirty="0"/>
+            <a:endParaRPr lang="en-US" sz="1320" dirty="0"/>
           </a:p>
         </p:txBody>
       </p:sp>
@@ -5802,13 +5847,16 @@
           <a:ln/>
         </p:spPr>
         <p:txBody>
-          <a:bodyPr wrap="square" lIns="254" tIns="254" rIns="254" bIns="254" rtlCol="0" anchor="t">
+          <a:bodyPr wrap="square" lIns="508" tIns="508" rIns="508" bIns="508" rtlCol="0" anchor="t">
             <a:normAutofit/>
           </a:bodyPr>
           <a:lstStyle/>
           <a:p>
-            <a:r>
-              <a:rPr lang="en-US" sz="1380" dirty="0">
+            <a:pPr indent="0" marL="0">
+              <a:buNone/>
+            </a:pPr>
+            <a:r>
+              <a:rPr lang="en-US" sz="1220" dirty="0">
                 <a:solidFill>
                   <a:srgbClr val="17364A"/>
                 </a:solidFill>
@@ -5816,13 +5864,16 @@
                 <a:ea typeface="Aptos" pitchFamily="34" charset="-122"/>
                 <a:cs typeface="Aptos" pitchFamily="34" charset="-120"/>
               </a:rPr>
-              <a:t>For public health, governance must connect technology decisions to mission and authority.</a:t>
-            </a:r>
-            <a:endParaRPr lang="en-US" sz="1380" dirty="0"/>
-          </a:p>
-          <a:p>
-            <a:r>
-              <a:rPr lang="en-US" sz="1380" dirty="0">
+              <a:t>For public health, governance must connect technology decisions to.</a:t>
+            </a:r>
+            <a:endParaRPr lang="en-US" sz="1220" dirty="0"/>
+          </a:p>
+          <a:p>
+            <a:pPr indent="0" marL="0">
+              <a:buNone/>
+            </a:pPr>
+            <a:r>
+              <a:rPr lang="en-US" sz="1220" dirty="0">
                 <a:solidFill>
                   <a:srgbClr val="17364A"/>
                 </a:solidFill>
@@ -5832,11 +5883,14 @@
               </a:rPr>
               <a:t>A technically impressive tool is not enough.</a:t>
             </a:r>
-            <a:endParaRPr lang="en-US" sz="1380" dirty="0"/>
-          </a:p>
-          <a:p>
-            <a:r>
-              <a:rPr lang="en-US" sz="1380" dirty="0">
+            <a:endParaRPr lang="en-US" sz="1220" dirty="0"/>
+          </a:p>
+          <a:p>
+            <a:pPr indent="0" marL="0">
+              <a:buNone/>
+            </a:pPr>
+            <a:r>
+              <a:rPr lang="en-US" sz="1220" dirty="0">
                 <a:solidFill>
                   <a:srgbClr val="17364A"/>
                 </a:solidFill>
@@ -5844,9 +5898,9 @@
                 <a:ea typeface="Aptos" pitchFamily="34" charset="-122"/>
                 <a:cs typeface="Aptos" pitchFamily="34" charset="-120"/>
               </a:rPr>
-              <a:t>The agency must ask whether the tool serves a legitimate public health purpose, uses.</a:t>
-            </a:r>
-            <a:endParaRPr lang="en-US" sz="1380" dirty="0"/>
+              <a:t>The agency must ask whether the tool serves a legitimate public.</a:t>
+            </a:r>
+            <a:endParaRPr lang="en-US" sz="1220" dirty="0"/>
           </a:p>
         </p:txBody>
       </p:sp>
@@ -5924,17 +5978,17 @@
         </p:nvSpPr>
         <p:spPr>
           <a:xfrm>
-            <a:off x="7799832" y="5001768"/>
-            <a:ext cx="3145536" cy="502920"/>
-          </a:xfrm>
-          <a:prstGeom prst="rect">
-            <a:avLst/>
-          </a:prstGeom>
-          <a:noFill/>
-          <a:ln/>
-        </p:spPr>
-        <p:txBody>
-          <a:bodyPr wrap="square" lIns="0" tIns="0" rIns="0" bIns="0" rtlCol="0" anchor="t">
+            <a:off x="7799832" y="4974336"/>
+            <a:ext cx="3145536" cy="576072"/>
+          </a:xfrm>
+          <a:prstGeom prst="rect">
+            <a:avLst/>
+          </a:prstGeom>
+          <a:noFill/>
+          <a:ln/>
+        </p:spPr>
+        <p:txBody>
+          <a:bodyPr wrap="square" lIns="254" tIns="254" rIns="254" bIns="254" rtlCol="0" anchor="t">
             <a:normAutofit/>
           </a:bodyPr>
           <a:lstStyle/>
@@ -5943,7 +5997,7 @@
               <a:buNone/>
             </a:pPr>
             <a:r>
-              <a:rPr lang="en-US" sz="1550" dirty="0">
+              <a:rPr lang="en-US" sz="1320" dirty="0">
                 <a:solidFill>
                   <a:srgbClr val="17364A"/>
                 </a:solidFill>
@@ -5951,9 +6005,9 @@
                 <a:ea typeface="Aptos" pitchFamily="34" charset="-122"/>
                 <a:cs typeface="Aptos" pitchFamily="34" charset="-120"/>
               </a:rPr>
-              <a:t>Translate this concept into clear decision rights, review steps, documentation expectations, and escalation paths before an AI-supported workflow is approved.</a:t>
-            </a:r>
-            <a:endParaRPr lang="en-US" sz="1550" dirty="0"/>
+              <a:t>Translate this concept into clear decision rights, review steps, documentation expectations, and escalation paths before.</a:t>
+            </a:r>
+            <a:endParaRPr lang="en-US" sz="1320" dirty="0"/>
           </a:p>
         </p:txBody>
       </p:sp>
@@ -6254,49 +6308,58 @@
           <a:ln/>
         </p:spPr>
         <p:txBody>
-          <a:bodyPr wrap="square" lIns="635" tIns="635" rIns="635" bIns="635" rtlCol="0" anchor="t">
+          <a:bodyPr wrap="square" lIns="1016" tIns="1016" rIns="1016" bIns="1016" rtlCol="0" anchor="t">
             <a:normAutofit/>
           </a:bodyPr>
           <a:lstStyle/>
           <a:p>
+            <a:pPr indent="0" marL="0">
+              <a:buNone/>
+            </a:pPr>
             <a:r>
               <a:rPr lang="en-US" sz="2100" dirty="0">
                 <a:solidFill>
-                  <a:srgbClr val="17364A"/>
-                </a:solidFill>
-                <a:latin typeface="Aptos" pitchFamily="34" charset="0"/>
-                <a:ea typeface="Aptos" pitchFamily="34" charset="-122"/>
-                <a:cs typeface="Aptos" pitchFamily="34" charset="-120"/>
-              </a:rPr>
-              <a:t>A local health department wants to use a generative AI tool to help staff summarize long community.</a:t>
+                  <a:srgbClr val="003A63"/>
+                </a:solidFill>
+                <a:latin typeface="Aptos" pitchFamily="34" charset="0"/>
+                <a:ea typeface="Aptos" pitchFamily="34" charset="-122"/>
+                <a:cs typeface="Aptos" pitchFamily="34" charset="-120"/>
+              </a:rPr>
+              <a:t>• A local health department wants to use a generative AI tool to help staff summarize long.</a:t>
             </a:r>
             <a:endParaRPr lang="en-US" sz="2100" dirty="0"/>
           </a:p>
           <a:p>
+            <a:pPr indent="0" marL="0">
+              <a:buNone/>
+            </a:pPr>
             <a:r>
               <a:rPr lang="en-US" sz="2100" dirty="0">
                 <a:solidFill>
-                  <a:srgbClr val="17364A"/>
-                </a:solidFill>
-                <a:latin typeface="Aptos" pitchFamily="34" charset="0"/>
-                <a:ea typeface="Aptos" pitchFamily="34" charset="-122"/>
-                <a:cs typeface="Aptos" pitchFamily="34" charset="-120"/>
-              </a:rPr>
-              <a:t>The goal is to identify common themes related to access to mobile vaccination clinics, language needs,.</a:t>
+                  <a:srgbClr val="003A63"/>
+                </a:solidFill>
+                <a:latin typeface="Aptos" pitchFamily="34" charset="0"/>
+                <a:ea typeface="Aptos" pitchFamily="34" charset="-122"/>
+                <a:cs typeface="Aptos" pitchFamily="34" charset="-120"/>
+              </a:rPr>
+              <a:t>• The goal is to identify common themes related to access to mobile vaccination clinics,.</a:t>
             </a:r>
             <a:endParaRPr lang="en-US" sz="2100" dirty="0"/>
           </a:p>
           <a:p>
+            <a:pPr indent="0" marL="0">
+              <a:buNone/>
+            </a:pPr>
             <a:r>
               <a:rPr lang="en-US" sz="2100" dirty="0">
                 <a:solidFill>
-                  <a:srgbClr val="17364A"/>
-                </a:solidFill>
-                <a:latin typeface="Aptos" pitchFamily="34" charset="0"/>
-                <a:ea typeface="Aptos" pitchFamily="34" charset="-122"/>
-                <a:cs typeface="Aptos" pitchFamily="34" charset="-120"/>
-              </a:rPr>
-              <a:t>Program staff see the tool as a way to save time.</a:t>
+                  <a:srgbClr val="003A63"/>
+                </a:solidFill>
+                <a:latin typeface="Aptos" pitchFamily="34" charset="0"/>
+                <a:ea typeface="Aptos" pitchFamily="34" charset="-122"/>
+                <a:cs typeface="Aptos" pitchFamily="34" charset="-120"/>
+              </a:rPr>
+              <a:t>• Program staff see the tool as a way to save time.</a:t>
             </a:r>
             <a:endParaRPr lang="en-US" sz="2100" dirty="0"/>
           </a:p>
@@ -6376,17 +6439,17 @@
         </p:nvSpPr>
         <p:spPr>
           <a:xfrm>
-            <a:off x="7799832" y="1828800"/>
-            <a:ext cx="3145536" cy="685800"/>
-          </a:xfrm>
-          <a:prstGeom prst="rect">
-            <a:avLst/>
-          </a:prstGeom>
-          <a:noFill/>
-          <a:ln/>
-        </p:spPr>
-        <p:txBody>
-          <a:bodyPr wrap="square" lIns="0" tIns="0" rIns="0" bIns="0" rtlCol="0" anchor="t">
+            <a:off x="7799832" y="1801368"/>
+            <a:ext cx="3145536" cy="758952"/>
+          </a:xfrm>
+          <a:prstGeom prst="rect">
+            <a:avLst/>
+          </a:prstGeom>
+          <a:noFill/>
+          <a:ln/>
+        </p:spPr>
+        <p:txBody>
+          <a:bodyPr wrap="square" lIns="254" tIns="254" rIns="254" bIns="254" rtlCol="0" anchor="t">
             <a:normAutofit/>
           </a:bodyPr>
           <a:lstStyle/>
@@ -6395,7 +6458,7 @@
               <a:buNone/>
             </a:pPr>
             <a:r>
-              <a:rPr lang="en-US" sz="1550" dirty="0">
+              <a:rPr lang="en-US" sz="1320" dirty="0">
                 <a:solidFill>
                   <a:srgbClr val="17364A"/>
                 </a:solidFill>
@@ -6405,7 +6468,7 @@
               </a:rPr>
               <a:t>A local health department wants to use a generative AI tool to help staff summarize long community.</a:t>
             </a:r>
-            <a:endParaRPr lang="en-US" sz="1550" dirty="0"/>
+            <a:endParaRPr lang="en-US" sz="1320" dirty="0"/>
           </a:p>
         </p:txBody>
       </p:sp>
@@ -6493,13 +6556,16 @@
           <a:ln/>
         </p:spPr>
         <p:txBody>
-          <a:bodyPr wrap="square" lIns="254" tIns="254" rIns="254" bIns="254" rtlCol="0" anchor="t">
+          <a:bodyPr wrap="square" lIns="508" tIns="508" rIns="508" bIns="508" rtlCol="0" anchor="t">
             <a:normAutofit/>
           </a:bodyPr>
           <a:lstStyle/>
           <a:p>
-            <a:r>
-              <a:rPr lang="en-US" sz="1380" dirty="0">
+            <a:pPr indent="0" marL="0">
+              <a:buNone/>
+            </a:pPr>
+            <a:r>
+              <a:rPr lang="en-US" sz="1220" dirty="0">
                 <a:solidFill>
                   <a:srgbClr val="17364A"/>
                 </a:solidFill>
@@ -6507,13 +6573,16 @@
                 <a:ea typeface="Aptos" pitchFamily="34" charset="-122"/>
                 <a:cs typeface="Aptos" pitchFamily="34" charset="-120"/>
               </a:rPr>
-              <a:t>A local health department wants to use a generative AI tool to help staff summarize long.</a:t>
-            </a:r>
-            <a:endParaRPr lang="en-US" sz="1380" dirty="0"/>
-          </a:p>
-          <a:p>
-            <a:r>
-              <a:rPr lang="en-US" sz="1380" dirty="0">
+              <a:t>A local health department wants to use a generative AI tool to.</a:t>
+            </a:r>
+            <a:endParaRPr lang="en-US" sz="1220" dirty="0"/>
+          </a:p>
+          <a:p>
+            <a:pPr indent="0" marL="0">
+              <a:buNone/>
+            </a:pPr>
+            <a:r>
+              <a:rPr lang="en-US" sz="1220" dirty="0">
                 <a:solidFill>
                   <a:srgbClr val="17364A"/>
                 </a:solidFill>
@@ -6521,13 +6590,16 @@
                 <a:ea typeface="Aptos" pitchFamily="34" charset="-122"/>
                 <a:cs typeface="Aptos" pitchFamily="34" charset="-120"/>
               </a:rPr>
-              <a:t>The goal is to identify common themes related to access to mobile vaccination clinics,.</a:t>
-            </a:r>
-            <a:endParaRPr lang="en-US" sz="1380" dirty="0"/>
-          </a:p>
-          <a:p>
-            <a:r>
-              <a:rPr lang="en-US" sz="1380" dirty="0">
+              <a:t>The goal is to identify common themes related to access to mobile.</a:t>
+            </a:r>
+            <a:endParaRPr lang="en-US" sz="1220" dirty="0"/>
+          </a:p>
+          <a:p>
+            <a:pPr indent="0" marL="0">
+              <a:buNone/>
+            </a:pPr>
+            <a:r>
+              <a:rPr lang="en-US" sz="1220" dirty="0">
                 <a:solidFill>
                   <a:srgbClr val="17364A"/>
                 </a:solidFill>
@@ -6537,7 +6609,7 @@
               </a:rPr>
               <a:t>Communications staff want to use the themes in a public report.</a:t>
             </a:r>
-            <a:endParaRPr lang="en-US" sz="1380" dirty="0"/>
+            <a:endParaRPr lang="en-US" sz="1220" dirty="0"/>
           </a:p>
         </p:txBody>
       </p:sp>
@@ -6615,17 +6687,17 @@
         </p:nvSpPr>
         <p:spPr>
           <a:xfrm>
-            <a:off x="7799832" y="5001768"/>
-            <a:ext cx="3145536" cy="502920"/>
-          </a:xfrm>
-          <a:prstGeom prst="rect">
-            <a:avLst/>
-          </a:prstGeom>
-          <a:noFill/>
-          <a:ln/>
-        </p:spPr>
-        <p:txBody>
-          <a:bodyPr wrap="square" lIns="0" tIns="0" rIns="0" bIns="0" rtlCol="0" anchor="t">
+            <a:off x="7799832" y="4974336"/>
+            <a:ext cx="3145536" cy="576072"/>
+          </a:xfrm>
+          <a:prstGeom prst="rect">
+            <a:avLst/>
+          </a:prstGeom>
+          <a:noFill/>
+          <a:ln/>
+        </p:spPr>
+        <p:txBody>
+          <a:bodyPr wrap="square" lIns="254" tIns="254" rIns="254" bIns="254" rtlCol="0" anchor="t">
             <a:normAutofit/>
           </a:bodyPr>
           <a:lstStyle/>
@@ -6634,7 +6706,7 @@
               <a:buNone/>
             </a:pPr>
             <a:r>
-              <a:rPr lang="en-US" sz="1550" dirty="0">
+              <a:rPr lang="en-US" sz="1320" dirty="0">
                 <a:solidFill>
                   <a:srgbClr val="17364A"/>
                 </a:solidFill>
@@ -6642,9 +6714,9 @@
                 <a:ea typeface="Aptos" pitchFamily="34" charset="-122"/>
                 <a:cs typeface="Aptos" pitchFamily="34" charset="-120"/>
               </a:rPr>
-              <a:t>Translate this concept into clear decision rights, review steps, documentation expectations, and escalation paths before an AI-supported workflow is approved.</a:t>
-            </a:r>
-            <a:endParaRPr lang="en-US" sz="1550" dirty="0"/>
+              <a:t>Translate this concept into clear decision rights, review steps, documentation expectations, and escalation paths before.</a:t>
+            </a:r>
+            <a:endParaRPr lang="en-US" sz="1320" dirty="0"/>
           </a:p>
         </p:txBody>
       </p:sp>
@@ -6945,49 +7017,58 @@
           <a:ln/>
         </p:spPr>
         <p:txBody>
-          <a:bodyPr wrap="square" lIns="635" tIns="635" rIns="635" bIns="635" rtlCol="0" anchor="t">
+          <a:bodyPr wrap="square" lIns="1016" tIns="1016" rIns="1016" bIns="1016" rtlCol="0" anchor="t">
             <a:normAutofit/>
           </a:bodyPr>
           <a:lstStyle/>
           <a:p>
+            <a:pPr indent="0" marL="0">
+              <a:buNone/>
+            </a:pPr>
             <a:r>
               <a:rPr lang="en-US" sz="2100" dirty="0">
                 <a:solidFill>
-                  <a:srgbClr val="17364A"/>
-                </a:solidFill>
-                <a:latin typeface="Aptos" pitchFamily="34" charset="0"/>
-                <a:ea typeface="Aptos" pitchFamily="34" charset="-122"/>
-                <a:cs typeface="Aptos" pitchFamily="34" charset="-120"/>
-              </a:rPr>
-              <a:t>The example shows that governance is not only for technical teams.</a:t>
+                  <a:srgbClr val="003A63"/>
+                </a:solidFill>
+                <a:latin typeface="Aptos" pitchFamily="34" charset="0"/>
+                <a:ea typeface="Aptos" pitchFamily="34" charset="-122"/>
+                <a:cs typeface="Aptos" pitchFamily="34" charset="-120"/>
+              </a:rPr>
+              <a:t>• The example shows that governance is not only for technical teams.</a:t>
             </a:r>
             <a:endParaRPr lang="en-US" sz="2100" dirty="0"/>
           </a:p>
           <a:p>
+            <a:pPr indent="0" marL="0">
+              <a:buNone/>
+            </a:pPr>
             <a:r>
               <a:rPr lang="en-US" sz="2100" dirty="0">
                 <a:solidFill>
-                  <a:srgbClr val="17364A"/>
-                </a:solidFill>
-                <a:latin typeface="Aptos" pitchFamily="34" charset="0"/>
-                <a:ea typeface="Aptos" pitchFamily="34" charset="-122"/>
-                <a:cs typeface="Aptos" pitchFamily="34" charset="-120"/>
-              </a:rPr>
-              <a:t>Program staff define the purpose and workflow.</a:t>
+                  <a:srgbClr val="003A63"/>
+                </a:solidFill>
+                <a:latin typeface="Aptos" pitchFamily="34" charset="0"/>
+                <a:ea typeface="Aptos" pitchFamily="34" charset="-122"/>
+                <a:cs typeface="Aptos" pitchFamily="34" charset="-120"/>
+              </a:rPr>
+              <a:t>• Program staff define the purpose and workflow.</a:t>
             </a:r>
             <a:endParaRPr lang="en-US" sz="2100" dirty="0"/>
           </a:p>
           <a:p>
+            <a:pPr indent="0" marL="0">
+              <a:buNone/>
+            </a:pPr>
             <a:r>
               <a:rPr lang="en-US" sz="2100" dirty="0">
                 <a:solidFill>
-                  <a:srgbClr val="17364A"/>
-                </a:solidFill>
-                <a:latin typeface="Aptos" pitchFamily="34" charset="0"/>
-                <a:ea typeface="Aptos" pitchFamily="34" charset="-122"/>
-                <a:cs typeface="Aptos" pitchFamily="34" charset="-120"/>
-              </a:rPr>
-              <a:t>Data and privacy staff assess what may be entered into a tool.</a:t>
+                  <a:srgbClr val="003A63"/>
+                </a:solidFill>
+                <a:latin typeface="Aptos" pitchFamily="34" charset="0"/>
+                <a:ea typeface="Aptos" pitchFamily="34" charset="-122"/>
+                <a:cs typeface="Aptos" pitchFamily="34" charset="-120"/>
+              </a:rPr>
+              <a:t>• Data and privacy staff assess what may be entered into a tool.</a:t>
             </a:r>
             <a:endParaRPr lang="en-US" sz="2100" dirty="0"/>
           </a:p>
@@ -7067,17 +7148,17 @@
         </p:nvSpPr>
         <p:spPr>
           <a:xfrm>
-            <a:off x="7799832" y="1828800"/>
-            <a:ext cx="3145536" cy="685800"/>
-          </a:xfrm>
-          <a:prstGeom prst="rect">
-            <a:avLst/>
-          </a:prstGeom>
-          <a:noFill/>
-          <a:ln/>
-        </p:spPr>
-        <p:txBody>
-          <a:bodyPr wrap="square" lIns="0" tIns="0" rIns="0" bIns="0" rtlCol="0" anchor="t">
+            <a:off x="7799832" y="1801368"/>
+            <a:ext cx="3145536" cy="758952"/>
+          </a:xfrm>
+          <a:prstGeom prst="rect">
+            <a:avLst/>
+          </a:prstGeom>
+          <a:noFill/>
+          <a:ln/>
+        </p:spPr>
+        <p:txBody>
+          <a:bodyPr wrap="square" lIns="254" tIns="254" rIns="254" bIns="254" rtlCol="0" anchor="t">
             <a:normAutofit/>
           </a:bodyPr>
           <a:lstStyle/>
@@ -7086,7 +7167,7 @@
               <a:buNone/>
             </a:pPr>
             <a:r>
-              <a:rPr lang="en-US" sz="1550" dirty="0">
+              <a:rPr lang="en-US" sz="1320" dirty="0">
                 <a:solidFill>
                   <a:srgbClr val="17364A"/>
                 </a:solidFill>
@@ -7096,7 +7177,7 @@
               </a:rPr>
               <a:t>The example shows that governance is not only for technical teams.</a:t>
             </a:r>
-            <a:endParaRPr lang="en-US" sz="1550" dirty="0"/>
+            <a:endParaRPr lang="en-US" sz="1320" dirty="0"/>
           </a:p>
         </p:txBody>
       </p:sp>
@@ -7184,13 +7265,16 @@
           <a:ln/>
         </p:spPr>
         <p:txBody>
-          <a:bodyPr wrap="square" lIns="254" tIns="254" rIns="254" bIns="254" rtlCol="0" anchor="t">
+          <a:bodyPr wrap="square" lIns="508" tIns="508" rIns="508" bIns="508" rtlCol="0" anchor="t">
             <a:normAutofit/>
           </a:bodyPr>
           <a:lstStyle/>
           <a:p>
-            <a:r>
-              <a:rPr lang="en-US" sz="1380" dirty="0">
+            <a:pPr indent="0" marL="0">
+              <a:buNone/>
+            </a:pPr>
+            <a:r>
+              <a:rPr lang="en-US" sz="1220" dirty="0">
                 <a:solidFill>
                   <a:srgbClr val="17364A"/>
                 </a:solidFill>
@@ -7198,13 +7282,16 @@
                 <a:ea typeface="Aptos" pitchFamily="34" charset="-122"/>
                 <a:cs typeface="Aptos" pitchFamily="34" charset="-120"/>
               </a:rPr>
-              <a:t>Equity and community engagement staff consider whether the process preserves community.</a:t>
-            </a:r>
-            <a:endParaRPr lang="en-US" sz="1380" dirty="0"/>
-          </a:p>
-          <a:p>
-            <a:r>
-              <a:rPr lang="en-US" sz="1380" dirty="0">
+              <a:t>Equity and community engagement staff consider whether the process.</a:t>
+            </a:r>
+            <a:endParaRPr lang="en-US" sz="1220" dirty="0"/>
+          </a:p>
+          <a:p>
+            <a:pPr indent="0" marL="0">
+              <a:buNone/>
+            </a:pPr>
+            <a:r>
+              <a:rPr lang="en-US" sz="1220" dirty="0">
                 <a:solidFill>
                   <a:srgbClr val="17364A"/>
                 </a:solidFill>
@@ -7212,13 +7299,16 @@
                 <a:ea typeface="Aptos" pitchFamily="34" charset="-122"/>
                 <a:cs typeface="Aptos" pitchFamily="34" charset="-120"/>
               </a:rPr>
-              <a:t>Communications staff ensure public statements are clear and not overstated.</a:t>
-            </a:r>
-            <a:endParaRPr lang="en-US" sz="1380" dirty="0"/>
-          </a:p>
-          <a:p>
-            <a:r>
-              <a:rPr lang="en-US" sz="1380" dirty="0">
+              <a:t>Communications staff ensure public statements are clear and not.</a:t>
+            </a:r>
+            <a:endParaRPr lang="en-US" sz="1220" dirty="0"/>
+          </a:p>
+          <a:p>
+            <a:pPr indent="0" marL="0">
+              <a:buNone/>
+            </a:pPr>
+            <a:r>
+              <a:rPr lang="en-US" sz="1220" dirty="0">
                 <a:solidFill>
                   <a:srgbClr val="17364A"/>
                 </a:solidFill>
@@ -7226,9 +7316,9 @@
                 <a:ea typeface="Aptos" pitchFamily="34" charset="-122"/>
                 <a:cs typeface="Aptos" pitchFamily="34" charset="-120"/>
               </a:rPr>
-              <a:t>Leadership decides whether the use is appropriate and whether the agency can explain it to.</a:t>
-            </a:r>
-            <a:endParaRPr lang="en-US" sz="1380" dirty="0"/>
+              <a:t>Leadership decides whether the use is appropriate and whether the.</a:t>
+            </a:r>
+            <a:endParaRPr lang="en-US" sz="1220" dirty="0"/>
           </a:p>
         </p:txBody>
       </p:sp>
@@ -7306,17 +7396,17 @@
         </p:nvSpPr>
         <p:spPr>
           <a:xfrm>
-            <a:off x="7799832" y="5001768"/>
-            <a:ext cx="3145536" cy="502920"/>
-          </a:xfrm>
-          <a:prstGeom prst="rect">
-            <a:avLst/>
-          </a:prstGeom>
-          <a:noFill/>
-          <a:ln/>
-        </p:spPr>
-        <p:txBody>
-          <a:bodyPr wrap="square" lIns="0" tIns="0" rIns="0" bIns="0" rtlCol="0" anchor="t">
+            <a:off x="7799832" y="4974336"/>
+            <a:ext cx="3145536" cy="576072"/>
+          </a:xfrm>
+          <a:prstGeom prst="rect">
+            <a:avLst/>
+          </a:prstGeom>
+          <a:noFill/>
+          <a:ln/>
+        </p:spPr>
+        <p:txBody>
+          <a:bodyPr wrap="square" lIns="254" tIns="254" rIns="254" bIns="254" rtlCol="0" anchor="t">
             <a:normAutofit/>
           </a:bodyPr>
           <a:lstStyle/>
@@ -7325,7 +7415,7 @@
               <a:buNone/>
             </a:pPr>
             <a:r>
-              <a:rPr lang="en-US" sz="1550" dirty="0">
+              <a:rPr lang="en-US" sz="1320" dirty="0">
                 <a:solidFill>
                   <a:srgbClr val="17364A"/>
                 </a:solidFill>
@@ -7333,9 +7423,9 @@
                 <a:ea typeface="Aptos" pitchFamily="34" charset="-122"/>
                 <a:cs typeface="Aptos" pitchFamily="34" charset="-120"/>
               </a:rPr>
-              <a:t>Translate this concept into clear decision rights, review steps, documentation expectations, and escalation paths before an AI-supported workflow is approved.</a:t>
-            </a:r>
-            <a:endParaRPr lang="en-US" sz="1550" dirty="0"/>
+              <a:t>Translate this concept into clear decision rights, review steps, documentation expectations, and escalation paths before.</a:t>
+            </a:r>
+            <a:endParaRPr lang="en-US" sz="1320" dirty="0"/>
           </a:p>
         </p:txBody>
       </p:sp>
@@ -7636,49 +7726,58 @@
           <a:ln/>
         </p:spPr>
         <p:txBody>
-          <a:bodyPr wrap="square" lIns="635" tIns="635" rIns="635" bIns="635" rtlCol="0" anchor="t">
+          <a:bodyPr wrap="square" lIns="1016" tIns="1016" rIns="1016" bIns="1016" rtlCol="0" anchor="t">
             <a:normAutofit/>
           </a:bodyPr>
           <a:lstStyle/>
           <a:p>
+            <a:pPr indent="0" marL="0">
+              <a:buNone/>
+            </a:pPr>
             <a:r>
               <a:rPr lang="en-US" sz="2100" dirty="0">
                 <a:solidFill>
-                  <a:srgbClr val="17364A"/>
-                </a:solidFill>
-                <a:latin typeface="Aptos" pitchFamily="34" charset="0"/>
-                <a:ea typeface="Aptos" pitchFamily="34" charset="-122"/>
-                <a:cs typeface="Aptos" pitchFamily="34" charset="-120"/>
-              </a:rPr>
-              <a:t>AI governance should be understandable to all staff because the earliest governance decisions often.</a:t>
+                  <a:srgbClr val="003A63"/>
+                </a:solidFill>
+                <a:latin typeface="Aptos" pitchFamily="34" charset="0"/>
+                <a:ea typeface="Aptos" pitchFamily="34" charset="-122"/>
+                <a:cs typeface="Aptos" pitchFamily="34" charset="-120"/>
+              </a:rPr>
+              <a:t>• AI governance should be understandable to all staff because the earliest governance decisions.</a:t>
             </a:r>
             <a:endParaRPr lang="en-US" sz="2100" dirty="0"/>
           </a:p>
           <a:p>
+            <a:pPr indent="0" marL="0">
+              <a:buNone/>
+            </a:pPr>
             <a:r>
               <a:rPr lang="en-US" sz="2100" dirty="0">
                 <a:solidFill>
-                  <a:srgbClr val="17364A"/>
-                </a:solidFill>
-                <a:latin typeface="Aptos" pitchFamily="34" charset="0"/>
-                <a:ea typeface="Aptos" pitchFamily="34" charset="-122"/>
-                <a:cs typeface="Aptos" pitchFamily="34" charset="-120"/>
-              </a:rPr>
-              <a:t>The first decision is recognizing that an AI use exists.</a:t>
+                  <a:srgbClr val="003A63"/>
+                </a:solidFill>
+                <a:latin typeface="Aptos" pitchFamily="34" charset="0"/>
+                <a:ea typeface="Aptos" pitchFamily="34" charset="-122"/>
+                <a:cs typeface="Aptos" pitchFamily="34" charset="-120"/>
+              </a:rPr>
+              <a:t>• The first decision is recognizing that an AI use exists.</a:t>
             </a:r>
             <a:endParaRPr lang="en-US" sz="2100" dirty="0"/>
           </a:p>
           <a:p>
+            <a:pPr indent="0" marL="0">
+              <a:buNone/>
+            </a:pPr>
             <a:r>
               <a:rPr lang="en-US" sz="2100" dirty="0">
                 <a:solidFill>
-                  <a:srgbClr val="17364A"/>
-                </a:solidFill>
-                <a:latin typeface="Aptos" pitchFamily="34" charset="0"/>
-                <a:ea typeface="Aptos" pitchFamily="34" charset="-122"/>
-                <a:cs typeface="Aptos" pitchFamily="34" charset="-120"/>
-              </a:rPr>
-              <a:t>Staff should treat AI use as more than “using a tool.” If a tool classifies, summarizes, predicts,.</a:t>
+                  <a:srgbClr val="003A63"/>
+                </a:solidFill>
+                <a:latin typeface="Aptos" pitchFamily="34" charset="0"/>
+                <a:ea typeface="Aptos" pitchFamily="34" charset="-122"/>
+                <a:cs typeface="Aptos" pitchFamily="34" charset="-120"/>
+              </a:rPr>
+              <a:t>• Staff should treat AI use as more than “using a tool.” If a tool classifies, summarizes,.</a:t>
             </a:r>
             <a:endParaRPr lang="en-US" sz="2100" dirty="0"/>
           </a:p>
@@ -7758,17 +7857,17 @@
         </p:nvSpPr>
         <p:spPr>
           <a:xfrm>
-            <a:off x="7799832" y="1828800"/>
-            <a:ext cx="3145536" cy="685800"/>
-          </a:xfrm>
-          <a:prstGeom prst="rect">
-            <a:avLst/>
-          </a:prstGeom>
-          <a:noFill/>
-          <a:ln/>
-        </p:spPr>
-        <p:txBody>
-          <a:bodyPr wrap="square" lIns="0" tIns="0" rIns="0" bIns="0" rtlCol="0" anchor="t">
+            <a:off x="7799832" y="1801368"/>
+            <a:ext cx="3145536" cy="758952"/>
+          </a:xfrm>
+          <a:prstGeom prst="rect">
+            <a:avLst/>
+          </a:prstGeom>
+          <a:noFill/>
+          <a:ln/>
+        </p:spPr>
+        <p:txBody>
+          <a:bodyPr wrap="square" lIns="254" tIns="254" rIns="254" bIns="254" rtlCol="0" anchor="t">
             <a:normAutofit/>
           </a:bodyPr>
           <a:lstStyle/>
@@ -7777,7 +7876,7 @@
               <a:buNone/>
             </a:pPr>
             <a:r>
-              <a:rPr lang="en-US" sz="1550" dirty="0">
+              <a:rPr lang="en-US" sz="1320" dirty="0">
                 <a:solidFill>
                   <a:srgbClr val="17364A"/>
                 </a:solidFill>
@@ -7787,7 +7886,7 @@
               </a:rPr>
               <a:t>AI governance should be understandable to all staff because the earliest governance decisions often.</a:t>
             </a:r>
-            <a:endParaRPr lang="en-US" sz="1550" dirty="0"/>
+            <a:endParaRPr lang="en-US" sz="1320" dirty="0"/>
           </a:p>
         </p:txBody>
       </p:sp>
@@ -7875,13 +7974,16 @@
           <a:ln/>
         </p:spPr>
         <p:txBody>
-          <a:bodyPr wrap="square" lIns="254" tIns="254" rIns="254" bIns="254" rtlCol="0" anchor="t">
+          <a:bodyPr wrap="square" lIns="508" tIns="508" rIns="508" bIns="508" rtlCol="0" anchor="t">
             <a:normAutofit/>
           </a:bodyPr>
           <a:lstStyle/>
           <a:p>
-            <a:r>
-              <a:rPr lang="en-US" sz="1380" dirty="0">
+            <a:pPr indent="0" marL="0">
+              <a:buNone/>
+            </a:pPr>
+            <a:r>
+              <a:rPr lang="en-US" sz="1220" dirty="0">
                 <a:solidFill>
                   <a:srgbClr val="17364A"/>
                 </a:solidFill>
@@ -7889,13 +7991,16 @@
                 <a:ea typeface="Aptos" pitchFamily="34" charset="-122"/>
                 <a:cs typeface="Aptos" pitchFamily="34" charset="-120"/>
               </a:rPr>
-              <a:t>AI governance should be understandable to all staff because the earliest governance.</a:t>
-            </a:r>
-            <a:endParaRPr lang="en-US" sz="1380" dirty="0"/>
-          </a:p>
-          <a:p>
-            <a:r>
-              <a:rPr lang="en-US" sz="1380" dirty="0">
+              <a:t>AI governance should be understandable to all staff because the.</a:t>
+            </a:r>
+            <a:endParaRPr lang="en-US" sz="1220" dirty="0"/>
+          </a:p>
+          <a:p>
+            <a:pPr indent="0" marL="0">
+              <a:buNone/>
+            </a:pPr>
+            <a:r>
+              <a:rPr lang="en-US" sz="1220" dirty="0">
                 <a:solidFill>
                   <a:srgbClr val="17364A"/>
                 </a:solidFill>
@@ -7903,13 +8008,16 @@
                 <a:ea typeface="Aptos" pitchFamily="34" charset="-122"/>
                 <a:cs typeface="Aptos" pitchFamily="34" charset="-120"/>
               </a:rPr>
-              <a:t>Staff should treat AI use as more than “using a tool.” If a tool classifies, summarizes,.</a:t>
-            </a:r>
-            <a:endParaRPr lang="en-US" sz="1380" dirty="0"/>
-          </a:p>
-          <a:p>
-            <a:r>
-              <a:rPr lang="en-US" sz="1380" dirty="0">
+              <a:t>Staff should treat AI use as more than “using a tool.” If a tool.</a:t>
+            </a:r>
+            <a:endParaRPr lang="en-US" sz="1220" dirty="0"/>
+          </a:p>
+          <a:p>
+            <a:pPr indent="0" marL="0">
+              <a:buNone/>
+            </a:pPr>
+            <a:r>
+              <a:rPr lang="en-US" sz="1220" dirty="0">
                 <a:solidFill>
                   <a:srgbClr val="17364A"/>
                 </a:solidFill>
@@ -7919,7 +8027,7 @@
               </a:rPr>
               <a:t>The second decision is identifying the purpose.</a:t>
             </a:r>
-            <a:endParaRPr lang="en-US" sz="1380" dirty="0"/>
+            <a:endParaRPr lang="en-US" sz="1220" dirty="0"/>
           </a:p>
         </p:txBody>
       </p:sp>
@@ -7997,17 +8105,17 @@
         </p:nvSpPr>
         <p:spPr>
           <a:xfrm>
-            <a:off x="7799832" y="5001768"/>
-            <a:ext cx="3145536" cy="502920"/>
-          </a:xfrm>
-          <a:prstGeom prst="rect">
-            <a:avLst/>
-          </a:prstGeom>
-          <a:noFill/>
-          <a:ln/>
-        </p:spPr>
-        <p:txBody>
-          <a:bodyPr wrap="square" lIns="0" tIns="0" rIns="0" bIns="0" rtlCol="0" anchor="t">
+            <a:off x="7799832" y="4974336"/>
+            <a:ext cx="3145536" cy="576072"/>
+          </a:xfrm>
+          <a:prstGeom prst="rect">
+            <a:avLst/>
+          </a:prstGeom>
+          <a:noFill/>
+          <a:ln/>
+        </p:spPr>
+        <p:txBody>
+          <a:bodyPr wrap="square" lIns="254" tIns="254" rIns="254" bIns="254" rtlCol="0" anchor="t">
             <a:normAutofit/>
           </a:bodyPr>
           <a:lstStyle/>
@@ -8016,7 +8124,7 @@
               <a:buNone/>
             </a:pPr>
             <a:r>
-              <a:rPr lang="en-US" sz="1550" dirty="0">
+              <a:rPr lang="en-US" sz="1320" dirty="0">
                 <a:solidFill>
                   <a:srgbClr val="17364A"/>
                 </a:solidFill>
@@ -8024,9 +8132,9 @@
                 <a:ea typeface="Aptos" pitchFamily="34" charset="-122"/>
                 <a:cs typeface="Aptos" pitchFamily="34" charset="-120"/>
               </a:rPr>
-              <a:t>Translate this concept into clear decision rights, review steps, documentation expectations, and escalation paths before an AI-supported workflow is approved.</a:t>
-            </a:r>
-            <a:endParaRPr lang="en-US" sz="1550" dirty="0"/>
+              <a:t>Translate this concept into clear decision rights, review steps, documentation expectations, and escalation paths before.</a:t>
+            </a:r>
+            <a:endParaRPr lang="en-US" sz="1320" dirty="0"/>
           </a:p>
         </p:txBody>
       </p:sp>
@@ -8327,49 +8435,58 @@
           <a:ln/>
         </p:spPr>
         <p:txBody>
-          <a:bodyPr wrap="square" lIns="635" tIns="635" rIns="635" bIns="635" rtlCol="0" anchor="t">
+          <a:bodyPr wrap="square" lIns="1016" tIns="1016" rIns="1016" bIns="1016" rtlCol="0" anchor="t">
             <a:normAutofit/>
           </a:bodyPr>
           <a:lstStyle/>
           <a:p>
+            <a:pPr indent="0" marL="0">
+              <a:buNone/>
+            </a:pPr>
             <a:r>
               <a:rPr lang="en-US" sz="2100" dirty="0">
                 <a:solidFill>
-                  <a:srgbClr val="17364A"/>
-                </a:solidFill>
-                <a:latin typeface="Aptos" pitchFamily="34" charset="0"/>
-                <a:ea typeface="Aptos" pitchFamily="34" charset="-122"/>
-                <a:cs typeface="Aptos" pitchFamily="34" charset="-120"/>
-              </a:rPr>
-              <a:t>The fourth decision is defining the role of the AI output.</a:t>
+                  <a:srgbClr val="003A63"/>
+                </a:solidFill>
+                <a:latin typeface="Aptos" pitchFamily="34" charset="0"/>
+                <a:ea typeface="Aptos" pitchFamily="34" charset="-122"/>
+                <a:cs typeface="Aptos" pitchFamily="34" charset="-120"/>
+              </a:rPr>
+              <a:t>• The fourth decision is defining the role of the AI output.</a:t>
             </a:r>
             <a:endParaRPr lang="en-US" sz="2100" dirty="0"/>
           </a:p>
           <a:p>
+            <a:pPr indent="0" marL="0">
+              <a:buNone/>
+            </a:pPr>
             <a:r>
               <a:rPr lang="en-US" sz="2100" dirty="0">
                 <a:solidFill>
-                  <a:srgbClr val="17364A"/>
-                </a:solidFill>
-                <a:latin typeface="Aptos" pitchFamily="34" charset="0"/>
-                <a:ea typeface="Aptos" pitchFamily="34" charset="-122"/>
-                <a:cs typeface="Aptos" pitchFamily="34" charset="-120"/>
-              </a:rPr>
-              <a:t>An AI output may be a draft, a suggestion, a risk score, a classification, a summary, a translation, a.</a:t>
+                  <a:srgbClr val="003A63"/>
+                </a:solidFill>
+                <a:latin typeface="Aptos" pitchFamily="34" charset="0"/>
+                <a:ea typeface="Aptos" pitchFamily="34" charset="-122"/>
+                <a:cs typeface="Aptos" pitchFamily="34" charset="-120"/>
+              </a:rPr>
+              <a:t>• An AI output may be a draft, a suggestion, a risk score, a classification, a summary, a.</a:t>
             </a:r>
             <a:endParaRPr lang="en-US" sz="2100" dirty="0"/>
           </a:p>
           <a:p>
+            <a:pPr indent="0" marL="0">
+              <a:buNone/>
+            </a:pPr>
             <a:r>
               <a:rPr lang="en-US" sz="2100" dirty="0">
                 <a:solidFill>
-                  <a:srgbClr val="17364A"/>
-                </a:solidFill>
-                <a:latin typeface="Aptos" pitchFamily="34" charset="0"/>
-                <a:ea typeface="Aptos" pitchFamily="34" charset="-122"/>
-                <a:cs typeface="Aptos" pitchFamily="34" charset="-120"/>
-              </a:rPr>
-              <a:t>The governance question is whether the output informs human work or changes a decision.</a:t>
+                  <a:srgbClr val="003A63"/>
+                </a:solidFill>
+                <a:latin typeface="Aptos" pitchFamily="34" charset="0"/>
+                <a:ea typeface="Aptos" pitchFamily="34" charset="-122"/>
+                <a:cs typeface="Aptos" pitchFamily="34" charset="-120"/>
+              </a:rPr>
+              <a:t>• The governance question is whether the output informs human work or changes a decision.</a:t>
             </a:r>
             <a:endParaRPr lang="en-US" sz="2100" dirty="0"/>
           </a:p>
@@ -8449,17 +8566,17 @@
         </p:nvSpPr>
         <p:spPr>
           <a:xfrm>
-            <a:off x="7799832" y="1828800"/>
-            <a:ext cx="3145536" cy="685800"/>
-          </a:xfrm>
-          <a:prstGeom prst="rect">
-            <a:avLst/>
-          </a:prstGeom>
-          <a:noFill/>
-          <a:ln/>
-        </p:spPr>
-        <p:txBody>
-          <a:bodyPr wrap="square" lIns="0" tIns="0" rIns="0" bIns="0" rtlCol="0" anchor="t">
+            <a:off x="7799832" y="1801368"/>
+            <a:ext cx="3145536" cy="758952"/>
+          </a:xfrm>
+          <a:prstGeom prst="rect">
+            <a:avLst/>
+          </a:prstGeom>
+          <a:noFill/>
+          <a:ln/>
+        </p:spPr>
+        <p:txBody>
+          <a:bodyPr wrap="square" lIns="254" tIns="254" rIns="254" bIns="254" rtlCol="0" anchor="t">
             <a:normAutofit/>
           </a:bodyPr>
           <a:lstStyle/>
@@ -8468,7 +8585,7 @@
               <a:buNone/>
             </a:pPr>
             <a:r>
-              <a:rPr lang="en-US" sz="1550" dirty="0">
+              <a:rPr lang="en-US" sz="1320" dirty="0">
                 <a:solidFill>
                   <a:srgbClr val="17364A"/>
                 </a:solidFill>
@@ -8478,7 +8595,7 @@
               </a:rPr>
               <a:t>The fourth decision is defining the role of the AI output.</a:t>
             </a:r>
-            <a:endParaRPr lang="en-US" sz="1550" dirty="0"/>
+            <a:endParaRPr lang="en-US" sz="1320" dirty="0"/>
           </a:p>
         </p:txBody>
       </p:sp>
@@ -8566,13 +8683,16 @@
           <a:ln/>
         </p:spPr>
         <p:txBody>
-          <a:bodyPr wrap="square" lIns="254" tIns="254" rIns="254" bIns="254" rtlCol="0" anchor="t">
+          <a:bodyPr wrap="square" lIns="508" tIns="508" rIns="508" bIns="508" rtlCol="0" anchor="t">
             <a:normAutofit/>
           </a:bodyPr>
           <a:lstStyle/>
           <a:p>
-            <a:r>
-              <a:rPr lang="en-US" sz="1380" dirty="0">
+            <a:pPr indent="0" marL="0">
+              <a:buNone/>
+            </a:pPr>
+            <a:r>
+              <a:rPr lang="en-US" sz="1220" dirty="0">
                 <a:solidFill>
                   <a:srgbClr val="17364A"/>
                 </a:solidFill>
@@ -8580,13 +8700,16 @@
                 <a:ea typeface="Aptos" pitchFamily="34" charset="-122"/>
                 <a:cs typeface="Aptos" pitchFamily="34" charset="-120"/>
               </a:rPr>
-              <a:t>An AI output may be a draft, a suggestion, a risk score, a classification, a summary, a.</a:t>
-            </a:r>
-            <a:endParaRPr lang="en-US" sz="1380" dirty="0"/>
-          </a:p>
-          <a:p>
-            <a:r>
-              <a:rPr lang="en-US" sz="1380" dirty="0">
+              <a:t>An AI output may be a draft, a suggestion, a risk score, a.</a:t>
+            </a:r>
+            <a:endParaRPr lang="en-US" sz="1220" dirty="0"/>
+          </a:p>
+          <a:p>
+            <a:pPr indent="0" marL="0">
+              <a:buNone/>
+            </a:pPr>
+            <a:r>
+              <a:rPr lang="en-US" sz="1220" dirty="0">
                 <a:solidFill>
                   <a:srgbClr val="17364A"/>
                 </a:solidFill>
@@ -8596,11 +8719,14 @@
               </a:rPr>
               <a:t>A draft that a trained staff member reviews may be low risk.</a:t>
             </a:r>
-            <a:endParaRPr lang="en-US" sz="1380" dirty="0"/>
-          </a:p>
-          <a:p>
-            <a:r>
-              <a:rPr lang="en-US" sz="1380" dirty="0">
+            <a:endParaRPr lang="en-US" sz="1220" dirty="0"/>
+          </a:p>
+          <a:p>
+            <a:pPr indent="0" marL="0">
+              <a:buNone/>
+            </a:pPr>
+            <a:r>
+              <a:rPr lang="en-US" sz="1220" dirty="0">
                 <a:solidFill>
                   <a:srgbClr val="17364A"/>
                 </a:solidFill>
@@ -8608,9 +8734,9 @@
                 <a:ea typeface="Aptos" pitchFamily="34" charset="-122"/>
                 <a:cs typeface="Aptos" pitchFamily="34" charset="-120"/>
               </a:rPr>
-              <a:t>A score that determines who receives outreach first, which complaint receives inspection,.</a:t>
-            </a:r>
-            <a:endParaRPr lang="en-US" sz="1380" dirty="0"/>
+              <a:t>A score that determines who receives outreach first, which.</a:t>
+            </a:r>
+            <a:endParaRPr lang="en-US" sz="1220" dirty="0"/>
           </a:p>
         </p:txBody>
       </p:sp>
@@ -8688,17 +8814,17 @@
         </p:nvSpPr>
         <p:spPr>
           <a:xfrm>
-            <a:off x="7799832" y="5001768"/>
-            <a:ext cx="3145536" cy="502920"/>
-          </a:xfrm>
-          <a:prstGeom prst="rect">
-            <a:avLst/>
-          </a:prstGeom>
-          <a:noFill/>
-          <a:ln/>
-        </p:spPr>
-        <p:txBody>
-          <a:bodyPr wrap="square" lIns="0" tIns="0" rIns="0" bIns="0" rtlCol="0" anchor="t">
+            <a:off x="7799832" y="4974336"/>
+            <a:ext cx="3145536" cy="576072"/>
+          </a:xfrm>
+          <a:prstGeom prst="rect">
+            <a:avLst/>
+          </a:prstGeom>
+          <a:noFill/>
+          <a:ln/>
+        </p:spPr>
+        <p:txBody>
+          <a:bodyPr wrap="square" lIns="254" tIns="254" rIns="254" bIns="254" rtlCol="0" anchor="t">
             <a:normAutofit/>
           </a:bodyPr>
           <a:lstStyle/>
@@ -8707,7 +8833,7 @@
               <a:buNone/>
             </a:pPr>
             <a:r>
-              <a:rPr lang="en-US" sz="1550" dirty="0">
+              <a:rPr lang="en-US" sz="1320" dirty="0">
                 <a:solidFill>
                   <a:srgbClr val="17364A"/>
                 </a:solidFill>
@@ -8715,9 +8841,9 @@
                 <a:ea typeface="Aptos" pitchFamily="34" charset="-122"/>
                 <a:cs typeface="Aptos" pitchFamily="34" charset="-120"/>
               </a:rPr>
-              <a:t>Translate this concept into clear decision rights, review steps, documentation expectations, and escalation paths before an AI-supported workflow is approved.</a:t>
-            </a:r>
-            <a:endParaRPr lang="en-US" sz="1550" dirty="0"/>
+              <a:t>Translate this concept into clear decision rights, review steps, documentation expectations, and escalation paths before.</a:t>
+            </a:r>
+            <a:endParaRPr lang="en-US" sz="1320" dirty="0"/>
           </a:p>
         </p:txBody>
       </p:sp>
@@ -9018,49 +9144,58 @@
           <a:ln/>
         </p:spPr>
         <p:txBody>
-          <a:bodyPr wrap="square" lIns="635" tIns="635" rIns="635" bIns="635" rtlCol="0" anchor="t">
+          <a:bodyPr wrap="square" lIns="1016" tIns="1016" rIns="1016" bIns="1016" rtlCol="0" anchor="t">
             <a:normAutofit/>
           </a:bodyPr>
           <a:lstStyle/>
           <a:p>
+            <a:pPr indent="0" marL="0">
+              <a:buNone/>
+            </a:pPr>
             <a:r>
               <a:rPr lang="en-US" sz="2100" dirty="0">
                 <a:solidFill>
-                  <a:srgbClr val="17364A"/>
-                </a:solidFill>
-                <a:latin typeface="Aptos" pitchFamily="34" charset="0"/>
-                <a:ea typeface="Aptos" pitchFamily="34" charset="-122"/>
-                <a:cs typeface="Aptos" pitchFamily="34" charset="-120"/>
-              </a:rPr>
-              <a:t>The seventh decision is planning oversight after approval.</a:t>
+                  <a:srgbClr val="003A63"/>
+                </a:solidFill>
+                <a:latin typeface="Aptos" pitchFamily="34" charset="0"/>
+                <a:ea typeface="Aptos" pitchFamily="34" charset="-122"/>
+                <a:cs typeface="Aptos" pitchFamily="34" charset="-120"/>
+              </a:rPr>
+              <a:t>• The seventh decision is planning oversight after approval.</a:t>
             </a:r>
             <a:endParaRPr lang="en-US" sz="2100" dirty="0"/>
           </a:p>
           <a:p>
+            <a:pPr indent="0" marL="0">
+              <a:buNone/>
+            </a:pPr>
             <a:r>
               <a:rPr lang="en-US" sz="2100" dirty="0">
                 <a:solidFill>
-                  <a:srgbClr val="17364A"/>
-                </a:solidFill>
-                <a:latin typeface="Aptos" pitchFamily="34" charset="0"/>
-                <a:ea typeface="Aptos" pitchFamily="34" charset="-122"/>
-                <a:cs typeface="Aptos" pitchFamily="34" charset="-120"/>
-              </a:rPr>
-              <a:t>AI use should not be approved once and forgotten.</a:t>
+                  <a:srgbClr val="003A63"/>
+                </a:solidFill>
+                <a:latin typeface="Aptos" pitchFamily="34" charset="0"/>
+                <a:ea typeface="Aptos" pitchFamily="34" charset="-122"/>
+                <a:cs typeface="Aptos" pitchFamily="34" charset="-120"/>
+              </a:rPr>
+              <a:t>• AI use should not be approved once and forgotten.</a:t>
             </a:r>
             <a:endParaRPr lang="en-US" sz="2100" dirty="0"/>
           </a:p>
           <a:p>
+            <a:pPr indent="0" marL="0">
+              <a:buNone/>
+            </a:pPr>
             <a:r>
               <a:rPr lang="en-US" sz="2100" dirty="0">
                 <a:solidFill>
-                  <a:srgbClr val="17364A"/>
-                </a:solidFill>
-                <a:latin typeface="Aptos" pitchFamily="34" charset="0"/>
-                <a:ea typeface="Aptos" pitchFamily="34" charset="-122"/>
-                <a:cs typeface="Aptos" pitchFamily="34" charset="-120"/>
-              </a:rPr>
-              <a:t>The agency should know what evidence will be reviewed over time, such as error reports, user feedback,.</a:t>
+                  <a:srgbClr val="003A63"/>
+                </a:solidFill>
+                <a:latin typeface="Aptos" pitchFamily="34" charset="0"/>
+                <a:ea typeface="Aptos" pitchFamily="34" charset="-122"/>
+                <a:cs typeface="Aptos" pitchFamily="34" charset="-120"/>
+              </a:rPr>
+              <a:t>• The agency should know what evidence will be reviewed over time, such as error reports, user.</a:t>
             </a:r>
             <a:endParaRPr lang="en-US" sz="2100" dirty="0"/>
           </a:p>
@@ -9140,17 +9275,17 @@
         </p:nvSpPr>
         <p:spPr>
           <a:xfrm>
-            <a:off x="7799832" y="1828800"/>
-            <a:ext cx="3145536" cy="685800"/>
-          </a:xfrm>
-          <a:prstGeom prst="rect">
-            <a:avLst/>
-          </a:prstGeom>
-          <a:noFill/>
-          <a:ln/>
-        </p:spPr>
-        <p:txBody>
-          <a:bodyPr wrap="square" lIns="0" tIns="0" rIns="0" bIns="0" rtlCol="0" anchor="t">
+            <a:off x="7799832" y="1801368"/>
+            <a:ext cx="3145536" cy="758952"/>
+          </a:xfrm>
+          <a:prstGeom prst="rect">
+            <a:avLst/>
+          </a:prstGeom>
+          <a:noFill/>
+          <a:ln/>
+        </p:spPr>
+        <p:txBody>
+          <a:bodyPr wrap="square" lIns="254" tIns="254" rIns="254" bIns="254" rtlCol="0" anchor="t">
             <a:normAutofit/>
           </a:bodyPr>
           <a:lstStyle/>
@@ -9159,7 +9294,7 @@
               <a:buNone/>
             </a:pPr>
             <a:r>
-              <a:rPr lang="en-US" sz="1550" dirty="0">
+              <a:rPr lang="en-US" sz="1320" dirty="0">
                 <a:solidFill>
                   <a:srgbClr val="17364A"/>
                 </a:solidFill>
@@ -9169,7 +9304,7 @@
               </a:rPr>
               <a:t>The seventh decision is planning oversight after approval.</a:t>
             </a:r>
-            <a:endParaRPr lang="en-US" sz="1550" dirty="0"/>
+            <a:endParaRPr lang="en-US" sz="1320" dirty="0"/>
           </a:p>
         </p:txBody>
       </p:sp>
@@ -9257,13 +9392,16 @@
           <a:ln/>
         </p:spPr>
         <p:txBody>
-          <a:bodyPr wrap="square" lIns="254" tIns="254" rIns="254" bIns="254" rtlCol="0" anchor="t">
+          <a:bodyPr wrap="square" lIns="508" tIns="508" rIns="508" bIns="508" rtlCol="0" anchor="t">
             <a:normAutofit/>
           </a:bodyPr>
           <a:lstStyle/>
           <a:p>
-            <a:r>
-              <a:rPr lang="en-US" sz="1380" dirty="0">
+            <a:pPr indent="0" marL="0">
+              <a:buNone/>
+            </a:pPr>
+            <a:r>
+              <a:rPr lang="en-US" sz="1220" dirty="0">
                 <a:solidFill>
                   <a:srgbClr val="17364A"/>
                 </a:solidFill>
@@ -9273,11 +9411,14 @@
               </a:rPr>
               <a:t>The seventh decision is planning oversight after approval.</a:t>
             </a:r>
-            <a:endParaRPr lang="en-US" sz="1380" dirty="0"/>
-          </a:p>
-          <a:p>
-            <a:r>
-              <a:rPr lang="en-US" sz="1380" dirty="0">
+            <a:endParaRPr lang="en-US" sz="1220" dirty="0"/>
+          </a:p>
+          <a:p>
+            <a:pPr indent="0" marL="0">
+              <a:buNone/>
+            </a:pPr>
+            <a:r>
+              <a:rPr lang="en-US" sz="1220" dirty="0">
                 <a:solidFill>
                   <a:srgbClr val="17364A"/>
                 </a:solidFill>
@@ -9287,11 +9428,14 @@
               </a:rPr>
               <a:t>AI use should not be approved once and forgotten.</a:t>
             </a:r>
-            <a:endParaRPr lang="en-US" sz="1380" dirty="0"/>
-          </a:p>
-          <a:p>
-            <a:r>
-              <a:rPr lang="en-US" sz="1380" dirty="0">
+            <a:endParaRPr lang="en-US" sz="1220" dirty="0"/>
+          </a:p>
+          <a:p>
+            <a:pPr indent="0" marL="0">
+              <a:buNone/>
+            </a:pPr>
+            <a:r>
+              <a:rPr lang="en-US" sz="1220" dirty="0">
                 <a:solidFill>
                   <a:srgbClr val="17364A"/>
                 </a:solidFill>
@@ -9299,9 +9443,9 @@
                 <a:ea typeface="Aptos" pitchFamily="34" charset="-122"/>
                 <a:cs typeface="Aptos" pitchFamily="34" charset="-120"/>
               </a:rPr>
-              <a:t>The agency should know what evidence will be reviewed over time, such as error reports,.</a:t>
-            </a:r>
-            <a:endParaRPr lang="en-US" sz="1380" dirty="0"/>
+              <a:t>The agency should know what evidence will be reviewed over time,.</a:t>
+            </a:r>
+            <a:endParaRPr lang="en-US" sz="1220" dirty="0"/>
           </a:p>
         </p:txBody>
       </p:sp>
@@ -9379,17 +9523,17 @@
         </p:nvSpPr>
         <p:spPr>
           <a:xfrm>
-            <a:off x="7799832" y="5001768"/>
-            <a:ext cx="3145536" cy="502920"/>
-          </a:xfrm>
-          <a:prstGeom prst="rect">
-            <a:avLst/>
-          </a:prstGeom>
-          <a:noFill/>
-          <a:ln/>
-        </p:spPr>
-        <p:txBody>
-          <a:bodyPr wrap="square" lIns="0" tIns="0" rIns="0" bIns="0" rtlCol="0" anchor="t">
+            <a:off x="7799832" y="4974336"/>
+            <a:ext cx="3145536" cy="576072"/>
+          </a:xfrm>
+          <a:prstGeom prst="rect">
+            <a:avLst/>
+          </a:prstGeom>
+          <a:noFill/>
+          <a:ln/>
+        </p:spPr>
+        <p:txBody>
+          <a:bodyPr wrap="square" lIns="254" tIns="254" rIns="254" bIns="254" rtlCol="0" anchor="t">
             <a:normAutofit/>
           </a:bodyPr>
           <a:lstStyle/>
@@ -9398,7 +9542,7 @@
               <a:buNone/>
             </a:pPr>
             <a:r>
-              <a:rPr lang="en-US" sz="1550" dirty="0">
+              <a:rPr lang="en-US" sz="1320" dirty="0">
                 <a:solidFill>
                   <a:srgbClr val="17364A"/>
                 </a:solidFill>
@@ -9406,9 +9550,9 @@
                 <a:ea typeface="Aptos" pitchFamily="34" charset="-122"/>
                 <a:cs typeface="Aptos" pitchFamily="34" charset="-120"/>
               </a:rPr>
-              <a:t>Translate this concept into clear decision rights, review steps, documentation expectations, and escalation paths before an AI-supported workflow is approved.</a:t>
-            </a:r>
-            <a:endParaRPr lang="en-US" sz="1550" dirty="0"/>
+              <a:t>Translate this concept into clear decision rights, review steps, documentation expectations, and escalation paths before.</a:t>
+            </a:r>
+            <a:endParaRPr lang="en-US" sz="1320" dirty="0"/>
           </a:p>
         </p:txBody>
       </p:sp>
@@ -9709,49 +9853,58 @@
           <a:ln/>
         </p:spPr>
         <p:txBody>
-          <a:bodyPr wrap="square" lIns="635" tIns="635" rIns="635" bIns="635" rtlCol="0" anchor="t">
+          <a:bodyPr wrap="square" lIns="1016" tIns="1016" rIns="1016" bIns="1016" rtlCol="0" anchor="t">
             <a:normAutofit/>
           </a:bodyPr>
           <a:lstStyle/>
           <a:p>
+            <a:pPr indent="0" marL="0">
+              <a:buNone/>
+            </a:pPr>
             <a:r>
               <a:rPr lang="en-US" sz="2100" dirty="0">
                 <a:solidFill>
-                  <a:srgbClr val="17364A"/>
-                </a:solidFill>
-                <a:latin typeface="Aptos" pitchFamily="34" charset="0"/>
-                <a:ea typeface="Aptos" pitchFamily="34" charset="-122"/>
-                <a:cs typeface="Aptos" pitchFamily="34" charset="-120"/>
-              </a:rPr>
-              <a:t>Unapproved tool use.</a:t>
+                  <a:srgbClr val="003A63"/>
+                </a:solidFill>
+                <a:latin typeface="Aptos" pitchFamily="34" charset="0"/>
+                <a:ea typeface="Aptos" pitchFamily="34" charset="-122"/>
+                <a:cs typeface="Aptos" pitchFamily="34" charset="-120"/>
+              </a:rPr>
+              <a:t>• Unapproved tool use.</a:t>
             </a:r>
             <a:endParaRPr lang="en-US" sz="2100" dirty="0"/>
           </a:p>
           <a:p>
+            <a:pPr indent="0" marL="0">
+              <a:buNone/>
+            </a:pPr>
             <a:r>
               <a:rPr lang="en-US" sz="2100" dirty="0">
                 <a:solidFill>
-                  <a:srgbClr val="17364A"/>
-                </a:solidFill>
-                <a:latin typeface="Aptos" pitchFamily="34" charset="0"/>
-                <a:ea typeface="Aptos" pitchFamily="34" charset="-122"/>
-                <a:cs typeface="Aptos" pitchFamily="34" charset="-120"/>
-              </a:rPr>
-              <a:t>Staff may use public or personal AI tools before the agency has reviewed privacy, security, retention,.</a:t>
+                  <a:srgbClr val="003A63"/>
+                </a:solidFill>
+                <a:latin typeface="Aptos" pitchFamily="34" charset="0"/>
+                <a:ea typeface="Aptos" pitchFamily="34" charset="-122"/>
+                <a:cs typeface="Aptos" pitchFamily="34" charset="-120"/>
+              </a:rPr>
+              <a:t>• Staff may use public or personal AI tools before the agency has reviewed privacy, security,.</a:t>
             </a:r>
             <a:endParaRPr lang="en-US" sz="2100" dirty="0"/>
           </a:p>
           <a:p>
+            <a:pPr indent="0" marL="0">
+              <a:buNone/>
+            </a:pPr>
             <a:r>
               <a:rPr lang="en-US" sz="2100" dirty="0">
                 <a:solidFill>
-                  <a:srgbClr val="17364A"/>
-                </a:solidFill>
-                <a:latin typeface="Aptos" pitchFamily="34" charset="0"/>
-                <a:ea typeface="Aptos" pitchFamily="34" charset="-122"/>
-                <a:cs typeface="Aptos" pitchFamily="34" charset="-120"/>
-              </a:rPr>
-              <a:t>Guardrail: publish a plain-language list of approved, restricted, and prohibited uses, including.</a:t>
+                  <a:srgbClr val="003A63"/>
+                </a:solidFill>
+                <a:latin typeface="Aptos" pitchFamily="34" charset="0"/>
+                <a:ea typeface="Aptos" pitchFamily="34" charset="-122"/>
+                <a:cs typeface="Aptos" pitchFamily="34" charset="-120"/>
+              </a:rPr>
+              <a:t>• Guardrail: publish a plain-language list of approved, restricted, and prohibited uses,.</a:t>
             </a:r>
             <a:endParaRPr lang="en-US" sz="2100" dirty="0"/>
           </a:p>
@@ -9831,17 +9984,17 @@
         </p:nvSpPr>
         <p:spPr>
           <a:xfrm>
-            <a:off x="7799832" y="1828800"/>
-            <a:ext cx="3145536" cy="685800"/>
-          </a:xfrm>
-          <a:prstGeom prst="rect">
-            <a:avLst/>
-          </a:prstGeom>
-          <a:noFill/>
-          <a:ln/>
-        </p:spPr>
-        <p:txBody>
-          <a:bodyPr wrap="square" lIns="0" tIns="0" rIns="0" bIns="0" rtlCol="0" anchor="t">
+            <a:off x="7799832" y="1801368"/>
+            <a:ext cx="3145536" cy="758952"/>
+          </a:xfrm>
+          <a:prstGeom prst="rect">
+            <a:avLst/>
+          </a:prstGeom>
+          <a:noFill/>
+          <a:ln/>
+        </p:spPr>
+        <p:txBody>
+          <a:bodyPr wrap="square" lIns="254" tIns="254" rIns="254" bIns="254" rtlCol="0" anchor="t">
             <a:normAutofit/>
           </a:bodyPr>
           <a:lstStyle/>
@@ -9850,7 +10003,7 @@
               <a:buNone/>
             </a:pPr>
             <a:r>
-              <a:rPr lang="en-US" sz="1550" dirty="0">
+              <a:rPr lang="en-US" sz="1320" dirty="0">
                 <a:solidFill>
                   <a:srgbClr val="17364A"/>
                 </a:solidFill>
@@ -9860,7 +10013,7 @@
               </a:rPr>
               <a:t>Unapproved tool use.</a:t>
             </a:r>
-            <a:endParaRPr lang="en-US" sz="1550" dirty="0"/>
+            <a:endParaRPr lang="en-US" sz="1320" dirty="0"/>
           </a:p>
         </p:txBody>
       </p:sp>
@@ -9948,13 +10101,16 @@
           <a:ln/>
         </p:spPr>
         <p:txBody>
-          <a:bodyPr wrap="square" lIns="254" tIns="254" rIns="254" bIns="254" rtlCol="0" anchor="t">
+          <a:bodyPr wrap="square" lIns="508" tIns="508" rIns="508" bIns="508" rtlCol="0" anchor="t">
             <a:normAutofit/>
           </a:bodyPr>
           <a:lstStyle/>
           <a:p>
-            <a:r>
-              <a:rPr lang="en-US" sz="1380" dirty="0">
+            <a:pPr indent="0" marL="0">
+              <a:buNone/>
+            </a:pPr>
+            <a:r>
+              <a:rPr lang="en-US" sz="1220" dirty="0">
                 <a:solidFill>
                   <a:srgbClr val="17364A"/>
                 </a:solidFill>
@@ -9962,13 +10118,16 @@
                 <a:ea typeface="Aptos" pitchFamily="34" charset="-122"/>
                 <a:cs typeface="Aptos" pitchFamily="34" charset="-120"/>
               </a:rPr>
-              <a:t>Staff may use public or personal AI tools before the agency has reviewed privacy,.</a:t>
-            </a:r>
-            <a:endParaRPr lang="en-US" sz="1380" dirty="0"/>
-          </a:p>
-          <a:p>
-            <a:r>
-              <a:rPr lang="en-US" sz="1380" dirty="0">
+              <a:t>Staff may use public or personal AI tools before the agency has.</a:t>
+            </a:r>
+            <a:endParaRPr lang="en-US" sz="1220" dirty="0"/>
+          </a:p>
+          <a:p>
+            <a:pPr indent="0" marL="0">
+              <a:buNone/>
+            </a:pPr>
+            <a:r>
+              <a:rPr lang="en-US" sz="1220" dirty="0">
                 <a:solidFill>
                   <a:srgbClr val="17364A"/>
                 </a:solidFill>
@@ -9976,13 +10135,16 @@
                 <a:ea typeface="Aptos" pitchFamily="34" charset="-122"/>
                 <a:cs typeface="Aptos" pitchFamily="34" charset="-120"/>
               </a:rPr>
-              <a:t>Guardrail: publish a plain-language list of approved, restricted, and prohibited uses,.</a:t>
-            </a:r>
-            <a:endParaRPr lang="en-US" sz="1380" dirty="0"/>
-          </a:p>
-          <a:p>
-            <a:r>
-              <a:rPr lang="en-US" sz="1380" dirty="0">
+              <a:t>Guardrail: publish a plain-language list of approved, restricted,.</a:t>
+            </a:r>
+            <a:endParaRPr lang="en-US" sz="1220" dirty="0"/>
+          </a:p>
+          <a:p>
+            <a:pPr indent="0" marL="0">
+              <a:buNone/>
+            </a:pPr>
+            <a:r>
+              <a:rPr lang="en-US" sz="1220" dirty="0">
                 <a:solidFill>
                   <a:srgbClr val="17364A"/>
                 </a:solidFill>
@@ -9992,7 +10154,7 @@
               </a:rPr>
               <a:t>Hidden automation.</a:t>
             </a:r>
-            <a:endParaRPr lang="en-US" sz="1380" dirty="0"/>
+            <a:endParaRPr lang="en-US" sz="1220" dirty="0"/>
           </a:p>
         </p:txBody>
       </p:sp>
@@ -10070,17 +10232,17 @@
         </p:nvSpPr>
         <p:spPr>
           <a:xfrm>
-            <a:off x="7799832" y="5001768"/>
-            <a:ext cx="3145536" cy="502920"/>
-          </a:xfrm>
-          <a:prstGeom prst="rect">
-            <a:avLst/>
-          </a:prstGeom>
-          <a:noFill/>
-          <a:ln/>
-        </p:spPr>
-        <p:txBody>
-          <a:bodyPr wrap="square" lIns="0" tIns="0" rIns="0" bIns="0" rtlCol="0" anchor="t">
+            <a:off x="7799832" y="4974336"/>
+            <a:ext cx="3145536" cy="576072"/>
+          </a:xfrm>
+          <a:prstGeom prst="rect">
+            <a:avLst/>
+          </a:prstGeom>
+          <a:noFill/>
+          <a:ln/>
+        </p:spPr>
+        <p:txBody>
+          <a:bodyPr wrap="square" lIns="254" tIns="254" rIns="254" bIns="254" rtlCol="0" anchor="t">
             <a:normAutofit/>
           </a:bodyPr>
           <a:lstStyle/>
@@ -10089,7 +10251,7 @@
               <a:buNone/>
             </a:pPr>
             <a:r>
-              <a:rPr lang="en-US" sz="1550" dirty="0">
+              <a:rPr lang="en-US" sz="1320" dirty="0">
                 <a:solidFill>
                   <a:srgbClr val="17364A"/>
                 </a:solidFill>
@@ -10097,9 +10259,9 @@
                 <a:ea typeface="Aptos" pitchFamily="34" charset="-122"/>
                 <a:cs typeface="Aptos" pitchFamily="34" charset="-120"/>
               </a:rPr>
-              <a:t>Translate this concept into clear decision rights, review steps, documentation expectations, and escalation paths before an AI-supported workflow is approved.</a:t>
-            </a:r>
-            <a:endParaRPr lang="en-US" sz="1550" dirty="0"/>
+              <a:t>Translate this concept into clear decision rights, review steps, documentation expectations, and escalation paths before.</a:t>
+            </a:r>
+            <a:endParaRPr lang="en-US" sz="1320" dirty="0"/>
           </a:p>
         </p:txBody>
       </p:sp>
@@ -10400,49 +10562,58 @@
           <a:ln/>
         </p:spPr>
         <p:txBody>
-          <a:bodyPr wrap="square" lIns="635" tIns="635" rIns="635" bIns="635" rtlCol="0" anchor="t">
+          <a:bodyPr wrap="square" lIns="1016" tIns="1016" rIns="1016" bIns="1016" rtlCol="0" anchor="t">
             <a:normAutofit/>
           </a:bodyPr>
           <a:lstStyle/>
           <a:p>
+            <a:pPr indent="0" marL="0">
+              <a:buNone/>
+            </a:pPr>
             <a:r>
               <a:rPr lang="en-US" sz="2100" dirty="0">
                 <a:solidFill>
-                  <a:srgbClr val="17364A"/>
-                </a:solidFill>
-                <a:latin typeface="Aptos" pitchFamily="34" charset="0"/>
-                <a:ea typeface="Aptos" pitchFamily="34" charset="-122"/>
-                <a:cs typeface="Aptos" pitchFamily="34" charset="-120"/>
-              </a:rPr>
-              <a:t>Privacy and confidentiality failures.</a:t>
+                  <a:srgbClr val="003A63"/>
+                </a:solidFill>
+                <a:latin typeface="Aptos" pitchFamily="34" charset="0"/>
+                <a:ea typeface="Aptos" pitchFamily="34" charset="-122"/>
+                <a:cs typeface="Aptos" pitchFamily="34" charset="-120"/>
+              </a:rPr>
+              <a:t>• Privacy and confidentiality failures.</a:t>
             </a:r>
             <a:endParaRPr lang="en-US" sz="2100" dirty="0"/>
           </a:p>
           <a:p>
+            <a:pPr indent="0" marL="0">
+              <a:buNone/>
+            </a:pPr>
             <a:r>
               <a:rPr lang="en-US" sz="2100" dirty="0">
                 <a:solidFill>
-                  <a:srgbClr val="17364A"/>
-                </a:solidFill>
-                <a:latin typeface="Aptos" pitchFamily="34" charset="0"/>
-                <a:ea typeface="Aptos" pitchFamily="34" charset="-122"/>
-                <a:cs typeface="Aptos" pitchFamily="34" charset="-120"/>
-              </a:rPr>
-              <a:t>Sensitive public health information can be exposed through inappropriate prompts, file uploads, model.</a:t>
+                  <a:srgbClr val="003A63"/>
+                </a:solidFill>
+                <a:latin typeface="Aptos" pitchFamily="34" charset="0"/>
+                <a:ea typeface="Aptos" pitchFamily="34" charset="-122"/>
+                <a:cs typeface="Aptos" pitchFamily="34" charset="-120"/>
+              </a:rPr>
+              <a:t>• Sensitive public health information can be exposed through inappropriate prompts, file.</a:t>
             </a:r>
             <a:endParaRPr lang="en-US" sz="2100" dirty="0"/>
           </a:p>
           <a:p>
+            <a:pPr indent="0" marL="0">
+              <a:buNone/>
+            </a:pPr>
             <a:r>
               <a:rPr lang="en-US" sz="2100" dirty="0">
                 <a:solidFill>
-                  <a:srgbClr val="17364A"/>
-                </a:solidFill>
-                <a:latin typeface="Aptos" pitchFamily="34" charset="0"/>
-                <a:ea typeface="Aptos" pitchFamily="34" charset="-122"/>
-                <a:cs typeface="Aptos" pitchFamily="34" charset="-120"/>
-              </a:rPr>
-              <a:t>Guardrail: require data classification, minimum necessary use, approved environments, access controls,.</a:t>
+                  <a:srgbClr val="003A63"/>
+                </a:solidFill>
+                <a:latin typeface="Aptos" pitchFamily="34" charset="0"/>
+                <a:ea typeface="Aptos" pitchFamily="34" charset="-122"/>
+                <a:cs typeface="Aptos" pitchFamily="34" charset="-120"/>
+              </a:rPr>
+              <a:t>• Guardrail: require data classification, minimum necessary use, approved environments, access.</a:t>
             </a:r>
             <a:endParaRPr lang="en-US" sz="2100" dirty="0"/>
           </a:p>
@@ -10522,17 +10693,17 @@
         </p:nvSpPr>
         <p:spPr>
           <a:xfrm>
-            <a:off x="7799832" y="1828800"/>
-            <a:ext cx="3145536" cy="685800"/>
-          </a:xfrm>
-          <a:prstGeom prst="rect">
-            <a:avLst/>
-          </a:prstGeom>
-          <a:noFill/>
-          <a:ln/>
-        </p:spPr>
-        <p:txBody>
-          <a:bodyPr wrap="square" lIns="0" tIns="0" rIns="0" bIns="0" rtlCol="0" anchor="t">
+            <a:off x="7799832" y="1801368"/>
+            <a:ext cx="3145536" cy="758952"/>
+          </a:xfrm>
+          <a:prstGeom prst="rect">
+            <a:avLst/>
+          </a:prstGeom>
+          <a:noFill/>
+          <a:ln/>
+        </p:spPr>
+        <p:txBody>
+          <a:bodyPr wrap="square" lIns="254" tIns="254" rIns="254" bIns="254" rtlCol="0" anchor="t">
             <a:normAutofit/>
           </a:bodyPr>
           <a:lstStyle/>
@@ -10541,7 +10712,7 @@
               <a:buNone/>
             </a:pPr>
             <a:r>
-              <a:rPr lang="en-US" sz="1550" dirty="0">
+              <a:rPr lang="en-US" sz="1320" dirty="0">
                 <a:solidFill>
                   <a:srgbClr val="17364A"/>
                 </a:solidFill>
@@ -10551,7 +10722,7 @@
               </a:rPr>
               <a:t>Privacy and confidentiality failures.</a:t>
             </a:r>
-            <a:endParaRPr lang="en-US" sz="1550" dirty="0"/>
+            <a:endParaRPr lang="en-US" sz="1320" dirty="0"/>
           </a:p>
         </p:txBody>
       </p:sp>
@@ -10639,13 +10810,16 @@
           <a:ln/>
         </p:spPr>
         <p:txBody>
-          <a:bodyPr wrap="square" lIns="254" tIns="254" rIns="254" bIns="254" rtlCol="0" anchor="t">
+          <a:bodyPr wrap="square" lIns="508" tIns="508" rIns="508" bIns="508" rtlCol="0" anchor="t">
             <a:normAutofit/>
           </a:bodyPr>
           <a:lstStyle/>
           <a:p>
-            <a:r>
-              <a:rPr lang="en-US" sz="1380" dirty="0">
+            <a:pPr indent="0" marL="0">
+              <a:buNone/>
+            </a:pPr>
+            <a:r>
+              <a:rPr lang="en-US" sz="1220" dirty="0">
                 <a:solidFill>
                   <a:srgbClr val="17364A"/>
                 </a:solidFill>
@@ -10653,13 +10827,16 @@
                 <a:ea typeface="Aptos" pitchFamily="34" charset="-122"/>
                 <a:cs typeface="Aptos" pitchFamily="34" charset="-120"/>
               </a:rPr>
-              <a:t>Sensitive public health information can be exposed through inappropriate prompts, file.</a:t>
-            </a:r>
-            <a:endParaRPr lang="en-US" sz="1380" dirty="0"/>
-          </a:p>
-          <a:p>
-            <a:r>
-              <a:rPr lang="en-US" sz="1380" dirty="0">
+              <a:t>Sensitive public health information can be exposed through.</a:t>
+            </a:r>
+            <a:endParaRPr lang="en-US" sz="1220" dirty="0"/>
+          </a:p>
+          <a:p>
+            <a:pPr indent="0" marL="0">
+              <a:buNone/>
+            </a:pPr>
+            <a:r>
+              <a:rPr lang="en-US" sz="1220" dirty="0">
                 <a:solidFill>
                   <a:srgbClr val="17364A"/>
                 </a:solidFill>
@@ -10667,13 +10844,16 @@
                 <a:ea typeface="Aptos" pitchFamily="34" charset="-122"/>
                 <a:cs typeface="Aptos" pitchFamily="34" charset="-120"/>
               </a:rPr>
-              <a:t>Guardrail: require data classification, minimum necessary use, approved environments,.</a:t>
-            </a:r>
-            <a:endParaRPr lang="en-US" sz="1380" dirty="0"/>
-          </a:p>
-          <a:p>
-            <a:r>
-              <a:rPr lang="en-US" sz="1380" dirty="0">
+              <a:t>Guardrail: require data classification, minimum necessary use,.</a:t>
+            </a:r>
+            <a:endParaRPr lang="en-US" sz="1220" dirty="0"/>
+          </a:p>
+          <a:p>
+            <a:pPr indent="0" marL="0">
+              <a:buNone/>
+            </a:pPr>
+            <a:r>
+              <a:rPr lang="en-US" sz="1220" dirty="0">
                 <a:solidFill>
                   <a:srgbClr val="17364A"/>
                 </a:solidFill>
@@ -10683,7 +10863,7 @@
               </a:rPr>
               <a:t>Equity and representation harms.</a:t>
             </a:r>
-            <a:endParaRPr lang="en-US" sz="1380" dirty="0"/>
+            <a:endParaRPr lang="en-US" sz="1220" dirty="0"/>
           </a:p>
         </p:txBody>
       </p:sp>
@@ -10761,17 +10941,17 @@
         </p:nvSpPr>
         <p:spPr>
           <a:xfrm>
-            <a:off x="7799832" y="5001768"/>
-            <a:ext cx="3145536" cy="502920"/>
-          </a:xfrm>
-          <a:prstGeom prst="rect">
-            <a:avLst/>
-          </a:prstGeom>
-          <a:noFill/>
-          <a:ln/>
-        </p:spPr>
-        <p:txBody>
-          <a:bodyPr wrap="square" lIns="0" tIns="0" rIns="0" bIns="0" rtlCol="0" anchor="t">
+            <a:off x="7799832" y="4974336"/>
+            <a:ext cx="3145536" cy="576072"/>
+          </a:xfrm>
+          <a:prstGeom prst="rect">
+            <a:avLst/>
+          </a:prstGeom>
+          <a:noFill/>
+          <a:ln/>
+        </p:spPr>
+        <p:txBody>
+          <a:bodyPr wrap="square" lIns="254" tIns="254" rIns="254" bIns="254" rtlCol="0" anchor="t">
             <a:normAutofit/>
           </a:bodyPr>
           <a:lstStyle/>
@@ -10780,7 +10960,7 @@
               <a:buNone/>
             </a:pPr>
             <a:r>
-              <a:rPr lang="en-US" sz="1550" dirty="0">
+              <a:rPr lang="en-US" sz="1320" dirty="0">
                 <a:solidFill>
                   <a:srgbClr val="17364A"/>
                 </a:solidFill>
@@ -10788,9 +10968,9 @@
                 <a:ea typeface="Aptos" pitchFamily="34" charset="-122"/>
                 <a:cs typeface="Aptos" pitchFamily="34" charset="-120"/>
               </a:rPr>
-              <a:t>Translate this concept into clear decision rights, review steps, documentation expectations, and escalation paths before an AI-supported workflow is approved.</a:t>
-            </a:r>
-            <a:endParaRPr lang="en-US" sz="1550" dirty="0"/>
+              <a:t>Translate this concept into clear decision rights, review steps, documentation expectations, and escalation paths before.</a:t>
+            </a:r>
+            <a:endParaRPr lang="en-US" sz="1320" dirty="0"/>
           </a:p>
         </p:txBody>
       </p:sp>
@@ -11091,49 +11271,58 @@
           <a:ln/>
         </p:spPr>
         <p:txBody>
-          <a:bodyPr wrap="square" lIns="635" tIns="635" rIns="635" bIns="635" rtlCol="0" anchor="t">
+          <a:bodyPr wrap="square" lIns="1016" tIns="1016" rIns="1016" bIns="1016" rtlCol="0" anchor="t">
             <a:normAutofit/>
           </a:bodyPr>
           <a:lstStyle/>
           <a:p>
+            <a:pPr indent="0" marL="0">
+              <a:buNone/>
+            </a:pPr>
             <a:r>
               <a:rPr lang="en-US" sz="2100" dirty="0">
                 <a:solidFill>
-                  <a:srgbClr val="17364A"/>
-                </a:solidFill>
-                <a:latin typeface="Aptos" pitchFamily="34" charset="0"/>
-                <a:ea typeface="Aptos" pitchFamily="34" charset="-122"/>
-                <a:cs typeface="Aptos" pitchFamily="34" charset="-120"/>
-              </a:rPr>
-              <a:t>AI governance is the set of people, policies, processes, decision rights, documentation practices, and oversight.</a:t>
+                  <a:srgbClr val="003A63"/>
+                </a:solidFill>
+                <a:latin typeface="Aptos" pitchFamily="34" charset="0"/>
+                <a:ea typeface="Aptos" pitchFamily="34" charset="-122"/>
+                <a:cs typeface="Aptos" pitchFamily="34" charset="-120"/>
+              </a:rPr>
+              <a:t>• AI governance is the set of people, policies, processes, decision rights, documentation.</a:t>
             </a:r>
             <a:endParaRPr lang="en-US" sz="2100" dirty="0"/>
           </a:p>
           <a:p>
+            <a:pPr indent="0" marL="0">
+              <a:buNone/>
+            </a:pPr>
             <a:r>
               <a:rPr lang="en-US" sz="2100" dirty="0">
                 <a:solidFill>
-                  <a:srgbClr val="17364A"/>
-                </a:solidFill>
-                <a:latin typeface="Aptos" pitchFamily="34" charset="0"/>
-                <a:ea typeface="Aptos" pitchFamily="34" charset="-122"/>
-                <a:cs typeface="Aptos" pitchFamily="34" charset="-120"/>
-              </a:rPr>
-              <a:t>Governance does not mean that every staff member must become an AI expert, and it does not mean that every AI.</a:t>
+                  <a:srgbClr val="003A63"/>
+                </a:solidFill>
+                <a:latin typeface="Aptos" pitchFamily="34" charset="0"/>
+                <a:ea typeface="Aptos" pitchFamily="34" charset="-122"/>
+                <a:cs typeface="Aptos" pitchFamily="34" charset="-120"/>
+              </a:rPr>
+              <a:t>• Governance does not mean that every staff member must become an AI expert, and it does not.</a:t>
             </a:r>
             <a:endParaRPr lang="en-US" sz="2100" dirty="0"/>
           </a:p>
           <a:p>
+            <a:pPr indent="0" marL="0">
+              <a:buNone/>
+            </a:pPr>
             <a:r>
               <a:rPr lang="en-US" sz="2100" dirty="0">
                 <a:solidFill>
-                  <a:srgbClr val="17364A"/>
-                </a:solidFill>
-                <a:latin typeface="Aptos" pitchFamily="34" charset="0"/>
-                <a:ea typeface="Aptos" pitchFamily="34" charset="-122"/>
-                <a:cs typeface="Aptos" pitchFamily="34" charset="-120"/>
-              </a:rPr>
-              <a:t>Good governance helps an agency decide what AI uses are appropriate, what review is needed, what data may be.</a:t>
+                  <a:srgbClr val="003A63"/>
+                </a:solidFill>
+                <a:latin typeface="Aptos" pitchFamily="34" charset="0"/>
+                <a:ea typeface="Aptos" pitchFamily="34" charset="-122"/>
+                <a:cs typeface="Aptos" pitchFamily="34" charset="-120"/>
+              </a:rPr>
+              <a:t>• Good governance helps an agency decide what AI uses are appropriate, what review is needed,.</a:t>
             </a:r>
             <a:endParaRPr lang="en-US" sz="2100" dirty="0"/>
           </a:p>
@@ -11213,17 +11402,17 @@
         </p:nvSpPr>
         <p:spPr>
           <a:xfrm>
-            <a:off x="8074152" y="1920240"/>
-            <a:ext cx="2825496" cy="1280160"/>
-          </a:xfrm>
-          <a:prstGeom prst="rect">
-            <a:avLst/>
-          </a:prstGeom>
-          <a:noFill/>
-          <a:ln/>
-        </p:spPr>
-        <p:txBody>
-          <a:bodyPr wrap="square" lIns="0" tIns="0" rIns="0" bIns="0" rtlCol="0" anchor="t">
+            <a:off x="8074152" y="1892808"/>
+            <a:ext cx="2825496" cy="1353312"/>
+          </a:xfrm>
+          <a:prstGeom prst="rect">
+            <a:avLst/>
+          </a:prstGeom>
+          <a:noFill/>
+          <a:ln/>
+        </p:spPr>
+        <p:txBody>
+          <a:bodyPr wrap="square" lIns="254" tIns="254" rIns="254" bIns="254" rtlCol="0" anchor="t">
             <a:normAutofit/>
           </a:bodyPr>
           <a:lstStyle/>
@@ -11232,7 +11421,7 @@
               <a:buNone/>
             </a:pPr>
             <a:r>
-              <a:rPr lang="en-US" sz="1550" dirty="0">
+              <a:rPr lang="en-US" sz="1320" dirty="0">
                 <a:solidFill>
                   <a:srgbClr val="17364A"/>
                 </a:solidFill>
@@ -11240,43 +11429,9 @@
                 <a:ea typeface="Aptos" pitchFamily="34" charset="-122"/>
                 <a:cs typeface="Aptos" pitchFamily="34" charset="-120"/>
               </a:rPr>
-              <a:t>Level: introductory</a:t>
-            </a:r>
-            <a:endParaRPr lang="en-US" sz="1550" dirty="0"/>
-          </a:p>
-          <a:p>
-            <a:pPr indent="0" marL="0">
-              <a:buNone/>
-            </a:pPr>
-            <a:r>
-              <a:rPr lang="en-US" sz="1550" dirty="0">
-                <a:solidFill>
-                  <a:srgbClr val="17364A"/>
-                </a:solidFill>
-                <a:latin typeface="Aptos" pitchFamily="34" charset="0"/>
-                <a:ea typeface="Aptos" pitchFamily="34" charset="-122"/>
-                <a:cs typeface="Aptos" pitchFamily="34" charset="-120"/>
-              </a:rPr>
-              <a:t>Primary track: Governance and Security Track</a:t>
-            </a:r>
-            <a:endParaRPr lang="en-US" sz="1550" dirty="0"/>
-          </a:p>
-          <a:p>
-            <a:pPr indent="0" marL="0">
-              <a:buNone/>
-            </a:pPr>
-            <a:r>
-              <a:rPr lang="en-US" sz="1550" dirty="0">
-                <a:solidFill>
-                  <a:srgbClr val="17364A"/>
-                </a:solidFill>
-                <a:latin typeface="Aptos" pitchFamily="34" charset="0"/>
-                <a:ea typeface="Aptos" pitchFamily="34" charset="-122"/>
-                <a:cs typeface="Aptos" pitchFamily="34" charset="-120"/>
-              </a:rPr>
-              <a:t>Appears in tracks: shared-foundational, governance-security</a:t>
-            </a:r>
-            <a:endParaRPr lang="en-US" sz="1550" dirty="0"/>
+              <a:t>Level: introductory Primary track: Governance and Security Track Appears in tracks: shared-foundational,.</a:t>
+            </a:r>
+            <a:endParaRPr lang="en-US" sz="1320" dirty="0"/>
           </a:p>
         </p:txBody>
       </p:sp>
@@ -11364,13 +11519,16 @@
           <a:ln/>
         </p:spPr>
         <p:txBody>
-          <a:bodyPr wrap="square" lIns="254" tIns="254" rIns="254" bIns="254" rtlCol="0" anchor="t">
+          <a:bodyPr wrap="square" lIns="508" tIns="508" rIns="508" bIns="508" rtlCol="0" anchor="t">
             <a:normAutofit/>
           </a:bodyPr>
           <a:lstStyle/>
           <a:p>
-            <a:r>
-              <a:rPr lang="en-US" sz="1380" dirty="0">
+            <a:pPr indent="0" marL="0">
+              <a:buNone/>
+            </a:pPr>
+            <a:r>
+              <a:rPr lang="en-US" sz="1220" dirty="0">
                 <a:solidFill>
                   <a:srgbClr val="17364A"/>
                 </a:solidFill>
@@ -11380,11 +11538,14 @@
               </a:rPr>
               <a:t>Read the module for shared vocabulary and context.</a:t>
             </a:r>
-            <a:endParaRPr lang="en-US" sz="1380" dirty="0"/>
-          </a:p>
-          <a:p>
-            <a:r>
-              <a:rPr lang="en-US" sz="1380" dirty="0">
+            <a:endParaRPr lang="en-US" sz="1220" dirty="0"/>
+          </a:p>
+          <a:p>
+            <a:pPr indent="0" marL="0">
+              <a:buNone/>
+            </a:pPr>
+            <a:r>
+              <a:rPr lang="en-US" sz="1220" dirty="0">
                 <a:solidFill>
                   <a:srgbClr val="17364A"/>
                 </a:solidFill>
@@ -11394,11 +11555,14 @@
               </a:rPr>
               <a:t>Complete the practical exercise to apply the concept.</a:t>
             </a:r>
-            <a:endParaRPr lang="en-US" sz="1380" dirty="0"/>
-          </a:p>
-          <a:p>
-            <a:r>
-              <a:rPr lang="en-US" sz="1380" dirty="0">
+            <a:endParaRPr lang="en-US" sz="1220" dirty="0"/>
+          </a:p>
+          <a:p>
+            <a:pPr indent="0" marL="0">
+              <a:buNone/>
+            </a:pPr>
+            <a:r>
+              <a:rPr lang="en-US" sz="1220" dirty="0">
                 <a:solidFill>
                   <a:srgbClr val="17364A"/>
                 </a:solidFill>
@@ -11408,7 +11572,7 @@
               </a:rPr>
               <a:t>Use the notes and references for deeper review.</a:t>
             </a:r>
-            <a:endParaRPr lang="en-US" sz="1380" dirty="0"/>
+            <a:endParaRPr lang="en-US" sz="1220" dirty="0"/>
           </a:p>
         </p:txBody>
       </p:sp>
@@ -11709,49 +11873,58 @@
           <a:ln/>
         </p:spPr>
         <p:txBody>
-          <a:bodyPr wrap="square" lIns="635" tIns="635" rIns="635" bIns="635" rtlCol="0" anchor="t">
+          <a:bodyPr wrap="square" lIns="1016" tIns="1016" rIns="1016" bIns="1016" rtlCol="0" anchor="t">
             <a:normAutofit/>
           </a:bodyPr>
           <a:lstStyle/>
           <a:p>
+            <a:pPr indent="0" marL="0">
+              <a:buNone/>
+            </a:pPr>
             <a:r>
               <a:rPr lang="en-US" sz="2100" dirty="0">
                 <a:solidFill>
-                  <a:srgbClr val="17364A"/>
-                </a:solidFill>
-                <a:latin typeface="Aptos" pitchFamily="34" charset="0"/>
-                <a:ea typeface="Aptos" pitchFamily="34" charset="-122"/>
-                <a:cs typeface="Aptos" pitchFamily="34" charset="-120"/>
-              </a:rPr>
-              <a:t>Governance overload.</a:t>
+                  <a:srgbClr val="003A63"/>
+                </a:solidFill>
+                <a:latin typeface="Aptos" pitchFamily="34" charset="0"/>
+                <a:ea typeface="Aptos" pitchFamily="34" charset="-122"/>
+                <a:cs typeface="Aptos" pitchFamily="34" charset="-120"/>
+              </a:rPr>
+              <a:t>• Governance overload.</a:t>
             </a:r>
             <a:endParaRPr lang="en-US" sz="2100" dirty="0"/>
           </a:p>
           <a:p>
+            <a:pPr indent="0" marL="0">
+              <a:buNone/>
+            </a:pPr>
             <a:r>
               <a:rPr lang="en-US" sz="2100" dirty="0">
                 <a:solidFill>
-                  <a:srgbClr val="17364A"/>
-                </a:solidFill>
-                <a:latin typeface="Aptos" pitchFamily="34" charset="0"/>
-                <a:ea typeface="Aptos" pitchFamily="34" charset="-122"/>
-                <a:cs typeface="Aptos" pitchFamily="34" charset="-120"/>
-              </a:rPr>
-              <a:t>Agencies can create review processes so burdensome that staff avoid them or innovation stalls.</a:t>
+                  <a:srgbClr val="003A63"/>
+                </a:solidFill>
+                <a:latin typeface="Aptos" pitchFamily="34" charset="0"/>
+                <a:ea typeface="Aptos" pitchFamily="34" charset="-122"/>
+                <a:cs typeface="Aptos" pitchFamily="34" charset="-120"/>
+              </a:rPr>
+              <a:t>• Agencies can create review processes so burdensome that staff avoid them or innovation stalls.</a:t>
             </a:r>
             <a:endParaRPr lang="en-US" sz="2100" dirty="0"/>
           </a:p>
           <a:p>
+            <a:pPr indent="0" marL="0">
+              <a:buNone/>
+            </a:pPr>
             <a:r>
               <a:rPr lang="en-US" sz="2100" dirty="0">
                 <a:solidFill>
-                  <a:srgbClr val="17364A"/>
-                </a:solidFill>
-                <a:latin typeface="Aptos" pitchFamily="34" charset="0"/>
-                <a:ea typeface="Aptos" pitchFamily="34" charset="-122"/>
-                <a:cs typeface="Aptos" pitchFamily="34" charset="-120"/>
-              </a:rPr>
-              <a:t>Guardrail: use risk tiers, standard intake forms, clear timelines, and lightweight pathways for.</a:t>
+                  <a:srgbClr val="003A63"/>
+                </a:solidFill>
+                <a:latin typeface="Aptos" pitchFamily="34" charset="0"/>
+                <a:ea typeface="Aptos" pitchFamily="34" charset="-122"/>
+                <a:cs typeface="Aptos" pitchFamily="34" charset="-120"/>
+              </a:rPr>
+              <a:t>• Guardrail: use risk tiers, standard intake forms, clear timelines, and lightweight pathways for.</a:t>
             </a:r>
             <a:endParaRPr lang="en-US" sz="2100" dirty="0"/>
           </a:p>
@@ -11831,17 +12004,17 @@
         </p:nvSpPr>
         <p:spPr>
           <a:xfrm>
-            <a:off x="7799832" y="1828800"/>
-            <a:ext cx="3145536" cy="685800"/>
-          </a:xfrm>
-          <a:prstGeom prst="rect">
-            <a:avLst/>
-          </a:prstGeom>
-          <a:noFill/>
-          <a:ln/>
-        </p:spPr>
-        <p:txBody>
-          <a:bodyPr wrap="square" lIns="0" tIns="0" rIns="0" bIns="0" rtlCol="0" anchor="t">
+            <a:off x="7799832" y="1801368"/>
+            <a:ext cx="3145536" cy="758952"/>
+          </a:xfrm>
+          <a:prstGeom prst="rect">
+            <a:avLst/>
+          </a:prstGeom>
+          <a:noFill/>
+          <a:ln/>
+        </p:spPr>
+        <p:txBody>
+          <a:bodyPr wrap="square" lIns="254" tIns="254" rIns="254" bIns="254" rtlCol="0" anchor="t">
             <a:normAutofit/>
           </a:bodyPr>
           <a:lstStyle/>
@@ -11850,7 +12023,7 @@
               <a:buNone/>
             </a:pPr>
             <a:r>
-              <a:rPr lang="en-US" sz="1550" dirty="0">
+              <a:rPr lang="en-US" sz="1320" dirty="0">
                 <a:solidFill>
                   <a:srgbClr val="17364A"/>
                 </a:solidFill>
@@ -11860,7 +12033,7 @@
               </a:rPr>
               <a:t>Governance overload.</a:t>
             </a:r>
-            <a:endParaRPr lang="en-US" sz="1550" dirty="0"/>
+            <a:endParaRPr lang="en-US" sz="1320" dirty="0"/>
           </a:p>
         </p:txBody>
       </p:sp>
@@ -11948,13 +12121,16 @@
           <a:ln/>
         </p:spPr>
         <p:txBody>
-          <a:bodyPr wrap="square" lIns="254" tIns="254" rIns="254" bIns="254" rtlCol="0" anchor="t">
+          <a:bodyPr wrap="square" lIns="508" tIns="508" rIns="508" bIns="508" rtlCol="0" anchor="t">
             <a:normAutofit/>
           </a:bodyPr>
           <a:lstStyle/>
           <a:p>
-            <a:r>
-              <a:rPr lang="en-US" sz="1380" dirty="0">
+            <a:pPr indent="0" marL="0">
+              <a:buNone/>
+            </a:pPr>
+            <a:r>
+              <a:rPr lang="en-US" sz="1220" dirty="0">
                 <a:solidFill>
                   <a:srgbClr val="17364A"/>
                 </a:solidFill>
@@ -11964,11 +12140,14 @@
               </a:rPr>
               <a:t>Governance overload.</a:t>
             </a:r>
-            <a:endParaRPr lang="en-US" sz="1380" dirty="0"/>
-          </a:p>
-          <a:p>
-            <a:r>
-              <a:rPr lang="en-US" sz="1380" dirty="0">
+            <a:endParaRPr lang="en-US" sz="1220" dirty="0"/>
+          </a:p>
+          <a:p>
+            <a:pPr indent="0" marL="0">
+              <a:buNone/>
+            </a:pPr>
+            <a:r>
+              <a:rPr lang="en-US" sz="1220" dirty="0">
                 <a:solidFill>
                   <a:srgbClr val="17364A"/>
                 </a:solidFill>
@@ -11976,13 +12155,16 @@
                 <a:ea typeface="Aptos" pitchFamily="34" charset="-122"/>
                 <a:cs typeface="Aptos" pitchFamily="34" charset="-120"/>
               </a:rPr>
-              <a:t>Agencies can create review processes so burdensome that staff avoid them or innovation.</a:t>
-            </a:r>
-            <a:endParaRPr lang="en-US" sz="1380" dirty="0"/>
-          </a:p>
-          <a:p>
-            <a:r>
-              <a:rPr lang="en-US" sz="1380" dirty="0">
+              <a:t>Agencies can create review processes so burdensome that staff.</a:t>
+            </a:r>
+            <a:endParaRPr lang="en-US" sz="1220" dirty="0"/>
+          </a:p>
+          <a:p>
+            <a:pPr indent="0" marL="0">
+              <a:buNone/>
+            </a:pPr>
+            <a:r>
+              <a:rPr lang="en-US" sz="1220" dirty="0">
                 <a:solidFill>
                   <a:srgbClr val="17364A"/>
                 </a:solidFill>
@@ -11990,9 +12172,9 @@
                 <a:ea typeface="Aptos" pitchFamily="34" charset="-122"/>
                 <a:cs typeface="Aptos" pitchFamily="34" charset="-120"/>
               </a:rPr>
-              <a:t>Guardrail: use risk tiers, standard intake forms, clear timelines, and lightweight.</a:t>
-            </a:r>
-            <a:endParaRPr lang="en-US" sz="1380" dirty="0"/>
+              <a:t>Guardrail: use risk tiers, standard intake forms, clear timelines,.</a:t>
+            </a:r>
+            <a:endParaRPr lang="en-US" sz="1220" dirty="0"/>
           </a:p>
         </p:txBody>
       </p:sp>
@@ -12070,17 +12252,17 @@
         </p:nvSpPr>
         <p:spPr>
           <a:xfrm>
-            <a:off x="7799832" y="5001768"/>
-            <a:ext cx="3145536" cy="502920"/>
-          </a:xfrm>
-          <a:prstGeom prst="rect">
-            <a:avLst/>
-          </a:prstGeom>
-          <a:noFill/>
-          <a:ln/>
-        </p:spPr>
-        <p:txBody>
-          <a:bodyPr wrap="square" lIns="0" tIns="0" rIns="0" bIns="0" rtlCol="0" anchor="t">
+            <a:off x="7799832" y="4974336"/>
+            <a:ext cx="3145536" cy="576072"/>
+          </a:xfrm>
+          <a:prstGeom prst="rect">
+            <a:avLst/>
+          </a:prstGeom>
+          <a:noFill/>
+          <a:ln/>
+        </p:spPr>
+        <p:txBody>
+          <a:bodyPr wrap="square" lIns="254" tIns="254" rIns="254" bIns="254" rtlCol="0" anchor="t">
             <a:normAutofit/>
           </a:bodyPr>
           <a:lstStyle/>
@@ -12089,7 +12271,7 @@
               <a:buNone/>
             </a:pPr>
             <a:r>
-              <a:rPr lang="en-US" sz="1550" dirty="0">
+              <a:rPr lang="en-US" sz="1320" dirty="0">
                 <a:solidFill>
                   <a:srgbClr val="17364A"/>
                 </a:solidFill>
@@ -12097,9 +12279,9 @@
                 <a:ea typeface="Aptos" pitchFamily="34" charset="-122"/>
                 <a:cs typeface="Aptos" pitchFamily="34" charset="-120"/>
               </a:rPr>
-              <a:t>Translate this concept into clear decision rights, review steps, documentation expectations, and escalation paths before an AI-supported workflow is approved.</a:t>
-            </a:r>
-            <a:endParaRPr lang="en-US" sz="1550" dirty="0"/>
+              <a:t>Translate this concept into clear decision rights, review steps, documentation expectations, and escalation paths before.</a:t>
+            </a:r>
+            <a:endParaRPr lang="en-US" sz="1320" dirty="0"/>
           </a:p>
         </p:txBody>
       </p:sp>
@@ -12400,49 +12582,58 @@
           <a:ln/>
         </p:spPr>
         <p:txBody>
-          <a:bodyPr wrap="square" lIns="635" tIns="635" rIns="635" bIns="635" rtlCol="0" anchor="t">
+          <a:bodyPr wrap="square" lIns="1016" tIns="1016" rIns="1016" bIns="1016" rtlCol="0" anchor="t">
             <a:normAutofit/>
           </a:bodyPr>
           <a:lstStyle/>
           <a:p>
+            <a:pPr indent="0" marL="0">
+              <a:buNone/>
+            </a:pPr>
             <a:r>
               <a:rPr lang="en-US" sz="2100" dirty="0">
                 <a:solidFill>
-                  <a:srgbClr val="17364A"/>
-                </a:solidFill>
-                <a:latin typeface="Aptos" pitchFamily="34" charset="0"/>
-                <a:ea typeface="Aptos" pitchFamily="34" charset="-122"/>
-                <a:cs typeface="Aptos" pitchFamily="34" charset="-120"/>
-              </a:rPr>
-              <a:t>In AI-supported workflows, governance should be visible at the points where work changes.</a:t>
+                  <a:srgbClr val="003A63"/>
+                </a:solidFill>
+                <a:latin typeface="Aptos" pitchFamily="34" charset="0"/>
+                <a:ea typeface="Aptos" pitchFamily="34" charset="-122"/>
+                <a:cs typeface="Aptos" pitchFamily="34" charset="-120"/>
+              </a:rPr>
+              <a:t>• In AI-supported workflows, governance should be visible at the points where work changes.</a:t>
             </a:r>
             <a:endParaRPr lang="en-US" sz="2100" dirty="0"/>
           </a:p>
           <a:p>
+            <a:pPr indent="0" marL="0">
+              <a:buNone/>
+            </a:pPr>
             <a:r>
               <a:rPr lang="en-US" sz="2100" dirty="0">
                 <a:solidFill>
-                  <a:srgbClr val="17364A"/>
-                </a:solidFill>
-                <a:latin typeface="Aptos" pitchFamily="34" charset="0"/>
-                <a:ea typeface="Aptos" pitchFamily="34" charset="-122"/>
-                <a:cs typeface="Aptos" pitchFamily="34" charset="-120"/>
-              </a:rPr>
-              <a:t>Before use, staff should know whether the tool is approved, what data may be used, what the intended.</a:t>
+                  <a:srgbClr val="003A63"/>
+                </a:solidFill>
+                <a:latin typeface="Aptos" pitchFamily="34" charset="0"/>
+                <a:ea typeface="Aptos" pitchFamily="34" charset="-122"/>
+                <a:cs typeface="Aptos" pitchFamily="34" charset="-120"/>
+              </a:rPr>
+              <a:t>• Before use, staff should know whether the tool is approved, what data may be used, what the.</a:t>
             </a:r>
             <a:endParaRPr lang="en-US" sz="2100" dirty="0"/>
           </a:p>
           <a:p>
+            <a:pPr indent="0" marL="0">
+              <a:buNone/>
+            </a:pPr>
             <a:r>
               <a:rPr lang="en-US" sz="2100" dirty="0">
                 <a:solidFill>
-                  <a:srgbClr val="17364A"/>
-                </a:solidFill>
-                <a:latin typeface="Aptos" pitchFamily="34" charset="0"/>
-                <a:ea typeface="Aptos" pitchFamily="34" charset="-122"/>
-                <a:cs typeface="Aptos" pitchFamily="34" charset="-120"/>
-              </a:rPr>
-              <a:t>During use, staff should know how to review outputs, document decisions, protect sensitive information,.</a:t>
+                  <a:srgbClr val="003A63"/>
+                </a:solidFill>
+                <a:latin typeface="Aptos" pitchFamily="34" charset="0"/>
+                <a:ea typeface="Aptos" pitchFamily="34" charset="-122"/>
+                <a:cs typeface="Aptos" pitchFamily="34" charset="-120"/>
+              </a:rPr>
+              <a:t>• During use, staff should know how to review outputs, document decisions, protect sensitive.</a:t>
             </a:r>
             <a:endParaRPr lang="en-US" sz="2100" dirty="0"/>
           </a:p>
@@ -12522,17 +12713,17 @@
         </p:nvSpPr>
         <p:spPr>
           <a:xfrm>
-            <a:off x="7799832" y="1828800"/>
-            <a:ext cx="3145536" cy="685800"/>
-          </a:xfrm>
-          <a:prstGeom prst="rect">
-            <a:avLst/>
-          </a:prstGeom>
-          <a:noFill/>
-          <a:ln/>
-        </p:spPr>
-        <p:txBody>
-          <a:bodyPr wrap="square" lIns="0" tIns="0" rIns="0" bIns="0" rtlCol="0" anchor="t">
+            <a:off x="7799832" y="1801368"/>
+            <a:ext cx="3145536" cy="758952"/>
+          </a:xfrm>
+          <a:prstGeom prst="rect">
+            <a:avLst/>
+          </a:prstGeom>
+          <a:noFill/>
+          <a:ln/>
+        </p:spPr>
+        <p:txBody>
+          <a:bodyPr wrap="square" lIns="254" tIns="254" rIns="254" bIns="254" rtlCol="0" anchor="t">
             <a:normAutofit/>
           </a:bodyPr>
           <a:lstStyle/>
@@ -12541,7 +12732,7 @@
               <a:buNone/>
             </a:pPr>
             <a:r>
-              <a:rPr lang="en-US" sz="1550" dirty="0">
+              <a:rPr lang="en-US" sz="1320" dirty="0">
                 <a:solidFill>
                   <a:srgbClr val="17364A"/>
                 </a:solidFill>
@@ -12551,7 +12742,7 @@
               </a:rPr>
               <a:t>In AI-supported workflows, governance should be visible at the points where work changes.</a:t>
             </a:r>
-            <a:endParaRPr lang="en-US" sz="1550" dirty="0"/>
+            <a:endParaRPr lang="en-US" sz="1320" dirty="0"/>
           </a:p>
         </p:txBody>
       </p:sp>
@@ -12639,13 +12830,16 @@
           <a:ln/>
         </p:spPr>
         <p:txBody>
-          <a:bodyPr wrap="square" lIns="254" tIns="254" rIns="254" bIns="254" rtlCol="0" anchor="t">
+          <a:bodyPr wrap="square" lIns="508" tIns="508" rIns="508" bIns="508" rtlCol="0" anchor="t">
             <a:normAutofit/>
           </a:bodyPr>
           <a:lstStyle/>
           <a:p>
-            <a:r>
-              <a:rPr lang="en-US" sz="1380" dirty="0">
+            <a:pPr indent="0" marL="0">
+              <a:buNone/>
+            </a:pPr>
+            <a:r>
+              <a:rPr lang="en-US" sz="1220" dirty="0">
                 <a:solidFill>
                   <a:srgbClr val="17364A"/>
                 </a:solidFill>
@@ -12653,13 +12847,16 @@
                 <a:ea typeface="Aptos" pitchFamily="34" charset="-122"/>
                 <a:cs typeface="Aptos" pitchFamily="34" charset="-120"/>
               </a:rPr>
-              <a:t>Before use, staff should know whether the tool is approved, what data may be used, what.</a:t>
-            </a:r>
-            <a:endParaRPr lang="en-US" sz="1380" dirty="0"/>
-          </a:p>
-          <a:p>
-            <a:r>
-              <a:rPr lang="en-US" sz="1380" dirty="0">
+              <a:t>Before use, staff should know whether the tool is approved, what.</a:t>
+            </a:r>
+            <a:endParaRPr lang="en-US" sz="1220" dirty="0"/>
+          </a:p>
+          <a:p>
+            <a:pPr indent="0" marL="0">
+              <a:buNone/>
+            </a:pPr>
+            <a:r>
+              <a:rPr lang="en-US" sz="1220" dirty="0">
                 <a:solidFill>
                   <a:srgbClr val="17364A"/>
                 </a:solidFill>
@@ -12667,13 +12864,16 @@
                 <a:ea typeface="Aptos" pitchFamily="34" charset="-122"/>
                 <a:cs typeface="Aptos" pitchFamily="34" charset="-120"/>
               </a:rPr>
-              <a:t>During use, staff should know how to review outputs, document decisions, protect sensitive.</a:t>
-            </a:r>
-            <a:endParaRPr lang="en-US" sz="1380" dirty="0"/>
-          </a:p>
-          <a:p>
-            <a:r>
-              <a:rPr lang="en-US" sz="1380" dirty="0">
+              <a:t>During use, staff should know how to review outputs, document.</a:t>
+            </a:r>
+            <a:endParaRPr lang="en-US" sz="1220" dirty="0"/>
+          </a:p>
+          <a:p>
+            <a:pPr indent="0" marL="0">
+              <a:buNone/>
+            </a:pPr>
+            <a:r>
+              <a:rPr lang="en-US" sz="1220" dirty="0">
                 <a:solidFill>
                   <a:srgbClr val="17364A"/>
                 </a:solidFill>
@@ -12681,9 +12881,9 @@
                 <a:ea typeface="Aptos" pitchFamily="34" charset="-122"/>
                 <a:cs typeface="Aptos" pitchFamily="34" charset="-120"/>
               </a:rPr>
-              <a:t>After use, the agency should be able to audit what was approved, what evidence supported.</a:t>
-            </a:r>
-            <a:endParaRPr lang="en-US" sz="1380" dirty="0"/>
+              <a:t>After use, the agency should be able to audit what was approved,.</a:t>
+            </a:r>
+            <a:endParaRPr lang="en-US" sz="1220" dirty="0"/>
           </a:p>
         </p:txBody>
       </p:sp>
@@ -12761,17 +12961,17 @@
         </p:nvSpPr>
         <p:spPr>
           <a:xfrm>
-            <a:off x="7799832" y="5001768"/>
-            <a:ext cx="3145536" cy="502920"/>
-          </a:xfrm>
-          <a:prstGeom prst="rect">
-            <a:avLst/>
-          </a:prstGeom>
-          <a:noFill/>
-          <a:ln/>
-        </p:spPr>
-        <p:txBody>
-          <a:bodyPr wrap="square" lIns="0" tIns="0" rIns="0" bIns="0" rtlCol="0" anchor="t">
+            <a:off x="7799832" y="4974336"/>
+            <a:ext cx="3145536" cy="576072"/>
+          </a:xfrm>
+          <a:prstGeom prst="rect">
+            <a:avLst/>
+          </a:prstGeom>
+          <a:noFill/>
+          <a:ln/>
+        </p:spPr>
+        <p:txBody>
+          <a:bodyPr wrap="square" lIns="254" tIns="254" rIns="254" bIns="254" rtlCol="0" anchor="t">
             <a:normAutofit/>
           </a:bodyPr>
           <a:lstStyle/>
@@ -12780,7 +12980,7 @@
               <a:buNone/>
             </a:pPr>
             <a:r>
-              <a:rPr lang="en-US" sz="1550" dirty="0">
+              <a:rPr lang="en-US" sz="1320" dirty="0">
                 <a:solidFill>
                   <a:srgbClr val="17364A"/>
                 </a:solidFill>
@@ -12788,9 +12988,9 @@
                 <a:ea typeface="Aptos" pitchFamily="34" charset="-122"/>
                 <a:cs typeface="Aptos" pitchFamily="34" charset="-120"/>
               </a:rPr>
-              <a:t>Translate this concept into clear decision rights, review steps, documentation expectations, and escalation paths before an AI-supported workflow is approved.</a:t>
-            </a:r>
-            <a:endParaRPr lang="en-US" sz="1550" dirty="0"/>
+              <a:t>Translate this concept into clear decision rights, review steps, documentation expectations, and escalation paths before.</a:t>
+            </a:r>
+            <a:endParaRPr lang="en-US" sz="1320" dirty="0"/>
           </a:p>
         </p:txBody>
       </p:sp>
@@ -13091,49 +13291,58 @@
           <a:ln/>
         </p:spPr>
         <p:txBody>
-          <a:bodyPr wrap="square" lIns="635" tIns="635" rIns="635" bIns="635" rtlCol="0" anchor="t">
+          <a:bodyPr wrap="square" lIns="1016" tIns="1016" rIns="1016" bIns="1016" rtlCol="0" anchor="t">
             <a:normAutofit/>
           </a:bodyPr>
           <a:lstStyle/>
           <a:p>
+            <a:pPr indent="0" marL="0">
+              <a:buNone/>
+            </a:pPr>
             <a:r>
               <a:rPr lang="en-US" sz="2100" dirty="0">
                 <a:solidFill>
-                  <a:srgbClr val="17364A"/>
-                </a:solidFill>
-                <a:latin typeface="Aptos" pitchFamily="34" charset="0"/>
-                <a:ea typeface="Aptos" pitchFamily="34" charset="-122"/>
-                <a:cs typeface="Aptos" pitchFamily="34" charset="-120"/>
-              </a:rPr>
-              <a:t>For supervisors and leaders, governance means ensuring that staff have clear rules, enough training, a.</a:t>
+                  <a:srgbClr val="003A63"/>
+                </a:solidFill>
+                <a:latin typeface="Aptos" pitchFamily="34" charset="0"/>
+                <a:ea typeface="Aptos" pitchFamily="34" charset="-122"/>
+                <a:cs typeface="Aptos" pitchFamily="34" charset="-120"/>
+              </a:rPr>
+              <a:t>• For supervisors and leaders, governance means ensuring that staff have clear rules, enough.</a:t>
             </a:r>
             <a:endParaRPr lang="en-US" sz="2100" dirty="0"/>
           </a:p>
           <a:p>
+            <a:pPr indent="0" marL="0">
+              <a:buNone/>
+            </a:pPr>
             <a:r>
               <a:rPr lang="en-US" sz="2100" dirty="0">
                 <a:solidFill>
-                  <a:srgbClr val="17364A"/>
-                </a:solidFill>
-                <a:latin typeface="Aptos" pitchFamily="34" charset="0"/>
-                <a:ea typeface="Aptos" pitchFamily="34" charset="-122"/>
-                <a:cs typeface="Aptos" pitchFamily="34" charset="-120"/>
-              </a:rPr>
-              <a:t>Leaders should avoid approving AI tools without resources for training, monitoring, documentation, and.</a:t>
+                  <a:srgbClr val="003A63"/>
+                </a:solidFill>
+                <a:latin typeface="Aptos" pitchFamily="34" charset="0"/>
+                <a:ea typeface="Aptos" pitchFamily="34" charset="-122"/>
+                <a:cs typeface="Aptos" pitchFamily="34" charset="-120"/>
+              </a:rPr>
+              <a:t>• Leaders should avoid approving AI tools without resources for training, monitoring,.</a:t>
             </a:r>
             <a:endParaRPr lang="en-US" sz="2100" dirty="0"/>
           </a:p>
           <a:p>
+            <a:pPr indent="0" marL="0">
+              <a:buNone/>
+            </a:pPr>
             <a:r>
               <a:rPr lang="en-US" sz="2100" dirty="0">
                 <a:solidFill>
-                  <a:srgbClr val="17364A"/>
-                </a:solidFill>
-                <a:latin typeface="Aptos" pitchFamily="34" charset="0"/>
-                <a:ea typeface="Aptos" pitchFamily="34" charset="-122"/>
-                <a:cs typeface="Aptos" pitchFamily="34" charset="-120"/>
-              </a:rPr>
-              <a:t>For all staff, governance means pausing when an AI use involves sensitive data, public-facing content,.</a:t>
+                  <a:srgbClr val="003A63"/>
+                </a:solidFill>
+                <a:latin typeface="Aptos" pitchFamily="34" charset="0"/>
+                <a:ea typeface="Aptos" pitchFamily="34" charset="-122"/>
+                <a:cs typeface="Aptos" pitchFamily="34" charset="-120"/>
+              </a:rPr>
+              <a:t>• For all staff, governance means pausing when an AI use involves sensitive data, public-facing.</a:t>
             </a:r>
             <a:endParaRPr lang="en-US" sz="2100" dirty="0"/>
           </a:p>
@@ -13213,17 +13422,17 @@
         </p:nvSpPr>
         <p:spPr>
           <a:xfrm>
-            <a:off x="7799832" y="1828800"/>
-            <a:ext cx="3145536" cy="685800"/>
-          </a:xfrm>
-          <a:prstGeom prst="rect">
-            <a:avLst/>
-          </a:prstGeom>
-          <a:noFill/>
-          <a:ln/>
-        </p:spPr>
-        <p:txBody>
-          <a:bodyPr wrap="square" lIns="0" tIns="0" rIns="0" bIns="0" rtlCol="0" anchor="t">
+            <a:off x="7799832" y="1801368"/>
+            <a:ext cx="3145536" cy="758952"/>
+          </a:xfrm>
+          <a:prstGeom prst="rect">
+            <a:avLst/>
+          </a:prstGeom>
+          <a:noFill/>
+          <a:ln/>
+        </p:spPr>
+        <p:txBody>
+          <a:bodyPr wrap="square" lIns="254" tIns="254" rIns="254" bIns="254" rtlCol="0" anchor="t">
             <a:normAutofit/>
           </a:bodyPr>
           <a:lstStyle/>
@@ -13232,7 +13441,7 @@
               <a:buNone/>
             </a:pPr>
             <a:r>
-              <a:rPr lang="en-US" sz="1550" dirty="0">
+              <a:rPr lang="en-US" sz="1320" dirty="0">
                 <a:solidFill>
                   <a:srgbClr val="17364A"/>
                 </a:solidFill>
@@ -13242,7 +13451,7 @@
               </a:rPr>
               <a:t>For supervisors and leaders, governance means ensuring that staff have clear rules, enough training, a.</a:t>
             </a:r>
-            <a:endParaRPr lang="en-US" sz="1550" dirty="0"/>
+            <a:endParaRPr lang="en-US" sz="1320" dirty="0"/>
           </a:p>
         </p:txBody>
       </p:sp>
@@ -13330,13 +13539,16 @@
           <a:ln/>
         </p:spPr>
         <p:txBody>
-          <a:bodyPr wrap="square" lIns="254" tIns="254" rIns="254" bIns="254" rtlCol="0" anchor="t">
+          <a:bodyPr wrap="square" lIns="508" tIns="508" rIns="508" bIns="508" rtlCol="0" anchor="t">
             <a:normAutofit/>
           </a:bodyPr>
           <a:lstStyle/>
           <a:p>
-            <a:r>
-              <a:rPr lang="en-US" sz="1380" dirty="0">
+            <a:pPr indent="0" marL="0">
+              <a:buNone/>
+            </a:pPr>
+            <a:r>
+              <a:rPr lang="en-US" sz="1220" dirty="0">
                 <a:solidFill>
                   <a:srgbClr val="17364A"/>
                 </a:solidFill>
@@ -13344,13 +13556,16 @@
                 <a:ea typeface="Aptos" pitchFamily="34" charset="-122"/>
                 <a:cs typeface="Aptos" pitchFamily="34" charset="-120"/>
               </a:rPr>
-              <a:t>For supervisors and leaders, governance means ensuring that staff have clear rules, enough.</a:t>
-            </a:r>
-            <a:endParaRPr lang="en-US" sz="1380" dirty="0"/>
-          </a:p>
-          <a:p>
-            <a:r>
-              <a:rPr lang="en-US" sz="1380" dirty="0">
+              <a:t>For supervisors and leaders, governance means ensuring that staff.</a:t>
+            </a:r>
+            <a:endParaRPr lang="en-US" sz="1220" dirty="0"/>
+          </a:p>
+          <a:p>
+            <a:pPr indent="0" marL="0">
+              <a:buNone/>
+            </a:pPr>
+            <a:r>
+              <a:rPr lang="en-US" sz="1220" dirty="0">
                 <a:solidFill>
                   <a:srgbClr val="17364A"/>
                 </a:solidFill>
@@ -13358,13 +13573,16 @@
                 <a:ea typeface="Aptos" pitchFamily="34" charset="-122"/>
                 <a:cs typeface="Aptos" pitchFamily="34" charset="-120"/>
               </a:rPr>
-              <a:t>Leaders should avoid approving AI tools without resources for training, monitoring,.</a:t>
-            </a:r>
-            <a:endParaRPr lang="en-US" sz="1380" dirty="0"/>
-          </a:p>
-          <a:p>
-            <a:r>
-              <a:rPr lang="en-US" sz="1380" dirty="0">
+              <a:t>Leaders should avoid approving AI tools without resources for.</a:t>
+            </a:r>
+            <a:endParaRPr lang="en-US" sz="1220" dirty="0"/>
+          </a:p>
+          <a:p>
+            <a:pPr indent="0" marL="0">
+              <a:buNone/>
+            </a:pPr>
+            <a:r>
+              <a:rPr lang="en-US" sz="1220" dirty="0">
                 <a:solidFill>
                   <a:srgbClr val="17364A"/>
                 </a:solidFill>
@@ -13372,9 +13590,9 @@
                 <a:ea typeface="Aptos" pitchFamily="34" charset="-122"/>
                 <a:cs typeface="Aptos" pitchFamily="34" charset="-120"/>
               </a:rPr>
-              <a:t>For all staff, governance means pausing when an AI use involves sensitive data,.</a:t>
-            </a:r>
-            <a:endParaRPr lang="en-US" sz="1380" dirty="0"/>
+              <a:t>For all staff, governance means pausing when an AI use involves.</a:t>
+            </a:r>
+            <a:endParaRPr lang="en-US" sz="1220" dirty="0"/>
           </a:p>
         </p:txBody>
       </p:sp>
@@ -13452,17 +13670,17 @@
         </p:nvSpPr>
         <p:spPr>
           <a:xfrm>
-            <a:off x="7799832" y="5001768"/>
-            <a:ext cx="3145536" cy="502920"/>
-          </a:xfrm>
-          <a:prstGeom prst="rect">
-            <a:avLst/>
-          </a:prstGeom>
-          <a:noFill/>
-          <a:ln/>
-        </p:spPr>
-        <p:txBody>
-          <a:bodyPr wrap="square" lIns="0" tIns="0" rIns="0" bIns="0" rtlCol="0" anchor="t">
+            <a:off x="7799832" y="4974336"/>
+            <a:ext cx="3145536" cy="576072"/>
+          </a:xfrm>
+          <a:prstGeom prst="rect">
+            <a:avLst/>
+          </a:prstGeom>
+          <a:noFill/>
+          <a:ln/>
+        </p:spPr>
+        <p:txBody>
+          <a:bodyPr wrap="square" lIns="254" tIns="254" rIns="254" bIns="254" rtlCol="0" anchor="t">
             <a:normAutofit/>
           </a:bodyPr>
           <a:lstStyle/>
@@ -13471,7 +13689,7 @@
               <a:buNone/>
             </a:pPr>
             <a:r>
-              <a:rPr lang="en-US" sz="1550" dirty="0">
+              <a:rPr lang="en-US" sz="1320" dirty="0">
                 <a:solidFill>
                   <a:srgbClr val="17364A"/>
                 </a:solidFill>
@@ -13479,9 +13697,9 @@
                 <a:ea typeface="Aptos" pitchFamily="34" charset="-122"/>
                 <a:cs typeface="Aptos" pitchFamily="34" charset="-120"/>
               </a:rPr>
-              <a:t>Translate this concept into clear decision rights, review steps, documentation expectations, and escalation paths before an AI-supported workflow is approved.</a:t>
-            </a:r>
-            <a:endParaRPr lang="en-US" sz="1550" dirty="0"/>
+              <a:t>Translate this concept into clear decision rights, review steps, documentation expectations, and escalation paths before.</a:t>
+            </a:r>
+            <a:endParaRPr lang="en-US" sz="1320" dirty="0"/>
           </a:p>
         </p:txBody>
       </p:sp>
@@ -13782,49 +14000,58 @@
           <a:ln/>
         </p:spPr>
         <p:txBody>
-          <a:bodyPr wrap="square" lIns="635" tIns="635" rIns="635" bIns="635" rtlCol="0" anchor="t">
+          <a:bodyPr wrap="square" lIns="1016" tIns="1016" rIns="1016" bIns="1016" rtlCol="0" anchor="t">
             <a:normAutofit/>
           </a:bodyPr>
           <a:lstStyle/>
           <a:p>
+            <a:pPr indent="0" marL="0">
+              <a:buNone/>
+            </a:pPr>
             <a:r>
               <a:rPr lang="en-US" sz="2100" dirty="0">
                 <a:solidFill>
-                  <a:srgbClr val="17364A"/>
-                </a:solidFill>
-                <a:latin typeface="Aptos" pitchFamily="34" charset="0"/>
-                <a:ea typeface="Aptos" pitchFamily="34" charset="-122"/>
-                <a:cs typeface="Aptos" pitchFamily="34" charset="-120"/>
-              </a:rPr>
-              <a:t>Where might AI already be entering your work through drafting tools, analytics tools, vendor platforms,.</a:t>
+                  <a:srgbClr val="003A63"/>
+                </a:solidFill>
+                <a:latin typeface="Aptos" pitchFamily="34" charset="0"/>
+                <a:ea typeface="Aptos" pitchFamily="34" charset="-122"/>
+                <a:cs typeface="Aptos" pitchFamily="34" charset="-120"/>
+              </a:rPr>
+              <a:t>• Where might AI already be entering your work through drafting tools, analytics tools, vendor.</a:t>
             </a:r>
             <a:endParaRPr lang="en-US" sz="2100" dirty="0"/>
           </a:p>
           <a:p>
+            <a:pPr indent="0" marL="0">
+              <a:buNone/>
+            </a:pPr>
             <a:r>
               <a:rPr lang="en-US" sz="2100" dirty="0">
                 <a:solidFill>
-                  <a:srgbClr val="17364A"/>
-                </a:solidFill>
-                <a:latin typeface="Aptos" pitchFamily="34" charset="0"/>
-                <a:ea typeface="Aptos" pitchFamily="34" charset="-122"/>
-                <a:cs typeface="Aptos" pitchFamily="34" charset="-120"/>
-              </a:rPr>
-              <a:t>What AI uses in your program area would be low risk, and what uses would require formal review before.</a:t>
+                  <a:srgbClr val="003A63"/>
+                </a:solidFill>
+                <a:latin typeface="Aptos" pitchFamily="34" charset="0"/>
+                <a:ea typeface="Aptos" pitchFamily="34" charset="-122"/>
+                <a:cs typeface="Aptos" pitchFamily="34" charset="-120"/>
+              </a:rPr>
+              <a:t>• What AI uses in your program area would be low risk, and what uses would require formal review.</a:t>
             </a:r>
             <a:endParaRPr lang="en-US" sz="2100" dirty="0"/>
           </a:p>
           <a:p>
+            <a:pPr indent="0" marL="0">
+              <a:buNone/>
+            </a:pPr>
             <a:r>
               <a:rPr lang="en-US" sz="2100" dirty="0">
                 <a:solidFill>
-                  <a:srgbClr val="17364A"/>
-                </a:solidFill>
-                <a:latin typeface="Aptos" pitchFamily="34" charset="0"/>
-                <a:ea typeface="Aptos" pitchFamily="34" charset="-122"/>
-                <a:cs typeface="Aptos" pitchFamily="34" charset="-120"/>
-              </a:rPr>
-              <a:t>Who in your agency would need to review an AI use that involves sensitive data, public-facing.</a:t>
+                  <a:srgbClr val="003A63"/>
+                </a:solidFill>
+                <a:latin typeface="Aptos" pitchFamily="34" charset="0"/>
+                <a:ea typeface="Aptos" pitchFamily="34" charset="-122"/>
+                <a:cs typeface="Aptos" pitchFamily="34" charset="-120"/>
+              </a:rPr>
+              <a:t>• Who in your agency would need to review an AI use that involves sensitive data, public-facing.</a:t>
             </a:r>
             <a:endParaRPr lang="en-US" sz="2100" dirty="0"/>
           </a:p>
@@ -13904,17 +14131,17 @@
         </p:nvSpPr>
         <p:spPr>
           <a:xfrm>
-            <a:off x="7799832" y="1828800"/>
-            <a:ext cx="3145536" cy="685800"/>
-          </a:xfrm>
-          <a:prstGeom prst="rect">
-            <a:avLst/>
-          </a:prstGeom>
-          <a:noFill/>
-          <a:ln/>
-        </p:spPr>
-        <p:txBody>
-          <a:bodyPr wrap="square" lIns="0" tIns="0" rIns="0" bIns="0" rtlCol="0" anchor="t">
+            <a:off x="7799832" y="1801368"/>
+            <a:ext cx="3145536" cy="758952"/>
+          </a:xfrm>
+          <a:prstGeom prst="rect">
+            <a:avLst/>
+          </a:prstGeom>
+          <a:noFill/>
+          <a:ln/>
+        </p:spPr>
+        <p:txBody>
+          <a:bodyPr wrap="square" lIns="254" tIns="254" rIns="254" bIns="254" rtlCol="0" anchor="t">
             <a:normAutofit/>
           </a:bodyPr>
           <a:lstStyle/>
@@ -13923,7 +14150,7 @@
               <a:buNone/>
             </a:pPr>
             <a:r>
-              <a:rPr lang="en-US" sz="1550" dirty="0">
+              <a:rPr lang="en-US" sz="1320" dirty="0">
                 <a:solidFill>
                   <a:srgbClr val="17364A"/>
                 </a:solidFill>
@@ -13933,7 +14160,7 @@
               </a:rPr>
               <a:t>Where might AI already be entering your work through drafting tools, analytics tools, vendor platforms,.</a:t>
             </a:r>
-            <a:endParaRPr lang="en-US" sz="1550" dirty="0"/>
+            <a:endParaRPr lang="en-US" sz="1320" dirty="0"/>
           </a:p>
         </p:txBody>
       </p:sp>
@@ -14021,13 +14248,16 @@
           <a:ln/>
         </p:spPr>
         <p:txBody>
-          <a:bodyPr wrap="square" lIns="254" tIns="254" rIns="254" bIns="254" rtlCol="0" anchor="t">
+          <a:bodyPr wrap="square" lIns="508" tIns="508" rIns="508" bIns="508" rtlCol="0" anchor="t">
             <a:normAutofit/>
           </a:bodyPr>
           <a:lstStyle/>
           <a:p>
-            <a:r>
-              <a:rPr lang="en-US" sz="1380" dirty="0">
+            <a:pPr indent="0" marL="0">
+              <a:buNone/>
+            </a:pPr>
+            <a:r>
+              <a:rPr lang="en-US" sz="1220" dirty="0">
                 <a:solidFill>
                   <a:srgbClr val="17364A"/>
                 </a:solidFill>
@@ -14035,13 +14265,16 @@
                 <a:ea typeface="Aptos" pitchFamily="34" charset="-122"/>
                 <a:cs typeface="Aptos" pitchFamily="34" charset="-120"/>
               </a:rPr>
-              <a:t>Where might AI already be entering your work through drafting tools, analytics tools,.</a:t>
-            </a:r>
-            <a:endParaRPr lang="en-US" sz="1380" dirty="0"/>
-          </a:p>
-          <a:p>
-            <a:r>
-              <a:rPr lang="en-US" sz="1380" dirty="0">
+              <a:t>Where might AI already be entering your work through drafting.</a:t>
+            </a:r>
+            <a:endParaRPr lang="en-US" sz="1220" dirty="0"/>
+          </a:p>
+          <a:p>
+            <a:pPr indent="0" marL="0">
+              <a:buNone/>
+            </a:pPr>
+            <a:r>
+              <a:rPr lang="en-US" sz="1220" dirty="0">
                 <a:solidFill>
                   <a:srgbClr val="17364A"/>
                 </a:solidFill>
@@ -14049,13 +14282,16 @@
                 <a:ea typeface="Aptos" pitchFamily="34" charset="-122"/>
                 <a:cs typeface="Aptos" pitchFamily="34" charset="-120"/>
               </a:rPr>
-              <a:t>What AI uses in your program area would be low risk, and what uses would require formal.</a:t>
-            </a:r>
-            <a:endParaRPr lang="en-US" sz="1380" dirty="0"/>
-          </a:p>
-          <a:p>
-            <a:r>
-              <a:rPr lang="en-US" sz="1380" dirty="0">
+              <a:t>What AI uses in your program area would be low risk, and what uses.</a:t>
+            </a:r>
+            <a:endParaRPr lang="en-US" sz="1220" dirty="0"/>
+          </a:p>
+          <a:p>
+            <a:pPr indent="0" marL="0">
+              <a:buNone/>
+            </a:pPr>
+            <a:r>
+              <a:rPr lang="en-US" sz="1220" dirty="0">
                 <a:solidFill>
                   <a:srgbClr val="17364A"/>
                 </a:solidFill>
@@ -14063,9 +14299,9 @@
                 <a:ea typeface="Aptos" pitchFamily="34" charset="-122"/>
                 <a:cs typeface="Aptos" pitchFamily="34" charset="-120"/>
               </a:rPr>
-              <a:t>Who in your agency would need to review an AI use that involves sensitive data,.</a:t>
-            </a:r>
-            <a:endParaRPr lang="en-US" sz="1380" dirty="0"/>
+              <a:t>Who in your agency would need to review an AI use that involves.</a:t>
+            </a:r>
+            <a:endParaRPr lang="en-US" sz="1220" dirty="0"/>
           </a:p>
         </p:txBody>
       </p:sp>
@@ -14143,17 +14379,17 @@
         </p:nvSpPr>
         <p:spPr>
           <a:xfrm>
-            <a:off x="7799832" y="5001768"/>
-            <a:ext cx="3145536" cy="502920"/>
-          </a:xfrm>
-          <a:prstGeom prst="rect">
-            <a:avLst/>
-          </a:prstGeom>
-          <a:noFill/>
-          <a:ln/>
-        </p:spPr>
-        <p:txBody>
-          <a:bodyPr wrap="square" lIns="0" tIns="0" rIns="0" bIns="0" rtlCol="0" anchor="t">
+            <a:off x="7799832" y="4974336"/>
+            <a:ext cx="3145536" cy="576072"/>
+          </a:xfrm>
+          <a:prstGeom prst="rect">
+            <a:avLst/>
+          </a:prstGeom>
+          <a:noFill/>
+          <a:ln/>
+        </p:spPr>
+        <p:txBody>
+          <a:bodyPr wrap="square" lIns="254" tIns="254" rIns="254" bIns="254" rtlCol="0" anchor="t">
             <a:normAutofit/>
           </a:bodyPr>
           <a:lstStyle/>
@@ -14162,7 +14398,7 @@
               <a:buNone/>
             </a:pPr>
             <a:r>
-              <a:rPr lang="en-US" sz="1550" dirty="0">
+              <a:rPr lang="en-US" sz="1320" dirty="0">
                 <a:solidFill>
                   <a:srgbClr val="17364A"/>
                 </a:solidFill>
@@ -14170,9 +14406,9 @@
                 <a:ea typeface="Aptos" pitchFamily="34" charset="-122"/>
                 <a:cs typeface="Aptos" pitchFamily="34" charset="-120"/>
               </a:rPr>
-              <a:t>Translate this concept into clear decision rights, review steps, documentation expectations, and escalation paths before an AI-supported workflow is approved.</a:t>
-            </a:r>
-            <a:endParaRPr lang="en-US" sz="1550" dirty="0"/>
+              <a:t>Translate this concept into clear decision rights, review steps, documentation expectations, and escalation paths before.</a:t>
+            </a:r>
+            <a:endParaRPr lang="en-US" sz="1320" dirty="0"/>
           </a:p>
         </p:txBody>
       </p:sp>
@@ -14473,35 +14709,41 @@
           <a:ln/>
         </p:spPr>
         <p:txBody>
-          <a:bodyPr wrap="square" lIns="635" tIns="635" rIns="635" bIns="635" rtlCol="0" anchor="t">
+          <a:bodyPr wrap="square" lIns="1016" tIns="1016" rIns="1016" bIns="1016" rtlCol="0" anchor="t">
             <a:normAutofit/>
           </a:bodyPr>
           <a:lstStyle/>
           <a:p>
+            <a:pPr indent="0" marL="0">
+              <a:buNone/>
+            </a:pPr>
             <a:r>
               <a:rPr lang="en-US" sz="2100" dirty="0">
                 <a:solidFill>
-                  <a:srgbClr val="17364A"/>
-                </a:solidFill>
-                <a:latin typeface="Aptos" pitchFamily="34" charset="0"/>
-                <a:ea typeface="Aptos" pitchFamily="34" charset="-122"/>
-                <a:cs typeface="Aptos" pitchFamily="34" charset="-120"/>
-              </a:rPr>
-              <a:t>What information would you need before you could explain an AI-supported workflow to a supervisor,.</a:t>
+                  <a:srgbClr val="003A63"/>
+                </a:solidFill>
+                <a:latin typeface="Aptos" pitchFamily="34" charset="0"/>
+                <a:ea typeface="Aptos" pitchFamily="34" charset="-122"/>
+                <a:cs typeface="Aptos" pitchFamily="34" charset="-120"/>
+              </a:rPr>
+              <a:t>• What information would you need before you could explain an AI-supported workflow to a.</a:t>
             </a:r>
             <a:endParaRPr lang="en-US" sz="2100" dirty="0"/>
           </a:p>
           <a:p>
+            <a:pPr indent="0" marL="0">
+              <a:buNone/>
+            </a:pPr>
             <a:r>
               <a:rPr lang="en-US" sz="2100" dirty="0">
                 <a:solidFill>
-                  <a:srgbClr val="17364A"/>
-                </a:solidFill>
-                <a:latin typeface="Aptos" pitchFamily="34" charset="0"/>
-                <a:ea typeface="Aptos" pitchFamily="34" charset="-122"/>
-                <a:cs typeface="Aptos" pitchFamily="34" charset="-120"/>
-              </a:rPr>
-              <a:t>What would make staff comfortable raising concerns about AI outputs or unapproved use without fear of.</a:t>
+                  <a:srgbClr val="003A63"/>
+                </a:solidFill>
+                <a:latin typeface="Aptos" pitchFamily="34" charset="0"/>
+                <a:ea typeface="Aptos" pitchFamily="34" charset="-122"/>
+                <a:cs typeface="Aptos" pitchFamily="34" charset="-120"/>
+              </a:rPr>
+              <a:t>• What would make staff comfortable raising concerns about AI outputs or unapproved use without.</a:t>
             </a:r>
             <a:endParaRPr lang="en-US" sz="2100" dirty="0"/>
           </a:p>
@@ -14581,17 +14823,17 @@
         </p:nvSpPr>
         <p:spPr>
           <a:xfrm>
-            <a:off x="7799832" y="1828800"/>
-            <a:ext cx="3145536" cy="685800"/>
-          </a:xfrm>
-          <a:prstGeom prst="rect">
-            <a:avLst/>
-          </a:prstGeom>
-          <a:noFill/>
-          <a:ln/>
-        </p:spPr>
-        <p:txBody>
-          <a:bodyPr wrap="square" lIns="0" tIns="0" rIns="0" bIns="0" rtlCol="0" anchor="t">
+            <a:off x="7799832" y="1801368"/>
+            <a:ext cx="3145536" cy="758952"/>
+          </a:xfrm>
+          <a:prstGeom prst="rect">
+            <a:avLst/>
+          </a:prstGeom>
+          <a:noFill/>
+          <a:ln/>
+        </p:spPr>
+        <p:txBody>
+          <a:bodyPr wrap="square" lIns="254" tIns="254" rIns="254" bIns="254" rtlCol="0" anchor="t">
             <a:normAutofit/>
           </a:bodyPr>
           <a:lstStyle/>
@@ -14600,7 +14842,7 @@
               <a:buNone/>
             </a:pPr>
             <a:r>
-              <a:rPr lang="en-US" sz="1550" dirty="0">
+              <a:rPr lang="en-US" sz="1320" dirty="0">
                 <a:solidFill>
                   <a:srgbClr val="17364A"/>
                 </a:solidFill>
@@ -14610,7 +14852,7 @@
               </a:rPr>
               <a:t>What information would you need before you could explain an AI-supported workflow to a supervisor,.</a:t>
             </a:r>
-            <a:endParaRPr lang="en-US" sz="1550" dirty="0"/>
+            <a:endParaRPr lang="en-US" sz="1320" dirty="0"/>
           </a:p>
         </p:txBody>
       </p:sp>
@@ -14698,13 +14940,16 @@
           <a:ln/>
         </p:spPr>
         <p:txBody>
-          <a:bodyPr wrap="square" lIns="254" tIns="254" rIns="254" bIns="254" rtlCol="0" anchor="t">
+          <a:bodyPr wrap="square" lIns="508" tIns="508" rIns="508" bIns="508" rtlCol="0" anchor="t">
             <a:normAutofit/>
           </a:bodyPr>
           <a:lstStyle/>
           <a:p>
-            <a:r>
-              <a:rPr lang="en-US" sz="1380" dirty="0">
+            <a:pPr indent="0" marL="0">
+              <a:buNone/>
+            </a:pPr>
+            <a:r>
+              <a:rPr lang="en-US" sz="1220" dirty="0">
                 <a:solidFill>
                   <a:srgbClr val="17364A"/>
                 </a:solidFill>
@@ -14712,13 +14957,16 @@
                 <a:ea typeface="Aptos" pitchFamily="34" charset="-122"/>
                 <a:cs typeface="Aptos" pitchFamily="34" charset="-120"/>
               </a:rPr>
-              <a:t>What information would you need before you could explain an AI-supported workflow to a.</a:t>
-            </a:r>
-            <a:endParaRPr lang="en-US" sz="1380" dirty="0"/>
-          </a:p>
-          <a:p>
-            <a:r>
-              <a:rPr lang="en-US" sz="1380" dirty="0">
+              <a:t>What information would you need before you could explain an.</a:t>
+            </a:r>
+            <a:endParaRPr lang="en-US" sz="1220" dirty="0"/>
+          </a:p>
+          <a:p>
+            <a:pPr indent="0" marL="0">
+              <a:buNone/>
+            </a:pPr>
+            <a:r>
+              <a:rPr lang="en-US" sz="1220" dirty="0">
                 <a:solidFill>
                   <a:srgbClr val="17364A"/>
                 </a:solidFill>
@@ -14726,9 +14974,9 @@
                 <a:ea typeface="Aptos" pitchFamily="34" charset="-122"/>
                 <a:cs typeface="Aptos" pitchFamily="34" charset="-120"/>
               </a:rPr>
-              <a:t>What would make staff comfortable raising concerns about AI outputs or unapproved use.</a:t>
-            </a:r>
-            <a:endParaRPr lang="en-US" sz="1380" dirty="0"/>
+              <a:t>What would make staff comfortable raising concerns about AI.</a:t>
+            </a:r>
+            <a:endParaRPr lang="en-US" sz="1220" dirty="0"/>
           </a:p>
         </p:txBody>
       </p:sp>
@@ -14806,17 +15054,17 @@
         </p:nvSpPr>
         <p:spPr>
           <a:xfrm>
-            <a:off x="7799832" y="5001768"/>
-            <a:ext cx="3145536" cy="502920"/>
-          </a:xfrm>
-          <a:prstGeom prst="rect">
-            <a:avLst/>
-          </a:prstGeom>
-          <a:noFill/>
-          <a:ln/>
-        </p:spPr>
-        <p:txBody>
-          <a:bodyPr wrap="square" lIns="0" tIns="0" rIns="0" bIns="0" rtlCol="0" anchor="t">
+            <a:off x="7799832" y="4974336"/>
+            <a:ext cx="3145536" cy="576072"/>
+          </a:xfrm>
+          <a:prstGeom prst="rect">
+            <a:avLst/>
+          </a:prstGeom>
+          <a:noFill/>
+          <a:ln/>
+        </p:spPr>
+        <p:txBody>
+          <a:bodyPr wrap="square" lIns="254" tIns="254" rIns="254" bIns="254" rtlCol="0" anchor="t">
             <a:normAutofit/>
           </a:bodyPr>
           <a:lstStyle/>
@@ -14825,7 +15073,7 @@
               <a:buNone/>
             </a:pPr>
             <a:r>
-              <a:rPr lang="en-US" sz="1550" dirty="0">
+              <a:rPr lang="en-US" sz="1320" dirty="0">
                 <a:solidFill>
                   <a:srgbClr val="17364A"/>
                 </a:solidFill>
@@ -14833,9 +15081,9 @@
                 <a:ea typeface="Aptos" pitchFamily="34" charset="-122"/>
                 <a:cs typeface="Aptos" pitchFamily="34" charset="-120"/>
               </a:rPr>
-              <a:t>Translate this concept into clear decision rights, review steps, documentation expectations, and escalation paths before an AI-supported workflow is approved.</a:t>
-            </a:r>
-            <a:endParaRPr lang="en-US" sz="1550" dirty="0"/>
+              <a:t>Translate this concept into clear decision rights, review steps, documentation expectations, and escalation paths before.</a:t>
+            </a:r>
+            <a:endParaRPr lang="en-US" sz="1320" dirty="0"/>
           </a:p>
         </p:txBody>
       </p:sp>
@@ -15136,49 +15384,58 @@
           <a:ln/>
         </p:spPr>
         <p:txBody>
-          <a:bodyPr wrap="square" lIns="635" tIns="635" rIns="635" bIns="635" rtlCol="0" anchor="t">
+          <a:bodyPr wrap="square" lIns="1016" tIns="1016" rIns="1016" bIns="1016" rtlCol="0" anchor="t">
             <a:normAutofit/>
           </a:bodyPr>
           <a:lstStyle/>
           <a:p>
+            <a:pPr indent="0" marL="0">
+              <a:buNone/>
+            </a:pPr>
             <a:r>
               <a:rPr lang="en-US" sz="2100" dirty="0">
                 <a:solidFill>
-                  <a:srgbClr val="17364A"/>
-                </a:solidFill>
-                <a:latin typeface="Aptos" pitchFamily="34" charset="0"/>
-                <a:ea typeface="Aptos" pitchFamily="34" charset="-122"/>
-                <a:cs typeface="Aptos" pitchFamily="34" charset="-120"/>
-              </a:rPr>
-              <a:t>Select one real or realistic public health workflow where AI might be used.</a:t>
+                  <a:srgbClr val="003A63"/>
+                </a:solidFill>
+                <a:latin typeface="Aptos" pitchFamily="34" charset="0"/>
+                <a:ea typeface="Aptos" pitchFamily="34" charset="-122"/>
+                <a:cs typeface="Aptos" pitchFamily="34" charset="-120"/>
+              </a:rPr>
+              <a:t>• Select one real or realistic public health workflow where AI might be used.</a:t>
             </a:r>
             <a:endParaRPr lang="en-US" sz="2100" dirty="0"/>
           </a:p>
           <a:p>
+            <a:pPr indent="0" marL="0">
+              <a:buNone/>
+            </a:pPr>
             <a:r>
               <a:rPr lang="en-US" sz="2100" dirty="0">
                 <a:solidFill>
-                  <a:srgbClr val="17364A"/>
-                </a:solidFill>
-                <a:latin typeface="Aptos" pitchFamily="34" charset="0"/>
-                <a:ea typeface="Aptos" pitchFamily="34" charset="-122"/>
-                <a:cs typeface="Aptos" pitchFamily="34" charset="-120"/>
-              </a:rPr>
-              <a:t>Examples include summarizing meeting notes, drafting public health messages, classifying environmental.</a:t>
+                  <a:srgbClr val="003A63"/>
+                </a:solidFill>
+                <a:latin typeface="Aptos" pitchFamily="34" charset="0"/>
+                <a:ea typeface="Aptos" pitchFamily="34" charset="-122"/>
+                <a:cs typeface="Aptos" pitchFamily="34" charset="-120"/>
+              </a:rPr>
+              <a:t>• Examples include summarizing meeting notes, drafting public health messages, classifying.</a:t>
             </a:r>
             <a:endParaRPr lang="en-US" sz="2100" dirty="0"/>
           </a:p>
           <a:p>
+            <a:pPr indent="0" marL="0">
+              <a:buNone/>
+            </a:pPr>
             <a:r>
               <a:rPr lang="en-US" sz="2100" dirty="0">
                 <a:solidFill>
-                  <a:srgbClr val="17364A"/>
-                </a:solidFill>
-                <a:latin typeface="Aptos" pitchFamily="34" charset="0"/>
-                <a:ea typeface="Aptos" pitchFamily="34" charset="-122"/>
-                <a:cs typeface="Aptos" pitchFamily="34" charset="-120"/>
-              </a:rPr>
-              <a:t>Complete a one-page introductory AI governance intake and escalation note.</a:t>
+                  <a:srgbClr val="003A63"/>
+                </a:solidFill>
+                <a:latin typeface="Aptos" pitchFamily="34" charset="0"/>
+                <a:ea typeface="Aptos" pitchFamily="34" charset="-122"/>
+                <a:cs typeface="Aptos" pitchFamily="34" charset="-120"/>
+              </a:rPr>
+              <a:t>• Complete a one-page introductory AI governance intake and escalation note.</a:t>
             </a:r>
             <a:endParaRPr lang="en-US" sz="2100" dirty="0"/>
           </a:p>
@@ -15258,17 +15515,17 @@
         </p:nvSpPr>
         <p:spPr>
           <a:xfrm>
-            <a:off x="7799832" y="1828800"/>
-            <a:ext cx="3145536" cy="685800"/>
-          </a:xfrm>
-          <a:prstGeom prst="rect">
-            <a:avLst/>
-          </a:prstGeom>
-          <a:noFill/>
-          <a:ln/>
-        </p:spPr>
-        <p:txBody>
-          <a:bodyPr wrap="square" lIns="0" tIns="0" rIns="0" bIns="0" rtlCol="0" anchor="t">
+            <a:off x="7799832" y="1801368"/>
+            <a:ext cx="3145536" cy="758952"/>
+          </a:xfrm>
+          <a:prstGeom prst="rect">
+            <a:avLst/>
+          </a:prstGeom>
+          <a:noFill/>
+          <a:ln/>
+        </p:spPr>
+        <p:txBody>
+          <a:bodyPr wrap="square" lIns="254" tIns="254" rIns="254" bIns="254" rtlCol="0" anchor="t">
             <a:normAutofit/>
           </a:bodyPr>
           <a:lstStyle/>
@@ -15277,7 +15534,7 @@
               <a:buNone/>
             </a:pPr>
             <a:r>
-              <a:rPr lang="en-US" sz="1550" dirty="0">
+              <a:rPr lang="en-US" sz="1320" dirty="0">
                 <a:solidFill>
                   <a:srgbClr val="17364A"/>
                 </a:solidFill>
@@ -15287,7 +15544,7 @@
               </a:rPr>
               <a:t>Select one real or realistic public health workflow where AI might be used.</a:t>
             </a:r>
-            <a:endParaRPr lang="en-US" sz="1550" dirty="0"/>
+            <a:endParaRPr lang="en-US" sz="1320" dirty="0"/>
           </a:p>
         </p:txBody>
       </p:sp>
@@ -15375,13 +15632,16 @@
           <a:ln/>
         </p:spPr>
         <p:txBody>
-          <a:bodyPr wrap="square" lIns="254" tIns="254" rIns="254" bIns="254" rtlCol="0" anchor="t">
+          <a:bodyPr wrap="square" lIns="508" tIns="508" rIns="508" bIns="508" rtlCol="0" anchor="t">
             <a:normAutofit/>
           </a:bodyPr>
           <a:lstStyle/>
           <a:p>
-            <a:r>
-              <a:rPr lang="en-US" sz="1380" dirty="0">
+            <a:pPr indent="0" marL="0">
+              <a:buNone/>
+            </a:pPr>
+            <a:r>
+              <a:rPr lang="en-US" sz="1220" dirty="0">
                 <a:solidFill>
                   <a:srgbClr val="17364A"/>
                 </a:solidFill>
@@ -15389,13 +15649,16 @@
                 <a:ea typeface="Aptos" pitchFamily="34" charset="-122"/>
                 <a:cs typeface="Aptos" pitchFamily="34" charset="-120"/>
               </a:rPr>
-              <a:t>Examples include summarizing meeting notes, drafting public health messages, classifying.</a:t>
-            </a:r>
-            <a:endParaRPr lang="en-US" sz="1380" dirty="0"/>
-          </a:p>
-          <a:p>
-            <a:r>
-              <a:rPr lang="en-US" sz="1380" dirty="0">
+              <a:t>Examples include summarizing meeting notes, drafting public health.</a:t>
+            </a:r>
+            <a:endParaRPr lang="en-US" sz="1220" dirty="0"/>
+          </a:p>
+          <a:p>
+            <a:pPr indent="0" marL="0">
+              <a:buNone/>
+            </a:pPr>
+            <a:r>
+              <a:rPr lang="en-US" sz="1220" dirty="0">
                 <a:solidFill>
                   <a:srgbClr val="17364A"/>
                 </a:solidFill>
@@ -15403,13 +15666,16 @@
                 <a:ea typeface="Aptos" pitchFamily="34" charset="-122"/>
                 <a:cs typeface="Aptos" pitchFamily="34" charset="-120"/>
               </a:rPr>
-              <a:t>The note should include: the public health purpose; the staff or partners who would use.</a:t>
-            </a:r>
-            <a:endParaRPr lang="en-US" sz="1380" dirty="0"/>
-          </a:p>
-          <a:p>
-            <a:r>
-              <a:rPr lang="en-US" sz="1380" dirty="0">
+              <a:t>The note should include: the public health purpose; the staff or.</a:t>
+            </a:r>
+            <a:endParaRPr lang="en-US" sz="1220" dirty="0"/>
+          </a:p>
+          <a:p>
+            <a:pPr indent="0" marL="0">
+              <a:buNone/>
+            </a:pPr>
+            <a:r>
+              <a:rPr lang="en-US" sz="1220" dirty="0">
                 <a:solidFill>
                   <a:srgbClr val="17364A"/>
                 </a:solidFill>
@@ -15417,9 +15683,9 @@
                 <a:ea typeface="Aptos" pitchFamily="34" charset="-122"/>
                 <a:cs typeface="Aptos" pitchFamily="34" charset="-120"/>
               </a:rPr>
-              <a:t>Practical exercise example: A chronic disease program wants to use an AI tool to summarize.</a:t>
-            </a:r>
-            <a:endParaRPr lang="en-US" sz="1380" dirty="0"/>
+              <a:t>Practical exercise example: A chronic disease program wants to use.</a:t>
+            </a:r>
+            <a:endParaRPr lang="en-US" sz="1220" dirty="0"/>
           </a:p>
         </p:txBody>
       </p:sp>
@@ -15497,17 +15763,17 @@
         </p:nvSpPr>
         <p:spPr>
           <a:xfrm>
-            <a:off x="7799832" y="5001768"/>
-            <a:ext cx="3145536" cy="502920"/>
-          </a:xfrm>
-          <a:prstGeom prst="rect">
-            <a:avLst/>
-          </a:prstGeom>
-          <a:noFill/>
-          <a:ln/>
-        </p:spPr>
-        <p:txBody>
-          <a:bodyPr wrap="square" lIns="0" tIns="0" rIns="0" bIns="0" rtlCol="0" anchor="t">
+            <a:off x="7799832" y="4974336"/>
+            <a:ext cx="3145536" cy="576072"/>
+          </a:xfrm>
+          <a:prstGeom prst="rect">
+            <a:avLst/>
+          </a:prstGeom>
+          <a:noFill/>
+          <a:ln/>
+        </p:spPr>
+        <p:txBody>
+          <a:bodyPr wrap="square" lIns="254" tIns="254" rIns="254" bIns="254" rtlCol="0" anchor="t">
             <a:normAutofit/>
           </a:bodyPr>
           <a:lstStyle/>
@@ -15516,7 +15782,7 @@
               <a:buNone/>
             </a:pPr>
             <a:r>
-              <a:rPr lang="en-US" sz="1550" dirty="0">
+              <a:rPr lang="en-US" sz="1320" dirty="0">
                 <a:solidFill>
                   <a:srgbClr val="17364A"/>
                 </a:solidFill>
@@ -15524,9 +15790,9 @@
                 <a:ea typeface="Aptos" pitchFamily="34" charset="-122"/>
                 <a:cs typeface="Aptos" pitchFamily="34" charset="-120"/>
               </a:rPr>
-              <a:t>Use the assignment to test whether you can explain the concept, apply it to a realistic public health situation, and identify what would need review before the work moves forward.</a:t>
-            </a:r>
-            <a:endParaRPr lang="en-US" sz="1550" dirty="0"/>
+              <a:t>Use the assignment to test whether you can explain the concept, apply it to a realistic public health situation, and.</a:t>
+            </a:r>
+            <a:endParaRPr lang="en-US" sz="1320" dirty="0"/>
           </a:p>
         </p:txBody>
       </p:sp>
@@ -15827,49 +16093,58 @@
           <a:ln/>
         </p:spPr>
         <p:txBody>
-          <a:bodyPr wrap="square" lIns="635" tIns="635" rIns="635" bIns="635" rtlCol="0" anchor="t">
+          <a:bodyPr wrap="square" lIns="1016" tIns="1016" rIns="1016" bIns="1016" rtlCol="0" anchor="t">
             <a:normAutofit/>
           </a:bodyPr>
           <a:lstStyle/>
           <a:p>
+            <a:pPr indent="0" marL="0">
+              <a:buNone/>
+            </a:pPr>
             <a:r>
               <a:rPr lang="en-US" sz="2100" dirty="0">
                 <a:solidFill>
-                  <a:srgbClr val="17364A"/>
-                </a:solidFill>
-                <a:latin typeface="Aptos" pitchFamily="34" charset="0"/>
-                <a:ea typeface="Aptos" pitchFamily="34" charset="-122"/>
-                <a:cs typeface="Aptos" pitchFamily="34" charset="-120"/>
-              </a:rPr>
-              <a:t>After completing the note, identify one governance question that remains unresolved.</a:t>
+                  <a:srgbClr val="003A63"/>
+                </a:solidFill>
+                <a:latin typeface="Aptos" pitchFamily="34" charset="0"/>
+                <a:ea typeface="Aptos" pitchFamily="34" charset="-122"/>
+                <a:cs typeface="Aptos" pitchFamily="34" charset="-120"/>
+              </a:rPr>
+              <a:t>• After completing the note, identify one governance question that remains unresolved.</a:t>
             </a:r>
             <a:endParaRPr lang="en-US" sz="2100" dirty="0"/>
           </a:p>
           <a:p>
+            <a:pPr indent="0" marL="0">
+              <a:buNone/>
+            </a:pPr>
             <a:r>
               <a:rPr lang="en-US" sz="2100" dirty="0">
                 <a:solidFill>
-                  <a:srgbClr val="17364A"/>
-                </a:solidFill>
-                <a:latin typeface="Aptos" pitchFamily="34" charset="0"/>
-                <a:ea typeface="Aptos" pitchFamily="34" charset="-122"/>
-                <a:cs typeface="Aptos" pitchFamily="34" charset="-120"/>
-              </a:rPr>
-              <a:t>For example: Can this data be entered into the proposed tool under current data-use agreements?</a:t>
+                  <a:srgbClr val="003A63"/>
+                </a:solidFill>
+                <a:latin typeface="Aptos" pitchFamily="34" charset="0"/>
+                <a:ea typeface="Aptos" pitchFamily="34" charset="-122"/>
+                <a:cs typeface="Aptos" pitchFamily="34" charset="-120"/>
+              </a:rPr>
+              <a:t>• For example: Can this data be entered into the proposed tool under current data-use agreements?</a:t>
             </a:r>
             <a:endParaRPr lang="en-US" sz="2100" dirty="0"/>
           </a:p>
           <a:p>
+            <a:pPr indent="0" marL="0">
+              <a:buNone/>
+            </a:pPr>
             <a:r>
               <a:rPr lang="en-US" sz="2100" dirty="0">
                 <a:solidFill>
-                  <a:srgbClr val="17364A"/>
-                </a:solidFill>
-                <a:latin typeface="Aptos" pitchFamily="34" charset="0"/>
-                <a:ea typeface="Aptos" pitchFamily="34" charset="-122"/>
-                <a:cs typeface="Aptos" pitchFamily="34" charset="-120"/>
-              </a:rPr>
-              <a:t>Who must approve public language based on AI-assisted summaries?</a:t>
+                  <a:srgbClr val="003A63"/>
+                </a:solidFill>
+                <a:latin typeface="Aptos" pitchFamily="34" charset="0"/>
+                <a:ea typeface="Aptos" pitchFamily="34" charset="-122"/>
+                <a:cs typeface="Aptos" pitchFamily="34" charset="-120"/>
+              </a:rPr>
+              <a:t>• Who must approve public language based on AI-assisted summaries?</a:t>
             </a:r>
             <a:endParaRPr lang="en-US" sz="2100" dirty="0"/>
           </a:p>
@@ -15949,17 +16224,17 @@
         </p:nvSpPr>
         <p:spPr>
           <a:xfrm>
-            <a:off x="7799832" y="1828800"/>
-            <a:ext cx="3145536" cy="685800"/>
-          </a:xfrm>
-          <a:prstGeom prst="rect">
-            <a:avLst/>
-          </a:prstGeom>
-          <a:noFill/>
-          <a:ln/>
-        </p:spPr>
-        <p:txBody>
-          <a:bodyPr wrap="square" lIns="0" tIns="0" rIns="0" bIns="0" rtlCol="0" anchor="t">
+            <a:off x="7799832" y="1801368"/>
+            <a:ext cx="3145536" cy="758952"/>
+          </a:xfrm>
+          <a:prstGeom prst="rect">
+            <a:avLst/>
+          </a:prstGeom>
+          <a:noFill/>
+          <a:ln/>
+        </p:spPr>
+        <p:txBody>
+          <a:bodyPr wrap="square" lIns="254" tIns="254" rIns="254" bIns="254" rtlCol="0" anchor="t">
             <a:normAutofit/>
           </a:bodyPr>
           <a:lstStyle/>
@@ -15968,7 +16243,7 @@
               <a:buNone/>
             </a:pPr>
             <a:r>
-              <a:rPr lang="en-US" sz="1550" dirty="0">
+              <a:rPr lang="en-US" sz="1320" dirty="0">
                 <a:solidFill>
                   <a:srgbClr val="17364A"/>
                 </a:solidFill>
@@ -15978,7 +16253,7 @@
               </a:rPr>
               <a:t>After completing the note, identify one governance question that remains unresolved.</a:t>
             </a:r>
-            <a:endParaRPr lang="en-US" sz="1550" dirty="0"/>
+            <a:endParaRPr lang="en-US" sz="1320" dirty="0"/>
           </a:p>
         </p:txBody>
       </p:sp>
@@ -16066,13 +16341,16 @@
           <a:ln/>
         </p:spPr>
         <p:txBody>
-          <a:bodyPr wrap="square" lIns="254" tIns="254" rIns="254" bIns="254" rtlCol="0" anchor="t">
+          <a:bodyPr wrap="square" lIns="508" tIns="508" rIns="508" bIns="508" rtlCol="0" anchor="t">
             <a:normAutofit/>
           </a:bodyPr>
           <a:lstStyle/>
           <a:p>
-            <a:r>
-              <a:rPr lang="en-US" sz="1380" dirty="0">
+            <a:pPr indent="0" marL="0">
+              <a:buNone/>
+            </a:pPr>
+            <a:r>
+              <a:rPr lang="en-US" sz="1220" dirty="0">
                 <a:solidFill>
                   <a:srgbClr val="17364A"/>
                 </a:solidFill>
@@ -16082,11 +16360,14 @@
               </a:rPr>
               <a:t>What threshold would make the project high risk?</a:t>
             </a:r>
-            <a:endParaRPr lang="en-US" sz="1380" dirty="0"/>
-          </a:p>
-          <a:p>
-            <a:r>
-              <a:rPr lang="en-US" sz="1380" dirty="0">
+            <a:endParaRPr lang="en-US" sz="1220" dirty="0"/>
+          </a:p>
+          <a:p>
+            <a:pPr indent="0" marL="0">
+              <a:buNone/>
+            </a:pPr>
+            <a:r>
+              <a:rPr lang="en-US" sz="1220" dirty="0">
                 <a:solidFill>
                   <a:srgbClr val="17364A"/>
                 </a:solidFill>
@@ -16094,9 +16375,9 @@
                 <a:ea typeface="Aptos" pitchFamily="34" charset="-122"/>
                 <a:cs typeface="Aptos" pitchFamily="34" charset="-120"/>
               </a:rPr>
-              <a:t>What evidence would show that the AI summary did not erase smaller community concerns?</a:t>
-            </a:r>
-            <a:endParaRPr lang="en-US" sz="1380" dirty="0"/>
+              <a:t>What evidence would show that the AI summary did not erase smaller.</a:t>
+            </a:r>
+            <a:endParaRPr lang="en-US" sz="1220" dirty="0"/>
           </a:p>
         </p:txBody>
       </p:sp>
@@ -16174,17 +16455,17 @@
         </p:nvSpPr>
         <p:spPr>
           <a:xfrm>
-            <a:off x="7799832" y="5001768"/>
-            <a:ext cx="3145536" cy="502920"/>
-          </a:xfrm>
-          <a:prstGeom prst="rect">
-            <a:avLst/>
-          </a:prstGeom>
-          <a:noFill/>
-          <a:ln/>
-        </p:spPr>
-        <p:txBody>
-          <a:bodyPr wrap="square" lIns="0" tIns="0" rIns="0" bIns="0" rtlCol="0" anchor="t">
+            <a:off x="7799832" y="4974336"/>
+            <a:ext cx="3145536" cy="576072"/>
+          </a:xfrm>
+          <a:prstGeom prst="rect">
+            <a:avLst/>
+          </a:prstGeom>
+          <a:noFill/>
+          <a:ln/>
+        </p:spPr>
+        <p:txBody>
+          <a:bodyPr wrap="square" lIns="254" tIns="254" rIns="254" bIns="254" rtlCol="0" anchor="t">
             <a:normAutofit/>
           </a:bodyPr>
           <a:lstStyle/>
@@ -16193,7 +16474,7 @@
               <a:buNone/>
             </a:pPr>
             <a:r>
-              <a:rPr lang="en-US" sz="1550" dirty="0">
+              <a:rPr lang="en-US" sz="1320" dirty="0">
                 <a:solidFill>
                   <a:srgbClr val="17364A"/>
                 </a:solidFill>
@@ -16201,9 +16482,9 @@
                 <a:ea typeface="Aptos" pitchFamily="34" charset="-122"/>
                 <a:cs typeface="Aptos" pitchFamily="34" charset="-120"/>
               </a:rPr>
-              <a:t>Use the assignment to test whether you can explain the concept, apply it to a realistic public health situation, and identify what would need review before the work moves forward.</a:t>
-            </a:r>
-            <a:endParaRPr lang="en-US" sz="1550" dirty="0"/>
+              <a:t>Use the assignment to test whether you can explain the concept, apply it to a realistic public health situation, and.</a:t>
+            </a:r>
+            <a:endParaRPr lang="en-US" sz="1320" dirty="0"/>
           </a:p>
         </p:txBody>
       </p:sp>
@@ -16504,49 +16785,58 @@
           <a:ln/>
         </p:spPr>
         <p:txBody>
-          <a:bodyPr wrap="square" lIns="635" tIns="635" rIns="635" bIns="635" rtlCol="0" anchor="t">
+          <a:bodyPr wrap="square" lIns="1016" tIns="1016" rIns="1016" bIns="1016" rtlCol="0" anchor="t">
             <a:normAutofit/>
           </a:bodyPr>
           <a:lstStyle/>
           <a:p>
+            <a:pPr indent="0" marL="0">
+              <a:buNone/>
+            </a:pPr>
             <a:r>
               <a:rPr lang="en-US" sz="2100" dirty="0">
                 <a:solidFill>
-                  <a:srgbClr val="17364A"/>
-                </a:solidFill>
-                <a:latin typeface="Aptos" pitchFamily="34" charset="0"/>
-                <a:ea typeface="Aptos" pitchFamily="34" charset="-122"/>
-                <a:cs typeface="Aptos" pitchFamily="34" charset="-120"/>
-              </a:rPr>
-              <a:t>Learners should produce an introductory AI governance intake and escalation note for one public health.</a:t>
+                  <a:srgbClr val="003A63"/>
+                </a:solidFill>
+                <a:latin typeface="Aptos" pitchFamily="34" charset="0"/>
+                <a:ea typeface="Aptos" pitchFamily="34" charset="-122"/>
+                <a:cs typeface="Aptos" pitchFamily="34" charset="-120"/>
+              </a:rPr>
+              <a:t>• Learners should produce an introductory AI governance intake and escalation note for one.</a:t>
             </a:r>
             <a:endParaRPr lang="en-US" sz="2100" dirty="0"/>
           </a:p>
           <a:p>
+            <a:pPr indent="0" marL="0">
+              <a:buNone/>
+            </a:pPr>
             <a:r>
               <a:rPr lang="en-US" sz="2100" dirty="0">
                 <a:solidFill>
-                  <a:srgbClr val="17364A"/>
-                </a:solidFill>
-                <a:latin typeface="Aptos" pitchFamily="34" charset="0"/>
-                <a:ea typeface="Aptos" pitchFamily="34" charset="-122"/>
-                <a:cs typeface="Aptos" pitchFamily="34" charset="-120"/>
-              </a:rPr>
-              <a:t>The artifact should include a purpose statement, data description, AI function, likely users, expected.</a:t>
+                  <a:srgbClr val="003A63"/>
+                </a:solidFill>
+                <a:latin typeface="Aptos" pitchFamily="34" charset="0"/>
+                <a:ea typeface="Aptos" pitchFamily="34" charset="-122"/>
+                <a:cs typeface="Aptos" pitchFamily="34" charset="-120"/>
+              </a:rPr>
+              <a:t>• The artifact should include a purpose statement, data description, AI function, likely users,.</a:t>
             </a:r>
             <a:endParaRPr lang="en-US" sz="2100" dirty="0"/>
           </a:p>
           <a:p>
+            <a:pPr indent="0" marL="0">
+              <a:buNone/>
+            </a:pPr>
             <a:r>
               <a:rPr lang="en-US" sz="2100" dirty="0">
                 <a:solidFill>
-                  <a:srgbClr val="17364A"/>
-                </a:solidFill>
-                <a:latin typeface="Aptos" pitchFamily="34" charset="0"/>
-                <a:ea typeface="Aptos" pitchFamily="34" charset="-122"/>
-                <a:cs typeface="Aptos" pitchFamily="34" charset="-120"/>
-              </a:rPr>
-              <a:t>The artifact can be used as a training record, a draft intake form, or a starting point for a real.</a:t>
+                  <a:srgbClr val="003A63"/>
+                </a:solidFill>
+                <a:latin typeface="Aptos" pitchFamily="34" charset="0"/>
+                <a:ea typeface="Aptos" pitchFamily="34" charset="-122"/>
+                <a:cs typeface="Aptos" pitchFamily="34" charset="-120"/>
+              </a:rPr>
+              <a:t>• The artifact can be used as a training record, a draft intake form, or a starting point for a.</a:t>
             </a:r>
             <a:endParaRPr lang="en-US" sz="2100" dirty="0"/>
           </a:p>
@@ -16626,17 +16916,17 @@
         </p:nvSpPr>
         <p:spPr>
           <a:xfrm>
-            <a:off x="7799832" y="1828800"/>
-            <a:ext cx="3145536" cy="685800"/>
-          </a:xfrm>
-          <a:prstGeom prst="rect">
-            <a:avLst/>
-          </a:prstGeom>
-          <a:noFill/>
-          <a:ln/>
-        </p:spPr>
-        <p:txBody>
-          <a:bodyPr wrap="square" lIns="0" tIns="0" rIns="0" bIns="0" rtlCol="0" anchor="t">
+            <a:off x="7799832" y="1801368"/>
+            <a:ext cx="3145536" cy="758952"/>
+          </a:xfrm>
+          <a:prstGeom prst="rect">
+            <a:avLst/>
+          </a:prstGeom>
+          <a:noFill/>
+          <a:ln/>
+        </p:spPr>
+        <p:txBody>
+          <a:bodyPr wrap="square" lIns="254" tIns="254" rIns="254" bIns="254" rtlCol="0" anchor="t">
             <a:normAutofit/>
           </a:bodyPr>
           <a:lstStyle/>
@@ -16645,7 +16935,7 @@
               <a:buNone/>
             </a:pPr>
             <a:r>
-              <a:rPr lang="en-US" sz="1550" dirty="0">
+              <a:rPr lang="en-US" sz="1320" dirty="0">
                 <a:solidFill>
                   <a:srgbClr val="17364A"/>
                 </a:solidFill>
@@ -16655,7 +16945,7 @@
               </a:rPr>
               <a:t>Learners should produce an introductory AI governance intake and escalation note for one public health.</a:t>
             </a:r>
-            <a:endParaRPr lang="en-US" sz="1550" dirty="0"/>
+            <a:endParaRPr lang="en-US" sz="1320" dirty="0"/>
           </a:p>
         </p:txBody>
       </p:sp>
@@ -16743,13 +17033,16 @@
           <a:ln/>
         </p:spPr>
         <p:txBody>
-          <a:bodyPr wrap="square" lIns="254" tIns="254" rIns="254" bIns="254" rtlCol="0" anchor="t">
+          <a:bodyPr wrap="square" lIns="508" tIns="508" rIns="508" bIns="508" rtlCol="0" anchor="t">
             <a:normAutofit/>
           </a:bodyPr>
           <a:lstStyle/>
           <a:p>
-            <a:r>
-              <a:rPr lang="en-US" sz="1380" dirty="0">
+            <a:pPr indent="0" marL="0">
+              <a:buNone/>
+            </a:pPr>
+            <a:r>
+              <a:rPr lang="en-US" sz="1220" dirty="0">
                 <a:solidFill>
                   <a:srgbClr val="17364A"/>
                 </a:solidFill>
@@ -16757,13 +17050,16 @@
                 <a:ea typeface="Aptos" pitchFamily="34" charset="-122"/>
                 <a:cs typeface="Aptos" pitchFamily="34" charset="-120"/>
               </a:rPr>
-              <a:t>Learners should produce an introductory AI governance intake and escalation note for one.</a:t>
-            </a:r>
-            <a:endParaRPr lang="en-US" sz="1380" dirty="0"/>
-          </a:p>
-          <a:p>
-            <a:r>
-              <a:rPr lang="en-US" sz="1380" dirty="0">
+              <a:t>Learners should produce an introductory AI governance intake and.</a:t>
+            </a:r>
+            <a:endParaRPr lang="en-US" sz="1220" dirty="0"/>
+          </a:p>
+          <a:p>
+            <a:pPr indent="0" marL="0">
+              <a:buNone/>
+            </a:pPr>
+            <a:r>
+              <a:rPr lang="en-US" sz="1220" dirty="0">
                 <a:solidFill>
                   <a:srgbClr val="17364A"/>
                 </a:solidFill>
@@ -16771,13 +17067,16 @@
                 <a:ea typeface="Aptos" pitchFamily="34" charset="-122"/>
                 <a:cs typeface="Aptos" pitchFamily="34" charset="-120"/>
               </a:rPr>
-              <a:t>The artifact should include a purpose statement, data description, AI function, likely.</a:t>
-            </a:r>
-            <a:endParaRPr lang="en-US" sz="1380" dirty="0"/>
-          </a:p>
-          <a:p>
-            <a:r>
-              <a:rPr lang="en-US" sz="1380" dirty="0">
+              <a:t>The artifact should include a purpose statement, data description,.</a:t>
+            </a:r>
+            <a:endParaRPr lang="en-US" sz="1220" dirty="0"/>
+          </a:p>
+          <a:p>
+            <a:pPr indent="0" marL="0">
+              <a:buNone/>
+            </a:pPr>
+            <a:r>
+              <a:rPr lang="en-US" sz="1220" dirty="0">
                 <a:solidFill>
                   <a:srgbClr val="17364A"/>
                 </a:solidFill>
@@ -16785,9 +17084,9 @@
                 <a:ea typeface="Aptos" pitchFamily="34" charset="-122"/>
                 <a:cs typeface="Aptos" pitchFamily="34" charset="-120"/>
               </a:rPr>
-              <a:t>The artifact can be used as a training record, a draft intake form, or a starting point.</a:t>
-            </a:r>
-            <a:endParaRPr lang="en-US" sz="1380" dirty="0"/>
+              <a:t>The artifact can be used as a training record, a draft intake.</a:t>
+            </a:r>
+            <a:endParaRPr lang="en-US" sz="1220" dirty="0"/>
           </a:p>
         </p:txBody>
       </p:sp>
@@ -16865,17 +17164,17 @@
         </p:nvSpPr>
         <p:spPr>
           <a:xfrm>
-            <a:off x="7799832" y="5001768"/>
-            <a:ext cx="3145536" cy="502920"/>
-          </a:xfrm>
-          <a:prstGeom prst="rect">
-            <a:avLst/>
-          </a:prstGeom>
-          <a:noFill/>
-          <a:ln/>
-        </p:spPr>
-        <p:txBody>
-          <a:bodyPr wrap="square" lIns="0" tIns="0" rIns="0" bIns="0" rtlCol="0" anchor="t">
+            <a:off x="7799832" y="4974336"/>
+            <a:ext cx="3145536" cy="576072"/>
+          </a:xfrm>
+          <a:prstGeom prst="rect">
+            <a:avLst/>
+          </a:prstGeom>
+          <a:noFill/>
+          <a:ln/>
+        </p:spPr>
+        <p:txBody>
+          <a:bodyPr wrap="square" lIns="254" tIns="254" rIns="254" bIns="254" rtlCol="0" anchor="t">
             <a:normAutofit/>
           </a:bodyPr>
           <a:lstStyle/>
@@ -16884,7 +17183,7 @@
               <a:buNone/>
             </a:pPr>
             <a:r>
-              <a:rPr lang="en-US" sz="1550" dirty="0">
+              <a:rPr lang="en-US" sz="1320" dirty="0">
                 <a:solidFill>
                   <a:srgbClr val="17364A"/>
                 </a:solidFill>
@@ -16892,9 +17191,9 @@
                 <a:ea typeface="Aptos" pitchFamily="34" charset="-122"/>
                 <a:cs typeface="Aptos" pitchFamily="34" charset="-120"/>
               </a:rPr>
-              <a:t>Translate this concept into clear decision rights, review steps, documentation expectations, and escalation paths before an AI-supported workflow is approved.</a:t>
-            </a:r>
-            <a:endParaRPr lang="en-US" sz="1550" dirty="0"/>
+              <a:t>Translate this concept into clear decision rights, review steps, documentation expectations, and escalation paths before.</a:t>
+            </a:r>
+            <a:endParaRPr lang="en-US" sz="1320" dirty="0"/>
           </a:p>
         </p:txBody>
       </p:sp>
@@ -17195,21 +17494,24 @@
           <a:ln/>
         </p:spPr>
         <p:txBody>
-          <a:bodyPr wrap="square" lIns="635" tIns="635" rIns="635" bIns="635" rtlCol="0" anchor="t">
+          <a:bodyPr wrap="square" lIns="1016" tIns="1016" rIns="1016" bIns="1016" rtlCol="0" anchor="t">
             <a:normAutofit/>
           </a:bodyPr>
           <a:lstStyle/>
           <a:p>
+            <a:pPr indent="0" marL="0">
+              <a:buNone/>
+            </a:pPr>
             <a:r>
               <a:rPr lang="en-US" sz="2100" dirty="0">
                 <a:solidFill>
-                  <a:srgbClr val="17364A"/>
-                </a:solidFill>
-                <a:latin typeface="Aptos" pitchFamily="34" charset="0"/>
-                <a:ea typeface="Aptos" pitchFamily="34" charset="-122"/>
-                <a:cs typeface="Aptos" pitchFamily="34" charset="-120"/>
-              </a:rPr>
-              <a:t>Learners should produce an introductory AI governance intake and escalation note for one public health.</a:t>
+                  <a:srgbClr val="003A63"/>
+                </a:solidFill>
+                <a:latin typeface="Aptos" pitchFamily="34" charset="0"/>
+                <a:ea typeface="Aptos" pitchFamily="34" charset="-122"/>
+                <a:cs typeface="Aptos" pitchFamily="34" charset="-120"/>
+              </a:rPr>
+              <a:t>• Learners should produce an introductory AI governance intake and escalation note for one.</a:t>
             </a:r>
             <a:endParaRPr lang="en-US" sz="2100" dirty="0"/>
           </a:p>
@@ -17289,17 +17591,17 @@
         </p:nvSpPr>
         <p:spPr>
           <a:xfrm>
-            <a:off x="7799832" y="1828800"/>
-            <a:ext cx="3145536" cy="685800"/>
-          </a:xfrm>
-          <a:prstGeom prst="rect">
-            <a:avLst/>
-          </a:prstGeom>
-          <a:noFill/>
-          <a:ln/>
-        </p:spPr>
-        <p:txBody>
-          <a:bodyPr wrap="square" lIns="0" tIns="0" rIns="0" bIns="0" rtlCol="0" anchor="t">
+            <a:off x="7799832" y="1801368"/>
+            <a:ext cx="3145536" cy="758952"/>
+          </a:xfrm>
+          <a:prstGeom prst="rect">
+            <a:avLst/>
+          </a:prstGeom>
+          <a:noFill/>
+          <a:ln/>
+        </p:spPr>
+        <p:txBody>
+          <a:bodyPr wrap="square" lIns="254" tIns="254" rIns="254" bIns="254" rtlCol="0" anchor="t">
             <a:normAutofit/>
           </a:bodyPr>
           <a:lstStyle/>
@@ -17308,7 +17610,7 @@
               <a:buNone/>
             </a:pPr>
             <a:r>
-              <a:rPr lang="en-US" sz="1550" dirty="0">
+              <a:rPr lang="en-US" sz="1320" dirty="0">
                 <a:solidFill>
                   <a:srgbClr val="17364A"/>
                 </a:solidFill>
@@ -17318,7 +17620,7 @@
               </a:rPr>
               <a:t>Learners should produce an introductory AI governance intake and escalation note for one public health.</a:t>
             </a:r>
-            <a:endParaRPr lang="en-US" sz="1550" dirty="0"/>
+            <a:endParaRPr lang="en-US" sz="1320" dirty="0"/>
           </a:p>
         </p:txBody>
       </p:sp>
@@ -17406,13 +17708,16 @@
           <a:ln/>
         </p:spPr>
         <p:txBody>
-          <a:bodyPr wrap="square" lIns="254" tIns="254" rIns="254" bIns="254" rtlCol="0" anchor="t">
+          <a:bodyPr wrap="square" lIns="508" tIns="508" rIns="508" bIns="508" rtlCol="0" anchor="t">
             <a:normAutofit/>
           </a:bodyPr>
           <a:lstStyle/>
           <a:p>
-            <a:r>
-              <a:rPr lang="en-US" sz="1380" dirty="0">
+            <a:pPr indent="0" marL="0">
+              <a:buNone/>
+            </a:pPr>
+            <a:r>
+              <a:rPr lang="en-US" sz="1220" dirty="0">
                 <a:solidFill>
                   <a:srgbClr val="17364A"/>
                 </a:solidFill>
@@ -17420,13 +17725,16 @@
                 <a:ea typeface="Aptos" pitchFamily="34" charset="-122"/>
                 <a:cs typeface="Aptos" pitchFamily="34" charset="-120"/>
               </a:rPr>
-              <a:t>Learners should produce an introductory AI governance intake and escalation note for one.</a:t>
-            </a:r>
-            <a:endParaRPr lang="en-US" sz="1380" dirty="0"/>
-          </a:p>
-          <a:p>
-            <a:r>
-              <a:rPr lang="en-US" sz="1380" dirty="0">
+              <a:t>Learners should produce an introductory AI governance intake and.</a:t>
+            </a:r>
+            <a:endParaRPr lang="en-US" sz="1220" dirty="0"/>
+          </a:p>
+          <a:p>
+            <a:pPr indent="0" marL="0">
+              <a:buNone/>
+            </a:pPr>
+            <a:r>
+              <a:rPr lang="en-US" sz="1220" dirty="0">
                 <a:solidFill>
                   <a:srgbClr val="17364A"/>
                 </a:solidFill>
@@ -17434,13 +17742,16 @@
                 <a:ea typeface="Aptos" pitchFamily="34" charset="-122"/>
                 <a:cs typeface="Aptos" pitchFamily="34" charset="-120"/>
               </a:rPr>
-              <a:t>The artifact should include a purpose statement, data description, AI function, likely.</a:t>
-            </a:r>
-            <a:endParaRPr lang="en-US" sz="1380" dirty="0"/>
-          </a:p>
-          <a:p>
-            <a:r>
-              <a:rPr lang="en-US" sz="1380" dirty="0">
+              <a:t>The artifact should include a purpose statement, data description,.</a:t>
+            </a:r>
+            <a:endParaRPr lang="en-US" sz="1220" dirty="0"/>
+          </a:p>
+          <a:p>
+            <a:pPr indent="0" marL="0">
+              <a:buNone/>
+            </a:pPr>
+            <a:r>
+              <a:rPr lang="en-US" sz="1220" dirty="0">
                 <a:solidFill>
                   <a:srgbClr val="17364A"/>
                 </a:solidFill>
@@ -17448,9 +17759,9 @@
                 <a:ea typeface="Aptos" pitchFamily="34" charset="-122"/>
                 <a:cs typeface="Aptos" pitchFamily="34" charset="-120"/>
               </a:rPr>
-              <a:t>The artifact can be used as a training record, a draft intake form, or a starting point.</a:t>
-            </a:r>
-            <a:endParaRPr lang="en-US" sz="1380" dirty="0"/>
+              <a:t>The artifact can be used as a training record, a draft intake.</a:t>
+            </a:r>
+            <a:endParaRPr lang="en-US" sz="1220" dirty="0"/>
           </a:p>
         </p:txBody>
       </p:sp>
@@ -17528,17 +17839,17 @@
         </p:nvSpPr>
         <p:spPr>
           <a:xfrm>
-            <a:off x="7799832" y="5001768"/>
-            <a:ext cx="3145536" cy="502920"/>
-          </a:xfrm>
-          <a:prstGeom prst="rect">
-            <a:avLst/>
-          </a:prstGeom>
-          <a:noFill/>
-          <a:ln/>
-        </p:spPr>
-        <p:txBody>
-          <a:bodyPr wrap="square" lIns="0" tIns="0" rIns="0" bIns="0" rtlCol="0" anchor="t">
+            <a:off x="7799832" y="4974336"/>
+            <a:ext cx="3145536" cy="576072"/>
+          </a:xfrm>
+          <a:prstGeom prst="rect">
+            <a:avLst/>
+          </a:prstGeom>
+          <a:noFill/>
+          <a:ln/>
+        </p:spPr>
+        <p:txBody>
+          <a:bodyPr wrap="square" lIns="254" tIns="254" rIns="254" bIns="254" rtlCol="0" anchor="t">
             <a:normAutofit/>
           </a:bodyPr>
           <a:lstStyle/>
@@ -17547,7 +17858,7 @@
               <a:buNone/>
             </a:pPr>
             <a:r>
-              <a:rPr lang="en-US" sz="1550" dirty="0">
+              <a:rPr lang="en-US" sz="1320" dirty="0">
                 <a:solidFill>
                   <a:srgbClr val="17364A"/>
                 </a:solidFill>
@@ -17555,9 +17866,9 @@
                 <a:ea typeface="Aptos" pitchFamily="34" charset="-122"/>
                 <a:cs typeface="Aptos" pitchFamily="34" charset="-120"/>
               </a:rPr>
-              <a:t>Use the assignment to test whether you can explain the concept, apply it to a realistic public health situation, and identify what would need review before the work moves forward.</a:t>
-            </a:r>
-            <a:endParaRPr lang="en-US" sz="1550" dirty="0"/>
+              <a:t>Use the assignment to test whether you can explain the concept, apply it to a realistic public health situation, and.</a:t>
+            </a:r>
+            <a:endParaRPr lang="en-US" sz="1320" dirty="0"/>
           </a:p>
         </p:txBody>
       </p:sp>
@@ -17858,49 +18169,58 @@
           <a:ln/>
         </p:spPr>
         <p:txBody>
-          <a:bodyPr wrap="square" lIns="635" tIns="635" rIns="635" bIns="635" rtlCol="0" anchor="t">
+          <a:bodyPr wrap="square" lIns="1016" tIns="1016" rIns="1016" bIns="1016" rtlCol="0" anchor="t">
             <a:normAutofit/>
           </a:bodyPr>
           <a:lstStyle/>
           <a:p>
+            <a:pPr indent="0" marL="0">
+              <a:buNone/>
+            </a:pPr>
             <a:r>
               <a:rPr lang="en-US" sz="2100" dirty="0">
                 <a:solidFill>
-                  <a:srgbClr val="17364A"/>
-                </a:solidFill>
-                <a:latin typeface="Aptos" pitchFamily="34" charset="0"/>
-                <a:ea typeface="Aptos" pitchFamily="34" charset="-122"/>
-                <a:cs typeface="Aptos" pitchFamily="34" charset="-120"/>
-              </a:rPr>
-              <a:t>1. Which statement best describes AI governance in a public health agency?</a:t>
+                  <a:srgbClr val="003A63"/>
+                </a:solidFill>
+                <a:latin typeface="Aptos" pitchFamily="34" charset="0"/>
+                <a:ea typeface="Aptos" pitchFamily="34" charset="-122"/>
+                <a:cs typeface="Aptos" pitchFamily="34" charset="-120"/>
+              </a:rPr>
+              <a:t>• 1. Which statement best describes AI governance in a public health agency?</a:t>
             </a:r>
             <a:endParaRPr lang="en-US" sz="2100" dirty="0"/>
           </a:p>
           <a:p>
+            <a:pPr indent="0" marL="0">
+              <a:buNone/>
+            </a:pPr>
             <a:r>
               <a:rPr lang="en-US" sz="2100" dirty="0">
                 <a:solidFill>
-                  <a:srgbClr val="17364A"/>
-                </a:solidFill>
-                <a:latin typeface="Aptos" pitchFamily="34" charset="0"/>
-                <a:ea typeface="Aptos" pitchFamily="34" charset="-122"/>
-                <a:cs typeface="Aptos" pitchFamily="34" charset="-120"/>
-              </a:rPr>
-              <a:t>2. Which AI use should most clearly be escalated for formal review before implementation?</a:t>
+                  <a:srgbClr val="003A63"/>
+                </a:solidFill>
+                <a:latin typeface="Aptos" pitchFamily="34" charset="0"/>
+                <a:ea typeface="Aptos" pitchFamily="34" charset="-122"/>
+                <a:cs typeface="Aptos" pitchFamily="34" charset="-120"/>
+              </a:rPr>
+              <a:t>• 2. Which AI use should most clearly be escalated for formal review before implementation?</a:t>
             </a:r>
             <a:endParaRPr lang="en-US" sz="2100" dirty="0"/>
           </a:p>
           <a:p>
+            <a:pPr indent="0" marL="0">
+              <a:buNone/>
+            </a:pPr>
             <a:r>
               <a:rPr lang="en-US" sz="2100" dirty="0">
                 <a:solidFill>
-                  <a:srgbClr val="17364A"/>
-                </a:solidFill>
-                <a:latin typeface="Aptos" pitchFamily="34" charset="0"/>
-                <a:ea typeface="Aptos" pitchFamily="34" charset="-122"/>
-                <a:cs typeface="Aptos" pitchFamily="34" charset="-120"/>
-              </a:rPr>
-              <a:t>3. What is the most important reason to define human review in an AI-supported workflow?</a:t>
+                  <a:srgbClr val="003A63"/>
+                </a:solidFill>
+                <a:latin typeface="Aptos" pitchFamily="34" charset="0"/>
+                <a:ea typeface="Aptos" pitchFamily="34" charset="-122"/>
+                <a:cs typeface="Aptos" pitchFamily="34" charset="-120"/>
+              </a:rPr>
+              <a:t>• 3. What is the most important reason to define human review in an AI-supported workflow?</a:t>
             </a:r>
             <a:endParaRPr lang="en-US" sz="2100" dirty="0"/>
           </a:p>
@@ -17980,17 +18300,17 @@
         </p:nvSpPr>
         <p:spPr>
           <a:xfrm>
-            <a:off x="7799832" y="1828800"/>
-            <a:ext cx="3145536" cy="685800"/>
-          </a:xfrm>
-          <a:prstGeom prst="rect">
-            <a:avLst/>
-          </a:prstGeom>
-          <a:noFill/>
-          <a:ln/>
-        </p:spPr>
-        <p:txBody>
-          <a:bodyPr wrap="square" lIns="0" tIns="0" rIns="0" bIns="0" rtlCol="0" anchor="t">
+            <a:off x="7799832" y="1801368"/>
+            <a:ext cx="3145536" cy="758952"/>
+          </a:xfrm>
+          <a:prstGeom prst="rect">
+            <a:avLst/>
+          </a:prstGeom>
+          <a:noFill/>
+          <a:ln/>
+        </p:spPr>
+        <p:txBody>
+          <a:bodyPr wrap="square" lIns="254" tIns="254" rIns="254" bIns="254" rtlCol="0" anchor="t">
             <a:normAutofit/>
           </a:bodyPr>
           <a:lstStyle/>
@@ -17999,7 +18319,7 @@
               <a:buNone/>
             </a:pPr>
             <a:r>
-              <a:rPr lang="en-US" sz="1550" dirty="0">
+              <a:rPr lang="en-US" sz="1320" dirty="0">
                 <a:solidFill>
                   <a:srgbClr val="17364A"/>
                 </a:solidFill>
@@ -18009,7 +18329,7 @@
               </a:rPr>
               <a:t>1. Which statement best describes AI governance in a public health agency?</a:t>
             </a:r>
-            <a:endParaRPr lang="en-US" sz="1550" dirty="0"/>
+            <a:endParaRPr lang="en-US" sz="1320" dirty="0"/>
           </a:p>
         </p:txBody>
       </p:sp>
@@ -18097,13 +18417,16 @@
           <a:ln/>
         </p:spPr>
         <p:txBody>
-          <a:bodyPr wrap="square" lIns="254" tIns="254" rIns="254" bIns="254" rtlCol="0" anchor="t">
+          <a:bodyPr wrap="square" lIns="508" tIns="508" rIns="508" bIns="508" rtlCol="0" anchor="t">
             <a:normAutofit/>
           </a:bodyPr>
           <a:lstStyle/>
           <a:p>
-            <a:r>
-              <a:rPr lang="en-US" sz="1380" dirty="0">
+            <a:pPr indent="0" marL="0">
+              <a:buNone/>
+            </a:pPr>
+            <a:r>
+              <a:rPr lang="en-US" sz="1220" dirty="0">
                 <a:solidFill>
                   <a:srgbClr val="17364A"/>
                 </a:solidFill>
@@ -18113,11 +18436,14 @@
               </a:rPr>
               <a:t>1.</a:t>
             </a:r>
-            <a:endParaRPr lang="en-US" sz="1380" dirty="0"/>
-          </a:p>
-          <a:p>
-            <a:r>
-              <a:rPr lang="en-US" sz="1380" dirty="0">
+            <a:endParaRPr lang="en-US" sz="1220" dirty="0"/>
+          </a:p>
+          <a:p>
+            <a:pPr indent="0" marL="0">
+              <a:buNone/>
+            </a:pPr>
+            <a:r>
+              <a:rPr lang="en-US" sz="1220" dirty="0">
                 <a:solidFill>
                   <a:srgbClr val="17364A"/>
                 </a:solidFill>
@@ -18125,13 +18451,16 @@
                 <a:ea typeface="Aptos" pitchFamily="34" charset="-122"/>
                 <a:cs typeface="Aptos" pitchFamily="34" charset="-120"/>
               </a:rPr>
-              <a:t>Which statement best describes AI governance in a public health agency?</a:t>
-            </a:r>
-            <a:endParaRPr lang="en-US" sz="1380" dirty="0"/>
-          </a:p>
-          <a:p>
-            <a:r>
-              <a:rPr lang="en-US" sz="1380" dirty="0">
+              <a:t>Which statement best describes AI governance in a public health.</a:t>
+            </a:r>
+            <a:endParaRPr lang="en-US" sz="1220" dirty="0"/>
+          </a:p>
+          <a:p>
+            <a:pPr indent="0" marL="0">
+              <a:buNone/>
+            </a:pPr>
+            <a:r>
+              <a:rPr lang="en-US" sz="1220" dirty="0">
                 <a:solidFill>
                   <a:srgbClr val="17364A"/>
                 </a:solidFill>
@@ -18141,7 +18470,7 @@
               </a:rPr>
               <a:t>2.</a:t>
             </a:r>
-            <a:endParaRPr lang="en-US" sz="1380" dirty="0"/>
+            <a:endParaRPr lang="en-US" sz="1220" dirty="0"/>
           </a:p>
         </p:txBody>
       </p:sp>
@@ -18219,17 +18548,17 @@
         </p:nvSpPr>
         <p:spPr>
           <a:xfrm>
-            <a:off x="7799832" y="5001768"/>
-            <a:ext cx="3145536" cy="502920"/>
-          </a:xfrm>
-          <a:prstGeom prst="rect">
-            <a:avLst/>
-          </a:prstGeom>
-          <a:noFill/>
-          <a:ln/>
-        </p:spPr>
-        <p:txBody>
-          <a:bodyPr wrap="square" lIns="0" tIns="0" rIns="0" bIns="0" rtlCol="0" anchor="t">
+            <a:off x="7799832" y="4974336"/>
+            <a:ext cx="3145536" cy="576072"/>
+          </a:xfrm>
+          <a:prstGeom prst="rect">
+            <a:avLst/>
+          </a:prstGeom>
+          <a:noFill/>
+          <a:ln/>
+        </p:spPr>
+        <p:txBody>
+          <a:bodyPr wrap="square" lIns="254" tIns="254" rIns="254" bIns="254" rtlCol="0" anchor="t">
             <a:normAutofit/>
           </a:bodyPr>
           <a:lstStyle/>
@@ -18238,7 +18567,7 @@
               <a:buNone/>
             </a:pPr>
             <a:r>
-              <a:rPr lang="en-US" sz="1550" dirty="0">
+              <a:rPr lang="en-US" sz="1320" dirty="0">
                 <a:solidFill>
                   <a:srgbClr val="17364A"/>
                 </a:solidFill>
@@ -18246,9 +18575,9 @@
                 <a:ea typeface="Aptos" pitchFamily="34" charset="-122"/>
                 <a:cs typeface="Aptos" pitchFamily="34" charset="-120"/>
               </a:rPr>
-              <a:t>Use the assignment to test whether you can explain the concept, apply it to a realistic public health situation, and identify what would need review before the work moves forward.</a:t>
-            </a:r>
-            <a:endParaRPr lang="en-US" sz="1550" dirty="0"/>
+              <a:t>Use the assignment to test whether you can explain the concept, apply it to a realistic public health situation, and.</a:t>
+            </a:r>
+            <a:endParaRPr lang="en-US" sz="1320" dirty="0"/>
           </a:p>
         </p:txBody>
       </p:sp>
@@ -18549,63 +18878,75 @@
           <a:ln/>
         </p:spPr>
         <p:txBody>
-          <a:bodyPr wrap="square" lIns="635" tIns="635" rIns="635" bIns="635" rtlCol="0" anchor="t">
+          <a:bodyPr wrap="square" lIns="1016" tIns="1016" rIns="1016" bIns="1016" rtlCol="0" anchor="t">
             <a:normAutofit/>
           </a:bodyPr>
           <a:lstStyle/>
           <a:p>
+            <a:pPr indent="0" marL="0">
+              <a:buNone/>
+            </a:pPr>
             <a:r>
               <a:rPr lang="en-US" sz="1900" dirty="0">
                 <a:solidFill>
-                  <a:srgbClr val="17364A"/>
-                </a:solidFill>
-                <a:latin typeface="Aptos" pitchFamily="34" charset="0"/>
-                <a:ea typeface="Aptos" pitchFamily="34" charset="-122"/>
-                <a:cs typeface="Aptos" pitchFamily="34" charset="-120"/>
-              </a:rPr>
-              <a:t>Play 3: Establish AI Governance - This lesson informs Play 3 by helping learners connect the lesson topic to.</a:t>
+                  <a:srgbClr val="003A63"/>
+                </a:solidFill>
+                <a:latin typeface="Aptos" pitchFamily="34" charset="0"/>
+                <a:ea typeface="Aptos" pitchFamily="34" charset="-122"/>
+                <a:cs typeface="Aptos" pitchFamily="34" charset="-120"/>
+              </a:rPr>
+              <a:t>• Play 3: Establish AI Governance - This lesson informs Play 3 by helping learners connect the.</a:t>
             </a:r>
             <a:endParaRPr lang="en-US" sz="1900" dirty="0"/>
           </a:p>
           <a:p>
+            <a:pPr indent="0" marL="0">
+              <a:buNone/>
+            </a:pPr>
             <a:r>
               <a:rPr lang="en-US" sz="1900" dirty="0">
                 <a:solidFill>
-                  <a:srgbClr val="17364A"/>
-                </a:solidFill>
-                <a:latin typeface="Aptos" pitchFamily="34" charset="0"/>
-                <a:ea typeface="Aptos" pitchFamily="34" charset="-122"/>
-                <a:cs typeface="Aptos" pitchFamily="34" charset="-120"/>
-              </a:rPr>
-              <a:t>Play 7: Prioritize Use Cases - This lesson informs Play 7 by helping learners connect the lesson topic to.</a:t>
+                  <a:srgbClr val="003A63"/>
+                </a:solidFill>
+                <a:latin typeface="Aptos" pitchFamily="34" charset="0"/>
+                <a:ea typeface="Aptos" pitchFamily="34" charset="-122"/>
+                <a:cs typeface="Aptos" pitchFamily="34" charset="-120"/>
+              </a:rPr>
+              <a:t>• Play 7: Prioritize Use Cases - This lesson informs Play 7 by helping learners connect the.</a:t>
             </a:r>
             <a:endParaRPr lang="en-US" sz="1900" dirty="0"/>
           </a:p>
           <a:p>
+            <a:pPr indent="0" marL="0">
+              <a:buNone/>
+            </a:pPr>
             <a:r>
               <a:rPr lang="en-US" sz="1900" dirty="0">
                 <a:solidFill>
-                  <a:srgbClr val="17364A"/>
-                </a:solidFill>
-                <a:latin typeface="Aptos" pitchFamily="34" charset="0"/>
-                <a:ea typeface="Aptos" pitchFamily="34" charset="-122"/>
-                <a:cs typeface="Aptos" pitchFamily="34" charset="-120"/>
-              </a:rPr>
-              <a:t>Play 12: Execute Governance and Oversight - This lesson informs Play 12 by helping learners connect the.</a:t>
+                  <a:srgbClr val="003A63"/>
+                </a:solidFill>
+                <a:latin typeface="Aptos" pitchFamily="34" charset="0"/>
+                <a:ea typeface="Aptos" pitchFamily="34" charset="-122"/>
+                <a:cs typeface="Aptos" pitchFamily="34" charset="-120"/>
+              </a:rPr>
+              <a:t>• Play 12: Execute Governance and Oversight - This lesson informs Play 12 by helping learners.</a:t>
             </a:r>
             <a:endParaRPr lang="en-US" sz="1900" dirty="0"/>
           </a:p>
           <a:p>
+            <a:pPr indent="0" marL="0">
+              <a:buNone/>
+            </a:pPr>
             <a:r>
               <a:rPr lang="en-US" sz="1900" dirty="0">
                 <a:solidFill>
-                  <a:srgbClr val="17364A"/>
-                </a:solidFill>
-                <a:latin typeface="Aptos" pitchFamily="34" charset="0"/>
-                <a:ea typeface="Aptos" pitchFamily="34" charset="-122"/>
-                <a:cs typeface="Aptos" pitchFamily="34" charset="-120"/>
-              </a:rPr>
-              <a:t>Play 4: Engage Stakeholders - This lesson informs Play 4 by helping learners connect the lesson topic to.</a:t>
+                  <a:srgbClr val="003A63"/>
+                </a:solidFill>
+                <a:latin typeface="Aptos" pitchFamily="34" charset="0"/>
+                <a:ea typeface="Aptos" pitchFamily="34" charset="-122"/>
+                <a:cs typeface="Aptos" pitchFamily="34" charset="-120"/>
+              </a:rPr>
+              <a:t>• Play 4: Engage Stakeholders - This lesson informs Play 4 by helping learners connect the.</a:t>
             </a:r>
             <a:endParaRPr lang="en-US" sz="1900" dirty="0"/>
           </a:p>
@@ -18685,17 +19026,17 @@
         </p:nvSpPr>
         <p:spPr>
           <a:xfrm>
-            <a:off x="8211312" y="1920240"/>
-            <a:ext cx="2734056" cy="1463040"/>
-          </a:xfrm>
-          <a:prstGeom prst="rect">
-            <a:avLst/>
-          </a:prstGeom>
-          <a:noFill/>
-          <a:ln/>
-        </p:spPr>
-        <p:txBody>
-          <a:bodyPr wrap="square" lIns="0" tIns="0" rIns="0" bIns="0" rtlCol="0" anchor="t">
+            <a:off x="8211312" y="1892808"/>
+            <a:ext cx="2734056" cy="1536192"/>
+          </a:xfrm>
+          <a:prstGeom prst="rect">
+            <a:avLst/>
+          </a:prstGeom>
+          <a:noFill/>
+          <a:ln/>
+        </p:spPr>
+        <p:txBody>
+          <a:bodyPr wrap="square" lIns="254" tIns="254" rIns="254" bIns="254" rtlCol="0" anchor="t">
             <a:normAutofit/>
           </a:bodyPr>
           <a:lstStyle/>
@@ -18704,7 +19045,7 @@
               <a:buNone/>
             </a:pPr>
             <a:r>
-              <a:rPr lang="en-US" sz="1550" dirty="0">
+              <a:rPr lang="en-US" sz="1320" dirty="0">
                 <a:solidFill>
                   <a:srgbClr val="17364A"/>
                 </a:solidFill>
@@ -18712,9 +19053,9 @@
                 <a:ea typeface="Aptos" pitchFamily="34" charset="-122"/>
                 <a:cs typeface="Aptos" pitchFamily="34" charset="-120"/>
               </a:rPr>
-              <a:t>Use the related plays to identify decisions, participants, timing, approvals, and documentation needed for responsible implementation.</a:t>
-            </a:r>
-            <a:endParaRPr lang="en-US" sz="1550" dirty="0"/>
+              <a:t>Use the related plays to identify decisions, participants, timing, approvals, and documentation needed for responsible.</a:t>
+            </a:r>
+            <a:endParaRPr lang="en-US" sz="1320" dirty="0"/>
           </a:p>
         </p:txBody>
       </p:sp>
@@ -18802,13 +19143,16 @@
           <a:ln/>
         </p:spPr>
         <p:txBody>
-          <a:bodyPr wrap="square" lIns="254" tIns="254" rIns="254" bIns="254" rtlCol="0" anchor="t">
+          <a:bodyPr wrap="square" lIns="508" tIns="508" rIns="508" bIns="508" rtlCol="0" anchor="t">
             <a:normAutofit/>
           </a:bodyPr>
           <a:lstStyle/>
           <a:p>
-            <a:r>
-              <a:rPr lang="en-US" sz="1380" dirty="0">
+            <a:pPr indent="0" marL="0">
+              <a:buNone/>
+            </a:pPr>
+            <a:r>
+              <a:rPr lang="en-US" sz="1220" dirty="0">
                 <a:solidFill>
                   <a:srgbClr val="17364A"/>
                 </a:solidFill>
@@ -18818,11 +19162,14 @@
               </a:rPr>
               <a:t>Locate the decision point in the playbook sequence.</a:t>
             </a:r>
-            <a:endParaRPr lang="en-US" sz="1380" dirty="0"/>
-          </a:p>
-          <a:p>
-            <a:r>
-              <a:rPr lang="en-US" sz="1380" dirty="0">
+            <a:endParaRPr lang="en-US" sz="1220" dirty="0"/>
+          </a:p>
+          <a:p>
+            <a:pPr indent="0" marL="0">
+              <a:buNone/>
+            </a:pPr>
+            <a:r>
+              <a:rPr lang="en-US" sz="1220" dirty="0">
                 <a:solidFill>
                   <a:srgbClr val="17364A"/>
                 </a:solidFill>
@@ -18832,11 +19179,14 @@
               </a:rPr>
               <a:t>Identify who should participate in the work.</a:t>
             </a:r>
-            <a:endParaRPr lang="en-US" sz="1380" dirty="0"/>
-          </a:p>
-          <a:p>
-            <a:r>
-              <a:rPr lang="en-US" sz="1380" dirty="0">
+            <a:endParaRPr lang="en-US" sz="1220" dirty="0"/>
+          </a:p>
+          <a:p>
+            <a:pPr indent="0" marL="0">
+              <a:buNone/>
+            </a:pPr>
+            <a:r>
+              <a:rPr lang="en-US" sz="1220" dirty="0">
                 <a:solidFill>
                   <a:srgbClr val="17364A"/>
                 </a:solidFill>
@@ -18846,7 +19196,7 @@
               </a:rPr>
               <a:t>Document the review, approval, or implementation step.</a:t>
             </a:r>
-            <a:endParaRPr lang="en-US" sz="1380" dirty="0"/>
+            <a:endParaRPr lang="en-US" sz="1220" dirty="0"/>
           </a:p>
         </p:txBody>
       </p:sp>
@@ -19147,49 +19497,58 @@
           <a:ln/>
         </p:spPr>
         <p:txBody>
-          <a:bodyPr wrap="square" lIns="635" tIns="635" rIns="635" bIns="635" rtlCol="0" anchor="t">
+          <a:bodyPr wrap="square" lIns="1016" tIns="1016" rIns="1016" bIns="1016" rtlCol="0" anchor="t">
             <a:normAutofit/>
           </a:bodyPr>
           <a:lstStyle/>
           <a:p>
+            <a:pPr indent="0" marL="0">
+              <a:buNone/>
+            </a:pPr>
             <a:r>
               <a:rPr lang="en-US" sz="2100" dirty="0">
                 <a:solidFill>
-                  <a:srgbClr val="17364A"/>
-                </a:solidFill>
-                <a:latin typeface="Aptos" pitchFamily="34" charset="0"/>
-                <a:ea typeface="Aptos" pitchFamily="34" charset="-122"/>
-                <a:cs typeface="Aptos" pitchFamily="34" charset="-120"/>
-              </a:rPr>
-              <a:t>National Institute of Standards and Technology. Artificial Intelligence Risk Management Framework (AI.</a:t>
+                  <a:srgbClr val="003A63"/>
+                </a:solidFill>
+                <a:latin typeface="Aptos" pitchFamily="34" charset="0"/>
+                <a:ea typeface="Aptos" pitchFamily="34" charset="-122"/>
+                <a:cs typeface="Aptos" pitchFamily="34" charset="-120"/>
+              </a:rPr>
+              <a:t>• National Institute of Standards and Technology. Artificial Intelligence Risk Management.</a:t>
             </a:r>
             <a:endParaRPr lang="en-US" sz="2100" dirty="0"/>
           </a:p>
           <a:p>
+            <a:pPr indent="0" marL="0">
+              <a:buNone/>
+            </a:pPr>
             <a:r>
               <a:rPr lang="en-US" sz="2100" dirty="0">
                 <a:solidFill>
-                  <a:srgbClr val="17364A"/>
-                </a:solidFill>
-                <a:latin typeface="Aptos" pitchFamily="34" charset="0"/>
-                <a:ea typeface="Aptos" pitchFamily="34" charset="-122"/>
-                <a:cs typeface="Aptos" pitchFamily="34" charset="-120"/>
-              </a:rPr>
-              <a:t>National Institute of Standards and Technology. AI RMF Playbook.:.</a:t>
+                  <a:srgbClr val="003A63"/>
+                </a:solidFill>
+                <a:latin typeface="Aptos" pitchFamily="34" charset="0"/>
+                <a:ea typeface="Aptos" pitchFamily="34" charset="-122"/>
+                <a:cs typeface="Aptos" pitchFamily="34" charset="-120"/>
+              </a:rPr>
+              <a:t>• National Institute of Standards and Technology. AI RMF Playbook.:.</a:t>
             </a:r>
             <a:endParaRPr lang="en-US" sz="2100" dirty="0"/>
           </a:p>
           <a:p>
+            <a:pPr indent="0" marL="0">
+              <a:buNone/>
+            </a:pPr>
             <a:r>
               <a:rPr lang="en-US" sz="2100" dirty="0">
                 <a:solidFill>
-                  <a:srgbClr val="17364A"/>
-                </a:solidFill>
-                <a:latin typeface="Aptos" pitchFamily="34" charset="0"/>
-                <a:ea typeface="Aptos" pitchFamily="34" charset="-122"/>
-                <a:cs typeface="Aptos" pitchFamily="34" charset="-120"/>
-              </a:rPr>
-              <a:t>National Institute of Standards and Technology. Artificial Intelligence Risk Management Framework:.</a:t>
+                  <a:srgbClr val="003A63"/>
+                </a:solidFill>
+                <a:latin typeface="Aptos" pitchFamily="34" charset="0"/>
+                <a:ea typeface="Aptos" pitchFamily="34" charset="-122"/>
+                <a:cs typeface="Aptos" pitchFamily="34" charset="-120"/>
+              </a:rPr>
+              <a:t>• National Institute of Standards and Technology. Artificial Intelligence Risk Management.</a:t>
             </a:r>
             <a:endParaRPr lang="en-US" sz="2100" dirty="0"/>
           </a:p>
@@ -19269,17 +19628,17 @@
         </p:nvSpPr>
         <p:spPr>
           <a:xfrm>
-            <a:off x="7799832" y="1828800"/>
-            <a:ext cx="3145536" cy="685800"/>
-          </a:xfrm>
-          <a:prstGeom prst="rect">
-            <a:avLst/>
-          </a:prstGeom>
-          <a:noFill/>
-          <a:ln/>
-        </p:spPr>
-        <p:txBody>
-          <a:bodyPr wrap="square" lIns="0" tIns="0" rIns="0" bIns="0" rtlCol="0" anchor="t">
+            <a:off x="7799832" y="1801368"/>
+            <a:ext cx="3145536" cy="758952"/>
+          </a:xfrm>
+          <a:prstGeom prst="rect">
+            <a:avLst/>
+          </a:prstGeom>
+          <a:noFill/>
+          <a:ln/>
+        </p:spPr>
+        <p:txBody>
+          <a:bodyPr wrap="square" lIns="254" tIns="254" rIns="254" bIns="254" rtlCol="0" anchor="t">
             <a:normAutofit/>
           </a:bodyPr>
           <a:lstStyle/>
@@ -19288,7 +19647,7 @@
               <a:buNone/>
             </a:pPr>
             <a:r>
-              <a:rPr lang="en-US" sz="1550" dirty="0">
+              <a:rPr lang="en-US" sz="1320" dirty="0">
                 <a:solidFill>
                   <a:srgbClr val="17364A"/>
                 </a:solidFill>
@@ -19298,7 +19657,7 @@
               </a:rPr>
               <a:t>National Institute of Standards and Technology. Artificial Intelligence Risk Management Framework (AI.</a:t>
             </a:r>
-            <a:endParaRPr lang="en-US" sz="1550" dirty="0"/>
+            <a:endParaRPr lang="en-US" sz="1320" dirty="0"/>
           </a:p>
         </p:txBody>
       </p:sp>
@@ -19386,13 +19745,16 @@
           <a:ln/>
         </p:spPr>
         <p:txBody>
-          <a:bodyPr wrap="square" lIns="254" tIns="254" rIns="254" bIns="254" rtlCol="0" anchor="t">
+          <a:bodyPr wrap="square" lIns="508" tIns="508" rIns="508" bIns="508" rtlCol="0" anchor="t">
             <a:normAutofit/>
           </a:bodyPr>
           <a:lstStyle/>
           <a:p>
-            <a:r>
-              <a:rPr lang="en-US" sz="1380" dirty="0">
+            <a:pPr indent="0" marL="0">
+              <a:buNone/>
+            </a:pPr>
+            <a:r>
+              <a:rPr lang="en-US" sz="1220" dirty="0">
                 <a:solidFill>
                   <a:srgbClr val="17364A"/>
                 </a:solidFill>
@@ -19402,11 +19764,14 @@
               </a:rPr>
               <a:t>National Institute of Standards and Technology.</a:t>
             </a:r>
-            <a:endParaRPr lang="en-US" sz="1380" dirty="0"/>
-          </a:p>
-          <a:p>
-            <a:r>
-              <a:rPr lang="en-US" sz="1380" dirty="0">
+            <a:endParaRPr lang="en-US" sz="1220" dirty="0"/>
+          </a:p>
+          <a:p>
+            <a:pPr indent="0" marL="0">
+              <a:buNone/>
+            </a:pPr>
+            <a:r>
+              <a:rPr lang="en-US" sz="1220" dirty="0">
                 <a:solidFill>
                   <a:srgbClr val="17364A"/>
                 </a:solidFill>
@@ -19416,11 +19781,14 @@
               </a:rPr>
               <a:t>Artificial Intelligence Risk Management Framework (AI RMF 1.0).</a:t>
             </a:r>
-            <a:endParaRPr lang="en-US" sz="1380" dirty="0"/>
-          </a:p>
-          <a:p>
-            <a:r>
-              <a:rPr lang="en-US" sz="1380" dirty="0">
+            <a:endParaRPr lang="en-US" sz="1220" dirty="0"/>
+          </a:p>
+          <a:p>
+            <a:pPr indent="0" marL="0">
+              <a:buNone/>
+            </a:pPr>
+            <a:r>
+              <a:rPr lang="en-US" sz="1220" dirty="0">
                 <a:solidFill>
                   <a:srgbClr val="17364A"/>
                 </a:solidFill>
@@ -19430,7 +19798,7 @@
               </a:rPr>
               <a:t>2023.: https://www.nist.gov/itl/ai-risk-management-framework</a:t>
             </a:r>
-            <a:endParaRPr lang="en-US" sz="1380" dirty="0"/>
+            <a:endParaRPr lang="en-US" sz="1220" dirty="0"/>
           </a:p>
         </p:txBody>
       </p:sp>
@@ -19508,17 +19876,17 @@
         </p:nvSpPr>
         <p:spPr>
           <a:xfrm>
-            <a:off x="7799832" y="5001768"/>
-            <a:ext cx="3145536" cy="502920"/>
-          </a:xfrm>
-          <a:prstGeom prst="rect">
-            <a:avLst/>
-          </a:prstGeom>
-          <a:noFill/>
-          <a:ln/>
-        </p:spPr>
-        <p:txBody>
-          <a:bodyPr wrap="square" lIns="0" tIns="0" rIns="0" bIns="0" rtlCol="0" anchor="t">
+            <a:off x="7799832" y="4974336"/>
+            <a:ext cx="3145536" cy="576072"/>
+          </a:xfrm>
+          <a:prstGeom prst="rect">
+            <a:avLst/>
+          </a:prstGeom>
+          <a:noFill/>
+          <a:ln/>
+        </p:spPr>
+        <p:txBody>
+          <a:bodyPr wrap="square" lIns="254" tIns="254" rIns="254" bIns="254" rtlCol="0" anchor="t">
             <a:normAutofit/>
           </a:bodyPr>
           <a:lstStyle/>
@@ -19527,7 +19895,7 @@
               <a:buNone/>
             </a:pPr>
             <a:r>
-              <a:rPr lang="en-US" sz="1550" dirty="0">
+              <a:rPr lang="en-US" sz="1320" dirty="0">
                 <a:solidFill>
                   <a:srgbClr val="17364A"/>
                 </a:solidFill>
@@ -19535,9 +19903,9 @@
                 <a:ea typeface="Aptos" pitchFamily="34" charset="-122"/>
                 <a:cs typeface="Aptos" pitchFamily="34" charset="-120"/>
               </a:rPr>
-              <a:t>Translate this concept into clear decision rights, review steps, documentation expectations, and escalation paths before an AI-supported workflow is approved.</a:t>
-            </a:r>
-            <a:endParaRPr lang="en-US" sz="1550" dirty="0"/>
+              <a:t>Translate this concept into clear decision rights, review steps, documentation expectations, and escalation paths before.</a:t>
+            </a:r>
+            <a:endParaRPr lang="en-US" sz="1320" dirty="0"/>
           </a:p>
         </p:txBody>
       </p:sp>
@@ -19838,21 +20206,24 @@
           <a:ln/>
         </p:spPr>
         <p:txBody>
-          <a:bodyPr wrap="square" lIns="635" tIns="635" rIns="635" bIns="635" rtlCol="0" anchor="t">
+          <a:bodyPr wrap="square" lIns="1016" tIns="1016" rIns="1016" bIns="1016" rtlCol="0" anchor="t">
             <a:normAutofit/>
           </a:bodyPr>
           <a:lstStyle/>
           <a:p>
+            <a:pPr indent="0" marL="0">
+              <a:buNone/>
+            </a:pPr>
             <a:r>
               <a:rPr lang="en-US" sz="2100" dirty="0">
                 <a:solidFill>
-                  <a:srgbClr val="17364A"/>
-                </a:solidFill>
-                <a:latin typeface="Aptos" pitchFamily="34" charset="0"/>
-                <a:ea typeface="Aptos" pitchFamily="34" charset="-122"/>
-                <a:cs typeface="Aptos" pitchFamily="34" charset="-120"/>
-              </a:rPr>
-              <a:t>World Health Organization. Regulatory considerations on artificial intelligence for health. 2023.:.</a:t>
+                  <a:srgbClr val="003A63"/>
+                </a:solidFill>
+                <a:latin typeface="Aptos" pitchFamily="34" charset="0"/>
+                <a:ea typeface="Aptos" pitchFamily="34" charset="-122"/>
+                <a:cs typeface="Aptos" pitchFamily="34" charset="-120"/>
+              </a:rPr>
+              <a:t>• World Health Organization. Regulatory considerations on artificial intelligence for health..</a:t>
             </a:r>
             <a:endParaRPr lang="en-US" sz="2100" dirty="0"/>
           </a:p>
@@ -19932,17 +20303,17 @@
         </p:nvSpPr>
         <p:spPr>
           <a:xfrm>
-            <a:off x="7799832" y="1828800"/>
-            <a:ext cx="3145536" cy="685800"/>
-          </a:xfrm>
-          <a:prstGeom prst="rect">
-            <a:avLst/>
-          </a:prstGeom>
-          <a:noFill/>
-          <a:ln/>
-        </p:spPr>
-        <p:txBody>
-          <a:bodyPr wrap="square" lIns="0" tIns="0" rIns="0" bIns="0" rtlCol="0" anchor="t">
+            <a:off x="7799832" y="1801368"/>
+            <a:ext cx="3145536" cy="758952"/>
+          </a:xfrm>
+          <a:prstGeom prst="rect">
+            <a:avLst/>
+          </a:prstGeom>
+          <a:noFill/>
+          <a:ln/>
+        </p:spPr>
+        <p:txBody>
+          <a:bodyPr wrap="square" lIns="254" tIns="254" rIns="254" bIns="254" rtlCol="0" anchor="t">
             <a:normAutofit/>
           </a:bodyPr>
           <a:lstStyle/>
@@ -19951,7 +20322,7 @@
               <a:buNone/>
             </a:pPr>
             <a:r>
-              <a:rPr lang="en-US" sz="1550" dirty="0">
+              <a:rPr lang="en-US" sz="1320" dirty="0">
                 <a:solidFill>
                   <a:srgbClr val="17364A"/>
                 </a:solidFill>
@@ -19961,7 +20332,7 @@
               </a:rPr>
               <a:t>World Health Organization. Regulatory considerations on artificial intelligence for health. 2023.:.</a:t>
             </a:r>
-            <a:endParaRPr lang="en-US" sz="1550" dirty="0"/>
+            <a:endParaRPr lang="en-US" sz="1320" dirty="0"/>
           </a:p>
         </p:txBody>
       </p:sp>
@@ -20049,13 +20420,16 @@
           <a:ln/>
         </p:spPr>
         <p:txBody>
-          <a:bodyPr wrap="square" lIns="254" tIns="254" rIns="254" bIns="254" rtlCol="0" anchor="t">
+          <a:bodyPr wrap="square" lIns="508" tIns="508" rIns="508" bIns="508" rtlCol="0" anchor="t">
             <a:normAutofit/>
           </a:bodyPr>
           <a:lstStyle/>
           <a:p>
-            <a:r>
-              <a:rPr lang="en-US" sz="1380" dirty="0">
+            <a:pPr indent="0" marL="0">
+              <a:buNone/>
+            </a:pPr>
+            <a:r>
+              <a:rPr lang="en-US" sz="1220" dirty="0">
                 <a:solidFill>
                   <a:srgbClr val="17364A"/>
                 </a:solidFill>
@@ -20065,11 +20439,14 @@
               </a:rPr>
               <a:t>World Health Organization.</a:t>
             </a:r>
-            <a:endParaRPr lang="en-US" sz="1380" dirty="0"/>
-          </a:p>
-          <a:p>
-            <a:r>
-              <a:rPr lang="en-US" sz="1380" dirty="0">
+            <a:endParaRPr lang="en-US" sz="1220" dirty="0"/>
+          </a:p>
+          <a:p>
+            <a:pPr indent="0" marL="0">
+              <a:buNone/>
+            </a:pPr>
+            <a:r>
+              <a:rPr lang="en-US" sz="1220" dirty="0">
                 <a:solidFill>
                   <a:srgbClr val="17364A"/>
                 </a:solidFill>
@@ -20079,11 +20456,14 @@
               </a:rPr>
               <a:t>Regulatory considerations on artificial intelligence for health.</a:t>
             </a:r>
-            <a:endParaRPr lang="en-US" sz="1380" dirty="0"/>
-          </a:p>
-          <a:p>
-            <a:r>
-              <a:rPr lang="en-US" sz="1380" dirty="0">
+            <a:endParaRPr lang="en-US" sz="1220" dirty="0"/>
+          </a:p>
+          <a:p>
+            <a:pPr indent="0" marL="0">
+              <a:buNone/>
+            </a:pPr>
+            <a:r>
+              <a:rPr lang="en-US" sz="1220" dirty="0">
                 <a:solidFill>
                   <a:srgbClr val="17364A"/>
                 </a:solidFill>
@@ -20093,7 +20473,7 @@
               </a:rPr>
               <a:t>2023.: https://www.who.int/publications/i/item/9789240078871</a:t>
             </a:r>
-            <a:endParaRPr lang="en-US" sz="1380" dirty="0"/>
+            <a:endParaRPr lang="en-US" sz="1220" dirty="0"/>
           </a:p>
         </p:txBody>
       </p:sp>
@@ -20171,17 +20551,17 @@
         </p:nvSpPr>
         <p:spPr>
           <a:xfrm>
-            <a:off x="7799832" y="5001768"/>
-            <a:ext cx="3145536" cy="502920"/>
-          </a:xfrm>
-          <a:prstGeom prst="rect">
-            <a:avLst/>
-          </a:prstGeom>
-          <a:noFill/>
-          <a:ln/>
-        </p:spPr>
-        <p:txBody>
-          <a:bodyPr wrap="square" lIns="0" tIns="0" rIns="0" bIns="0" rtlCol="0" anchor="t">
+            <a:off x="7799832" y="4974336"/>
+            <a:ext cx="3145536" cy="576072"/>
+          </a:xfrm>
+          <a:prstGeom prst="rect">
+            <a:avLst/>
+          </a:prstGeom>
+          <a:noFill/>
+          <a:ln/>
+        </p:spPr>
+        <p:txBody>
+          <a:bodyPr wrap="square" lIns="254" tIns="254" rIns="254" bIns="254" rtlCol="0" anchor="t">
             <a:normAutofit/>
           </a:bodyPr>
           <a:lstStyle/>
@@ -20190,7 +20570,7 @@
               <a:buNone/>
             </a:pPr>
             <a:r>
-              <a:rPr lang="en-US" sz="1550" dirty="0">
+              <a:rPr lang="en-US" sz="1320" dirty="0">
                 <a:solidFill>
                   <a:srgbClr val="17364A"/>
                 </a:solidFill>
@@ -20198,9 +20578,9 @@
                 <a:ea typeface="Aptos" pitchFamily="34" charset="-122"/>
                 <a:cs typeface="Aptos" pitchFamily="34" charset="-120"/>
               </a:rPr>
-              <a:t>Translate this concept into clear decision rights, review steps, documentation expectations, and escalation paths before an AI-supported workflow is approved.</a:t>
-            </a:r>
-            <a:endParaRPr lang="en-US" sz="1550" dirty="0"/>
+              <a:t>Translate this concept into clear decision rights, review steps, documentation expectations, and escalation paths before.</a:t>
+            </a:r>
+            <a:endParaRPr lang="en-US" sz="1320" dirty="0"/>
           </a:p>
         </p:txBody>
       </p:sp>
@@ -20501,63 +20881,75 @@
           <a:ln/>
         </p:spPr>
         <p:txBody>
-          <a:bodyPr wrap="square" lIns="635" tIns="635" rIns="635" bIns="635" rtlCol="0" anchor="t">
+          <a:bodyPr wrap="square" lIns="1016" tIns="1016" rIns="1016" bIns="1016" rtlCol="0" anchor="t">
             <a:normAutofit/>
           </a:bodyPr>
           <a:lstStyle/>
           <a:p>
+            <a:pPr indent="0" marL="0">
+              <a:buNone/>
+            </a:pPr>
             <a:r>
               <a:rPr lang="en-US" sz="1850" dirty="0">
                 <a:solidFill>
-                  <a:srgbClr val="17364A"/>
-                </a:solidFill>
-                <a:latin typeface="Aptos" pitchFamily="34" charset="0"/>
-                <a:ea typeface="Aptos" pitchFamily="34" charset="-122"/>
-                <a:cs typeface="Aptos" pitchFamily="34" charset="-120"/>
-              </a:rPr>
-              <a:t>Tool 2: Responsible AI Policy Template (Template) - Use this tool to complete or strengthen the practical.</a:t>
+                  <a:srgbClr val="003A63"/>
+                </a:solidFill>
+                <a:latin typeface="Aptos" pitchFamily="34" charset="0"/>
+                <a:ea typeface="Aptos" pitchFamily="34" charset="-122"/>
+                <a:cs typeface="Aptos" pitchFamily="34" charset="-120"/>
+              </a:rPr>
+              <a:t>• Tool 2: Responsible AI Policy Template (Template) - Use this tool to complete or strengthen.</a:t>
             </a:r>
             <a:endParaRPr lang="en-US" sz="1850" dirty="0"/>
           </a:p>
           <a:p>
+            <a:pPr indent="0" marL="0">
+              <a:buNone/>
+            </a:pPr>
             <a:r>
               <a:rPr lang="en-US" sz="1850" dirty="0">
                 <a:solidFill>
-                  <a:srgbClr val="17364A"/>
-                </a:solidFill>
-                <a:latin typeface="Aptos" pitchFamily="34" charset="0"/>
-                <a:ea typeface="Aptos" pitchFamily="34" charset="-122"/>
-                <a:cs typeface="Aptos" pitchFamily="34" charset="-120"/>
-              </a:rPr>
-              <a:t>Tool 11: AI Advisory Committee Charter (Template) - Use this tool to complete or strengthen the practical.</a:t>
+                  <a:srgbClr val="003A63"/>
+                </a:solidFill>
+                <a:latin typeface="Aptos" pitchFamily="34" charset="0"/>
+                <a:ea typeface="Aptos" pitchFamily="34" charset="-122"/>
+                <a:cs typeface="Aptos" pitchFamily="34" charset="-120"/>
+              </a:rPr>
+              <a:t>• Tool 11: AI Advisory Committee Charter (Template) - Use this tool to complete or strengthen.</a:t>
             </a:r>
             <a:endParaRPr lang="en-US" sz="1850" dirty="0"/>
           </a:p>
           <a:p>
+            <a:pPr indent="0" marL="0">
+              <a:buNone/>
+            </a:pPr>
             <a:r>
               <a:rPr lang="en-US" sz="1850" dirty="0">
                 <a:solidFill>
-                  <a:srgbClr val="17364A"/>
-                </a:solidFill>
-                <a:latin typeface="Aptos" pitchFamily="34" charset="0"/>
-                <a:ea typeface="Aptos" pitchFamily="34" charset="-122"/>
-                <a:cs typeface="Aptos" pitchFamily="34" charset="-120"/>
-              </a:rPr>
-              <a:t>Tool 12: AI Governance Board Charter (Template) - Use this tool to complete or strengthen the practical.</a:t>
+                  <a:srgbClr val="003A63"/>
+                </a:solidFill>
+                <a:latin typeface="Aptos" pitchFamily="34" charset="0"/>
+                <a:ea typeface="Aptos" pitchFamily="34" charset="-122"/>
+                <a:cs typeface="Aptos" pitchFamily="34" charset="-120"/>
+              </a:rPr>
+              <a:t>• Tool 12: AI Governance Board Charter (Template) - Use this tool to complete or strengthen the.</a:t>
             </a:r>
             <a:endParaRPr lang="en-US" sz="1850" dirty="0"/>
           </a:p>
           <a:p>
+            <a:pPr indent="0" marL="0">
+              <a:buNone/>
+            </a:pPr>
             <a:r>
               <a:rPr lang="en-US" sz="1850" dirty="0">
                 <a:solidFill>
-                  <a:srgbClr val="17364A"/>
-                </a:solidFill>
-                <a:latin typeface="Aptos" pitchFamily="34" charset="0"/>
-                <a:ea typeface="Aptos" pitchFamily="34" charset="-122"/>
-                <a:cs typeface="Aptos" pitchFamily="34" charset="-120"/>
-              </a:rPr>
-              <a:t>Tool 13: AI Use Case Intake, Risk Review, and System Inventory Template (Template) - Use this tool to.</a:t>
+                  <a:srgbClr val="003A63"/>
+                </a:solidFill>
+                <a:latin typeface="Aptos" pitchFamily="34" charset="0"/>
+                <a:ea typeface="Aptos" pitchFamily="34" charset="-122"/>
+                <a:cs typeface="Aptos" pitchFamily="34" charset="-120"/>
+              </a:rPr>
+              <a:t>• Tool 13: AI Use Case Intake, Risk Review, and System Inventory Template (Template) - Use this.</a:t>
             </a:r>
             <a:endParaRPr lang="en-US" sz="1850" dirty="0"/>
           </a:p>
@@ -20637,17 +21029,17 @@
         </p:nvSpPr>
         <p:spPr>
           <a:xfrm>
-            <a:off x="8211312" y="1920240"/>
-            <a:ext cx="2734056" cy="1463040"/>
-          </a:xfrm>
-          <a:prstGeom prst="rect">
-            <a:avLst/>
-          </a:prstGeom>
-          <a:noFill/>
-          <a:ln/>
-        </p:spPr>
-        <p:txBody>
-          <a:bodyPr wrap="square" lIns="0" tIns="0" rIns="0" bIns="0" rtlCol="0" anchor="t">
+            <a:off x="8211312" y="1892808"/>
+            <a:ext cx="2734056" cy="1536192"/>
+          </a:xfrm>
+          <a:prstGeom prst="rect">
+            <a:avLst/>
+          </a:prstGeom>
+          <a:noFill/>
+          <a:ln/>
+        </p:spPr>
+        <p:txBody>
+          <a:bodyPr wrap="square" lIns="254" tIns="254" rIns="254" bIns="254" rtlCol="0" anchor="t">
             <a:normAutofit/>
           </a:bodyPr>
           <a:lstStyle/>
@@ -20656,7 +21048,7 @@
               <a:buNone/>
             </a:pPr>
             <a:r>
-              <a:rPr lang="en-US" sz="1550" dirty="0">
+              <a:rPr lang="en-US" sz="1320" dirty="0">
                 <a:solidFill>
                   <a:srgbClr val="17364A"/>
                 </a:solidFill>
@@ -20664,9 +21056,9 @@
                 <a:ea typeface="Aptos" pitchFamily="34" charset="-122"/>
                 <a:cs typeface="Aptos" pitchFamily="34" charset="-120"/>
               </a:rPr>
-              <a:t>Use linked tools when your department needs a structured worksheet, template, checklist, review process, or documentation artifact.</a:t>
-            </a:r>
-            <a:endParaRPr lang="en-US" sz="1550" dirty="0"/>
+              <a:t>Use linked tools when your department needs a structured worksheet, template, checklist, review process, or.</a:t>
+            </a:r>
+            <a:endParaRPr lang="en-US" sz="1320" dirty="0"/>
           </a:p>
         </p:txBody>
       </p:sp>
@@ -20754,13 +21146,16 @@
           <a:ln/>
         </p:spPr>
         <p:txBody>
-          <a:bodyPr wrap="square" lIns="254" tIns="254" rIns="254" bIns="254" rtlCol="0" anchor="t">
+          <a:bodyPr wrap="square" lIns="508" tIns="508" rIns="508" bIns="508" rtlCol="0" anchor="t">
             <a:normAutofit/>
           </a:bodyPr>
           <a:lstStyle/>
           <a:p>
-            <a:r>
-              <a:rPr lang="en-US" sz="1380" dirty="0">
+            <a:pPr indent="0" marL="0">
+              <a:buNone/>
+            </a:pPr>
+            <a:r>
+              <a:rPr lang="en-US" sz="1220" dirty="0">
                 <a:solidFill>
                   <a:srgbClr val="17364A"/>
                 </a:solidFill>
@@ -20770,11 +21165,14 @@
               </a:rPr>
               <a:t>Use a tool when no comparable local process exists.</a:t>
             </a:r>
-            <a:endParaRPr lang="en-US" sz="1380" dirty="0"/>
-          </a:p>
-          <a:p>
-            <a:r>
-              <a:rPr lang="en-US" sz="1380" dirty="0">
+            <a:endParaRPr lang="en-US" sz="1220" dirty="0"/>
+          </a:p>
+          <a:p>
+            <a:pPr indent="0" marL="0">
+              <a:buNone/>
+            </a:pPr>
+            <a:r>
+              <a:rPr lang="en-US" sz="1220" dirty="0">
                 <a:solidFill>
                   <a:srgbClr val="17364A"/>
                 </a:solidFill>
@@ -20782,13 +21180,16 @@
                 <a:ea typeface="Aptos" pitchFamily="34" charset="-122"/>
                 <a:cs typeface="Aptos" pitchFamily="34" charset="-120"/>
               </a:rPr>
-              <a:t>Adapt existing department templates when they already fit the purpose.</a:t>
-            </a:r>
-            <a:endParaRPr lang="en-US" sz="1380" dirty="0"/>
-          </a:p>
-          <a:p>
-            <a:r>
-              <a:rPr lang="en-US" sz="1380" dirty="0">
+              <a:t>Adapt existing department templates when they already fit the.</a:t>
+            </a:r>
+            <a:endParaRPr lang="en-US" sz="1220" dirty="0"/>
+          </a:p>
+          <a:p>
+            <a:pPr indent="0" marL="0">
+              <a:buNone/>
+            </a:pPr>
+            <a:r>
+              <a:rPr lang="en-US" sz="1220" dirty="0">
                 <a:solidFill>
                   <a:srgbClr val="17364A"/>
                 </a:solidFill>
@@ -20798,7 +21199,7 @@
               </a:rPr>
               <a:t>Save the completed artifact as evidence of the decision.</a:t>
             </a:r>
-            <a:endParaRPr lang="en-US" sz="1380" dirty="0"/>
+            <a:endParaRPr lang="en-US" sz="1220" dirty="0"/>
           </a:p>
         </p:txBody>
       </p:sp>
@@ -21099,49 +21500,58 @@
           <a:ln/>
         </p:spPr>
         <p:txBody>
-          <a:bodyPr wrap="square" lIns="635" tIns="635" rIns="635" bIns="635" rtlCol="0" anchor="t">
+          <a:bodyPr wrap="square" lIns="1016" tIns="1016" rIns="1016" bIns="1016" rtlCol="0" anchor="t">
             <a:normAutofit/>
           </a:bodyPr>
           <a:lstStyle/>
           <a:p>
+            <a:pPr indent="0" marL="0">
+              <a:buNone/>
+            </a:pPr>
             <a:r>
               <a:rPr lang="en-US" sz="2100" dirty="0">
                 <a:solidFill>
-                  <a:srgbClr val="17364A"/>
-                </a:solidFill>
-                <a:latin typeface="Aptos" pitchFamily="34" charset="0"/>
-                <a:ea typeface="Aptos" pitchFamily="34" charset="-122"/>
-                <a:cs typeface="Aptos" pitchFamily="34" charset="-120"/>
-              </a:rPr>
-              <a:t>Define AI governance in plain language and explain why it matters for public health practice.</a:t>
+                  <a:srgbClr val="003A63"/>
+                </a:solidFill>
+                <a:latin typeface="Aptos" pitchFamily="34" charset="0"/>
+                <a:ea typeface="Aptos" pitchFamily="34" charset="-122"/>
+                <a:cs typeface="Aptos" pitchFamily="34" charset="-120"/>
+              </a:rPr>
+              <a:t>• Define AI governance in plain language and explain why it matters for public health practice.</a:t>
             </a:r>
             <a:endParaRPr lang="en-US" sz="2100" dirty="0"/>
           </a:p>
           <a:p>
+            <a:pPr indent="0" marL="0">
+              <a:buNone/>
+            </a:pPr>
             <a:r>
               <a:rPr lang="en-US" sz="2100" dirty="0">
                 <a:solidFill>
-                  <a:srgbClr val="17364A"/>
-                </a:solidFill>
-                <a:latin typeface="Aptos" pitchFamily="34" charset="0"/>
-                <a:ea typeface="Aptos" pitchFamily="34" charset="-122"/>
-                <a:cs typeface="Aptos" pitchFamily="34" charset="-120"/>
-              </a:rPr>
-              <a:t>Distinguish AI governance from AI policy, IT security review, project management, and individual tool.</a:t>
+                  <a:srgbClr val="003A63"/>
+                </a:solidFill>
+                <a:latin typeface="Aptos" pitchFamily="34" charset="0"/>
+                <a:ea typeface="Aptos" pitchFamily="34" charset="-122"/>
+                <a:cs typeface="Aptos" pitchFamily="34" charset="-120"/>
+              </a:rPr>
+              <a:t>• Distinguish AI governance from AI policy, IT security review, project management, and.</a:t>
             </a:r>
             <a:endParaRPr lang="en-US" sz="2100" dirty="0"/>
           </a:p>
           <a:p>
+            <a:pPr indent="0" marL="0">
+              <a:buNone/>
+            </a:pPr>
             <a:r>
               <a:rPr lang="en-US" sz="2100" dirty="0">
                 <a:solidFill>
-                  <a:srgbClr val="17364A"/>
-                </a:solidFill>
-                <a:latin typeface="Aptos" pitchFamily="34" charset="0"/>
-                <a:ea typeface="Aptos" pitchFamily="34" charset="-122"/>
-                <a:cs typeface="Aptos" pitchFamily="34" charset="-120"/>
-              </a:rPr>
-              <a:t>Identify common AI governance roles, including program owner, data steward, privacy lead, security.</a:t>
+                  <a:srgbClr val="003A63"/>
+                </a:solidFill>
+                <a:latin typeface="Aptos" pitchFamily="34" charset="0"/>
+                <a:ea typeface="Aptos" pitchFamily="34" charset="-122"/>
+                <a:cs typeface="Aptos" pitchFamily="34" charset="-120"/>
+              </a:rPr>
+              <a:t>• Identify common AI governance roles, including program owner, data steward, privacy lead,.</a:t>
             </a:r>
             <a:endParaRPr lang="en-US" sz="2100" dirty="0"/>
           </a:p>
@@ -21221,17 +21631,17 @@
         </p:nvSpPr>
         <p:spPr>
           <a:xfrm>
-            <a:off x="7799832" y="1828800"/>
-            <a:ext cx="3145536" cy="685800"/>
-          </a:xfrm>
-          <a:prstGeom prst="rect">
-            <a:avLst/>
-          </a:prstGeom>
-          <a:noFill/>
-          <a:ln/>
-        </p:spPr>
-        <p:txBody>
-          <a:bodyPr wrap="square" lIns="0" tIns="0" rIns="0" bIns="0" rtlCol="0" anchor="t">
+            <a:off x="7799832" y="1801368"/>
+            <a:ext cx="3145536" cy="758952"/>
+          </a:xfrm>
+          <a:prstGeom prst="rect">
+            <a:avLst/>
+          </a:prstGeom>
+          <a:noFill/>
+          <a:ln/>
+        </p:spPr>
+        <p:txBody>
+          <a:bodyPr wrap="square" lIns="254" tIns="254" rIns="254" bIns="254" rtlCol="0" anchor="t">
             <a:normAutofit/>
           </a:bodyPr>
           <a:lstStyle/>
@@ -21240,7 +21650,7 @@
               <a:buNone/>
             </a:pPr>
             <a:r>
-              <a:rPr lang="en-US" sz="1550" dirty="0">
+              <a:rPr lang="en-US" sz="1320" dirty="0">
                 <a:solidFill>
                   <a:srgbClr val="17364A"/>
                 </a:solidFill>
@@ -21250,7 +21660,7 @@
               </a:rPr>
               <a:t>Define AI governance in plain language and explain why it matters for public health practice.</a:t>
             </a:r>
-            <a:endParaRPr lang="en-US" sz="1550" dirty="0"/>
+            <a:endParaRPr lang="en-US" sz="1320" dirty="0"/>
           </a:p>
         </p:txBody>
       </p:sp>
@@ -21338,13 +21748,16 @@
           <a:ln/>
         </p:spPr>
         <p:txBody>
-          <a:bodyPr wrap="square" lIns="254" tIns="254" rIns="254" bIns="254" rtlCol="0" anchor="t">
+          <a:bodyPr wrap="square" lIns="508" tIns="508" rIns="508" bIns="508" rtlCol="0" anchor="t">
             <a:normAutofit/>
           </a:bodyPr>
           <a:lstStyle/>
           <a:p>
-            <a:r>
-              <a:rPr lang="en-US" sz="1380" dirty="0">
+            <a:pPr indent="0" marL="0">
+              <a:buNone/>
+            </a:pPr>
+            <a:r>
+              <a:rPr lang="en-US" sz="1220" dirty="0">
                 <a:solidFill>
                   <a:srgbClr val="17364A"/>
                 </a:solidFill>
@@ -21352,13 +21765,16 @@
                 <a:ea typeface="Aptos" pitchFamily="34" charset="-122"/>
                 <a:cs typeface="Aptos" pitchFamily="34" charset="-120"/>
               </a:rPr>
-              <a:t>Distinguish AI governance from AI policy, IT security review, project management, and.</a:t>
-            </a:r>
-            <a:endParaRPr lang="en-US" sz="1380" dirty="0"/>
-          </a:p>
-          <a:p>
-            <a:r>
-              <a:rPr lang="en-US" sz="1380" dirty="0">
+              <a:t>Distinguish AI governance from AI policy, IT security review,.</a:t>
+            </a:r>
+            <a:endParaRPr lang="en-US" sz="1220" dirty="0"/>
+          </a:p>
+          <a:p>
+            <a:pPr indent="0" marL="0">
+              <a:buNone/>
+            </a:pPr>
+            <a:r>
+              <a:rPr lang="en-US" sz="1220" dirty="0">
                 <a:solidFill>
                   <a:srgbClr val="17364A"/>
                 </a:solidFill>
@@ -21366,13 +21782,16 @@
                 <a:ea typeface="Aptos" pitchFamily="34" charset="-122"/>
                 <a:cs typeface="Aptos" pitchFamily="34" charset="-120"/>
               </a:rPr>
-              <a:t>Identify common AI governance roles, including program owner, data steward, privacy lead,.</a:t>
-            </a:r>
-            <a:endParaRPr lang="en-US" sz="1380" dirty="0"/>
-          </a:p>
-          <a:p>
-            <a:r>
-              <a:rPr lang="en-US" sz="1380" dirty="0">
+              <a:t>Identify common AI governance roles, including program owner, data.</a:t>
+            </a:r>
+            <a:endParaRPr lang="en-US" sz="1220" dirty="0"/>
+          </a:p>
+          <a:p>
+            <a:pPr indent="0" marL="0">
+              <a:buNone/>
+            </a:pPr>
+            <a:r>
+              <a:rPr lang="en-US" sz="1220" dirty="0">
                 <a:solidFill>
                   <a:srgbClr val="17364A"/>
                 </a:solidFill>
@@ -21380,9 +21799,9 @@
                 <a:ea typeface="Aptos" pitchFamily="34" charset="-122"/>
                 <a:cs typeface="Aptos" pitchFamily="34" charset="-120"/>
               </a:rPr>
-              <a:t>Recognize which AI uses should be escalated for formal review because they involve.</a:t>
-            </a:r>
-            <a:endParaRPr lang="en-US" sz="1380" dirty="0"/>
+              <a:t>Recognize which AI uses should be escalated for formal review.</a:t>
+            </a:r>
+            <a:endParaRPr lang="en-US" sz="1220" dirty="0"/>
           </a:p>
         </p:txBody>
       </p:sp>
@@ -21460,17 +21879,17 @@
         </p:nvSpPr>
         <p:spPr>
           <a:xfrm>
-            <a:off x="7799832" y="5001768"/>
-            <a:ext cx="3145536" cy="502920"/>
-          </a:xfrm>
-          <a:prstGeom prst="rect">
-            <a:avLst/>
-          </a:prstGeom>
-          <a:noFill/>
-          <a:ln/>
-        </p:spPr>
-        <p:txBody>
-          <a:bodyPr wrap="square" lIns="0" tIns="0" rIns="0" bIns="0" rtlCol="0" anchor="t">
+            <a:off x="7799832" y="4974336"/>
+            <a:ext cx="3145536" cy="576072"/>
+          </a:xfrm>
+          <a:prstGeom prst="rect">
+            <a:avLst/>
+          </a:prstGeom>
+          <a:noFill/>
+          <a:ln/>
+        </p:spPr>
+        <p:txBody>
+          <a:bodyPr wrap="square" lIns="254" tIns="254" rIns="254" bIns="254" rtlCol="0" anchor="t">
             <a:normAutofit/>
           </a:bodyPr>
           <a:lstStyle/>
@@ -21479,7 +21898,7 @@
               <a:buNone/>
             </a:pPr>
             <a:r>
-              <a:rPr lang="en-US" sz="1550" dirty="0">
+              <a:rPr lang="en-US" sz="1320" dirty="0">
                 <a:solidFill>
                   <a:srgbClr val="17364A"/>
                 </a:solidFill>
@@ -21487,9 +21906,9 @@
                 <a:ea typeface="Aptos" pitchFamily="34" charset="-122"/>
                 <a:cs typeface="Aptos" pitchFamily="34" charset="-120"/>
               </a:rPr>
-              <a:t>Use the assignment to test whether you can explain the concept, apply it to a realistic public health situation, and identify what would need review before the work moves forward.</a:t>
-            </a:r>
-            <a:endParaRPr lang="en-US" sz="1550" dirty="0"/>
+              <a:t>Use the assignment to test whether you can explain the concept, apply it to a realistic public health situation, and.</a:t>
+            </a:r>
+            <a:endParaRPr lang="en-US" sz="1320" dirty="0"/>
           </a:p>
         </p:txBody>
       </p:sp>
@@ -21790,21 +22209,24 @@
           <a:ln/>
         </p:spPr>
         <p:txBody>
-          <a:bodyPr wrap="square" lIns="635" tIns="635" rIns="635" bIns="635" rtlCol="0" anchor="t">
+          <a:bodyPr wrap="square" lIns="1016" tIns="1016" rIns="1016" bIns="1016" rtlCol="0" anchor="t">
             <a:normAutofit/>
           </a:bodyPr>
           <a:lstStyle/>
           <a:p>
+            <a:pPr indent="0" marL="0">
+              <a:buNone/>
+            </a:pPr>
             <a:r>
               <a:rPr lang="en-US" sz="2100" dirty="0">
                 <a:solidFill>
-                  <a:srgbClr val="17364A"/>
-                </a:solidFill>
-                <a:latin typeface="Aptos" pitchFamily="34" charset="0"/>
-                <a:ea typeface="Aptos" pitchFamily="34" charset="-122"/>
-                <a:cs typeface="Aptos" pitchFamily="34" charset="-120"/>
-              </a:rPr>
-              <a:t>Produce an introductory AI governance intake and escalation note for one real or realistic public.</a:t>
+                  <a:srgbClr val="003A63"/>
+                </a:solidFill>
+                <a:latin typeface="Aptos" pitchFamily="34" charset="0"/>
+                <a:ea typeface="Aptos" pitchFamily="34" charset="-122"/>
+                <a:cs typeface="Aptos" pitchFamily="34" charset="-120"/>
+              </a:rPr>
+              <a:t>• Produce an introductory AI governance intake and escalation note for one real or realistic.</a:t>
             </a:r>
             <a:endParaRPr lang="en-US" sz="2100" dirty="0"/>
           </a:p>
@@ -21884,17 +22306,17 @@
         </p:nvSpPr>
         <p:spPr>
           <a:xfrm>
-            <a:off x="7799832" y="1828800"/>
-            <a:ext cx="3145536" cy="685800"/>
-          </a:xfrm>
-          <a:prstGeom prst="rect">
-            <a:avLst/>
-          </a:prstGeom>
-          <a:noFill/>
-          <a:ln/>
-        </p:spPr>
-        <p:txBody>
-          <a:bodyPr wrap="square" lIns="0" tIns="0" rIns="0" bIns="0" rtlCol="0" anchor="t">
+            <a:off x="7799832" y="1801368"/>
+            <a:ext cx="3145536" cy="758952"/>
+          </a:xfrm>
+          <a:prstGeom prst="rect">
+            <a:avLst/>
+          </a:prstGeom>
+          <a:noFill/>
+          <a:ln/>
+        </p:spPr>
+        <p:txBody>
+          <a:bodyPr wrap="square" lIns="254" tIns="254" rIns="254" bIns="254" rtlCol="0" anchor="t">
             <a:normAutofit/>
           </a:bodyPr>
           <a:lstStyle/>
@@ -21903,7 +22325,7 @@
               <a:buNone/>
             </a:pPr>
             <a:r>
-              <a:rPr lang="en-US" sz="1550" dirty="0">
+              <a:rPr lang="en-US" sz="1320" dirty="0">
                 <a:solidFill>
                   <a:srgbClr val="17364A"/>
                 </a:solidFill>
@@ -21913,7 +22335,7 @@
               </a:rPr>
               <a:t>Produce an introductory AI governance intake and escalation note for one real or realistic public.</a:t>
             </a:r>
-            <a:endParaRPr lang="en-US" sz="1550" dirty="0"/>
+            <a:endParaRPr lang="en-US" sz="1320" dirty="0"/>
           </a:p>
         </p:txBody>
       </p:sp>
@@ -22001,13 +22423,16 @@
           <a:ln/>
         </p:spPr>
         <p:txBody>
-          <a:bodyPr wrap="square" lIns="254" tIns="254" rIns="254" bIns="254" rtlCol="0" anchor="t">
+          <a:bodyPr wrap="square" lIns="508" tIns="508" rIns="508" bIns="508" rtlCol="0" anchor="t">
             <a:normAutofit/>
           </a:bodyPr>
           <a:lstStyle/>
           <a:p>
-            <a:r>
-              <a:rPr lang="en-US" sz="1380" dirty="0">
+            <a:pPr indent="0" marL="0">
+              <a:buNone/>
+            </a:pPr>
+            <a:r>
+              <a:rPr lang="en-US" sz="1220" dirty="0">
                 <a:solidFill>
                   <a:srgbClr val="17364A"/>
                 </a:solidFill>
@@ -22015,9 +22440,9 @@
                 <a:ea typeface="Aptos" pitchFamily="34" charset="-122"/>
                 <a:cs typeface="Aptos" pitchFamily="34" charset="-120"/>
               </a:rPr>
-              <a:t>Produce an introductory AI governance intake and escalation note for one real or realistic.</a:t>
-            </a:r>
-            <a:endParaRPr lang="en-US" sz="1380" dirty="0"/>
+              <a:t>Produce an introductory AI governance intake and escalation note.</a:t>
+            </a:r>
+            <a:endParaRPr lang="en-US" sz="1220" dirty="0"/>
           </a:p>
         </p:txBody>
       </p:sp>
@@ -22095,17 +22520,17 @@
         </p:nvSpPr>
         <p:spPr>
           <a:xfrm>
-            <a:off x="7799832" y="5001768"/>
-            <a:ext cx="3145536" cy="502920"/>
-          </a:xfrm>
-          <a:prstGeom prst="rect">
-            <a:avLst/>
-          </a:prstGeom>
-          <a:noFill/>
-          <a:ln/>
-        </p:spPr>
-        <p:txBody>
-          <a:bodyPr wrap="square" lIns="0" tIns="0" rIns="0" bIns="0" rtlCol="0" anchor="t">
+            <a:off x="7799832" y="4974336"/>
+            <a:ext cx="3145536" cy="576072"/>
+          </a:xfrm>
+          <a:prstGeom prst="rect">
+            <a:avLst/>
+          </a:prstGeom>
+          <a:noFill/>
+          <a:ln/>
+        </p:spPr>
+        <p:txBody>
+          <a:bodyPr wrap="square" lIns="254" tIns="254" rIns="254" bIns="254" rtlCol="0" anchor="t">
             <a:normAutofit/>
           </a:bodyPr>
           <a:lstStyle/>
@@ -22114,7 +22539,7 @@
               <a:buNone/>
             </a:pPr>
             <a:r>
-              <a:rPr lang="en-US" sz="1550" dirty="0">
+              <a:rPr lang="en-US" sz="1320" dirty="0">
                 <a:solidFill>
                   <a:srgbClr val="17364A"/>
                 </a:solidFill>
@@ -22122,9 +22547,9 @@
                 <a:ea typeface="Aptos" pitchFamily="34" charset="-122"/>
                 <a:cs typeface="Aptos" pitchFamily="34" charset="-120"/>
               </a:rPr>
-              <a:t>Use the assignment to test whether you can explain the concept, apply it to a realistic public health situation, and identify what would need review before the work moves forward.</a:t>
-            </a:r>
-            <a:endParaRPr lang="en-US" sz="1550" dirty="0"/>
+              <a:t>Use the assignment to test whether you can explain the concept, apply it to a realistic public health situation, and.</a:t>
+            </a:r>
+            <a:endParaRPr lang="en-US" sz="1320" dirty="0"/>
           </a:p>
         </p:txBody>
       </p:sp>
@@ -22425,49 +22850,58 @@
           <a:ln/>
         </p:spPr>
         <p:txBody>
-          <a:bodyPr wrap="square" lIns="635" tIns="635" rIns="635" bIns="635" rtlCol="0" anchor="t">
+          <a:bodyPr wrap="square" lIns="1016" tIns="1016" rIns="1016" bIns="1016" rtlCol="0" anchor="t">
             <a:normAutofit/>
           </a:bodyPr>
           <a:lstStyle/>
           <a:p>
+            <a:pPr indent="0" marL="0">
+              <a:buNone/>
+            </a:pPr>
             <a:r>
               <a:rPr lang="en-US" sz="2100" dirty="0">
                 <a:solidFill>
-                  <a:srgbClr val="17364A"/>
-                </a:solidFill>
-                <a:latin typeface="Aptos" pitchFamily="34" charset="0"/>
-                <a:ea typeface="Aptos" pitchFamily="34" charset="-122"/>
-                <a:cs typeface="Aptos" pitchFamily="34" charset="-120"/>
-              </a:rPr>
-              <a:t>AI governance is the set of people, policies, processes, decision rights, documentation practices, and.</a:t>
+                  <a:srgbClr val="003A63"/>
+                </a:solidFill>
+                <a:latin typeface="Aptos" pitchFamily="34" charset="0"/>
+                <a:ea typeface="Aptos" pitchFamily="34" charset="-122"/>
+                <a:cs typeface="Aptos" pitchFamily="34" charset="-120"/>
+              </a:rPr>
+              <a:t>• AI governance is the set of people, policies, processes, decision rights, documentation.</a:t>
             </a:r>
             <a:endParaRPr lang="en-US" sz="2100" dirty="0"/>
           </a:p>
           <a:p>
+            <a:pPr indent="0" marL="0">
+              <a:buNone/>
+            </a:pPr>
             <a:r>
               <a:rPr lang="en-US" sz="2100" dirty="0">
                 <a:solidFill>
-                  <a:srgbClr val="17364A"/>
-                </a:solidFill>
-                <a:latin typeface="Aptos" pitchFamily="34" charset="0"/>
-                <a:ea typeface="Aptos" pitchFamily="34" charset="-122"/>
-                <a:cs typeface="Aptos" pitchFamily="34" charset="-120"/>
-              </a:rPr>
-              <a:t>Governance does not mean that every staff member must become an AI expert, and it does not mean that.</a:t>
+                  <a:srgbClr val="003A63"/>
+                </a:solidFill>
+                <a:latin typeface="Aptos" pitchFamily="34" charset="0"/>
+                <a:ea typeface="Aptos" pitchFamily="34" charset="-122"/>
+                <a:cs typeface="Aptos" pitchFamily="34" charset="-120"/>
+              </a:rPr>
+              <a:t>• Governance does not mean that every staff member must become an AI expert, and it does not.</a:t>
             </a:r>
             <a:endParaRPr lang="en-US" sz="2100" dirty="0"/>
           </a:p>
           <a:p>
+            <a:pPr indent="0" marL="0">
+              <a:buNone/>
+            </a:pPr>
             <a:r>
               <a:rPr lang="en-US" sz="2100" dirty="0">
                 <a:solidFill>
-                  <a:srgbClr val="17364A"/>
-                </a:solidFill>
-                <a:latin typeface="Aptos" pitchFamily="34" charset="0"/>
-                <a:ea typeface="Aptos" pitchFamily="34" charset="-122"/>
-                <a:cs typeface="Aptos" pitchFamily="34" charset="-120"/>
-              </a:rPr>
-              <a:t>Good governance helps an agency decide what AI uses are appropriate, what review is needed, what data.</a:t>
+                  <a:srgbClr val="003A63"/>
+                </a:solidFill>
+                <a:latin typeface="Aptos" pitchFamily="34" charset="0"/>
+                <a:ea typeface="Aptos" pitchFamily="34" charset="-122"/>
+                <a:cs typeface="Aptos" pitchFamily="34" charset="-120"/>
+              </a:rPr>
+              <a:t>• Good governance helps an agency decide what AI uses are appropriate, what review is needed,.</a:t>
             </a:r>
             <a:endParaRPr lang="en-US" sz="2100" dirty="0"/>
           </a:p>
@@ -22547,17 +22981,17 @@
         </p:nvSpPr>
         <p:spPr>
           <a:xfrm>
-            <a:off x="7799832" y="1828800"/>
-            <a:ext cx="3145536" cy="685800"/>
-          </a:xfrm>
-          <a:prstGeom prst="rect">
-            <a:avLst/>
-          </a:prstGeom>
-          <a:noFill/>
-          <a:ln/>
-        </p:spPr>
-        <p:txBody>
-          <a:bodyPr wrap="square" lIns="0" tIns="0" rIns="0" bIns="0" rtlCol="0" anchor="t">
+            <a:off x="7799832" y="1801368"/>
+            <a:ext cx="3145536" cy="758952"/>
+          </a:xfrm>
+          <a:prstGeom prst="rect">
+            <a:avLst/>
+          </a:prstGeom>
+          <a:noFill/>
+          <a:ln/>
+        </p:spPr>
+        <p:txBody>
+          <a:bodyPr wrap="square" lIns="254" tIns="254" rIns="254" bIns="254" rtlCol="0" anchor="t">
             <a:normAutofit/>
           </a:bodyPr>
           <a:lstStyle/>
@@ -22566,7 +23000,7 @@
               <a:buNone/>
             </a:pPr>
             <a:r>
-              <a:rPr lang="en-US" sz="1550" dirty="0">
+              <a:rPr lang="en-US" sz="1320" dirty="0">
                 <a:solidFill>
                   <a:srgbClr val="17364A"/>
                 </a:solidFill>
@@ -22576,7 +23010,7 @@
               </a:rPr>
               <a:t>AI governance is the set of people, policies, processes, decision rights, documentation practices, and.</a:t>
             </a:r>
-            <a:endParaRPr lang="en-US" sz="1550" dirty="0"/>
+            <a:endParaRPr lang="en-US" sz="1320" dirty="0"/>
           </a:p>
         </p:txBody>
       </p:sp>
@@ -22664,13 +23098,16 @@
           <a:ln/>
         </p:spPr>
         <p:txBody>
-          <a:bodyPr wrap="square" lIns="254" tIns="254" rIns="254" bIns="254" rtlCol="0" anchor="t">
+          <a:bodyPr wrap="square" lIns="508" tIns="508" rIns="508" bIns="508" rtlCol="0" anchor="t">
             <a:normAutofit/>
           </a:bodyPr>
           <a:lstStyle/>
           <a:p>
-            <a:r>
-              <a:rPr lang="en-US" sz="1380" dirty="0">
+            <a:pPr indent="0" marL="0">
+              <a:buNone/>
+            </a:pPr>
+            <a:r>
+              <a:rPr lang="en-US" sz="1220" dirty="0">
                 <a:solidFill>
                   <a:srgbClr val="17364A"/>
                 </a:solidFill>
@@ -22678,13 +23115,16 @@
                 <a:ea typeface="Aptos" pitchFamily="34" charset="-122"/>
                 <a:cs typeface="Aptos" pitchFamily="34" charset="-120"/>
               </a:rPr>
-              <a:t>AI governance is the set of people, policies, processes, decision rights, documentation.</a:t>
-            </a:r>
-            <a:endParaRPr lang="en-US" sz="1380" dirty="0"/>
-          </a:p>
-          <a:p>
-            <a:r>
-              <a:rPr lang="en-US" sz="1380" dirty="0">
+              <a:t>AI governance is the set of people, policies, processes, decision.</a:t>
+            </a:r>
+            <a:endParaRPr lang="en-US" sz="1220" dirty="0"/>
+          </a:p>
+          <a:p>
+            <a:pPr indent="0" marL="0">
+              <a:buNone/>
+            </a:pPr>
+            <a:r>
+              <a:rPr lang="en-US" sz="1220" dirty="0">
                 <a:solidFill>
                   <a:srgbClr val="17364A"/>
                 </a:solidFill>
@@ -22692,13 +23132,16 @@
                 <a:ea typeface="Aptos" pitchFamily="34" charset="-122"/>
                 <a:cs typeface="Aptos" pitchFamily="34" charset="-120"/>
               </a:rPr>
-              <a:t>Governance does not mean that every staff member must become an AI expert, and it does not.</a:t>
-            </a:r>
-            <a:endParaRPr lang="en-US" sz="1380" dirty="0"/>
-          </a:p>
-          <a:p>
-            <a:r>
-              <a:rPr lang="en-US" sz="1380" dirty="0">
+              <a:t>Governance does not mean that every staff member must become an AI.</a:t>
+            </a:r>
+            <a:endParaRPr lang="en-US" sz="1220" dirty="0"/>
+          </a:p>
+          <a:p>
+            <a:pPr indent="0" marL="0">
+              <a:buNone/>
+            </a:pPr>
+            <a:r>
+              <a:rPr lang="en-US" sz="1220" dirty="0">
                 <a:solidFill>
                   <a:srgbClr val="17364A"/>
                 </a:solidFill>
@@ -22706,9 +23149,9 @@
                 <a:ea typeface="Aptos" pitchFamily="34" charset="-122"/>
                 <a:cs typeface="Aptos" pitchFamily="34" charset="-120"/>
               </a:rPr>
-              <a:t>Good governance helps an agency decide what AI uses are appropriate, what review is.</a:t>
-            </a:r>
-            <a:endParaRPr lang="en-US" sz="1380" dirty="0"/>
+              <a:t>Good governance helps an agency decide what AI uses are.</a:t>
+            </a:r>
+            <a:endParaRPr lang="en-US" sz="1220" dirty="0"/>
           </a:p>
         </p:txBody>
       </p:sp>
@@ -22786,17 +23229,17 @@
         </p:nvSpPr>
         <p:spPr>
           <a:xfrm>
-            <a:off x="7799832" y="5001768"/>
-            <a:ext cx="3145536" cy="502920"/>
-          </a:xfrm>
-          <a:prstGeom prst="rect">
-            <a:avLst/>
-          </a:prstGeom>
-          <a:noFill/>
-          <a:ln/>
-        </p:spPr>
-        <p:txBody>
-          <a:bodyPr wrap="square" lIns="0" tIns="0" rIns="0" bIns="0" rtlCol="0" anchor="t">
+            <a:off x="7799832" y="4974336"/>
+            <a:ext cx="3145536" cy="576072"/>
+          </a:xfrm>
+          <a:prstGeom prst="rect">
+            <a:avLst/>
+          </a:prstGeom>
+          <a:noFill/>
+          <a:ln/>
+        </p:spPr>
+        <p:txBody>
+          <a:bodyPr wrap="square" lIns="254" tIns="254" rIns="254" bIns="254" rtlCol="0" anchor="t">
             <a:normAutofit/>
           </a:bodyPr>
           <a:lstStyle/>
@@ -22805,7 +23248,7 @@
               <a:buNone/>
             </a:pPr>
             <a:r>
-              <a:rPr lang="en-US" sz="1550" dirty="0">
+              <a:rPr lang="en-US" sz="1320" dirty="0">
                 <a:solidFill>
                   <a:srgbClr val="17364A"/>
                 </a:solidFill>
@@ -22813,9 +23256,9 @@
                 <a:ea typeface="Aptos" pitchFamily="34" charset="-122"/>
                 <a:cs typeface="Aptos" pitchFamily="34" charset="-120"/>
               </a:rPr>
-              <a:t>Translate this concept into clear decision rights, review steps, documentation expectations, and escalation paths before an AI-supported workflow is approved.</a:t>
-            </a:r>
-            <a:endParaRPr lang="en-US" sz="1550" dirty="0"/>
+              <a:t>Translate this concept into clear decision rights, review steps, documentation expectations, and escalation paths before.</a:t>
+            </a:r>
+            <a:endParaRPr lang="en-US" sz="1320" dirty="0"/>
           </a:p>
         </p:txBody>
       </p:sp>
@@ -23116,49 +23559,58 @@
           <a:ln/>
         </p:spPr>
         <p:txBody>
-          <a:bodyPr wrap="square" lIns="635" tIns="635" rIns="635" bIns="635" rtlCol="0" anchor="t">
+          <a:bodyPr wrap="square" lIns="1016" tIns="1016" rIns="1016" bIns="1016" rtlCol="0" anchor="t">
             <a:normAutofit/>
           </a:bodyPr>
           <a:lstStyle/>
           <a:p>
+            <a:pPr indent="0" marL="0">
+              <a:buNone/>
+            </a:pPr>
             <a:r>
               <a:rPr lang="en-US" sz="2100" dirty="0">
                 <a:solidFill>
-                  <a:srgbClr val="17364A"/>
-                </a:solidFill>
-                <a:latin typeface="Aptos" pitchFamily="34" charset="0"/>
-                <a:ea typeface="Aptos" pitchFamily="34" charset="-122"/>
-                <a:cs typeface="Aptos" pitchFamily="34" charset="-120"/>
-              </a:rPr>
-              <a:t>AI governance: AI governance is the organized approach an agency uses to direct, review, document,.</a:t>
+                  <a:srgbClr val="003A63"/>
+                </a:solidFill>
+                <a:latin typeface="Aptos" pitchFamily="34" charset="0"/>
+                <a:ea typeface="Aptos" pitchFamily="34" charset="-122"/>
+                <a:cs typeface="Aptos" pitchFamily="34" charset="-120"/>
+              </a:rPr>
+              <a:t>• AI governance: AI governance is the organized approach an agency uses to direct, review,.</a:t>
             </a:r>
             <a:endParaRPr lang="en-US" sz="2100" dirty="0"/>
           </a:p>
           <a:p>
+            <a:pPr indent="0" marL="0">
+              <a:buNone/>
+            </a:pPr>
             <a:r>
               <a:rPr lang="en-US" sz="2100" dirty="0">
                 <a:solidFill>
-                  <a:srgbClr val="17364A"/>
-                </a:solidFill>
-                <a:latin typeface="Aptos" pitchFamily="34" charset="0"/>
-                <a:ea typeface="Aptos" pitchFamily="34" charset="-122"/>
-                <a:cs typeface="Aptos" pitchFamily="34" charset="-120"/>
-              </a:rPr>
-              <a:t>Governance body: A governance body is the group or structure responsible for reviewing AI use and.</a:t>
+                  <a:srgbClr val="003A63"/>
+                </a:solidFill>
+                <a:latin typeface="Aptos" pitchFamily="34" charset="0"/>
+                <a:ea typeface="Aptos" pitchFamily="34" charset="-122"/>
+                <a:cs typeface="Aptos" pitchFamily="34" charset="-120"/>
+              </a:rPr>
+              <a:t>• Governance body: A governance body is the group or structure responsible for reviewing AI use.</a:t>
             </a:r>
             <a:endParaRPr lang="en-US" sz="2100" dirty="0"/>
           </a:p>
           <a:p>
+            <a:pPr indent="0" marL="0">
+              <a:buNone/>
+            </a:pPr>
             <a:r>
               <a:rPr lang="en-US" sz="2100" dirty="0">
                 <a:solidFill>
-                  <a:srgbClr val="17364A"/>
-                </a:solidFill>
-                <a:latin typeface="Aptos" pitchFamily="34" charset="0"/>
-                <a:ea typeface="Aptos" pitchFamily="34" charset="-122"/>
-                <a:cs typeface="Aptos" pitchFamily="34" charset="-120"/>
-              </a:rPr>
-              <a:t>Decision rights: Decision rights define who is allowed to approve, reject, pause, revise, monitor, or.</a:t>
+                  <a:srgbClr val="003A63"/>
+                </a:solidFill>
+                <a:latin typeface="Aptos" pitchFamily="34" charset="0"/>
+                <a:ea typeface="Aptos" pitchFamily="34" charset="-122"/>
+                <a:cs typeface="Aptos" pitchFamily="34" charset="-120"/>
+              </a:rPr>
+              <a:t>• Decision rights: Decision rights define who is allowed to approve, reject, pause, revise,.</a:t>
             </a:r>
             <a:endParaRPr lang="en-US" sz="2100" dirty="0"/>
           </a:p>
@@ -23238,17 +23690,17 @@
         </p:nvSpPr>
         <p:spPr>
           <a:xfrm>
-            <a:off x="7799832" y="1828800"/>
-            <a:ext cx="3145536" cy="685800"/>
-          </a:xfrm>
-          <a:prstGeom prst="rect">
-            <a:avLst/>
-          </a:prstGeom>
-          <a:noFill/>
-          <a:ln/>
-        </p:spPr>
-        <p:txBody>
-          <a:bodyPr wrap="square" lIns="0" tIns="0" rIns="0" bIns="0" rtlCol="0" anchor="t">
+            <a:off x="7799832" y="1801368"/>
+            <a:ext cx="3145536" cy="758952"/>
+          </a:xfrm>
+          <a:prstGeom prst="rect">
+            <a:avLst/>
+          </a:prstGeom>
+          <a:noFill/>
+          <a:ln/>
+        </p:spPr>
+        <p:txBody>
+          <a:bodyPr wrap="square" lIns="254" tIns="254" rIns="254" bIns="254" rtlCol="0" anchor="t">
             <a:normAutofit/>
           </a:bodyPr>
           <a:lstStyle/>
@@ -23257,7 +23709,7 @@
               <a:buNone/>
             </a:pPr>
             <a:r>
-              <a:rPr lang="en-US" sz="1550" dirty="0">
+              <a:rPr lang="en-US" sz="1320" dirty="0">
                 <a:solidFill>
                   <a:srgbClr val="17364A"/>
                 </a:solidFill>
@@ -23267,7 +23719,7 @@
               </a:rPr>
               <a:t>AI governance: AI governance is the organized approach an agency uses to direct, review, document,.</a:t>
             </a:r>
-            <a:endParaRPr lang="en-US" sz="1550" dirty="0"/>
+            <a:endParaRPr lang="en-US" sz="1320" dirty="0"/>
           </a:p>
         </p:txBody>
       </p:sp>
@@ -23355,13 +23807,16 @@
           <a:ln/>
         </p:spPr>
         <p:txBody>
-          <a:bodyPr wrap="square" lIns="254" tIns="254" rIns="254" bIns="254" rtlCol="0" anchor="t">
+          <a:bodyPr wrap="square" lIns="508" tIns="508" rIns="508" bIns="508" rtlCol="0" anchor="t">
             <a:normAutofit/>
           </a:bodyPr>
           <a:lstStyle/>
           <a:p>
-            <a:r>
-              <a:rPr lang="en-US" sz="1380" dirty="0">
+            <a:pPr indent="0" marL="0">
+              <a:buNone/>
+            </a:pPr>
+            <a:r>
+              <a:rPr lang="en-US" sz="1220" dirty="0">
                 <a:solidFill>
                   <a:srgbClr val="17364A"/>
                 </a:solidFill>
@@ -23369,13 +23824,16 @@
                 <a:ea typeface="Aptos" pitchFamily="34" charset="-122"/>
                 <a:cs typeface="Aptos" pitchFamily="34" charset="-120"/>
               </a:rPr>
-              <a:t>AI governance: AI governance is the organized approach an agency uses to direct, review,.</a:t>
-            </a:r>
-            <a:endParaRPr lang="en-US" sz="1380" dirty="0"/>
-          </a:p>
-          <a:p>
-            <a:r>
-              <a:rPr lang="en-US" sz="1380" dirty="0">
+              <a:t>AI governance: AI governance is the organized approach an agency.</a:t>
+            </a:r>
+            <a:endParaRPr lang="en-US" sz="1220" dirty="0"/>
+          </a:p>
+          <a:p>
+            <a:pPr indent="0" marL="0">
+              <a:buNone/>
+            </a:pPr>
+            <a:r>
+              <a:rPr lang="en-US" sz="1220" dirty="0">
                 <a:solidFill>
                   <a:srgbClr val="17364A"/>
                 </a:solidFill>
@@ -23383,13 +23841,16 @@
                 <a:ea typeface="Aptos" pitchFamily="34" charset="-122"/>
                 <a:cs typeface="Aptos" pitchFamily="34" charset="-120"/>
               </a:rPr>
-              <a:t>It includes policies, roles, review pathways, decision rights, evidence requirements,.</a:t>
-            </a:r>
-            <a:endParaRPr lang="en-US" sz="1380" dirty="0"/>
-          </a:p>
-          <a:p>
-            <a:r>
-              <a:rPr lang="en-US" sz="1380" dirty="0">
+              <a:t>It includes policies, roles, review pathways, decision rights,.</a:t>
+            </a:r>
+            <a:endParaRPr lang="en-US" sz="1220" dirty="0"/>
+          </a:p>
+          <a:p>
+            <a:pPr indent="0" marL="0">
+              <a:buNone/>
+            </a:pPr>
+            <a:r>
+              <a:rPr lang="en-US" sz="1220" dirty="0">
                 <a:solidFill>
                   <a:srgbClr val="17364A"/>
                 </a:solidFill>
@@ -23397,9 +23858,9 @@
                 <a:ea typeface="Aptos" pitchFamily="34" charset="-122"/>
                 <a:cs typeface="Aptos" pitchFamily="34" charset="-120"/>
               </a:rPr>
-              <a:t>Governance body: A governance body is the group or structure responsible for reviewing AI.</a:t>
-            </a:r>
-            <a:endParaRPr lang="en-US" sz="1380" dirty="0"/>
+              <a:t>Governance body: A governance body is the group or structure.</a:t>
+            </a:r>
+            <a:endParaRPr lang="en-US" sz="1220" dirty="0"/>
           </a:p>
         </p:txBody>
       </p:sp>
@@ -23477,17 +23938,17 @@
         </p:nvSpPr>
         <p:spPr>
           <a:xfrm>
-            <a:off x="7799832" y="5001768"/>
-            <a:ext cx="3145536" cy="502920"/>
-          </a:xfrm>
-          <a:prstGeom prst="rect">
-            <a:avLst/>
-          </a:prstGeom>
-          <a:noFill/>
-          <a:ln/>
-        </p:spPr>
-        <p:txBody>
-          <a:bodyPr wrap="square" lIns="0" tIns="0" rIns="0" bIns="0" rtlCol="0" anchor="t">
+            <a:off x="7799832" y="4974336"/>
+            <a:ext cx="3145536" cy="576072"/>
+          </a:xfrm>
+          <a:prstGeom prst="rect">
+            <a:avLst/>
+          </a:prstGeom>
+          <a:noFill/>
+          <a:ln/>
+        </p:spPr>
+        <p:txBody>
+          <a:bodyPr wrap="square" lIns="254" tIns="254" rIns="254" bIns="254" rtlCol="0" anchor="t">
             <a:normAutofit/>
           </a:bodyPr>
           <a:lstStyle/>
@@ -23496,7 +23957,7 @@
               <a:buNone/>
             </a:pPr>
             <a:r>
-              <a:rPr lang="en-US" sz="1550" dirty="0">
+              <a:rPr lang="en-US" sz="1320" dirty="0">
                 <a:solidFill>
                   <a:srgbClr val="17364A"/>
                 </a:solidFill>
@@ -23504,9 +23965,9 @@
                 <a:ea typeface="Aptos" pitchFamily="34" charset="-122"/>
                 <a:cs typeface="Aptos" pitchFamily="34" charset="-120"/>
               </a:rPr>
-              <a:t>Translate this concept into clear decision rights, review steps, documentation expectations, and escalation paths before an AI-supported workflow is approved.</a:t>
-            </a:r>
-            <a:endParaRPr lang="en-US" sz="1550" dirty="0"/>
+              <a:t>Translate this concept into clear decision rights, review steps, documentation expectations, and escalation paths before.</a:t>
+            </a:r>
+            <a:endParaRPr lang="en-US" sz="1320" dirty="0"/>
           </a:p>
         </p:txBody>
       </p:sp>
@@ -23807,49 +24268,58 @@
           <a:ln/>
         </p:spPr>
         <p:txBody>
-          <a:bodyPr wrap="square" lIns="635" tIns="635" rIns="635" bIns="635" rtlCol="0" anchor="t">
+          <a:bodyPr wrap="square" lIns="1016" tIns="1016" rIns="1016" bIns="1016" rtlCol="0" anchor="t">
             <a:normAutofit/>
           </a:bodyPr>
           <a:lstStyle/>
           <a:p>
+            <a:pPr indent="0" marL="0">
+              <a:buNone/>
+            </a:pPr>
             <a:r>
               <a:rPr lang="en-US" sz="2100" dirty="0">
                 <a:solidFill>
-                  <a:srgbClr val="17364A"/>
-                </a:solidFill>
-                <a:latin typeface="Aptos" pitchFamily="34" charset="0"/>
-                <a:ea typeface="Aptos" pitchFamily="34" charset="-122"/>
-                <a:cs typeface="Aptos" pitchFamily="34" charset="-120"/>
-              </a:rPr>
-              <a:t>Human accountability: Human accountability means that a person or accountable role remains responsible.</a:t>
+                  <a:srgbClr val="003A63"/>
+                </a:solidFill>
+                <a:latin typeface="Aptos" pitchFamily="34" charset="0"/>
+                <a:ea typeface="Aptos" pitchFamily="34" charset="-122"/>
+                <a:cs typeface="Aptos" pitchFamily="34" charset="-120"/>
+              </a:rPr>
+              <a:t>• Human accountability: Human accountability means that a person or accountable role remains.</a:t>
             </a:r>
             <a:endParaRPr lang="en-US" sz="2100" dirty="0"/>
           </a:p>
           <a:p>
+            <a:pPr indent="0" marL="0">
+              <a:buNone/>
+            </a:pPr>
             <a:r>
               <a:rPr lang="en-US" sz="2100" dirty="0">
                 <a:solidFill>
-                  <a:srgbClr val="17364A"/>
-                </a:solidFill>
-                <a:latin typeface="Aptos" pitchFamily="34" charset="0"/>
-                <a:ea typeface="Aptos" pitchFamily="34" charset="-122"/>
-                <a:cs typeface="Aptos" pitchFamily="34" charset="-120"/>
-              </a:rPr>
-              <a:t>Oversight: Oversight is the ongoing review of AI use after approval. It includes monitoring.</a:t>
+                  <a:srgbClr val="003A63"/>
+                </a:solidFill>
+                <a:latin typeface="Aptos" pitchFamily="34" charset="0"/>
+                <a:ea typeface="Aptos" pitchFamily="34" charset="-122"/>
+                <a:cs typeface="Aptos" pitchFamily="34" charset="-120"/>
+              </a:rPr>
+              <a:t>• Oversight: Oversight is the ongoing review of AI use after approval. It includes monitoring.</a:t>
             </a:r>
             <a:endParaRPr lang="en-US" sz="2100" dirty="0"/>
           </a:p>
           <a:p>
+            <a:pPr indent="0" marL="0">
+              <a:buNone/>
+            </a:pPr>
             <a:r>
               <a:rPr lang="en-US" sz="2100" dirty="0">
                 <a:solidFill>
-                  <a:srgbClr val="17364A"/>
-                </a:solidFill>
-                <a:latin typeface="Aptos" pitchFamily="34" charset="0"/>
-                <a:ea typeface="Aptos" pitchFamily="34" charset="-122"/>
-                <a:cs typeface="Aptos" pitchFamily="34" charset="-120"/>
-              </a:rPr>
-              <a:t>Escalation: Escalation is the process for raising a question, concern, incident, or proposed high-risk.</a:t>
+                  <a:srgbClr val="003A63"/>
+                </a:solidFill>
+                <a:latin typeface="Aptos" pitchFamily="34" charset="0"/>
+                <a:ea typeface="Aptos" pitchFamily="34" charset="-122"/>
+                <a:cs typeface="Aptos" pitchFamily="34" charset="-120"/>
+              </a:rPr>
+              <a:t>• Escalation: Escalation is the process for raising a question, concern, incident, or proposed.</a:t>
             </a:r>
             <a:endParaRPr lang="en-US" sz="2100" dirty="0"/>
           </a:p>
@@ -23929,17 +24399,17 @@
         </p:nvSpPr>
         <p:spPr>
           <a:xfrm>
-            <a:off x="7799832" y="1828800"/>
-            <a:ext cx="3145536" cy="685800"/>
-          </a:xfrm>
-          <a:prstGeom prst="rect">
-            <a:avLst/>
-          </a:prstGeom>
-          <a:noFill/>
-          <a:ln/>
-        </p:spPr>
-        <p:txBody>
-          <a:bodyPr wrap="square" lIns="0" tIns="0" rIns="0" bIns="0" rtlCol="0" anchor="t">
+            <a:off x="7799832" y="1801368"/>
+            <a:ext cx="3145536" cy="758952"/>
+          </a:xfrm>
+          <a:prstGeom prst="rect">
+            <a:avLst/>
+          </a:prstGeom>
+          <a:noFill/>
+          <a:ln/>
+        </p:spPr>
+        <p:txBody>
+          <a:bodyPr wrap="square" lIns="254" tIns="254" rIns="254" bIns="254" rtlCol="0" anchor="t">
             <a:normAutofit/>
           </a:bodyPr>
           <a:lstStyle/>
@@ -23948,7 +24418,7 @@
               <a:buNone/>
             </a:pPr>
             <a:r>
-              <a:rPr lang="en-US" sz="1550" dirty="0">
+              <a:rPr lang="en-US" sz="1320" dirty="0">
                 <a:solidFill>
                   <a:srgbClr val="17364A"/>
                 </a:solidFill>
@@ -23958,7 +24428,7 @@
               </a:rPr>
               <a:t>Human accountability: Human accountability means that a person or accountable role remains responsible.</a:t>
             </a:r>
-            <a:endParaRPr lang="en-US" sz="1550" dirty="0"/>
+            <a:endParaRPr lang="en-US" sz="1320" dirty="0"/>
           </a:p>
         </p:txBody>
       </p:sp>
@@ -24046,13 +24516,16 @@
           <a:ln/>
         </p:spPr>
         <p:txBody>
-          <a:bodyPr wrap="square" lIns="254" tIns="254" rIns="254" bIns="254" rtlCol="0" anchor="t">
+          <a:bodyPr wrap="square" lIns="508" tIns="508" rIns="508" bIns="508" rtlCol="0" anchor="t">
             <a:normAutofit/>
           </a:bodyPr>
           <a:lstStyle/>
           <a:p>
-            <a:r>
-              <a:rPr lang="en-US" sz="1380" dirty="0">
+            <a:pPr indent="0" marL="0">
+              <a:buNone/>
+            </a:pPr>
+            <a:r>
+              <a:rPr lang="en-US" sz="1220" dirty="0">
                 <a:solidFill>
                   <a:srgbClr val="17364A"/>
                 </a:solidFill>
@@ -24060,13 +24533,16 @@
                 <a:ea typeface="Aptos" pitchFamily="34" charset="-122"/>
                 <a:cs typeface="Aptos" pitchFamily="34" charset="-120"/>
               </a:rPr>
-              <a:t>Human accountability: Human accountability means that a person or accountable role remains.</a:t>
-            </a:r>
-            <a:endParaRPr lang="en-US" sz="1380" dirty="0"/>
-          </a:p>
-          <a:p>
-            <a:r>
-              <a:rPr lang="en-US" sz="1380" dirty="0">
+              <a:t>Human accountability: Human accountability means that a person or.</a:t>
+            </a:r>
+            <a:endParaRPr lang="en-US" sz="1220" dirty="0"/>
+          </a:p>
+          <a:p>
+            <a:pPr indent="0" marL="0">
+              <a:buNone/>
+            </a:pPr>
+            <a:r>
+              <a:rPr lang="en-US" sz="1220" dirty="0">
                 <a:solidFill>
                   <a:srgbClr val="17364A"/>
                 </a:solidFill>
@@ -24074,13 +24550,16 @@
                 <a:ea typeface="Aptos" pitchFamily="34" charset="-122"/>
                 <a:cs typeface="Aptos" pitchFamily="34" charset="-120"/>
               </a:rPr>
-              <a:t>AI should not become the invisible decision-maker in a public health workflow.</a:t>
-            </a:r>
-            <a:endParaRPr lang="en-US" sz="1380" dirty="0"/>
-          </a:p>
-          <a:p>
-            <a:r>
-              <a:rPr lang="en-US" sz="1380" dirty="0">
+              <a:t>AI should not become the invisible decision-maker in a public.</a:t>
+            </a:r>
+            <a:endParaRPr lang="en-US" sz="1220" dirty="0"/>
+          </a:p>
+          <a:p>
+            <a:pPr indent="0" marL="0">
+              <a:buNone/>
+            </a:pPr>
+            <a:r>
+              <a:rPr lang="en-US" sz="1220" dirty="0">
                 <a:solidFill>
                   <a:srgbClr val="17364A"/>
                 </a:solidFill>
@@ -24090,7 +24569,7 @@
               </a:rPr>
               <a:t>Oversight: Oversight is the ongoing review of AI use after approval.</a:t>
             </a:r>
-            <a:endParaRPr lang="en-US" sz="1380" dirty="0"/>
+            <a:endParaRPr lang="en-US" sz="1220" dirty="0"/>
           </a:p>
         </p:txBody>
       </p:sp>
@@ -24168,17 +24647,17 @@
         </p:nvSpPr>
         <p:spPr>
           <a:xfrm>
-            <a:off x="7799832" y="5001768"/>
-            <a:ext cx="3145536" cy="502920"/>
-          </a:xfrm>
-          <a:prstGeom prst="rect">
-            <a:avLst/>
-          </a:prstGeom>
-          <a:noFill/>
-          <a:ln/>
-        </p:spPr>
-        <p:txBody>
-          <a:bodyPr wrap="square" lIns="0" tIns="0" rIns="0" bIns="0" rtlCol="0" anchor="t">
+            <a:off x="7799832" y="4974336"/>
+            <a:ext cx="3145536" cy="576072"/>
+          </a:xfrm>
+          <a:prstGeom prst="rect">
+            <a:avLst/>
+          </a:prstGeom>
+          <a:noFill/>
+          <a:ln/>
+        </p:spPr>
+        <p:txBody>
+          <a:bodyPr wrap="square" lIns="254" tIns="254" rIns="254" bIns="254" rtlCol="0" anchor="t">
             <a:normAutofit/>
           </a:bodyPr>
           <a:lstStyle/>
@@ -24187,7 +24666,7 @@
               <a:buNone/>
             </a:pPr>
             <a:r>
-              <a:rPr lang="en-US" sz="1550" dirty="0">
+              <a:rPr lang="en-US" sz="1320" dirty="0">
                 <a:solidFill>
                   <a:srgbClr val="17364A"/>
                 </a:solidFill>
@@ -24195,9 +24674,9 @@
                 <a:ea typeface="Aptos" pitchFamily="34" charset="-122"/>
                 <a:cs typeface="Aptos" pitchFamily="34" charset="-120"/>
               </a:rPr>
-              <a:t>Translate this concept into clear decision rights, review steps, documentation expectations, and escalation paths before an AI-supported workflow is approved.</a:t>
-            </a:r>
-            <a:endParaRPr lang="en-US" sz="1550" dirty="0"/>
+              <a:t>Translate this concept into clear decision rights, review steps, documentation expectations, and escalation paths before.</a:t>
+            </a:r>
+            <a:endParaRPr lang="en-US" sz="1320" dirty="0"/>
           </a:p>
         </p:txBody>
       </p:sp>

--- a/downloads/presentations/modules/gov-100.pptx
+++ b/downloads/presentations/modules/gov-100.pptx
@@ -4247,11 +4247,11 @@
         <p:spPr>
           <a:xfrm>
             <a:off x="7635240" y="1325880"/>
-            <a:ext cx="3474720" cy="1325880"/>
+            <a:ext cx="3474720" cy="1207008"/>
           </a:xfrm>
           <a:prstGeom prst="roundRect">
             <a:avLst>
-              <a:gd name="adj" fmla="val 8276"/>
+              <a:gd name="adj" fmla="val 9091"/>
             </a:avLst>
           </a:prstGeom>
           <a:solidFill>
@@ -4313,7 +4313,7 @@
         <p:spPr>
           <a:xfrm>
             <a:off x="7799832" y="1801368"/>
-            <a:ext cx="3145536" cy="758952"/>
+            <a:ext cx="3145536" cy="640080"/>
           </a:xfrm>
           <a:prstGeom prst="rect">
             <a:avLst/>
@@ -4339,7 +4339,7 @@
                 <a:ea typeface="Aptos" pitchFamily="34" charset="-122"/>
                 <a:cs typeface="Aptos" pitchFamily="34" charset="-120"/>
               </a:rPr>
-              <a:t>This module provides national-level training guidance for public health agencies and partners.</a:t>
+              <a:t>This module provides national-level training guidance for public health agencies and.</a:t>
             </a:r>
             <a:endParaRPr lang="en-US" sz="1320" dirty="0"/>
           </a:p>
@@ -4353,12 +4353,12 @@
         </p:nvSpPr>
         <p:spPr>
           <a:xfrm>
-            <a:off x="7635240" y="2788920"/>
-            <a:ext cx="3474720" cy="1536192"/>
+            <a:off x="7635240" y="2670048"/>
+            <a:ext cx="3474720" cy="1377086"/>
           </a:xfrm>
           <a:prstGeom prst="roundRect">
             <a:avLst>
-              <a:gd name="adj" fmla="val 7143"/>
+              <a:gd name="adj" fmla="val 7968"/>
             </a:avLst>
           </a:prstGeom>
           <a:solidFill>
@@ -4380,8 +4380,8 @@
         </p:nvSpPr>
         <p:spPr>
           <a:xfrm>
-            <a:off x="7799832" y="2935224"/>
-            <a:ext cx="3145536" cy="256032"/>
+            <a:off x="7799832" y="2798064"/>
+            <a:ext cx="3145536" cy="237744"/>
           </a:xfrm>
           <a:prstGeom prst="rect">
             <a:avLst/>
@@ -4397,7 +4397,7 @@
               <a:buNone/>
             </a:pPr>
             <a:r>
-              <a:rPr lang="en-US" sz="1300" b="1" dirty="0">
+              <a:rPr lang="en-US" sz="1250" b="1" dirty="0">
                 <a:solidFill>
                   <a:srgbClr val="0068B7"/>
                 </a:solidFill>
@@ -4405,101 +4405,317 @@
                 <a:ea typeface="Aptos" pitchFamily="34" charset="-122"/>
                 <a:cs typeface="Aptos" pitchFamily="34" charset="-120"/>
               </a:rPr>
-              <a:t>Concept checkpoints</a:t>
-            </a:r>
-            <a:endParaRPr lang="en-US" sz="1300" dirty="0"/>
-          </a:p>
-        </p:txBody>
-      </p:sp>
-      <p:sp>
-        <p:nvSpPr>
-          <p:cNvPr id="15" name="Text 13"/>
-          <p:cNvSpPr/>
-          <p:nvPr/>
-        </p:nvSpPr>
-        <p:spPr>
-          <a:xfrm>
-            <a:off x="7818120" y="3300984"/>
-            <a:ext cx="3090672" cy="877824"/>
-          </a:xfrm>
-          <a:prstGeom prst="rect">
-            <a:avLst/>
-          </a:prstGeom>
-          <a:noFill/>
-          <a:ln/>
-        </p:spPr>
-        <p:txBody>
-          <a:bodyPr wrap="square" lIns="508" tIns="508" rIns="508" bIns="508" rtlCol="0" anchor="t">
+              <a:t>Governance pathway</a:t>
+            </a:r>
+            <a:endParaRPr lang="en-US" sz="1250" dirty="0"/>
+          </a:p>
+        </p:txBody>
+      </p:sp>
+      <p:sp>
+        <p:nvSpPr>
+          <p:cNvPr id="15" name="Shape 13"/>
+          <p:cNvSpPr/>
+          <p:nvPr/>
+        </p:nvSpPr>
+        <p:spPr>
+          <a:xfrm>
+            <a:off x="8763000" y="3351276"/>
+            <a:ext cx="164592" cy="0"/>
+          </a:xfrm>
+          <a:prstGeom prst="line">
+            <a:avLst/>
+          </a:prstGeom>
+          <a:noFill/>
+          <a:ln w="15240">
+            <a:solidFill>
+              <a:srgbClr val="8ABBD8"/>
+            </a:solidFill>
+            <a:prstDash val="solid"/>
+          </a:ln>
+        </p:spPr>
+      </p:sp>
+      <p:sp>
+        <p:nvSpPr>
+          <p:cNvPr id="16" name="Shape 14"/>
+          <p:cNvSpPr/>
+          <p:nvPr/>
+        </p:nvSpPr>
+        <p:spPr>
+          <a:xfrm>
+            <a:off x="7872984" y="3200400"/>
+            <a:ext cx="890016" cy="301752"/>
+          </a:xfrm>
+          <a:prstGeom prst="roundRect">
+            <a:avLst>
+              <a:gd name="adj" fmla="val 24242"/>
+            </a:avLst>
+          </a:prstGeom>
+          <a:solidFill>
+            <a:srgbClr val="0068B7"/>
+          </a:solidFill>
+          <a:ln w="12700">
+            <a:solidFill>
+              <a:srgbClr val="0068B7"/>
+            </a:solidFill>
+            <a:prstDash val="solid"/>
+          </a:ln>
+        </p:spPr>
+      </p:sp>
+      <p:sp>
+        <p:nvSpPr>
+          <p:cNvPr id="17" name="Text 15"/>
+          <p:cNvSpPr/>
+          <p:nvPr/>
+        </p:nvSpPr>
+        <p:spPr>
+          <a:xfrm>
+            <a:off x="7909560" y="3273552"/>
+            <a:ext cx="816864" cy="146304"/>
+          </a:xfrm>
+          <a:prstGeom prst="rect">
+            <a:avLst/>
+          </a:prstGeom>
+          <a:noFill/>
+          <a:ln/>
+        </p:spPr>
+        <p:txBody>
+          <a:bodyPr wrap="square" lIns="0" tIns="0" rIns="0" bIns="0" rtlCol="0" anchor="ctr">
             <a:normAutofit/>
           </a:bodyPr>
           <a:lstStyle/>
           <a:p>
-            <a:pPr indent="0" marL="0">
-              <a:buNone/>
-            </a:pPr>
-            <a:r>
-              <a:rPr lang="en-US" sz="1220" dirty="0">
-                <a:solidFill>
-                  <a:srgbClr val="17364A"/>
-                </a:solidFill>
-                <a:latin typeface="Aptos" pitchFamily="34" charset="0"/>
-                <a:ea typeface="Aptos" pitchFamily="34" charset="-122"/>
-                <a:cs typeface="Aptos" pitchFamily="34" charset="-120"/>
-              </a:rPr>
-              <a:t>It is not legal advice and does not replace review by agency legal.</a:t>
-            </a:r>
-            <a:endParaRPr lang="en-US" sz="1220" dirty="0"/>
-          </a:p>
-          <a:p>
-            <a:pPr indent="0" marL="0">
-              <a:buNone/>
-            </a:pPr>
-            <a:r>
-              <a:rPr lang="en-US" sz="1220" dirty="0">
-                <a:solidFill>
-                  <a:srgbClr val="17364A"/>
-                </a:solidFill>
-                <a:latin typeface="Aptos" pitchFamily="34" charset="0"/>
-                <a:ea typeface="Aptos" pitchFamily="34" charset="-122"/>
-                <a:cs typeface="Aptos" pitchFamily="34" charset="-120"/>
-              </a:rPr>
-              <a:t>Requirements may vary by state, locality, territory, Tribe,.</a:t>
-            </a:r>
-            <a:endParaRPr lang="en-US" sz="1220" dirty="0"/>
-          </a:p>
-          <a:p>
-            <a:pPr indent="0" marL="0">
-              <a:buNone/>
-            </a:pPr>
-            <a:r>
-              <a:rPr lang="en-US" sz="1220" dirty="0">
-                <a:solidFill>
-                  <a:srgbClr val="17364A"/>
-                </a:solidFill>
-                <a:latin typeface="Aptos" pitchFamily="34" charset="0"/>
-                <a:ea typeface="Aptos" pitchFamily="34" charset="-122"/>
-                <a:cs typeface="Aptos" pitchFamily="34" charset="-120"/>
-              </a:rPr>
-              <a:t>Learners should use this module to identify the issues that.</a:t>
-            </a:r>
-            <a:endParaRPr lang="en-US" sz="1220" dirty="0"/>
-          </a:p>
-        </p:txBody>
-      </p:sp>
-      <p:sp>
-        <p:nvSpPr>
-          <p:cNvPr id="16" name="Shape 14"/>
-          <p:cNvSpPr/>
-          <p:nvPr/>
-        </p:nvSpPr>
-        <p:spPr>
-          <a:xfrm>
-            <a:off x="7635240" y="4498848"/>
-            <a:ext cx="3474720" cy="1143000"/>
+            <a:pPr algn="ctr" indent="0" marL="0">
+              <a:buNone/>
+            </a:pPr>
+            <a:r>
+              <a:rPr lang="en-US" sz="880" b="1" dirty="0">
+                <a:solidFill>
+                  <a:srgbClr val="FFFFFF"/>
+                </a:solidFill>
+                <a:latin typeface="Aptos" pitchFamily="34" charset="0"/>
+                <a:ea typeface="Aptos" pitchFamily="34" charset="-122"/>
+                <a:cs typeface="Aptos" pitchFamily="34" charset="-120"/>
+              </a:rPr>
+              <a:t>Submit</a:t>
+            </a:r>
+            <a:endParaRPr lang="en-US" sz="880" dirty="0"/>
+          </a:p>
+        </p:txBody>
+      </p:sp>
+      <p:sp>
+        <p:nvSpPr>
+          <p:cNvPr id="18" name="Shape 16"/>
+          <p:cNvSpPr/>
+          <p:nvPr/>
+        </p:nvSpPr>
+        <p:spPr>
+          <a:xfrm>
+            <a:off x="9817608" y="3351276"/>
+            <a:ext cx="164592" cy="0"/>
+          </a:xfrm>
+          <a:prstGeom prst="line">
+            <a:avLst/>
+          </a:prstGeom>
+          <a:noFill/>
+          <a:ln w="15240">
+            <a:solidFill>
+              <a:srgbClr val="8ABBD8"/>
+            </a:solidFill>
+            <a:prstDash val="solid"/>
+          </a:ln>
+        </p:spPr>
+      </p:sp>
+      <p:sp>
+        <p:nvSpPr>
+          <p:cNvPr id="19" name="Shape 17"/>
+          <p:cNvSpPr/>
+          <p:nvPr/>
+        </p:nvSpPr>
+        <p:spPr>
+          <a:xfrm>
+            <a:off x="8927592" y="3200400"/>
+            <a:ext cx="890016" cy="301752"/>
           </a:xfrm>
           <a:prstGeom prst="roundRect">
             <a:avLst>
-              <a:gd name="adj" fmla="val 9600"/>
+              <a:gd name="adj" fmla="val 24242"/>
+            </a:avLst>
+          </a:prstGeom>
+          <a:solidFill>
+            <a:srgbClr val="2F8A28"/>
+          </a:solidFill>
+          <a:ln w="12700">
+            <a:solidFill>
+              <a:srgbClr val="2F8A28"/>
+            </a:solidFill>
+            <a:prstDash val="solid"/>
+          </a:ln>
+        </p:spPr>
+      </p:sp>
+      <p:sp>
+        <p:nvSpPr>
+          <p:cNvPr id="20" name="Text 18"/>
+          <p:cNvSpPr/>
+          <p:nvPr/>
+        </p:nvSpPr>
+        <p:spPr>
+          <a:xfrm>
+            <a:off x="8964168" y="3273552"/>
+            <a:ext cx="816864" cy="146304"/>
+          </a:xfrm>
+          <a:prstGeom prst="rect">
+            <a:avLst/>
+          </a:prstGeom>
+          <a:noFill/>
+          <a:ln/>
+        </p:spPr>
+        <p:txBody>
+          <a:bodyPr wrap="square" lIns="0" tIns="0" rIns="0" bIns="0" rtlCol="0" anchor="ctr">
+            <a:normAutofit/>
+          </a:bodyPr>
+          <a:lstStyle/>
+          <a:p>
+            <a:pPr algn="ctr" indent="0" marL="0">
+              <a:buNone/>
+            </a:pPr>
+            <a:r>
+              <a:rPr lang="en-US" sz="880" b="1" dirty="0">
+                <a:solidFill>
+                  <a:srgbClr val="FFFFFF"/>
+                </a:solidFill>
+                <a:latin typeface="Aptos" pitchFamily="34" charset="0"/>
+                <a:ea typeface="Aptos" pitchFamily="34" charset="-122"/>
+                <a:cs typeface="Aptos" pitchFamily="34" charset="-120"/>
+              </a:rPr>
+              <a:t>Review</a:t>
+            </a:r>
+            <a:endParaRPr lang="en-US" sz="880" dirty="0"/>
+          </a:p>
+        </p:txBody>
+      </p:sp>
+      <p:sp>
+        <p:nvSpPr>
+          <p:cNvPr id="21" name="Shape 19"/>
+          <p:cNvSpPr/>
+          <p:nvPr/>
+        </p:nvSpPr>
+        <p:spPr>
+          <a:xfrm>
+            <a:off x="9982200" y="3200400"/>
+            <a:ext cx="890016" cy="301752"/>
+          </a:xfrm>
+          <a:prstGeom prst="roundRect">
+            <a:avLst>
+              <a:gd name="adj" fmla="val 24242"/>
+            </a:avLst>
+          </a:prstGeom>
+          <a:solidFill>
+            <a:srgbClr val="6A4CA3"/>
+          </a:solidFill>
+          <a:ln w="12700">
+            <a:solidFill>
+              <a:srgbClr val="6A4CA3"/>
+            </a:solidFill>
+            <a:prstDash val="solid"/>
+          </a:ln>
+        </p:spPr>
+      </p:sp>
+      <p:sp>
+        <p:nvSpPr>
+          <p:cNvPr id="22" name="Text 20"/>
+          <p:cNvSpPr/>
+          <p:nvPr/>
+        </p:nvSpPr>
+        <p:spPr>
+          <a:xfrm>
+            <a:off x="10018776" y="3273552"/>
+            <a:ext cx="816864" cy="146304"/>
+          </a:xfrm>
+          <a:prstGeom prst="rect">
+            <a:avLst/>
+          </a:prstGeom>
+          <a:noFill/>
+          <a:ln/>
+        </p:spPr>
+        <p:txBody>
+          <a:bodyPr wrap="square" lIns="0" tIns="0" rIns="0" bIns="0" rtlCol="0" anchor="ctr">
+            <a:normAutofit/>
+          </a:bodyPr>
+          <a:lstStyle/>
+          <a:p>
+            <a:pPr algn="ctr" indent="0" marL="0">
+              <a:buNone/>
+            </a:pPr>
+            <a:r>
+              <a:rPr lang="en-US" sz="880" b="1" dirty="0">
+                <a:solidFill>
+                  <a:srgbClr val="FFFFFF"/>
+                </a:solidFill>
+                <a:latin typeface="Aptos" pitchFamily="34" charset="0"/>
+                <a:ea typeface="Aptos" pitchFamily="34" charset="-122"/>
+                <a:cs typeface="Aptos" pitchFamily="34" charset="-120"/>
+              </a:rPr>
+              <a:t>Oversee</a:t>
+            </a:r>
+            <a:endParaRPr lang="en-US" sz="880" dirty="0"/>
+          </a:p>
+        </p:txBody>
+      </p:sp>
+      <p:sp>
+        <p:nvSpPr>
+          <p:cNvPr id="23" name="Text 21"/>
+          <p:cNvSpPr/>
+          <p:nvPr/>
+        </p:nvSpPr>
+        <p:spPr>
+          <a:xfrm>
+            <a:off x="7854696" y="3694176"/>
+            <a:ext cx="3035808" cy="206654"/>
+          </a:xfrm>
+          <a:prstGeom prst="rect">
+            <a:avLst/>
+          </a:prstGeom>
+          <a:noFill/>
+          <a:ln/>
+        </p:spPr>
+        <p:txBody>
+          <a:bodyPr wrap="square" lIns="254" tIns="254" rIns="254" bIns="254" rtlCol="0" anchor="t">
+            <a:normAutofit/>
+          </a:bodyPr>
+          <a:lstStyle/>
+          <a:p>
+            <a:pPr indent="0" marL="0">
+              <a:buNone/>
+            </a:pPr>
+            <a:r>
+              <a:rPr lang="en-US" sz="1120" dirty="0">
+                <a:solidFill>
+                  <a:srgbClr val="17364A"/>
+                </a:solidFill>
+                <a:latin typeface="Aptos" pitchFamily="34" charset="0"/>
+                <a:ea typeface="Aptos" pitchFamily="34" charset="-122"/>
+                <a:cs typeface="Aptos" pitchFamily="34" charset="-120"/>
+              </a:rPr>
+              <a:t>A proposed AI use should move through documented review before it becomes an operational workflow.</a:t>
+            </a:r>
+            <a:endParaRPr lang="en-US" sz="1120" dirty="0"/>
+          </a:p>
+        </p:txBody>
+      </p:sp>
+      <p:sp>
+        <p:nvSpPr>
+          <p:cNvPr id="24" name="Shape 22"/>
+          <p:cNvSpPr/>
+          <p:nvPr/>
+        </p:nvSpPr>
+        <p:spPr>
+          <a:xfrm>
+            <a:off x="7635240" y="4184294"/>
+            <a:ext cx="3474720" cy="1466698"/>
+          </a:xfrm>
+          <a:prstGeom prst="roundRect">
+            <a:avLst>
+              <a:gd name="adj" fmla="val 7481"/>
             </a:avLst>
           </a:prstGeom>
           <a:solidFill>
@@ -4515,13 +4731,13 @@
       </p:sp>
       <p:sp>
         <p:nvSpPr>
-          <p:cNvPr id="17" name="Text 15"/>
-          <p:cNvSpPr/>
-          <p:nvPr/>
-        </p:nvSpPr>
-        <p:spPr>
-          <a:xfrm>
-            <a:off x="7799832" y="4645152"/>
+          <p:cNvPr id="25" name="Text 23"/>
+          <p:cNvSpPr/>
+          <p:nvPr/>
+        </p:nvSpPr>
+        <p:spPr>
+          <a:xfrm>
+            <a:off x="7799832" y="4330598"/>
             <a:ext cx="3145536" cy="256032"/>
           </a:xfrm>
           <a:prstGeom prst="rect">
@@ -4554,14 +4770,14 @@
       </p:sp>
       <p:sp>
         <p:nvSpPr>
-          <p:cNvPr id="18" name="Text 16"/>
-          <p:cNvSpPr/>
-          <p:nvPr/>
-        </p:nvSpPr>
-        <p:spPr>
-          <a:xfrm>
-            <a:off x="7799832" y="4974336"/>
-            <a:ext cx="3145536" cy="576072"/>
+          <p:cNvPr id="26" name="Text 24"/>
+          <p:cNvSpPr/>
+          <p:nvPr/>
+        </p:nvSpPr>
+        <p:spPr>
+          <a:xfrm>
+            <a:off x="7799832" y="4659782"/>
+            <a:ext cx="3145536" cy="899770"/>
           </a:xfrm>
           <a:prstGeom prst="rect">
             <a:avLst/>
@@ -4587,7 +4803,7 @@
                 <a:ea typeface="Aptos" pitchFamily="34" charset="-122"/>
                 <a:cs typeface="Aptos" pitchFamily="34" charset="-120"/>
               </a:rPr>
-              <a:t>Translate this concept into clear decision rights, review steps, documentation expectations, and escalation paths before.</a:t>
+              <a:t>Translate this concept into clear decision rights, review steps, documentation expectations, and escalation paths before an AI-supported workflow is approved.</a:t>
             </a:r>
             <a:endParaRPr lang="en-US" sz="1320" dirty="0"/>
           </a:p>
@@ -4956,11 +5172,11 @@
         <p:spPr>
           <a:xfrm>
             <a:off x="7635240" y="1325880"/>
-            <a:ext cx="3474720" cy="1325880"/>
+            <a:ext cx="3474720" cy="1255471"/>
           </a:xfrm>
           <a:prstGeom prst="roundRect">
             <a:avLst>
-              <a:gd name="adj" fmla="val 8276"/>
+              <a:gd name="adj" fmla="val 8740"/>
             </a:avLst>
           </a:prstGeom>
           <a:solidFill>
@@ -5022,7 +5238,7 @@
         <p:spPr>
           <a:xfrm>
             <a:off x="7799832" y="1801368"/>
-            <a:ext cx="3145536" cy="758952"/>
+            <a:ext cx="3145536" cy="688543"/>
           </a:xfrm>
           <a:prstGeom prst="rect">
             <a:avLst/>
@@ -5062,12 +5278,12 @@
         </p:nvSpPr>
         <p:spPr>
           <a:xfrm>
-            <a:off x="7635240" y="2788920"/>
-            <a:ext cx="3474720" cy="1536192"/>
+            <a:off x="7635240" y="2718511"/>
+            <a:ext cx="3474720" cy="1328623"/>
           </a:xfrm>
           <a:prstGeom prst="roundRect">
             <a:avLst>
-              <a:gd name="adj" fmla="val 7143"/>
+              <a:gd name="adj" fmla="val 8259"/>
             </a:avLst>
           </a:prstGeom>
           <a:solidFill>
@@ -5089,8 +5305,8 @@
         </p:nvSpPr>
         <p:spPr>
           <a:xfrm>
-            <a:off x="7799832" y="2935224"/>
-            <a:ext cx="3145536" cy="256032"/>
+            <a:off x="7799832" y="2846527"/>
+            <a:ext cx="3145536" cy="237744"/>
           </a:xfrm>
           <a:prstGeom prst="rect">
             <a:avLst/>
@@ -5106,7 +5322,7 @@
               <a:buNone/>
             </a:pPr>
             <a:r>
-              <a:rPr lang="en-US" sz="1300" b="1" dirty="0">
+              <a:rPr lang="en-US" sz="1250" b="1" dirty="0">
                 <a:solidFill>
                   <a:srgbClr val="0068B7"/>
                 </a:solidFill>
@@ -5114,101 +5330,317 @@
                 <a:ea typeface="Aptos" pitchFamily="34" charset="-122"/>
                 <a:cs typeface="Aptos" pitchFamily="34" charset="-120"/>
               </a:rPr>
-              <a:t>Concept checkpoints</a:t>
-            </a:r>
-            <a:endParaRPr lang="en-US" sz="1300" dirty="0"/>
-          </a:p>
-        </p:txBody>
-      </p:sp>
-      <p:sp>
-        <p:nvSpPr>
-          <p:cNvPr id="15" name="Text 13"/>
-          <p:cNvSpPr/>
-          <p:nvPr/>
-        </p:nvSpPr>
-        <p:spPr>
-          <a:xfrm>
-            <a:off x="7818120" y="3300984"/>
-            <a:ext cx="3090672" cy="877824"/>
-          </a:xfrm>
-          <a:prstGeom prst="rect">
-            <a:avLst/>
-          </a:prstGeom>
-          <a:noFill/>
-          <a:ln/>
-        </p:spPr>
-        <p:txBody>
-          <a:bodyPr wrap="square" lIns="508" tIns="508" rIns="508" bIns="508" rtlCol="0" anchor="t">
+              <a:t>Governance pathway</a:t>
+            </a:r>
+            <a:endParaRPr lang="en-US" sz="1250" dirty="0"/>
+          </a:p>
+        </p:txBody>
+      </p:sp>
+      <p:sp>
+        <p:nvSpPr>
+          <p:cNvPr id="15" name="Shape 13"/>
+          <p:cNvSpPr/>
+          <p:nvPr/>
+        </p:nvSpPr>
+        <p:spPr>
+          <a:xfrm>
+            <a:off x="8763000" y="3399739"/>
+            <a:ext cx="164592" cy="0"/>
+          </a:xfrm>
+          <a:prstGeom prst="line">
+            <a:avLst/>
+          </a:prstGeom>
+          <a:noFill/>
+          <a:ln w="15240">
+            <a:solidFill>
+              <a:srgbClr val="8ABBD8"/>
+            </a:solidFill>
+            <a:prstDash val="solid"/>
+          </a:ln>
+        </p:spPr>
+      </p:sp>
+      <p:sp>
+        <p:nvSpPr>
+          <p:cNvPr id="16" name="Shape 14"/>
+          <p:cNvSpPr/>
+          <p:nvPr/>
+        </p:nvSpPr>
+        <p:spPr>
+          <a:xfrm>
+            <a:off x="7872984" y="3248863"/>
+            <a:ext cx="890016" cy="301752"/>
+          </a:xfrm>
+          <a:prstGeom prst="roundRect">
+            <a:avLst>
+              <a:gd name="adj" fmla="val 24242"/>
+            </a:avLst>
+          </a:prstGeom>
+          <a:solidFill>
+            <a:srgbClr val="0068B7"/>
+          </a:solidFill>
+          <a:ln w="12700">
+            <a:solidFill>
+              <a:srgbClr val="0068B7"/>
+            </a:solidFill>
+            <a:prstDash val="solid"/>
+          </a:ln>
+        </p:spPr>
+      </p:sp>
+      <p:sp>
+        <p:nvSpPr>
+          <p:cNvPr id="17" name="Text 15"/>
+          <p:cNvSpPr/>
+          <p:nvPr/>
+        </p:nvSpPr>
+        <p:spPr>
+          <a:xfrm>
+            <a:off x="7909560" y="3322015"/>
+            <a:ext cx="816864" cy="146304"/>
+          </a:xfrm>
+          <a:prstGeom prst="rect">
+            <a:avLst/>
+          </a:prstGeom>
+          <a:noFill/>
+          <a:ln/>
+        </p:spPr>
+        <p:txBody>
+          <a:bodyPr wrap="square" lIns="0" tIns="0" rIns="0" bIns="0" rtlCol="0" anchor="ctr">
             <a:normAutofit/>
           </a:bodyPr>
           <a:lstStyle/>
           <a:p>
-            <a:pPr indent="0" marL="0">
-              <a:buNone/>
-            </a:pPr>
-            <a:r>
-              <a:rPr lang="en-US" sz="1220" dirty="0">
-                <a:solidFill>
-                  <a:srgbClr val="17364A"/>
-                </a:solidFill>
-                <a:latin typeface="Aptos" pitchFamily="34" charset="0"/>
-                <a:ea typeface="Aptos" pitchFamily="34" charset="-122"/>
-                <a:cs typeface="Aptos" pitchFamily="34" charset="-120"/>
-              </a:rPr>
-              <a:t>Public health agencies make decisions that affect people,.</a:t>
-            </a:r>
-            <a:endParaRPr lang="en-US" sz="1220" dirty="0"/>
-          </a:p>
-          <a:p>
-            <a:pPr indent="0" marL="0">
-              <a:buNone/>
-            </a:pPr>
-            <a:r>
-              <a:rPr lang="en-US" sz="1220" dirty="0">
-                <a:solidFill>
-                  <a:srgbClr val="17364A"/>
-                </a:solidFill>
-                <a:latin typeface="Aptos" pitchFamily="34" charset="0"/>
-                <a:ea typeface="Aptos" pitchFamily="34" charset="-122"/>
-                <a:cs typeface="Aptos" pitchFamily="34" charset="-120"/>
-              </a:rPr>
-              <a:t>An AI tool may produce a convincing but incorrect summary, expose.</a:t>
-            </a:r>
-            <a:endParaRPr lang="en-US" sz="1220" dirty="0"/>
-          </a:p>
-          <a:p>
-            <a:pPr indent="0" marL="0">
-              <a:buNone/>
-            </a:pPr>
-            <a:r>
-              <a:rPr lang="en-US" sz="1220" dirty="0">
-                <a:solidFill>
-                  <a:srgbClr val="17364A"/>
-                </a:solidFill>
-                <a:latin typeface="Aptos" pitchFamily="34" charset="0"/>
-                <a:ea typeface="Aptos" pitchFamily="34" charset="-122"/>
-                <a:cs typeface="Aptos" pitchFamily="34" charset="-120"/>
-              </a:rPr>
-              <a:t>Governance creates a way to identify these risks before they.</a:t>
-            </a:r>
-            <a:endParaRPr lang="en-US" sz="1220" dirty="0"/>
-          </a:p>
-        </p:txBody>
-      </p:sp>
-      <p:sp>
-        <p:nvSpPr>
-          <p:cNvPr id="16" name="Shape 14"/>
-          <p:cNvSpPr/>
-          <p:nvPr/>
-        </p:nvSpPr>
-        <p:spPr>
-          <a:xfrm>
-            <a:off x="7635240" y="4498848"/>
-            <a:ext cx="3474720" cy="1143000"/>
+            <a:pPr algn="ctr" indent="0" marL="0">
+              <a:buNone/>
+            </a:pPr>
+            <a:r>
+              <a:rPr lang="en-US" sz="880" b="1" dirty="0">
+                <a:solidFill>
+                  <a:srgbClr val="FFFFFF"/>
+                </a:solidFill>
+                <a:latin typeface="Aptos" pitchFamily="34" charset="0"/>
+                <a:ea typeface="Aptos" pitchFamily="34" charset="-122"/>
+                <a:cs typeface="Aptos" pitchFamily="34" charset="-120"/>
+              </a:rPr>
+              <a:t>Submit</a:t>
+            </a:r>
+            <a:endParaRPr lang="en-US" sz="880" dirty="0"/>
+          </a:p>
+        </p:txBody>
+      </p:sp>
+      <p:sp>
+        <p:nvSpPr>
+          <p:cNvPr id="18" name="Shape 16"/>
+          <p:cNvSpPr/>
+          <p:nvPr/>
+        </p:nvSpPr>
+        <p:spPr>
+          <a:xfrm>
+            <a:off x="9817608" y="3399739"/>
+            <a:ext cx="164592" cy="0"/>
+          </a:xfrm>
+          <a:prstGeom prst="line">
+            <a:avLst/>
+          </a:prstGeom>
+          <a:noFill/>
+          <a:ln w="15240">
+            <a:solidFill>
+              <a:srgbClr val="8ABBD8"/>
+            </a:solidFill>
+            <a:prstDash val="solid"/>
+          </a:ln>
+        </p:spPr>
+      </p:sp>
+      <p:sp>
+        <p:nvSpPr>
+          <p:cNvPr id="19" name="Shape 17"/>
+          <p:cNvSpPr/>
+          <p:nvPr/>
+        </p:nvSpPr>
+        <p:spPr>
+          <a:xfrm>
+            <a:off x="8927592" y="3248863"/>
+            <a:ext cx="890016" cy="301752"/>
           </a:xfrm>
           <a:prstGeom prst="roundRect">
             <a:avLst>
-              <a:gd name="adj" fmla="val 9600"/>
+              <a:gd name="adj" fmla="val 24242"/>
+            </a:avLst>
+          </a:prstGeom>
+          <a:solidFill>
+            <a:srgbClr val="2F8A28"/>
+          </a:solidFill>
+          <a:ln w="12700">
+            <a:solidFill>
+              <a:srgbClr val="2F8A28"/>
+            </a:solidFill>
+            <a:prstDash val="solid"/>
+          </a:ln>
+        </p:spPr>
+      </p:sp>
+      <p:sp>
+        <p:nvSpPr>
+          <p:cNvPr id="20" name="Text 18"/>
+          <p:cNvSpPr/>
+          <p:nvPr/>
+        </p:nvSpPr>
+        <p:spPr>
+          <a:xfrm>
+            <a:off x="8964168" y="3322015"/>
+            <a:ext cx="816864" cy="146304"/>
+          </a:xfrm>
+          <a:prstGeom prst="rect">
+            <a:avLst/>
+          </a:prstGeom>
+          <a:noFill/>
+          <a:ln/>
+        </p:spPr>
+        <p:txBody>
+          <a:bodyPr wrap="square" lIns="0" tIns="0" rIns="0" bIns="0" rtlCol="0" anchor="ctr">
+            <a:normAutofit/>
+          </a:bodyPr>
+          <a:lstStyle/>
+          <a:p>
+            <a:pPr algn="ctr" indent="0" marL="0">
+              <a:buNone/>
+            </a:pPr>
+            <a:r>
+              <a:rPr lang="en-US" sz="880" b="1" dirty="0">
+                <a:solidFill>
+                  <a:srgbClr val="FFFFFF"/>
+                </a:solidFill>
+                <a:latin typeface="Aptos" pitchFamily="34" charset="0"/>
+                <a:ea typeface="Aptos" pitchFamily="34" charset="-122"/>
+                <a:cs typeface="Aptos" pitchFamily="34" charset="-120"/>
+              </a:rPr>
+              <a:t>Review</a:t>
+            </a:r>
+            <a:endParaRPr lang="en-US" sz="880" dirty="0"/>
+          </a:p>
+        </p:txBody>
+      </p:sp>
+      <p:sp>
+        <p:nvSpPr>
+          <p:cNvPr id="21" name="Shape 19"/>
+          <p:cNvSpPr/>
+          <p:nvPr/>
+        </p:nvSpPr>
+        <p:spPr>
+          <a:xfrm>
+            <a:off x="9982200" y="3248863"/>
+            <a:ext cx="890016" cy="301752"/>
+          </a:xfrm>
+          <a:prstGeom prst="roundRect">
+            <a:avLst>
+              <a:gd name="adj" fmla="val 24242"/>
+            </a:avLst>
+          </a:prstGeom>
+          <a:solidFill>
+            <a:srgbClr val="6A4CA3"/>
+          </a:solidFill>
+          <a:ln w="12700">
+            <a:solidFill>
+              <a:srgbClr val="6A4CA3"/>
+            </a:solidFill>
+            <a:prstDash val="solid"/>
+          </a:ln>
+        </p:spPr>
+      </p:sp>
+      <p:sp>
+        <p:nvSpPr>
+          <p:cNvPr id="22" name="Text 20"/>
+          <p:cNvSpPr/>
+          <p:nvPr/>
+        </p:nvSpPr>
+        <p:spPr>
+          <a:xfrm>
+            <a:off x="10018776" y="3322015"/>
+            <a:ext cx="816864" cy="146304"/>
+          </a:xfrm>
+          <a:prstGeom prst="rect">
+            <a:avLst/>
+          </a:prstGeom>
+          <a:noFill/>
+          <a:ln/>
+        </p:spPr>
+        <p:txBody>
+          <a:bodyPr wrap="square" lIns="0" tIns="0" rIns="0" bIns="0" rtlCol="0" anchor="ctr">
+            <a:normAutofit/>
+          </a:bodyPr>
+          <a:lstStyle/>
+          <a:p>
+            <a:pPr algn="ctr" indent="0" marL="0">
+              <a:buNone/>
+            </a:pPr>
+            <a:r>
+              <a:rPr lang="en-US" sz="880" b="1" dirty="0">
+                <a:solidFill>
+                  <a:srgbClr val="FFFFFF"/>
+                </a:solidFill>
+                <a:latin typeface="Aptos" pitchFamily="34" charset="0"/>
+                <a:ea typeface="Aptos" pitchFamily="34" charset="-122"/>
+                <a:cs typeface="Aptos" pitchFamily="34" charset="-120"/>
+              </a:rPr>
+              <a:t>Oversee</a:t>
+            </a:r>
+            <a:endParaRPr lang="en-US" sz="880" dirty="0"/>
+          </a:p>
+        </p:txBody>
+      </p:sp>
+      <p:sp>
+        <p:nvSpPr>
+          <p:cNvPr id="23" name="Text 21"/>
+          <p:cNvSpPr/>
+          <p:nvPr/>
+        </p:nvSpPr>
+        <p:spPr>
+          <a:xfrm>
+            <a:off x="7854696" y="3742639"/>
+            <a:ext cx="3035808" cy="158191"/>
+          </a:xfrm>
+          <a:prstGeom prst="rect">
+            <a:avLst/>
+          </a:prstGeom>
+          <a:noFill/>
+          <a:ln/>
+        </p:spPr>
+        <p:txBody>
+          <a:bodyPr wrap="square" lIns="254" tIns="254" rIns="254" bIns="254" rtlCol="0" anchor="t">
+            <a:normAutofit/>
+          </a:bodyPr>
+          <a:lstStyle/>
+          <a:p>
+            <a:pPr indent="0" marL="0">
+              <a:buNone/>
+            </a:pPr>
+            <a:r>
+              <a:rPr lang="en-US" sz="1120" dirty="0">
+                <a:solidFill>
+                  <a:srgbClr val="17364A"/>
+                </a:solidFill>
+                <a:latin typeface="Aptos" pitchFamily="34" charset="0"/>
+                <a:ea typeface="Aptos" pitchFamily="34" charset="-122"/>
+                <a:cs typeface="Aptos" pitchFamily="34" charset="-120"/>
+              </a:rPr>
+              <a:t>A proposed AI use should move through documented review before it becomes an operational workflow.</a:t>
+            </a:r>
+            <a:endParaRPr lang="en-US" sz="1120" dirty="0"/>
+          </a:p>
+        </p:txBody>
+      </p:sp>
+      <p:sp>
+        <p:nvSpPr>
+          <p:cNvPr id="24" name="Shape 22"/>
+          <p:cNvSpPr/>
+          <p:nvPr/>
+        </p:nvSpPr>
+        <p:spPr>
+          <a:xfrm>
+            <a:off x="7635240" y="4184294"/>
+            <a:ext cx="3474720" cy="1466698"/>
+          </a:xfrm>
+          <a:prstGeom prst="roundRect">
+            <a:avLst>
+              <a:gd name="adj" fmla="val 7481"/>
             </a:avLst>
           </a:prstGeom>
           <a:solidFill>
@@ -5224,13 +5656,13 @@
       </p:sp>
       <p:sp>
         <p:nvSpPr>
-          <p:cNvPr id="17" name="Text 15"/>
-          <p:cNvSpPr/>
-          <p:nvPr/>
-        </p:nvSpPr>
-        <p:spPr>
-          <a:xfrm>
-            <a:off x="7799832" y="4645152"/>
+          <p:cNvPr id="25" name="Text 23"/>
+          <p:cNvSpPr/>
+          <p:nvPr/>
+        </p:nvSpPr>
+        <p:spPr>
+          <a:xfrm>
+            <a:off x="7799832" y="4330598"/>
             <a:ext cx="3145536" cy="256032"/>
           </a:xfrm>
           <a:prstGeom prst="rect">
@@ -5263,14 +5695,14 @@
       </p:sp>
       <p:sp>
         <p:nvSpPr>
-          <p:cNvPr id="18" name="Text 16"/>
-          <p:cNvSpPr/>
-          <p:nvPr/>
-        </p:nvSpPr>
-        <p:spPr>
-          <a:xfrm>
-            <a:off x="7799832" y="4974336"/>
-            <a:ext cx="3145536" cy="576072"/>
+          <p:cNvPr id="26" name="Text 24"/>
+          <p:cNvSpPr/>
+          <p:nvPr/>
+        </p:nvSpPr>
+        <p:spPr>
+          <a:xfrm>
+            <a:off x="7799832" y="4659782"/>
+            <a:ext cx="3145536" cy="899770"/>
           </a:xfrm>
           <a:prstGeom prst="rect">
             <a:avLst/>
@@ -5296,7 +5728,7 @@
                 <a:ea typeface="Aptos" pitchFamily="34" charset="-122"/>
                 <a:cs typeface="Aptos" pitchFamily="34" charset="-120"/>
               </a:rPr>
-              <a:t>Translate this concept into clear decision rights, review steps, documentation expectations, and escalation paths before.</a:t>
+              <a:t>Translate this concept into clear decision rights, review steps, documentation expectations, and escalation paths before an AI-supported workflow is approved.</a:t>
             </a:r>
             <a:endParaRPr lang="en-US" sz="1320" dirty="0"/>
           </a:p>
@@ -5665,11 +6097,11 @@
         <p:spPr>
           <a:xfrm>
             <a:off x="7635240" y="1325880"/>
-            <a:ext cx="3474720" cy="1325880"/>
+            <a:ext cx="3474720" cy="1207008"/>
           </a:xfrm>
           <a:prstGeom prst="roundRect">
             <a:avLst>
-              <a:gd name="adj" fmla="val 8276"/>
+              <a:gd name="adj" fmla="val 9091"/>
             </a:avLst>
           </a:prstGeom>
           <a:solidFill>
@@ -5731,7 +6163,7 @@
         <p:spPr>
           <a:xfrm>
             <a:off x="7799832" y="1801368"/>
-            <a:ext cx="3145536" cy="758952"/>
+            <a:ext cx="3145536" cy="640080"/>
           </a:xfrm>
           <a:prstGeom prst="rect">
             <a:avLst/>
@@ -5757,7 +6189,7 @@
                 <a:ea typeface="Aptos" pitchFamily="34" charset="-122"/>
                 <a:cs typeface="Aptos" pitchFamily="34" charset="-120"/>
               </a:rPr>
-              <a:t>For public health, governance must connect technology decisions to mission and authority.</a:t>
+              <a:t>For public health, governance must connect technology decisions to mission and.</a:t>
             </a:r>
             <a:endParaRPr lang="en-US" sz="1320" dirty="0"/>
           </a:p>
@@ -5771,12 +6203,12 @@
         </p:nvSpPr>
         <p:spPr>
           <a:xfrm>
-            <a:off x="7635240" y="2788920"/>
-            <a:ext cx="3474720" cy="1536192"/>
+            <a:off x="7635240" y="2670048"/>
+            <a:ext cx="3474720" cy="1377086"/>
           </a:xfrm>
           <a:prstGeom prst="roundRect">
             <a:avLst>
-              <a:gd name="adj" fmla="val 7143"/>
+              <a:gd name="adj" fmla="val 7968"/>
             </a:avLst>
           </a:prstGeom>
           <a:solidFill>
@@ -5798,7 +6230,7 @@
         </p:nvSpPr>
         <p:spPr>
           <a:xfrm>
-            <a:off x="7799832" y="2935224"/>
+            <a:off x="7799832" y="2816352"/>
             <a:ext cx="3145536" cy="256032"/>
           </a:xfrm>
           <a:prstGeom prst="rect">
@@ -5837,8 +6269,8 @@
         </p:nvSpPr>
         <p:spPr>
           <a:xfrm>
-            <a:off x="7818120" y="3300984"/>
-            <a:ext cx="3090672" cy="877824"/>
+            <a:off x="7818120" y="3182112"/>
+            <a:ext cx="3090672" cy="718718"/>
           </a:xfrm>
           <a:prstGeom prst="rect">
             <a:avLst/>
@@ -5912,12 +6344,12 @@
         </p:nvSpPr>
         <p:spPr>
           <a:xfrm>
-            <a:off x="7635240" y="4498848"/>
-            <a:ext cx="3474720" cy="1143000"/>
+            <a:off x="7635240" y="4184294"/>
+            <a:ext cx="3474720" cy="1466698"/>
           </a:xfrm>
           <a:prstGeom prst="roundRect">
             <a:avLst>
-              <a:gd name="adj" fmla="val 9600"/>
+              <a:gd name="adj" fmla="val 7481"/>
             </a:avLst>
           </a:prstGeom>
           <a:solidFill>
@@ -5939,7 +6371,7 @@
         </p:nvSpPr>
         <p:spPr>
           <a:xfrm>
-            <a:off x="7799832" y="4645152"/>
+            <a:off x="7799832" y="4330598"/>
             <a:ext cx="3145536" cy="256032"/>
           </a:xfrm>
           <a:prstGeom prst="rect">
@@ -5978,8 +6410,8 @@
         </p:nvSpPr>
         <p:spPr>
           <a:xfrm>
-            <a:off x="7799832" y="4974336"/>
-            <a:ext cx="3145536" cy="576072"/>
+            <a:off x="7799832" y="4659782"/>
+            <a:ext cx="3145536" cy="899770"/>
           </a:xfrm>
           <a:prstGeom prst="rect">
             <a:avLst/>
@@ -6005,7 +6437,7 @@
                 <a:ea typeface="Aptos" pitchFamily="34" charset="-122"/>
                 <a:cs typeface="Aptos" pitchFamily="34" charset="-120"/>
               </a:rPr>
-              <a:t>Translate this concept into clear decision rights, review steps, documentation expectations, and escalation paths before.</a:t>
+              <a:t>Translate this concept into clear decision rights, review steps, documentation expectations, and escalation paths before an AI-supported workflow is approved.</a:t>
             </a:r>
             <a:endParaRPr lang="en-US" sz="1320" dirty="0"/>
           </a:p>
@@ -6374,11 +6806,11 @@
         <p:spPr>
           <a:xfrm>
             <a:off x="7635240" y="1325880"/>
-            <a:ext cx="3474720" cy="1325880"/>
+            <a:ext cx="3474720" cy="1255471"/>
           </a:xfrm>
           <a:prstGeom prst="roundRect">
             <a:avLst>
-              <a:gd name="adj" fmla="val 8276"/>
+              <a:gd name="adj" fmla="val 8740"/>
             </a:avLst>
           </a:prstGeom>
           <a:solidFill>
@@ -6440,7 +6872,7 @@
         <p:spPr>
           <a:xfrm>
             <a:off x="7799832" y="1801368"/>
-            <a:ext cx="3145536" cy="758952"/>
+            <a:ext cx="3145536" cy="688543"/>
           </a:xfrm>
           <a:prstGeom prst="rect">
             <a:avLst/>
@@ -6480,12 +6912,12 @@
         </p:nvSpPr>
         <p:spPr>
           <a:xfrm>
-            <a:off x="7635240" y="2788920"/>
-            <a:ext cx="3474720" cy="1536192"/>
+            <a:off x="7635240" y="2718511"/>
+            <a:ext cx="3474720" cy="1328623"/>
           </a:xfrm>
           <a:prstGeom prst="roundRect">
             <a:avLst>
-              <a:gd name="adj" fmla="val 7143"/>
+              <a:gd name="adj" fmla="val 8259"/>
             </a:avLst>
           </a:prstGeom>
           <a:solidFill>
@@ -6507,7 +6939,7 @@
         </p:nvSpPr>
         <p:spPr>
           <a:xfrm>
-            <a:off x="7799832" y="2935224"/>
+            <a:off x="7799832" y="2864815"/>
             <a:ext cx="3145536" cy="256032"/>
           </a:xfrm>
           <a:prstGeom prst="rect">
@@ -6546,8 +6978,8 @@
         </p:nvSpPr>
         <p:spPr>
           <a:xfrm>
-            <a:off x="7818120" y="3300984"/>
-            <a:ext cx="3090672" cy="877824"/>
+            <a:off x="7818120" y="3230575"/>
+            <a:ext cx="3090672" cy="670255"/>
           </a:xfrm>
           <a:prstGeom prst="rect">
             <a:avLst/>
@@ -6621,12 +7053,12 @@
         </p:nvSpPr>
         <p:spPr>
           <a:xfrm>
-            <a:off x="7635240" y="4498848"/>
-            <a:ext cx="3474720" cy="1143000"/>
+            <a:off x="7635240" y="4184294"/>
+            <a:ext cx="3474720" cy="1466698"/>
           </a:xfrm>
           <a:prstGeom prst="roundRect">
             <a:avLst>
-              <a:gd name="adj" fmla="val 9600"/>
+              <a:gd name="adj" fmla="val 7481"/>
             </a:avLst>
           </a:prstGeom>
           <a:solidFill>
@@ -6648,7 +7080,7 @@
         </p:nvSpPr>
         <p:spPr>
           <a:xfrm>
-            <a:off x="7799832" y="4645152"/>
+            <a:off x="7799832" y="4330598"/>
             <a:ext cx="3145536" cy="256032"/>
           </a:xfrm>
           <a:prstGeom prst="rect">
@@ -6687,8 +7119,8 @@
         </p:nvSpPr>
         <p:spPr>
           <a:xfrm>
-            <a:off x="7799832" y="4974336"/>
-            <a:ext cx="3145536" cy="576072"/>
+            <a:off x="7799832" y="4659782"/>
+            <a:ext cx="3145536" cy="899770"/>
           </a:xfrm>
           <a:prstGeom prst="rect">
             <a:avLst/>
@@ -6714,7 +7146,7 @@
                 <a:ea typeface="Aptos" pitchFamily="34" charset="-122"/>
                 <a:cs typeface="Aptos" pitchFamily="34" charset="-120"/>
               </a:rPr>
-              <a:t>Translate this concept into clear decision rights, review steps, documentation expectations, and escalation paths before.</a:t>
+              <a:t>Translate this concept into clear decision rights, review steps, documentation expectations, and escalation paths before an AI-supported workflow is approved.</a:t>
             </a:r>
             <a:endParaRPr lang="en-US" sz="1320" dirty="0"/>
           </a:p>
@@ -7083,11 +7515,11 @@
         <p:spPr>
           <a:xfrm>
             <a:off x="7635240" y="1325880"/>
-            <a:ext cx="3474720" cy="1325880"/>
+            <a:ext cx="3474720" cy="1207008"/>
           </a:xfrm>
           <a:prstGeom prst="roundRect">
             <a:avLst>
-              <a:gd name="adj" fmla="val 8276"/>
+              <a:gd name="adj" fmla="val 9091"/>
             </a:avLst>
           </a:prstGeom>
           <a:solidFill>
@@ -7149,7 +7581,7 @@
         <p:spPr>
           <a:xfrm>
             <a:off x="7799832" y="1801368"/>
-            <a:ext cx="3145536" cy="758952"/>
+            <a:ext cx="3145536" cy="640080"/>
           </a:xfrm>
           <a:prstGeom prst="rect">
             <a:avLst/>
@@ -7189,12 +7621,12 @@
         </p:nvSpPr>
         <p:spPr>
           <a:xfrm>
-            <a:off x="7635240" y="2788920"/>
-            <a:ext cx="3474720" cy="1536192"/>
+            <a:off x="7635240" y="2670048"/>
+            <a:ext cx="3474720" cy="1377086"/>
           </a:xfrm>
           <a:prstGeom prst="roundRect">
             <a:avLst>
-              <a:gd name="adj" fmla="val 7143"/>
+              <a:gd name="adj" fmla="val 7968"/>
             </a:avLst>
           </a:prstGeom>
           <a:solidFill>
@@ -7216,7 +7648,7 @@
         </p:nvSpPr>
         <p:spPr>
           <a:xfrm>
-            <a:off x="7799832" y="2935224"/>
+            <a:off x="7799832" y="2816352"/>
             <a:ext cx="3145536" cy="256032"/>
           </a:xfrm>
           <a:prstGeom prst="rect">
@@ -7255,8 +7687,8 @@
         </p:nvSpPr>
         <p:spPr>
           <a:xfrm>
-            <a:off x="7818120" y="3300984"/>
-            <a:ext cx="3090672" cy="877824"/>
+            <a:off x="7818120" y="3182112"/>
+            <a:ext cx="3090672" cy="718718"/>
           </a:xfrm>
           <a:prstGeom prst="rect">
             <a:avLst/>
@@ -7330,12 +7762,12 @@
         </p:nvSpPr>
         <p:spPr>
           <a:xfrm>
-            <a:off x="7635240" y="4498848"/>
-            <a:ext cx="3474720" cy="1143000"/>
+            <a:off x="7635240" y="4184294"/>
+            <a:ext cx="3474720" cy="1466698"/>
           </a:xfrm>
           <a:prstGeom prst="roundRect">
             <a:avLst>
-              <a:gd name="adj" fmla="val 9600"/>
+              <a:gd name="adj" fmla="val 7481"/>
             </a:avLst>
           </a:prstGeom>
           <a:solidFill>
@@ -7357,7 +7789,7 @@
         </p:nvSpPr>
         <p:spPr>
           <a:xfrm>
-            <a:off x="7799832" y="4645152"/>
+            <a:off x="7799832" y="4330598"/>
             <a:ext cx="3145536" cy="256032"/>
           </a:xfrm>
           <a:prstGeom prst="rect">
@@ -7396,8 +7828,8 @@
         </p:nvSpPr>
         <p:spPr>
           <a:xfrm>
-            <a:off x="7799832" y="4974336"/>
-            <a:ext cx="3145536" cy="576072"/>
+            <a:off x="7799832" y="4659782"/>
+            <a:ext cx="3145536" cy="899770"/>
           </a:xfrm>
           <a:prstGeom prst="rect">
             <a:avLst/>
@@ -7423,7 +7855,7 @@
                 <a:ea typeface="Aptos" pitchFamily="34" charset="-122"/>
                 <a:cs typeface="Aptos" pitchFamily="34" charset="-120"/>
               </a:rPr>
-              <a:t>Translate this concept into clear decision rights, review steps, documentation expectations, and escalation paths before.</a:t>
+              <a:t>Translate this concept into clear decision rights, review steps, documentation expectations, and escalation paths before an AI-supported workflow is approved.</a:t>
             </a:r>
             <a:endParaRPr lang="en-US" sz="1320" dirty="0"/>
           </a:p>
@@ -7792,11 +8224,11 @@
         <p:spPr>
           <a:xfrm>
             <a:off x="7635240" y="1325880"/>
-            <a:ext cx="3474720" cy="1325880"/>
+            <a:ext cx="3474720" cy="1255471"/>
           </a:xfrm>
           <a:prstGeom prst="roundRect">
             <a:avLst>
-              <a:gd name="adj" fmla="val 8276"/>
+              <a:gd name="adj" fmla="val 8740"/>
             </a:avLst>
           </a:prstGeom>
           <a:solidFill>
@@ -7858,7 +8290,7 @@
         <p:spPr>
           <a:xfrm>
             <a:off x="7799832" y="1801368"/>
-            <a:ext cx="3145536" cy="758952"/>
+            <a:ext cx="3145536" cy="688543"/>
           </a:xfrm>
           <a:prstGeom prst="rect">
             <a:avLst/>
@@ -7898,12 +8330,12 @@
         </p:nvSpPr>
         <p:spPr>
           <a:xfrm>
-            <a:off x="7635240" y="2788920"/>
-            <a:ext cx="3474720" cy="1536192"/>
+            <a:off x="7635240" y="2718511"/>
+            <a:ext cx="3474720" cy="1328623"/>
           </a:xfrm>
           <a:prstGeom prst="roundRect">
             <a:avLst>
-              <a:gd name="adj" fmla="val 7143"/>
+              <a:gd name="adj" fmla="val 8259"/>
             </a:avLst>
           </a:prstGeom>
           <a:solidFill>
@@ -7925,7 +8357,7 @@
         </p:nvSpPr>
         <p:spPr>
           <a:xfrm>
-            <a:off x="7799832" y="2935224"/>
+            <a:off x="7799832" y="2864815"/>
             <a:ext cx="3145536" cy="256032"/>
           </a:xfrm>
           <a:prstGeom prst="rect">
@@ -7964,8 +8396,8 @@
         </p:nvSpPr>
         <p:spPr>
           <a:xfrm>
-            <a:off x="7818120" y="3300984"/>
-            <a:ext cx="3090672" cy="877824"/>
+            <a:off x="7818120" y="3230575"/>
+            <a:ext cx="3090672" cy="670255"/>
           </a:xfrm>
           <a:prstGeom prst="rect">
             <a:avLst/>
@@ -8039,12 +8471,12 @@
         </p:nvSpPr>
         <p:spPr>
           <a:xfrm>
-            <a:off x="7635240" y="4498848"/>
-            <a:ext cx="3474720" cy="1143000"/>
+            <a:off x="7635240" y="4184294"/>
+            <a:ext cx="3474720" cy="1466698"/>
           </a:xfrm>
           <a:prstGeom prst="roundRect">
             <a:avLst>
-              <a:gd name="adj" fmla="val 9600"/>
+              <a:gd name="adj" fmla="val 7481"/>
             </a:avLst>
           </a:prstGeom>
           <a:solidFill>
@@ -8066,7 +8498,7 @@
         </p:nvSpPr>
         <p:spPr>
           <a:xfrm>
-            <a:off x="7799832" y="4645152"/>
+            <a:off x="7799832" y="4330598"/>
             <a:ext cx="3145536" cy="256032"/>
           </a:xfrm>
           <a:prstGeom prst="rect">
@@ -8105,8 +8537,8 @@
         </p:nvSpPr>
         <p:spPr>
           <a:xfrm>
-            <a:off x="7799832" y="4974336"/>
-            <a:ext cx="3145536" cy="576072"/>
+            <a:off x="7799832" y="4659782"/>
+            <a:ext cx="3145536" cy="899770"/>
           </a:xfrm>
           <a:prstGeom prst="rect">
             <a:avLst/>
@@ -8132,7 +8564,7 @@
                 <a:ea typeface="Aptos" pitchFamily="34" charset="-122"/>
                 <a:cs typeface="Aptos" pitchFamily="34" charset="-120"/>
               </a:rPr>
-              <a:t>Translate this concept into clear decision rights, review steps, documentation expectations, and escalation paths before.</a:t>
+              <a:t>Translate this concept into clear decision rights, review steps, documentation expectations, and escalation paths before an AI-supported workflow is approved.</a:t>
             </a:r>
             <a:endParaRPr lang="en-US" sz="1320" dirty="0"/>
           </a:p>
@@ -8501,11 +8933,11 @@
         <p:spPr>
           <a:xfrm>
             <a:off x="7635240" y="1325880"/>
-            <a:ext cx="3474720" cy="1325880"/>
+            <a:ext cx="3474720" cy="1207008"/>
           </a:xfrm>
           <a:prstGeom prst="roundRect">
             <a:avLst>
-              <a:gd name="adj" fmla="val 8276"/>
+              <a:gd name="adj" fmla="val 9091"/>
             </a:avLst>
           </a:prstGeom>
           <a:solidFill>
@@ -8567,7 +8999,7 @@
         <p:spPr>
           <a:xfrm>
             <a:off x="7799832" y="1801368"/>
-            <a:ext cx="3145536" cy="758952"/>
+            <a:ext cx="3145536" cy="640080"/>
           </a:xfrm>
           <a:prstGeom prst="rect">
             <a:avLst/>
@@ -8607,12 +9039,12 @@
         </p:nvSpPr>
         <p:spPr>
           <a:xfrm>
-            <a:off x="7635240" y="2788920"/>
-            <a:ext cx="3474720" cy="1536192"/>
+            <a:off x="7635240" y="2670048"/>
+            <a:ext cx="3474720" cy="1377086"/>
           </a:xfrm>
           <a:prstGeom prst="roundRect">
             <a:avLst>
-              <a:gd name="adj" fmla="val 7143"/>
+              <a:gd name="adj" fmla="val 7968"/>
             </a:avLst>
           </a:prstGeom>
           <a:solidFill>
@@ -8634,7 +9066,7 @@
         </p:nvSpPr>
         <p:spPr>
           <a:xfrm>
-            <a:off x="7799832" y="2935224"/>
+            <a:off x="7799832" y="2816352"/>
             <a:ext cx="3145536" cy="256032"/>
           </a:xfrm>
           <a:prstGeom prst="rect">
@@ -8673,8 +9105,8 @@
         </p:nvSpPr>
         <p:spPr>
           <a:xfrm>
-            <a:off x="7818120" y="3300984"/>
-            <a:ext cx="3090672" cy="877824"/>
+            <a:off x="7818120" y="3182112"/>
+            <a:ext cx="3090672" cy="718718"/>
           </a:xfrm>
           <a:prstGeom prst="rect">
             <a:avLst/>
@@ -8748,12 +9180,12 @@
         </p:nvSpPr>
         <p:spPr>
           <a:xfrm>
-            <a:off x="7635240" y="4498848"/>
-            <a:ext cx="3474720" cy="1143000"/>
+            <a:off x="7635240" y="4184294"/>
+            <a:ext cx="3474720" cy="1466698"/>
           </a:xfrm>
           <a:prstGeom prst="roundRect">
             <a:avLst>
-              <a:gd name="adj" fmla="val 9600"/>
+              <a:gd name="adj" fmla="val 7481"/>
             </a:avLst>
           </a:prstGeom>
           <a:solidFill>
@@ -8775,7 +9207,7 @@
         </p:nvSpPr>
         <p:spPr>
           <a:xfrm>
-            <a:off x="7799832" y="4645152"/>
+            <a:off x="7799832" y="4330598"/>
             <a:ext cx="3145536" cy="256032"/>
           </a:xfrm>
           <a:prstGeom prst="rect">
@@ -8814,8 +9246,8 @@
         </p:nvSpPr>
         <p:spPr>
           <a:xfrm>
-            <a:off x="7799832" y="4974336"/>
-            <a:ext cx="3145536" cy="576072"/>
+            <a:off x="7799832" y="4659782"/>
+            <a:ext cx="3145536" cy="899770"/>
           </a:xfrm>
           <a:prstGeom prst="rect">
             <a:avLst/>
@@ -8841,7 +9273,7 @@
                 <a:ea typeface="Aptos" pitchFamily="34" charset="-122"/>
                 <a:cs typeface="Aptos" pitchFamily="34" charset="-120"/>
               </a:rPr>
-              <a:t>Translate this concept into clear decision rights, review steps, documentation expectations, and escalation paths before.</a:t>
+              <a:t>Translate this concept into clear decision rights, review steps, documentation expectations, and escalation paths before an AI-supported workflow is approved.</a:t>
             </a:r>
             <a:endParaRPr lang="en-US" sz="1320" dirty="0"/>
           </a:p>
@@ -9210,11 +9642,11 @@
         <p:spPr>
           <a:xfrm>
             <a:off x="7635240" y="1325880"/>
-            <a:ext cx="3474720" cy="1325880"/>
+            <a:ext cx="3474720" cy="1207008"/>
           </a:xfrm>
           <a:prstGeom prst="roundRect">
             <a:avLst>
-              <a:gd name="adj" fmla="val 8276"/>
+              <a:gd name="adj" fmla="val 9091"/>
             </a:avLst>
           </a:prstGeom>
           <a:solidFill>
@@ -9276,7 +9708,7 @@
         <p:spPr>
           <a:xfrm>
             <a:off x="7799832" y="1801368"/>
-            <a:ext cx="3145536" cy="758952"/>
+            <a:ext cx="3145536" cy="640080"/>
           </a:xfrm>
           <a:prstGeom prst="rect">
             <a:avLst/>
@@ -9316,12 +9748,12 @@
         </p:nvSpPr>
         <p:spPr>
           <a:xfrm>
-            <a:off x="7635240" y="2788920"/>
-            <a:ext cx="3474720" cy="1536192"/>
+            <a:off x="7635240" y="2670048"/>
+            <a:ext cx="3474720" cy="1377086"/>
           </a:xfrm>
           <a:prstGeom prst="roundRect">
             <a:avLst>
-              <a:gd name="adj" fmla="val 7143"/>
+              <a:gd name="adj" fmla="val 7968"/>
             </a:avLst>
           </a:prstGeom>
           <a:solidFill>
@@ -9343,7 +9775,7 @@
         </p:nvSpPr>
         <p:spPr>
           <a:xfrm>
-            <a:off x="7799832" y="2935224"/>
+            <a:off x="7799832" y="2816352"/>
             <a:ext cx="3145536" cy="256032"/>
           </a:xfrm>
           <a:prstGeom prst="rect">
@@ -9382,8 +9814,8 @@
         </p:nvSpPr>
         <p:spPr>
           <a:xfrm>
-            <a:off x="7818120" y="3300984"/>
-            <a:ext cx="3090672" cy="877824"/>
+            <a:off x="7818120" y="3182112"/>
+            <a:ext cx="3090672" cy="718718"/>
           </a:xfrm>
           <a:prstGeom prst="rect">
             <a:avLst/>
@@ -9457,12 +9889,12 @@
         </p:nvSpPr>
         <p:spPr>
           <a:xfrm>
-            <a:off x="7635240" y="4498848"/>
-            <a:ext cx="3474720" cy="1143000"/>
+            <a:off x="7635240" y="4184294"/>
+            <a:ext cx="3474720" cy="1466698"/>
           </a:xfrm>
           <a:prstGeom prst="roundRect">
             <a:avLst>
-              <a:gd name="adj" fmla="val 9600"/>
+              <a:gd name="adj" fmla="val 7481"/>
             </a:avLst>
           </a:prstGeom>
           <a:solidFill>
@@ -9484,7 +9916,7 @@
         </p:nvSpPr>
         <p:spPr>
           <a:xfrm>
-            <a:off x="7799832" y="4645152"/>
+            <a:off x="7799832" y="4330598"/>
             <a:ext cx="3145536" cy="256032"/>
           </a:xfrm>
           <a:prstGeom prst="rect">
@@ -9523,8 +9955,8 @@
         </p:nvSpPr>
         <p:spPr>
           <a:xfrm>
-            <a:off x="7799832" y="4974336"/>
-            <a:ext cx="3145536" cy="576072"/>
+            <a:off x="7799832" y="4659782"/>
+            <a:ext cx="3145536" cy="899770"/>
           </a:xfrm>
           <a:prstGeom prst="rect">
             <a:avLst/>
@@ -9550,7 +9982,7 @@
                 <a:ea typeface="Aptos" pitchFamily="34" charset="-122"/>
                 <a:cs typeface="Aptos" pitchFamily="34" charset="-120"/>
               </a:rPr>
-              <a:t>Translate this concept into clear decision rights, review steps, documentation expectations, and escalation paths before.</a:t>
+              <a:t>Translate this concept into clear decision rights, review steps, documentation expectations, and escalation paths before an AI-supported workflow is approved.</a:t>
             </a:r>
             <a:endParaRPr lang="en-US" sz="1320" dirty="0"/>
           </a:p>
@@ -9919,11 +10351,11 @@
         <p:spPr>
           <a:xfrm>
             <a:off x="7635240" y="1325880"/>
-            <a:ext cx="3474720" cy="1325880"/>
+            <a:ext cx="3474720" cy="1207008"/>
           </a:xfrm>
           <a:prstGeom prst="roundRect">
             <a:avLst>
-              <a:gd name="adj" fmla="val 8276"/>
+              <a:gd name="adj" fmla="val 9091"/>
             </a:avLst>
           </a:prstGeom>
           <a:solidFill>
@@ -9985,7 +10417,7 @@
         <p:spPr>
           <a:xfrm>
             <a:off x="7799832" y="1801368"/>
-            <a:ext cx="3145536" cy="758952"/>
+            <a:ext cx="3145536" cy="640080"/>
           </a:xfrm>
           <a:prstGeom prst="rect">
             <a:avLst/>
@@ -10025,12 +10457,12 @@
         </p:nvSpPr>
         <p:spPr>
           <a:xfrm>
-            <a:off x="7635240" y="2788920"/>
-            <a:ext cx="3474720" cy="1536192"/>
+            <a:off x="7635240" y="2670048"/>
+            <a:ext cx="3474720" cy="1377086"/>
           </a:xfrm>
           <a:prstGeom prst="roundRect">
             <a:avLst>
-              <a:gd name="adj" fmla="val 7143"/>
+              <a:gd name="adj" fmla="val 7968"/>
             </a:avLst>
           </a:prstGeom>
           <a:solidFill>
@@ -10052,7 +10484,7 @@
         </p:nvSpPr>
         <p:spPr>
           <a:xfrm>
-            <a:off x="7799832" y="2935224"/>
+            <a:off x="7799832" y="2816352"/>
             <a:ext cx="3145536" cy="256032"/>
           </a:xfrm>
           <a:prstGeom prst="rect">
@@ -10091,8 +10523,8 @@
         </p:nvSpPr>
         <p:spPr>
           <a:xfrm>
-            <a:off x="7818120" y="3300984"/>
-            <a:ext cx="3090672" cy="877824"/>
+            <a:off x="7818120" y="3182112"/>
+            <a:ext cx="3090672" cy="718718"/>
           </a:xfrm>
           <a:prstGeom prst="rect">
             <a:avLst/>
@@ -10166,12 +10598,12 @@
         </p:nvSpPr>
         <p:spPr>
           <a:xfrm>
-            <a:off x="7635240" y="4498848"/>
-            <a:ext cx="3474720" cy="1143000"/>
+            <a:off x="7635240" y="4184294"/>
+            <a:ext cx="3474720" cy="1466698"/>
           </a:xfrm>
           <a:prstGeom prst="roundRect">
             <a:avLst>
-              <a:gd name="adj" fmla="val 9600"/>
+              <a:gd name="adj" fmla="val 7481"/>
             </a:avLst>
           </a:prstGeom>
           <a:solidFill>
@@ -10193,7 +10625,7 @@
         </p:nvSpPr>
         <p:spPr>
           <a:xfrm>
-            <a:off x="7799832" y="4645152"/>
+            <a:off x="7799832" y="4330598"/>
             <a:ext cx="3145536" cy="256032"/>
           </a:xfrm>
           <a:prstGeom prst="rect">
@@ -10232,8 +10664,8 @@
         </p:nvSpPr>
         <p:spPr>
           <a:xfrm>
-            <a:off x="7799832" y="4974336"/>
-            <a:ext cx="3145536" cy="576072"/>
+            <a:off x="7799832" y="4659782"/>
+            <a:ext cx="3145536" cy="899770"/>
           </a:xfrm>
           <a:prstGeom prst="rect">
             <a:avLst/>
@@ -10259,7 +10691,7 @@
                 <a:ea typeface="Aptos" pitchFamily="34" charset="-122"/>
                 <a:cs typeface="Aptos" pitchFamily="34" charset="-120"/>
               </a:rPr>
-              <a:t>Translate this concept into clear decision rights, review steps, documentation expectations, and escalation paths before.</a:t>
+              <a:t>Translate this concept into clear decision rights, review steps, documentation expectations, and escalation paths before an AI-supported workflow is approved.</a:t>
             </a:r>
             <a:endParaRPr lang="en-US" sz="1320" dirty="0"/>
           </a:p>
@@ -10628,11 +11060,11 @@
         <p:spPr>
           <a:xfrm>
             <a:off x="7635240" y="1325880"/>
-            <a:ext cx="3474720" cy="1325880"/>
+            <a:ext cx="3474720" cy="1207008"/>
           </a:xfrm>
           <a:prstGeom prst="roundRect">
             <a:avLst>
-              <a:gd name="adj" fmla="val 8276"/>
+              <a:gd name="adj" fmla="val 9091"/>
             </a:avLst>
           </a:prstGeom>
           <a:solidFill>
@@ -10694,7 +11126,7 @@
         <p:spPr>
           <a:xfrm>
             <a:off x="7799832" y="1801368"/>
-            <a:ext cx="3145536" cy="758952"/>
+            <a:ext cx="3145536" cy="640080"/>
           </a:xfrm>
           <a:prstGeom prst="rect">
             <a:avLst/>
@@ -10734,12 +11166,12 @@
         </p:nvSpPr>
         <p:spPr>
           <a:xfrm>
-            <a:off x="7635240" y="2788920"/>
-            <a:ext cx="3474720" cy="1536192"/>
+            <a:off x="7635240" y="2670048"/>
+            <a:ext cx="3474720" cy="1377086"/>
           </a:xfrm>
           <a:prstGeom prst="roundRect">
             <a:avLst>
-              <a:gd name="adj" fmla="val 7143"/>
+              <a:gd name="adj" fmla="val 7968"/>
             </a:avLst>
           </a:prstGeom>
           <a:solidFill>
@@ -10761,7 +11193,7 @@
         </p:nvSpPr>
         <p:spPr>
           <a:xfrm>
-            <a:off x="7799832" y="2935224"/>
+            <a:off x="7799832" y="2816352"/>
             <a:ext cx="3145536" cy="256032"/>
           </a:xfrm>
           <a:prstGeom prst="rect">
@@ -10800,8 +11232,8 @@
         </p:nvSpPr>
         <p:spPr>
           <a:xfrm>
-            <a:off x="7818120" y="3300984"/>
-            <a:ext cx="3090672" cy="877824"/>
+            <a:off x="7818120" y="3182112"/>
+            <a:ext cx="3090672" cy="718718"/>
           </a:xfrm>
           <a:prstGeom prst="rect">
             <a:avLst/>
@@ -10875,12 +11307,12 @@
         </p:nvSpPr>
         <p:spPr>
           <a:xfrm>
-            <a:off x="7635240" y="4498848"/>
-            <a:ext cx="3474720" cy="1143000"/>
+            <a:off x="7635240" y="4184294"/>
+            <a:ext cx="3474720" cy="1466698"/>
           </a:xfrm>
           <a:prstGeom prst="roundRect">
             <a:avLst>
-              <a:gd name="adj" fmla="val 9600"/>
+              <a:gd name="adj" fmla="val 7481"/>
             </a:avLst>
           </a:prstGeom>
           <a:solidFill>
@@ -10902,7 +11334,7 @@
         </p:nvSpPr>
         <p:spPr>
           <a:xfrm>
-            <a:off x="7799832" y="4645152"/>
+            <a:off x="7799832" y="4330598"/>
             <a:ext cx="3145536" cy="256032"/>
           </a:xfrm>
           <a:prstGeom prst="rect">
@@ -10941,8 +11373,8 @@
         </p:nvSpPr>
         <p:spPr>
           <a:xfrm>
-            <a:off x="7799832" y="4974336"/>
-            <a:ext cx="3145536" cy="576072"/>
+            <a:off x="7799832" y="4659782"/>
+            <a:ext cx="3145536" cy="899770"/>
           </a:xfrm>
           <a:prstGeom prst="rect">
             <a:avLst/>
@@ -10968,7 +11400,7 @@
                 <a:ea typeface="Aptos" pitchFamily="34" charset="-122"/>
                 <a:cs typeface="Aptos" pitchFamily="34" charset="-120"/>
               </a:rPr>
-              <a:t>Translate this concept into clear decision rights, review steps, documentation expectations, and escalation paths before.</a:t>
+              <a:t>Translate this concept into clear decision rights, review steps, documentation expectations, and escalation paths before an AI-supported workflow is approved.</a:t>
             </a:r>
             <a:endParaRPr lang="en-US" sz="1320" dirty="0"/>
           </a:p>
@@ -11429,7 +11861,7 @@
                 <a:ea typeface="Aptos" pitchFamily="34" charset="-122"/>
                 <a:cs typeface="Aptos" pitchFamily="34" charset="-120"/>
               </a:rPr>
-              <a:t>Level: introductory Primary track: Governance and Security Track Appears in tracks: shared-foundational,.</a:t>
+              <a:t>Level: introductory Primary track: Governance and Security Track Appears in tracks: shared-foundational, governance-security</a:t>
             </a:r>
             <a:endParaRPr lang="en-US" sz="1320" dirty="0"/>
           </a:p>
@@ -11939,11 +12371,11 @@
         <p:spPr>
           <a:xfrm>
             <a:off x="7635240" y="1325880"/>
-            <a:ext cx="3474720" cy="1325880"/>
+            <a:ext cx="3474720" cy="1207008"/>
           </a:xfrm>
           <a:prstGeom prst="roundRect">
             <a:avLst>
-              <a:gd name="adj" fmla="val 8276"/>
+              <a:gd name="adj" fmla="val 9091"/>
             </a:avLst>
           </a:prstGeom>
           <a:solidFill>
@@ -12005,7 +12437,7 @@
         <p:spPr>
           <a:xfrm>
             <a:off x="7799832" y="1801368"/>
-            <a:ext cx="3145536" cy="758952"/>
+            <a:ext cx="3145536" cy="640080"/>
           </a:xfrm>
           <a:prstGeom prst="rect">
             <a:avLst/>
@@ -12045,12 +12477,12 @@
         </p:nvSpPr>
         <p:spPr>
           <a:xfrm>
-            <a:off x="7635240" y="2788920"/>
-            <a:ext cx="3474720" cy="1536192"/>
+            <a:off x="7635240" y="2670048"/>
+            <a:ext cx="3474720" cy="1377086"/>
           </a:xfrm>
           <a:prstGeom prst="roundRect">
             <a:avLst>
-              <a:gd name="adj" fmla="val 7143"/>
+              <a:gd name="adj" fmla="val 7968"/>
             </a:avLst>
           </a:prstGeom>
           <a:solidFill>
@@ -12072,7 +12504,7 @@
         </p:nvSpPr>
         <p:spPr>
           <a:xfrm>
-            <a:off x="7799832" y="2935224"/>
+            <a:off x="7799832" y="2816352"/>
             <a:ext cx="3145536" cy="256032"/>
           </a:xfrm>
           <a:prstGeom prst="rect">
@@ -12111,8 +12543,8 @@
         </p:nvSpPr>
         <p:spPr>
           <a:xfrm>
-            <a:off x="7818120" y="3300984"/>
-            <a:ext cx="3090672" cy="877824"/>
+            <a:off x="7818120" y="3182112"/>
+            <a:ext cx="3090672" cy="718718"/>
           </a:xfrm>
           <a:prstGeom prst="rect">
             <a:avLst/>
@@ -12186,12 +12618,12 @@
         </p:nvSpPr>
         <p:spPr>
           <a:xfrm>
-            <a:off x="7635240" y="4498848"/>
-            <a:ext cx="3474720" cy="1143000"/>
+            <a:off x="7635240" y="4184294"/>
+            <a:ext cx="3474720" cy="1466698"/>
           </a:xfrm>
           <a:prstGeom prst="roundRect">
             <a:avLst>
-              <a:gd name="adj" fmla="val 9600"/>
+              <a:gd name="adj" fmla="val 7481"/>
             </a:avLst>
           </a:prstGeom>
           <a:solidFill>
@@ -12213,7 +12645,7 @@
         </p:nvSpPr>
         <p:spPr>
           <a:xfrm>
-            <a:off x="7799832" y="4645152"/>
+            <a:off x="7799832" y="4330598"/>
             <a:ext cx="3145536" cy="256032"/>
           </a:xfrm>
           <a:prstGeom prst="rect">
@@ -12252,8 +12684,8 @@
         </p:nvSpPr>
         <p:spPr>
           <a:xfrm>
-            <a:off x="7799832" y="4974336"/>
-            <a:ext cx="3145536" cy="576072"/>
+            <a:off x="7799832" y="4659782"/>
+            <a:ext cx="3145536" cy="899770"/>
           </a:xfrm>
           <a:prstGeom prst="rect">
             <a:avLst/>
@@ -12279,7 +12711,7 @@
                 <a:ea typeface="Aptos" pitchFamily="34" charset="-122"/>
                 <a:cs typeface="Aptos" pitchFamily="34" charset="-120"/>
               </a:rPr>
-              <a:t>Translate this concept into clear decision rights, review steps, documentation expectations, and escalation paths before.</a:t>
+              <a:t>Translate this concept into clear decision rights, review steps, documentation expectations, and escalation paths before an AI-supported workflow is approved.</a:t>
             </a:r>
             <a:endParaRPr lang="en-US" sz="1320" dirty="0"/>
           </a:p>
@@ -12648,11 +13080,11 @@
         <p:spPr>
           <a:xfrm>
             <a:off x="7635240" y="1325880"/>
-            <a:ext cx="3474720" cy="1325880"/>
+            <a:ext cx="3474720" cy="1207008"/>
           </a:xfrm>
           <a:prstGeom prst="roundRect">
             <a:avLst>
-              <a:gd name="adj" fmla="val 8276"/>
+              <a:gd name="adj" fmla="val 9091"/>
             </a:avLst>
           </a:prstGeom>
           <a:solidFill>
@@ -12714,7 +13146,7 @@
         <p:spPr>
           <a:xfrm>
             <a:off x="7799832" y="1801368"/>
-            <a:ext cx="3145536" cy="758952"/>
+            <a:ext cx="3145536" cy="640080"/>
           </a:xfrm>
           <a:prstGeom prst="rect">
             <a:avLst/>
@@ -12740,7 +13172,7 @@
                 <a:ea typeface="Aptos" pitchFamily="34" charset="-122"/>
                 <a:cs typeface="Aptos" pitchFamily="34" charset="-120"/>
               </a:rPr>
-              <a:t>In AI-supported workflows, governance should be visible at the points where work changes.</a:t>
+              <a:t>In AI-supported workflows, governance should be visible at the points where work.</a:t>
             </a:r>
             <a:endParaRPr lang="en-US" sz="1320" dirty="0"/>
           </a:p>
@@ -12754,12 +13186,12 @@
         </p:nvSpPr>
         <p:spPr>
           <a:xfrm>
-            <a:off x="7635240" y="2788920"/>
-            <a:ext cx="3474720" cy="1536192"/>
+            <a:off x="7635240" y="2670048"/>
+            <a:ext cx="3474720" cy="1377086"/>
           </a:xfrm>
           <a:prstGeom prst="roundRect">
             <a:avLst>
-              <a:gd name="adj" fmla="val 7143"/>
+              <a:gd name="adj" fmla="val 7968"/>
             </a:avLst>
           </a:prstGeom>
           <a:solidFill>
@@ -12781,7 +13213,7 @@
         </p:nvSpPr>
         <p:spPr>
           <a:xfrm>
-            <a:off x="7799832" y="2935224"/>
+            <a:off x="7799832" y="2816352"/>
             <a:ext cx="3145536" cy="256032"/>
           </a:xfrm>
           <a:prstGeom prst="rect">
@@ -12820,8 +13252,8 @@
         </p:nvSpPr>
         <p:spPr>
           <a:xfrm>
-            <a:off x="7818120" y="3300984"/>
-            <a:ext cx="3090672" cy="877824"/>
+            <a:off x="7818120" y="3182112"/>
+            <a:ext cx="3090672" cy="718718"/>
           </a:xfrm>
           <a:prstGeom prst="rect">
             <a:avLst/>
@@ -12895,12 +13327,12 @@
         </p:nvSpPr>
         <p:spPr>
           <a:xfrm>
-            <a:off x="7635240" y="4498848"/>
-            <a:ext cx="3474720" cy="1143000"/>
+            <a:off x="7635240" y="4184294"/>
+            <a:ext cx="3474720" cy="1466698"/>
           </a:xfrm>
           <a:prstGeom prst="roundRect">
             <a:avLst>
-              <a:gd name="adj" fmla="val 9600"/>
+              <a:gd name="adj" fmla="val 7481"/>
             </a:avLst>
           </a:prstGeom>
           <a:solidFill>
@@ -12922,7 +13354,7 @@
         </p:nvSpPr>
         <p:spPr>
           <a:xfrm>
-            <a:off x="7799832" y="4645152"/>
+            <a:off x="7799832" y="4330598"/>
             <a:ext cx="3145536" cy="256032"/>
           </a:xfrm>
           <a:prstGeom prst="rect">
@@ -12961,8 +13393,8 @@
         </p:nvSpPr>
         <p:spPr>
           <a:xfrm>
-            <a:off x="7799832" y="4974336"/>
-            <a:ext cx="3145536" cy="576072"/>
+            <a:off x="7799832" y="4659782"/>
+            <a:ext cx="3145536" cy="899770"/>
           </a:xfrm>
           <a:prstGeom prst="rect">
             <a:avLst/>
@@ -12988,7 +13420,7 @@
                 <a:ea typeface="Aptos" pitchFamily="34" charset="-122"/>
                 <a:cs typeface="Aptos" pitchFamily="34" charset="-120"/>
               </a:rPr>
-              <a:t>Translate this concept into clear decision rights, review steps, documentation expectations, and escalation paths before.</a:t>
+              <a:t>Translate this concept into clear decision rights, review steps, documentation expectations, and escalation paths before an AI-supported workflow is approved.</a:t>
             </a:r>
             <a:endParaRPr lang="en-US" sz="1320" dirty="0"/>
           </a:p>
@@ -13357,11 +13789,11 @@
         <p:spPr>
           <a:xfrm>
             <a:off x="7635240" y="1325880"/>
-            <a:ext cx="3474720" cy="1325880"/>
+            <a:ext cx="3474720" cy="1255471"/>
           </a:xfrm>
           <a:prstGeom prst="roundRect">
             <a:avLst>
-              <a:gd name="adj" fmla="val 8276"/>
+              <a:gd name="adj" fmla="val 8740"/>
             </a:avLst>
           </a:prstGeom>
           <a:solidFill>
@@ -13423,7 +13855,7 @@
         <p:spPr>
           <a:xfrm>
             <a:off x="7799832" y="1801368"/>
-            <a:ext cx="3145536" cy="758952"/>
+            <a:ext cx="3145536" cy="688543"/>
           </a:xfrm>
           <a:prstGeom prst="rect">
             <a:avLst/>
@@ -13463,12 +13895,12 @@
         </p:nvSpPr>
         <p:spPr>
           <a:xfrm>
-            <a:off x="7635240" y="2788920"/>
-            <a:ext cx="3474720" cy="1536192"/>
+            <a:off x="7635240" y="2718511"/>
+            <a:ext cx="3474720" cy="1328623"/>
           </a:xfrm>
           <a:prstGeom prst="roundRect">
             <a:avLst>
-              <a:gd name="adj" fmla="val 7143"/>
+              <a:gd name="adj" fmla="val 8259"/>
             </a:avLst>
           </a:prstGeom>
           <a:solidFill>
@@ -13490,7 +13922,7 @@
         </p:nvSpPr>
         <p:spPr>
           <a:xfrm>
-            <a:off x="7799832" y="2935224"/>
+            <a:off x="7799832" y="2864815"/>
             <a:ext cx="3145536" cy="256032"/>
           </a:xfrm>
           <a:prstGeom prst="rect">
@@ -13529,8 +13961,8 @@
         </p:nvSpPr>
         <p:spPr>
           <a:xfrm>
-            <a:off x="7818120" y="3300984"/>
-            <a:ext cx="3090672" cy="877824"/>
+            <a:off x="7818120" y="3230575"/>
+            <a:ext cx="3090672" cy="670255"/>
           </a:xfrm>
           <a:prstGeom prst="rect">
             <a:avLst/>
@@ -13604,12 +14036,12 @@
         </p:nvSpPr>
         <p:spPr>
           <a:xfrm>
-            <a:off x="7635240" y="4498848"/>
-            <a:ext cx="3474720" cy="1143000"/>
+            <a:off x="7635240" y="4184294"/>
+            <a:ext cx="3474720" cy="1466698"/>
           </a:xfrm>
           <a:prstGeom prst="roundRect">
             <a:avLst>
-              <a:gd name="adj" fmla="val 9600"/>
+              <a:gd name="adj" fmla="val 7481"/>
             </a:avLst>
           </a:prstGeom>
           <a:solidFill>
@@ -13631,7 +14063,7 @@
         </p:nvSpPr>
         <p:spPr>
           <a:xfrm>
-            <a:off x="7799832" y="4645152"/>
+            <a:off x="7799832" y="4330598"/>
             <a:ext cx="3145536" cy="256032"/>
           </a:xfrm>
           <a:prstGeom prst="rect">
@@ -13670,8 +14102,8 @@
         </p:nvSpPr>
         <p:spPr>
           <a:xfrm>
-            <a:off x="7799832" y="4974336"/>
-            <a:ext cx="3145536" cy="576072"/>
+            <a:off x="7799832" y="4659782"/>
+            <a:ext cx="3145536" cy="899770"/>
           </a:xfrm>
           <a:prstGeom prst="rect">
             <a:avLst/>
@@ -13697,7 +14129,7 @@
                 <a:ea typeface="Aptos" pitchFamily="34" charset="-122"/>
                 <a:cs typeface="Aptos" pitchFamily="34" charset="-120"/>
               </a:rPr>
-              <a:t>Translate this concept into clear decision rights, review steps, documentation expectations, and escalation paths before.</a:t>
+              <a:t>Translate this concept into clear decision rights, review steps, documentation expectations, and escalation paths before an AI-supported workflow is approved.</a:t>
             </a:r>
             <a:endParaRPr lang="en-US" sz="1320" dirty="0"/>
           </a:p>
@@ -14066,11 +14498,11 @@
         <p:spPr>
           <a:xfrm>
             <a:off x="7635240" y="1325880"/>
-            <a:ext cx="3474720" cy="1325880"/>
+            <a:ext cx="3474720" cy="1255471"/>
           </a:xfrm>
           <a:prstGeom prst="roundRect">
             <a:avLst>
-              <a:gd name="adj" fmla="val 8276"/>
+              <a:gd name="adj" fmla="val 8740"/>
             </a:avLst>
           </a:prstGeom>
           <a:solidFill>
@@ -14132,7 +14564,7 @@
         <p:spPr>
           <a:xfrm>
             <a:off x="7799832" y="1801368"/>
-            <a:ext cx="3145536" cy="758952"/>
+            <a:ext cx="3145536" cy="688543"/>
           </a:xfrm>
           <a:prstGeom prst="rect">
             <a:avLst/>
@@ -14172,12 +14604,12 @@
         </p:nvSpPr>
         <p:spPr>
           <a:xfrm>
-            <a:off x="7635240" y="2788920"/>
-            <a:ext cx="3474720" cy="1536192"/>
+            <a:off x="7635240" y="2718511"/>
+            <a:ext cx="3474720" cy="1328623"/>
           </a:xfrm>
           <a:prstGeom prst="roundRect">
             <a:avLst>
-              <a:gd name="adj" fmla="val 7143"/>
+              <a:gd name="adj" fmla="val 8259"/>
             </a:avLst>
           </a:prstGeom>
           <a:solidFill>
@@ -14199,7 +14631,7 @@
         </p:nvSpPr>
         <p:spPr>
           <a:xfrm>
-            <a:off x="7799832" y="2935224"/>
+            <a:off x="7799832" y="2864815"/>
             <a:ext cx="3145536" cy="256032"/>
           </a:xfrm>
           <a:prstGeom prst="rect">
@@ -14238,8 +14670,8 @@
         </p:nvSpPr>
         <p:spPr>
           <a:xfrm>
-            <a:off x="7818120" y="3300984"/>
-            <a:ext cx="3090672" cy="877824"/>
+            <a:off x="7818120" y="3230575"/>
+            <a:ext cx="3090672" cy="670255"/>
           </a:xfrm>
           <a:prstGeom prst="rect">
             <a:avLst/>
@@ -14313,12 +14745,12 @@
         </p:nvSpPr>
         <p:spPr>
           <a:xfrm>
-            <a:off x="7635240" y="4498848"/>
-            <a:ext cx="3474720" cy="1143000"/>
+            <a:off x="7635240" y="4184294"/>
+            <a:ext cx="3474720" cy="1466698"/>
           </a:xfrm>
           <a:prstGeom prst="roundRect">
             <a:avLst>
-              <a:gd name="adj" fmla="val 9600"/>
+              <a:gd name="adj" fmla="val 7481"/>
             </a:avLst>
           </a:prstGeom>
           <a:solidFill>
@@ -14340,7 +14772,7 @@
         </p:nvSpPr>
         <p:spPr>
           <a:xfrm>
-            <a:off x="7799832" y="4645152"/>
+            <a:off x="7799832" y="4330598"/>
             <a:ext cx="3145536" cy="256032"/>
           </a:xfrm>
           <a:prstGeom prst="rect">
@@ -14379,8 +14811,8 @@
         </p:nvSpPr>
         <p:spPr>
           <a:xfrm>
-            <a:off x="7799832" y="4974336"/>
-            <a:ext cx="3145536" cy="576072"/>
+            <a:off x="7799832" y="4659782"/>
+            <a:ext cx="3145536" cy="899770"/>
           </a:xfrm>
           <a:prstGeom prst="rect">
             <a:avLst/>
@@ -14406,7 +14838,7 @@
                 <a:ea typeface="Aptos" pitchFamily="34" charset="-122"/>
                 <a:cs typeface="Aptos" pitchFamily="34" charset="-120"/>
               </a:rPr>
-              <a:t>Translate this concept into clear decision rights, review steps, documentation expectations, and escalation paths before.</a:t>
+              <a:t>Translate this concept into clear decision rights, review steps, documentation expectations, and escalation paths before an AI-supported workflow is approved.</a:t>
             </a:r>
             <a:endParaRPr lang="en-US" sz="1320" dirty="0"/>
           </a:p>
@@ -14758,11 +15190,11 @@
         <p:spPr>
           <a:xfrm>
             <a:off x="7635240" y="1325880"/>
-            <a:ext cx="3474720" cy="1325880"/>
+            <a:ext cx="3474720" cy="1255471"/>
           </a:xfrm>
           <a:prstGeom prst="roundRect">
             <a:avLst>
-              <a:gd name="adj" fmla="val 8276"/>
+              <a:gd name="adj" fmla="val 8740"/>
             </a:avLst>
           </a:prstGeom>
           <a:solidFill>
@@ -14824,7 +15256,7 @@
         <p:spPr>
           <a:xfrm>
             <a:off x="7799832" y="1801368"/>
-            <a:ext cx="3145536" cy="758952"/>
+            <a:ext cx="3145536" cy="688543"/>
           </a:xfrm>
           <a:prstGeom prst="rect">
             <a:avLst/>
@@ -14864,12 +15296,12 @@
         </p:nvSpPr>
         <p:spPr>
           <a:xfrm>
-            <a:off x="7635240" y="2788920"/>
-            <a:ext cx="3474720" cy="1536192"/>
+            <a:off x="7635240" y="2718511"/>
+            <a:ext cx="3474720" cy="1328623"/>
           </a:xfrm>
           <a:prstGeom prst="roundRect">
             <a:avLst>
-              <a:gd name="adj" fmla="val 7143"/>
+              <a:gd name="adj" fmla="val 8259"/>
             </a:avLst>
           </a:prstGeom>
           <a:solidFill>
@@ -14891,7 +15323,7 @@
         </p:nvSpPr>
         <p:spPr>
           <a:xfrm>
-            <a:off x="7799832" y="2935224"/>
+            <a:off x="7799832" y="2864815"/>
             <a:ext cx="3145536" cy="256032"/>
           </a:xfrm>
           <a:prstGeom prst="rect">
@@ -14930,8 +15362,8 @@
         </p:nvSpPr>
         <p:spPr>
           <a:xfrm>
-            <a:off x="7818120" y="3300984"/>
-            <a:ext cx="3090672" cy="877824"/>
+            <a:off x="7818120" y="3230575"/>
+            <a:ext cx="3090672" cy="670255"/>
           </a:xfrm>
           <a:prstGeom prst="rect">
             <a:avLst/>
@@ -14988,12 +15420,12 @@
         </p:nvSpPr>
         <p:spPr>
           <a:xfrm>
-            <a:off x="7635240" y="4498848"/>
-            <a:ext cx="3474720" cy="1143000"/>
+            <a:off x="7635240" y="4184294"/>
+            <a:ext cx="3474720" cy="1466698"/>
           </a:xfrm>
           <a:prstGeom prst="roundRect">
             <a:avLst>
-              <a:gd name="adj" fmla="val 9600"/>
+              <a:gd name="adj" fmla="val 7481"/>
             </a:avLst>
           </a:prstGeom>
           <a:solidFill>
@@ -15015,7 +15447,7 @@
         </p:nvSpPr>
         <p:spPr>
           <a:xfrm>
-            <a:off x="7799832" y="4645152"/>
+            <a:off x="7799832" y="4330598"/>
             <a:ext cx="3145536" cy="256032"/>
           </a:xfrm>
           <a:prstGeom prst="rect">
@@ -15054,8 +15486,8 @@
         </p:nvSpPr>
         <p:spPr>
           <a:xfrm>
-            <a:off x="7799832" y="4974336"/>
-            <a:ext cx="3145536" cy="576072"/>
+            <a:off x="7799832" y="4659782"/>
+            <a:ext cx="3145536" cy="899770"/>
           </a:xfrm>
           <a:prstGeom prst="rect">
             <a:avLst/>
@@ -15081,7 +15513,7 @@
                 <a:ea typeface="Aptos" pitchFamily="34" charset="-122"/>
                 <a:cs typeface="Aptos" pitchFamily="34" charset="-120"/>
               </a:rPr>
-              <a:t>Translate this concept into clear decision rights, review steps, documentation expectations, and escalation paths before.</a:t>
+              <a:t>Translate this concept into clear decision rights, review steps, documentation expectations, and escalation paths before an AI-supported workflow is approved.</a:t>
             </a:r>
             <a:endParaRPr lang="en-US" sz="1320" dirty="0"/>
           </a:p>
@@ -15450,11 +15882,11 @@
         <p:spPr>
           <a:xfrm>
             <a:off x="7635240" y="1325880"/>
-            <a:ext cx="3474720" cy="1325880"/>
+            <a:ext cx="3474720" cy="1207008"/>
           </a:xfrm>
           <a:prstGeom prst="roundRect">
             <a:avLst>
-              <a:gd name="adj" fmla="val 8276"/>
+              <a:gd name="adj" fmla="val 9091"/>
             </a:avLst>
           </a:prstGeom>
           <a:solidFill>
@@ -15516,7 +15948,7 @@
         <p:spPr>
           <a:xfrm>
             <a:off x="7799832" y="1801368"/>
-            <a:ext cx="3145536" cy="758952"/>
+            <a:ext cx="3145536" cy="640080"/>
           </a:xfrm>
           <a:prstGeom prst="rect">
             <a:avLst/>
@@ -15556,12 +15988,12 @@
         </p:nvSpPr>
         <p:spPr>
           <a:xfrm>
-            <a:off x="7635240" y="2788920"/>
-            <a:ext cx="3474720" cy="1536192"/>
+            <a:off x="7635240" y="2670048"/>
+            <a:ext cx="3474720" cy="1377086"/>
           </a:xfrm>
           <a:prstGeom prst="roundRect">
             <a:avLst>
-              <a:gd name="adj" fmla="val 7143"/>
+              <a:gd name="adj" fmla="val 7968"/>
             </a:avLst>
           </a:prstGeom>
           <a:solidFill>
@@ -15583,7 +16015,7 @@
         </p:nvSpPr>
         <p:spPr>
           <a:xfrm>
-            <a:off x="7799832" y="2935224"/>
+            <a:off x="7799832" y="2816352"/>
             <a:ext cx="3145536" cy="256032"/>
           </a:xfrm>
           <a:prstGeom prst="rect">
@@ -15622,8 +16054,8 @@
         </p:nvSpPr>
         <p:spPr>
           <a:xfrm>
-            <a:off x="7818120" y="3300984"/>
-            <a:ext cx="3090672" cy="877824"/>
+            <a:off x="7818120" y="3182112"/>
+            <a:ext cx="3090672" cy="718718"/>
           </a:xfrm>
           <a:prstGeom prst="rect">
             <a:avLst/>
@@ -15697,12 +16129,12 @@
         </p:nvSpPr>
         <p:spPr>
           <a:xfrm>
-            <a:off x="7635240" y="4498848"/>
-            <a:ext cx="3474720" cy="1143000"/>
+            <a:off x="7635240" y="4184294"/>
+            <a:ext cx="3474720" cy="1466698"/>
           </a:xfrm>
           <a:prstGeom prst="roundRect">
             <a:avLst>
-              <a:gd name="adj" fmla="val 9600"/>
+              <a:gd name="adj" fmla="val 7481"/>
             </a:avLst>
           </a:prstGeom>
           <a:solidFill>
@@ -15724,7 +16156,7 @@
         </p:nvSpPr>
         <p:spPr>
           <a:xfrm>
-            <a:off x="7799832" y="4645152"/>
+            <a:off x="7799832" y="4330598"/>
             <a:ext cx="3145536" cy="256032"/>
           </a:xfrm>
           <a:prstGeom prst="rect">
@@ -15763,8 +16195,8 @@
         </p:nvSpPr>
         <p:spPr>
           <a:xfrm>
-            <a:off x="7799832" y="4974336"/>
-            <a:ext cx="3145536" cy="576072"/>
+            <a:off x="7799832" y="4659782"/>
+            <a:ext cx="3145536" cy="899770"/>
           </a:xfrm>
           <a:prstGeom prst="rect">
             <a:avLst/>
@@ -15790,7 +16222,7 @@
                 <a:ea typeface="Aptos" pitchFamily="34" charset="-122"/>
                 <a:cs typeface="Aptos" pitchFamily="34" charset="-120"/>
               </a:rPr>
-              <a:t>Use the assignment to test whether you can explain the concept, apply it to a realistic public health situation, and.</a:t>
+              <a:t>Use the assignment to test whether you can explain the concept, apply it to a realistic public health situation, and identify what would need review before the work moves forward.</a:t>
             </a:r>
             <a:endParaRPr lang="en-US" sz="1320" dirty="0"/>
           </a:p>
@@ -16159,11 +16591,11 @@
         <p:spPr>
           <a:xfrm>
             <a:off x="7635240" y="1325880"/>
-            <a:ext cx="3474720" cy="1325880"/>
+            <a:ext cx="3474720" cy="1207008"/>
           </a:xfrm>
           <a:prstGeom prst="roundRect">
             <a:avLst>
-              <a:gd name="adj" fmla="val 8276"/>
+              <a:gd name="adj" fmla="val 9091"/>
             </a:avLst>
           </a:prstGeom>
           <a:solidFill>
@@ -16225,7 +16657,7 @@
         <p:spPr>
           <a:xfrm>
             <a:off x="7799832" y="1801368"/>
-            <a:ext cx="3145536" cy="758952"/>
+            <a:ext cx="3145536" cy="640080"/>
           </a:xfrm>
           <a:prstGeom prst="rect">
             <a:avLst/>
@@ -16265,12 +16697,12 @@
         </p:nvSpPr>
         <p:spPr>
           <a:xfrm>
-            <a:off x="7635240" y="2788920"/>
-            <a:ext cx="3474720" cy="1536192"/>
+            <a:off x="7635240" y="2670048"/>
+            <a:ext cx="3474720" cy="1377086"/>
           </a:xfrm>
           <a:prstGeom prst="roundRect">
             <a:avLst>
-              <a:gd name="adj" fmla="val 7143"/>
+              <a:gd name="adj" fmla="val 7968"/>
             </a:avLst>
           </a:prstGeom>
           <a:solidFill>
@@ -16292,7 +16724,7 @@
         </p:nvSpPr>
         <p:spPr>
           <a:xfrm>
-            <a:off x="7799832" y="2935224"/>
+            <a:off x="7799832" y="2816352"/>
             <a:ext cx="3145536" cy="256032"/>
           </a:xfrm>
           <a:prstGeom prst="rect">
@@ -16331,8 +16763,8 @@
         </p:nvSpPr>
         <p:spPr>
           <a:xfrm>
-            <a:off x="7818120" y="3300984"/>
-            <a:ext cx="3090672" cy="877824"/>
+            <a:off x="7818120" y="3182112"/>
+            <a:ext cx="3090672" cy="718718"/>
           </a:xfrm>
           <a:prstGeom prst="rect">
             <a:avLst/>
@@ -16389,12 +16821,12 @@
         </p:nvSpPr>
         <p:spPr>
           <a:xfrm>
-            <a:off x="7635240" y="4498848"/>
-            <a:ext cx="3474720" cy="1143000"/>
+            <a:off x="7635240" y="4184294"/>
+            <a:ext cx="3474720" cy="1466698"/>
           </a:xfrm>
           <a:prstGeom prst="roundRect">
             <a:avLst>
-              <a:gd name="adj" fmla="val 9600"/>
+              <a:gd name="adj" fmla="val 7481"/>
             </a:avLst>
           </a:prstGeom>
           <a:solidFill>
@@ -16416,7 +16848,7 @@
         </p:nvSpPr>
         <p:spPr>
           <a:xfrm>
-            <a:off x="7799832" y="4645152"/>
+            <a:off x="7799832" y="4330598"/>
             <a:ext cx="3145536" cy="256032"/>
           </a:xfrm>
           <a:prstGeom prst="rect">
@@ -16455,8 +16887,8 @@
         </p:nvSpPr>
         <p:spPr>
           <a:xfrm>
-            <a:off x="7799832" y="4974336"/>
-            <a:ext cx="3145536" cy="576072"/>
+            <a:off x="7799832" y="4659782"/>
+            <a:ext cx="3145536" cy="899770"/>
           </a:xfrm>
           <a:prstGeom prst="rect">
             <a:avLst/>
@@ -16482,7 +16914,7 @@
                 <a:ea typeface="Aptos" pitchFamily="34" charset="-122"/>
                 <a:cs typeface="Aptos" pitchFamily="34" charset="-120"/>
               </a:rPr>
-              <a:t>Use the assignment to test whether you can explain the concept, apply it to a realistic public health situation, and.</a:t>
+              <a:t>Use the assignment to test whether you can explain the concept, apply it to a realistic public health situation, and identify what would need review before the work moves forward.</a:t>
             </a:r>
             <a:endParaRPr lang="en-US" sz="1320" dirty="0"/>
           </a:p>
@@ -16851,11 +17283,11 @@
         <p:spPr>
           <a:xfrm>
             <a:off x="7635240" y="1325880"/>
-            <a:ext cx="3474720" cy="1325880"/>
+            <a:ext cx="3474720" cy="1255471"/>
           </a:xfrm>
           <a:prstGeom prst="roundRect">
             <a:avLst>
-              <a:gd name="adj" fmla="val 8276"/>
+              <a:gd name="adj" fmla="val 8740"/>
             </a:avLst>
           </a:prstGeom>
           <a:solidFill>
@@ -16917,7 +17349,7 @@
         <p:spPr>
           <a:xfrm>
             <a:off x="7799832" y="1801368"/>
-            <a:ext cx="3145536" cy="758952"/>
+            <a:ext cx="3145536" cy="688543"/>
           </a:xfrm>
           <a:prstGeom prst="rect">
             <a:avLst/>
@@ -16957,12 +17389,12 @@
         </p:nvSpPr>
         <p:spPr>
           <a:xfrm>
-            <a:off x="7635240" y="2788920"/>
-            <a:ext cx="3474720" cy="1536192"/>
+            <a:off x="7635240" y="2718511"/>
+            <a:ext cx="3474720" cy="1328623"/>
           </a:xfrm>
           <a:prstGeom prst="roundRect">
             <a:avLst>
-              <a:gd name="adj" fmla="val 7143"/>
+              <a:gd name="adj" fmla="val 8259"/>
             </a:avLst>
           </a:prstGeom>
           <a:solidFill>
@@ -16984,7 +17416,7 @@
         </p:nvSpPr>
         <p:spPr>
           <a:xfrm>
-            <a:off x="7799832" y="2935224"/>
+            <a:off x="7799832" y="2864815"/>
             <a:ext cx="3145536" cy="256032"/>
           </a:xfrm>
           <a:prstGeom prst="rect">
@@ -17023,8 +17455,8 @@
         </p:nvSpPr>
         <p:spPr>
           <a:xfrm>
-            <a:off x="7818120" y="3300984"/>
-            <a:ext cx="3090672" cy="877824"/>
+            <a:off x="7818120" y="3230575"/>
+            <a:ext cx="3090672" cy="670255"/>
           </a:xfrm>
           <a:prstGeom prst="rect">
             <a:avLst/>
@@ -17098,12 +17530,12 @@
         </p:nvSpPr>
         <p:spPr>
           <a:xfrm>
-            <a:off x="7635240" y="4498848"/>
-            <a:ext cx="3474720" cy="1143000"/>
+            <a:off x="7635240" y="4184294"/>
+            <a:ext cx="3474720" cy="1466698"/>
           </a:xfrm>
           <a:prstGeom prst="roundRect">
             <a:avLst>
-              <a:gd name="adj" fmla="val 9600"/>
+              <a:gd name="adj" fmla="val 7481"/>
             </a:avLst>
           </a:prstGeom>
           <a:solidFill>
@@ -17125,7 +17557,7 @@
         </p:nvSpPr>
         <p:spPr>
           <a:xfrm>
-            <a:off x="7799832" y="4645152"/>
+            <a:off x="7799832" y="4330598"/>
             <a:ext cx="3145536" cy="256032"/>
           </a:xfrm>
           <a:prstGeom prst="rect">
@@ -17164,8 +17596,8 @@
         </p:nvSpPr>
         <p:spPr>
           <a:xfrm>
-            <a:off x="7799832" y="4974336"/>
-            <a:ext cx="3145536" cy="576072"/>
+            <a:off x="7799832" y="4659782"/>
+            <a:ext cx="3145536" cy="899770"/>
           </a:xfrm>
           <a:prstGeom prst="rect">
             <a:avLst/>
@@ -17191,7 +17623,7 @@
                 <a:ea typeface="Aptos" pitchFamily="34" charset="-122"/>
                 <a:cs typeface="Aptos" pitchFamily="34" charset="-120"/>
               </a:rPr>
-              <a:t>Translate this concept into clear decision rights, review steps, documentation expectations, and escalation paths before.</a:t>
+              <a:t>Translate this concept into clear decision rights, review steps, documentation expectations, and escalation paths before an AI-supported workflow is approved.</a:t>
             </a:r>
             <a:endParaRPr lang="en-US" sz="1320" dirty="0"/>
           </a:p>
@@ -17526,11 +17958,11 @@
         <p:spPr>
           <a:xfrm>
             <a:off x="7635240" y="1325880"/>
-            <a:ext cx="3474720" cy="1325880"/>
+            <a:ext cx="3474720" cy="1255471"/>
           </a:xfrm>
           <a:prstGeom prst="roundRect">
             <a:avLst>
-              <a:gd name="adj" fmla="val 8276"/>
+              <a:gd name="adj" fmla="val 8740"/>
             </a:avLst>
           </a:prstGeom>
           <a:solidFill>
@@ -17592,7 +18024,7 @@
         <p:spPr>
           <a:xfrm>
             <a:off x="7799832" y="1801368"/>
-            <a:ext cx="3145536" cy="758952"/>
+            <a:ext cx="3145536" cy="688543"/>
           </a:xfrm>
           <a:prstGeom prst="rect">
             <a:avLst/>
@@ -17632,12 +18064,12 @@
         </p:nvSpPr>
         <p:spPr>
           <a:xfrm>
-            <a:off x="7635240" y="2788920"/>
-            <a:ext cx="3474720" cy="1536192"/>
+            <a:off x="7635240" y="2718511"/>
+            <a:ext cx="3474720" cy="1328623"/>
           </a:xfrm>
           <a:prstGeom prst="roundRect">
             <a:avLst>
-              <a:gd name="adj" fmla="val 7143"/>
+              <a:gd name="adj" fmla="val 8259"/>
             </a:avLst>
           </a:prstGeom>
           <a:solidFill>
@@ -17659,7 +18091,7 @@
         </p:nvSpPr>
         <p:spPr>
           <a:xfrm>
-            <a:off x="7799832" y="2935224"/>
+            <a:off x="7799832" y="2864815"/>
             <a:ext cx="3145536" cy="256032"/>
           </a:xfrm>
           <a:prstGeom prst="rect">
@@ -17698,8 +18130,8 @@
         </p:nvSpPr>
         <p:spPr>
           <a:xfrm>
-            <a:off x="7818120" y="3300984"/>
-            <a:ext cx="3090672" cy="877824"/>
+            <a:off x="7818120" y="3230575"/>
+            <a:ext cx="3090672" cy="670255"/>
           </a:xfrm>
           <a:prstGeom prst="rect">
             <a:avLst/>
@@ -17773,12 +18205,12 @@
         </p:nvSpPr>
         <p:spPr>
           <a:xfrm>
-            <a:off x="7635240" y="4498848"/>
-            <a:ext cx="3474720" cy="1143000"/>
+            <a:off x="7635240" y="4184294"/>
+            <a:ext cx="3474720" cy="1466698"/>
           </a:xfrm>
           <a:prstGeom prst="roundRect">
             <a:avLst>
-              <a:gd name="adj" fmla="val 9600"/>
+              <a:gd name="adj" fmla="val 7481"/>
             </a:avLst>
           </a:prstGeom>
           <a:solidFill>
@@ -17800,7 +18232,7 @@
         </p:nvSpPr>
         <p:spPr>
           <a:xfrm>
-            <a:off x="7799832" y="4645152"/>
+            <a:off x="7799832" y="4330598"/>
             <a:ext cx="3145536" cy="256032"/>
           </a:xfrm>
           <a:prstGeom prst="rect">
@@ -17839,8 +18271,8 @@
         </p:nvSpPr>
         <p:spPr>
           <a:xfrm>
-            <a:off x="7799832" y="4974336"/>
-            <a:ext cx="3145536" cy="576072"/>
+            <a:off x="7799832" y="4659782"/>
+            <a:ext cx="3145536" cy="899770"/>
           </a:xfrm>
           <a:prstGeom prst="rect">
             <a:avLst/>
@@ -17866,7 +18298,7 @@
                 <a:ea typeface="Aptos" pitchFamily="34" charset="-122"/>
                 <a:cs typeface="Aptos" pitchFamily="34" charset="-120"/>
               </a:rPr>
-              <a:t>Use the assignment to test whether you can explain the concept, apply it to a realistic public health situation, and.</a:t>
+              <a:t>Use the assignment to test whether you can explain the concept, apply it to a realistic public health situation, and identify what would need review before the work moves forward.</a:t>
             </a:r>
             <a:endParaRPr lang="en-US" sz="1320" dirty="0"/>
           </a:p>
@@ -18235,11 +18667,11 @@
         <p:spPr>
           <a:xfrm>
             <a:off x="7635240" y="1325880"/>
-            <a:ext cx="3474720" cy="1325880"/>
+            <a:ext cx="3474720" cy="1207008"/>
           </a:xfrm>
           <a:prstGeom prst="roundRect">
             <a:avLst>
-              <a:gd name="adj" fmla="val 8276"/>
+              <a:gd name="adj" fmla="val 9091"/>
             </a:avLst>
           </a:prstGeom>
           <a:solidFill>
@@ -18301,7 +18733,7 @@
         <p:spPr>
           <a:xfrm>
             <a:off x="7799832" y="1801368"/>
-            <a:ext cx="3145536" cy="758952"/>
+            <a:ext cx="3145536" cy="640080"/>
           </a:xfrm>
           <a:prstGeom prst="rect">
             <a:avLst/>
@@ -18341,12 +18773,12 @@
         </p:nvSpPr>
         <p:spPr>
           <a:xfrm>
-            <a:off x="7635240" y="2788920"/>
-            <a:ext cx="3474720" cy="1536192"/>
+            <a:off x="7635240" y="2670048"/>
+            <a:ext cx="3474720" cy="1377086"/>
           </a:xfrm>
           <a:prstGeom prst="roundRect">
             <a:avLst>
-              <a:gd name="adj" fmla="val 7143"/>
+              <a:gd name="adj" fmla="val 7968"/>
             </a:avLst>
           </a:prstGeom>
           <a:solidFill>
@@ -18368,7 +18800,7 @@
         </p:nvSpPr>
         <p:spPr>
           <a:xfrm>
-            <a:off x="7799832" y="2935224"/>
+            <a:off x="7799832" y="2816352"/>
             <a:ext cx="3145536" cy="256032"/>
           </a:xfrm>
           <a:prstGeom prst="rect">
@@ -18407,8 +18839,8 @@
         </p:nvSpPr>
         <p:spPr>
           <a:xfrm>
-            <a:off x="7818120" y="3300984"/>
-            <a:ext cx="3090672" cy="877824"/>
+            <a:off x="7818120" y="3182112"/>
+            <a:ext cx="3090672" cy="718718"/>
           </a:xfrm>
           <a:prstGeom prst="rect">
             <a:avLst/>
@@ -18482,12 +18914,12 @@
         </p:nvSpPr>
         <p:spPr>
           <a:xfrm>
-            <a:off x="7635240" y="4498848"/>
-            <a:ext cx="3474720" cy="1143000"/>
+            <a:off x="7635240" y="4184294"/>
+            <a:ext cx="3474720" cy="1466698"/>
           </a:xfrm>
           <a:prstGeom prst="roundRect">
             <a:avLst>
-              <a:gd name="adj" fmla="val 9600"/>
+              <a:gd name="adj" fmla="val 7481"/>
             </a:avLst>
           </a:prstGeom>
           <a:solidFill>
@@ -18509,7 +18941,7 @@
         </p:nvSpPr>
         <p:spPr>
           <a:xfrm>
-            <a:off x="7799832" y="4645152"/>
+            <a:off x="7799832" y="4330598"/>
             <a:ext cx="3145536" cy="256032"/>
           </a:xfrm>
           <a:prstGeom prst="rect">
@@ -18548,8 +18980,8 @@
         </p:nvSpPr>
         <p:spPr>
           <a:xfrm>
-            <a:off x="7799832" y="4974336"/>
-            <a:ext cx="3145536" cy="576072"/>
+            <a:off x="7799832" y="4659782"/>
+            <a:ext cx="3145536" cy="899770"/>
           </a:xfrm>
           <a:prstGeom prst="rect">
             <a:avLst/>
@@ -18575,7 +19007,7 @@
                 <a:ea typeface="Aptos" pitchFamily="34" charset="-122"/>
                 <a:cs typeface="Aptos" pitchFamily="34" charset="-120"/>
               </a:rPr>
-              <a:t>Use the assignment to test whether you can explain the concept, apply it to a realistic public health situation, and.</a:t>
+              <a:t>Use the assignment to test whether you can explain the concept, apply it to a realistic public health situation, and identify what would need review before the work moves forward.</a:t>
             </a:r>
             <a:endParaRPr lang="en-US" sz="1320" dirty="0"/>
           </a:p>
@@ -19053,7 +19485,7 @@
                 <a:ea typeface="Aptos" pitchFamily="34" charset="-122"/>
                 <a:cs typeface="Aptos" pitchFamily="34" charset="-120"/>
               </a:rPr>
-              <a:t>Use the related plays to identify decisions, participants, timing, approvals, and documentation needed for responsible.</a:t>
+              <a:t>Use the related plays to identify decisions, participants, timing, approvals, and documentation needed for responsible implementation.</a:t>
             </a:r>
             <a:endParaRPr lang="en-US" sz="1320" dirty="0"/>
           </a:p>
@@ -19563,11 +19995,11 @@
         <p:spPr>
           <a:xfrm>
             <a:off x="7635240" y="1325880"/>
-            <a:ext cx="3474720" cy="1325880"/>
+            <a:ext cx="3474720" cy="1255471"/>
           </a:xfrm>
           <a:prstGeom prst="roundRect">
             <a:avLst>
-              <a:gd name="adj" fmla="val 8276"/>
+              <a:gd name="adj" fmla="val 8740"/>
             </a:avLst>
           </a:prstGeom>
           <a:solidFill>
@@ -19629,7 +20061,7 @@
         <p:spPr>
           <a:xfrm>
             <a:off x="7799832" y="1801368"/>
-            <a:ext cx="3145536" cy="758952"/>
+            <a:ext cx="3145536" cy="688543"/>
           </a:xfrm>
           <a:prstGeom prst="rect">
             <a:avLst/>
@@ -19669,12 +20101,12 @@
         </p:nvSpPr>
         <p:spPr>
           <a:xfrm>
-            <a:off x="7635240" y="2788920"/>
-            <a:ext cx="3474720" cy="1536192"/>
+            <a:off x="7635240" y="2718511"/>
+            <a:ext cx="3474720" cy="1328623"/>
           </a:xfrm>
           <a:prstGeom prst="roundRect">
             <a:avLst>
-              <a:gd name="adj" fmla="val 7143"/>
+              <a:gd name="adj" fmla="val 8259"/>
             </a:avLst>
           </a:prstGeom>
           <a:solidFill>
@@ -19696,7 +20128,7 @@
         </p:nvSpPr>
         <p:spPr>
           <a:xfrm>
-            <a:off x="7799832" y="2935224"/>
+            <a:off x="7799832" y="2864815"/>
             <a:ext cx="3145536" cy="256032"/>
           </a:xfrm>
           <a:prstGeom prst="rect">
@@ -19735,8 +20167,8 @@
         </p:nvSpPr>
         <p:spPr>
           <a:xfrm>
-            <a:off x="7818120" y="3300984"/>
-            <a:ext cx="3090672" cy="877824"/>
+            <a:off x="7818120" y="3230575"/>
+            <a:ext cx="3090672" cy="670255"/>
           </a:xfrm>
           <a:prstGeom prst="rect">
             <a:avLst/>
@@ -19810,12 +20242,12 @@
         </p:nvSpPr>
         <p:spPr>
           <a:xfrm>
-            <a:off x="7635240" y="4498848"/>
-            <a:ext cx="3474720" cy="1143000"/>
+            <a:off x="7635240" y="4184294"/>
+            <a:ext cx="3474720" cy="1466698"/>
           </a:xfrm>
           <a:prstGeom prst="roundRect">
             <a:avLst>
-              <a:gd name="adj" fmla="val 9600"/>
+              <a:gd name="adj" fmla="val 7481"/>
             </a:avLst>
           </a:prstGeom>
           <a:solidFill>
@@ -19837,7 +20269,7 @@
         </p:nvSpPr>
         <p:spPr>
           <a:xfrm>
-            <a:off x="7799832" y="4645152"/>
+            <a:off x="7799832" y="4330598"/>
             <a:ext cx="3145536" cy="256032"/>
           </a:xfrm>
           <a:prstGeom prst="rect">
@@ -19876,8 +20308,8 @@
         </p:nvSpPr>
         <p:spPr>
           <a:xfrm>
-            <a:off x="7799832" y="4974336"/>
-            <a:ext cx="3145536" cy="576072"/>
+            <a:off x="7799832" y="4659782"/>
+            <a:ext cx="3145536" cy="899770"/>
           </a:xfrm>
           <a:prstGeom prst="rect">
             <a:avLst/>
@@ -19903,7 +20335,7 @@
                 <a:ea typeface="Aptos" pitchFamily="34" charset="-122"/>
                 <a:cs typeface="Aptos" pitchFamily="34" charset="-120"/>
               </a:rPr>
-              <a:t>Translate this concept into clear decision rights, review steps, documentation expectations, and escalation paths before.</a:t>
+              <a:t>Translate this concept into clear decision rights, review steps, documentation expectations, and escalation paths before an AI-supported workflow is approved.</a:t>
             </a:r>
             <a:endParaRPr lang="en-US" sz="1320" dirty="0"/>
           </a:p>
@@ -20238,11 +20670,11 @@
         <p:spPr>
           <a:xfrm>
             <a:off x="7635240" y="1325880"/>
-            <a:ext cx="3474720" cy="1325880"/>
+            <a:ext cx="3474720" cy="1255471"/>
           </a:xfrm>
           <a:prstGeom prst="roundRect">
             <a:avLst>
-              <a:gd name="adj" fmla="val 8276"/>
+              <a:gd name="adj" fmla="val 8740"/>
             </a:avLst>
           </a:prstGeom>
           <a:solidFill>
@@ -20304,7 +20736,7 @@
         <p:spPr>
           <a:xfrm>
             <a:off x="7799832" y="1801368"/>
-            <a:ext cx="3145536" cy="758952"/>
+            <a:ext cx="3145536" cy="688543"/>
           </a:xfrm>
           <a:prstGeom prst="rect">
             <a:avLst/>
@@ -20344,12 +20776,12 @@
         </p:nvSpPr>
         <p:spPr>
           <a:xfrm>
-            <a:off x="7635240" y="2788920"/>
-            <a:ext cx="3474720" cy="1536192"/>
+            <a:off x="7635240" y="2718511"/>
+            <a:ext cx="3474720" cy="1328623"/>
           </a:xfrm>
           <a:prstGeom prst="roundRect">
             <a:avLst>
-              <a:gd name="adj" fmla="val 7143"/>
+              <a:gd name="adj" fmla="val 8259"/>
             </a:avLst>
           </a:prstGeom>
           <a:solidFill>
@@ -20371,7 +20803,7 @@
         </p:nvSpPr>
         <p:spPr>
           <a:xfrm>
-            <a:off x="7799832" y="2935224"/>
+            <a:off x="7799832" y="2864815"/>
             <a:ext cx="3145536" cy="256032"/>
           </a:xfrm>
           <a:prstGeom prst="rect">
@@ -20410,8 +20842,8 @@
         </p:nvSpPr>
         <p:spPr>
           <a:xfrm>
-            <a:off x="7818120" y="3300984"/>
-            <a:ext cx="3090672" cy="877824"/>
+            <a:off x="7818120" y="3230575"/>
+            <a:ext cx="3090672" cy="670255"/>
           </a:xfrm>
           <a:prstGeom prst="rect">
             <a:avLst/>
@@ -20485,12 +20917,12 @@
         </p:nvSpPr>
         <p:spPr>
           <a:xfrm>
-            <a:off x="7635240" y="4498848"/>
-            <a:ext cx="3474720" cy="1143000"/>
+            <a:off x="7635240" y="4184294"/>
+            <a:ext cx="3474720" cy="1466698"/>
           </a:xfrm>
           <a:prstGeom prst="roundRect">
             <a:avLst>
-              <a:gd name="adj" fmla="val 9600"/>
+              <a:gd name="adj" fmla="val 7481"/>
             </a:avLst>
           </a:prstGeom>
           <a:solidFill>
@@ -20512,7 +20944,7 @@
         </p:nvSpPr>
         <p:spPr>
           <a:xfrm>
-            <a:off x="7799832" y="4645152"/>
+            <a:off x="7799832" y="4330598"/>
             <a:ext cx="3145536" cy="256032"/>
           </a:xfrm>
           <a:prstGeom prst="rect">
@@ -20551,8 +20983,8 @@
         </p:nvSpPr>
         <p:spPr>
           <a:xfrm>
-            <a:off x="7799832" y="4974336"/>
-            <a:ext cx="3145536" cy="576072"/>
+            <a:off x="7799832" y="4659782"/>
+            <a:ext cx="3145536" cy="899770"/>
           </a:xfrm>
           <a:prstGeom prst="rect">
             <a:avLst/>
@@ -20578,7 +21010,7 @@
                 <a:ea typeface="Aptos" pitchFamily="34" charset="-122"/>
                 <a:cs typeface="Aptos" pitchFamily="34" charset="-120"/>
               </a:rPr>
-              <a:t>Translate this concept into clear decision rights, review steps, documentation expectations, and escalation paths before.</a:t>
+              <a:t>Translate this concept into clear decision rights, review steps, documentation expectations, and escalation paths before an AI-supported workflow is approved.</a:t>
             </a:r>
             <a:endParaRPr lang="en-US" sz="1320" dirty="0"/>
           </a:p>
@@ -21056,7 +21488,7 @@
                 <a:ea typeface="Aptos" pitchFamily="34" charset="-122"/>
                 <a:cs typeface="Aptos" pitchFamily="34" charset="-120"/>
               </a:rPr>
-              <a:t>Use linked tools when your department needs a structured worksheet, template, checklist, review process, or.</a:t>
+              <a:t>Use linked tools when your department needs a structured worksheet, template, checklist, review process, or documentation artifact.</a:t>
             </a:r>
             <a:endParaRPr lang="en-US" sz="1320" dirty="0"/>
           </a:p>
@@ -21566,11 +21998,11 @@
         <p:spPr>
           <a:xfrm>
             <a:off x="7635240" y="1325880"/>
-            <a:ext cx="3474720" cy="1325880"/>
+            <a:ext cx="3474720" cy="1207008"/>
           </a:xfrm>
           <a:prstGeom prst="roundRect">
             <a:avLst>
-              <a:gd name="adj" fmla="val 8276"/>
+              <a:gd name="adj" fmla="val 9091"/>
             </a:avLst>
           </a:prstGeom>
           <a:solidFill>
@@ -21632,7 +22064,7 @@
         <p:spPr>
           <a:xfrm>
             <a:off x="7799832" y="1801368"/>
-            <a:ext cx="3145536" cy="758952"/>
+            <a:ext cx="3145536" cy="640080"/>
           </a:xfrm>
           <a:prstGeom prst="rect">
             <a:avLst/>
@@ -21658,7 +22090,7 @@
                 <a:ea typeface="Aptos" pitchFamily="34" charset="-122"/>
                 <a:cs typeface="Aptos" pitchFamily="34" charset="-120"/>
               </a:rPr>
-              <a:t>Define AI governance in plain language and explain why it matters for public health practice.</a:t>
+              <a:t>Define AI governance in plain language and explain why it matters for public health.</a:t>
             </a:r>
             <a:endParaRPr lang="en-US" sz="1320" dirty="0"/>
           </a:p>
@@ -21672,12 +22104,12 @@
         </p:nvSpPr>
         <p:spPr>
           <a:xfrm>
-            <a:off x="7635240" y="2788920"/>
-            <a:ext cx="3474720" cy="1536192"/>
+            <a:off x="7635240" y="2670048"/>
+            <a:ext cx="3474720" cy="1377086"/>
           </a:xfrm>
           <a:prstGeom prst="roundRect">
             <a:avLst>
-              <a:gd name="adj" fmla="val 7143"/>
+              <a:gd name="adj" fmla="val 7968"/>
             </a:avLst>
           </a:prstGeom>
           <a:solidFill>
@@ -21699,7 +22131,7 @@
         </p:nvSpPr>
         <p:spPr>
           <a:xfrm>
-            <a:off x="7799832" y="2935224"/>
+            <a:off x="7799832" y="2816352"/>
             <a:ext cx="3145536" cy="256032"/>
           </a:xfrm>
           <a:prstGeom prst="rect">
@@ -21738,8 +22170,8 @@
         </p:nvSpPr>
         <p:spPr>
           <a:xfrm>
-            <a:off x="7818120" y="3300984"/>
-            <a:ext cx="3090672" cy="877824"/>
+            <a:off x="7818120" y="3182112"/>
+            <a:ext cx="3090672" cy="718718"/>
           </a:xfrm>
           <a:prstGeom prst="rect">
             <a:avLst/>
@@ -21813,12 +22245,12 @@
         </p:nvSpPr>
         <p:spPr>
           <a:xfrm>
-            <a:off x="7635240" y="4498848"/>
-            <a:ext cx="3474720" cy="1143000"/>
+            <a:off x="7635240" y="4184294"/>
+            <a:ext cx="3474720" cy="1466698"/>
           </a:xfrm>
           <a:prstGeom prst="roundRect">
             <a:avLst>
-              <a:gd name="adj" fmla="val 9600"/>
+              <a:gd name="adj" fmla="val 7481"/>
             </a:avLst>
           </a:prstGeom>
           <a:solidFill>
@@ -21840,7 +22272,7 @@
         </p:nvSpPr>
         <p:spPr>
           <a:xfrm>
-            <a:off x="7799832" y="4645152"/>
+            <a:off x="7799832" y="4330598"/>
             <a:ext cx="3145536" cy="256032"/>
           </a:xfrm>
           <a:prstGeom prst="rect">
@@ -21879,8 +22311,8 @@
         </p:nvSpPr>
         <p:spPr>
           <a:xfrm>
-            <a:off x="7799832" y="4974336"/>
-            <a:ext cx="3145536" cy="576072"/>
+            <a:off x="7799832" y="4659782"/>
+            <a:ext cx="3145536" cy="899770"/>
           </a:xfrm>
           <a:prstGeom prst="rect">
             <a:avLst/>
@@ -21906,7 +22338,7 @@
                 <a:ea typeface="Aptos" pitchFamily="34" charset="-122"/>
                 <a:cs typeface="Aptos" pitchFamily="34" charset="-120"/>
               </a:rPr>
-              <a:t>Use the assignment to test whether you can explain the concept, apply it to a realistic public health situation, and.</a:t>
+              <a:t>Use the assignment to test whether you can explain the concept, apply it to a realistic public health situation, and identify what would need review before the work moves forward.</a:t>
             </a:r>
             <a:endParaRPr lang="en-US" sz="1320" dirty="0"/>
           </a:p>
@@ -22241,11 +22673,11 @@
         <p:spPr>
           <a:xfrm>
             <a:off x="7635240" y="1325880"/>
-            <a:ext cx="3474720" cy="1325880"/>
+            <a:ext cx="3474720" cy="1255471"/>
           </a:xfrm>
           <a:prstGeom prst="roundRect">
             <a:avLst>
-              <a:gd name="adj" fmla="val 8276"/>
+              <a:gd name="adj" fmla="val 8740"/>
             </a:avLst>
           </a:prstGeom>
           <a:solidFill>
@@ -22307,7 +22739,7 @@
         <p:spPr>
           <a:xfrm>
             <a:off x="7799832" y="1801368"/>
-            <a:ext cx="3145536" cy="758952"/>
+            <a:ext cx="3145536" cy="688543"/>
           </a:xfrm>
           <a:prstGeom prst="rect">
             <a:avLst/>
@@ -22347,12 +22779,12 @@
         </p:nvSpPr>
         <p:spPr>
           <a:xfrm>
-            <a:off x="7635240" y="2788920"/>
-            <a:ext cx="3474720" cy="1536192"/>
+            <a:off x="7635240" y="2718511"/>
+            <a:ext cx="3474720" cy="1328623"/>
           </a:xfrm>
           <a:prstGeom prst="roundRect">
             <a:avLst>
-              <a:gd name="adj" fmla="val 7143"/>
+              <a:gd name="adj" fmla="val 8259"/>
             </a:avLst>
           </a:prstGeom>
           <a:solidFill>
@@ -22374,7 +22806,7 @@
         </p:nvSpPr>
         <p:spPr>
           <a:xfrm>
-            <a:off x="7799832" y="2935224"/>
+            <a:off x="7799832" y="2864815"/>
             <a:ext cx="3145536" cy="256032"/>
           </a:xfrm>
           <a:prstGeom prst="rect">
@@ -22413,8 +22845,8 @@
         </p:nvSpPr>
         <p:spPr>
           <a:xfrm>
-            <a:off x="7818120" y="3300984"/>
-            <a:ext cx="3090672" cy="877824"/>
+            <a:off x="7818120" y="3230575"/>
+            <a:ext cx="3090672" cy="670255"/>
           </a:xfrm>
           <a:prstGeom prst="rect">
             <a:avLst/>
@@ -22454,12 +22886,12 @@
         </p:nvSpPr>
         <p:spPr>
           <a:xfrm>
-            <a:off x="7635240" y="4498848"/>
-            <a:ext cx="3474720" cy="1143000"/>
+            <a:off x="7635240" y="4184294"/>
+            <a:ext cx="3474720" cy="1466698"/>
           </a:xfrm>
           <a:prstGeom prst="roundRect">
             <a:avLst>
-              <a:gd name="adj" fmla="val 9600"/>
+              <a:gd name="adj" fmla="val 7481"/>
             </a:avLst>
           </a:prstGeom>
           <a:solidFill>
@@ -22481,7 +22913,7 @@
         </p:nvSpPr>
         <p:spPr>
           <a:xfrm>
-            <a:off x="7799832" y="4645152"/>
+            <a:off x="7799832" y="4330598"/>
             <a:ext cx="3145536" cy="256032"/>
           </a:xfrm>
           <a:prstGeom prst="rect">
@@ -22520,8 +22952,8 @@
         </p:nvSpPr>
         <p:spPr>
           <a:xfrm>
-            <a:off x="7799832" y="4974336"/>
-            <a:ext cx="3145536" cy="576072"/>
+            <a:off x="7799832" y="4659782"/>
+            <a:ext cx="3145536" cy="899770"/>
           </a:xfrm>
           <a:prstGeom prst="rect">
             <a:avLst/>
@@ -22547,7 +22979,7 @@
                 <a:ea typeface="Aptos" pitchFamily="34" charset="-122"/>
                 <a:cs typeface="Aptos" pitchFamily="34" charset="-120"/>
               </a:rPr>
-              <a:t>Use the assignment to test whether you can explain the concept, apply it to a realistic public health situation, and.</a:t>
+              <a:t>Use the assignment to test whether you can explain the concept, apply it to a realistic public health situation, and identify what would need review before the work moves forward.</a:t>
             </a:r>
             <a:endParaRPr lang="en-US" sz="1320" dirty="0"/>
           </a:p>
@@ -22916,11 +23348,11 @@
         <p:spPr>
           <a:xfrm>
             <a:off x="7635240" y="1325880"/>
-            <a:ext cx="3474720" cy="1325880"/>
+            <a:ext cx="3474720" cy="1255471"/>
           </a:xfrm>
           <a:prstGeom prst="roundRect">
             <a:avLst>
-              <a:gd name="adj" fmla="val 8276"/>
+              <a:gd name="adj" fmla="val 8740"/>
             </a:avLst>
           </a:prstGeom>
           <a:solidFill>
@@ -22982,7 +23414,7 @@
         <p:spPr>
           <a:xfrm>
             <a:off x="7799832" y="1801368"/>
-            <a:ext cx="3145536" cy="758952"/>
+            <a:ext cx="3145536" cy="688543"/>
           </a:xfrm>
           <a:prstGeom prst="rect">
             <a:avLst/>
@@ -23022,12 +23454,12 @@
         </p:nvSpPr>
         <p:spPr>
           <a:xfrm>
-            <a:off x="7635240" y="2788920"/>
-            <a:ext cx="3474720" cy="1536192"/>
+            <a:off x="7635240" y="2718511"/>
+            <a:ext cx="3474720" cy="1328623"/>
           </a:xfrm>
           <a:prstGeom prst="roundRect">
             <a:avLst>
-              <a:gd name="adj" fmla="val 7143"/>
+              <a:gd name="adj" fmla="val 8259"/>
             </a:avLst>
           </a:prstGeom>
           <a:solidFill>
@@ -23049,8 +23481,8 @@
         </p:nvSpPr>
         <p:spPr>
           <a:xfrm>
-            <a:off x="7799832" y="2935224"/>
-            <a:ext cx="3145536" cy="256032"/>
+            <a:off x="7799832" y="2846527"/>
+            <a:ext cx="3145536" cy="237744"/>
           </a:xfrm>
           <a:prstGeom prst="rect">
             <a:avLst/>
@@ -23066,7 +23498,7 @@
               <a:buNone/>
             </a:pPr>
             <a:r>
-              <a:rPr lang="en-US" sz="1300" b="1" dirty="0">
+              <a:rPr lang="en-US" sz="1250" b="1" dirty="0">
                 <a:solidFill>
                   <a:srgbClr val="0068B7"/>
                 </a:solidFill>
@@ -23074,101 +23506,317 @@
                 <a:ea typeface="Aptos" pitchFamily="34" charset="-122"/>
                 <a:cs typeface="Aptos" pitchFamily="34" charset="-120"/>
               </a:rPr>
-              <a:t>Concept checkpoints</a:t>
-            </a:r>
-            <a:endParaRPr lang="en-US" sz="1300" dirty="0"/>
-          </a:p>
-        </p:txBody>
-      </p:sp>
-      <p:sp>
-        <p:nvSpPr>
-          <p:cNvPr id="15" name="Text 13"/>
-          <p:cNvSpPr/>
-          <p:nvPr/>
-        </p:nvSpPr>
-        <p:spPr>
-          <a:xfrm>
-            <a:off x="7818120" y="3300984"/>
-            <a:ext cx="3090672" cy="877824"/>
-          </a:xfrm>
-          <a:prstGeom prst="rect">
-            <a:avLst/>
-          </a:prstGeom>
-          <a:noFill/>
-          <a:ln/>
-        </p:spPr>
-        <p:txBody>
-          <a:bodyPr wrap="square" lIns="508" tIns="508" rIns="508" bIns="508" rtlCol="0" anchor="t">
+              <a:t>Governance pathway</a:t>
+            </a:r>
+            <a:endParaRPr lang="en-US" sz="1250" dirty="0"/>
+          </a:p>
+        </p:txBody>
+      </p:sp>
+      <p:sp>
+        <p:nvSpPr>
+          <p:cNvPr id="15" name="Shape 13"/>
+          <p:cNvSpPr/>
+          <p:nvPr/>
+        </p:nvSpPr>
+        <p:spPr>
+          <a:xfrm>
+            <a:off x="8763000" y="3399739"/>
+            <a:ext cx="164592" cy="0"/>
+          </a:xfrm>
+          <a:prstGeom prst="line">
+            <a:avLst/>
+          </a:prstGeom>
+          <a:noFill/>
+          <a:ln w="15240">
+            <a:solidFill>
+              <a:srgbClr val="8ABBD8"/>
+            </a:solidFill>
+            <a:prstDash val="solid"/>
+          </a:ln>
+        </p:spPr>
+      </p:sp>
+      <p:sp>
+        <p:nvSpPr>
+          <p:cNvPr id="16" name="Shape 14"/>
+          <p:cNvSpPr/>
+          <p:nvPr/>
+        </p:nvSpPr>
+        <p:spPr>
+          <a:xfrm>
+            <a:off x="7872984" y="3248863"/>
+            <a:ext cx="890016" cy="301752"/>
+          </a:xfrm>
+          <a:prstGeom prst="roundRect">
+            <a:avLst>
+              <a:gd name="adj" fmla="val 24242"/>
+            </a:avLst>
+          </a:prstGeom>
+          <a:solidFill>
+            <a:srgbClr val="0068B7"/>
+          </a:solidFill>
+          <a:ln w="12700">
+            <a:solidFill>
+              <a:srgbClr val="0068B7"/>
+            </a:solidFill>
+            <a:prstDash val="solid"/>
+          </a:ln>
+        </p:spPr>
+      </p:sp>
+      <p:sp>
+        <p:nvSpPr>
+          <p:cNvPr id="17" name="Text 15"/>
+          <p:cNvSpPr/>
+          <p:nvPr/>
+        </p:nvSpPr>
+        <p:spPr>
+          <a:xfrm>
+            <a:off x="7909560" y="3322015"/>
+            <a:ext cx="816864" cy="146304"/>
+          </a:xfrm>
+          <a:prstGeom prst="rect">
+            <a:avLst/>
+          </a:prstGeom>
+          <a:noFill/>
+          <a:ln/>
+        </p:spPr>
+        <p:txBody>
+          <a:bodyPr wrap="square" lIns="0" tIns="0" rIns="0" bIns="0" rtlCol="0" anchor="ctr">
             <a:normAutofit/>
           </a:bodyPr>
           <a:lstStyle/>
           <a:p>
-            <a:pPr indent="0" marL="0">
-              <a:buNone/>
-            </a:pPr>
-            <a:r>
-              <a:rPr lang="en-US" sz="1220" dirty="0">
-                <a:solidFill>
-                  <a:srgbClr val="17364A"/>
-                </a:solidFill>
-                <a:latin typeface="Aptos" pitchFamily="34" charset="0"/>
-                <a:ea typeface="Aptos" pitchFamily="34" charset="-122"/>
-                <a:cs typeface="Aptos" pitchFamily="34" charset="-120"/>
-              </a:rPr>
-              <a:t>AI governance is the set of people, policies, processes, decision.</a:t>
-            </a:r>
-            <a:endParaRPr lang="en-US" sz="1220" dirty="0"/>
-          </a:p>
-          <a:p>
-            <a:pPr indent="0" marL="0">
-              <a:buNone/>
-            </a:pPr>
-            <a:r>
-              <a:rPr lang="en-US" sz="1220" dirty="0">
-                <a:solidFill>
-                  <a:srgbClr val="17364A"/>
-                </a:solidFill>
-                <a:latin typeface="Aptos" pitchFamily="34" charset="0"/>
-                <a:ea typeface="Aptos" pitchFamily="34" charset="-122"/>
-                <a:cs typeface="Aptos" pitchFamily="34" charset="-120"/>
-              </a:rPr>
-              <a:t>Governance does not mean that every staff member must become an AI.</a:t>
-            </a:r>
-            <a:endParaRPr lang="en-US" sz="1220" dirty="0"/>
-          </a:p>
-          <a:p>
-            <a:pPr indent="0" marL="0">
-              <a:buNone/>
-            </a:pPr>
-            <a:r>
-              <a:rPr lang="en-US" sz="1220" dirty="0">
-                <a:solidFill>
-                  <a:srgbClr val="17364A"/>
-                </a:solidFill>
-                <a:latin typeface="Aptos" pitchFamily="34" charset="0"/>
-                <a:ea typeface="Aptos" pitchFamily="34" charset="-122"/>
-                <a:cs typeface="Aptos" pitchFamily="34" charset="-120"/>
-              </a:rPr>
-              <a:t>Good governance helps an agency decide what AI uses are.</a:t>
-            </a:r>
-            <a:endParaRPr lang="en-US" sz="1220" dirty="0"/>
-          </a:p>
-        </p:txBody>
-      </p:sp>
-      <p:sp>
-        <p:nvSpPr>
-          <p:cNvPr id="16" name="Shape 14"/>
-          <p:cNvSpPr/>
-          <p:nvPr/>
-        </p:nvSpPr>
-        <p:spPr>
-          <a:xfrm>
-            <a:off x="7635240" y="4498848"/>
-            <a:ext cx="3474720" cy="1143000"/>
+            <a:pPr algn="ctr" indent="0" marL="0">
+              <a:buNone/>
+            </a:pPr>
+            <a:r>
+              <a:rPr lang="en-US" sz="880" b="1" dirty="0">
+                <a:solidFill>
+                  <a:srgbClr val="FFFFFF"/>
+                </a:solidFill>
+                <a:latin typeface="Aptos" pitchFamily="34" charset="0"/>
+                <a:ea typeface="Aptos" pitchFamily="34" charset="-122"/>
+                <a:cs typeface="Aptos" pitchFamily="34" charset="-120"/>
+              </a:rPr>
+              <a:t>Submit</a:t>
+            </a:r>
+            <a:endParaRPr lang="en-US" sz="880" dirty="0"/>
+          </a:p>
+        </p:txBody>
+      </p:sp>
+      <p:sp>
+        <p:nvSpPr>
+          <p:cNvPr id="18" name="Shape 16"/>
+          <p:cNvSpPr/>
+          <p:nvPr/>
+        </p:nvSpPr>
+        <p:spPr>
+          <a:xfrm>
+            <a:off x="9817608" y="3399739"/>
+            <a:ext cx="164592" cy="0"/>
+          </a:xfrm>
+          <a:prstGeom prst="line">
+            <a:avLst/>
+          </a:prstGeom>
+          <a:noFill/>
+          <a:ln w="15240">
+            <a:solidFill>
+              <a:srgbClr val="8ABBD8"/>
+            </a:solidFill>
+            <a:prstDash val="solid"/>
+          </a:ln>
+        </p:spPr>
+      </p:sp>
+      <p:sp>
+        <p:nvSpPr>
+          <p:cNvPr id="19" name="Shape 17"/>
+          <p:cNvSpPr/>
+          <p:nvPr/>
+        </p:nvSpPr>
+        <p:spPr>
+          <a:xfrm>
+            <a:off x="8927592" y="3248863"/>
+            <a:ext cx="890016" cy="301752"/>
           </a:xfrm>
           <a:prstGeom prst="roundRect">
             <a:avLst>
-              <a:gd name="adj" fmla="val 9600"/>
+              <a:gd name="adj" fmla="val 24242"/>
+            </a:avLst>
+          </a:prstGeom>
+          <a:solidFill>
+            <a:srgbClr val="2F8A28"/>
+          </a:solidFill>
+          <a:ln w="12700">
+            <a:solidFill>
+              <a:srgbClr val="2F8A28"/>
+            </a:solidFill>
+            <a:prstDash val="solid"/>
+          </a:ln>
+        </p:spPr>
+      </p:sp>
+      <p:sp>
+        <p:nvSpPr>
+          <p:cNvPr id="20" name="Text 18"/>
+          <p:cNvSpPr/>
+          <p:nvPr/>
+        </p:nvSpPr>
+        <p:spPr>
+          <a:xfrm>
+            <a:off x="8964168" y="3322015"/>
+            <a:ext cx="816864" cy="146304"/>
+          </a:xfrm>
+          <a:prstGeom prst="rect">
+            <a:avLst/>
+          </a:prstGeom>
+          <a:noFill/>
+          <a:ln/>
+        </p:spPr>
+        <p:txBody>
+          <a:bodyPr wrap="square" lIns="0" tIns="0" rIns="0" bIns="0" rtlCol="0" anchor="ctr">
+            <a:normAutofit/>
+          </a:bodyPr>
+          <a:lstStyle/>
+          <a:p>
+            <a:pPr algn="ctr" indent="0" marL="0">
+              <a:buNone/>
+            </a:pPr>
+            <a:r>
+              <a:rPr lang="en-US" sz="880" b="1" dirty="0">
+                <a:solidFill>
+                  <a:srgbClr val="FFFFFF"/>
+                </a:solidFill>
+                <a:latin typeface="Aptos" pitchFamily="34" charset="0"/>
+                <a:ea typeface="Aptos" pitchFamily="34" charset="-122"/>
+                <a:cs typeface="Aptos" pitchFamily="34" charset="-120"/>
+              </a:rPr>
+              <a:t>Review</a:t>
+            </a:r>
+            <a:endParaRPr lang="en-US" sz="880" dirty="0"/>
+          </a:p>
+        </p:txBody>
+      </p:sp>
+      <p:sp>
+        <p:nvSpPr>
+          <p:cNvPr id="21" name="Shape 19"/>
+          <p:cNvSpPr/>
+          <p:nvPr/>
+        </p:nvSpPr>
+        <p:spPr>
+          <a:xfrm>
+            <a:off x="9982200" y="3248863"/>
+            <a:ext cx="890016" cy="301752"/>
+          </a:xfrm>
+          <a:prstGeom prst="roundRect">
+            <a:avLst>
+              <a:gd name="adj" fmla="val 24242"/>
+            </a:avLst>
+          </a:prstGeom>
+          <a:solidFill>
+            <a:srgbClr val="6A4CA3"/>
+          </a:solidFill>
+          <a:ln w="12700">
+            <a:solidFill>
+              <a:srgbClr val="6A4CA3"/>
+            </a:solidFill>
+            <a:prstDash val="solid"/>
+          </a:ln>
+        </p:spPr>
+      </p:sp>
+      <p:sp>
+        <p:nvSpPr>
+          <p:cNvPr id="22" name="Text 20"/>
+          <p:cNvSpPr/>
+          <p:nvPr/>
+        </p:nvSpPr>
+        <p:spPr>
+          <a:xfrm>
+            <a:off x="10018776" y="3322015"/>
+            <a:ext cx="816864" cy="146304"/>
+          </a:xfrm>
+          <a:prstGeom prst="rect">
+            <a:avLst/>
+          </a:prstGeom>
+          <a:noFill/>
+          <a:ln/>
+        </p:spPr>
+        <p:txBody>
+          <a:bodyPr wrap="square" lIns="0" tIns="0" rIns="0" bIns="0" rtlCol="0" anchor="ctr">
+            <a:normAutofit/>
+          </a:bodyPr>
+          <a:lstStyle/>
+          <a:p>
+            <a:pPr algn="ctr" indent="0" marL="0">
+              <a:buNone/>
+            </a:pPr>
+            <a:r>
+              <a:rPr lang="en-US" sz="880" b="1" dirty="0">
+                <a:solidFill>
+                  <a:srgbClr val="FFFFFF"/>
+                </a:solidFill>
+                <a:latin typeface="Aptos" pitchFamily="34" charset="0"/>
+                <a:ea typeface="Aptos" pitchFamily="34" charset="-122"/>
+                <a:cs typeface="Aptos" pitchFamily="34" charset="-120"/>
+              </a:rPr>
+              <a:t>Oversee</a:t>
+            </a:r>
+            <a:endParaRPr lang="en-US" sz="880" dirty="0"/>
+          </a:p>
+        </p:txBody>
+      </p:sp>
+      <p:sp>
+        <p:nvSpPr>
+          <p:cNvPr id="23" name="Text 21"/>
+          <p:cNvSpPr/>
+          <p:nvPr/>
+        </p:nvSpPr>
+        <p:spPr>
+          <a:xfrm>
+            <a:off x="7854696" y="3742639"/>
+            <a:ext cx="3035808" cy="158191"/>
+          </a:xfrm>
+          <a:prstGeom prst="rect">
+            <a:avLst/>
+          </a:prstGeom>
+          <a:noFill/>
+          <a:ln/>
+        </p:spPr>
+        <p:txBody>
+          <a:bodyPr wrap="square" lIns="254" tIns="254" rIns="254" bIns="254" rtlCol="0" anchor="t">
+            <a:normAutofit/>
+          </a:bodyPr>
+          <a:lstStyle/>
+          <a:p>
+            <a:pPr indent="0" marL="0">
+              <a:buNone/>
+            </a:pPr>
+            <a:r>
+              <a:rPr lang="en-US" sz="1120" dirty="0">
+                <a:solidFill>
+                  <a:srgbClr val="17364A"/>
+                </a:solidFill>
+                <a:latin typeface="Aptos" pitchFamily="34" charset="0"/>
+                <a:ea typeface="Aptos" pitchFamily="34" charset="-122"/>
+                <a:cs typeface="Aptos" pitchFamily="34" charset="-120"/>
+              </a:rPr>
+              <a:t>A proposed AI use should move through documented review before it becomes an operational workflow.</a:t>
+            </a:r>
+            <a:endParaRPr lang="en-US" sz="1120" dirty="0"/>
+          </a:p>
+        </p:txBody>
+      </p:sp>
+      <p:sp>
+        <p:nvSpPr>
+          <p:cNvPr id="24" name="Shape 22"/>
+          <p:cNvSpPr/>
+          <p:nvPr/>
+        </p:nvSpPr>
+        <p:spPr>
+          <a:xfrm>
+            <a:off x="7635240" y="4184294"/>
+            <a:ext cx="3474720" cy="1466698"/>
+          </a:xfrm>
+          <a:prstGeom prst="roundRect">
+            <a:avLst>
+              <a:gd name="adj" fmla="val 7481"/>
             </a:avLst>
           </a:prstGeom>
           <a:solidFill>
@@ -23184,13 +23832,13 @@
       </p:sp>
       <p:sp>
         <p:nvSpPr>
-          <p:cNvPr id="17" name="Text 15"/>
-          <p:cNvSpPr/>
-          <p:nvPr/>
-        </p:nvSpPr>
-        <p:spPr>
-          <a:xfrm>
-            <a:off x="7799832" y="4645152"/>
+          <p:cNvPr id="25" name="Text 23"/>
+          <p:cNvSpPr/>
+          <p:nvPr/>
+        </p:nvSpPr>
+        <p:spPr>
+          <a:xfrm>
+            <a:off x="7799832" y="4330598"/>
             <a:ext cx="3145536" cy="256032"/>
           </a:xfrm>
           <a:prstGeom prst="rect">
@@ -23223,14 +23871,14 @@
       </p:sp>
       <p:sp>
         <p:nvSpPr>
-          <p:cNvPr id="18" name="Text 16"/>
-          <p:cNvSpPr/>
-          <p:nvPr/>
-        </p:nvSpPr>
-        <p:spPr>
-          <a:xfrm>
-            <a:off x="7799832" y="4974336"/>
-            <a:ext cx="3145536" cy="576072"/>
+          <p:cNvPr id="26" name="Text 24"/>
+          <p:cNvSpPr/>
+          <p:nvPr/>
+        </p:nvSpPr>
+        <p:spPr>
+          <a:xfrm>
+            <a:off x="7799832" y="4659782"/>
+            <a:ext cx="3145536" cy="899770"/>
           </a:xfrm>
           <a:prstGeom prst="rect">
             <a:avLst/>
@@ -23256,7 +23904,7 @@
                 <a:ea typeface="Aptos" pitchFamily="34" charset="-122"/>
                 <a:cs typeface="Aptos" pitchFamily="34" charset="-120"/>
               </a:rPr>
-              <a:t>Translate this concept into clear decision rights, review steps, documentation expectations, and escalation paths before.</a:t>
+              <a:t>Translate this concept into clear decision rights, review steps, documentation expectations, and escalation paths before an AI-supported workflow is approved.</a:t>
             </a:r>
             <a:endParaRPr lang="en-US" sz="1320" dirty="0"/>
           </a:p>
@@ -23625,11 +24273,11 @@
         <p:spPr>
           <a:xfrm>
             <a:off x="7635240" y="1325880"/>
-            <a:ext cx="3474720" cy="1325880"/>
+            <a:ext cx="3474720" cy="1255471"/>
           </a:xfrm>
           <a:prstGeom prst="roundRect">
             <a:avLst>
-              <a:gd name="adj" fmla="val 8276"/>
+              <a:gd name="adj" fmla="val 8740"/>
             </a:avLst>
           </a:prstGeom>
           <a:solidFill>
@@ -23691,7 +24339,7 @@
         <p:spPr>
           <a:xfrm>
             <a:off x="7799832" y="1801368"/>
-            <a:ext cx="3145536" cy="758952"/>
+            <a:ext cx="3145536" cy="688543"/>
           </a:xfrm>
           <a:prstGeom prst="rect">
             <a:avLst/>
@@ -23731,12 +24379,12 @@
         </p:nvSpPr>
         <p:spPr>
           <a:xfrm>
-            <a:off x="7635240" y="2788920"/>
-            <a:ext cx="3474720" cy="1536192"/>
+            <a:off x="7635240" y="2718511"/>
+            <a:ext cx="3474720" cy="1328623"/>
           </a:xfrm>
           <a:prstGeom prst="roundRect">
             <a:avLst>
-              <a:gd name="adj" fmla="val 7143"/>
+              <a:gd name="adj" fmla="val 8259"/>
             </a:avLst>
           </a:prstGeom>
           <a:solidFill>
@@ -23758,7 +24406,7 @@
         </p:nvSpPr>
         <p:spPr>
           <a:xfrm>
-            <a:off x="7799832" y="2935224"/>
+            <a:off x="7799832" y="2864815"/>
             <a:ext cx="3145536" cy="256032"/>
           </a:xfrm>
           <a:prstGeom prst="rect">
@@ -23797,8 +24445,8 @@
         </p:nvSpPr>
         <p:spPr>
           <a:xfrm>
-            <a:off x="7818120" y="3300984"/>
-            <a:ext cx="3090672" cy="877824"/>
+            <a:off x="7818120" y="3230575"/>
+            <a:ext cx="3090672" cy="670255"/>
           </a:xfrm>
           <a:prstGeom prst="rect">
             <a:avLst/>
@@ -23872,12 +24520,12 @@
         </p:nvSpPr>
         <p:spPr>
           <a:xfrm>
-            <a:off x="7635240" y="4498848"/>
-            <a:ext cx="3474720" cy="1143000"/>
+            <a:off x="7635240" y="4184294"/>
+            <a:ext cx="3474720" cy="1466698"/>
           </a:xfrm>
           <a:prstGeom prst="roundRect">
             <a:avLst>
-              <a:gd name="adj" fmla="val 9600"/>
+              <a:gd name="adj" fmla="val 7481"/>
             </a:avLst>
           </a:prstGeom>
           <a:solidFill>
@@ -23899,7 +24547,7 @@
         </p:nvSpPr>
         <p:spPr>
           <a:xfrm>
-            <a:off x="7799832" y="4645152"/>
+            <a:off x="7799832" y="4330598"/>
             <a:ext cx="3145536" cy="256032"/>
           </a:xfrm>
           <a:prstGeom prst="rect">
@@ -23938,8 +24586,8 @@
         </p:nvSpPr>
         <p:spPr>
           <a:xfrm>
-            <a:off x="7799832" y="4974336"/>
-            <a:ext cx="3145536" cy="576072"/>
+            <a:off x="7799832" y="4659782"/>
+            <a:ext cx="3145536" cy="899770"/>
           </a:xfrm>
           <a:prstGeom prst="rect">
             <a:avLst/>
@@ -23965,7 +24613,7 @@
                 <a:ea typeface="Aptos" pitchFamily="34" charset="-122"/>
                 <a:cs typeface="Aptos" pitchFamily="34" charset="-120"/>
               </a:rPr>
-              <a:t>Translate this concept into clear decision rights, review steps, documentation expectations, and escalation paths before.</a:t>
+              <a:t>Translate this concept into clear decision rights, review steps, documentation expectations, and escalation paths before an AI-supported workflow is approved.</a:t>
             </a:r>
             <a:endParaRPr lang="en-US" sz="1320" dirty="0"/>
           </a:p>
@@ -24334,11 +24982,11 @@
         <p:spPr>
           <a:xfrm>
             <a:off x="7635240" y="1325880"/>
-            <a:ext cx="3474720" cy="1325880"/>
+            <a:ext cx="3474720" cy="1255471"/>
           </a:xfrm>
           <a:prstGeom prst="roundRect">
             <a:avLst>
-              <a:gd name="adj" fmla="val 8276"/>
+              <a:gd name="adj" fmla="val 8740"/>
             </a:avLst>
           </a:prstGeom>
           <a:solidFill>
@@ -24400,7 +25048,7 @@
         <p:spPr>
           <a:xfrm>
             <a:off x="7799832" y="1801368"/>
-            <a:ext cx="3145536" cy="758952"/>
+            <a:ext cx="3145536" cy="688543"/>
           </a:xfrm>
           <a:prstGeom prst="rect">
             <a:avLst/>
@@ -24440,12 +25088,12 @@
         </p:nvSpPr>
         <p:spPr>
           <a:xfrm>
-            <a:off x="7635240" y="2788920"/>
-            <a:ext cx="3474720" cy="1536192"/>
+            <a:off x="7635240" y="2718511"/>
+            <a:ext cx="3474720" cy="1328623"/>
           </a:xfrm>
           <a:prstGeom prst="roundRect">
             <a:avLst>
-              <a:gd name="adj" fmla="val 7143"/>
+              <a:gd name="adj" fmla="val 8259"/>
             </a:avLst>
           </a:prstGeom>
           <a:solidFill>
@@ -24467,7 +25115,7 @@
         </p:nvSpPr>
         <p:spPr>
           <a:xfrm>
-            <a:off x="7799832" y="2935224"/>
+            <a:off x="7799832" y="2864815"/>
             <a:ext cx="3145536" cy="256032"/>
           </a:xfrm>
           <a:prstGeom prst="rect">
@@ -24506,8 +25154,8 @@
         </p:nvSpPr>
         <p:spPr>
           <a:xfrm>
-            <a:off x="7818120" y="3300984"/>
-            <a:ext cx="3090672" cy="877824"/>
+            <a:off x="7818120" y="3230575"/>
+            <a:ext cx="3090672" cy="670255"/>
           </a:xfrm>
           <a:prstGeom prst="rect">
             <a:avLst/>
@@ -24581,12 +25229,12 @@
         </p:nvSpPr>
         <p:spPr>
           <a:xfrm>
-            <a:off x="7635240" y="4498848"/>
-            <a:ext cx="3474720" cy="1143000"/>
+            <a:off x="7635240" y="4184294"/>
+            <a:ext cx="3474720" cy="1466698"/>
           </a:xfrm>
           <a:prstGeom prst="roundRect">
             <a:avLst>
-              <a:gd name="adj" fmla="val 9600"/>
+              <a:gd name="adj" fmla="val 7481"/>
             </a:avLst>
           </a:prstGeom>
           <a:solidFill>
@@ -24608,7 +25256,7 @@
         </p:nvSpPr>
         <p:spPr>
           <a:xfrm>
-            <a:off x="7799832" y="4645152"/>
+            <a:off x="7799832" y="4330598"/>
             <a:ext cx="3145536" cy="256032"/>
           </a:xfrm>
           <a:prstGeom prst="rect">
@@ -24647,8 +25295,8 @@
         </p:nvSpPr>
         <p:spPr>
           <a:xfrm>
-            <a:off x="7799832" y="4974336"/>
-            <a:ext cx="3145536" cy="576072"/>
+            <a:off x="7799832" y="4659782"/>
+            <a:ext cx="3145536" cy="899770"/>
           </a:xfrm>
           <a:prstGeom prst="rect">
             <a:avLst/>
@@ -24674,7 +25322,7 @@
                 <a:ea typeface="Aptos" pitchFamily="34" charset="-122"/>
                 <a:cs typeface="Aptos" pitchFamily="34" charset="-120"/>
               </a:rPr>
-              <a:t>Translate this concept into clear decision rights, review steps, documentation expectations, and escalation paths before.</a:t>
+              <a:t>Translate this concept into clear decision rights, review steps, documentation expectations, and escalation paths before an AI-supported workflow is approved.</a:t>
             </a:r>
             <a:endParaRPr lang="en-US" sz="1320" dirty="0"/>
           </a:p>

--- a/downloads/presentations/modules/gov-100.pptx
+++ b/downloads/presentations/modules/gov-100.pptx
@@ -18622,7 +18622,7 @@
                 <a:ea typeface="Aptos" pitchFamily="34" charset="-122"/>
                 <a:cs typeface="Aptos" pitchFamily="34" charset="-120"/>
               </a:rPr>
-              <a:t>• 1. Which statement best describes AI governance in a public health agency?</a:t>
+              <a:t>1. Which statement best describes AI governance in a public health agency?</a:t>
             </a:r>
             <a:endParaRPr lang="en-US" sz="1920" dirty="0"/>
           </a:p>
@@ -18639,7 +18639,7 @@
                 <a:ea typeface="Aptos" pitchFamily="34" charset="-122"/>
                 <a:cs typeface="Aptos" pitchFamily="34" charset="-120"/>
               </a:rPr>
-              <a:t>• 2. Which AI use should most clearly be escalated for formal review before.</a:t>
+              <a:t>2. Which AI use should most clearly be escalated for formal review before.</a:t>
             </a:r>
             <a:endParaRPr lang="en-US" sz="1920" dirty="0"/>
           </a:p>
@@ -18656,7 +18656,7 @@
                 <a:ea typeface="Aptos" pitchFamily="34" charset="-122"/>
                 <a:cs typeface="Aptos" pitchFamily="34" charset="-120"/>
               </a:rPr>
-              <a:t>• 3. What is the most important reason to define human review in an.</a:t>
+              <a:t>3. What is the most important reason to define human review in an.</a:t>
             </a:r>
             <a:endParaRPr lang="en-US" sz="1920" dirty="0"/>
           </a:p>
@@ -18763,7 +18763,7 @@
                 <a:ea typeface="Aptos" pitchFamily="34" charset="-122"/>
                 <a:cs typeface="Aptos" pitchFamily="34" charset="-120"/>
               </a:rPr>
-              <a:t>1. Which statement best describes AI governance in a public health agency?</a:t>
+              <a:t>Which statement best describes AI governance in a public health agency?</a:t>
             </a:r>
             <a:endParaRPr lang="en-US" sz="1220" dirty="0"/>
           </a:p>
@@ -18870,41 +18870,7 @@
                 <a:ea typeface="Aptos" pitchFamily="34" charset="-122"/>
                 <a:cs typeface="Aptos" pitchFamily="34" charset="-120"/>
               </a:rPr>
-              <a:t>1.</a:t>
-            </a:r>
-            <a:endParaRPr lang="en-US" sz="1140" dirty="0"/>
-          </a:p>
-          <a:p>
-            <a:pPr indent="0" marL="0">
-              <a:buNone/>
-            </a:pPr>
-            <a:r>
-              <a:rPr lang="en-US" sz="1140" dirty="0">
-                <a:solidFill>
-                  <a:srgbClr val="17364A"/>
-                </a:solidFill>
-                <a:latin typeface="Aptos" pitchFamily="34" charset="0"/>
-                <a:ea typeface="Aptos" pitchFamily="34" charset="-122"/>
-                <a:cs typeface="Aptos" pitchFamily="34" charset="-120"/>
-              </a:rPr>
               <a:t>Which statement best describes AI governance in a.</a:t>
-            </a:r>
-            <a:endParaRPr lang="en-US" sz="1140" dirty="0"/>
-          </a:p>
-          <a:p>
-            <a:pPr indent="0" marL="0">
-              <a:buNone/>
-            </a:pPr>
-            <a:r>
-              <a:rPr lang="en-US" sz="1140" dirty="0">
-                <a:solidFill>
-                  <a:srgbClr val="17364A"/>
-                </a:solidFill>
-                <a:latin typeface="Aptos" pitchFamily="34" charset="0"/>
-                <a:ea typeface="Aptos" pitchFamily="34" charset="-122"/>
-                <a:cs typeface="Aptos" pitchFamily="34" charset="-120"/>
-              </a:rPr>
-              <a:t>2.</a:t>
             </a:r>
             <a:endParaRPr lang="en-US" sz="1140" dirty="0"/>
           </a:p>
@@ -20232,7 +20198,7 @@
                 <a:ea typeface="Aptos" pitchFamily="34" charset="-122"/>
                 <a:cs typeface="Aptos" pitchFamily="34" charset="-120"/>
               </a:rPr>
-              <a:t>2023.:.</a:t>
+              <a:t>:.</a:t>
             </a:r>
             <a:endParaRPr lang="en-US" sz="1140" dirty="0"/>
           </a:p>
@@ -20907,7 +20873,7 @@
                 <a:ea typeface="Aptos" pitchFamily="34" charset="-122"/>
                 <a:cs typeface="Aptos" pitchFamily="34" charset="-120"/>
               </a:rPr>
-              <a:t>2023.:.</a:t>
+              <a:t>:.</a:t>
             </a:r>
             <a:endParaRPr lang="en-US" sz="1140" dirty="0"/>
           </a:p>

--- a/downloads/presentations/modules/gov-100.pptx
+++ b/downloads/presentations/modules/gov-100.pptx
@@ -1536,7 +1536,7 @@
               <a:t>Module Context
 Level: introductory
 Primary track: Governance and Security Track
-Appears in tracks: shared-foundational, governance-security
+Appears in tracks: governance-security, shared-foundational
 AI governance is the set of people, policies, processes, decision rights, documentation practices, and oversight activities that help a public health agency use AI responsibly. Governance does not mean that every staff member must become an AI expert, and it does not mean that every AI idea must be blocked by a committee. Good governance helps an agency decide what AI uses are appropriate, what review is needed, what data may be used, who is accountable, and how staff should respond when something goes wrong. This introductory module is designed for all public health staff, including program staff, technical staff, supervisors, epidemiologists, informaticians, communications staff, policy staff, analysts, and operational leaders. Public health AI governance affects daily work because AI may be used to draft messages, summarize case information, triage service requests, review grants, analyze surveillance signals, support dashboards, write code, translate materials, prioritize outreach, or assist with procurement and contract monitoring. Staff do not need to own the governance process to participate in it. They need to know how to recognize AI use, follow agency rules, document important decisions, protect data, escalate concerns, and keep humans accountable for public health judgment. The module introduces the basic purpose of AI governance, the difference between governance and project management, the roles that commonly participate in governance, and the minimum questions every AI use should answer before it moves forward. Learners will practice applying governance thinking to a realistic public health workflow and will produce a simple governance intake and escalation note that can be adapted for their agency.</a:t>
             </a:r>
             <a:endParaRPr lang="en-US" dirty="0"/>
